--- a/slides/9_time_series.pptx
+++ b/slides/9_time_series.pptx
@@ -7,44 +7,43 @@
     <p:sldMasterId id="2147483672" r:id="rId3"/>
   </p:sldMasterIdLst>
   <p:notesMasterIdLst>
-    <p:notesMasterId r:id="rId39"/>
+    <p:notesMasterId r:id="rId38"/>
   </p:notesMasterIdLst>
   <p:sldIdLst>
     <p:sldId id="256" r:id="rId4"/>
-    <p:sldId id="2076137263" r:id="rId5"/>
-    <p:sldId id="2076137264" r:id="rId6"/>
-    <p:sldId id="2076137265" r:id="rId7"/>
-    <p:sldId id="2076137266" r:id="rId8"/>
-    <p:sldId id="265" r:id="rId9"/>
-    <p:sldId id="2076137267" r:id="rId10"/>
-    <p:sldId id="2076137268" r:id="rId11"/>
-    <p:sldId id="259" r:id="rId12"/>
-    <p:sldId id="2076137269" r:id="rId13"/>
-    <p:sldId id="258" r:id="rId14"/>
-    <p:sldId id="2076137270" r:id="rId15"/>
-    <p:sldId id="2076137271" r:id="rId16"/>
-    <p:sldId id="2076137272" r:id="rId17"/>
-    <p:sldId id="2076137273" r:id="rId18"/>
-    <p:sldId id="2076137274" r:id="rId19"/>
-    <p:sldId id="2076137259" r:id="rId20"/>
-    <p:sldId id="2076137275" r:id="rId21"/>
-    <p:sldId id="2076137256" r:id="rId22"/>
-    <p:sldId id="2076137276" r:id="rId23"/>
-    <p:sldId id="681" r:id="rId24"/>
-    <p:sldId id="262" r:id="rId25"/>
-    <p:sldId id="334" r:id="rId26"/>
-    <p:sldId id="2076137252" r:id="rId27"/>
-    <p:sldId id="2076137243" r:id="rId28"/>
-    <p:sldId id="671" r:id="rId29"/>
-    <p:sldId id="2076137278" r:id="rId30"/>
-    <p:sldId id="299" r:id="rId31"/>
-    <p:sldId id="2076137279" r:id="rId32"/>
-    <p:sldId id="261" r:id="rId33"/>
-    <p:sldId id="268" r:id="rId34"/>
-    <p:sldId id="2076137280" r:id="rId35"/>
-    <p:sldId id="276" r:id="rId36"/>
-    <p:sldId id="277" r:id="rId37"/>
-    <p:sldId id="267" r:id="rId38"/>
+    <p:sldId id="2076137264" r:id="rId5"/>
+    <p:sldId id="2076137265" r:id="rId6"/>
+    <p:sldId id="2076137266" r:id="rId7"/>
+    <p:sldId id="265" r:id="rId8"/>
+    <p:sldId id="2076137267" r:id="rId9"/>
+    <p:sldId id="2076137268" r:id="rId10"/>
+    <p:sldId id="259" r:id="rId11"/>
+    <p:sldId id="2076137269" r:id="rId12"/>
+    <p:sldId id="258" r:id="rId13"/>
+    <p:sldId id="2076137270" r:id="rId14"/>
+    <p:sldId id="2076137271" r:id="rId15"/>
+    <p:sldId id="2076137272" r:id="rId16"/>
+    <p:sldId id="2076137273" r:id="rId17"/>
+    <p:sldId id="2076137274" r:id="rId18"/>
+    <p:sldId id="2076137259" r:id="rId19"/>
+    <p:sldId id="2076137275" r:id="rId20"/>
+    <p:sldId id="2076137256" r:id="rId21"/>
+    <p:sldId id="2076137276" r:id="rId22"/>
+    <p:sldId id="681" r:id="rId23"/>
+    <p:sldId id="262" r:id="rId24"/>
+    <p:sldId id="334" r:id="rId25"/>
+    <p:sldId id="2076137252" r:id="rId26"/>
+    <p:sldId id="2076137243" r:id="rId27"/>
+    <p:sldId id="671" r:id="rId28"/>
+    <p:sldId id="2076137278" r:id="rId29"/>
+    <p:sldId id="299" r:id="rId30"/>
+    <p:sldId id="2076137279" r:id="rId31"/>
+    <p:sldId id="261" r:id="rId32"/>
+    <p:sldId id="268" r:id="rId33"/>
+    <p:sldId id="2076137280" r:id="rId34"/>
+    <p:sldId id="276" r:id="rId35"/>
+    <p:sldId id="277" r:id="rId36"/>
+    <p:sldId id="267" r:id="rId37"/>
   </p:sldIdLst>
   <p:sldSz cx="12192000" cy="6858000"/>
   <p:notesSz cx="6858000" cy="9144000"/>
@@ -3917,7 +3916,7 @@
           <a:p>
             <a:fld id="{7B97FCB6-4C2D-C04F-941C-940A5CA28665}" type="datetimeFigureOut">
               <a:rPr lang="en-DE" smtClean="0"/>
-              <a:t>1/11/26</a:t>
+              <a:t>4/17/26</a:t>
             </a:fld>
             <a:endParaRPr lang="en-DE"/>
           </a:p>
@@ -4334,7 +4333,7 @@
           <a:p>
             <a:fld id="{C549D344-DF28-3942-A533-7BAE51F54729}" type="datetime1">
               <a:rPr lang="de-DE" smtClean="0"/>
-              <a:t>11.01.26</a:t>
+              <a:t>17.04.26</a:t>
             </a:fld>
             <a:endParaRPr lang="en-DE"/>
           </a:p>
@@ -4534,7 +4533,7 @@
           <a:p>
             <a:fld id="{B086E2CF-DFBF-D04E-B5DA-5682BEFB4DDF}" type="datetime1">
               <a:rPr lang="de-DE" smtClean="0"/>
-              <a:t>11.01.26</a:t>
+              <a:t>17.04.26</a:t>
             </a:fld>
             <a:endParaRPr lang="en-DE"/>
           </a:p>
@@ -4744,7 +4743,7 @@
           <a:p>
             <a:fld id="{535E2105-910D-C747-9EAC-FAEE1AE97756}" type="datetime1">
               <a:rPr lang="de-DE" smtClean="0"/>
-              <a:t>11.01.26</a:t>
+              <a:t>17.04.26</a:t>
             </a:fld>
             <a:endParaRPr lang="en-DE"/>
           </a:p>
@@ -4966,7 +4965,7 @@
           <a:p>
             <a:fld id="{77CA1D5B-86DB-41C7-A296-641DCC7DEA71}" type="datetimeFigureOut">
               <a:rPr lang="en-GB" smtClean="0"/>
-              <a:t>11/01/2026</a:t>
+              <a:t>17/04/2026</a:t>
             </a:fld>
             <a:endParaRPr lang="en-GB"/>
           </a:p>
@@ -5166,7 +5165,7 @@
           <a:p>
             <a:fld id="{77CA1D5B-86DB-41C7-A296-641DCC7DEA71}" type="datetimeFigureOut">
               <a:rPr lang="en-GB" smtClean="0"/>
-              <a:t>11/01/2026</a:t>
+              <a:t>17/04/2026</a:t>
             </a:fld>
             <a:endParaRPr lang="en-GB"/>
           </a:p>
@@ -5442,7 +5441,7 @@
           <a:p>
             <a:fld id="{77CA1D5B-86DB-41C7-A296-641DCC7DEA71}" type="datetimeFigureOut">
               <a:rPr lang="en-GB" smtClean="0"/>
-              <a:t>11/01/2026</a:t>
+              <a:t>17/04/2026</a:t>
             </a:fld>
             <a:endParaRPr lang="en-GB"/>
           </a:p>
@@ -5710,7 +5709,7 @@
           <a:p>
             <a:fld id="{77CA1D5B-86DB-41C7-A296-641DCC7DEA71}" type="datetimeFigureOut">
               <a:rPr lang="en-GB" smtClean="0"/>
-              <a:t>11/01/2026</a:t>
+              <a:t>17/04/2026</a:t>
             </a:fld>
             <a:endParaRPr lang="en-GB"/>
           </a:p>
@@ -6125,7 +6124,7 @@
           <a:p>
             <a:fld id="{77CA1D5B-86DB-41C7-A296-641DCC7DEA71}" type="datetimeFigureOut">
               <a:rPr lang="en-GB" smtClean="0"/>
-              <a:t>11/01/2026</a:t>
+              <a:t>17/04/2026</a:t>
             </a:fld>
             <a:endParaRPr lang="en-GB"/>
           </a:p>
@@ -6267,7 +6266,7 @@
           <a:p>
             <a:fld id="{77CA1D5B-86DB-41C7-A296-641DCC7DEA71}" type="datetimeFigureOut">
               <a:rPr lang="en-GB" smtClean="0"/>
-              <a:t>11/01/2026</a:t>
+              <a:t>17/04/2026</a:t>
             </a:fld>
             <a:endParaRPr lang="en-GB"/>
           </a:p>
@@ -6380,7 +6379,7 @@
           <a:p>
             <a:fld id="{77CA1D5B-86DB-41C7-A296-641DCC7DEA71}" type="datetimeFigureOut">
               <a:rPr lang="en-GB" smtClean="0"/>
-              <a:t>11/01/2026</a:t>
+              <a:t>17/04/2026</a:t>
             </a:fld>
             <a:endParaRPr lang="en-GB"/>
           </a:p>
@@ -6693,7 +6692,7 @@
           <a:p>
             <a:fld id="{77CA1D5B-86DB-41C7-A296-641DCC7DEA71}" type="datetimeFigureOut">
               <a:rPr lang="en-GB" smtClean="0"/>
-              <a:t>11/01/2026</a:t>
+              <a:t>17/04/2026</a:t>
             </a:fld>
             <a:endParaRPr lang="en-GB"/>
           </a:p>
@@ -6893,7 +6892,7 @@
           <a:p>
             <a:fld id="{0D5BD470-EF8A-9248-A0C9-F868A9D8F50A}" type="datetime1">
               <a:rPr lang="de-DE" smtClean="0"/>
-              <a:t>11.01.26</a:t>
+              <a:t>17.04.26</a:t>
             </a:fld>
             <a:endParaRPr lang="en-DE"/>
           </a:p>
@@ -7182,7 +7181,7 @@
           <a:p>
             <a:fld id="{77CA1D5B-86DB-41C7-A296-641DCC7DEA71}" type="datetimeFigureOut">
               <a:rPr lang="en-GB" smtClean="0"/>
-              <a:t>11/01/2026</a:t>
+              <a:t>17/04/2026</a:t>
             </a:fld>
             <a:endParaRPr lang="en-GB"/>
           </a:p>
@@ -7382,7 +7381,7 @@
           <a:p>
             <a:fld id="{77CA1D5B-86DB-41C7-A296-641DCC7DEA71}" type="datetimeFigureOut">
               <a:rPr lang="en-GB" smtClean="0"/>
-              <a:t>11/01/2026</a:t>
+              <a:t>17/04/2026</a:t>
             </a:fld>
             <a:endParaRPr lang="en-GB"/>
           </a:p>
@@ -7592,7 +7591,7 @@
           <a:p>
             <a:fld id="{77CA1D5B-86DB-41C7-A296-641DCC7DEA71}" type="datetimeFigureOut">
               <a:rPr lang="en-GB" smtClean="0"/>
-              <a:t>11/01/2026</a:t>
+              <a:t>17/04/2026</a:t>
             </a:fld>
             <a:endParaRPr lang="en-GB"/>
           </a:p>
@@ -7814,7 +7813,7 @@
           <a:p>
             <a:fld id="{7128456D-5ACD-4673-BCE9-52505EC32CEF}" type="datetime1">
               <a:rPr lang="en-GB" smtClean="0"/>
-              <a:t>11/01/2026</a:t>
+              <a:t>17/04/2026</a:t>
             </a:fld>
             <a:endParaRPr lang="en-GB"/>
           </a:p>
@@ -8014,7 +8013,7 @@
           <a:p>
             <a:fld id="{0B763083-041D-491F-A9FE-D51D99E0B41E}" type="datetime1">
               <a:rPr lang="en-GB" smtClean="0"/>
-              <a:t>11/01/2026</a:t>
+              <a:t>17/04/2026</a:t>
             </a:fld>
             <a:endParaRPr lang="en-GB"/>
           </a:p>
@@ -8290,7 +8289,7 @@
           <a:p>
             <a:fld id="{409455E6-A1CA-4CB6-9964-88D5086DA5CA}" type="datetime1">
               <a:rPr lang="en-GB" smtClean="0"/>
-              <a:t>11/01/2026</a:t>
+              <a:t>17/04/2026</a:t>
             </a:fld>
             <a:endParaRPr lang="en-GB"/>
           </a:p>
@@ -8558,7 +8557,7 @@
           <a:p>
             <a:fld id="{FAD82E38-24C1-4A8F-B916-1E714FC129DD}" type="datetime1">
               <a:rPr lang="en-GB" smtClean="0"/>
-              <a:t>11/01/2026</a:t>
+              <a:t>17/04/2026</a:t>
             </a:fld>
             <a:endParaRPr lang="en-GB"/>
           </a:p>
@@ -8973,7 +8972,7 @@
           <a:p>
             <a:fld id="{BC17BCDC-BAA6-44B5-B642-6F28D623ABB1}" type="datetime1">
               <a:rPr lang="en-GB" smtClean="0"/>
-              <a:t>11/01/2026</a:t>
+              <a:t>17/04/2026</a:t>
             </a:fld>
             <a:endParaRPr lang="en-GB"/>
           </a:p>
@@ -9115,7 +9114,7 @@
           <a:p>
             <a:fld id="{01D4BEC3-2CF9-4B19-A0A5-E70A0675B677}" type="datetime1">
               <a:rPr lang="en-GB" smtClean="0"/>
-              <a:t>11/01/2026</a:t>
+              <a:t>17/04/2026</a:t>
             </a:fld>
             <a:endParaRPr lang="en-GB"/>
           </a:p>
@@ -9228,7 +9227,7 @@
           <a:p>
             <a:fld id="{98E28BFD-B06D-4A45-8453-724AC7BA29C5}" type="datetime1">
               <a:rPr lang="en-GB" smtClean="0"/>
-              <a:t>11/01/2026</a:t>
+              <a:t>17/04/2026</a:t>
             </a:fld>
             <a:endParaRPr lang="en-GB"/>
           </a:p>
@@ -9504,7 +9503,7 @@
           <a:p>
             <a:fld id="{7B12F34F-4BA0-4C4C-95F7-3AE797B9DBCA}" type="datetime1">
               <a:rPr lang="de-DE" smtClean="0"/>
-              <a:t>11.01.26</a:t>
+              <a:t>17.04.26</a:t>
             </a:fld>
             <a:endParaRPr lang="en-DE"/>
           </a:p>
@@ -9817,7 +9816,7 @@
           <a:p>
             <a:fld id="{A14D99B0-2926-4194-B668-6A0D6123824C}" type="datetime1">
               <a:rPr lang="en-GB" smtClean="0"/>
-              <a:t>11/01/2026</a:t>
+              <a:t>17/04/2026</a:t>
             </a:fld>
             <a:endParaRPr lang="en-GB"/>
           </a:p>
@@ -10106,7 +10105,7 @@
           <a:p>
             <a:fld id="{29F03426-21FD-40F4-9F0B-AD19F2317DCA}" type="datetime1">
               <a:rPr lang="en-GB" smtClean="0"/>
-              <a:t>11/01/2026</a:t>
+              <a:t>17/04/2026</a:t>
             </a:fld>
             <a:endParaRPr lang="en-GB"/>
           </a:p>
@@ -10306,7 +10305,7 @@
           <a:p>
             <a:fld id="{D99A2639-5270-4811-807B-89D4AE95E7ED}" type="datetime1">
               <a:rPr lang="en-GB" smtClean="0"/>
-              <a:t>11/01/2026</a:t>
+              <a:t>17/04/2026</a:t>
             </a:fld>
             <a:endParaRPr lang="en-GB"/>
           </a:p>
@@ -10516,7 +10515,7 @@
           <a:p>
             <a:fld id="{B552976C-D408-4E27-8D02-D7795F6D8A01}" type="datetime1">
               <a:rPr lang="en-GB" smtClean="0"/>
-              <a:t>11/01/2026</a:t>
+              <a:t>17/04/2026</a:t>
             </a:fld>
             <a:endParaRPr lang="en-GB"/>
           </a:p>
@@ -10784,7 +10783,7 @@
           <a:p>
             <a:fld id="{C522E529-A223-9F44-93E9-FAF3838F58DD}" type="datetime1">
               <a:rPr lang="de-DE" smtClean="0"/>
-              <a:t>11.01.26</a:t>
+              <a:t>17.04.26</a:t>
             </a:fld>
             <a:endParaRPr lang="en-DE"/>
           </a:p>
@@ -11199,7 +11198,7 @@
           <a:p>
             <a:fld id="{4DF85873-DFC3-7147-8CF2-B93516293BD0}" type="datetime1">
               <a:rPr lang="de-DE" smtClean="0"/>
-              <a:t>11.01.26</a:t>
+              <a:t>17.04.26</a:t>
             </a:fld>
             <a:endParaRPr lang="en-DE"/>
           </a:p>
@@ -11341,7 +11340,7 @@
           <a:p>
             <a:fld id="{9FC8FD75-28F4-1141-976A-ED0F1E51F5FE}" type="datetime1">
               <a:rPr lang="de-DE" smtClean="0"/>
-              <a:t>11.01.26</a:t>
+              <a:t>17.04.26</a:t>
             </a:fld>
             <a:endParaRPr lang="en-DE"/>
           </a:p>
@@ -11454,7 +11453,7 @@
           <a:p>
             <a:fld id="{A5CF1818-702C-9249-923B-5C9832600DF4}" type="datetime1">
               <a:rPr lang="de-DE" smtClean="0"/>
-              <a:t>11.01.26</a:t>
+              <a:t>17.04.26</a:t>
             </a:fld>
             <a:endParaRPr lang="en-DE"/>
           </a:p>
@@ -11767,7 +11766,7 @@
           <a:p>
             <a:fld id="{70703230-1F3D-6648-88BD-E31F8313AC65}" type="datetime1">
               <a:rPr lang="de-DE" smtClean="0"/>
-              <a:t>11.01.26</a:t>
+              <a:t>17.04.26</a:t>
             </a:fld>
             <a:endParaRPr lang="en-DE"/>
           </a:p>
@@ -12056,7 +12055,7 @@
           <a:p>
             <a:fld id="{EE1F903E-BE95-4947-BFB2-6309249837BB}" type="datetime1">
               <a:rPr lang="de-DE" smtClean="0"/>
-              <a:t>11.01.26</a:t>
+              <a:t>17.04.26</a:t>
             </a:fld>
             <a:endParaRPr lang="en-DE"/>
           </a:p>
@@ -12299,7 +12298,7 @@
           <a:p>
             <a:fld id="{18698627-0DA6-6B48-8AB9-BEA12C38C21E}" type="datetime1">
               <a:rPr lang="de-DE" smtClean="0"/>
-              <a:t>11.01.26</a:t>
+              <a:t>17.04.26</a:t>
             </a:fld>
             <a:endParaRPr lang="en-DE"/>
           </a:p>
@@ -12870,7 +12869,7 @@
           <a:p>
             <a:fld id="{77CA1D5B-86DB-41C7-A296-641DCC7DEA71}" type="datetimeFigureOut">
               <a:rPr lang="en-GB" smtClean="0"/>
-              <a:t>11/01/2026</a:t>
+              <a:t>17/04/2026</a:t>
             </a:fld>
             <a:endParaRPr lang="en-GB"/>
           </a:p>
@@ -13440,7 +13439,7 @@
           <a:p>
             <a:fld id="{0369896D-5D36-4D31-A0CE-0C2BFB17B225}" type="datetime1">
               <a:rPr lang="en-GB" smtClean="0"/>
-              <a:t>11/01/2026</a:t>
+              <a:t>17/04/2026</a:t>
             </a:fld>
             <a:endParaRPr lang="en-GB"/>
           </a:p>
@@ -13948,118 +13947,6 @@
       </p:grpSpPr>
       <p:sp>
         <p:nvSpPr>
-          <p:cNvPr id="2" name="Titel 1">
-            <a:extLst>
-              <a:ext uri="{FF2B5EF4-FFF2-40B4-BE49-F238E27FC236}">
-                <a16:creationId xmlns:a16="http://schemas.microsoft.com/office/drawing/2014/main" id="{54637D7C-A7CD-210C-B823-50AFB58C8E5D}"/>
-              </a:ext>
-            </a:extLst>
-          </p:cNvPr>
-          <p:cNvSpPr>
-            <a:spLocks noGrp="1"/>
-          </p:cNvSpPr>
-          <p:nvPr>
-            <p:ph type="title"/>
-          </p:nvPr>
-        </p:nvSpPr>
-        <p:spPr/>
-        <p:txBody>
-          <a:bodyPr/>
-          <a:lstStyle/>
-          <a:p>
-            <a:r>
-              <a:rPr lang="de-DE" dirty="0"/>
-              <a:t>AR, MA, and ARIMA Models</a:t>
-            </a:r>
-          </a:p>
-        </p:txBody>
-      </p:sp>
-      <p:sp>
-        <p:nvSpPr>
-          <p:cNvPr id="3" name="Inhaltsplatzhalter 2">
-            <a:extLst>
-              <a:ext uri="{FF2B5EF4-FFF2-40B4-BE49-F238E27FC236}">
-                <a16:creationId xmlns:a16="http://schemas.microsoft.com/office/drawing/2014/main" id="{BB7018BF-AC50-D80C-B16C-C0F622FFC468}"/>
-              </a:ext>
-            </a:extLst>
-          </p:cNvPr>
-          <p:cNvSpPr>
-            <a:spLocks noGrp="1"/>
-          </p:cNvSpPr>
-          <p:nvPr>
-            <p:ph idx="1"/>
-          </p:nvPr>
-        </p:nvSpPr>
-        <p:spPr/>
-        <p:txBody>
-          <a:bodyPr/>
-          <a:lstStyle/>
-          <a:p>
-            <a:endParaRPr lang="de-DE"/>
-          </a:p>
-        </p:txBody>
-      </p:sp>
-      <p:sp>
-        <p:nvSpPr>
-          <p:cNvPr id="4" name="Foliennummernplatzhalter 3">
-            <a:extLst>
-              <a:ext uri="{FF2B5EF4-FFF2-40B4-BE49-F238E27FC236}">
-                <a16:creationId xmlns:a16="http://schemas.microsoft.com/office/drawing/2014/main" id="{5239F289-8D36-5BB6-F4B9-4132BA3F6478}"/>
-              </a:ext>
-            </a:extLst>
-          </p:cNvPr>
-          <p:cNvSpPr>
-            <a:spLocks noGrp="1"/>
-          </p:cNvSpPr>
-          <p:nvPr>
-            <p:ph type="sldNum" sz="quarter" idx="12"/>
-          </p:nvPr>
-        </p:nvSpPr>
-        <p:spPr/>
-        <p:txBody>
-          <a:bodyPr/>
-          <a:lstStyle/>
-          <a:p>
-            <a:fld id="{3D4C94FE-FF23-4504-88E9-14D481113291}" type="slidenum">
-              <a:rPr lang="en-GB" smtClean="0"/>
-              <a:t>10</a:t>
-            </a:fld>
-            <a:endParaRPr lang="en-GB"/>
-          </a:p>
-        </p:txBody>
-      </p:sp>
-    </p:spTree>
-    <p:extLst>
-      <p:ext uri="{BB962C8B-B14F-4D97-AF65-F5344CB8AC3E}">
-        <p14:creationId xmlns:p14="http://schemas.microsoft.com/office/powerpoint/2010/main" val="3159295460"/>
-      </p:ext>
-    </p:extLst>
-  </p:cSld>
-  <p:clrMapOvr>
-    <a:masterClrMapping/>
-  </p:clrMapOvr>
-</p:sld>
-</file>
-
-<file path=ppt/slides/slide11.xml><?xml version="1.0" encoding="utf-8"?>
-<p:sld xmlns:a="http://schemas.openxmlformats.org/drawingml/2006/main" xmlns:r="http://schemas.openxmlformats.org/officeDocument/2006/relationships" xmlns:p="http://schemas.openxmlformats.org/presentationml/2006/main">
-  <p:cSld>
-    <p:spTree>
-      <p:nvGrpSpPr>
-        <p:cNvPr id="1" name=""/>
-        <p:cNvGrpSpPr/>
-        <p:nvPr/>
-      </p:nvGrpSpPr>
-      <p:grpSpPr>
-        <a:xfrm>
-          <a:off x="0" y="0"/>
-          <a:ext cx="0" cy="0"/>
-          <a:chOff x="0" y="0"/>
-          <a:chExt cx="0" cy="0"/>
-        </a:xfrm>
-      </p:grpSpPr>
-      <p:sp>
-        <p:nvSpPr>
           <p:cNvPr id="2" name="Title 1">
             <a:extLst>
               <a:ext uri="{FF2B5EF4-FFF2-40B4-BE49-F238E27FC236}">
@@ -14135,6 +14022,102 @@
 </p:sld>
 </file>
 
+<file path=ppt/slides/slide11.xml><?xml version="1.0" encoding="utf-8"?>
+<p:sld xmlns:a="http://schemas.openxmlformats.org/drawingml/2006/main" xmlns:r="http://schemas.openxmlformats.org/officeDocument/2006/relationships" xmlns:p="http://schemas.openxmlformats.org/presentationml/2006/main">
+  <p:cSld>
+    <p:spTree>
+      <p:nvGrpSpPr>
+        <p:cNvPr id="1" name=""/>
+        <p:cNvGrpSpPr/>
+        <p:nvPr/>
+      </p:nvGrpSpPr>
+      <p:grpSpPr>
+        <a:xfrm>
+          <a:off x="0" y="0"/>
+          <a:ext cx="0" cy="0"/>
+          <a:chOff x="0" y="0"/>
+          <a:chExt cx="0" cy="0"/>
+        </a:xfrm>
+      </p:grpSpPr>
+      <p:sp>
+        <p:nvSpPr>
+          <p:cNvPr id="2" name="Titel 1">
+            <a:extLst>
+              <a:ext uri="{FF2B5EF4-FFF2-40B4-BE49-F238E27FC236}">
+                <a16:creationId xmlns:a16="http://schemas.microsoft.com/office/drawing/2014/main" id="{3AC56C75-D645-97EB-B676-1B0C2A220AD3}"/>
+              </a:ext>
+            </a:extLst>
+          </p:cNvPr>
+          <p:cNvSpPr>
+            <a:spLocks noGrp="1"/>
+          </p:cNvSpPr>
+          <p:nvPr>
+            <p:ph type="title"/>
+          </p:nvPr>
+        </p:nvSpPr>
+        <p:spPr/>
+        <p:txBody>
+          <a:bodyPr/>
+          <a:lstStyle/>
+          <a:p>
+            <a:r>
+              <a:rPr lang="de-DE" dirty="0"/>
+              <a:t>Model </a:t>
+            </a:r>
+            <a:r>
+              <a:rPr lang="de-DE" dirty="0" err="1"/>
+              <a:t>Identification</a:t>
+            </a:r>
+            <a:r>
+              <a:rPr lang="de-DE" dirty="0"/>
+              <a:t> and </a:t>
+            </a:r>
+            <a:r>
+              <a:rPr lang="de-DE" dirty="0" err="1"/>
+              <a:t>Diagnostics</a:t>
+            </a:r>
+            <a:endParaRPr lang="de-DE" dirty="0"/>
+          </a:p>
+        </p:txBody>
+      </p:sp>
+      <p:sp>
+        <p:nvSpPr>
+          <p:cNvPr id="3" name="Inhaltsplatzhalter 2">
+            <a:extLst>
+              <a:ext uri="{FF2B5EF4-FFF2-40B4-BE49-F238E27FC236}">
+                <a16:creationId xmlns:a16="http://schemas.microsoft.com/office/drawing/2014/main" id="{F664FA66-9A32-07F6-45F7-CEA23E6E09B3}"/>
+              </a:ext>
+            </a:extLst>
+          </p:cNvPr>
+          <p:cNvSpPr>
+            <a:spLocks noGrp="1"/>
+          </p:cNvSpPr>
+          <p:nvPr>
+            <p:ph idx="1"/>
+          </p:nvPr>
+        </p:nvSpPr>
+        <p:spPr/>
+        <p:txBody>
+          <a:bodyPr/>
+          <a:lstStyle/>
+          <a:p>
+            <a:endParaRPr lang="de-DE"/>
+          </a:p>
+        </p:txBody>
+      </p:sp>
+    </p:spTree>
+    <p:extLst>
+      <p:ext uri="{BB962C8B-B14F-4D97-AF65-F5344CB8AC3E}">
+        <p14:creationId xmlns:p14="http://schemas.microsoft.com/office/powerpoint/2010/main" val="1817484160"/>
+      </p:ext>
+    </p:extLst>
+  </p:cSld>
+  <p:clrMapOvr>
+    <a:masterClrMapping/>
+  </p:clrMapOvr>
+</p:sld>
+</file>
+
 <file path=ppt/slides/slide12.xml><?xml version="1.0" encoding="utf-8"?>
 <p:sld xmlns:a="http://schemas.openxmlformats.org/drawingml/2006/main" xmlns:r="http://schemas.openxmlformats.org/officeDocument/2006/relationships" xmlns:p="http://schemas.openxmlformats.org/presentationml/2006/main">
   <p:cSld>
@@ -14157,7 +14140,7 @@
           <p:cNvPr id="2" name="Titel 1">
             <a:extLst>
               <a:ext uri="{FF2B5EF4-FFF2-40B4-BE49-F238E27FC236}">
-                <a16:creationId xmlns:a16="http://schemas.microsoft.com/office/drawing/2014/main" id="{3AC56C75-D645-97EB-B676-1B0C2A220AD3}"/>
+                <a16:creationId xmlns:a16="http://schemas.microsoft.com/office/drawing/2014/main" id="{B2C5E3DC-9C7A-C0DB-15E7-7A2FDB0E92BA}"/>
               </a:ext>
             </a:extLst>
           </p:cNvPr>
@@ -14174,22 +14157,21 @@
           <a:lstStyle/>
           <a:p>
             <a:r>
+              <a:rPr lang="de-DE" dirty="0" err="1"/>
+              <a:t>Forecasting</a:t>
+            </a:r>
+            <a:r>
               <a:rPr lang="de-DE" dirty="0"/>
-              <a:t>Model </a:t>
+              <a:t> </a:t>
             </a:r>
             <a:r>
               <a:rPr lang="de-DE" dirty="0" err="1"/>
-              <a:t>Identification</a:t>
+              <a:t>with</a:t>
             </a:r>
             <a:r>
               <a:rPr lang="de-DE" dirty="0"/>
-              <a:t> and </a:t>
-            </a:r>
-            <a:r>
-              <a:rPr lang="de-DE" dirty="0" err="1"/>
-              <a:t>Diagnostics</a:t>
-            </a:r>
-            <a:endParaRPr lang="de-DE" dirty="0"/>
+              <a:t> ARIMA</a:t>
+            </a:r>
           </a:p>
         </p:txBody>
       </p:sp>
@@ -14198,7 +14180,7 @@
           <p:cNvPr id="3" name="Inhaltsplatzhalter 2">
             <a:extLst>
               <a:ext uri="{FF2B5EF4-FFF2-40B4-BE49-F238E27FC236}">
-                <a16:creationId xmlns:a16="http://schemas.microsoft.com/office/drawing/2014/main" id="{F664FA66-9A32-07F6-45F7-CEA23E6E09B3}"/>
+                <a16:creationId xmlns:a16="http://schemas.microsoft.com/office/drawing/2014/main" id="{299C1C1C-4720-0C5C-ACCE-3517D9A5E3CE}"/>
               </a:ext>
             </a:extLst>
           </p:cNvPr>
@@ -14221,7 +14203,7 @@
     </p:spTree>
     <p:extLst>
       <p:ext uri="{BB962C8B-B14F-4D97-AF65-F5344CB8AC3E}">
-        <p14:creationId xmlns:p14="http://schemas.microsoft.com/office/powerpoint/2010/main" val="1817484160"/>
+        <p14:creationId xmlns:p14="http://schemas.microsoft.com/office/powerpoint/2010/main" val="1525352227"/>
       </p:ext>
     </p:extLst>
   </p:cSld>
@@ -14253,7 +14235,7 @@
           <p:cNvPr id="2" name="Titel 1">
             <a:extLst>
               <a:ext uri="{FF2B5EF4-FFF2-40B4-BE49-F238E27FC236}">
-                <a16:creationId xmlns:a16="http://schemas.microsoft.com/office/drawing/2014/main" id="{B2C5E3DC-9C7A-C0DB-15E7-7A2FDB0E92BA}"/>
+                <a16:creationId xmlns:a16="http://schemas.microsoft.com/office/drawing/2014/main" id="{9931EE1B-12BB-3B84-F499-A85EFA888DD1}"/>
               </a:ext>
             </a:extLst>
           </p:cNvPr>
@@ -14270,21 +14252,14 @@
           <a:lstStyle/>
           <a:p>
             <a:r>
+              <a:rPr lang="de-DE" dirty="0"/>
+              <a:t>Prophet Model </a:t>
+            </a:r>
+            <a:r>
               <a:rPr lang="de-DE" dirty="0" err="1"/>
-              <a:t>Forecasting</a:t>
-            </a:r>
-            <a:r>
-              <a:rPr lang="de-DE" dirty="0"/>
-              <a:t> </a:t>
-            </a:r>
-            <a:r>
-              <a:rPr lang="de-DE" dirty="0" err="1"/>
-              <a:t>with</a:t>
-            </a:r>
-            <a:r>
-              <a:rPr lang="de-DE" dirty="0"/>
-              <a:t> ARIMA</a:t>
-            </a:r>
+              <a:t>Overview</a:t>
+            </a:r>
+            <a:endParaRPr lang="de-DE" dirty="0"/>
           </a:p>
         </p:txBody>
       </p:sp>
@@ -14293,7 +14268,7 @@
           <p:cNvPr id="3" name="Inhaltsplatzhalter 2">
             <a:extLst>
               <a:ext uri="{FF2B5EF4-FFF2-40B4-BE49-F238E27FC236}">
-                <a16:creationId xmlns:a16="http://schemas.microsoft.com/office/drawing/2014/main" id="{299C1C1C-4720-0C5C-ACCE-3517D9A5E3CE}"/>
+                <a16:creationId xmlns:a16="http://schemas.microsoft.com/office/drawing/2014/main" id="{323D3A79-E7BF-DAFB-FD40-E987E9CAB9FC}"/>
               </a:ext>
             </a:extLst>
           </p:cNvPr>
@@ -14316,7 +14291,7 @@
     </p:spTree>
     <p:extLst>
       <p:ext uri="{BB962C8B-B14F-4D97-AF65-F5344CB8AC3E}">
-        <p14:creationId xmlns:p14="http://schemas.microsoft.com/office/powerpoint/2010/main" val="1525352227"/>
+        <p14:creationId xmlns:p14="http://schemas.microsoft.com/office/powerpoint/2010/main" val="2822867359"/>
       </p:ext>
     </p:extLst>
   </p:cSld>
@@ -14348,7 +14323,7 @@
           <p:cNvPr id="2" name="Titel 1">
             <a:extLst>
               <a:ext uri="{FF2B5EF4-FFF2-40B4-BE49-F238E27FC236}">
-                <a16:creationId xmlns:a16="http://schemas.microsoft.com/office/drawing/2014/main" id="{9931EE1B-12BB-3B84-F499-A85EFA888DD1}"/>
+                <a16:creationId xmlns:a16="http://schemas.microsoft.com/office/drawing/2014/main" id="{E90CAD63-F8AE-209F-5F9B-41D0EFABE760}"/>
               </a:ext>
             </a:extLst>
           </p:cNvPr>
@@ -14366,11 +14341,11 @@
           <a:p>
             <a:r>
               <a:rPr lang="de-DE" dirty="0"/>
-              <a:t>Prophet Model </a:t>
+              <a:t>Trend and </a:t>
             </a:r>
             <a:r>
               <a:rPr lang="de-DE" dirty="0" err="1"/>
-              <a:t>Overview</a:t>
+              <a:t>Seasonality</a:t>
             </a:r>
             <a:endParaRPr lang="de-DE" dirty="0"/>
           </a:p>
@@ -14381,7 +14356,7 @@
           <p:cNvPr id="3" name="Inhaltsplatzhalter 2">
             <a:extLst>
               <a:ext uri="{FF2B5EF4-FFF2-40B4-BE49-F238E27FC236}">
-                <a16:creationId xmlns:a16="http://schemas.microsoft.com/office/drawing/2014/main" id="{323D3A79-E7BF-DAFB-FD40-E987E9CAB9FC}"/>
+                <a16:creationId xmlns:a16="http://schemas.microsoft.com/office/drawing/2014/main" id="{2F95DCFC-8E02-DDA2-268D-46BF4FB7A441}"/>
               </a:ext>
             </a:extLst>
           </p:cNvPr>
@@ -14404,7 +14379,7 @@
     </p:spTree>
     <p:extLst>
       <p:ext uri="{BB962C8B-B14F-4D97-AF65-F5344CB8AC3E}">
-        <p14:creationId xmlns:p14="http://schemas.microsoft.com/office/powerpoint/2010/main" val="2822867359"/>
+        <p14:creationId xmlns:p14="http://schemas.microsoft.com/office/powerpoint/2010/main" val="3307097350"/>
       </p:ext>
     </p:extLst>
   </p:cSld>
@@ -14436,7 +14411,7 @@
           <p:cNvPr id="2" name="Titel 1">
             <a:extLst>
               <a:ext uri="{FF2B5EF4-FFF2-40B4-BE49-F238E27FC236}">
-                <a16:creationId xmlns:a16="http://schemas.microsoft.com/office/drawing/2014/main" id="{E90CAD63-F8AE-209F-5F9B-41D0EFABE760}"/>
+                <a16:creationId xmlns:a16="http://schemas.microsoft.com/office/drawing/2014/main" id="{32230A68-4EF3-682A-ECAC-105D6AE7D06F}"/>
               </a:ext>
             </a:extLst>
           </p:cNvPr>
@@ -14454,13 +14429,16 @@
           <a:p>
             <a:r>
               <a:rPr lang="de-DE" dirty="0"/>
-              <a:t>Trend and </a:t>
+              <a:t>Feature Engineering </a:t>
             </a:r>
             <a:r>
               <a:rPr lang="de-DE" dirty="0" err="1"/>
-              <a:t>Seasonality</a:t>
-            </a:r>
-            <a:endParaRPr lang="de-DE" dirty="0"/>
+              <a:t>for</a:t>
+            </a:r>
+            <a:r>
+              <a:rPr lang="de-DE" dirty="0"/>
+              <a:t> Time Series</a:t>
+            </a:r>
           </a:p>
         </p:txBody>
       </p:sp>
@@ -14469,7 +14447,7 @@
           <p:cNvPr id="3" name="Inhaltsplatzhalter 2">
             <a:extLst>
               <a:ext uri="{FF2B5EF4-FFF2-40B4-BE49-F238E27FC236}">
-                <a16:creationId xmlns:a16="http://schemas.microsoft.com/office/drawing/2014/main" id="{2F95DCFC-8E02-DDA2-268D-46BF4FB7A441}"/>
+                <a16:creationId xmlns:a16="http://schemas.microsoft.com/office/drawing/2014/main" id="{15A3101E-A950-A2CB-4D19-4066D86152A7}"/>
               </a:ext>
             </a:extLst>
           </p:cNvPr>
@@ -14492,7 +14470,7 @@
     </p:spTree>
     <p:extLst>
       <p:ext uri="{BB962C8B-B14F-4D97-AF65-F5344CB8AC3E}">
-        <p14:creationId xmlns:p14="http://schemas.microsoft.com/office/powerpoint/2010/main" val="3307097350"/>
+        <p14:creationId xmlns:p14="http://schemas.microsoft.com/office/powerpoint/2010/main" val="3297117316"/>
       </p:ext>
     </p:extLst>
   </p:cSld>
@@ -14521,10 +14499,10 @@
       </p:grpSpPr>
       <p:sp>
         <p:nvSpPr>
-          <p:cNvPr id="2" name="Titel 1">
-            <a:extLst>
-              <a:ext uri="{FF2B5EF4-FFF2-40B4-BE49-F238E27FC236}">
-                <a16:creationId xmlns:a16="http://schemas.microsoft.com/office/drawing/2014/main" id="{32230A68-4EF3-682A-ECAC-105D6AE7D06F}"/>
+          <p:cNvPr id="2" name="Title 1">
+            <a:extLst>
+              <a:ext uri="{FF2B5EF4-FFF2-40B4-BE49-F238E27FC236}">
+                <a16:creationId xmlns:a16="http://schemas.microsoft.com/office/drawing/2014/main" id="{03EC4D4A-A82A-7BC5-7541-02F3EAB5D215}"/>
               </a:ext>
             </a:extLst>
           </p:cNvPr>
@@ -14541,26 +14519,18 @@
           <a:lstStyle/>
           <a:p>
             <a:r>
-              <a:rPr lang="de-DE" dirty="0"/>
-              <a:t>Feature Engineering </a:t>
-            </a:r>
-            <a:r>
-              <a:rPr lang="de-DE" dirty="0" err="1"/>
-              <a:t>for</a:t>
-            </a:r>
-            <a:r>
-              <a:rPr lang="de-DE" dirty="0"/>
-              <a:t> Time Series</a:t>
-            </a:r>
-          </a:p>
-        </p:txBody>
-      </p:sp>
-      <p:sp>
-        <p:nvSpPr>
-          <p:cNvPr id="3" name="Inhaltsplatzhalter 2">
-            <a:extLst>
-              <a:ext uri="{FF2B5EF4-FFF2-40B4-BE49-F238E27FC236}">
-                <a16:creationId xmlns:a16="http://schemas.microsoft.com/office/drawing/2014/main" id="{15A3101E-A950-A2CB-4D19-4066D86152A7}"/>
+              <a:rPr lang="en-GB" dirty="0"/>
+              <a:t>Types of Time Series Forecasting Information</a:t>
+            </a:r>
+          </a:p>
+        </p:txBody>
+      </p:sp>
+      <p:sp>
+        <p:nvSpPr>
+          <p:cNvPr id="3" name="Content Placeholder 2">
+            <a:extLst>
+              <a:ext uri="{FF2B5EF4-FFF2-40B4-BE49-F238E27FC236}">
+                <a16:creationId xmlns:a16="http://schemas.microsoft.com/office/drawing/2014/main" id="{7A183E07-4A7F-4057-51D6-EA7F8824CF08}"/>
               </a:ext>
             </a:extLst>
           </p:cNvPr>
@@ -14573,17 +14543,105 @@
         </p:nvSpPr>
         <p:spPr/>
         <p:txBody>
+          <a:bodyPr>
+            <a:normAutofit/>
+          </a:bodyPr>
+          <a:lstStyle/>
+          <a:p>
+            <a:pPr marL="0" indent="0">
+              <a:buNone/>
+            </a:pPr>
+            <a:r>
+              <a:rPr lang="en-GB" dirty="0"/>
+              <a:t>auto-correlation</a:t>
+            </a:r>
+          </a:p>
+          <a:p>
+            <a:r>
+              <a:rPr lang="en-GB" dirty="0"/>
+              <a:t>using past values of considered time series as function of lag</a:t>
+            </a:r>
+          </a:p>
+          <a:p>
+            <a:r>
+              <a:rPr lang="en-GB" dirty="0">
+                <a:sym typeface="Wingdings" panose="05000000000000000000" pitchFamily="2" charset="2"/>
+              </a:rPr>
+              <a:t>identifying periodicity (seasonality) and trend</a:t>
+            </a:r>
+            <a:endParaRPr lang="en-GB" dirty="0"/>
+          </a:p>
+          <a:p>
+            <a:pPr marL="0" indent="0">
+              <a:buNone/>
+            </a:pPr>
+            <a:endParaRPr lang="en-GB" dirty="0"/>
+          </a:p>
+          <a:p>
+            <a:pPr marL="0" indent="0">
+              <a:buNone/>
+            </a:pPr>
+            <a:r>
+              <a:rPr lang="en-GB" dirty="0"/>
+              <a:t>exogenous variables</a:t>
+            </a:r>
+          </a:p>
+          <a:p>
+            <a:r>
+              <a:rPr lang="en-GB" dirty="0"/>
+              <a:t>using correlations of other variables to considered time series</a:t>
+            </a:r>
+          </a:p>
+          <a:p>
+            <a:r>
+              <a:rPr lang="en-GB" dirty="0"/>
+              <a:t>examples in demand forecasting: price, weather</a:t>
+            </a:r>
+          </a:p>
+          <a:p>
+            <a:r>
+              <a:rPr lang="en-GB" dirty="0"/>
+              <a:t>such effects lasting for some time create spurious auto-correlation</a:t>
+            </a:r>
+            <a:endParaRPr lang="en-GB" dirty="0">
+              <a:sym typeface="Wingdings" panose="05000000000000000000" pitchFamily="2" charset="2"/>
+            </a:endParaRPr>
+          </a:p>
+        </p:txBody>
+      </p:sp>
+      <p:sp>
+        <p:nvSpPr>
+          <p:cNvPr id="4" name="Slide Number Placeholder 3">
+            <a:extLst>
+              <a:ext uri="{FF2B5EF4-FFF2-40B4-BE49-F238E27FC236}">
+                <a16:creationId xmlns:a16="http://schemas.microsoft.com/office/drawing/2014/main" id="{E10D5294-F36F-3ADF-1C52-72056CEFFFF5}"/>
+              </a:ext>
+            </a:extLst>
+          </p:cNvPr>
+          <p:cNvSpPr>
+            <a:spLocks noGrp="1"/>
+          </p:cNvSpPr>
+          <p:nvPr>
+            <p:ph type="sldNum" sz="quarter" idx="12"/>
+          </p:nvPr>
+        </p:nvSpPr>
+        <p:spPr/>
+        <p:txBody>
           <a:bodyPr/>
           <a:lstStyle/>
           <a:p>
-            <a:endParaRPr lang="de-DE"/>
+            <a:fld id="{ADDEFC8A-584C-5E41-A633-418C2FB73F75}" type="slidenum">
+              <a:rPr lang="en-DE" smtClean="0"/>
+              <a:t>16</a:t>
+            </a:fld>
+            <a:endParaRPr lang="en-DE"/>
           </a:p>
         </p:txBody>
       </p:sp>
     </p:spTree>
     <p:extLst>
       <p:ext uri="{BB962C8B-B14F-4D97-AF65-F5344CB8AC3E}">
-        <p14:creationId xmlns:p14="http://schemas.microsoft.com/office/powerpoint/2010/main" val="3297117316"/>
+        <p14:creationId xmlns:p14="http://schemas.microsoft.com/office/powerpoint/2010/main" val="559053033"/>
       </p:ext>
     </p:extLst>
   </p:cSld>
@@ -14612,177 +14670,6 @@
       </p:grpSpPr>
       <p:sp>
         <p:nvSpPr>
-          <p:cNvPr id="2" name="Title 1">
-            <a:extLst>
-              <a:ext uri="{FF2B5EF4-FFF2-40B4-BE49-F238E27FC236}">
-                <a16:creationId xmlns:a16="http://schemas.microsoft.com/office/drawing/2014/main" id="{03EC4D4A-A82A-7BC5-7541-02F3EAB5D215}"/>
-              </a:ext>
-            </a:extLst>
-          </p:cNvPr>
-          <p:cNvSpPr>
-            <a:spLocks noGrp="1"/>
-          </p:cNvSpPr>
-          <p:nvPr>
-            <p:ph type="title"/>
-          </p:nvPr>
-        </p:nvSpPr>
-        <p:spPr/>
-        <p:txBody>
-          <a:bodyPr/>
-          <a:lstStyle/>
-          <a:p>
-            <a:r>
-              <a:rPr lang="en-GB" dirty="0"/>
-              <a:t>Types of Time Series Forecasting Information</a:t>
-            </a:r>
-          </a:p>
-        </p:txBody>
-      </p:sp>
-      <p:sp>
-        <p:nvSpPr>
-          <p:cNvPr id="3" name="Content Placeholder 2">
-            <a:extLst>
-              <a:ext uri="{FF2B5EF4-FFF2-40B4-BE49-F238E27FC236}">
-                <a16:creationId xmlns:a16="http://schemas.microsoft.com/office/drawing/2014/main" id="{7A183E07-4A7F-4057-51D6-EA7F8824CF08}"/>
-              </a:ext>
-            </a:extLst>
-          </p:cNvPr>
-          <p:cNvSpPr>
-            <a:spLocks noGrp="1"/>
-          </p:cNvSpPr>
-          <p:nvPr>
-            <p:ph idx="1"/>
-          </p:nvPr>
-        </p:nvSpPr>
-        <p:spPr/>
-        <p:txBody>
-          <a:bodyPr>
-            <a:normAutofit/>
-          </a:bodyPr>
-          <a:lstStyle/>
-          <a:p>
-            <a:pPr marL="0" indent="0">
-              <a:buNone/>
-            </a:pPr>
-            <a:r>
-              <a:rPr lang="en-GB" dirty="0"/>
-              <a:t>auto-correlation</a:t>
-            </a:r>
-          </a:p>
-          <a:p>
-            <a:r>
-              <a:rPr lang="en-GB" dirty="0"/>
-              <a:t>using past values of considered time series as function of lag</a:t>
-            </a:r>
-          </a:p>
-          <a:p>
-            <a:r>
-              <a:rPr lang="en-GB" dirty="0">
-                <a:sym typeface="Wingdings" panose="05000000000000000000" pitchFamily="2" charset="2"/>
-              </a:rPr>
-              <a:t>identifying periodicity (seasonality) and trend</a:t>
-            </a:r>
-            <a:endParaRPr lang="en-GB" dirty="0"/>
-          </a:p>
-          <a:p>
-            <a:pPr marL="0" indent="0">
-              <a:buNone/>
-            </a:pPr>
-            <a:endParaRPr lang="en-GB" dirty="0"/>
-          </a:p>
-          <a:p>
-            <a:pPr marL="0" indent="0">
-              <a:buNone/>
-            </a:pPr>
-            <a:r>
-              <a:rPr lang="en-GB" dirty="0"/>
-              <a:t>exogenous variables</a:t>
-            </a:r>
-          </a:p>
-          <a:p>
-            <a:r>
-              <a:rPr lang="en-GB" dirty="0"/>
-              <a:t>using correlations of other variables to considered time series</a:t>
-            </a:r>
-          </a:p>
-          <a:p>
-            <a:r>
-              <a:rPr lang="en-GB" dirty="0"/>
-              <a:t>examples in demand forecasting: price, weather</a:t>
-            </a:r>
-          </a:p>
-          <a:p>
-            <a:r>
-              <a:rPr lang="en-GB" dirty="0"/>
-              <a:t>such effects lasting for some time create spurious auto-correlation</a:t>
-            </a:r>
-            <a:endParaRPr lang="en-GB" dirty="0">
-              <a:sym typeface="Wingdings" panose="05000000000000000000" pitchFamily="2" charset="2"/>
-            </a:endParaRPr>
-          </a:p>
-        </p:txBody>
-      </p:sp>
-      <p:sp>
-        <p:nvSpPr>
-          <p:cNvPr id="4" name="Slide Number Placeholder 3">
-            <a:extLst>
-              <a:ext uri="{FF2B5EF4-FFF2-40B4-BE49-F238E27FC236}">
-                <a16:creationId xmlns:a16="http://schemas.microsoft.com/office/drawing/2014/main" id="{E10D5294-F36F-3ADF-1C52-72056CEFFFF5}"/>
-              </a:ext>
-            </a:extLst>
-          </p:cNvPr>
-          <p:cNvSpPr>
-            <a:spLocks noGrp="1"/>
-          </p:cNvSpPr>
-          <p:nvPr>
-            <p:ph type="sldNum" sz="quarter" idx="12"/>
-          </p:nvPr>
-        </p:nvSpPr>
-        <p:spPr/>
-        <p:txBody>
-          <a:bodyPr/>
-          <a:lstStyle/>
-          <a:p>
-            <a:fld id="{ADDEFC8A-584C-5E41-A633-418C2FB73F75}" type="slidenum">
-              <a:rPr lang="en-DE" smtClean="0"/>
-              <a:t>17</a:t>
-            </a:fld>
-            <a:endParaRPr lang="en-DE"/>
-          </a:p>
-        </p:txBody>
-      </p:sp>
-    </p:spTree>
-    <p:extLst>
-      <p:ext uri="{BB962C8B-B14F-4D97-AF65-F5344CB8AC3E}">
-        <p14:creationId xmlns:p14="http://schemas.microsoft.com/office/powerpoint/2010/main" val="559053033"/>
-      </p:ext>
-    </p:extLst>
-  </p:cSld>
-  <p:clrMapOvr>
-    <a:masterClrMapping/>
-  </p:clrMapOvr>
-</p:sld>
-</file>
-
-<file path=ppt/slides/slide18.xml><?xml version="1.0" encoding="utf-8"?>
-<p:sld xmlns:a="http://schemas.openxmlformats.org/drawingml/2006/main" xmlns:r="http://schemas.openxmlformats.org/officeDocument/2006/relationships" xmlns:p="http://schemas.openxmlformats.org/presentationml/2006/main">
-  <p:cSld>
-    <p:spTree>
-      <p:nvGrpSpPr>
-        <p:cNvPr id="1" name=""/>
-        <p:cNvGrpSpPr/>
-        <p:nvPr/>
-      </p:nvGrpSpPr>
-      <p:grpSpPr>
-        <a:xfrm>
-          <a:off x="0" y="0"/>
-          <a:ext cx="0" cy="0"/>
-          <a:chOff x="0" y="0"/>
-          <a:chExt cx="0" cy="0"/>
-        </a:xfrm>
-      </p:grpSpPr>
-      <p:sp>
-        <p:nvSpPr>
           <p:cNvPr id="2" name="Titel 1">
             <a:extLst>
               <a:ext uri="{FF2B5EF4-FFF2-40B4-BE49-F238E27FC236}">
@@ -14855,7 +14742,7 @@
 </p:sld>
 </file>
 
-<file path=ppt/slides/slide19.xml><?xml version="1.0" encoding="utf-8"?>
+<file path=ppt/slides/slide18.xml><?xml version="1.0" encoding="utf-8"?>
 <p:sld xmlns:a="http://schemas.openxmlformats.org/drawingml/2006/main" xmlns:r="http://schemas.openxmlformats.org/officeDocument/2006/relationships" xmlns:p="http://schemas.openxmlformats.org/presentationml/2006/main">
   <p:cSld>
     <p:spTree>
@@ -15342,7 +15229,7 @@
           <a:p>
             <a:fld id="{ADDEFC8A-584C-5E41-A633-418C2FB73F75}" type="slidenum">
               <a:rPr lang="en-DE" smtClean="0"/>
-              <a:t>19</a:t>
+              <a:t>18</a:t>
             </a:fld>
             <a:endParaRPr lang="en-DE"/>
           </a:p>
@@ -15352,6 +15239,89 @@
     <p:extLst>
       <p:ext uri="{BB962C8B-B14F-4D97-AF65-F5344CB8AC3E}">
         <p14:creationId xmlns:p14="http://schemas.microsoft.com/office/powerpoint/2010/main" val="2554576254"/>
+      </p:ext>
+    </p:extLst>
+  </p:cSld>
+  <p:clrMapOvr>
+    <a:masterClrMapping/>
+  </p:clrMapOvr>
+</p:sld>
+</file>
+
+<file path=ppt/slides/slide19.xml><?xml version="1.0" encoding="utf-8"?>
+<p:sld xmlns:a="http://schemas.openxmlformats.org/drawingml/2006/main" xmlns:r="http://schemas.openxmlformats.org/officeDocument/2006/relationships" xmlns:p="http://schemas.openxmlformats.org/presentationml/2006/main">
+  <p:cSld>
+    <p:spTree>
+      <p:nvGrpSpPr>
+        <p:cNvPr id="1" name=""/>
+        <p:cNvGrpSpPr/>
+        <p:nvPr/>
+      </p:nvGrpSpPr>
+      <p:grpSpPr>
+        <a:xfrm>
+          <a:off x="0" y="0"/>
+          <a:ext cx="0" cy="0"/>
+          <a:chOff x="0" y="0"/>
+          <a:chExt cx="0" cy="0"/>
+        </a:xfrm>
+      </p:grpSpPr>
+      <p:sp>
+        <p:nvSpPr>
+          <p:cNvPr id="2" name="Titel 1">
+            <a:extLst>
+              <a:ext uri="{FF2B5EF4-FFF2-40B4-BE49-F238E27FC236}">
+                <a16:creationId xmlns:a16="http://schemas.microsoft.com/office/drawing/2014/main" id="{B3ECE723-0801-7F1B-0125-A419EDE92E35}"/>
+              </a:ext>
+            </a:extLst>
+          </p:cNvPr>
+          <p:cNvSpPr>
+            <a:spLocks noGrp="1"/>
+          </p:cNvSpPr>
+          <p:nvPr>
+            <p:ph type="title"/>
+          </p:nvPr>
+        </p:nvSpPr>
+        <p:spPr/>
+        <p:txBody>
+          <a:bodyPr/>
+          <a:lstStyle/>
+          <a:p>
+            <a:r>
+              <a:rPr lang="de-DE" dirty="0"/>
+              <a:t>Time Series in ML Models</a:t>
+            </a:r>
+          </a:p>
+        </p:txBody>
+      </p:sp>
+      <p:sp>
+        <p:nvSpPr>
+          <p:cNvPr id="3" name="Inhaltsplatzhalter 2">
+            <a:extLst>
+              <a:ext uri="{FF2B5EF4-FFF2-40B4-BE49-F238E27FC236}">
+                <a16:creationId xmlns:a16="http://schemas.microsoft.com/office/drawing/2014/main" id="{84528E01-5BFB-231A-DC34-8FE2B58E148A}"/>
+              </a:ext>
+            </a:extLst>
+          </p:cNvPr>
+          <p:cNvSpPr>
+            <a:spLocks noGrp="1"/>
+          </p:cNvSpPr>
+          <p:nvPr>
+            <p:ph idx="1"/>
+          </p:nvPr>
+        </p:nvSpPr>
+        <p:spPr/>
+        <p:txBody>
+          <a:bodyPr/>
+          <a:lstStyle/>
+          <a:p>
+            <a:endParaRPr lang="de-DE"/>
+          </a:p>
+        </p:txBody>
+      </p:sp>
+    </p:spTree>
+    <p:extLst>
+      <p:ext uri="{BB962C8B-B14F-4D97-AF65-F5344CB8AC3E}">
+        <p14:creationId xmlns:p14="http://schemas.microsoft.com/office/powerpoint/2010/main" val="178933247"/>
       </p:ext>
     </p:extLst>
   </p:cSld>
@@ -15380,10 +15350,10 @@
       </p:grpSpPr>
       <p:sp>
         <p:nvSpPr>
-          <p:cNvPr id="4" name="Title 3">
-            <a:extLst>
-              <a:ext uri="{FF2B5EF4-FFF2-40B4-BE49-F238E27FC236}">
-                <a16:creationId xmlns:a16="http://schemas.microsoft.com/office/drawing/2014/main" id="{080AD447-446B-E09E-6F4A-522C1DBB462E}"/>
+          <p:cNvPr id="6" name="Titel 5">
+            <a:extLst>
+              <a:ext uri="{FF2B5EF4-FFF2-40B4-BE49-F238E27FC236}">
+                <a16:creationId xmlns:a16="http://schemas.microsoft.com/office/drawing/2014/main" id="{D5C0C311-9CC2-8845-33EF-0123376E4C53}"/>
               </a:ext>
             </a:extLst>
           </p:cNvPr>
@@ -15399,241 +15369,109 @@
           <a:bodyPr/>
           <a:lstStyle/>
           <a:p>
-            <a:r>
-              <a:rPr lang="en-GB" dirty="0"/>
-              <a:t>Course Schedule</a:t>
-            </a:r>
-          </a:p>
-        </p:txBody>
-      </p:sp>
-      <p:sp>
-        <p:nvSpPr>
-          <p:cNvPr id="6" name="Inhaltsplatzhalter 5">
-            <a:extLst>
-              <a:ext uri="{FF2B5EF4-FFF2-40B4-BE49-F238E27FC236}">
-                <a16:creationId xmlns:a16="http://schemas.microsoft.com/office/drawing/2014/main" id="{CF502483-E45D-7D7D-D169-ACA4F8327D26}"/>
-              </a:ext>
-            </a:extLst>
-          </p:cNvPr>
-          <p:cNvSpPr>
-            <a:spLocks noGrp="1"/>
-          </p:cNvSpPr>
-          <p:nvPr>
-            <p:ph sz="half" idx="1"/>
-          </p:nvPr>
-        </p:nvSpPr>
-        <p:spPr/>
-        <p:txBody>
-          <a:bodyPr>
-            <a:normAutofit lnSpcReduction="10000"/>
-          </a:bodyPr>
-          <a:lstStyle/>
-          <a:p>
-            <a:pPr marL="514350" indent="-514350">
-              <a:buFont typeface="+mj-lt"/>
-              <a:buAutoNum type="arabicPeriod"/>
-            </a:pPr>
-            <a:r>
-              <a:rPr lang="de-DE" dirty="0" err="1"/>
-              <a:t>Exploratory</a:t>
-            </a:r>
-            <a:r>
-              <a:rPr lang="de-DE" dirty="0"/>
-              <a:t> Data Analysis</a:t>
-            </a:r>
-          </a:p>
-          <a:p>
-            <a:pPr marL="514350" indent="-514350">
-              <a:buFont typeface="+mj-lt"/>
-              <a:buAutoNum type="arabicPeriod"/>
-            </a:pPr>
-            <a:endParaRPr lang="de-DE" dirty="0"/>
-          </a:p>
-          <a:p>
-            <a:pPr marL="514350" indent="-514350">
-              <a:buFont typeface="+mj-lt"/>
-              <a:buAutoNum type="arabicPeriod"/>
-            </a:pPr>
-            <a:r>
-              <a:rPr lang="de-DE" dirty="0"/>
-              <a:t>Clustering</a:t>
-            </a:r>
-          </a:p>
-          <a:p>
-            <a:pPr marL="514350" indent="-514350">
-              <a:buFont typeface="+mj-lt"/>
-              <a:buAutoNum type="arabicPeriod"/>
-            </a:pPr>
-            <a:endParaRPr lang="de-DE" dirty="0"/>
-          </a:p>
-          <a:p>
-            <a:pPr marL="514350" indent="-514350">
-              <a:buFont typeface="+mj-lt"/>
-              <a:buAutoNum type="arabicPeriod"/>
-            </a:pPr>
-            <a:r>
-              <a:rPr lang="de-DE" dirty="0" err="1"/>
-              <a:t>Probabilistic</a:t>
-            </a:r>
-            <a:r>
-              <a:rPr lang="de-DE" dirty="0"/>
-              <a:t> Models</a:t>
-            </a:r>
-          </a:p>
-          <a:p>
-            <a:pPr marL="514350" indent="-514350">
-              <a:buFont typeface="+mj-lt"/>
-              <a:buAutoNum type="arabicPeriod"/>
-            </a:pPr>
-            <a:endParaRPr lang="de-DE" dirty="0"/>
-          </a:p>
-          <a:p>
-            <a:pPr marL="514350" indent="-514350">
-              <a:buFont typeface="+mj-lt"/>
-              <a:buAutoNum type="arabicPeriod"/>
-            </a:pPr>
-            <a:r>
-              <a:rPr lang="de-DE" dirty="0"/>
-              <a:t>Statistical </a:t>
-            </a:r>
-            <a:r>
-              <a:rPr lang="de-DE" dirty="0" err="1"/>
-              <a:t>Inference</a:t>
-            </a:r>
-            <a:endParaRPr lang="de-DE" dirty="0"/>
-          </a:p>
-          <a:p>
-            <a:pPr marL="514350" indent="-514350">
-              <a:buFont typeface="+mj-lt"/>
-              <a:buAutoNum type="arabicPeriod"/>
-            </a:pPr>
-            <a:endParaRPr lang="de-DE" dirty="0"/>
-          </a:p>
-          <a:p>
-            <a:pPr marL="514350" indent="-514350">
-              <a:buFont typeface="+mj-lt"/>
-              <a:buAutoNum type="arabicPeriod"/>
-            </a:pPr>
-            <a:r>
-              <a:rPr lang="de-DE" dirty="0" err="1"/>
-              <a:t>Machine</a:t>
-            </a:r>
-            <a:r>
-              <a:rPr lang="de-DE" dirty="0"/>
-              <a:t> Learning</a:t>
-            </a:r>
-          </a:p>
-        </p:txBody>
-      </p:sp>
-      <p:sp>
-        <p:nvSpPr>
-          <p:cNvPr id="7" name="Inhaltsplatzhalter 6">
-            <a:extLst>
-              <a:ext uri="{FF2B5EF4-FFF2-40B4-BE49-F238E27FC236}">
-                <a16:creationId xmlns:a16="http://schemas.microsoft.com/office/drawing/2014/main" id="{B671907E-FFFA-73EF-8E7D-4AB4EBDD957B}"/>
-              </a:ext>
-            </a:extLst>
-          </p:cNvPr>
-          <p:cNvSpPr>
-            <a:spLocks noGrp="1"/>
-          </p:cNvSpPr>
-          <p:nvPr>
-            <p:ph sz="half" idx="2"/>
-          </p:nvPr>
-        </p:nvSpPr>
-        <p:spPr/>
-        <p:txBody>
-          <a:bodyPr>
-            <a:normAutofit lnSpcReduction="10000"/>
-          </a:bodyPr>
-          <a:lstStyle/>
-          <a:p>
-            <a:pPr marL="514350" indent="-514350">
-              <a:buFont typeface="+mj-lt"/>
-              <a:buAutoNum type="arabicPeriod" startAt="6"/>
-            </a:pPr>
-            <a:r>
-              <a:rPr lang="de-DE" dirty="0"/>
-              <a:t>Feature Engineering</a:t>
-            </a:r>
-          </a:p>
-          <a:p>
-            <a:pPr marL="514350" indent="-514350">
-              <a:buFont typeface="+mj-lt"/>
-              <a:buAutoNum type="arabicPeriod" startAt="6"/>
-            </a:pPr>
-            <a:endParaRPr lang="de-DE" dirty="0"/>
-          </a:p>
-          <a:p>
-            <a:pPr marL="514350" indent="-514350">
-              <a:buFont typeface="+mj-lt"/>
-              <a:buAutoNum type="arabicPeriod" startAt="6"/>
-            </a:pPr>
-            <a:r>
-              <a:rPr lang="de-DE" dirty="0"/>
-              <a:t>Model Evaluation</a:t>
-            </a:r>
-          </a:p>
-          <a:p>
-            <a:pPr marL="514350" indent="-514350">
-              <a:buFont typeface="+mj-lt"/>
-              <a:buAutoNum type="arabicPeriod" startAt="6"/>
-            </a:pPr>
-            <a:endParaRPr lang="de-DE" dirty="0"/>
-          </a:p>
-          <a:p>
-            <a:pPr marL="514350" indent="-514350">
-              <a:buFont typeface="+mj-lt"/>
-              <a:buAutoNum type="arabicPeriod" startAt="6"/>
-            </a:pPr>
-            <a:r>
-              <a:rPr lang="de-DE" dirty="0"/>
-              <a:t>Deep Learning</a:t>
-            </a:r>
-          </a:p>
-          <a:p>
-            <a:pPr marL="514350" indent="-514350">
-              <a:buFont typeface="+mj-lt"/>
-              <a:buAutoNum type="arabicPeriod" startAt="6"/>
-            </a:pPr>
-            <a:endParaRPr lang="de-DE" dirty="0"/>
-          </a:p>
-          <a:p>
-            <a:pPr marL="514350" indent="-514350">
-              <a:buFont typeface="+mj-lt"/>
-              <a:buAutoNum type="arabicPeriod" startAt="6"/>
-            </a:pPr>
             <a:r>
               <a:rPr lang="de-DE" dirty="0"/>
               <a:t>Time Series</a:t>
             </a:r>
           </a:p>
-          <a:p>
-            <a:pPr marL="514350" indent="-514350">
-              <a:buFont typeface="+mj-lt"/>
-              <a:buAutoNum type="arabicPeriod" startAt="6"/>
-            </a:pPr>
+        </p:txBody>
+      </p:sp>
+      <p:sp>
+        <p:nvSpPr>
+          <p:cNvPr id="7" name="Inhaltsplatzhalter 6">
+            <a:extLst>
+              <a:ext uri="{FF2B5EF4-FFF2-40B4-BE49-F238E27FC236}">
+                <a16:creationId xmlns:a16="http://schemas.microsoft.com/office/drawing/2014/main" id="{C1671BA7-6A2C-4228-DD4F-2AA6A21E2F12}"/>
+              </a:ext>
+            </a:extLst>
+          </p:cNvPr>
+          <p:cNvSpPr>
+            <a:spLocks noGrp="1"/>
+          </p:cNvSpPr>
+          <p:nvPr>
+            <p:ph idx="1"/>
+          </p:nvPr>
+        </p:nvSpPr>
+        <p:spPr/>
+        <p:txBody>
+          <a:bodyPr/>
+          <a:lstStyle/>
+          <a:p>
+            <a:r>
+              <a:rPr lang="de-DE" dirty="0" err="1"/>
+              <a:t>autocorrelation</a:t>
+            </a:r>
             <a:endParaRPr lang="de-DE" dirty="0"/>
           </a:p>
           <a:p>
-            <a:pPr marL="514350" indent="-514350">
-              <a:buFont typeface="+mj-lt"/>
-              <a:buAutoNum type="arabicPeriod" startAt="6"/>
-            </a:pPr>
+            <a:r>
+              <a:rPr lang="de-DE" dirty="0"/>
+              <a:t>ARIMA</a:t>
+            </a:r>
+          </a:p>
+          <a:p>
             <a:r>
               <a:rPr lang="de-DE" dirty="0" err="1"/>
-              <a:t>Causality</a:t>
+              <a:t>prophet</a:t>
             </a:r>
             <a:endParaRPr lang="de-DE" dirty="0"/>
           </a:p>
-        </p:txBody>
-      </p:sp>
-      <p:sp>
-        <p:nvSpPr>
-          <p:cNvPr id="3" name="Slide Number Placeholder 2">
-            <a:extLst>
-              <a:ext uri="{FF2B5EF4-FFF2-40B4-BE49-F238E27FC236}">
-                <a16:creationId xmlns:a16="http://schemas.microsoft.com/office/drawing/2014/main" id="{A0664D44-83AC-6A7A-17E0-C1AE2ED18FF5}"/>
+          <a:p>
+            <a:r>
+              <a:rPr lang="de-DE" dirty="0"/>
+              <a:t>stacking: </a:t>
+            </a:r>
+            <a:r>
+              <a:rPr lang="de-DE" dirty="0" err="1"/>
+              <a:t>ewma</a:t>
+            </a:r>
+            <a:r>
+              <a:rPr lang="de-DE" dirty="0"/>
+              <a:t> </a:t>
+            </a:r>
+            <a:r>
+              <a:rPr lang="de-DE" dirty="0" err="1"/>
+              <a:t>features</a:t>
+            </a:r>
+            <a:r>
+              <a:rPr lang="de-DE" dirty="0"/>
+              <a:t> in ML</a:t>
+            </a:r>
+          </a:p>
+          <a:p>
+            <a:r>
+              <a:rPr lang="de-DE" dirty="0"/>
+              <a:t>temporal </a:t>
+            </a:r>
+            <a:r>
+              <a:rPr lang="de-DE" dirty="0" err="1"/>
+              <a:t>confounding</a:t>
+            </a:r>
+            <a:endParaRPr lang="de-DE" dirty="0"/>
+          </a:p>
+          <a:p>
+            <a:r>
+              <a:rPr lang="de-DE" dirty="0" err="1"/>
+              <a:t>anomaly</a:t>
+            </a:r>
+            <a:r>
+              <a:rPr lang="de-DE" dirty="0"/>
+              <a:t> </a:t>
+            </a:r>
+            <a:r>
+              <a:rPr lang="de-DE" dirty="0" err="1"/>
+              <a:t>detection</a:t>
+            </a:r>
+            <a:endParaRPr lang="de-DE" dirty="0"/>
+          </a:p>
+        </p:txBody>
+      </p:sp>
+      <p:sp>
+        <p:nvSpPr>
+          <p:cNvPr id="5" name="Foliennummernplatzhalter 4">
+            <a:extLst>
+              <a:ext uri="{FF2B5EF4-FFF2-40B4-BE49-F238E27FC236}">
+                <a16:creationId xmlns:a16="http://schemas.microsoft.com/office/drawing/2014/main" id="{1AE1D53F-BB59-63BA-602C-DA65E08E5ADE}"/>
               </a:ext>
             </a:extLst>
           </p:cNvPr>
@@ -15649,18 +15487,18 @@
           <a:bodyPr/>
           <a:lstStyle/>
           <a:p>
-            <a:fld id="{08C366F5-AFAD-49CB-854A-9D9E238FCA13}" type="slidenum">
+            <a:fld id="{3D4C94FE-FF23-4504-88E9-14D481113291}" type="slidenum">
               <a:rPr lang="en-GB" smtClean="0"/>
               <a:t>2</a:t>
             </a:fld>
-            <a:endParaRPr lang="en-GB" dirty="0"/>
+            <a:endParaRPr lang="en-GB"/>
           </a:p>
         </p:txBody>
       </p:sp>
     </p:spTree>
     <p:extLst>
       <p:ext uri="{BB962C8B-B14F-4D97-AF65-F5344CB8AC3E}">
-        <p14:creationId xmlns:p14="http://schemas.microsoft.com/office/powerpoint/2010/main" val="310336692"/>
+        <p14:creationId xmlns:p14="http://schemas.microsoft.com/office/powerpoint/2010/main" val="1970235014"/>
       </p:ext>
     </p:extLst>
   </p:cSld>
@@ -15671,89 +15509,6 @@
 </file>
 
 <file path=ppt/slides/slide20.xml><?xml version="1.0" encoding="utf-8"?>
-<p:sld xmlns:a="http://schemas.openxmlformats.org/drawingml/2006/main" xmlns:r="http://schemas.openxmlformats.org/officeDocument/2006/relationships" xmlns:p="http://schemas.openxmlformats.org/presentationml/2006/main">
-  <p:cSld>
-    <p:spTree>
-      <p:nvGrpSpPr>
-        <p:cNvPr id="1" name=""/>
-        <p:cNvGrpSpPr/>
-        <p:nvPr/>
-      </p:nvGrpSpPr>
-      <p:grpSpPr>
-        <a:xfrm>
-          <a:off x="0" y="0"/>
-          <a:ext cx="0" cy="0"/>
-          <a:chOff x="0" y="0"/>
-          <a:chExt cx="0" cy="0"/>
-        </a:xfrm>
-      </p:grpSpPr>
-      <p:sp>
-        <p:nvSpPr>
-          <p:cNvPr id="2" name="Titel 1">
-            <a:extLst>
-              <a:ext uri="{FF2B5EF4-FFF2-40B4-BE49-F238E27FC236}">
-                <a16:creationId xmlns:a16="http://schemas.microsoft.com/office/drawing/2014/main" id="{B3ECE723-0801-7F1B-0125-A419EDE92E35}"/>
-              </a:ext>
-            </a:extLst>
-          </p:cNvPr>
-          <p:cNvSpPr>
-            <a:spLocks noGrp="1"/>
-          </p:cNvSpPr>
-          <p:nvPr>
-            <p:ph type="title"/>
-          </p:nvPr>
-        </p:nvSpPr>
-        <p:spPr/>
-        <p:txBody>
-          <a:bodyPr/>
-          <a:lstStyle/>
-          <a:p>
-            <a:r>
-              <a:rPr lang="de-DE" dirty="0"/>
-              <a:t>Time Series in ML Models</a:t>
-            </a:r>
-          </a:p>
-        </p:txBody>
-      </p:sp>
-      <p:sp>
-        <p:nvSpPr>
-          <p:cNvPr id="3" name="Inhaltsplatzhalter 2">
-            <a:extLst>
-              <a:ext uri="{FF2B5EF4-FFF2-40B4-BE49-F238E27FC236}">
-                <a16:creationId xmlns:a16="http://schemas.microsoft.com/office/drawing/2014/main" id="{84528E01-5BFB-231A-DC34-8FE2B58E148A}"/>
-              </a:ext>
-            </a:extLst>
-          </p:cNvPr>
-          <p:cNvSpPr>
-            <a:spLocks noGrp="1"/>
-          </p:cNvSpPr>
-          <p:nvPr>
-            <p:ph idx="1"/>
-          </p:nvPr>
-        </p:nvSpPr>
-        <p:spPr/>
-        <p:txBody>
-          <a:bodyPr/>
-          <a:lstStyle/>
-          <a:p>
-            <a:endParaRPr lang="de-DE"/>
-          </a:p>
-        </p:txBody>
-      </p:sp>
-    </p:spTree>
-    <p:extLst>
-      <p:ext uri="{BB962C8B-B14F-4D97-AF65-F5344CB8AC3E}">
-        <p14:creationId xmlns:p14="http://schemas.microsoft.com/office/powerpoint/2010/main" val="178933247"/>
-      </p:ext>
-    </p:extLst>
-  </p:cSld>
-  <p:clrMapOvr>
-    <a:masterClrMapping/>
-  </p:clrMapOvr>
-</p:sld>
-</file>
-
-<file path=ppt/slides/slide21.xml><?xml version="1.0" encoding="utf-8"?>
 <p:sld xmlns:a="http://schemas.openxmlformats.org/drawingml/2006/main" xmlns:r="http://schemas.openxmlformats.org/officeDocument/2006/relationships" xmlns:p="http://schemas.openxmlformats.org/presentationml/2006/main">
   <p:cSld>
     <p:spTree>
@@ -16066,7 +15821,7 @@
             <a:fld id="{523A240F-EAFE-E84F-B44C-6D7A08E0E409}" type="slidenum">
               <a:rPr lang="en-US" smtClean="0"/>
               <a:pPr/>
-              <a:t>21</a:t>
+              <a:t>20</a:t>
             </a:fld>
             <a:endParaRPr lang="en-US" dirty="0"/>
           </a:p>
@@ -16605,7 +16360,7 @@
 </p:sld>
 </file>
 
-<file path=ppt/slides/slide22.xml><?xml version="1.0" encoding="utf-8"?>
+<file path=ppt/slides/slide21.xml><?xml version="1.0" encoding="utf-8"?>
 <p:sld xmlns:a="http://schemas.openxmlformats.org/drawingml/2006/main" xmlns:r="http://schemas.openxmlformats.org/officeDocument/2006/relationships" xmlns:p="http://schemas.openxmlformats.org/presentationml/2006/main">
   <p:cSld>
     <p:spTree>
@@ -16702,7 +16457,7 @@
 </p:sld>
 </file>
 
-<file path=ppt/slides/slide23.xml><?xml version="1.0" encoding="utf-8"?>
+<file path=ppt/slides/slide22.xml><?xml version="1.0" encoding="utf-8"?>
 <p:sld xmlns:a="http://schemas.openxmlformats.org/drawingml/2006/main" xmlns:r="http://schemas.openxmlformats.org/officeDocument/2006/relationships" xmlns:p="http://schemas.openxmlformats.org/presentationml/2006/main">
   <p:cSld>
     <p:spTree>
@@ -16775,7 +16530,7 @@
           <a:p>
             <a:fld id="{4640CEBA-4671-DC49-AB8F-1FDE9C89258E}" type="slidenum">
               <a:rPr lang="en-DE" smtClean="0"/>
-              <a:t>23</a:t>
+              <a:t>22</a:t>
             </a:fld>
             <a:endParaRPr lang="en-DE"/>
           </a:p>
@@ -16884,6 +16639,460 @@
 </p:sld>
 </file>
 
+<file path=ppt/slides/slide23.xml><?xml version="1.0" encoding="utf-8"?>
+<p:sld xmlns:a="http://schemas.openxmlformats.org/drawingml/2006/main" xmlns:r="http://schemas.openxmlformats.org/officeDocument/2006/relationships" xmlns:p="http://schemas.openxmlformats.org/presentationml/2006/main">
+  <p:cSld>
+    <p:spTree>
+      <p:nvGrpSpPr>
+        <p:cNvPr id="1" name=""/>
+        <p:cNvGrpSpPr/>
+        <p:nvPr/>
+      </p:nvGrpSpPr>
+      <p:grpSpPr>
+        <a:xfrm>
+          <a:off x="0" y="0"/>
+          <a:ext cx="0" cy="0"/>
+          <a:chOff x="0" y="0"/>
+          <a:chExt cx="0" cy="0"/>
+        </a:xfrm>
+      </p:grpSpPr>
+      <p:sp>
+        <p:nvSpPr>
+          <p:cNvPr id="2" name="Title 1">
+            <a:extLst>
+              <a:ext uri="{FF2B5EF4-FFF2-40B4-BE49-F238E27FC236}">
+                <a16:creationId xmlns:a16="http://schemas.microsoft.com/office/drawing/2014/main" id="{4FB81BC9-CDCF-3E8F-3210-9DFA65954746}"/>
+              </a:ext>
+            </a:extLst>
+          </p:cNvPr>
+          <p:cNvSpPr>
+            <a:spLocks noGrp="1"/>
+          </p:cNvSpPr>
+          <p:nvPr>
+            <p:ph type="title"/>
+          </p:nvPr>
+        </p:nvSpPr>
+        <p:spPr/>
+        <p:txBody>
+          <a:bodyPr/>
+          <a:lstStyle/>
+          <a:p>
+            <a:r>
+              <a:rPr lang="en-GB" dirty="0"/>
+              <a:t>Deep Learning Methods for Sequential Data</a:t>
+            </a:r>
+          </a:p>
+        </p:txBody>
+      </p:sp>
+      <p:sp>
+        <p:nvSpPr>
+          <p:cNvPr id="5" name="Slide Number Placeholder 4">
+            <a:extLst>
+              <a:ext uri="{FF2B5EF4-FFF2-40B4-BE49-F238E27FC236}">
+                <a16:creationId xmlns:a16="http://schemas.microsoft.com/office/drawing/2014/main" id="{2436F040-A1E9-A369-E93B-C8B18E924C9A}"/>
+              </a:ext>
+            </a:extLst>
+          </p:cNvPr>
+          <p:cNvSpPr>
+            <a:spLocks noGrp="1"/>
+          </p:cNvSpPr>
+          <p:nvPr>
+            <p:ph type="sldNum" sz="quarter" idx="12"/>
+          </p:nvPr>
+        </p:nvSpPr>
+        <p:spPr/>
+        <p:txBody>
+          <a:bodyPr/>
+          <a:lstStyle/>
+          <a:p>
+            <a:fld id="{ADDEFC8A-584C-5E41-A633-418C2FB73F75}" type="slidenum">
+              <a:rPr lang="en-DE" smtClean="0"/>
+              <a:t>23</a:t>
+            </a:fld>
+            <a:endParaRPr lang="en-DE"/>
+          </a:p>
+        </p:txBody>
+      </p:sp>
+      <p:sp>
+        <p:nvSpPr>
+          <p:cNvPr id="9" name="TextBox 8">
+            <a:extLst>
+              <a:ext uri="{FF2B5EF4-FFF2-40B4-BE49-F238E27FC236}">
+                <a16:creationId xmlns:a16="http://schemas.microsoft.com/office/drawing/2014/main" id="{25E51E5F-025A-3326-6DE3-E7A276DD1EEA}"/>
+              </a:ext>
+            </a:extLst>
+          </p:cNvPr>
+          <p:cNvSpPr txBox="1"/>
+          <p:nvPr/>
+        </p:nvSpPr>
+        <p:spPr>
+          <a:xfrm>
+            <a:off x="8358316" y="1965066"/>
+            <a:ext cx="3561835" cy="4478149"/>
+          </a:xfrm>
+          <a:prstGeom prst="rect">
+            <a:avLst/>
+          </a:prstGeom>
+          <a:noFill/>
+          <a:ln>
+            <a:solidFill>
+              <a:schemeClr val="tx1"/>
+            </a:solidFill>
+          </a:ln>
+        </p:spPr>
+        <p:txBody>
+          <a:bodyPr wrap="square" rtlCol="0">
+            <a:spAutoFit/>
+          </a:bodyPr>
+          <a:lstStyle/>
+          <a:p>
+            <a:r>
+              <a:rPr lang="en-GB" sz="1900" b="1" dirty="0"/>
+              <a:t>transformers</a:t>
+            </a:r>
+            <a:endParaRPr lang="en-GB" sz="1900" dirty="0"/>
+          </a:p>
+          <a:p>
+            <a:endParaRPr lang="en-GB" sz="1900" dirty="0"/>
+          </a:p>
+          <a:p>
+            <a:pPr marL="342900" indent="-342900">
+              <a:buFont typeface="Arial" panose="020B0604020202020204" pitchFamily="34" charset="0"/>
+              <a:buChar char="•"/>
+            </a:pPr>
+            <a:r>
+              <a:rPr lang="en-GB" sz="1900" dirty="0"/>
+              <a:t>main application NLP (largely replaced RNNs), but also computer vision</a:t>
+            </a:r>
+          </a:p>
+          <a:p>
+            <a:pPr marL="342900" indent="-342900">
+              <a:buFont typeface="Arial" panose="020B0604020202020204" pitchFamily="34" charset="0"/>
+              <a:buChar char="•"/>
+            </a:pPr>
+            <a:r>
+              <a:rPr lang="en-GB" sz="1900" dirty="0"/>
+              <a:t>time series data as directed graph (attention in edges)</a:t>
+            </a:r>
+          </a:p>
+          <a:p>
+            <a:endParaRPr lang="en-GB" sz="1900" dirty="0"/>
+          </a:p>
+          <a:p>
+            <a:pPr marL="342900" indent="-342900">
+              <a:buFont typeface="Arial" panose="020B0604020202020204" pitchFamily="34" charset="0"/>
+              <a:buChar char="•"/>
+            </a:pPr>
+            <a:r>
+              <a:rPr lang="en-GB" sz="1900" dirty="0"/>
+              <a:t>masked self-attention to focus on relevant past time steps</a:t>
+            </a:r>
+            <a:r>
+              <a:rPr lang="en-GB" sz="1900" dirty="0">
+                <a:sym typeface="Wingdings" panose="05000000000000000000" pitchFamily="2" charset="2"/>
+              </a:rPr>
+              <a:t> and positional encoding to include order of sequence</a:t>
+            </a:r>
+          </a:p>
+          <a:p>
+            <a:endParaRPr lang="en-GB" sz="1900" dirty="0">
+              <a:sym typeface="Wingdings" panose="05000000000000000000" pitchFamily="2" charset="2"/>
+            </a:endParaRPr>
+          </a:p>
+          <a:p>
+            <a:pPr marL="342900" indent="-342900">
+              <a:buFont typeface="Arial" panose="020B0604020202020204" pitchFamily="34" charset="0"/>
+              <a:buChar char="•"/>
+            </a:pPr>
+            <a:r>
+              <a:rPr lang="en-GB" sz="1900" dirty="0">
+                <a:sym typeface="Wingdings" panose="05000000000000000000" pitchFamily="2" charset="2"/>
+              </a:rPr>
+              <a:t>multivariate time series model via input concatenation</a:t>
+            </a:r>
+            <a:endParaRPr lang="en-GB" sz="1900" dirty="0"/>
+          </a:p>
+        </p:txBody>
+      </p:sp>
+      <p:sp>
+        <p:nvSpPr>
+          <p:cNvPr id="10" name="TextBox 9">
+            <a:extLst>
+              <a:ext uri="{FF2B5EF4-FFF2-40B4-BE49-F238E27FC236}">
+                <a16:creationId xmlns:a16="http://schemas.microsoft.com/office/drawing/2014/main" id="{CFD38641-0DF2-4E7C-77AC-134BE72DA495}"/>
+              </a:ext>
+            </a:extLst>
+          </p:cNvPr>
+          <p:cNvSpPr txBox="1"/>
+          <p:nvPr/>
+        </p:nvSpPr>
+        <p:spPr>
+          <a:xfrm>
+            <a:off x="4514335" y="1964947"/>
+            <a:ext cx="3643184" cy="4478149"/>
+          </a:xfrm>
+          <a:prstGeom prst="rect">
+            <a:avLst/>
+          </a:prstGeom>
+          <a:noFill/>
+          <a:ln>
+            <a:solidFill>
+              <a:schemeClr val="tx1"/>
+            </a:solidFill>
+          </a:ln>
+        </p:spPr>
+        <p:txBody>
+          <a:bodyPr wrap="square" rtlCol="0">
+            <a:spAutoFit/>
+          </a:bodyPr>
+          <a:lstStyle/>
+          <a:p>
+            <a:r>
+              <a:rPr lang="en-GB" sz="1900" b="1" dirty="0"/>
+              <a:t>recurrent neural networks (RNN)</a:t>
+            </a:r>
+            <a:endParaRPr lang="en-GB" sz="1900" dirty="0"/>
+          </a:p>
+          <a:p>
+            <a:endParaRPr lang="en-GB" sz="1900" dirty="0"/>
+          </a:p>
+          <a:p>
+            <a:pPr marL="342900" indent="-342900">
+              <a:buFont typeface="Arial" panose="020B0604020202020204" pitchFamily="34" charset="0"/>
+              <a:buChar char="•"/>
+            </a:pPr>
+            <a:r>
+              <a:rPr lang="en-GB" sz="1900" dirty="0"/>
+              <a:t>main application natural language processing (NLP): sequence of words (tokens)</a:t>
+            </a:r>
+          </a:p>
+          <a:p>
+            <a:pPr marL="342900" indent="-342900">
+              <a:buFont typeface="Arial" panose="020B0604020202020204" pitchFamily="34" charset="0"/>
+              <a:buChar char="•"/>
+            </a:pPr>
+            <a:r>
+              <a:rPr lang="en-GB" sz="1900" dirty="0"/>
+              <a:t>time series data as time-tagged stream</a:t>
+            </a:r>
+          </a:p>
+          <a:p>
+            <a:endParaRPr lang="en-GB" sz="1900" dirty="0"/>
+          </a:p>
+          <a:p>
+            <a:pPr marL="342900" indent="-342900">
+              <a:buFont typeface="Arial" panose="020B0604020202020204" pitchFamily="34" charset="0"/>
+              <a:buChar char="•"/>
+            </a:pPr>
+            <a:r>
+              <a:rPr lang="en-GB" sz="1900" dirty="0"/>
+              <a:t>parameter sharing via recurrent nodes </a:t>
+            </a:r>
+            <a:r>
+              <a:rPr lang="en-GB" sz="1900" dirty="0">
+                <a:sym typeface="Wingdings" panose="05000000000000000000" pitchFamily="2" charset="2"/>
+              </a:rPr>
+              <a:t> context-awareness (input from past activations)</a:t>
+            </a:r>
+          </a:p>
+          <a:p>
+            <a:pPr marL="342900" indent="-342900">
+              <a:buFont typeface="Arial" panose="020B0604020202020204" pitchFamily="34" charset="0"/>
+              <a:buChar char="•"/>
+            </a:pPr>
+            <a:r>
+              <a:rPr lang="en-GB" sz="1900" dirty="0">
+                <a:sym typeface="Wingdings" panose="05000000000000000000" pitchFamily="2" charset="2"/>
+              </a:rPr>
+              <a:t>variable-length time series</a:t>
+            </a:r>
+          </a:p>
+          <a:p>
+            <a:endParaRPr lang="en-GB" sz="1900" dirty="0">
+              <a:sym typeface="Wingdings" panose="05000000000000000000" pitchFamily="2" charset="2"/>
+            </a:endParaRPr>
+          </a:p>
+          <a:p>
+            <a:pPr marL="342900" indent="-342900">
+              <a:buFont typeface="Arial" panose="020B0604020202020204" pitchFamily="34" charset="0"/>
+              <a:buChar char="•"/>
+            </a:pPr>
+            <a:r>
+              <a:rPr lang="en-GB" sz="1900" dirty="0">
+                <a:sym typeface="Wingdings" panose="05000000000000000000" pitchFamily="2" charset="2"/>
+              </a:rPr>
+              <a:t>multivariate time series model via more input nodes</a:t>
+            </a:r>
+            <a:endParaRPr lang="en-GB" sz="1900" dirty="0"/>
+          </a:p>
+        </p:txBody>
+      </p:sp>
+      <p:sp>
+        <p:nvSpPr>
+          <p:cNvPr id="11" name="TextBox 10">
+            <a:extLst>
+              <a:ext uri="{FF2B5EF4-FFF2-40B4-BE49-F238E27FC236}">
+                <a16:creationId xmlns:a16="http://schemas.microsoft.com/office/drawing/2014/main" id="{D71AC995-78A3-D447-7B45-0E8F0E01EFF6}"/>
+              </a:ext>
+            </a:extLst>
+          </p:cNvPr>
+          <p:cNvSpPr txBox="1"/>
+          <p:nvPr/>
+        </p:nvSpPr>
+        <p:spPr>
+          <a:xfrm>
+            <a:off x="271849" y="1976967"/>
+            <a:ext cx="4041689" cy="4478149"/>
+          </a:xfrm>
+          <a:prstGeom prst="rect">
+            <a:avLst/>
+          </a:prstGeom>
+          <a:noFill/>
+          <a:ln>
+            <a:solidFill>
+              <a:schemeClr val="tx1"/>
+            </a:solidFill>
+          </a:ln>
+        </p:spPr>
+        <p:txBody>
+          <a:bodyPr wrap="square" rtlCol="0">
+            <a:spAutoFit/>
+          </a:bodyPr>
+          <a:lstStyle/>
+          <a:p>
+            <a:r>
+              <a:rPr lang="en-GB" sz="1900" b="1" dirty="0"/>
+              <a:t>convolutional neural networks (CNN)</a:t>
+            </a:r>
+            <a:endParaRPr lang="en-GB" sz="1900" dirty="0"/>
+          </a:p>
+          <a:p>
+            <a:endParaRPr lang="en-GB" sz="1900" dirty="0"/>
+          </a:p>
+          <a:p>
+            <a:pPr marL="342900" indent="-342900">
+              <a:buFont typeface="Arial" panose="020B0604020202020204" pitchFamily="34" charset="0"/>
+              <a:buChar char="•"/>
+            </a:pPr>
+            <a:r>
+              <a:rPr lang="en-GB" sz="1900" dirty="0"/>
+              <a:t>main application computer vision: images correspond to regular 2D grids of data (pixels)</a:t>
+            </a:r>
+          </a:p>
+          <a:p>
+            <a:pPr marL="342900" indent="-342900">
+              <a:buFont typeface="Arial" panose="020B0604020202020204" pitchFamily="34" charset="0"/>
+              <a:buChar char="•"/>
+            </a:pPr>
+            <a:r>
+              <a:rPr lang="en-GB" sz="1900" dirty="0"/>
+              <a:t>time series data as 1D grid at regular time intervals</a:t>
+            </a:r>
+          </a:p>
+          <a:p>
+            <a:endParaRPr lang="en-GB" sz="1900" dirty="0"/>
+          </a:p>
+          <a:p>
+            <a:pPr marL="342900" indent="-342900">
+              <a:buFont typeface="Arial" panose="020B0604020202020204" pitchFamily="34" charset="0"/>
+              <a:buChar char="•"/>
+            </a:pPr>
+            <a:r>
+              <a:rPr lang="en-GB" sz="1900" dirty="0"/>
+              <a:t>parameter sharing via convolutions (and pooling) </a:t>
+            </a:r>
+            <a:r>
+              <a:rPr lang="en-GB" sz="1900" dirty="0">
+                <a:sym typeface="Wingdings" panose="05000000000000000000" pitchFamily="2" charset="2"/>
+              </a:rPr>
+              <a:t> highly regularized feed-forward networks</a:t>
+            </a:r>
+          </a:p>
+          <a:p>
+            <a:pPr marL="342900" indent="-342900">
+              <a:buFont typeface="Arial" panose="020B0604020202020204" pitchFamily="34" charset="0"/>
+              <a:buChar char="•"/>
+            </a:pPr>
+            <a:r>
+              <a:rPr lang="en-GB" sz="1900" dirty="0">
+                <a:sym typeface="Wingdings" panose="05000000000000000000" pitchFamily="2" charset="2"/>
+              </a:rPr>
+              <a:t>fixed time window (kernel)</a:t>
+            </a:r>
+          </a:p>
+          <a:p>
+            <a:endParaRPr lang="en-GB" sz="1900" dirty="0">
+              <a:sym typeface="Wingdings" panose="05000000000000000000" pitchFamily="2" charset="2"/>
+            </a:endParaRPr>
+          </a:p>
+          <a:p>
+            <a:pPr marL="342900" indent="-342900">
+              <a:buFont typeface="Arial" panose="020B0604020202020204" pitchFamily="34" charset="0"/>
+              <a:buChar char="•"/>
+            </a:pPr>
+            <a:r>
+              <a:rPr lang="en-GB" sz="1900" dirty="0">
+                <a:sym typeface="Wingdings" panose="05000000000000000000" pitchFamily="2" charset="2"/>
+              </a:rPr>
+              <a:t>multivariate time series model via different input channels</a:t>
+            </a:r>
+          </a:p>
+        </p:txBody>
+      </p:sp>
+      <p:sp>
+        <p:nvSpPr>
+          <p:cNvPr id="13" name="TextBox 12">
+            <a:extLst>
+              <a:ext uri="{FF2B5EF4-FFF2-40B4-BE49-F238E27FC236}">
+                <a16:creationId xmlns:a16="http://schemas.microsoft.com/office/drawing/2014/main" id="{99433FDA-AB2D-F6F2-2E5E-DDA9C87C6F30}"/>
+              </a:ext>
+            </a:extLst>
+          </p:cNvPr>
+          <p:cNvSpPr txBox="1"/>
+          <p:nvPr/>
+        </p:nvSpPr>
+        <p:spPr>
+          <a:xfrm>
+            <a:off x="334663" y="1360142"/>
+            <a:ext cx="10312567" cy="461665"/>
+          </a:xfrm>
+          <a:prstGeom prst="rect">
+            <a:avLst/>
+          </a:prstGeom>
+          <a:noFill/>
+        </p:spPr>
+        <p:txBody>
+          <a:bodyPr wrap="none" rtlCol="0">
+            <a:spAutoFit/>
+          </a:bodyPr>
+          <a:lstStyle/>
+          <a:p>
+            <a:r>
+              <a:rPr lang="en-GB" sz="2400" dirty="0">
+                <a:sym typeface="Wingdings" panose="05000000000000000000" pitchFamily="2" charset="2"/>
+              </a:rPr>
+              <a:t></a:t>
+            </a:r>
+            <a:r>
+              <a:rPr lang="en-GB" sz="2400" dirty="0"/>
+              <a:t> direct inclusion of auto-correlation in ML model (but beware: mainly spurious)</a:t>
+            </a:r>
+          </a:p>
+        </p:txBody>
+      </p:sp>
+    </p:spTree>
+    <p:extLst>
+      <p:ext uri="{BB962C8B-B14F-4D97-AF65-F5344CB8AC3E}">
+        <p14:creationId xmlns:p14="http://schemas.microsoft.com/office/powerpoint/2010/main" val="3051137826"/>
+      </p:ext>
+    </p:extLst>
+  </p:cSld>
+  <p:clrMapOvr>
+    <a:masterClrMapping/>
+  </p:clrMapOvr>
+</p:sld>
+</file>
+
 <file path=ppt/slides/slide24.xml><?xml version="1.0" encoding="utf-8"?>
 <p:sld xmlns:a="http://schemas.openxmlformats.org/drawingml/2006/main" xmlns:r="http://schemas.openxmlformats.org/officeDocument/2006/relationships" xmlns:p="http://schemas.openxmlformats.org/presentationml/2006/main">
   <p:cSld>
@@ -16906,460 +17115,6 @@
           <p:cNvPr id="2" name="Title 1">
             <a:extLst>
               <a:ext uri="{FF2B5EF4-FFF2-40B4-BE49-F238E27FC236}">
-                <a16:creationId xmlns:a16="http://schemas.microsoft.com/office/drawing/2014/main" id="{4FB81BC9-CDCF-3E8F-3210-9DFA65954746}"/>
-              </a:ext>
-            </a:extLst>
-          </p:cNvPr>
-          <p:cNvSpPr>
-            <a:spLocks noGrp="1"/>
-          </p:cNvSpPr>
-          <p:nvPr>
-            <p:ph type="title"/>
-          </p:nvPr>
-        </p:nvSpPr>
-        <p:spPr/>
-        <p:txBody>
-          <a:bodyPr/>
-          <a:lstStyle/>
-          <a:p>
-            <a:r>
-              <a:rPr lang="en-GB" dirty="0"/>
-              <a:t>Deep Learning Methods for Sequential Data</a:t>
-            </a:r>
-          </a:p>
-        </p:txBody>
-      </p:sp>
-      <p:sp>
-        <p:nvSpPr>
-          <p:cNvPr id="5" name="Slide Number Placeholder 4">
-            <a:extLst>
-              <a:ext uri="{FF2B5EF4-FFF2-40B4-BE49-F238E27FC236}">
-                <a16:creationId xmlns:a16="http://schemas.microsoft.com/office/drawing/2014/main" id="{2436F040-A1E9-A369-E93B-C8B18E924C9A}"/>
-              </a:ext>
-            </a:extLst>
-          </p:cNvPr>
-          <p:cNvSpPr>
-            <a:spLocks noGrp="1"/>
-          </p:cNvSpPr>
-          <p:nvPr>
-            <p:ph type="sldNum" sz="quarter" idx="12"/>
-          </p:nvPr>
-        </p:nvSpPr>
-        <p:spPr/>
-        <p:txBody>
-          <a:bodyPr/>
-          <a:lstStyle/>
-          <a:p>
-            <a:fld id="{ADDEFC8A-584C-5E41-A633-418C2FB73F75}" type="slidenum">
-              <a:rPr lang="en-DE" smtClean="0"/>
-              <a:t>24</a:t>
-            </a:fld>
-            <a:endParaRPr lang="en-DE"/>
-          </a:p>
-        </p:txBody>
-      </p:sp>
-      <p:sp>
-        <p:nvSpPr>
-          <p:cNvPr id="9" name="TextBox 8">
-            <a:extLst>
-              <a:ext uri="{FF2B5EF4-FFF2-40B4-BE49-F238E27FC236}">
-                <a16:creationId xmlns:a16="http://schemas.microsoft.com/office/drawing/2014/main" id="{25E51E5F-025A-3326-6DE3-E7A276DD1EEA}"/>
-              </a:ext>
-            </a:extLst>
-          </p:cNvPr>
-          <p:cNvSpPr txBox="1"/>
-          <p:nvPr/>
-        </p:nvSpPr>
-        <p:spPr>
-          <a:xfrm>
-            <a:off x="8358316" y="1965066"/>
-            <a:ext cx="3561835" cy="4478149"/>
-          </a:xfrm>
-          <a:prstGeom prst="rect">
-            <a:avLst/>
-          </a:prstGeom>
-          <a:noFill/>
-          <a:ln>
-            <a:solidFill>
-              <a:schemeClr val="tx1"/>
-            </a:solidFill>
-          </a:ln>
-        </p:spPr>
-        <p:txBody>
-          <a:bodyPr wrap="square" rtlCol="0">
-            <a:spAutoFit/>
-          </a:bodyPr>
-          <a:lstStyle/>
-          <a:p>
-            <a:r>
-              <a:rPr lang="en-GB" sz="1900" b="1" dirty="0"/>
-              <a:t>transformers</a:t>
-            </a:r>
-            <a:endParaRPr lang="en-GB" sz="1900" dirty="0"/>
-          </a:p>
-          <a:p>
-            <a:endParaRPr lang="en-GB" sz="1900" dirty="0"/>
-          </a:p>
-          <a:p>
-            <a:pPr marL="342900" indent="-342900">
-              <a:buFont typeface="Arial" panose="020B0604020202020204" pitchFamily="34" charset="0"/>
-              <a:buChar char="•"/>
-            </a:pPr>
-            <a:r>
-              <a:rPr lang="en-GB" sz="1900" dirty="0"/>
-              <a:t>main application NLP (largely replaced RNNs), but also computer vision</a:t>
-            </a:r>
-          </a:p>
-          <a:p>
-            <a:pPr marL="342900" indent="-342900">
-              <a:buFont typeface="Arial" panose="020B0604020202020204" pitchFamily="34" charset="0"/>
-              <a:buChar char="•"/>
-            </a:pPr>
-            <a:r>
-              <a:rPr lang="en-GB" sz="1900" dirty="0"/>
-              <a:t>time series data as directed graph (attention in edges)</a:t>
-            </a:r>
-          </a:p>
-          <a:p>
-            <a:endParaRPr lang="en-GB" sz="1900" dirty="0"/>
-          </a:p>
-          <a:p>
-            <a:pPr marL="342900" indent="-342900">
-              <a:buFont typeface="Arial" panose="020B0604020202020204" pitchFamily="34" charset="0"/>
-              <a:buChar char="•"/>
-            </a:pPr>
-            <a:r>
-              <a:rPr lang="en-GB" sz="1900" dirty="0"/>
-              <a:t>masked self-attention to focus on relevant past time steps</a:t>
-            </a:r>
-            <a:r>
-              <a:rPr lang="en-GB" sz="1900" dirty="0">
-                <a:sym typeface="Wingdings" panose="05000000000000000000" pitchFamily="2" charset="2"/>
-              </a:rPr>
-              <a:t> and positional encoding to include order of sequence</a:t>
-            </a:r>
-          </a:p>
-          <a:p>
-            <a:endParaRPr lang="en-GB" sz="1900" dirty="0">
-              <a:sym typeface="Wingdings" panose="05000000000000000000" pitchFamily="2" charset="2"/>
-            </a:endParaRPr>
-          </a:p>
-          <a:p>
-            <a:pPr marL="342900" indent="-342900">
-              <a:buFont typeface="Arial" panose="020B0604020202020204" pitchFamily="34" charset="0"/>
-              <a:buChar char="•"/>
-            </a:pPr>
-            <a:r>
-              <a:rPr lang="en-GB" sz="1900" dirty="0">
-                <a:sym typeface="Wingdings" panose="05000000000000000000" pitchFamily="2" charset="2"/>
-              </a:rPr>
-              <a:t>multivariate time series model via input concatenation</a:t>
-            </a:r>
-            <a:endParaRPr lang="en-GB" sz="1900" dirty="0"/>
-          </a:p>
-        </p:txBody>
-      </p:sp>
-      <p:sp>
-        <p:nvSpPr>
-          <p:cNvPr id="10" name="TextBox 9">
-            <a:extLst>
-              <a:ext uri="{FF2B5EF4-FFF2-40B4-BE49-F238E27FC236}">
-                <a16:creationId xmlns:a16="http://schemas.microsoft.com/office/drawing/2014/main" id="{CFD38641-0DF2-4E7C-77AC-134BE72DA495}"/>
-              </a:ext>
-            </a:extLst>
-          </p:cNvPr>
-          <p:cNvSpPr txBox="1"/>
-          <p:nvPr/>
-        </p:nvSpPr>
-        <p:spPr>
-          <a:xfrm>
-            <a:off x="4514335" y="1964947"/>
-            <a:ext cx="3643184" cy="4478149"/>
-          </a:xfrm>
-          <a:prstGeom prst="rect">
-            <a:avLst/>
-          </a:prstGeom>
-          <a:noFill/>
-          <a:ln>
-            <a:solidFill>
-              <a:schemeClr val="tx1"/>
-            </a:solidFill>
-          </a:ln>
-        </p:spPr>
-        <p:txBody>
-          <a:bodyPr wrap="square" rtlCol="0">
-            <a:spAutoFit/>
-          </a:bodyPr>
-          <a:lstStyle/>
-          <a:p>
-            <a:r>
-              <a:rPr lang="en-GB" sz="1900" b="1" dirty="0"/>
-              <a:t>recurrent neural networks (RNN)</a:t>
-            </a:r>
-            <a:endParaRPr lang="en-GB" sz="1900" dirty="0"/>
-          </a:p>
-          <a:p>
-            <a:endParaRPr lang="en-GB" sz="1900" dirty="0"/>
-          </a:p>
-          <a:p>
-            <a:pPr marL="342900" indent="-342900">
-              <a:buFont typeface="Arial" panose="020B0604020202020204" pitchFamily="34" charset="0"/>
-              <a:buChar char="•"/>
-            </a:pPr>
-            <a:r>
-              <a:rPr lang="en-GB" sz="1900" dirty="0"/>
-              <a:t>main application natural language processing (NLP): sequence of words (tokens)</a:t>
-            </a:r>
-          </a:p>
-          <a:p>
-            <a:pPr marL="342900" indent="-342900">
-              <a:buFont typeface="Arial" panose="020B0604020202020204" pitchFamily="34" charset="0"/>
-              <a:buChar char="•"/>
-            </a:pPr>
-            <a:r>
-              <a:rPr lang="en-GB" sz="1900" dirty="0"/>
-              <a:t>time series data as time-tagged stream</a:t>
-            </a:r>
-          </a:p>
-          <a:p>
-            <a:endParaRPr lang="en-GB" sz="1900" dirty="0"/>
-          </a:p>
-          <a:p>
-            <a:pPr marL="342900" indent="-342900">
-              <a:buFont typeface="Arial" panose="020B0604020202020204" pitchFamily="34" charset="0"/>
-              <a:buChar char="•"/>
-            </a:pPr>
-            <a:r>
-              <a:rPr lang="en-GB" sz="1900" dirty="0"/>
-              <a:t>parameter sharing via recurrent nodes </a:t>
-            </a:r>
-            <a:r>
-              <a:rPr lang="en-GB" sz="1900" dirty="0">
-                <a:sym typeface="Wingdings" panose="05000000000000000000" pitchFamily="2" charset="2"/>
-              </a:rPr>
-              <a:t> context-awareness (input from past activations)</a:t>
-            </a:r>
-          </a:p>
-          <a:p>
-            <a:pPr marL="342900" indent="-342900">
-              <a:buFont typeface="Arial" panose="020B0604020202020204" pitchFamily="34" charset="0"/>
-              <a:buChar char="•"/>
-            </a:pPr>
-            <a:r>
-              <a:rPr lang="en-GB" sz="1900" dirty="0">
-                <a:sym typeface="Wingdings" panose="05000000000000000000" pitchFamily="2" charset="2"/>
-              </a:rPr>
-              <a:t>variable-length time series</a:t>
-            </a:r>
-          </a:p>
-          <a:p>
-            <a:endParaRPr lang="en-GB" sz="1900" dirty="0">
-              <a:sym typeface="Wingdings" panose="05000000000000000000" pitchFamily="2" charset="2"/>
-            </a:endParaRPr>
-          </a:p>
-          <a:p>
-            <a:pPr marL="342900" indent="-342900">
-              <a:buFont typeface="Arial" panose="020B0604020202020204" pitchFamily="34" charset="0"/>
-              <a:buChar char="•"/>
-            </a:pPr>
-            <a:r>
-              <a:rPr lang="en-GB" sz="1900" dirty="0">
-                <a:sym typeface="Wingdings" panose="05000000000000000000" pitchFamily="2" charset="2"/>
-              </a:rPr>
-              <a:t>multivariate time series model via more input nodes</a:t>
-            </a:r>
-            <a:endParaRPr lang="en-GB" sz="1900" dirty="0"/>
-          </a:p>
-        </p:txBody>
-      </p:sp>
-      <p:sp>
-        <p:nvSpPr>
-          <p:cNvPr id="11" name="TextBox 10">
-            <a:extLst>
-              <a:ext uri="{FF2B5EF4-FFF2-40B4-BE49-F238E27FC236}">
-                <a16:creationId xmlns:a16="http://schemas.microsoft.com/office/drawing/2014/main" id="{D71AC995-78A3-D447-7B45-0E8F0E01EFF6}"/>
-              </a:ext>
-            </a:extLst>
-          </p:cNvPr>
-          <p:cNvSpPr txBox="1"/>
-          <p:nvPr/>
-        </p:nvSpPr>
-        <p:spPr>
-          <a:xfrm>
-            <a:off x="271849" y="1976967"/>
-            <a:ext cx="4041689" cy="4478149"/>
-          </a:xfrm>
-          <a:prstGeom prst="rect">
-            <a:avLst/>
-          </a:prstGeom>
-          <a:noFill/>
-          <a:ln>
-            <a:solidFill>
-              <a:schemeClr val="tx1"/>
-            </a:solidFill>
-          </a:ln>
-        </p:spPr>
-        <p:txBody>
-          <a:bodyPr wrap="square" rtlCol="0">
-            <a:spAutoFit/>
-          </a:bodyPr>
-          <a:lstStyle/>
-          <a:p>
-            <a:r>
-              <a:rPr lang="en-GB" sz="1900" b="1" dirty="0"/>
-              <a:t>convolutional neural networks (CNN)</a:t>
-            </a:r>
-            <a:endParaRPr lang="en-GB" sz="1900" dirty="0"/>
-          </a:p>
-          <a:p>
-            <a:endParaRPr lang="en-GB" sz="1900" dirty="0"/>
-          </a:p>
-          <a:p>
-            <a:pPr marL="342900" indent="-342900">
-              <a:buFont typeface="Arial" panose="020B0604020202020204" pitchFamily="34" charset="0"/>
-              <a:buChar char="•"/>
-            </a:pPr>
-            <a:r>
-              <a:rPr lang="en-GB" sz="1900" dirty="0"/>
-              <a:t>main application computer vision: images correspond to regular 2D grids of data (pixels)</a:t>
-            </a:r>
-          </a:p>
-          <a:p>
-            <a:pPr marL="342900" indent="-342900">
-              <a:buFont typeface="Arial" panose="020B0604020202020204" pitchFamily="34" charset="0"/>
-              <a:buChar char="•"/>
-            </a:pPr>
-            <a:r>
-              <a:rPr lang="en-GB" sz="1900" dirty="0"/>
-              <a:t>time series data as 1D grid at regular time intervals</a:t>
-            </a:r>
-          </a:p>
-          <a:p>
-            <a:endParaRPr lang="en-GB" sz="1900" dirty="0"/>
-          </a:p>
-          <a:p>
-            <a:pPr marL="342900" indent="-342900">
-              <a:buFont typeface="Arial" panose="020B0604020202020204" pitchFamily="34" charset="0"/>
-              <a:buChar char="•"/>
-            </a:pPr>
-            <a:r>
-              <a:rPr lang="en-GB" sz="1900" dirty="0"/>
-              <a:t>parameter sharing via convolutions (and pooling) </a:t>
-            </a:r>
-            <a:r>
-              <a:rPr lang="en-GB" sz="1900" dirty="0">
-                <a:sym typeface="Wingdings" panose="05000000000000000000" pitchFamily="2" charset="2"/>
-              </a:rPr>
-              <a:t> highly regularized feed-forward networks</a:t>
-            </a:r>
-          </a:p>
-          <a:p>
-            <a:pPr marL="342900" indent="-342900">
-              <a:buFont typeface="Arial" panose="020B0604020202020204" pitchFamily="34" charset="0"/>
-              <a:buChar char="•"/>
-            </a:pPr>
-            <a:r>
-              <a:rPr lang="en-GB" sz="1900" dirty="0">
-                <a:sym typeface="Wingdings" panose="05000000000000000000" pitchFamily="2" charset="2"/>
-              </a:rPr>
-              <a:t>fixed time window (kernel)</a:t>
-            </a:r>
-          </a:p>
-          <a:p>
-            <a:endParaRPr lang="en-GB" sz="1900" dirty="0">
-              <a:sym typeface="Wingdings" panose="05000000000000000000" pitchFamily="2" charset="2"/>
-            </a:endParaRPr>
-          </a:p>
-          <a:p>
-            <a:pPr marL="342900" indent="-342900">
-              <a:buFont typeface="Arial" panose="020B0604020202020204" pitchFamily="34" charset="0"/>
-              <a:buChar char="•"/>
-            </a:pPr>
-            <a:r>
-              <a:rPr lang="en-GB" sz="1900" dirty="0">
-                <a:sym typeface="Wingdings" panose="05000000000000000000" pitchFamily="2" charset="2"/>
-              </a:rPr>
-              <a:t>multivariate time series model via different input channels</a:t>
-            </a:r>
-          </a:p>
-        </p:txBody>
-      </p:sp>
-      <p:sp>
-        <p:nvSpPr>
-          <p:cNvPr id="13" name="TextBox 12">
-            <a:extLst>
-              <a:ext uri="{FF2B5EF4-FFF2-40B4-BE49-F238E27FC236}">
-                <a16:creationId xmlns:a16="http://schemas.microsoft.com/office/drawing/2014/main" id="{99433FDA-AB2D-F6F2-2E5E-DDA9C87C6F30}"/>
-              </a:ext>
-            </a:extLst>
-          </p:cNvPr>
-          <p:cNvSpPr txBox="1"/>
-          <p:nvPr/>
-        </p:nvSpPr>
-        <p:spPr>
-          <a:xfrm>
-            <a:off x="334663" y="1360142"/>
-            <a:ext cx="10312567" cy="461665"/>
-          </a:xfrm>
-          <a:prstGeom prst="rect">
-            <a:avLst/>
-          </a:prstGeom>
-          <a:noFill/>
-        </p:spPr>
-        <p:txBody>
-          <a:bodyPr wrap="none" rtlCol="0">
-            <a:spAutoFit/>
-          </a:bodyPr>
-          <a:lstStyle/>
-          <a:p>
-            <a:r>
-              <a:rPr lang="en-GB" sz="2400" dirty="0">
-                <a:sym typeface="Wingdings" panose="05000000000000000000" pitchFamily="2" charset="2"/>
-              </a:rPr>
-              <a:t></a:t>
-            </a:r>
-            <a:r>
-              <a:rPr lang="en-GB" sz="2400" dirty="0"/>
-              <a:t> direct inclusion of auto-correlation in ML model (but beware: mainly spurious)</a:t>
-            </a:r>
-          </a:p>
-        </p:txBody>
-      </p:sp>
-    </p:spTree>
-    <p:extLst>
-      <p:ext uri="{BB962C8B-B14F-4D97-AF65-F5344CB8AC3E}">
-        <p14:creationId xmlns:p14="http://schemas.microsoft.com/office/powerpoint/2010/main" val="3051137826"/>
-      </p:ext>
-    </p:extLst>
-  </p:cSld>
-  <p:clrMapOvr>
-    <a:masterClrMapping/>
-  </p:clrMapOvr>
-</p:sld>
-</file>
-
-<file path=ppt/slides/slide25.xml><?xml version="1.0" encoding="utf-8"?>
-<p:sld xmlns:a="http://schemas.openxmlformats.org/drawingml/2006/main" xmlns:r="http://schemas.openxmlformats.org/officeDocument/2006/relationships" xmlns:p="http://schemas.openxmlformats.org/presentationml/2006/main">
-  <p:cSld>
-    <p:spTree>
-      <p:nvGrpSpPr>
-        <p:cNvPr id="1" name=""/>
-        <p:cNvGrpSpPr/>
-        <p:nvPr/>
-      </p:nvGrpSpPr>
-      <p:grpSpPr>
-        <a:xfrm>
-          <a:off x="0" y="0"/>
-          <a:ext cx="0" cy="0"/>
-          <a:chOff x="0" y="0"/>
-          <a:chExt cx="0" cy="0"/>
-        </a:xfrm>
-      </p:grpSpPr>
-      <p:sp>
-        <p:nvSpPr>
-          <p:cNvPr id="2" name="Title 1">
-            <a:extLst>
-              <a:ext uri="{FF2B5EF4-FFF2-40B4-BE49-F238E27FC236}">
                 <a16:creationId xmlns:a16="http://schemas.microsoft.com/office/drawing/2014/main" id="{E7782324-CE57-4CE6-FEF9-50E74735010C}"/>
               </a:ext>
             </a:extLst>
@@ -17524,7 +17279,7 @@
           <a:p>
             <a:fld id="{60A26886-2117-0949-B8A5-D47461AC229C}" type="slidenum">
               <a:rPr lang="en-DE" smtClean="0"/>
-              <a:t>25</a:t>
+              <a:t>24</a:t>
             </a:fld>
             <a:endParaRPr lang="en-DE"/>
           </a:p>
@@ -17613,7 +17368,7 @@
 </p:sld>
 </file>
 
-<file path=ppt/slides/slide26.xml><?xml version="1.0" encoding="utf-8"?>
+<file path=ppt/slides/slide25.xml><?xml version="1.0" encoding="utf-8"?>
 <p:sld xmlns:a="http://schemas.openxmlformats.org/drawingml/2006/main" xmlns:r="http://schemas.openxmlformats.org/officeDocument/2006/relationships" xmlns:p="http://schemas.openxmlformats.org/presentationml/2006/main">
   <p:cSld>
     <p:spTree>
@@ -18451,7 +18206,7 @@
           <a:p>
             <a:fld id="{290AF890-0265-4349-BF13-E30F01A2AA85}" type="slidenum">
               <a:rPr lang="en-DE" smtClean="0"/>
-              <a:t>26</a:t>
+              <a:t>25</a:t>
             </a:fld>
             <a:endParaRPr lang="en-DE" dirty="0"/>
           </a:p>
@@ -18482,6 +18237,89 @@
 </p:sld>
 </file>
 
+<file path=ppt/slides/slide26.xml><?xml version="1.0" encoding="utf-8"?>
+<p:sld xmlns:a="http://schemas.openxmlformats.org/drawingml/2006/main" xmlns:r="http://schemas.openxmlformats.org/officeDocument/2006/relationships" xmlns:p="http://schemas.openxmlformats.org/presentationml/2006/main">
+  <p:cSld>
+    <p:spTree>
+      <p:nvGrpSpPr>
+        <p:cNvPr id="1" name=""/>
+        <p:cNvGrpSpPr/>
+        <p:nvPr/>
+      </p:nvGrpSpPr>
+      <p:grpSpPr>
+        <a:xfrm>
+          <a:off x="0" y="0"/>
+          <a:ext cx="0" cy="0"/>
+          <a:chOff x="0" y="0"/>
+          <a:chExt cx="0" cy="0"/>
+        </a:xfrm>
+      </p:grpSpPr>
+      <p:sp>
+        <p:nvSpPr>
+          <p:cNvPr id="2" name="Titel 1">
+            <a:extLst>
+              <a:ext uri="{FF2B5EF4-FFF2-40B4-BE49-F238E27FC236}">
+                <a16:creationId xmlns:a16="http://schemas.microsoft.com/office/drawing/2014/main" id="{68FA7B5C-0B9D-9D41-A773-244A0E8234C6}"/>
+              </a:ext>
+            </a:extLst>
+          </p:cNvPr>
+          <p:cNvSpPr>
+            <a:spLocks noGrp="1"/>
+          </p:cNvSpPr>
+          <p:nvPr>
+            <p:ph type="title"/>
+          </p:nvPr>
+        </p:nvSpPr>
+        <p:spPr/>
+        <p:txBody>
+          <a:bodyPr/>
+          <a:lstStyle/>
+          <a:p>
+            <a:r>
+              <a:rPr lang="de-DE" dirty="0"/>
+              <a:t>Train/Test Splits in Time</a:t>
+            </a:r>
+          </a:p>
+        </p:txBody>
+      </p:sp>
+      <p:sp>
+        <p:nvSpPr>
+          <p:cNvPr id="3" name="Inhaltsplatzhalter 2">
+            <a:extLst>
+              <a:ext uri="{FF2B5EF4-FFF2-40B4-BE49-F238E27FC236}">
+                <a16:creationId xmlns:a16="http://schemas.microsoft.com/office/drawing/2014/main" id="{B86779A8-933F-8035-2A8F-A48538EAB7B0}"/>
+              </a:ext>
+            </a:extLst>
+          </p:cNvPr>
+          <p:cNvSpPr>
+            <a:spLocks noGrp="1"/>
+          </p:cNvSpPr>
+          <p:nvPr>
+            <p:ph idx="1"/>
+          </p:nvPr>
+        </p:nvSpPr>
+        <p:spPr/>
+        <p:txBody>
+          <a:bodyPr/>
+          <a:lstStyle/>
+          <a:p>
+            <a:endParaRPr lang="de-DE"/>
+          </a:p>
+        </p:txBody>
+      </p:sp>
+    </p:spTree>
+    <p:extLst>
+      <p:ext uri="{BB962C8B-B14F-4D97-AF65-F5344CB8AC3E}">
+        <p14:creationId xmlns:p14="http://schemas.microsoft.com/office/powerpoint/2010/main" val="556644343"/>
+      </p:ext>
+    </p:extLst>
+  </p:cSld>
+  <p:clrMapOvr>
+    <a:masterClrMapping/>
+  </p:clrMapOvr>
+</p:sld>
+</file>
+
 <file path=ppt/slides/slide27.xml><?xml version="1.0" encoding="utf-8"?>
 <p:sld xmlns:a="http://schemas.openxmlformats.org/drawingml/2006/main" xmlns:r="http://schemas.openxmlformats.org/officeDocument/2006/relationships" xmlns:p="http://schemas.openxmlformats.org/presentationml/2006/main">
   <p:cSld>
@@ -18501,10 +18339,10 @@
       </p:grpSpPr>
       <p:sp>
         <p:nvSpPr>
-          <p:cNvPr id="2" name="Titel 1">
-            <a:extLst>
-              <a:ext uri="{FF2B5EF4-FFF2-40B4-BE49-F238E27FC236}">
-                <a16:creationId xmlns:a16="http://schemas.microsoft.com/office/drawing/2014/main" id="{68FA7B5C-0B9D-9D41-A773-244A0E8234C6}"/>
+          <p:cNvPr id="2" name="Title 1">
+            <a:extLst>
+              <a:ext uri="{FF2B5EF4-FFF2-40B4-BE49-F238E27FC236}">
+                <a16:creationId xmlns:a16="http://schemas.microsoft.com/office/drawing/2014/main" id="{FAF00118-42C4-0F41-5612-17227D0CB322}"/>
               </a:ext>
             </a:extLst>
           </p:cNvPr>
@@ -18521,26 +18359,30 @@
           <a:lstStyle/>
           <a:p>
             <a:r>
-              <a:rPr lang="de-DE" dirty="0"/>
-              <a:t>Train/Test Splits in Time</a:t>
-            </a:r>
-          </a:p>
-        </p:txBody>
-      </p:sp>
-      <p:sp>
-        <p:nvSpPr>
-          <p:cNvPr id="3" name="Inhaltsplatzhalter 2">
-            <a:extLst>
-              <a:ext uri="{FF2B5EF4-FFF2-40B4-BE49-F238E27FC236}">
-                <a16:creationId xmlns:a16="http://schemas.microsoft.com/office/drawing/2014/main" id="{B86779A8-933F-8035-2A8F-A48538EAB7B0}"/>
-              </a:ext>
-            </a:extLst>
-          </p:cNvPr>
-          <p:cNvSpPr>
-            <a:spLocks noGrp="1"/>
-          </p:cNvSpPr>
-          <p:nvPr>
-            <p:ph idx="1"/>
+              <a:rPr lang="en-GB" dirty="0"/>
+              <a:t>Model </a:t>
+            </a:r>
+            <a:r>
+              <a:rPr lang="en-DE" dirty="0"/>
+              <a:t>Evaluation</a:t>
+            </a:r>
+          </a:p>
+        </p:txBody>
+      </p:sp>
+      <p:sp>
+        <p:nvSpPr>
+          <p:cNvPr id="4" name="Slide Number Placeholder 3">
+            <a:extLst>
+              <a:ext uri="{FF2B5EF4-FFF2-40B4-BE49-F238E27FC236}">
+                <a16:creationId xmlns:a16="http://schemas.microsoft.com/office/drawing/2014/main" id="{64ED337D-9FEE-AC0F-54C9-AE8B1187FB21}"/>
+              </a:ext>
+            </a:extLst>
+          </p:cNvPr>
+          <p:cNvSpPr>
+            <a:spLocks noGrp="1"/>
+          </p:cNvSpPr>
+          <p:nvPr>
+            <p:ph type="sldNum" sz="quarter" idx="12"/>
           </p:nvPr>
         </p:nvSpPr>
         <p:spPr/>
@@ -18548,14 +18390,510 @@
           <a:bodyPr/>
           <a:lstStyle/>
           <a:p>
-            <a:endParaRPr lang="de-DE"/>
+            <a:fld id="{ADDEFC8A-584C-5E41-A633-418C2FB73F75}" type="slidenum">
+              <a:rPr lang="en-DE" smtClean="0"/>
+              <a:t>27</a:t>
+            </a:fld>
+            <a:endParaRPr lang="en-DE" dirty="0"/>
+          </a:p>
+        </p:txBody>
+      </p:sp>
+      <p:pic>
+        <p:nvPicPr>
+          <p:cNvPr id="5" name="Picture 4">
+            <a:extLst>
+              <a:ext uri="{FF2B5EF4-FFF2-40B4-BE49-F238E27FC236}">
+                <a16:creationId xmlns:a16="http://schemas.microsoft.com/office/drawing/2014/main" id="{8B505B5F-123A-B6E0-3607-60D3F212C56A}"/>
+              </a:ext>
+            </a:extLst>
+          </p:cNvPr>
+          <p:cNvPicPr>
+            <a:picLocks noChangeAspect="1"/>
+          </p:cNvPicPr>
+          <p:nvPr/>
+        </p:nvPicPr>
+        <p:blipFill>
+          <a:blip r:embed="rId2">
+            <a:extLst>
+              <a:ext uri="{28A0092B-C50C-407E-A947-70E740481C1C}">
+                <a14:useLocalDpi xmlns:a14="http://schemas.microsoft.com/office/drawing/2010/main" val="0"/>
+              </a:ext>
+            </a:extLst>
+          </a:blip>
+          <a:stretch>
+            <a:fillRect/>
+          </a:stretch>
+        </p:blipFill>
+        <p:spPr>
+          <a:xfrm>
+            <a:off x="3885321" y="1939887"/>
+            <a:ext cx="7195226" cy="1749037"/>
+          </a:xfrm>
+          <a:prstGeom prst="rect">
+            <a:avLst/>
+          </a:prstGeom>
+        </p:spPr>
+      </p:pic>
+      <p:sp>
+        <p:nvSpPr>
+          <p:cNvPr id="7" name="TextBox 6">
+            <a:extLst>
+              <a:ext uri="{FF2B5EF4-FFF2-40B4-BE49-F238E27FC236}">
+                <a16:creationId xmlns:a16="http://schemas.microsoft.com/office/drawing/2014/main" id="{3914D98B-D2BF-EE2C-D3A8-8BC1BF95243B}"/>
+              </a:ext>
+            </a:extLst>
+          </p:cNvPr>
+          <p:cNvSpPr txBox="1"/>
+          <p:nvPr/>
+        </p:nvSpPr>
+        <p:spPr>
+          <a:xfrm>
+            <a:off x="1169603" y="2598961"/>
+            <a:ext cx="2479759" cy="430887"/>
+          </a:xfrm>
+          <a:prstGeom prst="rect">
+            <a:avLst/>
+          </a:prstGeom>
+          <a:noFill/>
+        </p:spPr>
+        <p:txBody>
+          <a:bodyPr wrap="square" rtlCol="0">
+            <a:spAutoFit/>
+          </a:bodyPr>
+          <a:lstStyle/>
+          <a:p>
+            <a:pPr algn="ctr"/>
+            <a:r>
+              <a:rPr lang="en-GB" sz="2200" b="1" dirty="0">
+                <a:solidFill>
+                  <a:schemeClr val="accent1">
+                    <a:lumMod val="50000"/>
+                  </a:schemeClr>
+                </a:solidFill>
+                <a:latin typeface="AccordAlternate" panose="02000000000000000000" pitchFamily="50" charset="0"/>
+              </a:rPr>
+              <a:t>c</a:t>
+            </a:r>
+            <a:r>
+              <a:rPr lang="en-DE" sz="2200" b="1" dirty="0">
+                <a:solidFill>
+                  <a:schemeClr val="accent1">
+                    <a:lumMod val="50000"/>
+                  </a:schemeClr>
+                </a:solidFill>
+                <a:latin typeface="AccordAlternate" panose="02000000000000000000" pitchFamily="50" charset="0"/>
+              </a:rPr>
+              <a:t>ross-validation</a:t>
+            </a:r>
+            <a:r>
+              <a:rPr lang="en-GB" sz="2200" b="1" dirty="0">
+                <a:solidFill>
+                  <a:schemeClr val="accent1">
+                    <a:lumMod val="50000"/>
+                  </a:schemeClr>
+                </a:solidFill>
+                <a:latin typeface="AccordAlternate" panose="02000000000000000000" pitchFamily="50" charset="0"/>
+              </a:rPr>
+              <a:t>:</a:t>
+            </a:r>
+            <a:endParaRPr lang="en-US" sz="2200" b="1" dirty="0">
+              <a:solidFill>
+                <a:schemeClr val="accent1">
+                  <a:lumMod val="50000"/>
+                </a:schemeClr>
+              </a:solidFill>
+              <a:latin typeface="AccordAlternate" panose="02000000000000000000" pitchFamily="50" charset="0"/>
+            </a:endParaRPr>
+          </a:p>
+        </p:txBody>
+      </p:sp>
+      <p:sp>
+        <p:nvSpPr>
+          <p:cNvPr id="9" name="TextBox 8">
+            <a:extLst>
+              <a:ext uri="{FF2B5EF4-FFF2-40B4-BE49-F238E27FC236}">
+                <a16:creationId xmlns:a16="http://schemas.microsoft.com/office/drawing/2014/main" id="{43BCBC49-ACFE-2FE2-4091-937FD9A6CF1F}"/>
+              </a:ext>
+            </a:extLst>
+          </p:cNvPr>
+          <p:cNvSpPr txBox="1"/>
+          <p:nvPr/>
+        </p:nvSpPr>
+        <p:spPr>
+          <a:xfrm>
+            <a:off x="838200" y="3826258"/>
+            <a:ext cx="10528044" cy="369332"/>
+          </a:xfrm>
+          <a:prstGeom prst="rect">
+            <a:avLst/>
+          </a:prstGeom>
+          <a:noFill/>
+        </p:spPr>
+        <p:txBody>
+          <a:bodyPr wrap="square" rtlCol="0">
+            <a:spAutoFit/>
+          </a:bodyPr>
+          <a:lstStyle/>
+          <a:p>
+            <a:pPr marL="4762" lvl="1" indent="0">
+              <a:buNone/>
+            </a:pPr>
+            <a:r>
+              <a:rPr lang="en-GB" dirty="0"/>
+              <a:t>decide on acceptance of model changes by accuracy measure: improved model vs baseline (current best)</a:t>
+            </a:r>
+          </a:p>
+        </p:txBody>
+      </p:sp>
+      <p:sp>
+        <p:nvSpPr>
+          <p:cNvPr id="10" name="TextBox 9">
+            <a:extLst>
+              <a:ext uri="{FF2B5EF4-FFF2-40B4-BE49-F238E27FC236}">
+                <a16:creationId xmlns:a16="http://schemas.microsoft.com/office/drawing/2014/main" id="{C4A685AE-B3DA-A7CC-132F-46CB4DFB28F0}"/>
+              </a:ext>
+            </a:extLst>
+          </p:cNvPr>
+          <p:cNvSpPr txBox="1"/>
+          <p:nvPr/>
+        </p:nvSpPr>
+        <p:spPr>
+          <a:xfrm>
+            <a:off x="3489057" y="1488843"/>
+            <a:ext cx="4974436" cy="369332"/>
+          </a:xfrm>
+          <a:prstGeom prst="rect">
+            <a:avLst/>
+          </a:prstGeom>
+          <a:solidFill>
+            <a:schemeClr val="accent3">
+              <a:lumMod val="40000"/>
+              <a:lumOff val="60000"/>
+            </a:schemeClr>
+          </a:solidFill>
+        </p:spPr>
+        <p:txBody>
+          <a:bodyPr wrap="square" rtlCol="0">
+            <a:spAutoFit/>
+          </a:bodyPr>
+          <a:lstStyle/>
+          <a:p>
+            <a:pPr algn="ctr"/>
+            <a:r>
+              <a:rPr lang="en-GB" b="1" dirty="0"/>
+              <a:t>test structure</a:t>
+            </a:r>
+          </a:p>
+        </p:txBody>
+      </p:sp>
+      <p:sp>
+        <p:nvSpPr>
+          <p:cNvPr id="11" name="TextBox 10">
+            <a:extLst>
+              <a:ext uri="{FF2B5EF4-FFF2-40B4-BE49-F238E27FC236}">
+                <a16:creationId xmlns:a16="http://schemas.microsoft.com/office/drawing/2014/main" id="{510F9C11-CB62-8F16-CDA5-1744902446D3}"/>
+              </a:ext>
+            </a:extLst>
+          </p:cNvPr>
+          <p:cNvSpPr txBox="1"/>
+          <p:nvPr/>
+        </p:nvSpPr>
+        <p:spPr>
+          <a:xfrm>
+            <a:off x="3489057" y="4478863"/>
+            <a:ext cx="4974436" cy="646331"/>
+          </a:xfrm>
+          <a:prstGeom prst="rect">
+            <a:avLst/>
+          </a:prstGeom>
+          <a:solidFill>
+            <a:schemeClr val="accent3">
+              <a:lumMod val="40000"/>
+              <a:lumOff val="60000"/>
+            </a:schemeClr>
+          </a:solidFill>
+        </p:spPr>
+        <p:txBody>
+          <a:bodyPr wrap="square" rtlCol="0">
+            <a:spAutoFit/>
+          </a:bodyPr>
+          <a:lstStyle/>
+          <a:p>
+            <a:pPr algn="ctr"/>
+            <a:r>
+              <a:rPr lang="en-GB" b="1" dirty="0"/>
+              <a:t>measure (out-of-sample) accuracy of predictions</a:t>
+            </a:r>
+            <a:r>
+              <a:rPr lang="en-GB" dirty="0"/>
+              <a:t> (loss function in training as proxy of this)</a:t>
+            </a:r>
+            <a:endParaRPr lang="en-GB" b="1" dirty="0"/>
+          </a:p>
+        </p:txBody>
+      </p:sp>
+      <p:sp>
+        <p:nvSpPr>
+          <p:cNvPr id="12" name="TextBox 11">
+            <a:extLst>
+              <a:ext uri="{FF2B5EF4-FFF2-40B4-BE49-F238E27FC236}">
+                <a16:creationId xmlns:a16="http://schemas.microsoft.com/office/drawing/2014/main" id="{BF62E2C6-C6E5-60CB-D782-46F1EFDBAC78}"/>
+              </a:ext>
+            </a:extLst>
+          </p:cNvPr>
+          <p:cNvSpPr txBox="1"/>
+          <p:nvPr/>
+        </p:nvSpPr>
+        <p:spPr>
+          <a:xfrm>
+            <a:off x="1111905" y="4989042"/>
+            <a:ext cx="2595154" cy="369332"/>
+          </a:xfrm>
+          <a:prstGeom prst="rect">
+            <a:avLst/>
+          </a:prstGeom>
+          <a:noFill/>
+        </p:spPr>
+        <p:txBody>
+          <a:bodyPr wrap="square" rtlCol="0">
+            <a:spAutoFit/>
+          </a:bodyPr>
+          <a:lstStyle/>
+          <a:p>
+            <a:pPr algn="ctr"/>
+            <a:r>
+              <a:rPr lang="en-US" b="1" dirty="0">
+                <a:solidFill>
+                  <a:schemeClr val="accent1">
+                    <a:lumMod val="50000"/>
+                  </a:schemeClr>
+                </a:solidFill>
+                <a:latin typeface="AccordAlternate" panose="02000000000000000000" pitchFamily="50" charset="0"/>
+              </a:rPr>
+              <a:t>regression</a:t>
+            </a:r>
+          </a:p>
+        </p:txBody>
+      </p:sp>
+      <p:sp>
+        <p:nvSpPr>
+          <p:cNvPr id="13" name="TextBox 12">
+            <a:extLst>
+              <a:ext uri="{FF2B5EF4-FFF2-40B4-BE49-F238E27FC236}">
+                <a16:creationId xmlns:a16="http://schemas.microsoft.com/office/drawing/2014/main" id="{01176C67-3349-8F90-0C9E-4FE4F29243E0}"/>
+              </a:ext>
+            </a:extLst>
+          </p:cNvPr>
+          <p:cNvSpPr txBox="1"/>
+          <p:nvPr/>
+        </p:nvSpPr>
+        <p:spPr>
+          <a:xfrm>
+            <a:off x="838199" y="5536895"/>
+            <a:ext cx="7037174" cy="646331"/>
+          </a:xfrm>
+          <a:prstGeom prst="rect">
+            <a:avLst/>
+          </a:prstGeom>
+          <a:noFill/>
+        </p:spPr>
+        <p:txBody>
+          <a:bodyPr wrap="square" rtlCol="0">
+            <a:spAutoFit/>
+          </a:bodyPr>
+          <a:lstStyle/>
+          <a:p>
+            <a:pPr marL="339725" indent="-287338">
+              <a:buFont typeface="Arial" panose="020B0604020202020204" pitchFamily="34" charset="0"/>
+              <a:buChar char="•"/>
+              <a:tabLst>
+                <a:tab pos="227013" algn="l"/>
+              </a:tabLst>
+            </a:pPr>
+            <a:r>
+              <a:rPr lang="en-US" dirty="0"/>
+              <a:t>p</a:t>
+            </a:r>
+            <a:r>
+              <a:rPr lang="en-DE" dirty="0"/>
+              <a:t>oint estimate: </a:t>
+            </a:r>
+            <a:r>
+              <a:rPr lang="en-GB" dirty="0"/>
+              <a:t>a</a:t>
+            </a:r>
+            <a:r>
+              <a:rPr lang="en-DE" dirty="0"/>
+              <a:t>bsolute (MAD, MSE, …) or</a:t>
+            </a:r>
+            <a:r>
+              <a:rPr lang="en-US" dirty="0"/>
+              <a:t> </a:t>
+            </a:r>
+            <a:r>
+              <a:rPr lang="en-DE" dirty="0"/>
+              <a:t>relative (MAPE, …)</a:t>
+            </a:r>
+            <a:r>
+              <a:rPr lang="en-GB" dirty="0"/>
+              <a:t> </a:t>
+            </a:r>
+            <a:r>
+              <a:rPr lang="en-DE" dirty="0"/>
+              <a:t>metrics</a:t>
+            </a:r>
+          </a:p>
+          <a:p>
+            <a:pPr marL="339725" indent="-279400">
+              <a:buFont typeface="Arial" panose="020B0604020202020204" pitchFamily="34" charset="0"/>
+              <a:buChar char="•"/>
+            </a:pPr>
+            <a:r>
+              <a:rPr lang="en-GB" dirty="0"/>
+              <a:t>full probability distribution: a bit tricky</a:t>
+            </a:r>
+            <a:endParaRPr lang="en-DE" dirty="0"/>
+          </a:p>
+        </p:txBody>
+      </p:sp>
+      <p:sp>
+        <p:nvSpPr>
+          <p:cNvPr id="15" name="TextBox 14">
+            <a:extLst>
+              <a:ext uri="{FF2B5EF4-FFF2-40B4-BE49-F238E27FC236}">
+                <a16:creationId xmlns:a16="http://schemas.microsoft.com/office/drawing/2014/main" id="{80CB76A6-5812-6AB0-6767-EC66BDD0DD7D}"/>
+              </a:ext>
+            </a:extLst>
+          </p:cNvPr>
+          <p:cNvSpPr txBox="1"/>
+          <p:nvPr/>
+        </p:nvSpPr>
+        <p:spPr>
+          <a:xfrm>
+            <a:off x="8065102" y="4989042"/>
+            <a:ext cx="2595154" cy="369332"/>
+          </a:xfrm>
+          <a:prstGeom prst="rect">
+            <a:avLst/>
+          </a:prstGeom>
+          <a:noFill/>
+        </p:spPr>
+        <p:txBody>
+          <a:bodyPr wrap="square" rtlCol="0">
+            <a:spAutoFit/>
+          </a:bodyPr>
+          <a:lstStyle/>
+          <a:p>
+            <a:pPr algn="ctr"/>
+            <a:r>
+              <a:rPr lang="en-US" b="1" dirty="0">
+                <a:solidFill>
+                  <a:schemeClr val="accent1">
+                    <a:lumMod val="50000"/>
+                  </a:schemeClr>
+                </a:solidFill>
+                <a:latin typeface="AccordAlternate" panose="02000000000000000000" pitchFamily="50" charset="0"/>
+              </a:rPr>
+              <a:t>classification</a:t>
+            </a:r>
+          </a:p>
+        </p:txBody>
+      </p:sp>
+      <p:pic>
+        <p:nvPicPr>
+          <p:cNvPr id="17" name="Picture 2" descr="Receiver operating characteristic - Wikipedia">
+            <a:extLst>
+              <a:ext uri="{FF2B5EF4-FFF2-40B4-BE49-F238E27FC236}">
+                <a16:creationId xmlns:a16="http://schemas.microsoft.com/office/drawing/2014/main" id="{89F06512-1EFD-39BC-A15F-563A80636E21}"/>
+              </a:ext>
+            </a:extLst>
+          </p:cNvPr>
+          <p:cNvPicPr>
+            <a:picLocks noChangeAspect="1" noChangeArrowheads="1"/>
+          </p:cNvPicPr>
+          <p:nvPr/>
+        </p:nvPicPr>
+        <p:blipFill>
+          <a:blip r:embed="rId3">
+            <a:extLst>
+              <a:ext uri="{28A0092B-C50C-407E-A947-70E740481C1C}">
+                <a14:useLocalDpi xmlns:a14="http://schemas.microsoft.com/office/drawing/2010/main" val="0"/>
+              </a:ext>
+            </a:extLst>
+          </a:blip>
+          <a:srcRect/>
+          <a:stretch>
+            <a:fillRect/>
+          </a:stretch>
+        </p:blipFill>
+        <p:spPr bwMode="auto">
+          <a:xfrm>
+            <a:off x="8463493" y="5335323"/>
+            <a:ext cx="1848203" cy="1386152"/>
+          </a:xfrm>
+          <a:prstGeom prst="rect">
+            <a:avLst/>
+          </a:prstGeom>
+          <a:noFill/>
+          <a:extLst>
+            <a:ext uri="{909E8E84-426E-40DD-AFC4-6F175D3DCCD1}">
+              <a14:hiddenFill xmlns:a14="http://schemas.microsoft.com/office/drawing/2010/main">
+                <a:solidFill>
+                  <a:srgbClr val="FFFFFF"/>
+                </a:solidFill>
+              </a14:hiddenFill>
+            </a:ext>
+          </a:extLst>
+        </p:spPr>
+      </p:pic>
+      <p:sp>
+        <p:nvSpPr>
+          <p:cNvPr id="3" name="TextBox 2">
+            <a:extLst>
+              <a:ext uri="{FF2B5EF4-FFF2-40B4-BE49-F238E27FC236}">
+                <a16:creationId xmlns:a16="http://schemas.microsoft.com/office/drawing/2014/main" id="{D4851D45-9DF9-BE1C-8FA8-AE1DDB1DB604}"/>
+              </a:ext>
+            </a:extLst>
+          </p:cNvPr>
+          <p:cNvSpPr txBox="1"/>
+          <p:nvPr/>
+        </p:nvSpPr>
+        <p:spPr>
+          <a:xfrm>
+            <a:off x="10032121" y="6598364"/>
+            <a:ext cx="962123" cy="246221"/>
+          </a:xfrm>
+          <a:prstGeom prst="rect">
+            <a:avLst/>
+          </a:prstGeom>
+          <a:noFill/>
+        </p:spPr>
+        <p:txBody>
+          <a:bodyPr wrap="none" rtlCol="0">
+            <a:spAutoFit/>
+          </a:bodyPr>
+          <a:lstStyle/>
+          <a:p>
+            <a:r>
+              <a:rPr lang="de-DE" sz="1000" dirty="0" err="1"/>
+              <a:t>from</a:t>
+            </a:r>
+            <a:r>
+              <a:rPr lang="de-DE" sz="1000" dirty="0"/>
+              <a:t> </a:t>
+            </a:r>
+            <a:r>
+              <a:rPr lang="de-DE" sz="1000" dirty="0" err="1"/>
+              <a:t>wikipedia</a:t>
+            </a:r>
+            <a:endParaRPr lang="de-DE" sz="1000" dirty="0"/>
           </a:p>
         </p:txBody>
       </p:sp>
     </p:spTree>
     <p:extLst>
       <p:ext uri="{BB962C8B-B14F-4D97-AF65-F5344CB8AC3E}">
-        <p14:creationId xmlns:p14="http://schemas.microsoft.com/office/powerpoint/2010/main" val="556644343"/>
+        <p14:creationId xmlns:p14="http://schemas.microsoft.com/office/powerpoint/2010/main" val="1198576018"/>
       </p:ext>
     </p:extLst>
   </p:cSld>
@@ -18584,589 +18922,6 @@
       </p:grpSpPr>
       <p:sp>
         <p:nvSpPr>
-          <p:cNvPr id="2" name="Title 1">
-            <a:extLst>
-              <a:ext uri="{FF2B5EF4-FFF2-40B4-BE49-F238E27FC236}">
-                <a16:creationId xmlns:a16="http://schemas.microsoft.com/office/drawing/2014/main" id="{FAF00118-42C4-0F41-5612-17227D0CB322}"/>
-              </a:ext>
-            </a:extLst>
-          </p:cNvPr>
-          <p:cNvSpPr>
-            <a:spLocks noGrp="1"/>
-          </p:cNvSpPr>
-          <p:nvPr>
-            <p:ph type="title"/>
-          </p:nvPr>
-        </p:nvSpPr>
-        <p:spPr/>
-        <p:txBody>
-          <a:bodyPr/>
-          <a:lstStyle/>
-          <a:p>
-            <a:r>
-              <a:rPr lang="en-GB" dirty="0"/>
-              <a:t>Model </a:t>
-            </a:r>
-            <a:r>
-              <a:rPr lang="en-DE" dirty="0"/>
-              <a:t>Evaluation</a:t>
-            </a:r>
-          </a:p>
-        </p:txBody>
-      </p:sp>
-      <p:sp>
-        <p:nvSpPr>
-          <p:cNvPr id="4" name="Slide Number Placeholder 3">
-            <a:extLst>
-              <a:ext uri="{FF2B5EF4-FFF2-40B4-BE49-F238E27FC236}">
-                <a16:creationId xmlns:a16="http://schemas.microsoft.com/office/drawing/2014/main" id="{64ED337D-9FEE-AC0F-54C9-AE8B1187FB21}"/>
-              </a:ext>
-            </a:extLst>
-          </p:cNvPr>
-          <p:cNvSpPr>
-            <a:spLocks noGrp="1"/>
-          </p:cNvSpPr>
-          <p:nvPr>
-            <p:ph type="sldNum" sz="quarter" idx="12"/>
-          </p:nvPr>
-        </p:nvSpPr>
-        <p:spPr/>
-        <p:txBody>
-          <a:bodyPr/>
-          <a:lstStyle/>
-          <a:p>
-            <a:fld id="{ADDEFC8A-584C-5E41-A633-418C2FB73F75}" type="slidenum">
-              <a:rPr lang="en-DE" smtClean="0"/>
-              <a:t>28</a:t>
-            </a:fld>
-            <a:endParaRPr lang="en-DE" dirty="0"/>
-          </a:p>
-        </p:txBody>
-      </p:sp>
-      <p:pic>
-        <p:nvPicPr>
-          <p:cNvPr id="5" name="Picture 4">
-            <a:extLst>
-              <a:ext uri="{FF2B5EF4-FFF2-40B4-BE49-F238E27FC236}">
-                <a16:creationId xmlns:a16="http://schemas.microsoft.com/office/drawing/2014/main" id="{8B505B5F-123A-B6E0-3607-60D3F212C56A}"/>
-              </a:ext>
-            </a:extLst>
-          </p:cNvPr>
-          <p:cNvPicPr>
-            <a:picLocks noChangeAspect="1"/>
-          </p:cNvPicPr>
-          <p:nvPr/>
-        </p:nvPicPr>
-        <p:blipFill>
-          <a:blip r:embed="rId2">
-            <a:extLst>
-              <a:ext uri="{28A0092B-C50C-407E-A947-70E740481C1C}">
-                <a14:useLocalDpi xmlns:a14="http://schemas.microsoft.com/office/drawing/2010/main" val="0"/>
-              </a:ext>
-            </a:extLst>
-          </a:blip>
-          <a:stretch>
-            <a:fillRect/>
-          </a:stretch>
-        </p:blipFill>
-        <p:spPr>
-          <a:xfrm>
-            <a:off x="3885321" y="1939887"/>
-            <a:ext cx="7195226" cy="1749037"/>
-          </a:xfrm>
-          <a:prstGeom prst="rect">
-            <a:avLst/>
-          </a:prstGeom>
-        </p:spPr>
-      </p:pic>
-      <p:sp>
-        <p:nvSpPr>
-          <p:cNvPr id="7" name="TextBox 6">
-            <a:extLst>
-              <a:ext uri="{FF2B5EF4-FFF2-40B4-BE49-F238E27FC236}">
-                <a16:creationId xmlns:a16="http://schemas.microsoft.com/office/drawing/2014/main" id="{3914D98B-D2BF-EE2C-D3A8-8BC1BF95243B}"/>
-              </a:ext>
-            </a:extLst>
-          </p:cNvPr>
-          <p:cNvSpPr txBox="1"/>
-          <p:nvPr/>
-        </p:nvSpPr>
-        <p:spPr>
-          <a:xfrm>
-            <a:off x="1169603" y="2598961"/>
-            <a:ext cx="2479759" cy="430887"/>
-          </a:xfrm>
-          <a:prstGeom prst="rect">
-            <a:avLst/>
-          </a:prstGeom>
-          <a:noFill/>
-        </p:spPr>
-        <p:txBody>
-          <a:bodyPr wrap="square" rtlCol="0">
-            <a:spAutoFit/>
-          </a:bodyPr>
-          <a:lstStyle/>
-          <a:p>
-            <a:pPr algn="ctr"/>
-            <a:r>
-              <a:rPr lang="en-GB" sz="2200" b="1" dirty="0">
-                <a:solidFill>
-                  <a:schemeClr val="accent1">
-                    <a:lumMod val="50000"/>
-                  </a:schemeClr>
-                </a:solidFill>
-                <a:latin typeface="AccordAlternate" panose="02000000000000000000" pitchFamily="50" charset="0"/>
-              </a:rPr>
-              <a:t>c</a:t>
-            </a:r>
-            <a:r>
-              <a:rPr lang="en-DE" sz="2200" b="1" dirty="0">
-                <a:solidFill>
-                  <a:schemeClr val="accent1">
-                    <a:lumMod val="50000"/>
-                  </a:schemeClr>
-                </a:solidFill>
-                <a:latin typeface="AccordAlternate" panose="02000000000000000000" pitchFamily="50" charset="0"/>
-              </a:rPr>
-              <a:t>ross-validation</a:t>
-            </a:r>
-            <a:r>
-              <a:rPr lang="en-GB" sz="2200" b="1" dirty="0">
-                <a:solidFill>
-                  <a:schemeClr val="accent1">
-                    <a:lumMod val="50000"/>
-                  </a:schemeClr>
-                </a:solidFill>
-                <a:latin typeface="AccordAlternate" panose="02000000000000000000" pitchFamily="50" charset="0"/>
-              </a:rPr>
-              <a:t>:</a:t>
-            </a:r>
-            <a:endParaRPr lang="en-US" sz="2200" b="1" dirty="0">
-              <a:solidFill>
-                <a:schemeClr val="accent1">
-                  <a:lumMod val="50000"/>
-                </a:schemeClr>
-              </a:solidFill>
-              <a:latin typeface="AccordAlternate" panose="02000000000000000000" pitchFamily="50" charset="0"/>
-            </a:endParaRPr>
-          </a:p>
-        </p:txBody>
-      </p:sp>
-      <p:sp>
-        <p:nvSpPr>
-          <p:cNvPr id="9" name="TextBox 8">
-            <a:extLst>
-              <a:ext uri="{FF2B5EF4-FFF2-40B4-BE49-F238E27FC236}">
-                <a16:creationId xmlns:a16="http://schemas.microsoft.com/office/drawing/2014/main" id="{43BCBC49-ACFE-2FE2-4091-937FD9A6CF1F}"/>
-              </a:ext>
-            </a:extLst>
-          </p:cNvPr>
-          <p:cNvSpPr txBox="1"/>
-          <p:nvPr/>
-        </p:nvSpPr>
-        <p:spPr>
-          <a:xfrm>
-            <a:off x="838200" y="3826258"/>
-            <a:ext cx="10528044" cy="369332"/>
-          </a:xfrm>
-          <a:prstGeom prst="rect">
-            <a:avLst/>
-          </a:prstGeom>
-          <a:noFill/>
-        </p:spPr>
-        <p:txBody>
-          <a:bodyPr wrap="square" rtlCol="0">
-            <a:spAutoFit/>
-          </a:bodyPr>
-          <a:lstStyle/>
-          <a:p>
-            <a:pPr marL="4762" lvl="1" indent="0">
-              <a:buNone/>
-            </a:pPr>
-            <a:r>
-              <a:rPr lang="en-GB" dirty="0"/>
-              <a:t>decide on acceptance of model changes by accuracy measure: improved model vs baseline (current best)</a:t>
-            </a:r>
-          </a:p>
-        </p:txBody>
-      </p:sp>
-      <p:sp>
-        <p:nvSpPr>
-          <p:cNvPr id="10" name="TextBox 9">
-            <a:extLst>
-              <a:ext uri="{FF2B5EF4-FFF2-40B4-BE49-F238E27FC236}">
-                <a16:creationId xmlns:a16="http://schemas.microsoft.com/office/drawing/2014/main" id="{C4A685AE-B3DA-A7CC-132F-46CB4DFB28F0}"/>
-              </a:ext>
-            </a:extLst>
-          </p:cNvPr>
-          <p:cNvSpPr txBox="1"/>
-          <p:nvPr/>
-        </p:nvSpPr>
-        <p:spPr>
-          <a:xfrm>
-            <a:off x="3489057" y="1488843"/>
-            <a:ext cx="4974436" cy="369332"/>
-          </a:xfrm>
-          <a:prstGeom prst="rect">
-            <a:avLst/>
-          </a:prstGeom>
-          <a:solidFill>
-            <a:schemeClr val="accent3">
-              <a:lumMod val="40000"/>
-              <a:lumOff val="60000"/>
-            </a:schemeClr>
-          </a:solidFill>
-        </p:spPr>
-        <p:txBody>
-          <a:bodyPr wrap="square" rtlCol="0">
-            <a:spAutoFit/>
-          </a:bodyPr>
-          <a:lstStyle/>
-          <a:p>
-            <a:pPr algn="ctr"/>
-            <a:r>
-              <a:rPr lang="en-GB" b="1" dirty="0"/>
-              <a:t>test structure</a:t>
-            </a:r>
-          </a:p>
-        </p:txBody>
-      </p:sp>
-      <p:sp>
-        <p:nvSpPr>
-          <p:cNvPr id="11" name="TextBox 10">
-            <a:extLst>
-              <a:ext uri="{FF2B5EF4-FFF2-40B4-BE49-F238E27FC236}">
-                <a16:creationId xmlns:a16="http://schemas.microsoft.com/office/drawing/2014/main" id="{510F9C11-CB62-8F16-CDA5-1744902446D3}"/>
-              </a:ext>
-            </a:extLst>
-          </p:cNvPr>
-          <p:cNvSpPr txBox="1"/>
-          <p:nvPr/>
-        </p:nvSpPr>
-        <p:spPr>
-          <a:xfrm>
-            <a:off x="3489057" y="4478863"/>
-            <a:ext cx="4974436" cy="646331"/>
-          </a:xfrm>
-          <a:prstGeom prst="rect">
-            <a:avLst/>
-          </a:prstGeom>
-          <a:solidFill>
-            <a:schemeClr val="accent3">
-              <a:lumMod val="40000"/>
-              <a:lumOff val="60000"/>
-            </a:schemeClr>
-          </a:solidFill>
-        </p:spPr>
-        <p:txBody>
-          <a:bodyPr wrap="square" rtlCol="0">
-            <a:spAutoFit/>
-          </a:bodyPr>
-          <a:lstStyle/>
-          <a:p>
-            <a:pPr algn="ctr"/>
-            <a:r>
-              <a:rPr lang="en-GB" b="1" dirty="0"/>
-              <a:t>measure (out-of-sample) accuracy of predictions</a:t>
-            </a:r>
-            <a:r>
-              <a:rPr lang="en-GB" dirty="0"/>
-              <a:t> (loss function in training as proxy of this)</a:t>
-            </a:r>
-            <a:endParaRPr lang="en-GB" b="1" dirty="0"/>
-          </a:p>
-        </p:txBody>
-      </p:sp>
-      <p:sp>
-        <p:nvSpPr>
-          <p:cNvPr id="12" name="TextBox 11">
-            <a:extLst>
-              <a:ext uri="{FF2B5EF4-FFF2-40B4-BE49-F238E27FC236}">
-                <a16:creationId xmlns:a16="http://schemas.microsoft.com/office/drawing/2014/main" id="{BF62E2C6-C6E5-60CB-D782-46F1EFDBAC78}"/>
-              </a:ext>
-            </a:extLst>
-          </p:cNvPr>
-          <p:cNvSpPr txBox="1"/>
-          <p:nvPr/>
-        </p:nvSpPr>
-        <p:spPr>
-          <a:xfrm>
-            <a:off x="1111905" y="4989042"/>
-            <a:ext cx="2595154" cy="369332"/>
-          </a:xfrm>
-          <a:prstGeom prst="rect">
-            <a:avLst/>
-          </a:prstGeom>
-          <a:noFill/>
-        </p:spPr>
-        <p:txBody>
-          <a:bodyPr wrap="square" rtlCol="0">
-            <a:spAutoFit/>
-          </a:bodyPr>
-          <a:lstStyle/>
-          <a:p>
-            <a:pPr algn="ctr"/>
-            <a:r>
-              <a:rPr lang="en-US" b="1" dirty="0">
-                <a:solidFill>
-                  <a:schemeClr val="accent1">
-                    <a:lumMod val="50000"/>
-                  </a:schemeClr>
-                </a:solidFill>
-                <a:latin typeface="AccordAlternate" panose="02000000000000000000" pitchFamily="50" charset="0"/>
-              </a:rPr>
-              <a:t>regression</a:t>
-            </a:r>
-          </a:p>
-        </p:txBody>
-      </p:sp>
-      <p:sp>
-        <p:nvSpPr>
-          <p:cNvPr id="13" name="TextBox 12">
-            <a:extLst>
-              <a:ext uri="{FF2B5EF4-FFF2-40B4-BE49-F238E27FC236}">
-                <a16:creationId xmlns:a16="http://schemas.microsoft.com/office/drawing/2014/main" id="{01176C67-3349-8F90-0C9E-4FE4F29243E0}"/>
-              </a:ext>
-            </a:extLst>
-          </p:cNvPr>
-          <p:cNvSpPr txBox="1"/>
-          <p:nvPr/>
-        </p:nvSpPr>
-        <p:spPr>
-          <a:xfrm>
-            <a:off x="838199" y="5536895"/>
-            <a:ext cx="7037174" cy="646331"/>
-          </a:xfrm>
-          <a:prstGeom prst="rect">
-            <a:avLst/>
-          </a:prstGeom>
-          <a:noFill/>
-        </p:spPr>
-        <p:txBody>
-          <a:bodyPr wrap="square" rtlCol="0">
-            <a:spAutoFit/>
-          </a:bodyPr>
-          <a:lstStyle/>
-          <a:p>
-            <a:pPr marL="339725" indent="-287338">
-              <a:buFont typeface="Arial" panose="020B0604020202020204" pitchFamily="34" charset="0"/>
-              <a:buChar char="•"/>
-              <a:tabLst>
-                <a:tab pos="227013" algn="l"/>
-              </a:tabLst>
-            </a:pPr>
-            <a:r>
-              <a:rPr lang="en-US" dirty="0"/>
-              <a:t>p</a:t>
-            </a:r>
-            <a:r>
-              <a:rPr lang="en-DE" dirty="0"/>
-              <a:t>oint estimate: </a:t>
-            </a:r>
-            <a:r>
-              <a:rPr lang="en-GB" dirty="0"/>
-              <a:t>a</a:t>
-            </a:r>
-            <a:r>
-              <a:rPr lang="en-DE" dirty="0"/>
-              <a:t>bsolute (MAD, MSE, …) or</a:t>
-            </a:r>
-            <a:r>
-              <a:rPr lang="en-US" dirty="0"/>
-              <a:t> </a:t>
-            </a:r>
-            <a:r>
-              <a:rPr lang="en-DE" dirty="0"/>
-              <a:t>relative (MAPE, …)</a:t>
-            </a:r>
-            <a:r>
-              <a:rPr lang="en-GB" dirty="0"/>
-              <a:t> </a:t>
-            </a:r>
-            <a:r>
-              <a:rPr lang="en-DE" dirty="0"/>
-              <a:t>metrics</a:t>
-            </a:r>
-          </a:p>
-          <a:p>
-            <a:pPr marL="339725" indent="-279400">
-              <a:buFont typeface="Arial" panose="020B0604020202020204" pitchFamily="34" charset="0"/>
-              <a:buChar char="•"/>
-            </a:pPr>
-            <a:r>
-              <a:rPr lang="en-GB" dirty="0"/>
-              <a:t>full probability distribution: a bit tricky</a:t>
-            </a:r>
-            <a:endParaRPr lang="en-DE" dirty="0"/>
-          </a:p>
-        </p:txBody>
-      </p:sp>
-      <p:sp>
-        <p:nvSpPr>
-          <p:cNvPr id="15" name="TextBox 14">
-            <a:extLst>
-              <a:ext uri="{FF2B5EF4-FFF2-40B4-BE49-F238E27FC236}">
-                <a16:creationId xmlns:a16="http://schemas.microsoft.com/office/drawing/2014/main" id="{80CB76A6-5812-6AB0-6767-EC66BDD0DD7D}"/>
-              </a:ext>
-            </a:extLst>
-          </p:cNvPr>
-          <p:cNvSpPr txBox="1"/>
-          <p:nvPr/>
-        </p:nvSpPr>
-        <p:spPr>
-          <a:xfrm>
-            <a:off x="8065102" y="4989042"/>
-            <a:ext cx="2595154" cy="369332"/>
-          </a:xfrm>
-          <a:prstGeom prst="rect">
-            <a:avLst/>
-          </a:prstGeom>
-          <a:noFill/>
-        </p:spPr>
-        <p:txBody>
-          <a:bodyPr wrap="square" rtlCol="0">
-            <a:spAutoFit/>
-          </a:bodyPr>
-          <a:lstStyle/>
-          <a:p>
-            <a:pPr algn="ctr"/>
-            <a:r>
-              <a:rPr lang="en-US" b="1" dirty="0">
-                <a:solidFill>
-                  <a:schemeClr val="accent1">
-                    <a:lumMod val="50000"/>
-                  </a:schemeClr>
-                </a:solidFill>
-                <a:latin typeface="AccordAlternate" panose="02000000000000000000" pitchFamily="50" charset="0"/>
-              </a:rPr>
-              <a:t>classification</a:t>
-            </a:r>
-          </a:p>
-        </p:txBody>
-      </p:sp>
-      <p:pic>
-        <p:nvPicPr>
-          <p:cNvPr id="17" name="Picture 2" descr="Receiver operating characteristic - Wikipedia">
-            <a:extLst>
-              <a:ext uri="{FF2B5EF4-FFF2-40B4-BE49-F238E27FC236}">
-                <a16:creationId xmlns:a16="http://schemas.microsoft.com/office/drawing/2014/main" id="{89F06512-1EFD-39BC-A15F-563A80636E21}"/>
-              </a:ext>
-            </a:extLst>
-          </p:cNvPr>
-          <p:cNvPicPr>
-            <a:picLocks noChangeAspect="1" noChangeArrowheads="1"/>
-          </p:cNvPicPr>
-          <p:nvPr/>
-        </p:nvPicPr>
-        <p:blipFill>
-          <a:blip r:embed="rId3">
-            <a:extLst>
-              <a:ext uri="{28A0092B-C50C-407E-A947-70E740481C1C}">
-                <a14:useLocalDpi xmlns:a14="http://schemas.microsoft.com/office/drawing/2010/main" val="0"/>
-              </a:ext>
-            </a:extLst>
-          </a:blip>
-          <a:srcRect/>
-          <a:stretch>
-            <a:fillRect/>
-          </a:stretch>
-        </p:blipFill>
-        <p:spPr bwMode="auto">
-          <a:xfrm>
-            <a:off x="8463493" y="5335323"/>
-            <a:ext cx="1848203" cy="1386152"/>
-          </a:xfrm>
-          <a:prstGeom prst="rect">
-            <a:avLst/>
-          </a:prstGeom>
-          <a:noFill/>
-          <a:extLst>
-            <a:ext uri="{909E8E84-426E-40DD-AFC4-6F175D3DCCD1}">
-              <a14:hiddenFill xmlns:a14="http://schemas.microsoft.com/office/drawing/2010/main">
-                <a:solidFill>
-                  <a:srgbClr val="FFFFFF"/>
-                </a:solidFill>
-              </a14:hiddenFill>
-            </a:ext>
-          </a:extLst>
-        </p:spPr>
-      </p:pic>
-      <p:sp>
-        <p:nvSpPr>
-          <p:cNvPr id="3" name="TextBox 2">
-            <a:extLst>
-              <a:ext uri="{FF2B5EF4-FFF2-40B4-BE49-F238E27FC236}">
-                <a16:creationId xmlns:a16="http://schemas.microsoft.com/office/drawing/2014/main" id="{D4851D45-9DF9-BE1C-8FA8-AE1DDB1DB604}"/>
-              </a:ext>
-            </a:extLst>
-          </p:cNvPr>
-          <p:cNvSpPr txBox="1"/>
-          <p:nvPr/>
-        </p:nvSpPr>
-        <p:spPr>
-          <a:xfrm>
-            <a:off x="10032121" y="6598364"/>
-            <a:ext cx="962123" cy="246221"/>
-          </a:xfrm>
-          <a:prstGeom prst="rect">
-            <a:avLst/>
-          </a:prstGeom>
-          <a:noFill/>
-        </p:spPr>
-        <p:txBody>
-          <a:bodyPr wrap="none" rtlCol="0">
-            <a:spAutoFit/>
-          </a:bodyPr>
-          <a:lstStyle/>
-          <a:p>
-            <a:r>
-              <a:rPr lang="de-DE" sz="1000" dirty="0" err="1"/>
-              <a:t>from</a:t>
-            </a:r>
-            <a:r>
-              <a:rPr lang="de-DE" sz="1000" dirty="0"/>
-              <a:t> </a:t>
-            </a:r>
-            <a:r>
-              <a:rPr lang="de-DE" sz="1000" dirty="0" err="1"/>
-              <a:t>wikipedia</a:t>
-            </a:r>
-            <a:endParaRPr lang="de-DE" sz="1000" dirty="0"/>
-          </a:p>
-        </p:txBody>
-      </p:sp>
-    </p:spTree>
-    <p:extLst>
-      <p:ext uri="{BB962C8B-B14F-4D97-AF65-F5344CB8AC3E}">
-        <p14:creationId xmlns:p14="http://schemas.microsoft.com/office/powerpoint/2010/main" val="1198576018"/>
-      </p:ext>
-    </p:extLst>
-  </p:cSld>
-  <p:clrMapOvr>
-    <a:masterClrMapping/>
-  </p:clrMapOvr>
-</p:sld>
-</file>
-
-<file path=ppt/slides/slide29.xml><?xml version="1.0" encoding="utf-8"?>
-<p:sld xmlns:a="http://schemas.openxmlformats.org/drawingml/2006/main" xmlns:r="http://schemas.openxmlformats.org/officeDocument/2006/relationships" xmlns:p="http://schemas.openxmlformats.org/presentationml/2006/main">
-  <p:cSld>
-    <p:spTree>
-      <p:nvGrpSpPr>
-        <p:cNvPr id="1" name=""/>
-        <p:cNvGrpSpPr/>
-        <p:nvPr/>
-      </p:nvGrpSpPr>
-      <p:grpSpPr>
-        <a:xfrm>
-          <a:off x="0" y="0"/>
-          <a:ext cx="0" cy="0"/>
-          <a:chOff x="0" y="0"/>
-          <a:chExt cx="0" cy="0"/>
-        </a:xfrm>
-      </p:grpSpPr>
-      <p:sp>
-        <p:nvSpPr>
           <p:cNvPr id="2" name="Titel 1">
             <a:extLst>
               <a:ext uri="{FF2B5EF4-FFF2-40B4-BE49-F238E27FC236}">
@@ -19240,184 +18995,7 @@
 </p:sld>
 </file>
 
-<file path=ppt/slides/slide3.xml><?xml version="1.0" encoding="utf-8"?>
-<p:sld xmlns:a="http://schemas.openxmlformats.org/drawingml/2006/main" xmlns:r="http://schemas.openxmlformats.org/officeDocument/2006/relationships" xmlns:p="http://schemas.openxmlformats.org/presentationml/2006/main">
-  <p:cSld>
-    <p:spTree>
-      <p:nvGrpSpPr>
-        <p:cNvPr id="1" name=""/>
-        <p:cNvGrpSpPr/>
-        <p:nvPr/>
-      </p:nvGrpSpPr>
-      <p:grpSpPr>
-        <a:xfrm>
-          <a:off x="0" y="0"/>
-          <a:ext cx="0" cy="0"/>
-          <a:chOff x="0" y="0"/>
-          <a:chExt cx="0" cy="0"/>
-        </a:xfrm>
-      </p:grpSpPr>
-      <p:sp>
-        <p:nvSpPr>
-          <p:cNvPr id="6" name="Titel 5">
-            <a:extLst>
-              <a:ext uri="{FF2B5EF4-FFF2-40B4-BE49-F238E27FC236}">
-                <a16:creationId xmlns:a16="http://schemas.microsoft.com/office/drawing/2014/main" id="{D5C0C311-9CC2-8845-33EF-0123376E4C53}"/>
-              </a:ext>
-            </a:extLst>
-          </p:cNvPr>
-          <p:cNvSpPr>
-            <a:spLocks noGrp="1"/>
-          </p:cNvSpPr>
-          <p:nvPr>
-            <p:ph type="title"/>
-          </p:nvPr>
-        </p:nvSpPr>
-        <p:spPr/>
-        <p:txBody>
-          <a:bodyPr/>
-          <a:lstStyle/>
-          <a:p>
-            <a:r>
-              <a:rPr lang="de-DE" dirty="0"/>
-              <a:t>Time Series</a:t>
-            </a:r>
-          </a:p>
-        </p:txBody>
-      </p:sp>
-      <p:sp>
-        <p:nvSpPr>
-          <p:cNvPr id="7" name="Inhaltsplatzhalter 6">
-            <a:extLst>
-              <a:ext uri="{FF2B5EF4-FFF2-40B4-BE49-F238E27FC236}">
-                <a16:creationId xmlns:a16="http://schemas.microsoft.com/office/drawing/2014/main" id="{C1671BA7-6A2C-4228-DD4F-2AA6A21E2F12}"/>
-              </a:ext>
-            </a:extLst>
-          </p:cNvPr>
-          <p:cNvSpPr>
-            <a:spLocks noGrp="1"/>
-          </p:cNvSpPr>
-          <p:nvPr>
-            <p:ph idx="1"/>
-          </p:nvPr>
-        </p:nvSpPr>
-        <p:spPr/>
-        <p:txBody>
-          <a:bodyPr/>
-          <a:lstStyle/>
-          <a:p>
-            <a:r>
-              <a:rPr lang="de-DE" dirty="0" err="1"/>
-              <a:t>autocorrelation</a:t>
-            </a:r>
-            <a:endParaRPr lang="de-DE" dirty="0"/>
-          </a:p>
-          <a:p>
-            <a:r>
-              <a:rPr lang="de-DE" dirty="0"/>
-              <a:t>ARIMA</a:t>
-            </a:r>
-          </a:p>
-          <a:p>
-            <a:r>
-              <a:rPr lang="de-DE" dirty="0" err="1"/>
-              <a:t>prophet</a:t>
-            </a:r>
-            <a:endParaRPr lang="de-DE" dirty="0"/>
-          </a:p>
-          <a:p>
-            <a:r>
-              <a:rPr lang="de-DE" dirty="0"/>
-              <a:t>stacking: </a:t>
-            </a:r>
-            <a:r>
-              <a:rPr lang="de-DE" dirty="0" err="1"/>
-              <a:t>ewma</a:t>
-            </a:r>
-            <a:r>
-              <a:rPr lang="de-DE" dirty="0"/>
-              <a:t> </a:t>
-            </a:r>
-            <a:r>
-              <a:rPr lang="de-DE" dirty="0" err="1"/>
-              <a:t>features</a:t>
-            </a:r>
-            <a:r>
-              <a:rPr lang="de-DE" dirty="0"/>
-              <a:t> in ML</a:t>
-            </a:r>
-          </a:p>
-          <a:p>
-            <a:r>
-              <a:rPr lang="de-DE" dirty="0"/>
-              <a:t>temporal </a:t>
-            </a:r>
-            <a:r>
-              <a:rPr lang="de-DE" dirty="0" err="1"/>
-              <a:t>confounding</a:t>
-            </a:r>
-            <a:endParaRPr lang="de-DE" dirty="0"/>
-          </a:p>
-          <a:p>
-            <a:r>
-              <a:rPr lang="de-DE" dirty="0" err="1"/>
-              <a:t>anomaly</a:t>
-            </a:r>
-            <a:r>
-              <a:rPr lang="de-DE" dirty="0"/>
-              <a:t> </a:t>
-            </a:r>
-            <a:r>
-              <a:rPr lang="de-DE" dirty="0" err="1"/>
-              <a:t>detection</a:t>
-            </a:r>
-            <a:endParaRPr lang="de-DE" dirty="0"/>
-          </a:p>
-        </p:txBody>
-      </p:sp>
-      <p:sp>
-        <p:nvSpPr>
-          <p:cNvPr id="5" name="Foliennummernplatzhalter 4">
-            <a:extLst>
-              <a:ext uri="{FF2B5EF4-FFF2-40B4-BE49-F238E27FC236}">
-                <a16:creationId xmlns:a16="http://schemas.microsoft.com/office/drawing/2014/main" id="{1AE1D53F-BB59-63BA-602C-DA65E08E5ADE}"/>
-              </a:ext>
-            </a:extLst>
-          </p:cNvPr>
-          <p:cNvSpPr>
-            <a:spLocks noGrp="1"/>
-          </p:cNvSpPr>
-          <p:nvPr>
-            <p:ph type="sldNum" sz="quarter" idx="12"/>
-          </p:nvPr>
-        </p:nvSpPr>
-        <p:spPr/>
-        <p:txBody>
-          <a:bodyPr/>
-          <a:lstStyle/>
-          <a:p>
-            <a:fld id="{3D4C94FE-FF23-4504-88E9-14D481113291}" type="slidenum">
-              <a:rPr lang="en-GB" smtClean="0"/>
-              <a:t>3</a:t>
-            </a:fld>
-            <a:endParaRPr lang="en-GB"/>
-          </a:p>
-        </p:txBody>
-      </p:sp>
-    </p:spTree>
-    <p:extLst>
-      <p:ext uri="{BB962C8B-B14F-4D97-AF65-F5344CB8AC3E}">
-        <p14:creationId xmlns:p14="http://schemas.microsoft.com/office/powerpoint/2010/main" val="1970235014"/>
-      </p:ext>
-    </p:extLst>
-  </p:cSld>
-  <p:clrMapOvr>
-    <a:masterClrMapping/>
-  </p:clrMapOvr>
-</p:sld>
-</file>
-
-<file path=ppt/slides/slide30.xml><?xml version="1.0" encoding="utf-8"?>
+<file path=ppt/slides/slide29.xml><?xml version="1.0" encoding="utf-8"?>
 <p:sld xmlns:a="http://schemas.openxmlformats.org/drawingml/2006/main" xmlns:r="http://schemas.openxmlformats.org/officeDocument/2006/relationships" xmlns:p="http://schemas.openxmlformats.org/presentationml/2006/main">
   <p:cSld>
     <p:spTree>
@@ -19793,7 +19371,131 @@
 </p:sld>
 </file>
 
-<file path=ppt/slides/slide31.xml><?xml version="1.0" encoding="utf-8"?>
+<file path=ppt/slides/slide3.xml><?xml version="1.0" encoding="utf-8"?>
+<p:sld xmlns:a="http://schemas.openxmlformats.org/drawingml/2006/main" xmlns:r="http://schemas.openxmlformats.org/officeDocument/2006/relationships" xmlns:p="http://schemas.openxmlformats.org/presentationml/2006/main">
+  <p:cSld>
+    <p:spTree>
+      <p:nvGrpSpPr>
+        <p:cNvPr id="1" name=""/>
+        <p:cNvGrpSpPr/>
+        <p:nvPr/>
+      </p:nvGrpSpPr>
+      <p:grpSpPr>
+        <a:xfrm>
+          <a:off x="0" y="0"/>
+          <a:ext cx="0" cy="0"/>
+          <a:chOff x="0" y="0"/>
+          <a:chExt cx="0" cy="0"/>
+        </a:xfrm>
+      </p:grpSpPr>
+      <p:sp>
+        <p:nvSpPr>
+          <p:cNvPr id="2" name="Titel 1">
+            <a:extLst>
+              <a:ext uri="{FF2B5EF4-FFF2-40B4-BE49-F238E27FC236}">
+                <a16:creationId xmlns:a16="http://schemas.microsoft.com/office/drawing/2014/main" id="{808AC1BF-094A-D758-C319-010D3077EED4}"/>
+              </a:ext>
+            </a:extLst>
+          </p:cNvPr>
+          <p:cNvSpPr>
+            <a:spLocks noGrp="1"/>
+          </p:cNvSpPr>
+          <p:nvPr>
+            <p:ph type="title"/>
+          </p:nvPr>
+        </p:nvSpPr>
+        <p:spPr/>
+        <p:txBody>
+          <a:bodyPr/>
+          <a:lstStyle/>
+          <a:p>
+            <a:r>
+              <a:rPr lang="de-DE" dirty="0" err="1"/>
+              <a:t>What</a:t>
+            </a:r>
+            <a:r>
+              <a:rPr lang="de-DE" dirty="0"/>
+              <a:t> </a:t>
+            </a:r>
+            <a:r>
+              <a:rPr lang="de-DE" dirty="0" err="1"/>
+              <a:t>Makes</a:t>
+            </a:r>
+            <a:r>
+              <a:rPr lang="de-DE" dirty="0"/>
+              <a:t> Time Series Special?</a:t>
+            </a:r>
+          </a:p>
+        </p:txBody>
+      </p:sp>
+      <p:sp>
+        <p:nvSpPr>
+          <p:cNvPr id="3" name="Inhaltsplatzhalter 2">
+            <a:extLst>
+              <a:ext uri="{FF2B5EF4-FFF2-40B4-BE49-F238E27FC236}">
+                <a16:creationId xmlns:a16="http://schemas.microsoft.com/office/drawing/2014/main" id="{60FBE61A-A097-E2BD-20DF-71C63D8DE9ED}"/>
+              </a:ext>
+            </a:extLst>
+          </p:cNvPr>
+          <p:cNvSpPr>
+            <a:spLocks noGrp="1"/>
+          </p:cNvSpPr>
+          <p:nvPr>
+            <p:ph idx="1"/>
+          </p:nvPr>
+        </p:nvSpPr>
+        <p:spPr/>
+        <p:txBody>
+          <a:bodyPr/>
+          <a:lstStyle/>
+          <a:p>
+            <a:endParaRPr lang="de-DE"/>
+          </a:p>
+        </p:txBody>
+      </p:sp>
+      <p:sp>
+        <p:nvSpPr>
+          <p:cNvPr id="4" name="Foliennummernplatzhalter 3">
+            <a:extLst>
+              <a:ext uri="{FF2B5EF4-FFF2-40B4-BE49-F238E27FC236}">
+                <a16:creationId xmlns:a16="http://schemas.microsoft.com/office/drawing/2014/main" id="{35911566-619C-2F5F-04DA-81FDB0D03FF8}"/>
+              </a:ext>
+            </a:extLst>
+          </p:cNvPr>
+          <p:cNvSpPr>
+            <a:spLocks noGrp="1"/>
+          </p:cNvSpPr>
+          <p:nvPr>
+            <p:ph type="sldNum" sz="quarter" idx="12"/>
+          </p:nvPr>
+        </p:nvSpPr>
+        <p:spPr/>
+        <p:txBody>
+          <a:bodyPr/>
+          <a:lstStyle/>
+          <a:p>
+            <a:fld id="{3D4C94FE-FF23-4504-88E9-14D481113291}" type="slidenum">
+              <a:rPr lang="en-GB" smtClean="0"/>
+              <a:t>3</a:t>
+            </a:fld>
+            <a:endParaRPr lang="en-GB"/>
+          </a:p>
+        </p:txBody>
+      </p:sp>
+    </p:spTree>
+    <p:extLst>
+      <p:ext uri="{BB962C8B-B14F-4D97-AF65-F5344CB8AC3E}">
+        <p14:creationId xmlns:p14="http://schemas.microsoft.com/office/powerpoint/2010/main" val="441294949"/>
+      </p:ext>
+    </p:extLst>
+  </p:cSld>
+  <p:clrMapOvr>
+    <a:masterClrMapping/>
+  </p:clrMapOvr>
+</p:sld>
+</file>
+
+<file path=ppt/slides/slide30.xml><?xml version="1.0" encoding="utf-8"?>
 <p:sld xmlns:a="http://schemas.openxmlformats.org/drawingml/2006/main" xmlns:r="http://schemas.openxmlformats.org/officeDocument/2006/relationships" xmlns:p="http://schemas.openxmlformats.org/presentationml/2006/main">
   <p:cSld>
     <p:spTree>
@@ -19913,7 +19615,7 @@
 </p:sld>
 </file>
 
-<file path=ppt/slides/slide32.xml><?xml version="1.0" encoding="utf-8"?>
+<file path=ppt/slides/slide31.xml><?xml version="1.0" encoding="utf-8"?>
 <p:sld xmlns:a="http://schemas.openxmlformats.org/drawingml/2006/main" xmlns:r="http://schemas.openxmlformats.org/officeDocument/2006/relationships" xmlns:p="http://schemas.openxmlformats.org/presentationml/2006/main">
   <p:cSld>
     <p:spTree>
@@ -20004,7 +19706,7 @@
 </p:sld>
 </file>
 
-<file path=ppt/slides/slide33.xml><?xml version="1.0" encoding="utf-8"?>
+<file path=ppt/slides/slide32.xml><?xml version="1.0" encoding="utf-8"?>
 <p:sld xmlns:a="http://schemas.openxmlformats.org/drawingml/2006/main" xmlns:r="http://schemas.openxmlformats.org/officeDocument/2006/relationships" xmlns:p="http://schemas.openxmlformats.org/presentationml/2006/main">
   <p:cSld>
     <p:spTree>
@@ -20817,7 +20519,7 @@
 </p:sld>
 </file>
 
-<file path=ppt/slides/slide34.xml><?xml version="1.0" encoding="utf-8"?>
+<file path=ppt/slides/slide33.xml><?xml version="1.0" encoding="utf-8"?>
 <p:sld xmlns:a="http://schemas.openxmlformats.org/drawingml/2006/main" xmlns:r="http://schemas.openxmlformats.org/officeDocument/2006/relationships" xmlns:p="http://schemas.openxmlformats.org/presentationml/2006/main">
   <p:cSld>
     <p:spTree>
@@ -21725,7 +21427,7 @@
 </p:sld>
 </file>
 
-<file path=ppt/slides/slide35.xml><?xml version="1.0" encoding="utf-8"?>
+<file path=ppt/slides/slide34.xml><?xml version="1.0" encoding="utf-8"?>
 <p:sld xmlns:a="http://schemas.openxmlformats.org/drawingml/2006/main" xmlns:r="http://schemas.openxmlformats.org/officeDocument/2006/relationships" xmlns:p="http://schemas.openxmlformats.org/presentationml/2006/main">
   <p:cSld>
     <p:spTree>
@@ -21911,7 +21613,7 @@
           <p:cNvPr id="2" name="Titel 1">
             <a:extLst>
               <a:ext uri="{FF2B5EF4-FFF2-40B4-BE49-F238E27FC236}">
-                <a16:creationId xmlns:a16="http://schemas.microsoft.com/office/drawing/2014/main" id="{808AC1BF-094A-D758-C319-010D3077EED4}"/>
+                <a16:creationId xmlns:a16="http://schemas.microsoft.com/office/drawing/2014/main" id="{31256628-076F-C02F-1D05-3BCF9E0950E8}"/>
               </a:ext>
             </a:extLst>
           </p:cNvPr>
@@ -21928,21 +21630,14 @@
           <a:lstStyle/>
           <a:p>
             <a:r>
+              <a:rPr lang="de-DE" dirty="0"/>
+              <a:t>Temporal </a:t>
+            </a:r>
+            <a:r>
               <a:rPr lang="de-DE" dirty="0" err="1"/>
-              <a:t>What</a:t>
-            </a:r>
-            <a:r>
-              <a:rPr lang="de-DE" dirty="0"/>
-              <a:t> </a:t>
-            </a:r>
-            <a:r>
-              <a:rPr lang="de-DE" dirty="0" err="1"/>
-              <a:t>Makes</a:t>
-            </a:r>
-            <a:r>
-              <a:rPr lang="de-DE" dirty="0"/>
-              <a:t> Time Series Special?</a:t>
-            </a:r>
+              <a:t>Dependence</a:t>
+            </a:r>
+            <a:endParaRPr lang="de-DE" dirty="0"/>
           </a:p>
         </p:txBody>
       </p:sp>
@@ -21951,7 +21646,7 @@
           <p:cNvPr id="3" name="Inhaltsplatzhalter 2">
             <a:extLst>
               <a:ext uri="{FF2B5EF4-FFF2-40B4-BE49-F238E27FC236}">
-                <a16:creationId xmlns:a16="http://schemas.microsoft.com/office/drawing/2014/main" id="{60FBE61A-A097-E2BD-20DF-71C63D8DE9ED}"/>
+                <a16:creationId xmlns:a16="http://schemas.microsoft.com/office/drawing/2014/main" id="{766ABB3C-76C5-1CF2-36D6-636F646F501D}"/>
               </a:ext>
             </a:extLst>
           </p:cNvPr>
@@ -21976,7 +21671,7 @@
           <p:cNvPr id="4" name="Foliennummernplatzhalter 3">
             <a:extLst>
               <a:ext uri="{FF2B5EF4-FFF2-40B4-BE49-F238E27FC236}">
-                <a16:creationId xmlns:a16="http://schemas.microsoft.com/office/drawing/2014/main" id="{35911566-619C-2F5F-04DA-81FDB0D03FF8}"/>
+                <a16:creationId xmlns:a16="http://schemas.microsoft.com/office/drawing/2014/main" id="{D552BEB7-1F4A-7007-52BB-7111A1CAA80F}"/>
               </a:ext>
             </a:extLst>
           </p:cNvPr>
@@ -21995,123 +21690,6 @@
             <a:fld id="{3D4C94FE-FF23-4504-88E9-14D481113291}" type="slidenum">
               <a:rPr lang="en-GB" smtClean="0"/>
               <a:t>4</a:t>
-            </a:fld>
-            <a:endParaRPr lang="en-GB"/>
-          </a:p>
-        </p:txBody>
-      </p:sp>
-    </p:spTree>
-    <p:extLst>
-      <p:ext uri="{BB962C8B-B14F-4D97-AF65-F5344CB8AC3E}">
-        <p14:creationId xmlns:p14="http://schemas.microsoft.com/office/powerpoint/2010/main" val="441294949"/>
-      </p:ext>
-    </p:extLst>
-  </p:cSld>
-  <p:clrMapOvr>
-    <a:masterClrMapping/>
-  </p:clrMapOvr>
-</p:sld>
-</file>
-
-<file path=ppt/slides/slide5.xml><?xml version="1.0" encoding="utf-8"?>
-<p:sld xmlns:a="http://schemas.openxmlformats.org/drawingml/2006/main" xmlns:r="http://schemas.openxmlformats.org/officeDocument/2006/relationships" xmlns:p="http://schemas.openxmlformats.org/presentationml/2006/main">
-  <p:cSld>
-    <p:spTree>
-      <p:nvGrpSpPr>
-        <p:cNvPr id="1" name=""/>
-        <p:cNvGrpSpPr/>
-        <p:nvPr/>
-      </p:nvGrpSpPr>
-      <p:grpSpPr>
-        <a:xfrm>
-          <a:off x="0" y="0"/>
-          <a:ext cx="0" cy="0"/>
-          <a:chOff x="0" y="0"/>
-          <a:chExt cx="0" cy="0"/>
-        </a:xfrm>
-      </p:grpSpPr>
-      <p:sp>
-        <p:nvSpPr>
-          <p:cNvPr id="2" name="Titel 1">
-            <a:extLst>
-              <a:ext uri="{FF2B5EF4-FFF2-40B4-BE49-F238E27FC236}">
-                <a16:creationId xmlns:a16="http://schemas.microsoft.com/office/drawing/2014/main" id="{31256628-076F-C02F-1D05-3BCF9E0950E8}"/>
-              </a:ext>
-            </a:extLst>
-          </p:cNvPr>
-          <p:cNvSpPr>
-            <a:spLocks noGrp="1"/>
-          </p:cNvSpPr>
-          <p:nvPr>
-            <p:ph type="title"/>
-          </p:nvPr>
-        </p:nvSpPr>
-        <p:spPr/>
-        <p:txBody>
-          <a:bodyPr/>
-          <a:lstStyle/>
-          <a:p>
-            <a:r>
-              <a:rPr lang="de-DE" dirty="0"/>
-              <a:t>Temporal </a:t>
-            </a:r>
-            <a:r>
-              <a:rPr lang="de-DE" dirty="0" err="1"/>
-              <a:t>Dependence</a:t>
-            </a:r>
-            <a:endParaRPr lang="de-DE" dirty="0"/>
-          </a:p>
-        </p:txBody>
-      </p:sp>
-      <p:sp>
-        <p:nvSpPr>
-          <p:cNvPr id="3" name="Inhaltsplatzhalter 2">
-            <a:extLst>
-              <a:ext uri="{FF2B5EF4-FFF2-40B4-BE49-F238E27FC236}">
-                <a16:creationId xmlns:a16="http://schemas.microsoft.com/office/drawing/2014/main" id="{766ABB3C-76C5-1CF2-36D6-636F646F501D}"/>
-              </a:ext>
-            </a:extLst>
-          </p:cNvPr>
-          <p:cNvSpPr>
-            <a:spLocks noGrp="1"/>
-          </p:cNvSpPr>
-          <p:nvPr>
-            <p:ph idx="1"/>
-          </p:nvPr>
-        </p:nvSpPr>
-        <p:spPr/>
-        <p:txBody>
-          <a:bodyPr/>
-          <a:lstStyle/>
-          <a:p>
-            <a:endParaRPr lang="de-DE"/>
-          </a:p>
-        </p:txBody>
-      </p:sp>
-      <p:sp>
-        <p:nvSpPr>
-          <p:cNvPr id="4" name="Foliennummernplatzhalter 3">
-            <a:extLst>
-              <a:ext uri="{FF2B5EF4-FFF2-40B4-BE49-F238E27FC236}">
-                <a16:creationId xmlns:a16="http://schemas.microsoft.com/office/drawing/2014/main" id="{D552BEB7-1F4A-7007-52BB-7111A1CAA80F}"/>
-              </a:ext>
-            </a:extLst>
-          </p:cNvPr>
-          <p:cNvSpPr>
-            <a:spLocks noGrp="1"/>
-          </p:cNvSpPr>
-          <p:nvPr>
-            <p:ph type="sldNum" sz="quarter" idx="12"/>
-          </p:nvPr>
-        </p:nvSpPr>
-        <p:spPr/>
-        <p:txBody>
-          <a:bodyPr/>
-          <a:lstStyle/>
-          <a:p>
-            <a:fld id="{3D4C94FE-FF23-4504-88E9-14D481113291}" type="slidenum">
-              <a:rPr lang="en-GB" smtClean="0"/>
-              <a:t>5</a:t>
             </a:fld>
             <a:endParaRPr lang="en-GB"/>
           </a:p>
@@ -22130,7 +21708,7 @@
 </p:sld>
 </file>
 
-<file path=ppt/slides/slide6.xml><?xml version="1.0" encoding="utf-8"?>
+<file path=ppt/slides/slide5.xml><?xml version="1.0" encoding="utf-8"?>
 <p:sld xmlns:a="http://schemas.openxmlformats.org/drawingml/2006/main" xmlns:r="http://schemas.openxmlformats.org/officeDocument/2006/relationships" xmlns:p="http://schemas.openxmlformats.org/presentationml/2006/main">
   <p:cSld>
     <p:spTree>
@@ -22218,6 +21796,127 @@
 </p:sld>
 </file>
 
+<file path=ppt/slides/slide6.xml><?xml version="1.0" encoding="utf-8"?>
+<p:sld xmlns:a="http://schemas.openxmlformats.org/drawingml/2006/main" xmlns:r="http://schemas.openxmlformats.org/officeDocument/2006/relationships" xmlns:p="http://schemas.openxmlformats.org/presentationml/2006/main">
+  <p:cSld>
+    <p:spTree>
+      <p:nvGrpSpPr>
+        <p:cNvPr id="1" name=""/>
+        <p:cNvGrpSpPr/>
+        <p:nvPr/>
+      </p:nvGrpSpPr>
+      <p:grpSpPr>
+        <a:xfrm>
+          <a:off x="0" y="0"/>
+          <a:ext cx="0" cy="0"/>
+          <a:chOff x="0" y="0"/>
+          <a:chExt cx="0" cy="0"/>
+        </a:xfrm>
+      </p:grpSpPr>
+      <p:sp>
+        <p:nvSpPr>
+          <p:cNvPr id="2" name="Titel 1">
+            <a:extLst>
+              <a:ext uri="{FF2B5EF4-FFF2-40B4-BE49-F238E27FC236}">
+                <a16:creationId xmlns:a16="http://schemas.microsoft.com/office/drawing/2014/main" id="{4E5306FF-D46A-5F4D-357E-328CBCD66656}"/>
+              </a:ext>
+            </a:extLst>
+          </p:cNvPr>
+          <p:cNvSpPr>
+            <a:spLocks noGrp="1"/>
+          </p:cNvSpPr>
+          <p:nvPr>
+            <p:ph type="title"/>
+          </p:nvPr>
+        </p:nvSpPr>
+        <p:spPr/>
+        <p:txBody>
+          <a:bodyPr/>
+          <a:lstStyle/>
+          <a:p>
+            <a:r>
+              <a:rPr lang="de-DE" dirty="0" err="1"/>
+              <a:t>Autocorrelation</a:t>
+            </a:r>
+            <a:r>
+              <a:rPr lang="de-DE" dirty="0"/>
+              <a:t> and Partial </a:t>
+            </a:r>
+            <a:r>
+              <a:rPr lang="de-DE" dirty="0" err="1"/>
+              <a:t>Autocorrelation</a:t>
+            </a:r>
+            <a:endParaRPr lang="de-DE" dirty="0"/>
+          </a:p>
+        </p:txBody>
+      </p:sp>
+      <p:sp>
+        <p:nvSpPr>
+          <p:cNvPr id="3" name="Inhaltsplatzhalter 2">
+            <a:extLst>
+              <a:ext uri="{FF2B5EF4-FFF2-40B4-BE49-F238E27FC236}">
+                <a16:creationId xmlns:a16="http://schemas.microsoft.com/office/drawing/2014/main" id="{104289A7-5461-531A-7F75-50F6DF204790}"/>
+              </a:ext>
+            </a:extLst>
+          </p:cNvPr>
+          <p:cNvSpPr>
+            <a:spLocks noGrp="1"/>
+          </p:cNvSpPr>
+          <p:nvPr>
+            <p:ph idx="1"/>
+          </p:nvPr>
+        </p:nvSpPr>
+        <p:spPr/>
+        <p:txBody>
+          <a:bodyPr/>
+          <a:lstStyle/>
+          <a:p>
+            <a:endParaRPr lang="de-DE"/>
+          </a:p>
+        </p:txBody>
+      </p:sp>
+      <p:sp>
+        <p:nvSpPr>
+          <p:cNvPr id="4" name="Foliennummernplatzhalter 3">
+            <a:extLst>
+              <a:ext uri="{FF2B5EF4-FFF2-40B4-BE49-F238E27FC236}">
+                <a16:creationId xmlns:a16="http://schemas.microsoft.com/office/drawing/2014/main" id="{2749836D-06DA-146A-99BC-CBA37DFBAB05}"/>
+              </a:ext>
+            </a:extLst>
+          </p:cNvPr>
+          <p:cNvSpPr>
+            <a:spLocks noGrp="1"/>
+          </p:cNvSpPr>
+          <p:nvPr>
+            <p:ph type="sldNum" sz="quarter" idx="12"/>
+          </p:nvPr>
+        </p:nvSpPr>
+        <p:spPr/>
+        <p:txBody>
+          <a:bodyPr/>
+          <a:lstStyle/>
+          <a:p>
+            <a:fld id="{3D4C94FE-FF23-4504-88E9-14D481113291}" type="slidenum">
+              <a:rPr lang="en-GB" smtClean="0"/>
+              <a:t>6</a:t>
+            </a:fld>
+            <a:endParaRPr lang="en-GB"/>
+          </a:p>
+        </p:txBody>
+      </p:sp>
+    </p:spTree>
+    <p:extLst>
+      <p:ext uri="{BB962C8B-B14F-4D97-AF65-F5344CB8AC3E}">
+        <p14:creationId xmlns:p14="http://schemas.microsoft.com/office/powerpoint/2010/main" val="3173181311"/>
+      </p:ext>
+    </p:extLst>
+  </p:cSld>
+  <p:clrMapOvr>
+    <a:masterClrMapping/>
+  </p:clrMapOvr>
+</p:sld>
+</file>
+
 <file path=ppt/slides/slide7.xml><?xml version="1.0" encoding="utf-8"?>
 <p:sld xmlns:a="http://schemas.openxmlformats.org/drawingml/2006/main" xmlns:r="http://schemas.openxmlformats.org/officeDocument/2006/relationships" xmlns:p="http://schemas.openxmlformats.org/presentationml/2006/main">
   <p:cSld>
@@ -22240,7 +21939,7 @@
           <p:cNvPr id="2" name="Titel 1">
             <a:extLst>
               <a:ext uri="{FF2B5EF4-FFF2-40B4-BE49-F238E27FC236}">
-                <a16:creationId xmlns:a16="http://schemas.microsoft.com/office/drawing/2014/main" id="{4E5306FF-D46A-5F4D-357E-328CBCD66656}"/>
+                <a16:creationId xmlns:a16="http://schemas.microsoft.com/office/drawing/2014/main" id="{3DBACD47-92FC-F367-8730-A52B59555AB1}"/>
               </a:ext>
             </a:extLst>
           </p:cNvPr>
@@ -22258,15 +21957,7 @@
           <a:p>
             <a:r>
               <a:rPr lang="de-DE" dirty="0" err="1"/>
-              <a:t>Autocorrelation</a:t>
-            </a:r>
-            <a:r>
-              <a:rPr lang="de-DE" dirty="0"/>
-              <a:t> and Partial </a:t>
-            </a:r>
-            <a:r>
-              <a:rPr lang="de-DE" dirty="0" err="1"/>
-              <a:t>Autocorrelation</a:t>
+              <a:t>Stationarity</a:t>
             </a:r>
             <a:endParaRPr lang="de-DE" dirty="0"/>
           </a:p>
@@ -22277,7 +21968,7 @@
           <p:cNvPr id="3" name="Inhaltsplatzhalter 2">
             <a:extLst>
               <a:ext uri="{FF2B5EF4-FFF2-40B4-BE49-F238E27FC236}">
-                <a16:creationId xmlns:a16="http://schemas.microsoft.com/office/drawing/2014/main" id="{104289A7-5461-531A-7F75-50F6DF204790}"/>
+                <a16:creationId xmlns:a16="http://schemas.microsoft.com/office/drawing/2014/main" id="{238EE37C-F9A6-CA96-1CCE-D61439094A48}"/>
               </a:ext>
             </a:extLst>
           </p:cNvPr>
@@ -22302,7 +21993,7 @@
           <p:cNvPr id="4" name="Foliennummernplatzhalter 3">
             <a:extLst>
               <a:ext uri="{FF2B5EF4-FFF2-40B4-BE49-F238E27FC236}">
-                <a16:creationId xmlns:a16="http://schemas.microsoft.com/office/drawing/2014/main" id="{2749836D-06DA-146A-99BC-CBA37DFBAB05}"/>
+                <a16:creationId xmlns:a16="http://schemas.microsoft.com/office/drawing/2014/main" id="{B284EF11-7B5B-A7D8-239D-941BC50B89FC}"/>
               </a:ext>
             </a:extLst>
           </p:cNvPr>
@@ -22329,7 +22020,7 @@
     </p:spTree>
     <p:extLst>
       <p:ext uri="{BB962C8B-B14F-4D97-AF65-F5344CB8AC3E}">
-        <p14:creationId xmlns:p14="http://schemas.microsoft.com/office/powerpoint/2010/main" val="3173181311"/>
+        <p14:creationId xmlns:p14="http://schemas.microsoft.com/office/powerpoint/2010/main" val="584978145"/>
       </p:ext>
     </p:extLst>
   </p:cSld>
@@ -22358,10 +22049,10 @@
       </p:grpSpPr>
       <p:sp>
         <p:nvSpPr>
-          <p:cNvPr id="2" name="Titel 1">
-            <a:extLst>
-              <a:ext uri="{FF2B5EF4-FFF2-40B4-BE49-F238E27FC236}">
-                <a16:creationId xmlns:a16="http://schemas.microsoft.com/office/drawing/2014/main" id="{3DBACD47-92FC-F367-8730-A52B59555AB1}"/>
+          <p:cNvPr id="2" name="Title 1">
+            <a:extLst>
+              <a:ext uri="{FF2B5EF4-FFF2-40B4-BE49-F238E27FC236}">
+                <a16:creationId xmlns:a16="http://schemas.microsoft.com/office/drawing/2014/main" id="{14F8A214-1961-94E6-A745-903F51891127}"/>
               </a:ext>
             </a:extLst>
           </p:cNvPr>
@@ -22378,71 +22069,50 @@
           <a:lstStyle/>
           <a:p>
             <a:r>
-              <a:rPr lang="de-DE" dirty="0" err="1"/>
-              <a:t>Stationarity</a:t>
-            </a:r>
-            <a:endParaRPr lang="de-DE" dirty="0"/>
-          </a:p>
-        </p:txBody>
-      </p:sp>
-      <p:sp>
-        <p:nvSpPr>
-          <p:cNvPr id="3" name="Inhaltsplatzhalter 2">
-            <a:extLst>
-              <a:ext uri="{FF2B5EF4-FFF2-40B4-BE49-F238E27FC236}">
-                <a16:creationId xmlns:a16="http://schemas.microsoft.com/office/drawing/2014/main" id="{238EE37C-F9A6-CA96-1CCE-D61439094A48}"/>
-              </a:ext>
-            </a:extLst>
-          </p:cNvPr>
-          <p:cNvSpPr>
-            <a:spLocks noGrp="1"/>
-          </p:cNvSpPr>
-          <p:nvPr>
-            <p:ph idx="1"/>
-          </p:nvPr>
-        </p:nvSpPr>
-        <p:spPr/>
-        <p:txBody>
-          <a:bodyPr/>
-          <a:lstStyle/>
-          <a:p>
-            <a:endParaRPr lang="de-DE"/>
-          </a:p>
-        </p:txBody>
-      </p:sp>
-      <p:sp>
-        <p:nvSpPr>
-          <p:cNvPr id="4" name="Foliennummernplatzhalter 3">
-            <a:extLst>
-              <a:ext uri="{FF2B5EF4-FFF2-40B4-BE49-F238E27FC236}">
-                <a16:creationId xmlns:a16="http://schemas.microsoft.com/office/drawing/2014/main" id="{B284EF11-7B5B-A7D8-239D-941BC50B89FC}"/>
-              </a:ext>
-            </a:extLst>
-          </p:cNvPr>
-          <p:cNvSpPr>
-            <a:spLocks noGrp="1"/>
-          </p:cNvSpPr>
-          <p:nvPr>
-            <p:ph type="sldNum" sz="quarter" idx="12"/>
-          </p:nvPr>
-        </p:nvSpPr>
-        <p:spPr/>
-        <p:txBody>
-          <a:bodyPr/>
-          <a:lstStyle/>
-          <a:p>
-            <a:fld id="{3D4C94FE-FF23-4504-88E9-14D481113291}" type="slidenum">
-              <a:rPr lang="en-GB" smtClean="0"/>
-              <a:t>8</a:t>
-            </a:fld>
-            <a:endParaRPr lang="en-GB"/>
-          </a:p>
-        </p:txBody>
-      </p:sp>
+              <a:rPr lang="de-DE" dirty="0"/>
+              <a:t>I</a:t>
+            </a:r>
+            <a:r>
+              <a:rPr lang="en-GB" dirty="0"/>
+              <a:t>t works by statistically learning patterns</a:t>
+            </a:r>
+          </a:p>
+        </p:txBody>
+      </p:sp>
+      <p:pic>
+        <p:nvPicPr>
+          <p:cNvPr id="6" name="Picture 5">
+            <a:extLst>
+              <a:ext uri="{FF2B5EF4-FFF2-40B4-BE49-F238E27FC236}">
+                <a16:creationId xmlns:a16="http://schemas.microsoft.com/office/drawing/2014/main" id="{29DEFAE4-91FB-4098-BD65-CE4FCF4455E5}"/>
+              </a:ext>
+            </a:extLst>
+          </p:cNvPr>
+          <p:cNvPicPr>
+            <a:picLocks noChangeAspect="1"/>
+          </p:cNvPicPr>
+          <p:nvPr/>
+        </p:nvPicPr>
+        <p:blipFill>
+          <a:blip r:embed="rId2"/>
+          <a:stretch>
+            <a:fillRect/>
+          </a:stretch>
+        </p:blipFill>
+        <p:spPr>
+          <a:xfrm>
+            <a:off x="2772103" y="1292715"/>
+            <a:ext cx="6647793" cy="5565285"/>
+          </a:xfrm>
+          <a:prstGeom prst="rect">
+            <a:avLst/>
+          </a:prstGeom>
+        </p:spPr>
+      </p:pic>
     </p:spTree>
     <p:extLst>
       <p:ext uri="{BB962C8B-B14F-4D97-AF65-F5344CB8AC3E}">
-        <p14:creationId xmlns:p14="http://schemas.microsoft.com/office/powerpoint/2010/main" val="584978145"/>
+        <p14:creationId xmlns:p14="http://schemas.microsoft.com/office/powerpoint/2010/main" val="2702762400"/>
       </p:ext>
     </p:extLst>
   </p:cSld>
@@ -22471,10 +22141,10 @@
       </p:grpSpPr>
       <p:sp>
         <p:nvSpPr>
-          <p:cNvPr id="2" name="Title 1">
-            <a:extLst>
-              <a:ext uri="{FF2B5EF4-FFF2-40B4-BE49-F238E27FC236}">
-                <a16:creationId xmlns:a16="http://schemas.microsoft.com/office/drawing/2014/main" id="{14F8A214-1961-94E6-A745-903F51891127}"/>
+          <p:cNvPr id="2" name="Titel 1">
+            <a:extLst>
+              <a:ext uri="{FF2B5EF4-FFF2-40B4-BE49-F238E27FC236}">
+                <a16:creationId xmlns:a16="http://schemas.microsoft.com/office/drawing/2014/main" id="{54637D7C-A7CD-210C-B823-50AFB58C8E5D}"/>
               </a:ext>
             </a:extLst>
           </p:cNvPr>
@@ -22492,49 +22162,69 @@
           <a:p>
             <a:r>
               <a:rPr lang="de-DE" dirty="0"/>
-              <a:t>I</a:t>
-            </a:r>
-            <a:r>
-              <a:rPr lang="en-GB" dirty="0"/>
-              <a:t>t works by statistically learning patterns</a:t>
-            </a:r>
-          </a:p>
-        </p:txBody>
-      </p:sp>
-      <p:pic>
-        <p:nvPicPr>
-          <p:cNvPr id="6" name="Picture 5">
-            <a:extLst>
-              <a:ext uri="{FF2B5EF4-FFF2-40B4-BE49-F238E27FC236}">
-                <a16:creationId xmlns:a16="http://schemas.microsoft.com/office/drawing/2014/main" id="{29DEFAE4-91FB-4098-BD65-CE4FCF4455E5}"/>
-              </a:ext>
-            </a:extLst>
-          </p:cNvPr>
-          <p:cNvPicPr>
-            <a:picLocks noChangeAspect="1"/>
-          </p:cNvPicPr>
-          <p:nvPr/>
-        </p:nvPicPr>
-        <p:blipFill>
-          <a:blip r:embed="rId2"/>
-          <a:stretch>
-            <a:fillRect/>
-          </a:stretch>
-        </p:blipFill>
-        <p:spPr>
-          <a:xfrm>
-            <a:off x="2772103" y="1292715"/>
-            <a:ext cx="6647793" cy="5565285"/>
-          </a:xfrm>
-          <a:prstGeom prst="rect">
-            <a:avLst/>
-          </a:prstGeom>
-        </p:spPr>
-      </p:pic>
+              <a:t>AR, MA, and ARIMA Models</a:t>
+            </a:r>
+          </a:p>
+        </p:txBody>
+      </p:sp>
+      <p:sp>
+        <p:nvSpPr>
+          <p:cNvPr id="3" name="Inhaltsplatzhalter 2">
+            <a:extLst>
+              <a:ext uri="{FF2B5EF4-FFF2-40B4-BE49-F238E27FC236}">
+                <a16:creationId xmlns:a16="http://schemas.microsoft.com/office/drawing/2014/main" id="{BB7018BF-AC50-D80C-B16C-C0F622FFC468}"/>
+              </a:ext>
+            </a:extLst>
+          </p:cNvPr>
+          <p:cNvSpPr>
+            <a:spLocks noGrp="1"/>
+          </p:cNvSpPr>
+          <p:nvPr>
+            <p:ph idx="1"/>
+          </p:nvPr>
+        </p:nvSpPr>
+        <p:spPr/>
+        <p:txBody>
+          <a:bodyPr/>
+          <a:lstStyle/>
+          <a:p>
+            <a:endParaRPr lang="de-DE"/>
+          </a:p>
+        </p:txBody>
+      </p:sp>
+      <p:sp>
+        <p:nvSpPr>
+          <p:cNvPr id="4" name="Foliennummernplatzhalter 3">
+            <a:extLst>
+              <a:ext uri="{FF2B5EF4-FFF2-40B4-BE49-F238E27FC236}">
+                <a16:creationId xmlns:a16="http://schemas.microsoft.com/office/drawing/2014/main" id="{5239F289-8D36-5BB6-F4B9-4132BA3F6478}"/>
+              </a:ext>
+            </a:extLst>
+          </p:cNvPr>
+          <p:cNvSpPr>
+            <a:spLocks noGrp="1"/>
+          </p:cNvSpPr>
+          <p:nvPr>
+            <p:ph type="sldNum" sz="quarter" idx="12"/>
+          </p:nvPr>
+        </p:nvSpPr>
+        <p:spPr/>
+        <p:txBody>
+          <a:bodyPr/>
+          <a:lstStyle/>
+          <a:p>
+            <a:fld id="{3D4C94FE-FF23-4504-88E9-14D481113291}" type="slidenum">
+              <a:rPr lang="en-GB" smtClean="0"/>
+              <a:t>9</a:t>
+            </a:fld>
+            <a:endParaRPr lang="en-GB"/>
+          </a:p>
+        </p:txBody>
+      </p:sp>
     </p:spTree>
     <p:extLst>
       <p:ext uri="{BB962C8B-B14F-4D97-AF65-F5344CB8AC3E}">
-        <p14:creationId xmlns:p14="http://schemas.microsoft.com/office/powerpoint/2010/main" val="2702762400"/>
+        <p14:creationId xmlns:p14="http://schemas.microsoft.com/office/powerpoint/2010/main" val="3159295460"/>
       </p:ext>
     </p:extLst>
   </p:cSld>

--- a/slides/9_time_series.pptx
+++ b/slides/9_time_series.pptx
@@ -12,38 +12,38 @@
   <p:sldIdLst>
     <p:sldId id="256" r:id="rId4"/>
     <p:sldId id="2076137264" r:id="rId5"/>
-    <p:sldId id="2076137265" r:id="rId6"/>
-    <p:sldId id="2076137266" r:id="rId7"/>
-    <p:sldId id="265" r:id="rId8"/>
-    <p:sldId id="2076137267" r:id="rId9"/>
-    <p:sldId id="2076137268" r:id="rId10"/>
-    <p:sldId id="259" r:id="rId11"/>
-    <p:sldId id="2076137269" r:id="rId12"/>
-    <p:sldId id="258" r:id="rId13"/>
-    <p:sldId id="2076137270" r:id="rId14"/>
-    <p:sldId id="2076137271" r:id="rId15"/>
-    <p:sldId id="2076137272" r:id="rId16"/>
-    <p:sldId id="2076137273" r:id="rId17"/>
-    <p:sldId id="2076137274" r:id="rId18"/>
-    <p:sldId id="2076137259" r:id="rId19"/>
-    <p:sldId id="2076137275" r:id="rId20"/>
-    <p:sldId id="2076137256" r:id="rId21"/>
-    <p:sldId id="2076137276" r:id="rId22"/>
-    <p:sldId id="681" r:id="rId23"/>
-    <p:sldId id="262" r:id="rId24"/>
-    <p:sldId id="334" r:id="rId25"/>
-    <p:sldId id="2076137252" r:id="rId26"/>
-    <p:sldId id="2076137243" r:id="rId27"/>
-    <p:sldId id="671" r:id="rId28"/>
-    <p:sldId id="2076137278" r:id="rId29"/>
-    <p:sldId id="299" r:id="rId30"/>
-    <p:sldId id="2076137279" r:id="rId31"/>
-    <p:sldId id="261" r:id="rId32"/>
-    <p:sldId id="268" r:id="rId33"/>
-    <p:sldId id="2076137280" r:id="rId34"/>
-    <p:sldId id="276" r:id="rId35"/>
-    <p:sldId id="277" r:id="rId36"/>
-    <p:sldId id="267" r:id="rId37"/>
+    <p:sldId id="2076137266" r:id="rId6"/>
+    <p:sldId id="265" r:id="rId7"/>
+    <p:sldId id="2076137267" r:id="rId8"/>
+    <p:sldId id="2076137268" r:id="rId9"/>
+    <p:sldId id="259" r:id="rId10"/>
+    <p:sldId id="2076137269" r:id="rId11"/>
+    <p:sldId id="258" r:id="rId12"/>
+    <p:sldId id="2076137256" r:id="rId13"/>
+    <p:sldId id="2076137272" r:id="rId14"/>
+    <p:sldId id="2076137284" r:id="rId15"/>
+    <p:sldId id="2076137274" r:id="rId16"/>
+    <p:sldId id="2076137285" r:id="rId17"/>
+    <p:sldId id="2076137286" r:id="rId18"/>
+    <p:sldId id="2076137287" r:id="rId19"/>
+    <p:sldId id="2076137282" r:id="rId20"/>
+    <p:sldId id="2076137288" r:id="rId21"/>
+    <p:sldId id="2076137259" r:id="rId22"/>
+    <p:sldId id="2076137283" r:id="rId23"/>
+    <p:sldId id="681" r:id="rId24"/>
+    <p:sldId id="262" r:id="rId25"/>
+    <p:sldId id="334" r:id="rId26"/>
+    <p:sldId id="2076137252" r:id="rId27"/>
+    <p:sldId id="2076137243" r:id="rId28"/>
+    <p:sldId id="671" r:id="rId29"/>
+    <p:sldId id="2076137278" r:id="rId30"/>
+    <p:sldId id="261" r:id="rId31"/>
+    <p:sldId id="268" r:id="rId32"/>
+    <p:sldId id="2076137280" r:id="rId33"/>
+    <p:sldId id="276" r:id="rId34"/>
+    <p:sldId id="277" r:id="rId35"/>
+    <p:sldId id="267" r:id="rId36"/>
+    <p:sldId id="2076137279" r:id="rId37"/>
   </p:sldIdLst>
   <p:sldSz cx="12192000" cy="6858000"/>
   <p:notesSz cx="6858000" cy="9144000"/>
@@ -3916,7 +3916,7 @@
           <a:p>
             <a:fld id="{7B97FCB6-4C2D-C04F-941C-940A5CA28665}" type="datetimeFigureOut">
               <a:rPr lang="en-DE" smtClean="0"/>
-              <a:t>4/17/26</a:t>
+              <a:t>5/3/26</a:t>
             </a:fld>
             <a:endParaRPr lang="en-DE"/>
           </a:p>
@@ -4333,7 +4333,7 @@
           <a:p>
             <a:fld id="{C549D344-DF28-3942-A533-7BAE51F54729}" type="datetime1">
               <a:rPr lang="de-DE" smtClean="0"/>
-              <a:t>17.04.26</a:t>
+              <a:t>03.05.26</a:t>
             </a:fld>
             <a:endParaRPr lang="en-DE"/>
           </a:p>
@@ -4533,7 +4533,7 @@
           <a:p>
             <a:fld id="{B086E2CF-DFBF-D04E-B5DA-5682BEFB4DDF}" type="datetime1">
               <a:rPr lang="de-DE" smtClean="0"/>
-              <a:t>17.04.26</a:t>
+              <a:t>03.05.26</a:t>
             </a:fld>
             <a:endParaRPr lang="en-DE"/>
           </a:p>
@@ -4743,7 +4743,7 @@
           <a:p>
             <a:fld id="{535E2105-910D-C747-9EAC-FAEE1AE97756}" type="datetime1">
               <a:rPr lang="de-DE" smtClean="0"/>
-              <a:t>17.04.26</a:t>
+              <a:t>03.05.26</a:t>
             </a:fld>
             <a:endParaRPr lang="en-DE"/>
           </a:p>
@@ -4965,7 +4965,7 @@
           <a:p>
             <a:fld id="{77CA1D5B-86DB-41C7-A296-641DCC7DEA71}" type="datetimeFigureOut">
               <a:rPr lang="en-GB" smtClean="0"/>
-              <a:t>17/04/2026</a:t>
+              <a:t>03/05/2026</a:t>
             </a:fld>
             <a:endParaRPr lang="en-GB"/>
           </a:p>
@@ -5165,7 +5165,7 @@
           <a:p>
             <a:fld id="{77CA1D5B-86DB-41C7-A296-641DCC7DEA71}" type="datetimeFigureOut">
               <a:rPr lang="en-GB" smtClean="0"/>
-              <a:t>17/04/2026</a:t>
+              <a:t>03/05/2026</a:t>
             </a:fld>
             <a:endParaRPr lang="en-GB"/>
           </a:p>
@@ -5441,7 +5441,7 @@
           <a:p>
             <a:fld id="{77CA1D5B-86DB-41C7-A296-641DCC7DEA71}" type="datetimeFigureOut">
               <a:rPr lang="en-GB" smtClean="0"/>
-              <a:t>17/04/2026</a:t>
+              <a:t>03/05/2026</a:t>
             </a:fld>
             <a:endParaRPr lang="en-GB"/>
           </a:p>
@@ -5709,7 +5709,7 @@
           <a:p>
             <a:fld id="{77CA1D5B-86DB-41C7-A296-641DCC7DEA71}" type="datetimeFigureOut">
               <a:rPr lang="en-GB" smtClean="0"/>
-              <a:t>17/04/2026</a:t>
+              <a:t>03/05/2026</a:t>
             </a:fld>
             <a:endParaRPr lang="en-GB"/>
           </a:p>
@@ -6124,7 +6124,7 @@
           <a:p>
             <a:fld id="{77CA1D5B-86DB-41C7-A296-641DCC7DEA71}" type="datetimeFigureOut">
               <a:rPr lang="en-GB" smtClean="0"/>
-              <a:t>17/04/2026</a:t>
+              <a:t>03/05/2026</a:t>
             </a:fld>
             <a:endParaRPr lang="en-GB"/>
           </a:p>
@@ -6266,7 +6266,7 @@
           <a:p>
             <a:fld id="{77CA1D5B-86DB-41C7-A296-641DCC7DEA71}" type="datetimeFigureOut">
               <a:rPr lang="en-GB" smtClean="0"/>
-              <a:t>17/04/2026</a:t>
+              <a:t>03/05/2026</a:t>
             </a:fld>
             <a:endParaRPr lang="en-GB"/>
           </a:p>
@@ -6379,7 +6379,7 @@
           <a:p>
             <a:fld id="{77CA1D5B-86DB-41C7-A296-641DCC7DEA71}" type="datetimeFigureOut">
               <a:rPr lang="en-GB" smtClean="0"/>
-              <a:t>17/04/2026</a:t>
+              <a:t>03/05/2026</a:t>
             </a:fld>
             <a:endParaRPr lang="en-GB"/>
           </a:p>
@@ -6692,7 +6692,7 @@
           <a:p>
             <a:fld id="{77CA1D5B-86DB-41C7-A296-641DCC7DEA71}" type="datetimeFigureOut">
               <a:rPr lang="en-GB" smtClean="0"/>
-              <a:t>17/04/2026</a:t>
+              <a:t>03/05/2026</a:t>
             </a:fld>
             <a:endParaRPr lang="en-GB"/>
           </a:p>
@@ -6892,7 +6892,7 @@
           <a:p>
             <a:fld id="{0D5BD470-EF8A-9248-A0C9-F868A9D8F50A}" type="datetime1">
               <a:rPr lang="de-DE" smtClean="0"/>
-              <a:t>17.04.26</a:t>
+              <a:t>03.05.26</a:t>
             </a:fld>
             <a:endParaRPr lang="en-DE"/>
           </a:p>
@@ -7181,7 +7181,7 @@
           <a:p>
             <a:fld id="{77CA1D5B-86DB-41C7-A296-641DCC7DEA71}" type="datetimeFigureOut">
               <a:rPr lang="en-GB" smtClean="0"/>
-              <a:t>17/04/2026</a:t>
+              <a:t>03/05/2026</a:t>
             </a:fld>
             <a:endParaRPr lang="en-GB"/>
           </a:p>
@@ -7381,7 +7381,7 @@
           <a:p>
             <a:fld id="{77CA1D5B-86DB-41C7-A296-641DCC7DEA71}" type="datetimeFigureOut">
               <a:rPr lang="en-GB" smtClean="0"/>
-              <a:t>17/04/2026</a:t>
+              <a:t>03/05/2026</a:t>
             </a:fld>
             <a:endParaRPr lang="en-GB"/>
           </a:p>
@@ -7591,7 +7591,7 @@
           <a:p>
             <a:fld id="{77CA1D5B-86DB-41C7-A296-641DCC7DEA71}" type="datetimeFigureOut">
               <a:rPr lang="en-GB" smtClean="0"/>
-              <a:t>17/04/2026</a:t>
+              <a:t>03/05/2026</a:t>
             </a:fld>
             <a:endParaRPr lang="en-GB"/>
           </a:p>
@@ -7813,7 +7813,7 @@
           <a:p>
             <a:fld id="{7128456D-5ACD-4673-BCE9-52505EC32CEF}" type="datetime1">
               <a:rPr lang="en-GB" smtClean="0"/>
-              <a:t>17/04/2026</a:t>
+              <a:t>03/05/2026</a:t>
             </a:fld>
             <a:endParaRPr lang="en-GB"/>
           </a:p>
@@ -8013,7 +8013,7 @@
           <a:p>
             <a:fld id="{0B763083-041D-491F-A9FE-D51D99E0B41E}" type="datetime1">
               <a:rPr lang="en-GB" smtClean="0"/>
-              <a:t>17/04/2026</a:t>
+              <a:t>03/05/2026</a:t>
             </a:fld>
             <a:endParaRPr lang="en-GB"/>
           </a:p>
@@ -8289,7 +8289,7 @@
           <a:p>
             <a:fld id="{409455E6-A1CA-4CB6-9964-88D5086DA5CA}" type="datetime1">
               <a:rPr lang="en-GB" smtClean="0"/>
-              <a:t>17/04/2026</a:t>
+              <a:t>03/05/2026</a:t>
             </a:fld>
             <a:endParaRPr lang="en-GB"/>
           </a:p>
@@ -8557,7 +8557,7 @@
           <a:p>
             <a:fld id="{FAD82E38-24C1-4A8F-B916-1E714FC129DD}" type="datetime1">
               <a:rPr lang="en-GB" smtClean="0"/>
-              <a:t>17/04/2026</a:t>
+              <a:t>03/05/2026</a:t>
             </a:fld>
             <a:endParaRPr lang="en-GB"/>
           </a:p>
@@ -8972,7 +8972,7 @@
           <a:p>
             <a:fld id="{BC17BCDC-BAA6-44B5-B642-6F28D623ABB1}" type="datetime1">
               <a:rPr lang="en-GB" smtClean="0"/>
-              <a:t>17/04/2026</a:t>
+              <a:t>03/05/2026</a:t>
             </a:fld>
             <a:endParaRPr lang="en-GB"/>
           </a:p>
@@ -9114,7 +9114,7 @@
           <a:p>
             <a:fld id="{01D4BEC3-2CF9-4B19-A0A5-E70A0675B677}" type="datetime1">
               <a:rPr lang="en-GB" smtClean="0"/>
-              <a:t>17/04/2026</a:t>
+              <a:t>03/05/2026</a:t>
             </a:fld>
             <a:endParaRPr lang="en-GB"/>
           </a:p>
@@ -9227,7 +9227,7 @@
           <a:p>
             <a:fld id="{98E28BFD-B06D-4A45-8453-724AC7BA29C5}" type="datetime1">
               <a:rPr lang="en-GB" smtClean="0"/>
-              <a:t>17/04/2026</a:t>
+              <a:t>03/05/2026</a:t>
             </a:fld>
             <a:endParaRPr lang="en-GB"/>
           </a:p>
@@ -9503,7 +9503,7 @@
           <a:p>
             <a:fld id="{7B12F34F-4BA0-4C4C-95F7-3AE797B9DBCA}" type="datetime1">
               <a:rPr lang="de-DE" smtClean="0"/>
-              <a:t>17.04.26</a:t>
+              <a:t>03.05.26</a:t>
             </a:fld>
             <a:endParaRPr lang="en-DE"/>
           </a:p>
@@ -9816,7 +9816,7 @@
           <a:p>
             <a:fld id="{A14D99B0-2926-4194-B668-6A0D6123824C}" type="datetime1">
               <a:rPr lang="en-GB" smtClean="0"/>
-              <a:t>17/04/2026</a:t>
+              <a:t>03/05/2026</a:t>
             </a:fld>
             <a:endParaRPr lang="en-GB"/>
           </a:p>
@@ -10105,7 +10105,7 @@
           <a:p>
             <a:fld id="{29F03426-21FD-40F4-9F0B-AD19F2317DCA}" type="datetime1">
               <a:rPr lang="en-GB" smtClean="0"/>
-              <a:t>17/04/2026</a:t>
+              <a:t>03/05/2026</a:t>
             </a:fld>
             <a:endParaRPr lang="en-GB"/>
           </a:p>
@@ -10305,7 +10305,7 @@
           <a:p>
             <a:fld id="{D99A2639-5270-4811-807B-89D4AE95E7ED}" type="datetime1">
               <a:rPr lang="en-GB" smtClean="0"/>
-              <a:t>17/04/2026</a:t>
+              <a:t>03/05/2026</a:t>
             </a:fld>
             <a:endParaRPr lang="en-GB"/>
           </a:p>
@@ -10515,7 +10515,7 @@
           <a:p>
             <a:fld id="{B552976C-D408-4E27-8D02-D7795F6D8A01}" type="datetime1">
               <a:rPr lang="en-GB" smtClean="0"/>
-              <a:t>17/04/2026</a:t>
+              <a:t>03/05/2026</a:t>
             </a:fld>
             <a:endParaRPr lang="en-GB"/>
           </a:p>
@@ -10783,7 +10783,7 @@
           <a:p>
             <a:fld id="{C522E529-A223-9F44-93E9-FAF3838F58DD}" type="datetime1">
               <a:rPr lang="de-DE" smtClean="0"/>
-              <a:t>17.04.26</a:t>
+              <a:t>03.05.26</a:t>
             </a:fld>
             <a:endParaRPr lang="en-DE"/>
           </a:p>
@@ -11198,7 +11198,7 @@
           <a:p>
             <a:fld id="{4DF85873-DFC3-7147-8CF2-B93516293BD0}" type="datetime1">
               <a:rPr lang="de-DE" smtClean="0"/>
-              <a:t>17.04.26</a:t>
+              <a:t>03.05.26</a:t>
             </a:fld>
             <a:endParaRPr lang="en-DE"/>
           </a:p>
@@ -11340,7 +11340,7 @@
           <a:p>
             <a:fld id="{9FC8FD75-28F4-1141-976A-ED0F1E51F5FE}" type="datetime1">
               <a:rPr lang="de-DE" smtClean="0"/>
-              <a:t>17.04.26</a:t>
+              <a:t>03.05.26</a:t>
             </a:fld>
             <a:endParaRPr lang="en-DE"/>
           </a:p>
@@ -11453,7 +11453,7 @@
           <a:p>
             <a:fld id="{A5CF1818-702C-9249-923B-5C9832600DF4}" type="datetime1">
               <a:rPr lang="de-DE" smtClean="0"/>
-              <a:t>17.04.26</a:t>
+              <a:t>03.05.26</a:t>
             </a:fld>
             <a:endParaRPr lang="en-DE"/>
           </a:p>
@@ -11766,7 +11766,7 @@
           <a:p>
             <a:fld id="{70703230-1F3D-6648-88BD-E31F8313AC65}" type="datetime1">
               <a:rPr lang="de-DE" smtClean="0"/>
-              <a:t>17.04.26</a:t>
+              <a:t>03.05.26</a:t>
             </a:fld>
             <a:endParaRPr lang="en-DE"/>
           </a:p>
@@ -12055,7 +12055,7 @@
           <a:p>
             <a:fld id="{EE1F903E-BE95-4947-BFB2-6309249837BB}" type="datetime1">
               <a:rPr lang="de-DE" smtClean="0"/>
-              <a:t>17.04.26</a:t>
+              <a:t>03.05.26</a:t>
             </a:fld>
             <a:endParaRPr lang="en-DE"/>
           </a:p>
@@ -12298,7 +12298,7 @@
           <a:p>
             <a:fld id="{18698627-0DA6-6B48-8AB9-BEA12C38C21E}" type="datetime1">
               <a:rPr lang="de-DE" smtClean="0"/>
-              <a:t>17.04.26</a:t>
+              <a:t>03.05.26</a:t>
             </a:fld>
             <a:endParaRPr lang="en-DE"/>
           </a:p>
@@ -12869,7 +12869,7 @@
           <a:p>
             <a:fld id="{77CA1D5B-86DB-41C7-A296-641DCC7DEA71}" type="datetimeFigureOut">
               <a:rPr lang="en-GB" smtClean="0"/>
-              <a:t>17/04/2026</a:t>
+              <a:t>03/05/2026</a:t>
             </a:fld>
             <a:endParaRPr lang="en-GB"/>
           </a:p>
@@ -13439,7 +13439,7 @@
           <a:p>
             <a:fld id="{0369896D-5D36-4D31-A0CE-0C2BFB17B225}" type="datetime1">
               <a:rPr lang="en-GB" smtClean="0"/>
-              <a:t>17/04/2026</a:t>
+              <a:t>03/05/2026</a:t>
             </a:fld>
             <a:endParaRPr lang="en-GB"/>
           </a:p>
@@ -13929,820 +13929,6 @@
 </file>
 
 <file path=ppt/slides/slide10.xml><?xml version="1.0" encoding="utf-8"?>
-<p:sld xmlns:a="http://schemas.openxmlformats.org/drawingml/2006/main" xmlns:r="http://schemas.openxmlformats.org/officeDocument/2006/relationships" xmlns:p="http://schemas.openxmlformats.org/presentationml/2006/main">
-  <p:cSld>
-    <p:spTree>
-      <p:nvGrpSpPr>
-        <p:cNvPr id="1" name=""/>
-        <p:cNvGrpSpPr/>
-        <p:nvPr/>
-      </p:nvGrpSpPr>
-      <p:grpSpPr>
-        <a:xfrm>
-          <a:off x="0" y="0"/>
-          <a:ext cx="0" cy="0"/>
-          <a:chOff x="0" y="0"/>
-          <a:chExt cx="0" cy="0"/>
-        </a:xfrm>
-      </p:grpSpPr>
-      <p:sp>
-        <p:nvSpPr>
-          <p:cNvPr id="2" name="Title 1">
-            <a:extLst>
-              <a:ext uri="{FF2B5EF4-FFF2-40B4-BE49-F238E27FC236}">
-                <a16:creationId xmlns:a16="http://schemas.microsoft.com/office/drawing/2014/main" id="{2C126CCB-76F8-9110-D53A-279CD0B823D0}"/>
-              </a:ext>
-            </a:extLst>
-          </p:cNvPr>
-          <p:cNvSpPr>
-            <a:spLocks noGrp="1"/>
-          </p:cNvSpPr>
-          <p:nvPr>
-            <p:ph type="title"/>
-          </p:nvPr>
-        </p:nvSpPr>
-        <p:spPr/>
-        <p:txBody>
-          <a:bodyPr/>
-          <a:lstStyle/>
-          <a:p>
-            <a:r>
-              <a:rPr lang="en-GB" dirty="0"/>
-              <a:t>You need past data to learn from</a:t>
-            </a:r>
-          </a:p>
-        </p:txBody>
-      </p:sp>
-      <p:pic>
-        <p:nvPicPr>
-          <p:cNvPr id="9" name="Picture 8" descr="A graph showing the performance of training&#10;&#10;Description automatically generated">
-            <a:extLst>
-              <a:ext uri="{FF2B5EF4-FFF2-40B4-BE49-F238E27FC236}">
-                <a16:creationId xmlns:a16="http://schemas.microsoft.com/office/drawing/2014/main" id="{5B786528-7601-4E42-BE3F-95A3424E75F0}"/>
-              </a:ext>
-            </a:extLst>
-          </p:cNvPr>
-          <p:cNvPicPr>
-            <a:picLocks noChangeAspect="1"/>
-          </p:cNvPicPr>
-          <p:nvPr/>
-        </p:nvPicPr>
-        <p:blipFill>
-          <a:blip r:embed="rId2">
-            <a:extLst>
-              <a:ext uri="{28A0092B-C50C-407E-A947-70E740481C1C}">
-                <a14:useLocalDpi xmlns:a14="http://schemas.microsoft.com/office/drawing/2010/main" val="0"/>
-              </a:ext>
-            </a:extLst>
-          </a:blip>
-          <a:stretch>
-            <a:fillRect/>
-          </a:stretch>
-        </p:blipFill>
-        <p:spPr>
-          <a:xfrm>
-            <a:off x="1981668" y="1482292"/>
-            <a:ext cx="8228663" cy="5375708"/>
-          </a:xfrm>
-          <a:prstGeom prst="rect">
-            <a:avLst/>
-          </a:prstGeom>
-        </p:spPr>
-      </p:pic>
-    </p:spTree>
-    <p:extLst>
-      <p:ext uri="{BB962C8B-B14F-4D97-AF65-F5344CB8AC3E}">
-        <p14:creationId xmlns:p14="http://schemas.microsoft.com/office/powerpoint/2010/main" val="1378669131"/>
-      </p:ext>
-    </p:extLst>
-  </p:cSld>
-  <p:clrMapOvr>
-    <a:masterClrMapping/>
-  </p:clrMapOvr>
-</p:sld>
-</file>
-
-<file path=ppt/slides/slide11.xml><?xml version="1.0" encoding="utf-8"?>
-<p:sld xmlns:a="http://schemas.openxmlformats.org/drawingml/2006/main" xmlns:r="http://schemas.openxmlformats.org/officeDocument/2006/relationships" xmlns:p="http://schemas.openxmlformats.org/presentationml/2006/main">
-  <p:cSld>
-    <p:spTree>
-      <p:nvGrpSpPr>
-        <p:cNvPr id="1" name=""/>
-        <p:cNvGrpSpPr/>
-        <p:nvPr/>
-      </p:nvGrpSpPr>
-      <p:grpSpPr>
-        <a:xfrm>
-          <a:off x="0" y="0"/>
-          <a:ext cx="0" cy="0"/>
-          <a:chOff x="0" y="0"/>
-          <a:chExt cx="0" cy="0"/>
-        </a:xfrm>
-      </p:grpSpPr>
-      <p:sp>
-        <p:nvSpPr>
-          <p:cNvPr id="2" name="Titel 1">
-            <a:extLst>
-              <a:ext uri="{FF2B5EF4-FFF2-40B4-BE49-F238E27FC236}">
-                <a16:creationId xmlns:a16="http://schemas.microsoft.com/office/drawing/2014/main" id="{3AC56C75-D645-97EB-B676-1B0C2A220AD3}"/>
-              </a:ext>
-            </a:extLst>
-          </p:cNvPr>
-          <p:cNvSpPr>
-            <a:spLocks noGrp="1"/>
-          </p:cNvSpPr>
-          <p:nvPr>
-            <p:ph type="title"/>
-          </p:nvPr>
-        </p:nvSpPr>
-        <p:spPr/>
-        <p:txBody>
-          <a:bodyPr/>
-          <a:lstStyle/>
-          <a:p>
-            <a:r>
-              <a:rPr lang="de-DE" dirty="0"/>
-              <a:t>Model </a:t>
-            </a:r>
-            <a:r>
-              <a:rPr lang="de-DE" dirty="0" err="1"/>
-              <a:t>Identification</a:t>
-            </a:r>
-            <a:r>
-              <a:rPr lang="de-DE" dirty="0"/>
-              <a:t> and </a:t>
-            </a:r>
-            <a:r>
-              <a:rPr lang="de-DE" dirty="0" err="1"/>
-              <a:t>Diagnostics</a:t>
-            </a:r>
-            <a:endParaRPr lang="de-DE" dirty="0"/>
-          </a:p>
-        </p:txBody>
-      </p:sp>
-      <p:sp>
-        <p:nvSpPr>
-          <p:cNvPr id="3" name="Inhaltsplatzhalter 2">
-            <a:extLst>
-              <a:ext uri="{FF2B5EF4-FFF2-40B4-BE49-F238E27FC236}">
-                <a16:creationId xmlns:a16="http://schemas.microsoft.com/office/drawing/2014/main" id="{F664FA66-9A32-07F6-45F7-CEA23E6E09B3}"/>
-              </a:ext>
-            </a:extLst>
-          </p:cNvPr>
-          <p:cNvSpPr>
-            <a:spLocks noGrp="1"/>
-          </p:cNvSpPr>
-          <p:nvPr>
-            <p:ph idx="1"/>
-          </p:nvPr>
-        </p:nvSpPr>
-        <p:spPr/>
-        <p:txBody>
-          <a:bodyPr/>
-          <a:lstStyle/>
-          <a:p>
-            <a:endParaRPr lang="de-DE"/>
-          </a:p>
-        </p:txBody>
-      </p:sp>
-    </p:spTree>
-    <p:extLst>
-      <p:ext uri="{BB962C8B-B14F-4D97-AF65-F5344CB8AC3E}">
-        <p14:creationId xmlns:p14="http://schemas.microsoft.com/office/powerpoint/2010/main" val="1817484160"/>
-      </p:ext>
-    </p:extLst>
-  </p:cSld>
-  <p:clrMapOvr>
-    <a:masterClrMapping/>
-  </p:clrMapOvr>
-</p:sld>
-</file>
-
-<file path=ppt/slides/slide12.xml><?xml version="1.0" encoding="utf-8"?>
-<p:sld xmlns:a="http://schemas.openxmlformats.org/drawingml/2006/main" xmlns:r="http://schemas.openxmlformats.org/officeDocument/2006/relationships" xmlns:p="http://schemas.openxmlformats.org/presentationml/2006/main">
-  <p:cSld>
-    <p:spTree>
-      <p:nvGrpSpPr>
-        <p:cNvPr id="1" name=""/>
-        <p:cNvGrpSpPr/>
-        <p:nvPr/>
-      </p:nvGrpSpPr>
-      <p:grpSpPr>
-        <a:xfrm>
-          <a:off x="0" y="0"/>
-          <a:ext cx="0" cy="0"/>
-          <a:chOff x="0" y="0"/>
-          <a:chExt cx="0" cy="0"/>
-        </a:xfrm>
-      </p:grpSpPr>
-      <p:sp>
-        <p:nvSpPr>
-          <p:cNvPr id="2" name="Titel 1">
-            <a:extLst>
-              <a:ext uri="{FF2B5EF4-FFF2-40B4-BE49-F238E27FC236}">
-                <a16:creationId xmlns:a16="http://schemas.microsoft.com/office/drawing/2014/main" id="{B2C5E3DC-9C7A-C0DB-15E7-7A2FDB0E92BA}"/>
-              </a:ext>
-            </a:extLst>
-          </p:cNvPr>
-          <p:cNvSpPr>
-            <a:spLocks noGrp="1"/>
-          </p:cNvSpPr>
-          <p:nvPr>
-            <p:ph type="title"/>
-          </p:nvPr>
-        </p:nvSpPr>
-        <p:spPr/>
-        <p:txBody>
-          <a:bodyPr/>
-          <a:lstStyle/>
-          <a:p>
-            <a:r>
-              <a:rPr lang="de-DE" dirty="0" err="1"/>
-              <a:t>Forecasting</a:t>
-            </a:r>
-            <a:r>
-              <a:rPr lang="de-DE" dirty="0"/>
-              <a:t> </a:t>
-            </a:r>
-            <a:r>
-              <a:rPr lang="de-DE" dirty="0" err="1"/>
-              <a:t>with</a:t>
-            </a:r>
-            <a:r>
-              <a:rPr lang="de-DE" dirty="0"/>
-              <a:t> ARIMA</a:t>
-            </a:r>
-          </a:p>
-        </p:txBody>
-      </p:sp>
-      <p:sp>
-        <p:nvSpPr>
-          <p:cNvPr id="3" name="Inhaltsplatzhalter 2">
-            <a:extLst>
-              <a:ext uri="{FF2B5EF4-FFF2-40B4-BE49-F238E27FC236}">
-                <a16:creationId xmlns:a16="http://schemas.microsoft.com/office/drawing/2014/main" id="{299C1C1C-4720-0C5C-ACCE-3517D9A5E3CE}"/>
-              </a:ext>
-            </a:extLst>
-          </p:cNvPr>
-          <p:cNvSpPr>
-            <a:spLocks noGrp="1"/>
-          </p:cNvSpPr>
-          <p:nvPr>
-            <p:ph idx="1"/>
-          </p:nvPr>
-        </p:nvSpPr>
-        <p:spPr/>
-        <p:txBody>
-          <a:bodyPr/>
-          <a:lstStyle/>
-          <a:p>
-            <a:endParaRPr lang="de-DE"/>
-          </a:p>
-        </p:txBody>
-      </p:sp>
-    </p:spTree>
-    <p:extLst>
-      <p:ext uri="{BB962C8B-B14F-4D97-AF65-F5344CB8AC3E}">
-        <p14:creationId xmlns:p14="http://schemas.microsoft.com/office/powerpoint/2010/main" val="1525352227"/>
-      </p:ext>
-    </p:extLst>
-  </p:cSld>
-  <p:clrMapOvr>
-    <a:masterClrMapping/>
-  </p:clrMapOvr>
-</p:sld>
-</file>
-
-<file path=ppt/slides/slide13.xml><?xml version="1.0" encoding="utf-8"?>
-<p:sld xmlns:a="http://schemas.openxmlformats.org/drawingml/2006/main" xmlns:r="http://schemas.openxmlformats.org/officeDocument/2006/relationships" xmlns:p="http://schemas.openxmlformats.org/presentationml/2006/main">
-  <p:cSld>
-    <p:spTree>
-      <p:nvGrpSpPr>
-        <p:cNvPr id="1" name=""/>
-        <p:cNvGrpSpPr/>
-        <p:nvPr/>
-      </p:nvGrpSpPr>
-      <p:grpSpPr>
-        <a:xfrm>
-          <a:off x="0" y="0"/>
-          <a:ext cx="0" cy="0"/>
-          <a:chOff x="0" y="0"/>
-          <a:chExt cx="0" cy="0"/>
-        </a:xfrm>
-      </p:grpSpPr>
-      <p:sp>
-        <p:nvSpPr>
-          <p:cNvPr id="2" name="Titel 1">
-            <a:extLst>
-              <a:ext uri="{FF2B5EF4-FFF2-40B4-BE49-F238E27FC236}">
-                <a16:creationId xmlns:a16="http://schemas.microsoft.com/office/drawing/2014/main" id="{9931EE1B-12BB-3B84-F499-A85EFA888DD1}"/>
-              </a:ext>
-            </a:extLst>
-          </p:cNvPr>
-          <p:cNvSpPr>
-            <a:spLocks noGrp="1"/>
-          </p:cNvSpPr>
-          <p:nvPr>
-            <p:ph type="title"/>
-          </p:nvPr>
-        </p:nvSpPr>
-        <p:spPr/>
-        <p:txBody>
-          <a:bodyPr/>
-          <a:lstStyle/>
-          <a:p>
-            <a:r>
-              <a:rPr lang="de-DE" dirty="0"/>
-              <a:t>Prophet Model </a:t>
-            </a:r>
-            <a:r>
-              <a:rPr lang="de-DE" dirty="0" err="1"/>
-              <a:t>Overview</a:t>
-            </a:r>
-            <a:endParaRPr lang="de-DE" dirty="0"/>
-          </a:p>
-        </p:txBody>
-      </p:sp>
-      <p:sp>
-        <p:nvSpPr>
-          <p:cNvPr id="3" name="Inhaltsplatzhalter 2">
-            <a:extLst>
-              <a:ext uri="{FF2B5EF4-FFF2-40B4-BE49-F238E27FC236}">
-                <a16:creationId xmlns:a16="http://schemas.microsoft.com/office/drawing/2014/main" id="{323D3A79-E7BF-DAFB-FD40-E987E9CAB9FC}"/>
-              </a:ext>
-            </a:extLst>
-          </p:cNvPr>
-          <p:cNvSpPr>
-            <a:spLocks noGrp="1"/>
-          </p:cNvSpPr>
-          <p:nvPr>
-            <p:ph idx="1"/>
-          </p:nvPr>
-        </p:nvSpPr>
-        <p:spPr/>
-        <p:txBody>
-          <a:bodyPr/>
-          <a:lstStyle/>
-          <a:p>
-            <a:endParaRPr lang="de-DE"/>
-          </a:p>
-        </p:txBody>
-      </p:sp>
-    </p:spTree>
-    <p:extLst>
-      <p:ext uri="{BB962C8B-B14F-4D97-AF65-F5344CB8AC3E}">
-        <p14:creationId xmlns:p14="http://schemas.microsoft.com/office/powerpoint/2010/main" val="2822867359"/>
-      </p:ext>
-    </p:extLst>
-  </p:cSld>
-  <p:clrMapOvr>
-    <a:masterClrMapping/>
-  </p:clrMapOvr>
-</p:sld>
-</file>
-
-<file path=ppt/slides/slide14.xml><?xml version="1.0" encoding="utf-8"?>
-<p:sld xmlns:a="http://schemas.openxmlformats.org/drawingml/2006/main" xmlns:r="http://schemas.openxmlformats.org/officeDocument/2006/relationships" xmlns:p="http://schemas.openxmlformats.org/presentationml/2006/main">
-  <p:cSld>
-    <p:spTree>
-      <p:nvGrpSpPr>
-        <p:cNvPr id="1" name=""/>
-        <p:cNvGrpSpPr/>
-        <p:nvPr/>
-      </p:nvGrpSpPr>
-      <p:grpSpPr>
-        <a:xfrm>
-          <a:off x="0" y="0"/>
-          <a:ext cx="0" cy="0"/>
-          <a:chOff x="0" y="0"/>
-          <a:chExt cx="0" cy="0"/>
-        </a:xfrm>
-      </p:grpSpPr>
-      <p:sp>
-        <p:nvSpPr>
-          <p:cNvPr id="2" name="Titel 1">
-            <a:extLst>
-              <a:ext uri="{FF2B5EF4-FFF2-40B4-BE49-F238E27FC236}">
-                <a16:creationId xmlns:a16="http://schemas.microsoft.com/office/drawing/2014/main" id="{E90CAD63-F8AE-209F-5F9B-41D0EFABE760}"/>
-              </a:ext>
-            </a:extLst>
-          </p:cNvPr>
-          <p:cNvSpPr>
-            <a:spLocks noGrp="1"/>
-          </p:cNvSpPr>
-          <p:nvPr>
-            <p:ph type="title"/>
-          </p:nvPr>
-        </p:nvSpPr>
-        <p:spPr/>
-        <p:txBody>
-          <a:bodyPr/>
-          <a:lstStyle/>
-          <a:p>
-            <a:r>
-              <a:rPr lang="de-DE" dirty="0"/>
-              <a:t>Trend and </a:t>
-            </a:r>
-            <a:r>
-              <a:rPr lang="de-DE" dirty="0" err="1"/>
-              <a:t>Seasonality</a:t>
-            </a:r>
-            <a:endParaRPr lang="de-DE" dirty="0"/>
-          </a:p>
-        </p:txBody>
-      </p:sp>
-      <p:sp>
-        <p:nvSpPr>
-          <p:cNvPr id="3" name="Inhaltsplatzhalter 2">
-            <a:extLst>
-              <a:ext uri="{FF2B5EF4-FFF2-40B4-BE49-F238E27FC236}">
-                <a16:creationId xmlns:a16="http://schemas.microsoft.com/office/drawing/2014/main" id="{2F95DCFC-8E02-DDA2-268D-46BF4FB7A441}"/>
-              </a:ext>
-            </a:extLst>
-          </p:cNvPr>
-          <p:cNvSpPr>
-            <a:spLocks noGrp="1"/>
-          </p:cNvSpPr>
-          <p:nvPr>
-            <p:ph idx="1"/>
-          </p:nvPr>
-        </p:nvSpPr>
-        <p:spPr/>
-        <p:txBody>
-          <a:bodyPr/>
-          <a:lstStyle/>
-          <a:p>
-            <a:endParaRPr lang="de-DE"/>
-          </a:p>
-        </p:txBody>
-      </p:sp>
-    </p:spTree>
-    <p:extLst>
-      <p:ext uri="{BB962C8B-B14F-4D97-AF65-F5344CB8AC3E}">
-        <p14:creationId xmlns:p14="http://schemas.microsoft.com/office/powerpoint/2010/main" val="3307097350"/>
-      </p:ext>
-    </p:extLst>
-  </p:cSld>
-  <p:clrMapOvr>
-    <a:masterClrMapping/>
-  </p:clrMapOvr>
-</p:sld>
-</file>
-
-<file path=ppt/slides/slide15.xml><?xml version="1.0" encoding="utf-8"?>
-<p:sld xmlns:a="http://schemas.openxmlformats.org/drawingml/2006/main" xmlns:r="http://schemas.openxmlformats.org/officeDocument/2006/relationships" xmlns:p="http://schemas.openxmlformats.org/presentationml/2006/main">
-  <p:cSld>
-    <p:spTree>
-      <p:nvGrpSpPr>
-        <p:cNvPr id="1" name=""/>
-        <p:cNvGrpSpPr/>
-        <p:nvPr/>
-      </p:nvGrpSpPr>
-      <p:grpSpPr>
-        <a:xfrm>
-          <a:off x="0" y="0"/>
-          <a:ext cx="0" cy="0"/>
-          <a:chOff x="0" y="0"/>
-          <a:chExt cx="0" cy="0"/>
-        </a:xfrm>
-      </p:grpSpPr>
-      <p:sp>
-        <p:nvSpPr>
-          <p:cNvPr id="2" name="Titel 1">
-            <a:extLst>
-              <a:ext uri="{FF2B5EF4-FFF2-40B4-BE49-F238E27FC236}">
-                <a16:creationId xmlns:a16="http://schemas.microsoft.com/office/drawing/2014/main" id="{32230A68-4EF3-682A-ECAC-105D6AE7D06F}"/>
-              </a:ext>
-            </a:extLst>
-          </p:cNvPr>
-          <p:cNvSpPr>
-            <a:spLocks noGrp="1"/>
-          </p:cNvSpPr>
-          <p:nvPr>
-            <p:ph type="title"/>
-          </p:nvPr>
-        </p:nvSpPr>
-        <p:spPr/>
-        <p:txBody>
-          <a:bodyPr/>
-          <a:lstStyle/>
-          <a:p>
-            <a:r>
-              <a:rPr lang="de-DE" dirty="0"/>
-              <a:t>Feature Engineering </a:t>
-            </a:r>
-            <a:r>
-              <a:rPr lang="de-DE" dirty="0" err="1"/>
-              <a:t>for</a:t>
-            </a:r>
-            <a:r>
-              <a:rPr lang="de-DE" dirty="0"/>
-              <a:t> Time Series</a:t>
-            </a:r>
-          </a:p>
-        </p:txBody>
-      </p:sp>
-      <p:sp>
-        <p:nvSpPr>
-          <p:cNvPr id="3" name="Inhaltsplatzhalter 2">
-            <a:extLst>
-              <a:ext uri="{FF2B5EF4-FFF2-40B4-BE49-F238E27FC236}">
-                <a16:creationId xmlns:a16="http://schemas.microsoft.com/office/drawing/2014/main" id="{15A3101E-A950-A2CB-4D19-4066D86152A7}"/>
-              </a:ext>
-            </a:extLst>
-          </p:cNvPr>
-          <p:cNvSpPr>
-            <a:spLocks noGrp="1"/>
-          </p:cNvSpPr>
-          <p:nvPr>
-            <p:ph idx="1"/>
-          </p:nvPr>
-        </p:nvSpPr>
-        <p:spPr/>
-        <p:txBody>
-          <a:bodyPr/>
-          <a:lstStyle/>
-          <a:p>
-            <a:endParaRPr lang="de-DE"/>
-          </a:p>
-        </p:txBody>
-      </p:sp>
-    </p:spTree>
-    <p:extLst>
-      <p:ext uri="{BB962C8B-B14F-4D97-AF65-F5344CB8AC3E}">
-        <p14:creationId xmlns:p14="http://schemas.microsoft.com/office/powerpoint/2010/main" val="3297117316"/>
-      </p:ext>
-    </p:extLst>
-  </p:cSld>
-  <p:clrMapOvr>
-    <a:masterClrMapping/>
-  </p:clrMapOvr>
-</p:sld>
-</file>
-
-<file path=ppt/slides/slide16.xml><?xml version="1.0" encoding="utf-8"?>
-<p:sld xmlns:a="http://schemas.openxmlformats.org/drawingml/2006/main" xmlns:r="http://schemas.openxmlformats.org/officeDocument/2006/relationships" xmlns:p="http://schemas.openxmlformats.org/presentationml/2006/main">
-  <p:cSld>
-    <p:spTree>
-      <p:nvGrpSpPr>
-        <p:cNvPr id="1" name=""/>
-        <p:cNvGrpSpPr/>
-        <p:nvPr/>
-      </p:nvGrpSpPr>
-      <p:grpSpPr>
-        <a:xfrm>
-          <a:off x="0" y="0"/>
-          <a:ext cx="0" cy="0"/>
-          <a:chOff x="0" y="0"/>
-          <a:chExt cx="0" cy="0"/>
-        </a:xfrm>
-      </p:grpSpPr>
-      <p:sp>
-        <p:nvSpPr>
-          <p:cNvPr id="2" name="Title 1">
-            <a:extLst>
-              <a:ext uri="{FF2B5EF4-FFF2-40B4-BE49-F238E27FC236}">
-                <a16:creationId xmlns:a16="http://schemas.microsoft.com/office/drawing/2014/main" id="{03EC4D4A-A82A-7BC5-7541-02F3EAB5D215}"/>
-              </a:ext>
-            </a:extLst>
-          </p:cNvPr>
-          <p:cNvSpPr>
-            <a:spLocks noGrp="1"/>
-          </p:cNvSpPr>
-          <p:nvPr>
-            <p:ph type="title"/>
-          </p:nvPr>
-        </p:nvSpPr>
-        <p:spPr/>
-        <p:txBody>
-          <a:bodyPr/>
-          <a:lstStyle/>
-          <a:p>
-            <a:r>
-              <a:rPr lang="en-GB" dirty="0"/>
-              <a:t>Types of Time Series Forecasting Information</a:t>
-            </a:r>
-          </a:p>
-        </p:txBody>
-      </p:sp>
-      <p:sp>
-        <p:nvSpPr>
-          <p:cNvPr id="3" name="Content Placeholder 2">
-            <a:extLst>
-              <a:ext uri="{FF2B5EF4-FFF2-40B4-BE49-F238E27FC236}">
-                <a16:creationId xmlns:a16="http://schemas.microsoft.com/office/drawing/2014/main" id="{7A183E07-4A7F-4057-51D6-EA7F8824CF08}"/>
-              </a:ext>
-            </a:extLst>
-          </p:cNvPr>
-          <p:cNvSpPr>
-            <a:spLocks noGrp="1"/>
-          </p:cNvSpPr>
-          <p:nvPr>
-            <p:ph idx="1"/>
-          </p:nvPr>
-        </p:nvSpPr>
-        <p:spPr/>
-        <p:txBody>
-          <a:bodyPr>
-            <a:normAutofit/>
-          </a:bodyPr>
-          <a:lstStyle/>
-          <a:p>
-            <a:pPr marL="0" indent="0">
-              <a:buNone/>
-            </a:pPr>
-            <a:r>
-              <a:rPr lang="en-GB" dirty="0"/>
-              <a:t>auto-correlation</a:t>
-            </a:r>
-          </a:p>
-          <a:p>
-            <a:r>
-              <a:rPr lang="en-GB" dirty="0"/>
-              <a:t>using past values of considered time series as function of lag</a:t>
-            </a:r>
-          </a:p>
-          <a:p>
-            <a:r>
-              <a:rPr lang="en-GB" dirty="0">
-                <a:sym typeface="Wingdings" panose="05000000000000000000" pitchFamily="2" charset="2"/>
-              </a:rPr>
-              <a:t>identifying periodicity (seasonality) and trend</a:t>
-            </a:r>
-            <a:endParaRPr lang="en-GB" dirty="0"/>
-          </a:p>
-          <a:p>
-            <a:pPr marL="0" indent="0">
-              <a:buNone/>
-            </a:pPr>
-            <a:endParaRPr lang="en-GB" dirty="0"/>
-          </a:p>
-          <a:p>
-            <a:pPr marL="0" indent="0">
-              <a:buNone/>
-            </a:pPr>
-            <a:r>
-              <a:rPr lang="en-GB" dirty="0"/>
-              <a:t>exogenous variables</a:t>
-            </a:r>
-          </a:p>
-          <a:p>
-            <a:r>
-              <a:rPr lang="en-GB" dirty="0"/>
-              <a:t>using correlations of other variables to considered time series</a:t>
-            </a:r>
-          </a:p>
-          <a:p>
-            <a:r>
-              <a:rPr lang="en-GB" dirty="0"/>
-              <a:t>examples in demand forecasting: price, weather</a:t>
-            </a:r>
-          </a:p>
-          <a:p>
-            <a:r>
-              <a:rPr lang="en-GB" dirty="0"/>
-              <a:t>such effects lasting for some time create spurious auto-correlation</a:t>
-            </a:r>
-            <a:endParaRPr lang="en-GB" dirty="0">
-              <a:sym typeface="Wingdings" panose="05000000000000000000" pitchFamily="2" charset="2"/>
-            </a:endParaRPr>
-          </a:p>
-        </p:txBody>
-      </p:sp>
-      <p:sp>
-        <p:nvSpPr>
-          <p:cNvPr id="4" name="Slide Number Placeholder 3">
-            <a:extLst>
-              <a:ext uri="{FF2B5EF4-FFF2-40B4-BE49-F238E27FC236}">
-                <a16:creationId xmlns:a16="http://schemas.microsoft.com/office/drawing/2014/main" id="{E10D5294-F36F-3ADF-1C52-72056CEFFFF5}"/>
-              </a:ext>
-            </a:extLst>
-          </p:cNvPr>
-          <p:cNvSpPr>
-            <a:spLocks noGrp="1"/>
-          </p:cNvSpPr>
-          <p:nvPr>
-            <p:ph type="sldNum" sz="quarter" idx="12"/>
-          </p:nvPr>
-        </p:nvSpPr>
-        <p:spPr/>
-        <p:txBody>
-          <a:bodyPr/>
-          <a:lstStyle/>
-          <a:p>
-            <a:fld id="{ADDEFC8A-584C-5E41-A633-418C2FB73F75}" type="slidenum">
-              <a:rPr lang="en-DE" smtClean="0"/>
-              <a:t>16</a:t>
-            </a:fld>
-            <a:endParaRPr lang="en-DE"/>
-          </a:p>
-        </p:txBody>
-      </p:sp>
-    </p:spTree>
-    <p:extLst>
-      <p:ext uri="{BB962C8B-B14F-4D97-AF65-F5344CB8AC3E}">
-        <p14:creationId xmlns:p14="http://schemas.microsoft.com/office/powerpoint/2010/main" val="559053033"/>
-      </p:ext>
-    </p:extLst>
-  </p:cSld>
-  <p:clrMapOvr>
-    <a:masterClrMapping/>
-  </p:clrMapOvr>
-</p:sld>
-</file>
-
-<file path=ppt/slides/slide17.xml><?xml version="1.0" encoding="utf-8"?>
-<p:sld xmlns:a="http://schemas.openxmlformats.org/drawingml/2006/main" xmlns:r="http://schemas.openxmlformats.org/officeDocument/2006/relationships" xmlns:p="http://schemas.openxmlformats.org/presentationml/2006/main">
-  <p:cSld>
-    <p:spTree>
-      <p:nvGrpSpPr>
-        <p:cNvPr id="1" name=""/>
-        <p:cNvGrpSpPr/>
-        <p:nvPr/>
-      </p:nvGrpSpPr>
-      <p:grpSpPr>
-        <a:xfrm>
-          <a:off x="0" y="0"/>
-          <a:ext cx="0" cy="0"/>
-          <a:chOff x="0" y="0"/>
-          <a:chExt cx="0" cy="0"/>
-        </a:xfrm>
-      </p:grpSpPr>
-      <p:sp>
-        <p:nvSpPr>
-          <p:cNvPr id="2" name="Titel 1">
-            <a:extLst>
-              <a:ext uri="{FF2B5EF4-FFF2-40B4-BE49-F238E27FC236}">
-                <a16:creationId xmlns:a16="http://schemas.microsoft.com/office/drawing/2014/main" id="{9ABEADDB-7C0C-1512-40DC-C7F17009F36D}"/>
-              </a:ext>
-            </a:extLst>
-          </p:cNvPr>
-          <p:cNvSpPr>
-            <a:spLocks noGrp="1"/>
-          </p:cNvSpPr>
-          <p:nvPr>
-            <p:ph type="title"/>
-          </p:nvPr>
-        </p:nvSpPr>
-        <p:spPr/>
-        <p:txBody>
-          <a:bodyPr/>
-          <a:lstStyle/>
-          <a:p>
-            <a:r>
-              <a:rPr lang="de-DE" dirty="0"/>
-              <a:t>EWMA and </a:t>
-            </a:r>
-            <a:r>
-              <a:rPr lang="de-DE" dirty="0" err="1"/>
-              <a:t>Lagged</a:t>
-            </a:r>
-            <a:r>
-              <a:rPr lang="de-DE" dirty="0"/>
-              <a:t> Features</a:t>
-            </a:r>
-          </a:p>
-        </p:txBody>
-      </p:sp>
-      <p:sp>
-        <p:nvSpPr>
-          <p:cNvPr id="3" name="Inhaltsplatzhalter 2">
-            <a:extLst>
-              <a:ext uri="{FF2B5EF4-FFF2-40B4-BE49-F238E27FC236}">
-                <a16:creationId xmlns:a16="http://schemas.microsoft.com/office/drawing/2014/main" id="{C154145D-1314-01F9-AB87-675882EC8E69}"/>
-              </a:ext>
-            </a:extLst>
-          </p:cNvPr>
-          <p:cNvSpPr>
-            <a:spLocks noGrp="1"/>
-          </p:cNvSpPr>
-          <p:nvPr>
-            <p:ph idx="1"/>
-          </p:nvPr>
-        </p:nvSpPr>
-        <p:spPr/>
-        <p:txBody>
-          <a:bodyPr/>
-          <a:lstStyle/>
-          <a:p>
-            <a:endParaRPr lang="de-DE"/>
-          </a:p>
-        </p:txBody>
-      </p:sp>
-    </p:spTree>
-    <p:extLst>
-      <p:ext uri="{BB962C8B-B14F-4D97-AF65-F5344CB8AC3E}">
-        <p14:creationId xmlns:p14="http://schemas.microsoft.com/office/powerpoint/2010/main" val="2362297511"/>
-      </p:ext>
-    </p:extLst>
-  </p:cSld>
-  <p:clrMapOvr>
-    <a:masterClrMapping/>
-  </p:clrMapOvr>
-</p:sld>
-</file>
-
-<file path=ppt/slides/slide18.xml><?xml version="1.0" encoding="utf-8"?>
 <p:sld xmlns:a="http://schemas.openxmlformats.org/drawingml/2006/main" xmlns:r="http://schemas.openxmlformats.org/officeDocument/2006/relationships" xmlns:p="http://schemas.openxmlformats.org/presentationml/2006/main">
   <p:cSld>
     <p:spTree>
@@ -15229,7 +14415,7 @@
           <a:p>
             <a:fld id="{ADDEFC8A-584C-5E41-A633-418C2FB73F75}" type="slidenum">
               <a:rPr lang="en-DE" smtClean="0"/>
-              <a:t>18</a:t>
+              <a:t>10</a:t>
             </a:fld>
             <a:endParaRPr lang="en-DE"/>
           </a:p>
@@ -15239,6 +14425,1586 @@
     <p:extLst>
       <p:ext uri="{BB962C8B-B14F-4D97-AF65-F5344CB8AC3E}">
         <p14:creationId xmlns:p14="http://schemas.microsoft.com/office/powerpoint/2010/main" val="2554576254"/>
+      </p:ext>
+    </p:extLst>
+  </p:cSld>
+  <p:clrMapOvr>
+    <a:masterClrMapping/>
+  </p:clrMapOvr>
+</p:sld>
+</file>
+
+<file path=ppt/slides/slide11.xml><?xml version="1.0" encoding="utf-8"?>
+<p:sld xmlns:a="http://schemas.openxmlformats.org/drawingml/2006/main" xmlns:r="http://schemas.openxmlformats.org/officeDocument/2006/relationships" xmlns:p="http://schemas.openxmlformats.org/presentationml/2006/main">
+  <p:cSld>
+    <p:spTree>
+      <p:nvGrpSpPr>
+        <p:cNvPr id="1" name=""/>
+        <p:cNvGrpSpPr/>
+        <p:nvPr/>
+      </p:nvGrpSpPr>
+      <p:grpSpPr>
+        <a:xfrm>
+          <a:off x="0" y="0"/>
+          <a:ext cx="0" cy="0"/>
+          <a:chOff x="0" y="0"/>
+          <a:chExt cx="0" cy="0"/>
+        </a:xfrm>
+      </p:grpSpPr>
+      <p:sp>
+        <p:nvSpPr>
+          <p:cNvPr id="2" name="Titel 1">
+            <a:extLst>
+              <a:ext uri="{FF2B5EF4-FFF2-40B4-BE49-F238E27FC236}">
+                <a16:creationId xmlns:a16="http://schemas.microsoft.com/office/drawing/2014/main" id="{9931EE1B-12BB-3B84-F499-A85EFA888DD1}"/>
+              </a:ext>
+            </a:extLst>
+          </p:cNvPr>
+          <p:cNvSpPr>
+            <a:spLocks noGrp="1"/>
+          </p:cNvSpPr>
+          <p:nvPr>
+            <p:ph type="title"/>
+          </p:nvPr>
+        </p:nvSpPr>
+        <p:spPr/>
+        <p:txBody>
+          <a:bodyPr/>
+          <a:lstStyle/>
+          <a:p>
+            <a:r>
+              <a:rPr lang="de-DE" dirty="0"/>
+              <a:t>Prophet Model </a:t>
+            </a:r>
+            <a:r>
+              <a:rPr lang="de-DE" dirty="0" err="1"/>
+              <a:t>Overview</a:t>
+            </a:r>
+            <a:endParaRPr lang="de-DE" dirty="0"/>
+          </a:p>
+        </p:txBody>
+      </p:sp>
+      <p:sp>
+        <p:nvSpPr>
+          <p:cNvPr id="3" name="Inhaltsplatzhalter 2">
+            <a:extLst>
+              <a:ext uri="{FF2B5EF4-FFF2-40B4-BE49-F238E27FC236}">
+                <a16:creationId xmlns:a16="http://schemas.microsoft.com/office/drawing/2014/main" id="{323D3A79-E7BF-DAFB-FD40-E987E9CAB9FC}"/>
+              </a:ext>
+            </a:extLst>
+          </p:cNvPr>
+          <p:cNvSpPr>
+            <a:spLocks noGrp="1"/>
+          </p:cNvSpPr>
+          <p:nvPr>
+            <p:ph idx="1"/>
+          </p:nvPr>
+        </p:nvSpPr>
+        <p:spPr/>
+        <p:txBody>
+          <a:bodyPr/>
+          <a:lstStyle/>
+          <a:p>
+            <a:endParaRPr lang="de-DE"/>
+          </a:p>
+        </p:txBody>
+      </p:sp>
+    </p:spTree>
+    <p:extLst>
+      <p:ext uri="{BB962C8B-B14F-4D97-AF65-F5344CB8AC3E}">
+        <p14:creationId xmlns:p14="http://schemas.microsoft.com/office/powerpoint/2010/main" val="2822867359"/>
+      </p:ext>
+    </p:extLst>
+  </p:cSld>
+  <p:clrMapOvr>
+    <a:masterClrMapping/>
+  </p:clrMapOvr>
+</p:sld>
+</file>
+
+<file path=ppt/slides/slide12.xml><?xml version="1.0" encoding="utf-8"?>
+<p:sld xmlns:a="http://schemas.openxmlformats.org/drawingml/2006/main" xmlns:r="http://schemas.openxmlformats.org/officeDocument/2006/relationships" xmlns:p="http://schemas.openxmlformats.org/presentationml/2006/main">
+  <p:cSld>
+    <p:spTree>
+      <p:nvGrpSpPr>
+        <p:cNvPr id="1" name=""/>
+        <p:cNvGrpSpPr/>
+        <p:nvPr/>
+      </p:nvGrpSpPr>
+      <p:grpSpPr>
+        <a:xfrm>
+          <a:off x="0" y="0"/>
+          <a:ext cx="0" cy="0"/>
+          <a:chOff x="0" y="0"/>
+          <a:chExt cx="0" cy="0"/>
+        </a:xfrm>
+      </p:grpSpPr>
+      <p:sp>
+        <p:nvSpPr>
+          <p:cNvPr id="2" name="Titel 1">
+            <a:extLst>
+              <a:ext uri="{FF2B5EF4-FFF2-40B4-BE49-F238E27FC236}">
+                <a16:creationId xmlns:a16="http://schemas.microsoft.com/office/drawing/2014/main" id="{E132130E-C5C8-5532-3E4E-B614736ACF30}"/>
+              </a:ext>
+            </a:extLst>
+          </p:cNvPr>
+          <p:cNvSpPr>
+            <a:spLocks noGrp="1"/>
+          </p:cNvSpPr>
+          <p:nvPr>
+            <p:ph type="title"/>
+          </p:nvPr>
+        </p:nvSpPr>
+        <p:spPr/>
+        <p:txBody>
+          <a:bodyPr/>
+          <a:lstStyle/>
+          <a:p>
+            <a:r>
+              <a:rPr lang="de-DE" dirty="0" err="1"/>
+              <a:t>Forecasting</a:t>
+            </a:r>
+            <a:r>
+              <a:rPr lang="de-DE" dirty="0"/>
+              <a:t> </a:t>
+            </a:r>
+            <a:r>
+              <a:rPr lang="de-DE" dirty="0" err="1"/>
+              <a:t>with</a:t>
+            </a:r>
+            <a:r>
+              <a:rPr lang="de-DE" dirty="0"/>
+              <a:t> ML</a:t>
+            </a:r>
+          </a:p>
+        </p:txBody>
+      </p:sp>
+      <p:sp>
+        <p:nvSpPr>
+          <p:cNvPr id="3" name="Inhaltsplatzhalter 2">
+            <a:extLst>
+              <a:ext uri="{FF2B5EF4-FFF2-40B4-BE49-F238E27FC236}">
+                <a16:creationId xmlns:a16="http://schemas.microsoft.com/office/drawing/2014/main" id="{0C8538CB-D526-0B1D-0DA1-4160580BB847}"/>
+              </a:ext>
+            </a:extLst>
+          </p:cNvPr>
+          <p:cNvSpPr>
+            <a:spLocks noGrp="1"/>
+          </p:cNvSpPr>
+          <p:nvPr>
+            <p:ph idx="1"/>
+          </p:nvPr>
+        </p:nvSpPr>
+        <p:spPr/>
+        <p:txBody>
+          <a:bodyPr/>
+          <a:lstStyle/>
+          <a:p>
+            <a:r>
+              <a:rPr lang="en-GB" dirty="0"/>
+              <a:t>stacking</a:t>
+            </a:r>
+            <a:endParaRPr lang="de-DE" dirty="0"/>
+          </a:p>
+        </p:txBody>
+      </p:sp>
+    </p:spTree>
+    <p:extLst>
+      <p:ext uri="{BB962C8B-B14F-4D97-AF65-F5344CB8AC3E}">
+        <p14:creationId xmlns:p14="http://schemas.microsoft.com/office/powerpoint/2010/main" val="689357893"/>
+      </p:ext>
+    </p:extLst>
+  </p:cSld>
+  <p:clrMapOvr>
+    <a:masterClrMapping/>
+  </p:clrMapOvr>
+</p:sld>
+</file>
+
+<file path=ppt/slides/slide13.xml><?xml version="1.0" encoding="utf-8"?>
+<p:sld xmlns:a="http://schemas.openxmlformats.org/drawingml/2006/main" xmlns:r="http://schemas.openxmlformats.org/officeDocument/2006/relationships" xmlns:p="http://schemas.openxmlformats.org/presentationml/2006/main">
+  <p:cSld>
+    <p:spTree>
+      <p:nvGrpSpPr>
+        <p:cNvPr id="1" name=""/>
+        <p:cNvGrpSpPr/>
+        <p:nvPr/>
+      </p:nvGrpSpPr>
+      <p:grpSpPr>
+        <a:xfrm>
+          <a:off x="0" y="0"/>
+          <a:ext cx="0" cy="0"/>
+          <a:chOff x="0" y="0"/>
+          <a:chExt cx="0" cy="0"/>
+        </a:xfrm>
+      </p:grpSpPr>
+      <p:sp>
+        <p:nvSpPr>
+          <p:cNvPr id="2" name="Titel 1">
+            <a:extLst>
+              <a:ext uri="{FF2B5EF4-FFF2-40B4-BE49-F238E27FC236}">
+                <a16:creationId xmlns:a16="http://schemas.microsoft.com/office/drawing/2014/main" id="{32230A68-4EF3-682A-ECAC-105D6AE7D06F}"/>
+              </a:ext>
+            </a:extLst>
+          </p:cNvPr>
+          <p:cNvSpPr>
+            <a:spLocks noGrp="1"/>
+          </p:cNvSpPr>
+          <p:nvPr>
+            <p:ph type="title"/>
+          </p:nvPr>
+        </p:nvSpPr>
+        <p:spPr/>
+        <p:txBody>
+          <a:bodyPr/>
+          <a:lstStyle/>
+          <a:p>
+            <a:r>
+              <a:rPr lang="de-DE" dirty="0"/>
+              <a:t>Feature Engineering </a:t>
+            </a:r>
+            <a:r>
+              <a:rPr lang="de-DE" dirty="0" err="1"/>
+              <a:t>for</a:t>
+            </a:r>
+            <a:r>
+              <a:rPr lang="de-DE" dirty="0"/>
+              <a:t> Time Series</a:t>
+            </a:r>
+          </a:p>
+        </p:txBody>
+      </p:sp>
+      <p:sp>
+        <p:nvSpPr>
+          <p:cNvPr id="4" name="Inhaltsplatzhalter 3">
+            <a:extLst>
+              <a:ext uri="{FF2B5EF4-FFF2-40B4-BE49-F238E27FC236}">
+                <a16:creationId xmlns:a16="http://schemas.microsoft.com/office/drawing/2014/main" id="{D3A5D92E-3370-2786-4A13-85C911BE9785}"/>
+              </a:ext>
+            </a:extLst>
+          </p:cNvPr>
+          <p:cNvSpPr>
+            <a:spLocks noGrp="1"/>
+          </p:cNvSpPr>
+          <p:nvPr>
+            <p:ph idx="1"/>
+          </p:nvPr>
+        </p:nvSpPr>
+        <p:spPr/>
+        <p:txBody>
+          <a:bodyPr/>
+          <a:lstStyle/>
+          <a:p>
+            <a:endParaRPr lang="de-DE"/>
+          </a:p>
+        </p:txBody>
+      </p:sp>
+    </p:spTree>
+    <p:extLst>
+      <p:ext uri="{BB962C8B-B14F-4D97-AF65-F5344CB8AC3E}">
+        <p14:creationId xmlns:p14="http://schemas.microsoft.com/office/powerpoint/2010/main" val="3297117316"/>
+      </p:ext>
+    </p:extLst>
+  </p:cSld>
+  <p:clrMapOvr>
+    <a:masterClrMapping/>
+  </p:clrMapOvr>
+</p:sld>
+</file>
+
+<file path=ppt/slides/slide14.xml><?xml version="1.0" encoding="utf-8"?>
+<p:sld xmlns:a="http://schemas.openxmlformats.org/drawingml/2006/main" xmlns:r="http://schemas.openxmlformats.org/officeDocument/2006/relationships" xmlns:p="http://schemas.openxmlformats.org/presentationml/2006/main">
+  <p:cSld>
+    <p:spTree>
+      <p:nvGrpSpPr>
+        <p:cNvPr id="1" name=""/>
+        <p:cNvGrpSpPr/>
+        <p:nvPr/>
+      </p:nvGrpSpPr>
+      <p:grpSpPr>
+        <a:xfrm>
+          <a:off x="0" y="0"/>
+          <a:ext cx="0" cy="0"/>
+          <a:chOff x="0" y="0"/>
+          <a:chExt cx="0" cy="0"/>
+        </a:xfrm>
+      </p:grpSpPr>
+      <p:sp>
+        <p:nvSpPr>
+          <p:cNvPr id="2" name="Titel 1">
+            <a:extLst>
+              <a:ext uri="{FF2B5EF4-FFF2-40B4-BE49-F238E27FC236}">
+                <a16:creationId xmlns:a16="http://schemas.microsoft.com/office/drawing/2014/main" id="{46E62445-5918-0081-910B-A92B970184D7}"/>
+              </a:ext>
+            </a:extLst>
+          </p:cNvPr>
+          <p:cNvSpPr>
+            <a:spLocks noGrp="1"/>
+          </p:cNvSpPr>
+          <p:nvPr>
+            <p:ph type="title"/>
+          </p:nvPr>
+        </p:nvSpPr>
+        <p:spPr/>
+        <p:txBody>
+          <a:bodyPr/>
+          <a:lstStyle/>
+          <a:p>
+            <a:r>
+              <a:rPr lang="de-DE" dirty="0"/>
+              <a:t>Lag Features</a:t>
+            </a:r>
+          </a:p>
+        </p:txBody>
+      </p:sp>
+      <mc:AlternateContent xmlns:mc="http://schemas.openxmlformats.org/markup-compatibility/2006">
+        <mc:Choice xmlns:a14="http://schemas.microsoft.com/office/drawing/2010/main" Requires="a14">
+          <p:sp>
+            <p:nvSpPr>
+              <p:cNvPr id="3" name="Inhaltsplatzhalter 2">
+                <a:extLst>
+                  <a:ext uri="{FF2B5EF4-FFF2-40B4-BE49-F238E27FC236}">
+                    <a16:creationId xmlns:a16="http://schemas.microsoft.com/office/drawing/2014/main" id="{A71821D6-0EB9-0DD4-627A-C362F34D096A}"/>
+                  </a:ext>
+                </a:extLst>
+              </p:cNvPr>
+              <p:cNvSpPr>
+                <a:spLocks noGrp="1"/>
+              </p:cNvSpPr>
+              <p:nvPr>
+                <p:ph idx="1"/>
+              </p:nvPr>
+            </p:nvSpPr>
+            <p:spPr/>
+            <p:txBody>
+              <a:bodyPr/>
+              <a:lstStyle/>
+              <a:p>
+                <a:pPr marL="0" indent="0">
+                  <a:buNone/>
+                </a:pPr>
+                <a:r>
+                  <a:rPr lang="de-DE" dirty="0"/>
+                  <a:t>create </a:t>
+                </a:r>
+                <a:r>
+                  <a:rPr lang="de-DE" dirty="0" err="1"/>
+                  <a:t>features</a:t>
+                </a:r>
+                <a:r>
+                  <a:rPr lang="de-DE" dirty="0"/>
+                  <a:t> </a:t>
+                </a:r>
+                <a:r>
+                  <a:rPr lang="de-DE" dirty="0" err="1"/>
+                  <a:t>from</a:t>
+                </a:r>
+                <a:r>
+                  <a:rPr lang="de-DE" dirty="0"/>
+                  <a:t> </a:t>
+                </a:r>
+                <a:r>
+                  <a:rPr lang="de-DE" dirty="0" err="1"/>
+                  <a:t>past</a:t>
+                </a:r>
+                <a:r>
+                  <a:rPr lang="de-DE" dirty="0"/>
+                  <a:t> </a:t>
+                </a:r>
+                <a:r>
+                  <a:rPr lang="de-DE" dirty="0" err="1"/>
+                  <a:t>values</a:t>
+                </a:r>
+                <a:r>
+                  <a:rPr lang="de-DE" dirty="0"/>
+                  <a:t> </a:t>
+                </a:r>
+                <a14:m>
+                  <m:oMath xmlns:m="http://schemas.openxmlformats.org/officeDocument/2006/math">
+                    <m:sSub>
+                      <m:sSubPr>
+                        <m:ctrlPr>
+                          <a:rPr lang="de-DE" i="1">
+                            <a:latin typeface="Cambria Math" panose="02040503050406030204" pitchFamily="18" charset="0"/>
+                          </a:rPr>
+                        </m:ctrlPr>
+                      </m:sSubPr>
+                      <m:e>
+                        <m:r>
+                          <a:rPr lang="de-DE" i="1">
+                            <a:latin typeface="Cambria Math" panose="02040503050406030204" pitchFamily="18" charset="0"/>
+                          </a:rPr>
+                          <m:t>𝑥</m:t>
+                        </m:r>
+                      </m:e>
+                      <m:sub>
+                        <m:r>
+                          <a:rPr lang="de-DE" i="1">
+                            <a:latin typeface="Cambria Math" panose="02040503050406030204" pitchFamily="18" charset="0"/>
+                          </a:rPr>
+                          <m:t>𝑡</m:t>
+                        </m:r>
+                        <m:r>
+                          <a:rPr lang="de-DE" i="1">
+                            <a:latin typeface="Cambria Math" panose="02040503050406030204" pitchFamily="18" charset="0"/>
+                          </a:rPr>
+                          <m:t>−1</m:t>
+                        </m:r>
+                      </m:sub>
+                    </m:sSub>
+                  </m:oMath>
+                </a14:m>
+                <a:r>
+                  <a:rPr lang="de-DE" dirty="0"/>
+                  <a:t>, </a:t>
+                </a:r>
+                <a14:m>
+                  <m:oMath xmlns:m="http://schemas.openxmlformats.org/officeDocument/2006/math">
+                    <m:sSub>
+                      <m:sSubPr>
+                        <m:ctrlPr>
+                          <a:rPr lang="de-DE" i="1">
+                            <a:latin typeface="Cambria Math" panose="02040503050406030204" pitchFamily="18" charset="0"/>
+                          </a:rPr>
+                        </m:ctrlPr>
+                      </m:sSubPr>
+                      <m:e>
+                        <m:r>
+                          <a:rPr lang="de-DE" i="1">
+                            <a:latin typeface="Cambria Math" panose="02040503050406030204" pitchFamily="18" charset="0"/>
+                          </a:rPr>
+                          <m:t>𝑥</m:t>
+                        </m:r>
+                      </m:e>
+                      <m:sub>
+                        <m:r>
+                          <a:rPr lang="de-DE" i="1">
+                            <a:latin typeface="Cambria Math" panose="02040503050406030204" pitchFamily="18" charset="0"/>
+                          </a:rPr>
+                          <m:t>𝑡</m:t>
+                        </m:r>
+                        <m:r>
+                          <a:rPr lang="de-DE" i="1">
+                            <a:latin typeface="Cambria Math" panose="02040503050406030204" pitchFamily="18" charset="0"/>
+                          </a:rPr>
+                          <m:t>−2</m:t>
+                        </m:r>
+                      </m:sub>
+                    </m:sSub>
+                  </m:oMath>
+                </a14:m>
+                <a:r>
+                  <a:rPr lang="de-DE" dirty="0"/>
+                  <a:t>, </a:t>
+                </a:r>
+                <a14:m>
+                  <m:oMath xmlns:m="http://schemas.openxmlformats.org/officeDocument/2006/math">
+                    <m:sSub>
+                      <m:sSubPr>
+                        <m:ctrlPr>
+                          <a:rPr lang="de-DE" i="1">
+                            <a:latin typeface="Cambria Math" panose="02040503050406030204" pitchFamily="18" charset="0"/>
+                          </a:rPr>
+                        </m:ctrlPr>
+                      </m:sSubPr>
+                      <m:e>
+                        <m:r>
+                          <a:rPr lang="de-DE" i="1">
+                            <a:latin typeface="Cambria Math" panose="02040503050406030204" pitchFamily="18" charset="0"/>
+                          </a:rPr>
+                          <m:t>𝑥</m:t>
+                        </m:r>
+                      </m:e>
+                      <m:sub>
+                        <m:r>
+                          <a:rPr lang="de-DE" i="1">
+                            <a:latin typeface="Cambria Math" panose="02040503050406030204" pitchFamily="18" charset="0"/>
+                          </a:rPr>
+                          <m:t>𝑡</m:t>
+                        </m:r>
+                        <m:r>
+                          <a:rPr lang="de-DE" i="1">
+                            <a:latin typeface="Cambria Math" panose="02040503050406030204" pitchFamily="18" charset="0"/>
+                          </a:rPr>
+                          <m:t>−3</m:t>
+                        </m:r>
+                      </m:sub>
+                    </m:sSub>
+                  </m:oMath>
+                </a14:m>
+                <a:r>
+                  <a:rPr lang="de-DE" dirty="0"/>
+                  <a:t>, …</a:t>
+                </a:r>
+              </a:p>
+              <a:p>
+                <a:pPr marL="0" indent="0">
+                  <a:buNone/>
+                </a:pPr>
+                <a:r>
+                  <a:rPr lang="de-DE" dirty="0" err="1"/>
+                  <a:t>example</a:t>
+                </a:r>
+                <a:r>
+                  <a:rPr lang="de-DE" dirty="0"/>
+                  <a:t>: </a:t>
+                </a:r>
+                <a:r>
+                  <a:rPr lang="de-DE" dirty="0" err="1"/>
+                  <a:t>predict</a:t>
+                </a:r>
+                <a:r>
+                  <a:rPr lang="de-DE" dirty="0"/>
+                  <a:t> </a:t>
+                </a:r>
+                <a:r>
+                  <a:rPr lang="de-DE" dirty="0" err="1"/>
+                  <a:t>today’s</a:t>
+                </a:r>
+                <a:r>
+                  <a:rPr lang="de-DE" dirty="0"/>
+                  <a:t> </a:t>
+                </a:r>
+                <a:r>
+                  <a:rPr lang="de-DE" dirty="0" err="1"/>
+                  <a:t>sales</a:t>
+                </a:r>
+                <a:r>
+                  <a:rPr lang="de-DE" dirty="0"/>
+                  <a:t> </a:t>
+                </a:r>
+                <a:r>
+                  <a:rPr lang="de-DE" dirty="0" err="1"/>
+                  <a:t>using</a:t>
+                </a:r>
+                <a:r>
+                  <a:rPr lang="de-DE" dirty="0"/>
+                  <a:t> </a:t>
+                </a:r>
+                <a:r>
+                  <a:rPr lang="de-DE" dirty="0" err="1"/>
+                  <a:t>sales</a:t>
+                </a:r>
+                <a:r>
+                  <a:rPr lang="de-DE" dirty="0"/>
+                  <a:t> </a:t>
+                </a:r>
+                <a:r>
+                  <a:rPr lang="de-DE" dirty="0" err="1"/>
+                  <a:t>yesterday</a:t>
+                </a:r>
+                <a:r>
+                  <a:rPr lang="de-DE" dirty="0"/>
+                  <a:t>, </a:t>
+                </a:r>
+                <a:r>
+                  <a:rPr lang="de-DE" dirty="0" err="1"/>
+                  <a:t>sales</a:t>
+                </a:r>
+                <a:r>
+                  <a:rPr lang="de-DE" dirty="0"/>
+                  <a:t> last </a:t>
+                </a:r>
+                <a:r>
+                  <a:rPr lang="de-DE" dirty="0" err="1"/>
+                  <a:t>week</a:t>
+                </a:r>
+                <a:r>
+                  <a:rPr lang="de-DE" dirty="0"/>
+                  <a:t>, …</a:t>
+                </a:r>
+              </a:p>
+              <a:p>
+                <a:pPr marL="0" indent="0">
+                  <a:buNone/>
+                </a:pPr>
+                <a:r>
+                  <a:rPr lang="de-DE" dirty="0">
+                    <a:sym typeface="Wingdings" pitchFamily="2" charset="2"/>
+                  </a:rPr>
+                  <a:t> </a:t>
+                </a:r>
+                <a:r>
+                  <a:rPr lang="de-DE" dirty="0" err="1">
+                    <a:sym typeface="Wingdings" pitchFamily="2" charset="2"/>
+                  </a:rPr>
+                  <a:t>c</a:t>
+                </a:r>
+                <a:r>
+                  <a:rPr lang="de-DE" dirty="0" err="1"/>
+                  <a:t>aptures</a:t>
+                </a:r>
+                <a:r>
+                  <a:rPr lang="de-DE" dirty="0"/>
+                  <a:t> </a:t>
+                </a:r>
+                <a:r>
+                  <a:rPr lang="de-DE" dirty="0" err="1"/>
+                  <a:t>short</a:t>
+                </a:r>
+                <a:r>
+                  <a:rPr lang="de-DE" dirty="0"/>
+                  <a:t>- and </a:t>
+                </a:r>
+                <a:r>
+                  <a:rPr lang="de-DE" dirty="0" err="1"/>
+                  <a:t>long</a:t>
+                </a:r>
+                <a:r>
+                  <a:rPr lang="de-DE" dirty="0"/>
+                  <a:t>-term </a:t>
+                </a:r>
+                <a:r>
+                  <a:rPr lang="de-DE" dirty="0" err="1"/>
+                  <a:t>patterns</a:t>
+                </a:r>
+                <a:endParaRPr lang="de-DE" dirty="0"/>
+              </a:p>
+            </p:txBody>
+          </p:sp>
+        </mc:Choice>
+        <mc:Fallback>
+          <p:sp>
+            <p:nvSpPr>
+              <p:cNvPr id="3" name="Inhaltsplatzhalter 2">
+                <a:extLst>
+                  <a:ext uri="{FF2B5EF4-FFF2-40B4-BE49-F238E27FC236}">
+                    <a16:creationId xmlns:a16="http://schemas.microsoft.com/office/drawing/2014/main" id="{A71821D6-0EB9-0DD4-627A-C362F34D096A}"/>
+                  </a:ext>
+                </a:extLst>
+              </p:cNvPr>
+              <p:cNvSpPr>
+                <a:spLocks noGrp="1" noRot="1" noChangeAspect="1" noMove="1" noResize="1" noEditPoints="1" noAdjustHandles="1" noChangeArrowheads="1" noChangeShapeType="1" noTextEdit="1"/>
+              </p:cNvSpPr>
+              <p:nvPr>
+                <p:ph idx="1"/>
+              </p:nvPr>
+            </p:nvSpPr>
+            <p:spPr>
+              <a:blipFill>
+                <a:blip r:embed="rId2"/>
+                <a:stretch>
+                  <a:fillRect l="-1206" t="-2326"/>
+                </a:stretch>
+              </a:blipFill>
+            </p:spPr>
+            <p:txBody>
+              <a:bodyPr/>
+              <a:lstStyle/>
+              <a:p>
+                <a:r>
+                  <a:rPr lang="de-DE">
+                    <a:noFill/>
+                  </a:rPr>
+                  <a:t> </a:t>
+                </a:r>
+              </a:p>
+            </p:txBody>
+          </p:sp>
+        </mc:Fallback>
+      </mc:AlternateContent>
+    </p:spTree>
+    <p:extLst>
+      <p:ext uri="{BB962C8B-B14F-4D97-AF65-F5344CB8AC3E}">
+        <p14:creationId xmlns:p14="http://schemas.microsoft.com/office/powerpoint/2010/main" val="1509365708"/>
+      </p:ext>
+    </p:extLst>
+  </p:cSld>
+  <p:clrMapOvr>
+    <a:masterClrMapping/>
+  </p:clrMapOvr>
+</p:sld>
+</file>
+
+<file path=ppt/slides/slide15.xml><?xml version="1.0" encoding="utf-8"?>
+<p:sld xmlns:a="http://schemas.openxmlformats.org/drawingml/2006/main" xmlns:r="http://schemas.openxmlformats.org/officeDocument/2006/relationships" xmlns:p="http://schemas.openxmlformats.org/presentationml/2006/main">
+  <p:cSld>
+    <p:spTree>
+      <p:nvGrpSpPr>
+        <p:cNvPr id="1" name=""/>
+        <p:cNvGrpSpPr/>
+        <p:nvPr/>
+      </p:nvGrpSpPr>
+      <p:grpSpPr>
+        <a:xfrm>
+          <a:off x="0" y="0"/>
+          <a:ext cx="0" cy="0"/>
+          <a:chOff x="0" y="0"/>
+          <a:chExt cx="0" cy="0"/>
+        </a:xfrm>
+      </p:grpSpPr>
+      <p:sp>
+        <p:nvSpPr>
+          <p:cNvPr id="2" name="Titel 1">
+            <a:extLst>
+              <a:ext uri="{FF2B5EF4-FFF2-40B4-BE49-F238E27FC236}">
+                <a16:creationId xmlns:a16="http://schemas.microsoft.com/office/drawing/2014/main" id="{8797AE04-002B-DF14-320D-607291CC53CD}"/>
+              </a:ext>
+            </a:extLst>
+          </p:cNvPr>
+          <p:cNvSpPr>
+            <a:spLocks noGrp="1"/>
+          </p:cNvSpPr>
+          <p:nvPr>
+            <p:ph type="title"/>
+          </p:nvPr>
+        </p:nvSpPr>
+        <p:spPr/>
+        <p:txBody>
+          <a:bodyPr/>
+          <a:lstStyle/>
+          <a:p>
+            <a:r>
+              <a:rPr lang="de-DE" dirty="0"/>
+              <a:t>Rolling </a:t>
+            </a:r>
+            <a:r>
+              <a:rPr lang="de-DE" dirty="0" err="1"/>
+              <a:t>Statistics</a:t>
+            </a:r>
+            <a:endParaRPr lang="de-DE" dirty="0"/>
+          </a:p>
+        </p:txBody>
+      </p:sp>
+      <p:sp>
+        <p:nvSpPr>
+          <p:cNvPr id="3" name="Inhaltsplatzhalter 2">
+            <a:extLst>
+              <a:ext uri="{FF2B5EF4-FFF2-40B4-BE49-F238E27FC236}">
+                <a16:creationId xmlns:a16="http://schemas.microsoft.com/office/drawing/2014/main" id="{82B2A53E-A320-8395-3804-E83340D0BE8C}"/>
+              </a:ext>
+            </a:extLst>
+          </p:cNvPr>
+          <p:cNvSpPr>
+            <a:spLocks noGrp="1"/>
+          </p:cNvSpPr>
+          <p:nvPr>
+            <p:ph idx="1"/>
+          </p:nvPr>
+        </p:nvSpPr>
+        <p:spPr/>
+        <p:txBody>
+          <a:bodyPr/>
+          <a:lstStyle/>
+          <a:p>
+            <a:pPr marL="0" indent="0">
+              <a:buNone/>
+            </a:pPr>
+            <a:r>
+              <a:rPr lang="de-DE" dirty="0" err="1"/>
+              <a:t>compute</a:t>
+            </a:r>
+            <a:r>
+              <a:rPr lang="de-DE" dirty="0"/>
+              <a:t> </a:t>
+            </a:r>
+            <a:r>
+              <a:rPr lang="de-DE" dirty="0" err="1"/>
+              <a:t>aggregation</a:t>
+            </a:r>
+            <a:r>
+              <a:rPr lang="de-DE" dirty="0"/>
+              <a:t> </a:t>
+            </a:r>
+            <a:r>
+              <a:rPr lang="de-DE" dirty="0" err="1"/>
+              <a:t>statistics</a:t>
+            </a:r>
+            <a:r>
+              <a:rPr lang="de-DE" dirty="0"/>
+              <a:t> </a:t>
+            </a:r>
+            <a:r>
+              <a:rPr lang="de-DE" dirty="0" err="1"/>
+              <a:t>over</a:t>
+            </a:r>
+            <a:r>
+              <a:rPr lang="de-DE" dirty="0"/>
+              <a:t> a </a:t>
+            </a:r>
+            <a:r>
+              <a:rPr lang="de-DE" dirty="0" err="1"/>
+              <a:t>window</a:t>
+            </a:r>
+            <a:r>
+              <a:rPr lang="de-DE" dirty="0"/>
+              <a:t> (e.g., </a:t>
+            </a:r>
+            <a:r>
+              <a:rPr lang="de-DE" dirty="0" err="1"/>
+              <a:t>rolling</a:t>
+            </a:r>
+            <a:r>
+              <a:rPr lang="de-DE" dirty="0"/>
+              <a:t> </a:t>
+            </a:r>
+            <a:r>
+              <a:rPr lang="de-DE" dirty="0" err="1"/>
+              <a:t>mean</a:t>
+            </a:r>
+            <a:r>
+              <a:rPr lang="de-DE" dirty="0"/>
+              <a:t>, </a:t>
+            </a:r>
+            <a:r>
+              <a:rPr lang="de-DE" dirty="0" err="1"/>
+              <a:t>rolling</a:t>
+            </a:r>
+            <a:r>
+              <a:rPr lang="de-DE" dirty="0"/>
+              <a:t> </a:t>
+            </a:r>
+            <a:r>
+              <a:rPr lang="de-DE" dirty="0" err="1"/>
+              <a:t>sum</a:t>
+            </a:r>
+            <a:r>
+              <a:rPr lang="de-DE" dirty="0"/>
+              <a:t>)</a:t>
+            </a:r>
+          </a:p>
+          <a:p>
+            <a:pPr marL="0" indent="0">
+              <a:buNone/>
+            </a:pPr>
+            <a:r>
+              <a:rPr lang="de-DE" dirty="0" err="1"/>
+              <a:t>example</a:t>
+            </a:r>
+            <a:r>
+              <a:rPr lang="de-DE" dirty="0"/>
+              <a:t>: </a:t>
+            </a:r>
+            <a:r>
+              <a:rPr lang="de-DE" dirty="0" err="1"/>
+              <a:t>average</a:t>
+            </a:r>
+            <a:r>
+              <a:rPr lang="de-DE" dirty="0"/>
+              <a:t> </a:t>
+            </a:r>
+            <a:r>
+              <a:rPr lang="de-DE" dirty="0" err="1"/>
+              <a:t>sales</a:t>
+            </a:r>
+            <a:r>
+              <a:rPr lang="de-DE" dirty="0"/>
+              <a:t> </a:t>
+            </a:r>
+            <a:r>
+              <a:rPr lang="de-DE" dirty="0" err="1"/>
+              <a:t>over</a:t>
+            </a:r>
+            <a:r>
+              <a:rPr lang="de-DE" dirty="0"/>
+              <a:t> last 7 </a:t>
+            </a:r>
+            <a:r>
+              <a:rPr lang="de-DE" dirty="0" err="1"/>
+              <a:t>days</a:t>
+            </a:r>
+            <a:endParaRPr lang="de-DE" dirty="0"/>
+          </a:p>
+        </p:txBody>
+      </p:sp>
+    </p:spTree>
+    <p:extLst>
+      <p:ext uri="{BB962C8B-B14F-4D97-AF65-F5344CB8AC3E}">
+        <p14:creationId xmlns:p14="http://schemas.microsoft.com/office/powerpoint/2010/main" val="689394708"/>
+      </p:ext>
+    </p:extLst>
+  </p:cSld>
+  <p:clrMapOvr>
+    <a:masterClrMapping/>
+  </p:clrMapOvr>
+</p:sld>
+</file>
+
+<file path=ppt/slides/slide16.xml><?xml version="1.0" encoding="utf-8"?>
+<p:sld xmlns:a="http://schemas.openxmlformats.org/drawingml/2006/main" xmlns:r="http://schemas.openxmlformats.org/officeDocument/2006/relationships" xmlns:p="http://schemas.openxmlformats.org/presentationml/2006/main">
+  <p:cSld>
+    <p:spTree>
+      <p:nvGrpSpPr>
+        <p:cNvPr id="1" name=""/>
+        <p:cNvGrpSpPr/>
+        <p:nvPr/>
+      </p:nvGrpSpPr>
+      <p:grpSpPr>
+        <a:xfrm>
+          <a:off x="0" y="0"/>
+          <a:ext cx="0" cy="0"/>
+          <a:chOff x="0" y="0"/>
+          <a:chExt cx="0" cy="0"/>
+        </a:xfrm>
+      </p:grpSpPr>
+      <p:sp>
+        <p:nvSpPr>
+          <p:cNvPr id="2" name="Titel 1">
+            <a:extLst>
+              <a:ext uri="{FF2B5EF4-FFF2-40B4-BE49-F238E27FC236}">
+                <a16:creationId xmlns:a16="http://schemas.microsoft.com/office/drawing/2014/main" id="{C51AB6FA-B808-4BEF-4A8B-C440F5994484}"/>
+              </a:ext>
+            </a:extLst>
+          </p:cNvPr>
+          <p:cNvSpPr>
+            <a:spLocks noGrp="1"/>
+          </p:cNvSpPr>
+          <p:nvPr>
+            <p:ph type="title"/>
+          </p:nvPr>
+        </p:nvSpPr>
+        <p:spPr/>
+        <p:txBody>
+          <a:bodyPr/>
+          <a:lstStyle/>
+          <a:p>
+            <a:endParaRPr lang="de-DE"/>
+          </a:p>
+        </p:txBody>
+      </p:sp>
+      <p:sp>
+        <p:nvSpPr>
+          <p:cNvPr id="3" name="Inhaltsplatzhalter 2">
+            <a:extLst>
+              <a:ext uri="{FF2B5EF4-FFF2-40B4-BE49-F238E27FC236}">
+                <a16:creationId xmlns:a16="http://schemas.microsoft.com/office/drawing/2014/main" id="{57A35302-2243-CCB5-D374-8450533589EE}"/>
+              </a:ext>
+            </a:extLst>
+          </p:cNvPr>
+          <p:cNvSpPr>
+            <a:spLocks noGrp="1"/>
+          </p:cNvSpPr>
+          <p:nvPr>
+            <p:ph idx="1"/>
+          </p:nvPr>
+        </p:nvSpPr>
+        <p:spPr/>
+        <p:txBody>
+          <a:bodyPr/>
+          <a:lstStyle/>
+          <a:p>
+            <a:pPr marL="0" indent="0">
+              <a:buNone/>
+            </a:pPr>
+            <a:r>
+              <a:rPr lang="de-DE" dirty="0"/>
+              <a:t>… </a:t>
+            </a:r>
+            <a:r>
+              <a:rPr lang="de-DE" dirty="0" err="1"/>
+              <a:t>exponentially</a:t>
+            </a:r>
+            <a:r>
+              <a:rPr lang="de-DE" dirty="0"/>
+              <a:t> </a:t>
+            </a:r>
+            <a:r>
+              <a:rPr lang="de-DE" dirty="0" err="1"/>
+              <a:t>weighted</a:t>
+            </a:r>
+            <a:r>
+              <a:rPr lang="de-DE" dirty="0"/>
+              <a:t> </a:t>
+            </a:r>
+            <a:r>
+              <a:rPr lang="de-DE" dirty="0" err="1"/>
+              <a:t>moving</a:t>
+            </a:r>
+            <a:r>
+              <a:rPr lang="de-DE" dirty="0"/>
+              <a:t> …</a:t>
+            </a:r>
+          </a:p>
+          <a:p>
+            <a:pPr marL="0" indent="0">
+              <a:buNone/>
+            </a:pPr>
+            <a:endParaRPr lang="de-DE" dirty="0"/>
+          </a:p>
+          <a:p>
+            <a:pPr marL="0" indent="0">
+              <a:buNone/>
+            </a:pPr>
+            <a:r>
+              <a:rPr lang="en-GB" dirty="0" err="1">
+                <a:latin typeface="Courier" pitchFamily="2" charset="0"/>
+              </a:rPr>
+              <a:t>X.sort_values</a:t>
+            </a:r>
+            <a:r>
+              <a:rPr lang="en-GB" dirty="0">
+                <a:latin typeface="Courier" pitchFamily="2" charset="0"/>
+              </a:rPr>
+              <a:t>(['date’])</a:t>
+            </a:r>
+          </a:p>
+          <a:p>
+            <a:pPr marL="0" indent="0">
+              <a:buNone/>
+            </a:pPr>
+            <a:r>
+              <a:rPr lang="en-GB" dirty="0">
+                <a:latin typeface="Courier" pitchFamily="2" charset="0"/>
+              </a:rPr>
+              <a:t>.</a:t>
+            </a:r>
+            <a:r>
+              <a:rPr lang="en-GB" dirty="0" err="1">
+                <a:latin typeface="Courier" pitchFamily="2" charset="0"/>
+              </a:rPr>
+              <a:t>groupby</a:t>
+            </a:r>
+            <a:r>
+              <a:rPr lang="en-GB" dirty="0">
+                <a:latin typeface="Courier" pitchFamily="2" charset="0"/>
+              </a:rPr>
+              <a:t>(['</a:t>
+            </a:r>
+            <a:r>
+              <a:rPr lang="en-GB" dirty="0" err="1">
+                <a:latin typeface="Courier" pitchFamily="2" charset="0"/>
+              </a:rPr>
+              <a:t>store','item</a:t>
+            </a:r>
+            <a:r>
+              <a:rPr lang="en-GB" dirty="0">
+                <a:latin typeface="Courier" pitchFamily="2" charset="0"/>
+              </a:rPr>
+              <a:t>'])['y’]</a:t>
+            </a:r>
+          </a:p>
+          <a:p>
+            <a:pPr marL="0" indent="0">
+              <a:buNone/>
+            </a:pPr>
+            <a:r>
+              <a:rPr lang="en-GB" dirty="0">
+                <a:latin typeface="Courier" pitchFamily="2" charset="0"/>
+              </a:rPr>
+              <a:t>.apply(lambda x: </a:t>
+            </a:r>
+            <a:r>
+              <a:rPr lang="en-GB" dirty="0" err="1">
+                <a:latin typeface="Courier" pitchFamily="2" charset="0"/>
+              </a:rPr>
+              <a:t>x.shift</a:t>
+            </a:r>
+            <a:r>
+              <a:rPr lang="en-GB" dirty="0">
+                <a:latin typeface="Courier" pitchFamily="2" charset="0"/>
+              </a:rPr>
+              <a:t>(3)</a:t>
+            </a:r>
+          </a:p>
+          <a:p>
+            <a:pPr marL="0" indent="0">
+              <a:buNone/>
+            </a:pPr>
+            <a:r>
+              <a:rPr lang="en-GB" dirty="0">
+                <a:latin typeface="Courier" pitchFamily="2" charset="0"/>
+              </a:rPr>
+              <a:t>.</a:t>
+            </a:r>
+            <a:r>
+              <a:rPr lang="en-GB" dirty="0" err="1">
+                <a:latin typeface="Courier" pitchFamily="2" charset="0"/>
+              </a:rPr>
+              <a:t>ewm</a:t>
+            </a:r>
+            <a:r>
+              <a:rPr lang="en-GB" dirty="0">
+                <a:latin typeface="Courier" pitchFamily="2" charset="0"/>
+              </a:rPr>
+              <a:t>(alpha=0.15).mean())</a:t>
+            </a:r>
+          </a:p>
+        </p:txBody>
+      </p:sp>
+      <p:sp>
+        <p:nvSpPr>
+          <p:cNvPr id="4" name="TextBox 5">
+            <a:extLst>
+              <a:ext uri="{FF2B5EF4-FFF2-40B4-BE49-F238E27FC236}">
+                <a16:creationId xmlns:a16="http://schemas.microsoft.com/office/drawing/2014/main" id="{3A1E2E6C-D51F-1040-E81D-B4D1FECF1218}"/>
+              </a:ext>
+            </a:extLst>
+          </p:cNvPr>
+          <p:cNvSpPr txBox="1"/>
+          <p:nvPr/>
+        </p:nvSpPr>
+        <p:spPr>
+          <a:xfrm>
+            <a:off x="6489405" y="5207047"/>
+            <a:ext cx="2792752" cy="492443"/>
+          </a:xfrm>
+          <a:prstGeom prst="rect">
+            <a:avLst/>
+          </a:prstGeom>
+          <a:noFill/>
+        </p:spPr>
+        <p:txBody>
+          <a:bodyPr wrap="none" rtlCol="0">
+            <a:spAutoFit/>
+          </a:bodyPr>
+          <a:lstStyle/>
+          <a:p>
+            <a:r>
+              <a:rPr lang="en-GB" sz="2600" dirty="0"/>
+              <a:t>p</a:t>
+            </a:r>
+            <a:r>
+              <a:rPr lang="en-DE" sz="2600" dirty="0"/>
+              <a:t>rediction horizon</a:t>
+            </a:r>
+          </a:p>
+        </p:txBody>
+      </p:sp>
+      <p:cxnSp>
+        <p:nvCxnSpPr>
+          <p:cNvPr id="5" name="Gerade Verbindung mit Pfeil 4">
+            <a:extLst>
+              <a:ext uri="{FF2B5EF4-FFF2-40B4-BE49-F238E27FC236}">
+                <a16:creationId xmlns:a16="http://schemas.microsoft.com/office/drawing/2014/main" id="{D8E8A4A6-E7E6-05B0-E1AF-795408A161F9}"/>
+              </a:ext>
+            </a:extLst>
+          </p:cNvPr>
+          <p:cNvCxnSpPr/>
+          <p:nvPr/>
+        </p:nvCxnSpPr>
+        <p:spPr>
+          <a:xfrm flipH="1" flipV="1">
+            <a:off x="6400801" y="4274287"/>
+            <a:ext cx="1446027" cy="925033"/>
+          </a:xfrm>
+          <a:prstGeom prst="straightConnector1">
+            <a:avLst/>
+          </a:prstGeom>
+          <a:ln>
+            <a:tailEnd type="triangle"/>
+          </a:ln>
+        </p:spPr>
+        <p:style>
+          <a:lnRef idx="2">
+            <a:schemeClr val="accent1"/>
+          </a:lnRef>
+          <a:fillRef idx="0">
+            <a:schemeClr val="accent1"/>
+          </a:fillRef>
+          <a:effectRef idx="1">
+            <a:schemeClr val="accent1"/>
+          </a:effectRef>
+          <a:fontRef idx="minor">
+            <a:schemeClr val="tx1"/>
+          </a:fontRef>
+        </p:style>
+      </p:cxnSp>
+    </p:spTree>
+    <p:extLst>
+      <p:ext uri="{BB962C8B-B14F-4D97-AF65-F5344CB8AC3E}">
+        <p14:creationId xmlns:p14="http://schemas.microsoft.com/office/powerpoint/2010/main" val="3568746176"/>
+      </p:ext>
+    </p:extLst>
+  </p:cSld>
+  <p:clrMapOvr>
+    <a:masterClrMapping/>
+  </p:clrMapOvr>
+</p:sld>
+</file>
+
+<file path=ppt/slides/slide17.xml><?xml version="1.0" encoding="utf-8"?>
+<p:sld xmlns:a="http://schemas.openxmlformats.org/drawingml/2006/main" xmlns:r="http://schemas.openxmlformats.org/officeDocument/2006/relationships" xmlns:p="http://schemas.openxmlformats.org/presentationml/2006/main">
+  <p:cSld>
+    <p:spTree>
+      <p:nvGrpSpPr>
+        <p:cNvPr id="1" name=""/>
+        <p:cNvGrpSpPr/>
+        <p:nvPr/>
+      </p:nvGrpSpPr>
+      <p:grpSpPr>
+        <a:xfrm>
+          <a:off x="0" y="0"/>
+          <a:ext cx="0" cy="0"/>
+          <a:chOff x="0" y="0"/>
+          <a:chExt cx="0" cy="0"/>
+        </a:xfrm>
+      </p:grpSpPr>
+      <p:sp>
+        <p:nvSpPr>
+          <p:cNvPr id="2" name="Titel 1">
+            <a:extLst>
+              <a:ext uri="{FF2B5EF4-FFF2-40B4-BE49-F238E27FC236}">
+                <a16:creationId xmlns:a16="http://schemas.microsoft.com/office/drawing/2014/main" id="{AB7E7E7D-498D-3CAB-B8CF-A9EE30AE8C74}"/>
+              </a:ext>
+            </a:extLst>
+          </p:cNvPr>
+          <p:cNvSpPr>
+            <a:spLocks noGrp="1"/>
+          </p:cNvSpPr>
+          <p:nvPr>
+            <p:ph type="title"/>
+          </p:nvPr>
+        </p:nvSpPr>
+        <p:spPr/>
+        <p:txBody>
+          <a:bodyPr/>
+          <a:lstStyle/>
+          <a:p>
+            <a:r>
+              <a:rPr lang="de-DE" dirty="0"/>
+              <a:t>Trend Features</a:t>
+            </a:r>
+          </a:p>
+        </p:txBody>
+      </p:sp>
+      <p:sp>
+        <p:nvSpPr>
+          <p:cNvPr id="3" name="Inhaltsplatzhalter 2">
+            <a:extLst>
+              <a:ext uri="{FF2B5EF4-FFF2-40B4-BE49-F238E27FC236}">
+                <a16:creationId xmlns:a16="http://schemas.microsoft.com/office/drawing/2014/main" id="{D0744B54-851F-F434-BE0A-ABF1763AD9A6}"/>
+              </a:ext>
+            </a:extLst>
+          </p:cNvPr>
+          <p:cNvSpPr>
+            <a:spLocks noGrp="1"/>
+          </p:cNvSpPr>
+          <p:nvPr>
+            <p:ph idx="1"/>
+          </p:nvPr>
+        </p:nvSpPr>
+        <p:spPr/>
+        <p:txBody>
+          <a:bodyPr>
+            <a:normAutofit/>
+          </a:bodyPr>
+          <a:lstStyle/>
+          <a:p>
+            <a:pPr marL="0" indent="0">
+              <a:buNone/>
+            </a:pPr>
+            <a:r>
+              <a:rPr lang="de-DE" dirty="0" err="1"/>
+              <a:t>capture</a:t>
+            </a:r>
+            <a:r>
+              <a:rPr lang="de-DE" dirty="0"/>
+              <a:t> </a:t>
+            </a:r>
+            <a:r>
+              <a:rPr lang="de-DE" dirty="0" err="1"/>
+              <a:t>long</a:t>
+            </a:r>
+            <a:r>
+              <a:rPr lang="de-DE" dirty="0"/>
+              <a:t>-term </a:t>
+            </a:r>
+            <a:r>
+              <a:rPr lang="de-DE" dirty="0" err="1"/>
+              <a:t>movement</a:t>
+            </a:r>
+            <a:r>
+              <a:rPr lang="de-DE" dirty="0"/>
+              <a:t> such </a:t>
+            </a:r>
+            <a:r>
+              <a:rPr lang="de-DE" dirty="0" err="1"/>
+              <a:t>as</a:t>
+            </a:r>
+            <a:r>
+              <a:rPr lang="de-DE" dirty="0"/>
+              <a:t> </a:t>
+            </a:r>
+            <a:r>
+              <a:rPr lang="de-DE" dirty="0" err="1"/>
+              <a:t>increasing</a:t>
+            </a:r>
+            <a:r>
+              <a:rPr lang="de-DE" dirty="0"/>
+              <a:t>/</a:t>
+            </a:r>
+            <a:r>
+              <a:rPr lang="de-DE" dirty="0" err="1"/>
+              <a:t>decreasing</a:t>
+            </a:r>
+            <a:r>
+              <a:rPr lang="de-DE" dirty="0"/>
+              <a:t> </a:t>
+            </a:r>
+            <a:r>
+              <a:rPr lang="de-DE" dirty="0" err="1"/>
+              <a:t>trend</a:t>
+            </a:r>
+            <a:endParaRPr lang="de-DE" dirty="0"/>
+          </a:p>
+          <a:p>
+            <a:pPr marL="0" indent="0">
+              <a:buNone/>
+            </a:pPr>
+            <a:r>
+              <a:rPr lang="de-DE" dirty="0" err="1"/>
+              <a:t>difference</a:t>
+            </a:r>
+            <a:r>
+              <a:rPr lang="de-DE" dirty="0"/>
+              <a:t> </a:t>
+            </a:r>
+            <a:r>
+              <a:rPr lang="de-DE" dirty="0" err="1"/>
+              <a:t>between</a:t>
+            </a:r>
+            <a:r>
+              <a:rPr lang="de-DE" dirty="0"/>
+              <a:t> </a:t>
+            </a:r>
+            <a:r>
+              <a:rPr lang="de-DE" dirty="0" err="1"/>
+              <a:t>current</a:t>
+            </a:r>
+            <a:r>
+              <a:rPr lang="de-DE" dirty="0"/>
+              <a:t> and </a:t>
+            </a:r>
+            <a:r>
+              <a:rPr lang="de-DE" dirty="0" err="1"/>
+              <a:t>past</a:t>
+            </a:r>
+            <a:r>
+              <a:rPr lang="de-DE" dirty="0"/>
+              <a:t> </a:t>
+            </a:r>
+            <a:r>
+              <a:rPr lang="de-DE" dirty="0" err="1"/>
+              <a:t>values</a:t>
+            </a:r>
+            <a:endParaRPr lang="de-DE" dirty="0"/>
+          </a:p>
+        </p:txBody>
+      </p:sp>
+    </p:spTree>
+    <p:extLst>
+      <p:ext uri="{BB962C8B-B14F-4D97-AF65-F5344CB8AC3E}">
+        <p14:creationId xmlns:p14="http://schemas.microsoft.com/office/powerpoint/2010/main" val="3982333920"/>
+      </p:ext>
+    </p:extLst>
+  </p:cSld>
+  <p:clrMapOvr>
+    <a:masterClrMapping/>
+  </p:clrMapOvr>
+</p:sld>
+</file>
+
+<file path=ppt/slides/slide18.xml><?xml version="1.0" encoding="utf-8"?>
+<p:sld xmlns:a="http://schemas.openxmlformats.org/drawingml/2006/main" xmlns:r="http://schemas.openxmlformats.org/officeDocument/2006/relationships" xmlns:p="http://schemas.openxmlformats.org/presentationml/2006/main">
+  <p:cSld>
+    <p:spTree>
+      <p:nvGrpSpPr>
+        <p:cNvPr id="1" name=""/>
+        <p:cNvGrpSpPr/>
+        <p:nvPr/>
+      </p:nvGrpSpPr>
+      <p:grpSpPr>
+        <a:xfrm>
+          <a:off x="0" y="0"/>
+          <a:ext cx="0" cy="0"/>
+          <a:chOff x="0" y="0"/>
+          <a:chExt cx="0" cy="0"/>
+        </a:xfrm>
+      </p:grpSpPr>
+      <p:sp>
+        <p:nvSpPr>
+          <p:cNvPr id="2" name="Titel 1">
+            <a:extLst>
+              <a:ext uri="{FF2B5EF4-FFF2-40B4-BE49-F238E27FC236}">
+                <a16:creationId xmlns:a16="http://schemas.microsoft.com/office/drawing/2014/main" id="{68BE0502-F15A-2398-DB55-E06AB86DEACF}"/>
+              </a:ext>
+            </a:extLst>
+          </p:cNvPr>
+          <p:cNvSpPr>
+            <a:spLocks noGrp="1"/>
+          </p:cNvSpPr>
+          <p:nvPr>
+            <p:ph type="title"/>
+          </p:nvPr>
+        </p:nvSpPr>
+        <p:spPr/>
+        <p:txBody>
+          <a:bodyPr/>
+          <a:lstStyle/>
+          <a:p>
+            <a:r>
+              <a:rPr lang="de-DE" dirty="0" err="1"/>
+              <a:t>Seasonality</a:t>
+            </a:r>
+            <a:r>
+              <a:rPr lang="de-DE" dirty="0"/>
+              <a:t> Features</a:t>
+            </a:r>
+          </a:p>
+        </p:txBody>
+      </p:sp>
+      <p:sp>
+        <p:nvSpPr>
+          <p:cNvPr id="3" name="Inhaltsplatzhalter 2">
+            <a:extLst>
+              <a:ext uri="{FF2B5EF4-FFF2-40B4-BE49-F238E27FC236}">
+                <a16:creationId xmlns:a16="http://schemas.microsoft.com/office/drawing/2014/main" id="{6D5EDE1D-243E-5E5A-616B-472A87F378E6}"/>
+              </a:ext>
+            </a:extLst>
+          </p:cNvPr>
+          <p:cNvSpPr>
+            <a:spLocks noGrp="1"/>
+          </p:cNvSpPr>
+          <p:nvPr>
+            <p:ph idx="1"/>
+          </p:nvPr>
+        </p:nvSpPr>
+        <p:spPr/>
+        <p:txBody>
+          <a:bodyPr/>
+          <a:lstStyle/>
+          <a:p>
+            <a:pPr marL="0" indent="0">
+              <a:buNone/>
+            </a:pPr>
+            <a:r>
+              <a:rPr lang="de-DE" dirty="0" err="1"/>
+              <a:t>capture</a:t>
+            </a:r>
+            <a:r>
+              <a:rPr lang="de-DE" dirty="0"/>
+              <a:t> </a:t>
+            </a:r>
+            <a:r>
+              <a:rPr lang="de-DE" dirty="0" err="1"/>
+              <a:t>repeating</a:t>
+            </a:r>
+            <a:r>
+              <a:rPr lang="de-DE" dirty="0"/>
+              <a:t> </a:t>
+            </a:r>
+            <a:r>
+              <a:rPr lang="de-DE" dirty="0" err="1"/>
+              <a:t>patterns</a:t>
+            </a:r>
+            <a:endParaRPr lang="de-DE" dirty="0"/>
+          </a:p>
+          <a:p>
+            <a:pPr marL="0" indent="0">
+              <a:buNone/>
+            </a:pPr>
+            <a:r>
+              <a:rPr lang="de-DE" dirty="0" err="1"/>
+              <a:t>examples</a:t>
+            </a:r>
+            <a:r>
+              <a:rPr lang="de-DE" dirty="0"/>
+              <a:t>:</a:t>
+            </a:r>
+          </a:p>
+          <a:p>
+            <a:r>
+              <a:rPr lang="de-DE" dirty="0" err="1"/>
+              <a:t>day</a:t>
+            </a:r>
+            <a:r>
+              <a:rPr lang="de-DE" dirty="0"/>
+              <a:t> </a:t>
+            </a:r>
+            <a:r>
+              <a:rPr lang="de-DE" dirty="0" err="1"/>
+              <a:t>of</a:t>
+            </a:r>
+            <a:r>
+              <a:rPr lang="de-DE" dirty="0"/>
+              <a:t> </a:t>
+            </a:r>
+            <a:r>
+              <a:rPr lang="de-DE" dirty="0" err="1"/>
+              <a:t>week</a:t>
+            </a:r>
+            <a:endParaRPr lang="de-DE" dirty="0"/>
+          </a:p>
+          <a:p>
+            <a:r>
+              <a:rPr lang="de-DE" dirty="0" err="1"/>
+              <a:t>month</a:t>
+            </a:r>
+            <a:endParaRPr lang="de-DE" dirty="0"/>
+          </a:p>
+          <a:p>
+            <a:r>
+              <a:rPr lang="de-DE" dirty="0" err="1"/>
+              <a:t>holiday</a:t>
+            </a:r>
+            <a:r>
+              <a:rPr lang="de-DE" dirty="0"/>
+              <a:t> </a:t>
+            </a:r>
+            <a:r>
+              <a:rPr lang="de-DE" dirty="0" err="1"/>
+              <a:t>indicators</a:t>
+            </a:r>
+            <a:endParaRPr lang="de-DE" dirty="0"/>
+          </a:p>
+          <a:p>
+            <a:pPr marL="0" indent="0">
+              <a:buNone/>
+            </a:pPr>
+            <a:endParaRPr lang="de-DE" dirty="0"/>
+          </a:p>
+          <a:p>
+            <a:pPr marL="0" indent="0">
+              <a:buNone/>
+            </a:pPr>
+            <a:r>
+              <a:rPr lang="de-DE" dirty="0">
+                <a:sym typeface="Wingdings" pitchFamily="2" charset="2"/>
+              </a:rPr>
+              <a:t> </a:t>
+            </a:r>
+            <a:r>
+              <a:rPr lang="de-DE" dirty="0" err="1">
+                <a:sym typeface="Wingdings" pitchFamily="2" charset="2"/>
+              </a:rPr>
+              <a:t>o</a:t>
+            </a:r>
+            <a:r>
+              <a:rPr lang="de-DE" dirty="0" err="1"/>
+              <a:t>ften</a:t>
+            </a:r>
+            <a:r>
+              <a:rPr lang="de-DE" dirty="0"/>
+              <a:t> </a:t>
+            </a:r>
+            <a:r>
+              <a:rPr lang="de-DE" dirty="0" err="1"/>
+              <a:t>critical</a:t>
+            </a:r>
+            <a:r>
+              <a:rPr lang="de-DE" dirty="0"/>
+              <a:t> in time </a:t>
+            </a:r>
+            <a:r>
+              <a:rPr lang="de-DE" dirty="0" err="1"/>
+              <a:t>series</a:t>
+            </a:r>
+            <a:r>
+              <a:rPr lang="de-DE" dirty="0"/>
+              <a:t> </a:t>
+            </a:r>
+            <a:r>
+              <a:rPr lang="de-DE" dirty="0" err="1"/>
+              <a:t>problems</a:t>
+            </a:r>
+            <a:endParaRPr lang="de-DE" dirty="0"/>
+          </a:p>
+        </p:txBody>
+      </p:sp>
+    </p:spTree>
+    <p:extLst>
+      <p:ext uri="{BB962C8B-B14F-4D97-AF65-F5344CB8AC3E}">
+        <p14:creationId xmlns:p14="http://schemas.microsoft.com/office/powerpoint/2010/main" val="662758302"/>
       </p:ext>
     </p:extLst>
   </p:cSld>
@@ -15267,10 +16033,10 @@
       </p:grpSpPr>
       <p:sp>
         <p:nvSpPr>
-          <p:cNvPr id="2" name="Titel 1">
-            <a:extLst>
-              <a:ext uri="{FF2B5EF4-FFF2-40B4-BE49-F238E27FC236}">
-                <a16:creationId xmlns:a16="http://schemas.microsoft.com/office/drawing/2014/main" id="{B3ECE723-0801-7F1B-0125-A419EDE92E35}"/>
+          <p:cNvPr id="2" name="Title 1">
+            <a:extLst>
+              <a:ext uri="{FF2B5EF4-FFF2-40B4-BE49-F238E27FC236}">
+                <a16:creationId xmlns:a16="http://schemas.microsoft.com/office/drawing/2014/main" id="{03EC4D4A-A82A-7BC5-7541-02F3EAB5D215}"/>
               </a:ext>
             </a:extLst>
           </p:cNvPr>
@@ -15287,18 +16053,18 @@
           <a:lstStyle/>
           <a:p>
             <a:r>
-              <a:rPr lang="de-DE" dirty="0"/>
-              <a:t>Time Series in ML Models</a:t>
-            </a:r>
-          </a:p>
-        </p:txBody>
-      </p:sp>
-      <p:sp>
-        <p:nvSpPr>
-          <p:cNvPr id="3" name="Inhaltsplatzhalter 2">
-            <a:extLst>
-              <a:ext uri="{FF2B5EF4-FFF2-40B4-BE49-F238E27FC236}">
-                <a16:creationId xmlns:a16="http://schemas.microsoft.com/office/drawing/2014/main" id="{84528E01-5BFB-231A-DC34-8FE2B58E148A}"/>
+              <a:rPr lang="en-GB" dirty="0"/>
+              <a:t>Types of Time Series Forecasting Information</a:t>
+            </a:r>
+          </a:p>
+        </p:txBody>
+      </p:sp>
+      <p:sp>
+        <p:nvSpPr>
+          <p:cNvPr id="3" name="Content Placeholder 2">
+            <a:extLst>
+              <a:ext uri="{FF2B5EF4-FFF2-40B4-BE49-F238E27FC236}">
+                <a16:creationId xmlns:a16="http://schemas.microsoft.com/office/drawing/2014/main" id="{7A183E07-4A7F-4057-51D6-EA7F8824CF08}"/>
               </a:ext>
             </a:extLst>
           </p:cNvPr>
@@ -15311,17 +16077,105 @@
         </p:nvSpPr>
         <p:spPr/>
         <p:txBody>
+          <a:bodyPr>
+            <a:normAutofit/>
+          </a:bodyPr>
+          <a:lstStyle/>
+          <a:p>
+            <a:pPr marL="0" indent="0">
+              <a:buNone/>
+            </a:pPr>
+            <a:r>
+              <a:rPr lang="en-GB" dirty="0"/>
+              <a:t>auto-correlation</a:t>
+            </a:r>
+          </a:p>
+          <a:p>
+            <a:r>
+              <a:rPr lang="en-GB" dirty="0"/>
+              <a:t>using past values of considered time series as function of lag</a:t>
+            </a:r>
+          </a:p>
+          <a:p>
+            <a:r>
+              <a:rPr lang="en-GB" dirty="0">
+                <a:sym typeface="Wingdings" panose="05000000000000000000" pitchFamily="2" charset="2"/>
+              </a:rPr>
+              <a:t>identifying periodicity (seasonality) and trend</a:t>
+            </a:r>
+            <a:endParaRPr lang="en-GB" dirty="0"/>
+          </a:p>
+          <a:p>
+            <a:pPr marL="0" indent="0">
+              <a:buNone/>
+            </a:pPr>
+            <a:endParaRPr lang="en-GB" dirty="0"/>
+          </a:p>
+          <a:p>
+            <a:pPr marL="0" indent="0">
+              <a:buNone/>
+            </a:pPr>
+            <a:r>
+              <a:rPr lang="en-GB" dirty="0"/>
+              <a:t>exogenous variables</a:t>
+            </a:r>
+          </a:p>
+          <a:p>
+            <a:r>
+              <a:rPr lang="en-GB" dirty="0"/>
+              <a:t>using correlations of other variables to considered time series</a:t>
+            </a:r>
+          </a:p>
+          <a:p>
+            <a:r>
+              <a:rPr lang="en-GB" dirty="0"/>
+              <a:t>examples in demand forecasting: price, weather</a:t>
+            </a:r>
+          </a:p>
+          <a:p>
+            <a:r>
+              <a:rPr lang="en-GB" dirty="0"/>
+              <a:t>such effects lasting for some time create spurious auto-correlation</a:t>
+            </a:r>
+            <a:endParaRPr lang="en-GB" dirty="0">
+              <a:sym typeface="Wingdings" panose="05000000000000000000" pitchFamily="2" charset="2"/>
+            </a:endParaRPr>
+          </a:p>
+        </p:txBody>
+      </p:sp>
+      <p:sp>
+        <p:nvSpPr>
+          <p:cNvPr id="4" name="Slide Number Placeholder 3">
+            <a:extLst>
+              <a:ext uri="{FF2B5EF4-FFF2-40B4-BE49-F238E27FC236}">
+                <a16:creationId xmlns:a16="http://schemas.microsoft.com/office/drawing/2014/main" id="{E10D5294-F36F-3ADF-1C52-72056CEFFFF5}"/>
+              </a:ext>
+            </a:extLst>
+          </p:cNvPr>
+          <p:cNvSpPr>
+            <a:spLocks noGrp="1"/>
+          </p:cNvSpPr>
+          <p:nvPr>
+            <p:ph type="sldNum" sz="quarter" idx="12"/>
+          </p:nvPr>
+        </p:nvSpPr>
+        <p:spPr/>
+        <p:txBody>
           <a:bodyPr/>
           <a:lstStyle/>
           <a:p>
-            <a:endParaRPr lang="de-DE"/>
+            <a:fld id="{ADDEFC8A-584C-5E41-A633-418C2FB73F75}" type="slidenum">
+              <a:rPr lang="en-DE" smtClean="0"/>
+              <a:t>19</a:t>
+            </a:fld>
+            <a:endParaRPr lang="en-DE"/>
           </a:p>
         </p:txBody>
       </p:sp>
     </p:spTree>
     <p:extLst>
       <p:ext uri="{BB962C8B-B14F-4D97-AF65-F5344CB8AC3E}">
-        <p14:creationId xmlns:p14="http://schemas.microsoft.com/office/powerpoint/2010/main" val="178933247"/>
+        <p14:creationId xmlns:p14="http://schemas.microsoft.com/office/powerpoint/2010/main" val="559053033"/>
       </p:ext>
     </p:extLst>
   </p:cSld>
@@ -15509,6 +16363,139 @@
 </file>
 
 <file path=ppt/slides/slide20.xml><?xml version="1.0" encoding="utf-8"?>
+<p:sld xmlns:a="http://schemas.openxmlformats.org/drawingml/2006/main" xmlns:r="http://schemas.openxmlformats.org/officeDocument/2006/relationships" xmlns:p="http://schemas.openxmlformats.org/presentationml/2006/main">
+  <p:cSld>
+    <p:spTree>
+      <p:nvGrpSpPr>
+        <p:cNvPr id="1" name=""/>
+        <p:cNvGrpSpPr/>
+        <p:nvPr/>
+      </p:nvGrpSpPr>
+      <p:grpSpPr>
+        <a:xfrm>
+          <a:off x="0" y="0"/>
+          <a:ext cx="0" cy="0"/>
+          <a:chOff x="0" y="0"/>
+          <a:chExt cx="0" cy="0"/>
+        </a:xfrm>
+      </p:grpSpPr>
+      <p:sp>
+        <p:nvSpPr>
+          <p:cNvPr id="2" name="Titel 1">
+            <a:extLst>
+              <a:ext uri="{FF2B5EF4-FFF2-40B4-BE49-F238E27FC236}">
+                <a16:creationId xmlns:a16="http://schemas.microsoft.com/office/drawing/2014/main" id="{796B864C-C752-045A-72CF-8C3649F89635}"/>
+              </a:ext>
+            </a:extLst>
+          </p:cNvPr>
+          <p:cNvSpPr>
+            <a:spLocks noGrp="1"/>
+          </p:cNvSpPr>
+          <p:nvPr>
+            <p:ph type="title"/>
+          </p:nvPr>
+        </p:nvSpPr>
+        <p:spPr/>
+        <p:txBody>
+          <a:bodyPr/>
+          <a:lstStyle/>
+          <a:p>
+            <a:r>
+              <a:rPr lang="de-DE" dirty="0"/>
+              <a:t>Time-</a:t>
+            </a:r>
+            <a:r>
+              <a:rPr lang="de-DE" dirty="0" err="1"/>
+              <a:t>Based</a:t>
+            </a:r>
+            <a:r>
+              <a:rPr lang="de-DE" dirty="0"/>
+              <a:t> Leakage</a:t>
+            </a:r>
+          </a:p>
+        </p:txBody>
+      </p:sp>
+      <p:sp>
+        <p:nvSpPr>
+          <p:cNvPr id="3" name="Inhaltsplatzhalter 2">
+            <a:extLst>
+              <a:ext uri="{FF2B5EF4-FFF2-40B4-BE49-F238E27FC236}">
+                <a16:creationId xmlns:a16="http://schemas.microsoft.com/office/drawing/2014/main" id="{11AAA747-25D0-7B86-204C-27179F880C26}"/>
+              </a:ext>
+            </a:extLst>
+          </p:cNvPr>
+          <p:cNvSpPr>
+            <a:spLocks noGrp="1"/>
+          </p:cNvSpPr>
+          <p:nvPr>
+            <p:ph idx="1"/>
+          </p:nvPr>
+        </p:nvSpPr>
+        <p:spPr/>
+        <p:txBody>
+          <a:bodyPr/>
+          <a:lstStyle/>
+          <a:p>
+            <a:pPr marL="0" indent="0">
+              <a:buNone/>
+            </a:pPr>
+            <a:r>
+              <a:rPr lang="de-DE" dirty="0" err="1"/>
+              <a:t>only</a:t>
+            </a:r>
+            <a:r>
+              <a:rPr lang="de-DE" dirty="0"/>
+              <a:t> </a:t>
+            </a:r>
+            <a:r>
+              <a:rPr lang="de-DE" dirty="0" err="1"/>
+              <a:t>use</a:t>
+            </a:r>
+            <a:r>
+              <a:rPr lang="de-DE" dirty="0"/>
+              <a:t> </a:t>
+            </a:r>
+            <a:r>
+              <a:rPr lang="de-DE" dirty="0" err="1"/>
+              <a:t>past</a:t>
+            </a:r>
+            <a:r>
+              <a:rPr lang="de-DE" dirty="0"/>
+              <a:t> </a:t>
+            </a:r>
+            <a:r>
+              <a:rPr lang="de-DE" dirty="0" err="1"/>
+              <a:t>data</a:t>
+            </a:r>
+            <a:r>
+              <a:rPr lang="de-DE" dirty="0"/>
+              <a:t> at </a:t>
+            </a:r>
+            <a:r>
+              <a:rPr lang="de-DE" dirty="0" err="1"/>
+              <a:t>prediction</a:t>
+            </a:r>
+            <a:r>
+              <a:rPr lang="de-DE" dirty="0"/>
+              <a:t> time …</a:t>
+            </a:r>
+          </a:p>
+        </p:txBody>
+      </p:sp>
+    </p:spTree>
+    <p:extLst>
+      <p:ext uri="{BB962C8B-B14F-4D97-AF65-F5344CB8AC3E}">
+        <p14:creationId xmlns:p14="http://schemas.microsoft.com/office/powerpoint/2010/main" val="2807543430"/>
+      </p:ext>
+    </p:extLst>
+  </p:cSld>
+  <p:clrMapOvr>
+    <a:masterClrMapping/>
+  </p:clrMapOvr>
+</p:sld>
+</file>
+
+<file path=ppt/slides/slide21.xml><?xml version="1.0" encoding="utf-8"?>
 <p:sld xmlns:a="http://schemas.openxmlformats.org/drawingml/2006/main" xmlns:r="http://schemas.openxmlformats.org/officeDocument/2006/relationships" xmlns:p="http://schemas.openxmlformats.org/presentationml/2006/main">
   <p:cSld>
     <p:spTree>
@@ -15821,7 +16808,7 @@
             <a:fld id="{523A240F-EAFE-E84F-B44C-6D7A08E0E409}" type="slidenum">
               <a:rPr lang="en-US" smtClean="0"/>
               <a:pPr/>
-              <a:t>20</a:t>
+              <a:t>21</a:t>
             </a:fld>
             <a:endParaRPr lang="en-US" dirty="0"/>
           </a:p>
@@ -16360,7 +17347,7 @@
 </p:sld>
 </file>
 
-<file path=ppt/slides/slide21.xml><?xml version="1.0" encoding="utf-8"?>
+<file path=ppt/slides/slide22.xml><?xml version="1.0" encoding="utf-8"?>
 <p:sld xmlns:a="http://schemas.openxmlformats.org/drawingml/2006/main" xmlns:r="http://schemas.openxmlformats.org/officeDocument/2006/relationships" xmlns:p="http://schemas.openxmlformats.org/presentationml/2006/main">
   <p:cSld>
     <p:spTree>
@@ -16457,7 +17444,7 @@
 </p:sld>
 </file>
 
-<file path=ppt/slides/slide22.xml><?xml version="1.0" encoding="utf-8"?>
+<file path=ppt/slides/slide23.xml><?xml version="1.0" encoding="utf-8"?>
 <p:sld xmlns:a="http://schemas.openxmlformats.org/drawingml/2006/main" xmlns:r="http://schemas.openxmlformats.org/officeDocument/2006/relationships" xmlns:p="http://schemas.openxmlformats.org/presentationml/2006/main">
   <p:cSld>
     <p:spTree>
@@ -16530,7 +17517,7 @@
           <a:p>
             <a:fld id="{4640CEBA-4671-DC49-AB8F-1FDE9C89258E}" type="slidenum">
               <a:rPr lang="en-DE" smtClean="0"/>
-              <a:t>22</a:t>
+              <a:t>23</a:t>
             </a:fld>
             <a:endParaRPr lang="en-DE"/>
           </a:p>
@@ -16639,460 +17626,6 @@
 </p:sld>
 </file>
 
-<file path=ppt/slides/slide23.xml><?xml version="1.0" encoding="utf-8"?>
-<p:sld xmlns:a="http://schemas.openxmlformats.org/drawingml/2006/main" xmlns:r="http://schemas.openxmlformats.org/officeDocument/2006/relationships" xmlns:p="http://schemas.openxmlformats.org/presentationml/2006/main">
-  <p:cSld>
-    <p:spTree>
-      <p:nvGrpSpPr>
-        <p:cNvPr id="1" name=""/>
-        <p:cNvGrpSpPr/>
-        <p:nvPr/>
-      </p:nvGrpSpPr>
-      <p:grpSpPr>
-        <a:xfrm>
-          <a:off x="0" y="0"/>
-          <a:ext cx="0" cy="0"/>
-          <a:chOff x="0" y="0"/>
-          <a:chExt cx="0" cy="0"/>
-        </a:xfrm>
-      </p:grpSpPr>
-      <p:sp>
-        <p:nvSpPr>
-          <p:cNvPr id="2" name="Title 1">
-            <a:extLst>
-              <a:ext uri="{FF2B5EF4-FFF2-40B4-BE49-F238E27FC236}">
-                <a16:creationId xmlns:a16="http://schemas.microsoft.com/office/drawing/2014/main" id="{4FB81BC9-CDCF-3E8F-3210-9DFA65954746}"/>
-              </a:ext>
-            </a:extLst>
-          </p:cNvPr>
-          <p:cNvSpPr>
-            <a:spLocks noGrp="1"/>
-          </p:cNvSpPr>
-          <p:nvPr>
-            <p:ph type="title"/>
-          </p:nvPr>
-        </p:nvSpPr>
-        <p:spPr/>
-        <p:txBody>
-          <a:bodyPr/>
-          <a:lstStyle/>
-          <a:p>
-            <a:r>
-              <a:rPr lang="en-GB" dirty="0"/>
-              <a:t>Deep Learning Methods for Sequential Data</a:t>
-            </a:r>
-          </a:p>
-        </p:txBody>
-      </p:sp>
-      <p:sp>
-        <p:nvSpPr>
-          <p:cNvPr id="5" name="Slide Number Placeholder 4">
-            <a:extLst>
-              <a:ext uri="{FF2B5EF4-FFF2-40B4-BE49-F238E27FC236}">
-                <a16:creationId xmlns:a16="http://schemas.microsoft.com/office/drawing/2014/main" id="{2436F040-A1E9-A369-E93B-C8B18E924C9A}"/>
-              </a:ext>
-            </a:extLst>
-          </p:cNvPr>
-          <p:cNvSpPr>
-            <a:spLocks noGrp="1"/>
-          </p:cNvSpPr>
-          <p:nvPr>
-            <p:ph type="sldNum" sz="quarter" idx="12"/>
-          </p:nvPr>
-        </p:nvSpPr>
-        <p:spPr/>
-        <p:txBody>
-          <a:bodyPr/>
-          <a:lstStyle/>
-          <a:p>
-            <a:fld id="{ADDEFC8A-584C-5E41-A633-418C2FB73F75}" type="slidenum">
-              <a:rPr lang="en-DE" smtClean="0"/>
-              <a:t>23</a:t>
-            </a:fld>
-            <a:endParaRPr lang="en-DE"/>
-          </a:p>
-        </p:txBody>
-      </p:sp>
-      <p:sp>
-        <p:nvSpPr>
-          <p:cNvPr id="9" name="TextBox 8">
-            <a:extLst>
-              <a:ext uri="{FF2B5EF4-FFF2-40B4-BE49-F238E27FC236}">
-                <a16:creationId xmlns:a16="http://schemas.microsoft.com/office/drawing/2014/main" id="{25E51E5F-025A-3326-6DE3-E7A276DD1EEA}"/>
-              </a:ext>
-            </a:extLst>
-          </p:cNvPr>
-          <p:cNvSpPr txBox="1"/>
-          <p:nvPr/>
-        </p:nvSpPr>
-        <p:spPr>
-          <a:xfrm>
-            <a:off x="8358316" y="1965066"/>
-            <a:ext cx="3561835" cy="4478149"/>
-          </a:xfrm>
-          <a:prstGeom prst="rect">
-            <a:avLst/>
-          </a:prstGeom>
-          <a:noFill/>
-          <a:ln>
-            <a:solidFill>
-              <a:schemeClr val="tx1"/>
-            </a:solidFill>
-          </a:ln>
-        </p:spPr>
-        <p:txBody>
-          <a:bodyPr wrap="square" rtlCol="0">
-            <a:spAutoFit/>
-          </a:bodyPr>
-          <a:lstStyle/>
-          <a:p>
-            <a:r>
-              <a:rPr lang="en-GB" sz="1900" b="1" dirty="0"/>
-              <a:t>transformers</a:t>
-            </a:r>
-            <a:endParaRPr lang="en-GB" sz="1900" dirty="0"/>
-          </a:p>
-          <a:p>
-            <a:endParaRPr lang="en-GB" sz="1900" dirty="0"/>
-          </a:p>
-          <a:p>
-            <a:pPr marL="342900" indent="-342900">
-              <a:buFont typeface="Arial" panose="020B0604020202020204" pitchFamily="34" charset="0"/>
-              <a:buChar char="•"/>
-            </a:pPr>
-            <a:r>
-              <a:rPr lang="en-GB" sz="1900" dirty="0"/>
-              <a:t>main application NLP (largely replaced RNNs), but also computer vision</a:t>
-            </a:r>
-          </a:p>
-          <a:p>
-            <a:pPr marL="342900" indent="-342900">
-              <a:buFont typeface="Arial" panose="020B0604020202020204" pitchFamily="34" charset="0"/>
-              <a:buChar char="•"/>
-            </a:pPr>
-            <a:r>
-              <a:rPr lang="en-GB" sz="1900" dirty="0"/>
-              <a:t>time series data as directed graph (attention in edges)</a:t>
-            </a:r>
-          </a:p>
-          <a:p>
-            <a:endParaRPr lang="en-GB" sz="1900" dirty="0"/>
-          </a:p>
-          <a:p>
-            <a:pPr marL="342900" indent="-342900">
-              <a:buFont typeface="Arial" panose="020B0604020202020204" pitchFamily="34" charset="0"/>
-              <a:buChar char="•"/>
-            </a:pPr>
-            <a:r>
-              <a:rPr lang="en-GB" sz="1900" dirty="0"/>
-              <a:t>masked self-attention to focus on relevant past time steps</a:t>
-            </a:r>
-            <a:r>
-              <a:rPr lang="en-GB" sz="1900" dirty="0">
-                <a:sym typeface="Wingdings" panose="05000000000000000000" pitchFamily="2" charset="2"/>
-              </a:rPr>
-              <a:t> and positional encoding to include order of sequence</a:t>
-            </a:r>
-          </a:p>
-          <a:p>
-            <a:endParaRPr lang="en-GB" sz="1900" dirty="0">
-              <a:sym typeface="Wingdings" panose="05000000000000000000" pitchFamily="2" charset="2"/>
-            </a:endParaRPr>
-          </a:p>
-          <a:p>
-            <a:pPr marL="342900" indent="-342900">
-              <a:buFont typeface="Arial" panose="020B0604020202020204" pitchFamily="34" charset="0"/>
-              <a:buChar char="•"/>
-            </a:pPr>
-            <a:r>
-              <a:rPr lang="en-GB" sz="1900" dirty="0">
-                <a:sym typeface="Wingdings" panose="05000000000000000000" pitchFamily="2" charset="2"/>
-              </a:rPr>
-              <a:t>multivariate time series model via input concatenation</a:t>
-            </a:r>
-            <a:endParaRPr lang="en-GB" sz="1900" dirty="0"/>
-          </a:p>
-        </p:txBody>
-      </p:sp>
-      <p:sp>
-        <p:nvSpPr>
-          <p:cNvPr id="10" name="TextBox 9">
-            <a:extLst>
-              <a:ext uri="{FF2B5EF4-FFF2-40B4-BE49-F238E27FC236}">
-                <a16:creationId xmlns:a16="http://schemas.microsoft.com/office/drawing/2014/main" id="{CFD38641-0DF2-4E7C-77AC-134BE72DA495}"/>
-              </a:ext>
-            </a:extLst>
-          </p:cNvPr>
-          <p:cNvSpPr txBox="1"/>
-          <p:nvPr/>
-        </p:nvSpPr>
-        <p:spPr>
-          <a:xfrm>
-            <a:off x="4514335" y="1964947"/>
-            <a:ext cx="3643184" cy="4478149"/>
-          </a:xfrm>
-          <a:prstGeom prst="rect">
-            <a:avLst/>
-          </a:prstGeom>
-          <a:noFill/>
-          <a:ln>
-            <a:solidFill>
-              <a:schemeClr val="tx1"/>
-            </a:solidFill>
-          </a:ln>
-        </p:spPr>
-        <p:txBody>
-          <a:bodyPr wrap="square" rtlCol="0">
-            <a:spAutoFit/>
-          </a:bodyPr>
-          <a:lstStyle/>
-          <a:p>
-            <a:r>
-              <a:rPr lang="en-GB" sz="1900" b="1" dirty="0"/>
-              <a:t>recurrent neural networks (RNN)</a:t>
-            </a:r>
-            <a:endParaRPr lang="en-GB" sz="1900" dirty="0"/>
-          </a:p>
-          <a:p>
-            <a:endParaRPr lang="en-GB" sz="1900" dirty="0"/>
-          </a:p>
-          <a:p>
-            <a:pPr marL="342900" indent="-342900">
-              <a:buFont typeface="Arial" panose="020B0604020202020204" pitchFamily="34" charset="0"/>
-              <a:buChar char="•"/>
-            </a:pPr>
-            <a:r>
-              <a:rPr lang="en-GB" sz="1900" dirty="0"/>
-              <a:t>main application natural language processing (NLP): sequence of words (tokens)</a:t>
-            </a:r>
-          </a:p>
-          <a:p>
-            <a:pPr marL="342900" indent="-342900">
-              <a:buFont typeface="Arial" panose="020B0604020202020204" pitchFamily="34" charset="0"/>
-              <a:buChar char="•"/>
-            </a:pPr>
-            <a:r>
-              <a:rPr lang="en-GB" sz="1900" dirty="0"/>
-              <a:t>time series data as time-tagged stream</a:t>
-            </a:r>
-          </a:p>
-          <a:p>
-            <a:endParaRPr lang="en-GB" sz="1900" dirty="0"/>
-          </a:p>
-          <a:p>
-            <a:pPr marL="342900" indent="-342900">
-              <a:buFont typeface="Arial" panose="020B0604020202020204" pitchFamily="34" charset="0"/>
-              <a:buChar char="•"/>
-            </a:pPr>
-            <a:r>
-              <a:rPr lang="en-GB" sz="1900" dirty="0"/>
-              <a:t>parameter sharing via recurrent nodes </a:t>
-            </a:r>
-            <a:r>
-              <a:rPr lang="en-GB" sz="1900" dirty="0">
-                <a:sym typeface="Wingdings" panose="05000000000000000000" pitchFamily="2" charset="2"/>
-              </a:rPr>
-              <a:t> context-awareness (input from past activations)</a:t>
-            </a:r>
-          </a:p>
-          <a:p>
-            <a:pPr marL="342900" indent="-342900">
-              <a:buFont typeface="Arial" panose="020B0604020202020204" pitchFamily="34" charset="0"/>
-              <a:buChar char="•"/>
-            </a:pPr>
-            <a:r>
-              <a:rPr lang="en-GB" sz="1900" dirty="0">
-                <a:sym typeface="Wingdings" panose="05000000000000000000" pitchFamily="2" charset="2"/>
-              </a:rPr>
-              <a:t>variable-length time series</a:t>
-            </a:r>
-          </a:p>
-          <a:p>
-            <a:endParaRPr lang="en-GB" sz="1900" dirty="0">
-              <a:sym typeface="Wingdings" panose="05000000000000000000" pitchFamily="2" charset="2"/>
-            </a:endParaRPr>
-          </a:p>
-          <a:p>
-            <a:pPr marL="342900" indent="-342900">
-              <a:buFont typeface="Arial" panose="020B0604020202020204" pitchFamily="34" charset="0"/>
-              <a:buChar char="•"/>
-            </a:pPr>
-            <a:r>
-              <a:rPr lang="en-GB" sz="1900" dirty="0">
-                <a:sym typeface="Wingdings" panose="05000000000000000000" pitchFamily="2" charset="2"/>
-              </a:rPr>
-              <a:t>multivariate time series model via more input nodes</a:t>
-            </a:r>
-            <a:endParaRPr lang="en-GB" sz="1900" dirty="0"/>
-          </a:p>
-        </p:txBody>
-      </p:sp>
-      <p:sp>
-        <p:nvSpPr>
-          <p:cNvPr id="11" name="TextBox 10">
-            <a:extLst>
-              <a:ext uri="{FF2B5EF4-FFF2-40B4-BE49-F238E27FC236}">
-                <a16:creationId xmlns:a16="http://schemas.microsoft.com/office/drawing/2014/main" id="{D71AC995-78A3-D447-7B45-0E8F0E01EFF6}"/>
-              </a:ext>
-            </a:extLst>
-          </p:cNvPr>
-          <p:cNvSpPr txBox="1"/>
-          <p:nvPr/>
-        </p:nvSpPr>
-        <p:spPr>
-          <a:xfrm>
-            <a:off x="271849" y="1976967"/>
-            <a:ext cx="4041689" cy="4478149"/>
-          </a:xfrm>
-          <a:prstGeom prst="rect">
-            <a:avLst/>
-          </a:prstGeom>
-          <a:noFill/>
-          <a:ln>
-            <a:solidFill>
-              <a:schemeClr val="tx1"/>
-            </a:solidFill>
-          </a:ln>
-        </p:spPr>
-        <p:txBody>
-          <a:bodyPr wrap="square" rtlCol="0">
-            <a:spAutoFit/>
-          </a:bodyPr>
-          <a:lstStyle/>
-          <a:p>
-            <a:r>
-              <a:rPr lang="en-GB" sz="1900" b="1" dirty="0"/>
-              <a:t>convolutional neural networks (CNN)</a:t>
-            </a:r>
-            <a:endParaRPr lang="en-GB" sz="1900" dirty="0"/>
-          </a:p>
-          <a:p>
-            <a:endParaRPr lang="en-GB" sz="1900" dirty="0"/>
-          </a:p>
-          <a:p>
-            <a:pPr marL="342900" indent="-342900">
-              <a:buFont typeface="Arial" panose="020B0604020202020204" pitchFamily="34" charset="0"/>
-              <a:buChar char="•"/>
-            </a:pPr>
-            <a:r>
-              <a:rPr lang="en-GB" sz="1900" dirty="0"/>
-              <a:t>main application computer vision: images correspond to regular 2D grids of data (pixels)</a:t>
-            </a:r>
-          </a:p>
-          <a:p>
-            <a:pPr marL="342900" indent="-342900">
-              <a:buFont typeface="Arial" panose="020B0604020202020204" pitchFamily="34" charset="0"/>
-              <a:buChar char="•"/>
-            </a:pPr>
-            <a:r>
-              <a:rPr lang="en-GB" sz="1900" dirty="0"/>
-              <a:t>time series data as 1D grid at regular time intervals</a:t>
-            </a:r>
-          </a:p>
-          <a:p>
-            <a:endParaRPr lang="en-GB" sz="1900" dirty="0"/>
-          </a:p>
-          <a:p>
-            <a:pPr marL="342900" indent="-342900">
-              <a:buFont typeface="Arial" panose="020B0604020202020204" pitchFamily="34" charset="0"/>
-              <a:buChar char="•"/>
-            </a:pPr>
-            <a:r>
-              <a:rPr lang="en-GB" sz="1900" dirty="0"/>
-              <a:t>parameter sharing via convolutions (and pooling) </a:t>
-            </a:r>
-            <a:r>
-              <a:rPr lang="en-GB" sz="1900" dirty="0">
-                <a:sym typeface="Wingdings" panose="05000000000000000000" pitchFamily="2" charset="2"/>
-              </a:rPr>
-              <a:t> highly regularized feed-forward networks</a:t>
-            </a:r>
-          </a:p>
-          <a:p>
-            <a:pPr marL="342900" indent="-342900">
-              <a:buFont typeface="Arial" panose="020B0604020202020204" pitchFamily="34" charset="0"/>
-              <a:buChar char="•"/>
-            </a:pPr>
-            <a:r>
-              <a:rPr lang="en-GB" sz="1900" dirty="0">
-                <a:sym typeface="Wingdings" panose="05000000000000000000" pitchFamily="2" charset="2"/>
-              </a:rPr>
-              <a:t>fixed time window (kernel)</a:t>
-            </a:r>
-          </a:p>
-          <a:p>
-            <a:endParaRPr lang="en-GB" sz="1900" dirty="0">
-              <a:sym typeface="Wingdings" panose="05000000000000000000" pitchFamily="2" charset="2"/>
-            </a:endParaRPr>
-          </a:p>
-          <a:p>
-            <a:pPr marL="342900" indent="-342900">
-              <a:buFont typeface="Arial" panose="020B0604020202020204" pitchFamily="34" charset="0"/>
-              <a:buChar char="•"/>
-            </a:pPr>
-            <a:r>
-              <a:rPr lang="en-GB" sz="1900" dirty="0">
-                <a:sym typeface="Wingdings" panose="05000000000000000000" pitchFamily="2" charset="2"/>
-              </a:rPr>
-              <a:t>multivariate time series model via different input channels</a:t>
-            </a:r>
-          </a:p>
-        </p:txBody>
-      </p:sp>
-      <p:sp>
-        <p:nvSpPr>
-          <p:cNvPr id="13" name="TextBox 12">
-            <a:extLst>
-              <a:ext uri="{FF2B5EF4-FFF2-40B4-BE49-F238E27FC236}">
-                <a16:creationId xmlns:a16="http://schemas.microsoft.com/office/drawing/2014/main" id="{99433FDA-AB2D-F6F2-2E5E-DDA9C87C6F30}"/>
-              </a:ext>
-            </a:extLst>
-          </p:cNvPr>
-          <p:cNvSpPr txBox="1"/>
-          <p:nvPr/>
-        </p:nvSpPr>
-        <p:spPr>
-          <a:xfrm>
-            <a:off x="334663" y="1360142"/>
-            <a:ext cx="10312567" cy="461665"/>
-          </a:xfrm>
-          <a:prstGeom prst="rect">
-            <a:avLst/>
-          </a:prstGeom>
-          <a:noFill/>
-        </p:spPr>
-        <p:txBody>
-          <a:bodyPr wrap="none" rtlCol="0">
-            <a:spAutoFit/>
-          </a:bodyPr>
-          <a:lstStyle/>
-          <a:p>
-            <a:r>
-              <a:rPr lang="en-GB" sz="2400" dirty="0">
-                <a:sym typeface="Wingdings" panose="05000000000000000000" pitchFamily="2" charset="2"/>
-              </a:rPr>
-              <a:t></a:t>
-            </a:r>
-            <a:r>
-              <a:rPr lang="en-GB" sz="2400" dirty="0"/>
-              <a:t> direct inclusion of auto-correlation in ML model (but beware: mainly spurious)</a:t>
-            </a:r>
-          </a:p>
-        </p:txBody>
-      </p:sp>
-    </p:spTree>
-    <p:extLst>
-      <p:ext uri="{BB962C8B-B14F-4D97-AF65-F5344CB8AC3E}">
-        <p14:creationId xmlns:p14="http://schemas.microsoft.com/office/powerpoint/2010/main" val="3051137826"/>
-      </p:ext>
-    </p:extLst>
-  </p:cSld>
-  <p:clrMapOvr>
-    <a:masterClrMapping/>
-  </p:clrMapOvr>
-</p:sld>
-</file>
-
 <file path=ppt/slides/slide24.xml><?xml version="1.0" encoding="utf-8"?>
 <p:sld xmlns:a="http://schemas.openxmlformats.org/drawingml/2006/main" xmlns:r="http://schemas.openxmlformats.org/officeDocument/2006/relationships" xmlns:p="http://schemas.openxmlformats.org/presentationml/2006/main">
   <p:cSld>
@@ -17115,6 +17648,460 @@
           <p:cNvPr id="2" name="Title 1">
             <a:extLst>
               <a:ext uri="{FF2B5EF4-FFF2-40B4-BE49-F238E27FC236}">
+                <a16:creationId xmlns:a16="http://schemas.microsoft.com/office/drawing/2014/main" id="{4FB81BC9-CDCF-3E8F-3210-9DFA65954746}"/>
+              </a:ext>
+            </a:extLst>
+          </p:cNvPr>
+          <p:cNvSpPr>
+            <a:spLocks noGrp="1"/>
+          </p:cNvSpPr>
+          <p:nvPr>
+            <p:ph type="title"/>
+          </p:nvPr>
+        </p:nvSpPr>
+        <p:spPr/>
+        <p:txBody>
+          <a:bodyPr/>
+          <a:lstStyle/>
+          <a:p>
+            <a:r>
+              <a:rPr lang="en-GB" dirty="0"/>
+              <a:t>Deep Learning Methods for Sequential Data</a:t>
+            </a:r>
+          </a:p>
+        </p:txBody>
+      </p:sp>
+      <p:sp>
+        <p:nvSpPr>
+          <p:cNvPr id="5" name="Slide Number Placeholder 4">
+            <a:extLst>
+              <a:ext uri="{FF2B5EF4-FFF2-40B4-BE49-F238E27FC236}">
+                <a16:creationId xmlns:a16="http://schemas.microsoft.com/office/drawing/2014/main" id="{2436F040-A1E9-A369-E93B-C8B18E924C9A}"/>
+              </a:ext>
+            </a:extLst>
+          </p:cNvPr>
+          <p:cNvSpPr>
+            <a:spLocks noGrp="1"/>
+          </p:cNvSpPr>
+          <p:nvPr>
+            <p:ph type="sldNum" sz="quarter" idx="12"/>
+          </p:nvPr>
+        </p:nvSpPr>
+        <p:spPr/>
+        <p:txBody>
+          <a:bodyPr/>
+          <a:lstStyle/>
+          <a:p>
+            <a:fld id="{ADDEFC8A-584C-5E41-A633-418C2FB73F75}" type="slidenum">
+              <a:rPr lang="en-DE" smtClean="0"/>
+              <a:t>24</a:t>
+            </a:fld>
+            <a:endParaRPr lang="en-DE"/>
+          </a:p>
+        </p:txBody>
+      </p:sp>
+      <p:sp>
+        <p:nvSpPr>
+          <p:cNvPr id="9" name="TextBox 8">
+            <a:extLst>
+              <a:ext uri="{FF2B5EF4-FFF2-40B4-BE49-F238E27FC236}">
+                <a16:creationId xmlns:a16="http://schemas.microsoft.com/office/drawing/2014/main" id="{25E51E5F-025A-3326-6DE3-E7A276DD1EEA}"/>
+              </a:ext>
+            </a:extLst>
+          </p:cNvPr>
+          <p:cNvSpPr txBox="1"/>
+          <p:nvPr/>
+        </p:nvSpPr>
+        <p:spPr>
+          <a:xfrm>
+            <a:off x="8358316" y="1965066"/>
+            <a:ext cx="3561835" cy="4478149"/>
+          </a:xfrm>
+          <a:prstGeom prst="rect">
+            <a:avLst/>
+          </a:prstGeom>
+          <a:noFill/>
+          <a:ln>
+            <a:solidFill>
+              <a:schemeClr val="tx1"/>
+            </a:solidFill>
+          </a:ln>
+        </p:spPr>
+        <p:txBody>
+          <a:bodyPr wrap="square" rtlCol="0">
+            <a:spAutoFit/>
+          </a:bodyPr>
+          <a:lstStyle/>
+          <a:p>
+            <a:r>
+              <a:rPr lang="en-GB" sz="1900" b="1" dirty="0"/>
+              <a:t>transformers</a:t>
+            </a:r>
+            <a:endParaRPr lang="en-GB" sz="1900" dirty="0"/>
+          </a:p>
+          <a:p>
+            <a:endParaRPr lang="en-GB" sz="1900" dirty="0"/>
+          </a:p>
+          <a:p>
+            <a:pPr marL="342900" indent="-342900">
+              <a:buFont typeface="Arial" panose="020B0604020202020204" pitchFamily="34" charset="0"/>
+              <a:buChar char="•"/>
+            </a:pPr>
+            <a:r>
+              <a:rPr lang="en-GB" sz="1900" dirty="0"/>
+              <a:t>main application NLP (largely replaced RNNs), but also computer vision</a:t>
+            </a:r>
+          </a:p>
+          <a:p>
+            <a:pPr marL="342900" indent="-342900">
+              <a:buFont typeface="Arial" panose="020B0604020202020204" pitchFamily="34" charset="0"/>
+              <a:buChar char="•"/>
+            </a:pPr>
+            <a:r>
+              <a:rPr lang="en-GB" sz="1900" dirty="0"/>
+              <a:t>time series data as directed graph (attention in edges)</a:t>
+            </a:r>
+          </a:p>
+          <a:p>
+            <a:endParaRPr lang="en-GB" sz="1900" dirty="0"/>
+          </a:p>
+          <a:p>
+            <a:pPr marL="342900" indent="-342900">
+              <a:buFont typeface="Arial" panose="020B0604020202020204" pitchFamily="34" charset="0"/>
+              <a:buChar char="•"/>
+            </a:pPr>
+            <a:r>
+              <a:rPr lang="en-GB" sz="1900" dirty="0"/>
+              <a:t>masked self-attention to focus on relevant past time steps</a:t>
+            </a:r>
+            <a:r>
+              <a:rPr lang="en-GB" sz="1900" dirty="0">
+                <a:sym typeface="Wingdings" panose="05000000000000000000" pitchFamily="2" charset="2"/>
+              </a:rPr>
+              <a:t> and positional encoding to include order of sequence</a:t>
+            </a:r>
+          </a:p>
+          <a:p>
+            <a:endParaRPr lang="en-GB" sz="1900" dirty="0">
+              <a:sym typeface="Wingdings" panose="05000000000000000000" pitchFamily="2" charset="2"/>
+            </a:endParaRPr>
+          </a:p>
+          <a:p>
+            <a:pPr marL="342900" indent="-342900">
+              <a:buFont typeface="Arial" panose="020B0604020202020204" pitchFamily="34" charset="0"/>
+              <a:buChar char="•"/>
+            </a:pPr>
+            <a:r>
+              <a:rPr lang="en-GB" sz="1900" dirty="0">
+                <a:sym typeface="Wingdings" panose="05000000000000000000" pitchFamily="2" charset="2"/>
+              </a:rPr>
+              <a:t>multivariate time series model via input concatenation</a:t>
+            </a:r>
+            <a:endParaRPr lang="en-GB" sz="1900" dirty="0"/>
+          </a:p>
+        </p:txBody>
+      </p:sp>
+      <p:sp>
+        <p:nvSpPr>
+          <p:cNvPr id="10" name="TextBox 9">
+            <a:extLst>
+              <a:ext uri="{FF2B5EF4-FFF2-40B4-BE49-F238E27FC236}">
+                <a16:creationId xmlns:a16="http://schemas.microsoft.com/office/drawing/2014/main" id="{CFD38641-0DF2-4E7C-77AC-134BE72DA495}"/>
+              </a:ext>
+            </a:extLst>
+          </p:cNvPr>
+          <p:cNvSpPr txBox="1"/>
+          <p:nvPr/>
+        </p:nvSpPr>
+        <p:spPr>
+          <a:xfrm>
+            <a:off x="4514335" y="1964947"/>
+            <a:ext cx="3643184" cy="4478149"/>
+          </a:xfrm>
+          <a:prstGeom prst="rect">
+            <a:avLst/>
+          </a:prstGeom>
+          <a:noFill/>
+          <a:ln>
+            <a:solidFill>
+              <a:schemeClr val="tx1"/>
+            </a:solidFill>
+          </a:ln>
+        </p:spPr>
+        <p:txBody>
+          <a:bodyPr wrap="square" rtlCol="0">
+            <a:spAutoFit/>
+          </a:bodyPr>
+          <a:lstStyle/>
+          <a:p>
+            <a:r>
+              <a:rPr lang="en-GB" sz="1900" b="1" dirty="0"/>
+              <a:t>recurrent neural networks (RNN)</a:t>
+            </a:r>
+            <a:endParaRPr lang="en-GB" sz="1900" dirty="0"/>
+          </a:p>
+          <a:p>
+            <a:endParaRPr lang="en-GB" sz="1900" dirty="0"/>
+          </a:p>
+          <a:p>
+            <a:pPr marL="342900" indent="-342900">
+              <a:buFont typeface="Arial" panose="020B0604020202020204" pitchFamily="34" charset="0"/>
+              <a:buChar char="•"/>
+            </a:pPr>
+            <a:r>
+              <a:rPr lang="en-GB" sz="1900" dirty="0"/>
+              <a:t>main application natural language processing (NLP): sequence of words (tokens)</a:t>
+            </a:r>
+          </a:p>
+          <a:p>
+            <a:pPr marL="342900" indent="-342900">
+              <a:buFont typeface="Arial" panose="020B0604020202020204" pitchFamily="34" charset="0"/>
+              <a:buChar char="•"/>
+            </a:pPr>
+            <a:r>
+              <a:rPr lang="en-GB" sz="1900" dirty="0"/>
+              <a:t>time series data as time-tagged stream</a:t>
+            </a:r>
+          </a:p>
+          <a:p>
+            <a:endParaRPr lang="en-GB" sz="1900" dirty="0"/>
+          </a:p>
+          <a:p>
+            <a:pPr marL="342900" indent="-342900">
+              <a:buFont typeface="Arial" panose="020B0604020202020204" pitchFamily="34" charset="0"/>
+              <a:buChar char="•"/>
+            </a:pPr>
+            <a:r>
+              <a:rPr lang="en-GB" sz="1900" dirty="0"/>
+              <a:t>parameter sharing via recurrent nodes </a:t>
+            </a:r>
+            <a:r>
+              <a:rPr lang="en-GB" sz="1900" dirty="0">
+                <a:sym typeface="Wingdings" panose="05000000000000000000" pitchFamily="2" charset="2"/>
+              </a:rPr>
+              <a:t> context-awareness (input from past activations)</a:t>
+            </a:r>
+          </a:p>
+          <a:p>
+            <a:pPr marL="342900" indent="-342900">
+              <a:buFont typeface="Arial" panose="020B0604020202020204" pitchFamily="34" charset="0"/>
+              <a:buChar char="•"/>
+            </a:pPr>
+            <a:r>
+              <a:rPr lang="en-GB" sz="1900" dirty="0">
+                <a:sym typeface="Wingdings" panose="05000000000000000000" pitchFamily="2" charset="2"/>
+              </a:rPr>
+              <a:t>variable-length time series</a:t>
+            </a:r>
+          </a:p>
+          <a:p>
+            <a:endParaRPr lang="en-GB" sz="1900" dirty="0">
+              <a:sym typeface="Wingdings" panose="05000000000000000000" pitchFamily="2" charset="2"/>
+            </a:endParaRPr>
+          </a:p>
+          <a:p>
+            <a:pPr marL="342900" indent="-342900">
+              <a:buFont typeface="Arial" panose="020B0604020202020204" pitchFamily="34" charset="0"/>
+              <a:buChar char="•"/>
+            </a:pPr>
+            <a:r>
+              <a:rPr lang="en-GB" sz="1900" dirty="0">
+                <a:sym typeface="Wingdings" panose="05000000000000000000" pitchFamily="2" charset="2"/>
+              </a:rPr>
+              <a:t>multivariate time series model via more input nodes</a:t>
+            </a:r>
+            <a:endParaRPr lang="en-GB" sz="1900" dirty="0"/>
+          </a:p>
+        </p:txBody>
+      </p:sp>
+      <p:sp>
+        <p:nvSpPr>
+          <p:cNvPr id="11" name="TextBox 10">
+            <a:extLst>
+              <a:ext uri="{FF2B5EF4-FFF2-40B4-BE49-F238E27FC236}">
+                <a16:creationId xmlns:a16="http://schemas.microsoft.com/office/drawing/2014/main" id="{D71AC995-78A3-D447-7B45-0E8F0E01EFF6}"/>
+              </a:ext>
+            </a:extLst>
+          </p:cNvPr>
+          <p:cNvSpPr txBox="1"/>
+          <p:nvPr/>
+        </p:nvSpPr>
+        <p:spPr>
+          <a:xfrm>
+            <a:off x="271849" y="1976967"/>
+            <a:ext cx="4041689" cy="4478149"/>
+          </a:xfrm>
+          <a:prstGeom prst="rect">
+            <a:avLst/>
+          </a:prstGeom>
+          <a:noFill/>
+          <a:ln>
+            <a:solidFill>
+              <a:schemeClr val="tx1"/>
+            </a:solidFill>
+          </a:ln>
+        </p:spPr>
+        <p:txBody>
+          <a:bodyPr wrap="square" rtlCol="0">
+            <a:spAutoFit/>
+          </a:bodyPr>
+          <a:lstStyle/>
+          <a:p>
+            <a:r>
+              <a:rPr lang="en-GB" sz="1900" b="1" dirty="0"/>
+              <a:t>convolutional neural networks (CNN)</a:t>
+            </a:r>
+            <a:endParaRPr lang="en-GB" sz="1900" dirty="0"/>
+          </a:p>
+          <a:p>
+            <a:endParaRPr lang="en-GB" sz="1900" dirty="0"/>
+          </a:p>
+          <a:p>
+            <a:pPr marL="342900" indent="-342900">
+              <a:buFont typeface="Arial" panose="020B0604020202020204" pitchFamily="34" charset="0"/>
+              <a:buChar char="•"/>
+            </a:pPr>
+            <a:r>
+              <a:rPr lang="en-GB" sz="1900" dirty="0"/>
+              <a:t>main application computer vision: images correspond to regular 2D grids of data (pixels)</a:t>
+            </a:r>
+          </a:p>
+          <a:p>
+            <a:pPr marL="342900" indent="-342900">
+              <a:buFont typeface="Arial" panose="020B0604020202020204" pitchFamily="34" charset="0"/>
+              <a:buChar char="•"/>
+            </a:pPr>
+            <a:r>
+              <a:rPr lang="en-GB" sz="1900" dirty="0"/>
+              <a:t>time series data as 1D grid at regular time intervals</a:t>
+            </a:r>
+          </a:p>
+          <a:p>
+            <a:endParaRPr lang="en-GB" sz="1900" dirty="0"/>
+          </a:p>
+          <a:p>
+            <a:pPr marL="342900" indent="-342900">
+              <a:buFont typeface="Arial" panose="020B0604020202020204" pitchFamily="34" charset="0"/>
+              <a:buChar char="•"/>
+            </a:pPr>
+            <a:r>
+              <a:rPr lang="en-GB" sz="1900" dirty="0"/>
+              <a:t>parameter sharing via convolutions (and pooling) </a:t>
+            </a:r>
+            <a:r>
+              <a:rPr lang="en-GB" sz="1900" dirty="0">
+                <a:sym typeface="Wingdings" panose="05000000000000000000" pitchFamily="2" charset="2"/>
+              </a:rPr>
+              <a:t> highly regularized feed-forward networks</a:t>
+            </a:r>
+          </a:p>
+          <a:p>
+            <a:pPr marL="342900" indent="-342900">
+              <a:buFont typeface="Arial" panose="020B0604020202020204" pitchFamily="34" charset="0"/>
+              <a:buChar char="•"/>
+            </a:pPr>
+            <a:r>
+              <a:rPr lang="en-GB" sz="1900" dirty="0">
+                <a:sym typeface="Wingdings" panose="05000000000000000000" pitchFamily="2" charset="2"/>
+              </a:rPr>
+              <a:t>fixed time window (kernel)</a:t>
+            </a:r>
+          </a:p>
+          <a:p>
+            <a:endParaRPr lang="en-GB" sz="1900" dirty="0">
+              <a:sym typeface="Wingdings" panose="05000000000000000000" pitchFamily="2" charset="2"/>
+            </a:endParaRPr>
+          </a:p>
+          <a:p>
+            <a:pPr marL="342900" indent="-342900">
+              <a:buFont typeface="Arial" panose="020B0604020202020204" pitchFamily="34" charset="0"/>
+              <a:buChar char="•"/>
+            </a:pPr>
+            <a:r>
+              <a:rPr lang="en-GB" sz="1900" dirty="0">
+                <a:sym typeface="Wingdings" panose="05000000000000000000" pitchFamily="2" charset="2"/>
+              </a:rPr>
+              <a:t>multivariate time series model via different input channels</a:t>
+            </a:r>
+          </a:p>
+        </p:txBody>
+      </p:sp>
+      <p:sp>
+        <p:nvSpPr>
+          <p:cNvPr id="13" name="TextBox 12">
+            <a:extLst>
+              <a:ext uri="{FF2B5EF4-FFF2-40B4-BE49-F238E27FC236}">
+                <a16:creationId xmlns:a16="http://schemas.microsoft.com/office/drawing/2014/main" id="{99433FDA-AB2D-F6F2-2E5E-DDA9C87C6F30}"/>
+              </a:ext>
+            </a:extLst>
+          </p:cNvPr>
+          <p:cNvSpPr txBox="1"/>
+          <p:nvPr/>
+        </p:nvSpPr>
+        <p:spPr>
+          <a:xfrm>
+            <a:off x="334663" y="1360142"/>
+            <a:ext cx="10312567" cy="461665"/>
+          </a:xfrm>
+          <a:prstGeom prst="rect">
+            <a:avLst/>
+          </a:prstGeom>
+          <a:noFill/>
+        </p:spPr>
+        <p:txBody>
+          <a:bodyPr wrap="none" rtlCol="0">
+            <a:spAutoFit/>
+          </a:bodyPr>
+          <a:lstStyle/>
+          <a:p>
+            <a:r>
+              <a:rPr lang="en-GB" sz="2400" dirty="0">
+                <a:sym typeface="Wingdings" panose="05000000000000000000" pitchFamily="2" charset="2"/>
+              </a:rPr>
+              <a:t></a:t>
+            </a:r>
+            <a:r>
+              <a:rPr lang="en-GB" sz="2400" dirty="0"/>
+              <a:t> direct inclusion of auto-correlation in ML model (but beware: mainly spurious)</a:t>
+            </a:r>
+          </a:p>
+        </p:txBody>
+      </p:sp>
+    </p:spTree>
+    <p:extLst>
+      <p:ext uri="{BB962C8B-B14F-4D97-AF65-F5344CB8AC3E}">
+        <p14:creationId xmlns:p14="http://schemas.microsoft.com/office/powerpoint/2010/main" val="3051137826"/>
+      </p:ext>
+    </p:extLst>
+  </p:cSld>
+  <p:clrMapOvr>
+    <a:masterClrMapping/>
+  </p:clrMapOvr>
+</p:sld>
+</file>
+
+<file path=ppt/slides/slide25.xml><?xml version="1.0" encoding="utf-8"?>
+<p:sld xmlns:a="http://schemas.openxmlformats.org/drawingml/2006/main" xmlns:r="http://schemas.openxmlformats.org/officeDocument/2006/relationships" xmlns:p="http://schemas.openxmlformats.org/presentationml/2006/main">
+  <p:cSld>
+    <p:spTree>
+      <p:nvGrpSpPr>
+        <p:cNvPr id="1" name=""/>
+        <p:cNvGrpSpPr/>
+        <p:nvPr/>
+      </p:nvGrpSpPr>
+      <p:grpSpPr>
+        <a:xfrm>
+          <a:off x="0" y="0"/>
+          <a:ext cx="0" cy="0"/>
+          <a:chOff x="0" y="0"/>
+          <a:chExt cx="0" cy="0"/>
+        </a:xfrm>
+      </p:grpSpPr>
+      <p:sp>
+        <p:nvSpPr>
+          <p:cNvPr id="2" name="Title 1">
+            <a:extLst>
+              <a:ext uri="{FF2B5EF4-FFF2-40B4-BE49-F238E27FC236}">
                 <a16:creationId xmlns:a16="http://schemas.microsoft.com/office/drawing/2014/main" id="{E7782324-CE57-4CE6-FEF9-50E74735010C}"/>
               </a:ext>
             </a:extLst>
@@ -17279,7 +18266,7 @@
           <a:p>
             <a:fld id="{60A26886-2117-0949-B8A5-D47461AC229C}" type="slidenum">
               <a:rPr lang="en-DE" smtClean="0"/>
-              <a:t>24</a:t>
+              <a:t>25</a:t>
             </a:fld>
             <a:endParaRPr lang="en-DE"/>
           </a:p>
@@ -17368,7 +18355,7 @@
 </p:sld>
 </file>
 
-<file path=ppt/slides/slide25.xml><?xml version="1.0" encoding="utf-8"?>
+<file path=ppt/slides/slide26.xml><?xml version="1.0" encoding="utf-8"?>
 <p:sld xmlns:a="http://schemas.openxmlformats.org/drawingml/2006/main" xmlns:r="http://schemas.openxmlformats.org/officeDocument/2006/relationships" xmlns:p="http://schemas.openxmlformats.org/presentationml/2006/main">
   <p:cSld>
     <p:spTree>
@@ -18206,7 +19193,7 @@
           <a:p>
             <a:fld id="{290AF890-0265-4349-BF13-E30F01A2AA85}" type="slidenum">
               <a:rPr lang="en-DE" smtClean="0"/>
-              <a:t>25</a:t>
+              <a:t>26</a:t>
             </a:fld>
             <a:endParaRPr lang="en-DE" dirty="0"/>
           </a:p>
@@ -18237,89 +19224,6 @@
 </p:sld>
 </file>
 
-<file path=ppt/slides/slide26.xml><?xml version="1.0" encoding="utf-8"?>
-<p:sld xmlns:a="http://schemas.openxmlformats.org/drawingml/2006/main" xmlns:r="http://schemas.openxmlformats.org/officeDocument/2006/relationships" xmlns:p="http://schemas.openxmlformats.org/presentationml/2006/main">
-  <p:cSld>
-    <p:spTree>
-      <p:nvGrpSpPr>
-        <p:cNvPr id="1" name=""/>
-        <p:cNvGrpSpPr/>
-        <p:nvPr/>
-      </p:nvGrpSpPr>
-      <p:grpSpPr>
-        <a:xfrm>
-          <a:off x="0" y="0"/>
-          <a:ext cx="0" cy="0"/>
-          <a:chOff x="0" y="0"/>
-          <a:chExt cx="0" cy="0"/>
-        </a:xfrm>
-      </p:grpSpPr>
-      <p:sp>
-        <p:nvSpPr>
-          <p:cNvPr id="2" name="Titel 1">
-            <a:extLst>
-              <a:ext uri="{FF2B5EF4-FFF2-40B4-BE49-F238E27FC236}">
-                <a16:creationId xmlns:a16="http://schemas.microsoft.com/office/drawing/2014/main" id="{68FA7B5C-0B9D-9D41-A773-244A0E8234C6}"/>
-              </a:ext>
-            </a:extLst>
-          </p:cNvPr>
-          <p:cNvSpPr>
-            <a:spLocks noGrp="1"/>
-          </p:cNvSpPr>
-          <p:nvPr>
-            <p:ph type="title"/>
-          </p:nvPr>
-        </p:nvSpPr>
-        <p:spPr/>
-        <p:txBody>
-          <a:bodyPr/>
-          <a:lstStyle/>
-          <a:p>
-            <a:r>
-              <a:rPr lang="de-DE" dirty="0"/>
-              <a:t>Train/Test Splits in Time</a:t>
-            </a:r>
-          </a:p>
-        </p:txBody>
-      </p:sp>
-      <p:sp>
-        <p:nvSpPr>
-          <p:cNvPr id="3" name="Inhaltsplatzhalter 2">
-            <a:extLst>
-              <a:ext uri="{FF2B5EF4-FFF2-40B4-BE49-F238E27FC236}">
-                <a16:creationId xmlns:a16="http://schemas.microsoft.com/office/drawing/2014/main" id="{B86779A8-933F-8035-2A8F-A48538EAB7B0}"/>
-              </a:ext>
-            </a:extLst>
-          </p:cNvPr>
-          <p:cNvSpPr>
-            <a:spLocks noGrp="1"/>
-          </p:cNvSpPr>
-          <p:nvPr>
-            <p:ph idx="1"/>
-          </p:nvPr>
-        </p:nvSpPr>
-        <p:spPr/>
-        <p:txBody>
-          <a:bodyPr/>
-          <a:lstStyle/>
-          <a:p>
-            <a:endParaRPr lang="de-DE"/>
-          </a:p>
-        </p:txBody>
-      </p:sp>
-    </p:spTree>
-    <p:extLst>
-      <p:ext uri="{BB962C8B-B14F-4D97-AF65-F5344CB8AC3E}">
-        <p14:creationId xmlns:p14="http://schemas.microsoft.com/office/powerpoint/2010/main" val="556644343"/>
-      </p:ext>
-    </p:extLst>
-  </p:cSld>
-  <p:clrMapOvr>
-    <a:masterClrMapping/>
-  </p:clrMapOvr>
-</p:sld>
-</file>
-
 <file path=ppt/slides/slide27.xml><?xml version="1.0" encoding="utf-8"?>
 <p:sld xmlns:a="http://schemas.openxmlformats.org/drawingml/2006/main" xmlns:r="http://schemas.openxmlformats.org/officeDocument/2006/relationships" xmlns:p="http://schemas.openxmlformats.org/presentationml/2006/main">
   <p:cSld>
@@ -18339,10 +19243,10 @@
       </p:grpSpPr>
       <p:sp>
         <p:nvSpPr>
-          <p:cNvPr id="2" name="Title 1">
-            <a:extLst>
-              <a:ext uri="{FF2B5EF4-FFF2-40B4-BE49-F238E27FC236}">
-                <a16:creationId xmlns:a16="http://schemas.microsoft.com/office/drawing/2014/main" id="{FAF00118-42C4-0F41-5612-17227D0CB322}"/>
+          <p:cNvPr id="2" name="Titel 1">
+            <a:extLst>
+              <a:ext uri="{FF2B5EF4-FFF2-40B4-BE49-F238E27FC236}">
+                <a16:creationId xmlns:a16="http://schemas.microsoft.com/office/drawing/2014/main" id="{68FA7B5C-0B9D-9D41-A773-244A0E8234C6}"/>
               </a:ext>
             </a:extLst>
           </p:cNvPr>
@@ -18359,30 +19263,26 @@
           <a:lstStyle/>
           <a:p>
             <a:r>
-              <a:rPr lang="en-GB" dirty="0"/>
-              <a:t>Model </a:t>
-            </a:r>
-            <a:r>
-              <a:rPr lang="en-DE" dirty="0"/>
-              <a:t>Evaluation</a:t>
-            </a:r>
-          </a:p>
-        </p:txBody>
-      </p:sp>
-      <p:sp>
-        <p:nvSpPr>
-          <p:cNvPr id="4" name="Slide Number Placeholder 3">
-            <a:extLst>
-              <a:ext uri="{FF2B5EF4-FFF2-40B4-BE49-F238E27FC236}">
-                <a16:creationId xmlns:a16="http://schemas.microsoft.com/office/drawing/2014/main" id="{64ED337D-9FEE-AC0F-54C9-AE8B1187FB21}"/>
-              </a:ext>
-            </a:extLst>
-          </p:cNvPr>
-          <p:cNvSpPr>
-            <a:spLocks noGrp="1"/>
-          </p:cNvSpPr>
-          <p:nvPr>
-            <p:ph type="sldNum" sz="quarter" idx="12"/>
+              <a:rPr lang="de-DE" dirty="0"/>
+              <a:t>Train/Test Splits in Time</a:t>
+            </a:r>
+          </a:p>
+        </p:txBody>
+      </p:sp>
+      <p:sp>
+        <p:nvSpPr>
+          <p:cNvPr id="3" name="Inhaltsplatzhalter 2">
+            <a:extLst>
+              <a:ext uri="{FF2B5EF4-FFF2-40B4-BE49-F238E27FC236}">
+                <a16:creationId xmlns:a16="http://schemas.microsoft.com/office/drawing/2014/main" id="{B86779A8-933F-8035-2A8F-A48538EAB7B0}"/>
+              </a:ext>
+            </a:extLst>
+          </p:cNvPr>
+          <p:cNvSpPr>
+            <a:spLocks noGrp="1"/>
+          </p:cNvSpPr>
+          <p:nvPr>
+            <p:ph idx="1"/>
           </p:nvPr>
         </p:nvSpPr>
         <p:spPr/>
@@ -18390,20 +19290,19 @@
           <a:bodyPr/>
           <a:lstStyle/>
           <a:p>
-            <a:fld id="{ADDEFC8A-584C-5E41-A633-418C2FB73F75}" type="slidenum">
-              <a:rPr lang="en-DE" smtClean="0"/>
-              <a:t>27</a:t>
-            </a:fld>
-            <a:endParaRPr lang="en-DE" dirty="0"/>
+            <a:r>
+              <a:rPr lang="de-DE" dirty="0"/>
+              <a:t>…</a:t>
+            </a:r>
           </a:p>
         </p:txBody>
       </p:sp>
       <p:pic>
         <p:nvPicPr>
-          <p:cNvPr id="5" name="Picture 4">
-            <a:extLst>
-              <a:ext uri="{FF2B5EF4-FFF2-40B4-BE49-F238E27FC236}">
-                <a16:creationId xmlns:a16="http://schemas.microsoft.com/office/drawing/2014/main" id="{8B505B5F-123A-B6E0-3607-60D3F212C56A}"/>
+          <p:cNvPr id="4" name="Picture 4">
+            <a:extLst>
+              <a:ext uri="{FF2B5EF4-FFF2-40B4-BE49-F238E27FC236}">
+                <a16:creationId xmlns:a16="http://schemas.microsoft.com/office/drawing/2014/main" id="{068E60E8-3E54-D30A-7FAC-277896269E60}"/>
               </a:ext>
             </a:extLst>
           </p:cNvPr>
@@ -18426,7 +19325,7 @@
         </p:blipFill>
         <p:spPr>
           <a:xfrm>
-            <a:off x="3885321" y="1939887"/>
+            <a:off x="3553918" y="2896818"/>
             <a:ext cx="7195226" cy="1749037"/>
           </a:xfrm>
           <a:prstGeom prst="rect">
@@ -18436,10 +19335,10 @@
       </p:pic>
       <p:sp>
         <p:nvSpPr>
-          <p:cNvPr id="7" name="TextBox 6">
-            <a:extLst>
-              <a:ext uri="{FF2B5EF4-FFF2-40B4-BE49-F238E27FC236}">
-                <a16:creationId xmlns:a16="http://schemas.microsoft.com/office/drawing/2014/main" id="{3914D98B-D2BF-EE2C-D3A8-8BC1BF95243B}"/>
+          <p:cNvPr id="5" name="TextBox 6">
+            <a:extLst>
+              <a:ext uri="{FF2B5EF4-FFF2-40B4-BE49-F238E27FC236}">
+                <a16:creationId xmlns:a16="http://schemas.microsoft.com/office/drawing/2014/main" id="{D574E0FD-C2D8-C304-4096-F91C5CBB84BC}"/>
               </a:ext>
             </a:extLst>
           </p:cNvPr>
@@ -18448,7 +19347,7 @@
         </p:nvSpPr>
         <p:spPr>
           <a:xfrm>
-            <a:off x="1169603" y="2598961"/>
+            <a:off x="838200" y="3555892"/>
             <a:ext cx="2479759" cy="430887"/>
           </a:xfrm>
           <a:prstGeom prst="rect">
@@ -18507,393 +19406,10 @@
           </a:p>
         </p:txBody>
       </p:sp>
-      <p:sp>
-        <p:nvSpPr>
-          <p:cNvPr id="9" name="TextBox 8">
-            <a:extLst>
-              <a:ext uri="{FF2B5EF4-FFF2-40B4-BE49-F238E27FC236}">
-                <a16:creationId xmlns:a16="http://schemas.microsoft.com/office/drawing/2014/main" id="{43BCBC49-ACFE-2FE2-4091-937FD9A6CF1F}"/>
-              </a:ext>
-            </a:extLst>
-          </p:cNvPr>
-          <p:cNvSpPr txBox="1"/>
-          <p:nvPr/>
-        </p:nvSpPr>
-        <p:spPr>
-          <a:xfrm>
-            <a:off x="838200" y="3826258"/>
-            <a:ext cx="10528044" cy="369332"/>
-          </a:xfrm>
-          <a:prstGeom prst="rect">
-            <a:avLst/>
-          </a:prstGeom>
-          <a:noFill/>
-        </p:spPr>
-        <p:txBody>
-          <a:bodyPr wrap="square" rtlCol="0">
-            <a:spAutoFit/>
-          </a:bodyPr>
-          <a:lstStyle/>
-          <a:p>
-            <a:pPr marL="4762" lvl="1" indent="0">
-              <a:buNone/>
-            </a:pPr>
-            <a:r>
-              <a:rPr lang="en-GB" dirty="0"/>
-              <a:t>decide on acceptance of model changes by accuracy measure: improved model vs baseline (current best)</a:t>
-            </a:r>
-          </a:p>
-        </p:txBody>
-      </p:sp>
-      <p:sp>
-        <p:nvSpPr>
-          <p:cNvPr id="10" name="TextBox 9">
-            <a:extLst>
-              <a:ext uri="{FF2B5EF4-FFF2-40B4-BE49-F238E27FC236}">
-                <a16:creationId xmlns:a16="http://schemas.microsoft.com/office/drawing/2014/main" id="{C4A685AE-B3DA-A7CC-132F-46CB4DFB28F0}"/>
-              </a:ext>
-            </a:extLst>
-          </p:cNvPr>
-          <p:cNvSpPr txBox="1"/>
-          <p:nvPr/>
-        </p:nvSpPr>
-        <p:spPr>
-          <a:xfrm>
-            <a:off x="3489057" y="1488843"/>
-            <a:ext cx="4974436" cy="369332"/>
-          </a:xfrm>
-          <a:prstGeom prst="rect">
-            <a:avLst/>
-          </a:prstGeom>
-          <a:solidFill>
-            <a:schemeClr val="accent3">
-              <a:lumMod val="40000"/>
-              <a:lumOff val="60000"/>
-            </a:schemeClr>
-          </a:solidFill>
-        </p:spPr>
-        <p:txBody>
-          <a:bodyPr wrap="square" rtlCol="0">
-            <a:spAutoFit/>
-          </a:bodyPr>
-          <a:lstStyle/>
-          <a:p>
-            <a:pPr algn="ctr"/>
-            <a:r>
-              <a:rPr lang="en-GB" b="1" dirty="0"/>
-              <a:t>test structure</a:t>
-            </a:r>
-          </a:p>
-        </p:txBody>
-      </p:sp>
-      <p:sp>
-        <p:nvSpPr>
-          <p:cNvPr id="11" name="TextBox 10">
-            <a:extLst>
-              <a:ext uri="{FF2B5EF4-FFF2-40B4-BE49-F238E27FC236}">
-                <a16:creationId xmlns:a16="http://schemas.microsoft.com/office/drawing/2014/main" id="{510F9C11-CB62-8F16-CDA5-1744902446D3}"/>
-              </a:ext>
-            </a:extLst>
-          </p:cNvPr>
-          <p:cNvSpPr txBox="1"/>
-          <p:nvPr/>
-        </p:nvSpPr>
-        <p:spPr>
-          <a:xfrm>
-            <a:off x="3489057" y="4478863"/>
-            <a:ext cx="4974436" cy="646331"/>
-          </a:xfrm>
-          <a:prstGeom prst="rect">
-            <a:avLst/>
-          </a:prstGeom>
-          <a:solidFill>
-            <a:schemeClr val="accent3">
-              <a:lumMod val="40000"/>
-              <a:lumOff val="60000"/>
-            </a:schemeClr>
-          </a:solidFill>
-        </p:spPr>
-        <p:txBody>
-          <a:bodyPr wrap="square" rtlCol="0">
-            <a:spAutoFit/>
-          </a:bodyPr>
-          <a:lstStyle/>
-          <a:p>
-            <a:pPr algn="ctr"/>
-            <a:r>
-              <a:rPr lang="en-GB" b="1" dirty="0"/>
-              <a:t>measure (out-of-sample) accuracy of predictions</a:t>
-            </a:r>
-            <a:r>
-              <a:rPr lang="en-GB" dirty="0"/>
-              <a:t> (loss function in training as proxy of this)</a:t>
-            </a:r>
-            <a:endParaRPr lang="en-GB" b="1" dirty="0"/>
-          </a:p>
-        </p:txBody>
-      </p:sp>
-      <p:sp>
-        <p:nvSpPr>
-          <p:cNvPr id="12" name="TextBox 11">
-            <a:extLst>
-              <a:ext uri="{FF2B5EF4-FFF2-40B4-BE49-F238E27FC236}">
-                <a16:creationId xmlns:a16="http://schemas.microsoft.com/office/drawing/2014/main" id="{BF62E2C6-C6E5-60CB-D782-46F1EFDBAC78}"/>
-              </a:ext>
-            </a:extLst>
-          </p:cNvPr>
-          <p:cNvSpPr txBox="1"/>
-          <p:nvPr/>
-        </p:nvSpPr>
-        <p:spPr>
-          <a:xfrm>
-            <a:off x="1111905" y="4989042"/>
-            <a:ext cx="2595154" cy="369332"/>
-          </a:xfrm>
-          <a:prstGeom prst="rect">
-            <a:avLst/>
-          </a:prstGeom>
-          <a:noFill/>
-        </p:spPr>
-        <p:txBody>
-          <a:bodyPr wrap="square" rtlCol="0">
-            <a:spAutoFit/>
-          </a:bodyPr>
-          <a:lstStyle/>
-          <a:p>
-            <a:pPr algn="ctr"/>
-            <a:r>
-              <a:rPr lang="en-US" b="1" dirty="0">
-                <a:solidFill>
-                  <a:schemeClr val="accent1">
-                    <a:lumMod val="50000"/>
-                  </a:schemeClr>
-                </a:solidFill>
-                <a:latin typeface="AccordAlternate" panose="02000000000000000000" pitchFamily="50" charset="0"/>
-              </a:rPr>
-              <a:t>regression</a:t>
-            </a:r>
-          </a:p>
-        </p:txBody>
-      </p:sp>
-      <p:sp>
-        <p:nvSpPr>
-          <p:cNvPr id="13" name="TextBox 12">
-            <a:extLst>
-              <a:ext uri="{FF2B5EF4-FFF2-40B4-BE49-F238E27FC236}">
-                <a16:creationId xmlns:a16="http://schemas.microsoft.com/office/drawing/2014/main" id="{01176C67-3349-8F90-0C9E-4FE4F29243E0}"/>
-              </a:ext>
-            </a:extLst>
-          </p:cNvPr>
-          <p:cNvSpPr txBox="1"/>
-          <p:nvPr/>
-        </p:nvSpPr>
-        <p:spPr>
-          <a:xfrm>
-            <a:off x="838199" y="5536895"/>
-            <a:ext cx="7037174" cy="646331"/>
-          </a:xfrm>
-          <a:prstGeom prst="rect">
-            <a:avLst/>
-          </a:prstGeom>
-          <a:noFill/>
-        </p:spPr>
-        <p:txBody>
-          <a:bodyPr wrap="square" rtlCol="0">
-            <a:spAutoFit/>
-          </a:bodyPr>
-          <a:lstStyle/>
-          <a:p>
-            <a:pPr marL="339725" indent="-287338">
-              <a:buFont typeface="Arial" panose="020B0604020202020204" pitchFamily="34" charset="0"/>
-              <a:buChar char="•"/>
-              <a:tabLst>
-                <a:tab pos="227013" algn="l"/>
-              </a:tabLst>
-            </a:pPr>
-            <a:r>
-              <a:rPr lang="en-US" dirty="0"/>
-              <a:t>p</a:t>
-            </a:r>
-            <a:r>
-              <a:rPr lang="en-DE" dirty="0"/>
-              <a:t>oint estimate: </a:t>
-            </a:r>
-            <a:r>
-              <a:rPr lang="en-GB" dirty="0"/>
-              <a:t>a</a:t>
-            </a:r>
-            <a:r>
-              <a:rPr lang="en-DE" dirty="0"/>
-              <a:t>bsolute (MAD, MSE, …) or</a:t>
-            </a:r>
-            <a:r>
-              <a:rPr lang="en-US" dirty="0"/>
-              <a:t> </a:t>
-            </a:r>
-            <a:r>
-              <a:rPr lang="en-DE" dirty="0"/>
-              <a:t>relative (MAPE, …)</a:t>
-            </a:r>
-            <a:r>
-              <a:rPr lang="en-GB" dirty="0"/>
-              <a:t> </a:t>
-            </a:r>
-            <a:r>
-              <a:rPr lang="en-DE" dirty="0"/>
-              <a:t>metrics</a:t>
-            </a:r>
-          </a:p>
-          <a:p>
-            <a:pPr marL="339725" indent="-279400">
-              <a:buFont typeface="Arial" panose="020B0604020202020204" pitchFamily="34" charset="0"/>
-              <a:buChar char="•"/>
-            </a:pPr>
-            <a:r>
-              <a:rPr lang="en-GB" dirty="0"/>
-              <a:t>full probability distribution: a bit tricky</a:t>
-            </a:r>
-            <a:endParaRPr lang="en-DE" dirty="0"/>
-          </a:p>
-        </p:txBody>
-      </p:sp>
-      <p:sp>
-        <p:nvSpPr>
-          <p:cNvPr id="15" name="TextBox 14">
-            <a:extLst>
-              <a:ext uri="{FF2B5EF4-FFF2-40B4-BE49-F238E27FC236}">
-                <a16:creationId xmlns:a16="http://schemas.microsoft.com/office/drawing/2014/main" id="{80CB76A6-5812-6AB0-6767-EC66BDD0DD7D}"/>
-              </a:ext>
-            </a:extLst>
-          </p:cNvPr>
-          <p:cNvSpPr txBox="1"/>
-          <p:nvPr/>
-        </p:nvSpPr>
-        <p:spPr>
-          <a:xfrm>
-            <a:off x="8065102" y="4989042"/>
-            <a:ext cx="2595154" cy="369332"/>
-          </a:xfrm>
-          <a:prstGeom prst="rect">
-            <a:avLst/>
-          </a:prstGeom>
-          <a:noFill/>
-        </p:spPr>
-        <p:txBody>
-          <a:bodyPr wrap="square" rtlCol="0">
-            <a:spAutoFit/>
-          </a:bodyPr>
-          <a:lstStyle/>
-          <a:p>
-            <a:pPr algn="ctr"/>
-            <a:r>
-              <a:rPr lang="en-US" b="1" dirty="0">
-                <a:solidFill>
-                  <a:schemeClr val="accent1">
-                    <a:lumMod val="50000"/>
-                  </a:schemeClr>
-                </a:solidFill>
-                <a:latin typeface="AccordAlternate" panose="02000000000000000000" pitchFamily="50" charset="0"/>
-              </a:rPr>
-              <a:t>classification</a:t>
-            </a:r>
-          </a:p>
-        </p:txBody>
-      </p:sp>
-      <p:pic>
-        <p:nvPicPr>
-          <p:cNvPr id="17" name="Picture 2" descr="Receiver operating characteristic - Wikipedia">
-            <a:extLst>
-              <a:ext uri="{FF2B5EF4-FFF2-40B4-BE49-F238E27FC236}">
-                <a16:creationId xmlns:a16="http://schemas.microsoft.com/office/drawing/2014/main" id="{89F06512-1EFD-39BC-A15F-563A80636E21}"/>
-              </a:ext>
-            </a:extLst>
-          </p:cNvPr>
-          <p:cNvPicPr>
-            <a:picLocks noChangeAspect="1" noChangeArrowheads="1"/>
-          </p:cNvPicPr>
-          <p:nvPr/>
-        </p:nvPicPr>
-        <p:blipFill>
-          <a:blip r:embed="rId3">
-            <a:extLst>
-              <a:ext uri="{28A0092B-C50C-407E-A947-70E740481C1C}">
-                <a14:useLocalDpi xmlns:a14="http://schemas.microsoft.com/office/drawing/2010/main" val="0"/>
-              </a:ext>
-            </a:extLst>
-          </a:blip>
-          <a:srcRect/>
-          <a:stretch>
-            <a:fillRect/>
-          </a:stretch>
-        </p:blipFill>
-        <p:spPr bwMode="auto">
-          <a:xfrm>
-            <a:off x="8463493" y="5335323"/>
-            <a:ext cx="1848203" cy="1386152"/>
-          </a:xfrm>
-          <a:prstGeom prst="rect">
-            <a:avLst/>
-          </a:prstGeom>
-          <a:noFill/>
-          <a:extLst>
-            <a:ext uri="{909E8E84-426E-40DD-AFC4-6F175D3DCCD1}">
-              <a14:hiddenFill xmlns:a14="http://schemas.microsoft.com/office/drawing/2010/main">
-                <a:solidFill>
-                  <a:srgbClr val="FFFFFF"/>
-                </a:solidFill>
-              </a14:hiddenFill>
-            </a:ext>
-          </a:extLst>
-        </p:spPr>
-      </p:pic>
-      <p:sp>
-        <p:nvSpPr>
-          <p:cNvPr id="3" name="TextBox 2">
-            <a:extLst>
-              <a:ext uri="{FF2B5EF4-FFF2-40B4-BE49-F238E27FC236}">
-                <a16:creationId xmlns:a16="http://schemas.microsoft.com/office/drawing/2014/main" id="{D4851D45-9DF9-BE1C-8FA8-AE1DDB1DB604}"/>
-              </a:ext>
-            </a:extLst>
-          </p:cNvPr>
-          <p:cNvSpPr txBox="1"/>
-          <p:nvPr/>
-        </p:nvSpPr>
-        <p:spPr>
-          <a:xfrm>
-            <a:off x="10032121" y="6598364"/>
-            <a:ext cx="962123" cy="246221"/>
-          </a:xfrm>
-          <a:prstGeom prst="rect">
-            <a:avLst/>
-          </a:prstGeom>
-          <a:noFill/>
-        </p:spPr>
-        <p:txBody>
-          <a:bodyPr wrap="none" rtlCol="0">
-            <a:spAutoFit/>
-          </a:bodyPr>
-          <a:lstStyle/>
-          <a:p>
-            <a:r>
-              <a:rPr lang="de-DE" sz="1000" dirty="0" err="1"/>
-              <a:t>from</a:t>
-            </a:r>
-            <a:r>
-              <a:rPr lang="de-DE" sz="1000" dirty="0"/>
-              <a:t> </a:t>
-            </a:r>
-            <a:r>
-              <a:rPr lang="de-DE" sz="1000" dirty="0" err="1"/>
-              <a:t>wikipedia</a:t>
-            </a:r>
-            <a:endParaRPr lang="de-DE" sz="1000" dirty="0"/>
-          </a:p>
-        </p:txBody>
-      </p:sp>
     </p:spTree>
     <p:extLst>
       <p:ext uri="{BB962C8B-B14F-4D97-AF65-F5344CB8AC3E}">
-        <p14:creationId xmlns:p14="http://schemas.microsoft.com/office/powerpoint/2010/main" val="1198576018"/>
+        <p14:creationId xmlns:p14="http://schemas.microsoft.com/office/powerpoint/2010/main" val="556644343"/>
       </p:ext>
     </p:extLst>
   </p:cSld>
@@ -18904,98 +19420,6 @@
 </file>
 
 <file path=ppt/slides/slide28.xml><?xml version="1.0" encoding="utf-8"?>
-<p:sld xmlns:a="http://schemas.openxmlformats.org/drawingml/2006/main" xmlns:r="http://schemas.openxmlformats.org/officeDocument/2006/relationships" xmlns:p="http://schemas.openxmlformats.org/presentationml/2006/main">
-  <p:cSld>
-    <p:spTree>
-      <p:nvGrpSpPr>
-        <p:cNvPr id="1" name=""/>
-        <p:cNvGrpSpPr/>
-        <p:nvPr/>
-      </p:nvGrpSpPr>
-      <p:grpSpPr>
-        <a:xfrm>
-          <a:off x="0" y="0"/>
-          <a:ext cx="0" cy="0"/>
-          <a:chOff x="0" y="0"/>
-          <a:chExt cx="0" cy="0"/>
-        </a:xfrm>
-      </p:grpSpPr>
-      <p:sp>
-        <p:nvSpPr>
-          <p:cNvPr id="2" name="Titel 1">
-            <a:extLst>
-              <a:ext uri="{FF2B5EF4-FFF2-40B4-BE49-F238E27FC236}">
-                <a16:creationId xmlns:a16="http://schemas.microsoft.com/office/drawing/2014/main" id="{AA682B9B-A679-2B7F-5C0D-5FEDCAC34C63}"/>
-              </a:ext>
-            </a:extLst>
-          </p:cNvPr>
-          <p:cNvSpPr>
-            <a:spLocks noGrp="1"/>
-          </p:cNvSpPr>
-          <p:nvPr>
-            <p:ph type="title"/>
-          </p:nvPr>
-        </p:nvSpPr>
-        <p:spPr/>
-        <p:txBody>
-          <a:bodyPr/>
-          <a:lstStyle/>
-          <a:p>
-            <a:r>
-              <a:rPr lang="de-DE" dirty="0" err="1"/>
-              <a:t>Anomaly</a:t>
-            </a:r>
-            <a:r>
-              <a:rPr lang="de-DE" dirty="0"/>
-              <a:t> </a:t>
-            </a:r>
-            <a:r>
-              <a:rPr lang="de-DE" dirty="0" err="1"/>
-              <a:t>Detection</a:t>
-            </a:r>
-            <a:endParaRPr lang="de-DE" dirty="0"/>
-          </a:p>
-        </p:txBody>
-      </p:sp>
-      <p:sp>
-        <p:nvSpPr>
-          <p:cNvPr id="3" name="Inhaltsplatzhalter 2">
-            <a:extLst>
-              <a:ext uri="{FF2B5EF4-FFF2-40B4-BE49-F238E27FC236}">
-                <a16:creationId xmlns:a16="http://schemas.microsoft.com/office/drawing/2014/main" id="{1030909F-144C-585E-19FD-4F654B3619C6}"/>
-              </a:ext>
-            </a:extLst>
-          </p:cNvPr>
-          <p:cNvSpPr>
-            <a:spLocks noGrp="1"/>
-          </p:cNvSpPr>
-          <p:nvPr>
-            <p:ph idx="1"/>
-          </p:nvPr>
-        </p:nvSpPr>
-        <p:spPr/>
-        <p:txBody>
-          <a:bodyPr/>
-          <a:lstStyle/>
-          <a:p>
-            <a:endParaRPr lang="de-DE"/>
-          </a:p>
-        </p:txBody>
-      </p:sp>
-    </p:spTree>
-    <p:extLst>
-      <p:ext uri="{BB962C8B-B14F-4D97-AF65-F5344CB8AC3E}">
-        <p14:creationId xmlns:p14="http://schemas.microsoft.com/office/powerpoint/2010/main" val="2684593081"/>
-      </p:ext>
-    </p:extLst>
-  </p:cSld>
-  <p:clrMapOvr>
-    <a:masterClrMapping/>
-  </p:clrMapOvr>
-</p:sld>
-</file>
-
-<file path=ppt/slides/slide29.xml><?xml version="1.0" encoding="utf-8"?>
 <p:sld xmlns:a="http://schemas.openxmlformats.org/drawingml/2006/main" xmlns:r="http://schemas.openxmlformats.org/officeDocument/2006/relationships" xmlns:p="http://schemas.openxmlformats.org/presentationml/2006/main">
   <p:cSld>
     <p:spTree>
@@ -19371,131 +19795,7 @@
 </p:sld>
 </file>
 
-<file path=ppt/slides/slide3.xml><?xml version="1.0" encoding="utf-8"?>
-<p:sld xmlns:a="http://schemas.openxmlformats.org/drawingml/2006/main" xmlns:r="http://schemas.openxmlformats.org/officeDocument/2006/relationships" xmlns:p="http://schemas.openxmlformats.org/presentationml/2006/main">
-  <p:cSld>
-    <p:spTree>
-      <p:nvGrpSpPr>
-        <p:cNvPr id="1" name=""/>
-        <p:cNvGrpSpPr/>
-        <p:nvPr/>
-      </p:nvGrpSpPr>
-      <p:grpSpPr>
-        <a:xfrm>
-          <a:off x="0" y="0"/>
-          <a:ext cx="0" cy="0"/>
-          <a:chOff x="0" y="0"/>
-          <a:chExt cx="0" cy="0"/>
-        </a:xfrm>
-      </p:grpSpPr>
-      <p:sp>
-        <p:nvSpPr>
-          <p:cNvPr id="2" name="Titel 1">
-            <a:extLst>
-              <a:ext uri="{FF2B5EF4-FFF2-40B4-BE49-F238E27FC236}">
-                <a16:creationId xmlns:a16="http://schemas.microsoft.com/office/drawing/2014/main" id="{808AC1BF-094A-D758-C319-010D3077EED4}"/>
-              </a:ext>
-            </a:extLst>
-          </p:cNvPr>
-          <p:cNvSpPr>
-            <a:spLocks noGrp="1"/>
-          </p:cNvSpPr>
-          <p:nvPr>
-            <p:ph type="title"/>
-          </p:nvPr>
-        </p:nvSpPr>
-        <p:spPr/>
-        <p:txBody>
-          <a:bodyPr/>
-          <a:lstStyle/>
-          <a:p>
-            <a:r>
-              <a:rPr lang="de-DE" dirty="0" err="1"/>
-              <a:t>What</a:t>
-            </a:r>
-            <a:r>
-              <a:rPr lang="de-DE" dirty="0"/>
-              <a:t> </a:t>
-            </a:r>
-            <a:r>
-              <a:rPr lang="de-DE" dirty="0" err="1"/>
-              <a:t>Makes</a:t>
-            </a:r>
-            <a:r>
-              <a:rPr lang="de-DE" dirty="0"/>
-              <a:t> Time Series Special?</a:t>
-            </a:r>
-          </a:p>
-        </p:txBody>
-      </p:sp>
-      <p:sp>
-        <p:nvSpPr>
-          <p:cNvPr id="3" name="Inhaltsplatzhalter 2">
-            <a:extLst>
-              <a:ext uri="{FF2B5EF4-FFF2-40B4-BE49-F238E27FC236}">
-                <a16:creationId xmlns:a16="http://schemas.microsoft.com/office/drawing/2014/main" id="{60FBE61A-A097-E2BD-20DF-71C63D8DE9ED}"/>
-              </a:ext>
-            </a:extLst>
-          </p:cNvPr>
-          <p:cNvSpPr>
-            <a:spLocks noGrp="1"/>
-          </p:cNvSpPr>
-          <p:nvPr>
-            <p:ph idx="1"/>
-          </p:nvPr>
-        </p:nvSpPr>
-        <p:spPr/>
-        <p:txBody>
-          <a:bodyPr/>
-          <a:lstStyle/>
-          <a:p>
-            <a:endParaRPr lang="de-DE"/>
-          </a:p>
-        </p:txBody>
-      </p:sp>
-      <p:sp>
-        <p:nvSpPr>
-          <p:cNvPr id="4" name="Foliennummernplatzhalter 3">
-            <a:extLst>
-              <a:ext uri="{FF2B5EF4-FFF2-40B4-BE49-F238E27FC236}">
-                <a16:creationId xmlns:a16="http://schemas.microsoft.com/office/drawing/2014/main" id="{35911566-619C-2F5F-04DA-81FDB0D03FF8}"/>
-              </a:ext>
-            </a:extLst>
-          </p:cNvPr>
-          <p:cNvSpPr>
-            <a:spLocks noGrp="1"/>
-          </p:cNvSpPr>
-          <p:nvPr>
-            <p:ph type="sldNum" sz="quarter" idx="12"/>
-          </p:nvPr>
-        </p:nvSpPr>
-        <p:spPr/>
-        <p:txBody>
-          <a:bodyPr/>
-          <a:lstStyle/>
-          <a:p>
-            <a:fld id="{3D4C94FE-FF23-4504-88E9-14D481113291}" type="slidenum">
-              <a:rPr lang="en-GB" smtClean="0"/>
-              <a:t>3</a:t>
-            </a:fld>
-            <a:endParaRPr lang="en-GB"/>
-          </a:p>
-        </p:txBody>
-      </p:sp>
-    </p:spTree>
-    <p:extLst>
-      <p:ext uri="{BB962C8B-B14F-4D97-AF65-F5344CB8AC3E}">
-        <p14:creationId xmlns:p14="http://schemas.microsoft.com/office/powerpoint/2010/main" val="441294949"/>
-      </p:ext>
-    </p:extLst>
-  </p:cSld>
-  <p:clrMapOvr>
-    <a:masterClrMapping/>
-  </p:clrMapOvr>
-</p:sld>
-</file>
-
-<file path=ppt/slides/slide30.xml><?xml version="1.0" encoding="utf-8"?>
+<file path=ppt/slides/slide29.xml><?xml version="1.0" encoding="utf-8"?>
 <p:sld xmlns:a="http://schemas.openxmlformats.org/drawingml/2006/main" xmlns:r="http://schemas.openxmlformats.org/officeDocument/2006/relationships" xmlns:p="http://schemas.openxmlformats.org/presentationml/2006/main">
   <p:cSld>
     <p:spTree>
@@ -19615,7 +19915,7 @@
 </p:sld>
 </file>
 
-<file path=ppt/slides/slide31.xml><?xml version="1.0" encoding="utf-8"?>
+<file path=ppt/slides/slide3.xml><?xml version="1.0" encoding="utf-8"?>
 <p:sld xmlns:a="http://schemas.openxmlformats.org/drawingml/2006/main" xmlns:r="http://schemas.openxmlformats.org/officeDocument/2006/relationships" xmlns:p="http://schemas.openxmlformats.org/presentationml/2006/main">
   <p:cSld>
     <p:spTree>
@@ -19637,6 +19937,123 @@
           <p:cNvPr id="2" name="Titel 1">
             <a:extLst>
               <a:ext uri="{FF2B5EF4-FFF2-40B4-BE49-F238E27FC236}">
+                <a16:creationId xmlns:a16="http://schemas.microsoft.com/office/drawing/2014/main" id="{31256628-076F-C02F-1D05-3BCF9E0950E8}"/>
+              </a:ext>
+            </a:extLst>
+          </p:cNvPr>
+          <p:cNvSpPr>
+            <a:spLocks noGrp="1"/>
+          </p:cNvSpPr>
+          <p:nvPr>
+            <p:ph type="title"/>
+          </p:nvPr>
+        </p:nvSpPr>
+        <p:spPr/>
+        <p:txBody>
+          <a:bodyPr/>
+          <a:lstStyle/>
+          <a:p>
+            <a:r>
+              <a:rPr lang="de-DE" dirty="0"/>
+              <a:t>Temporal </a:t>
+            </a:r>
+            <a:r>
+              <a:rPr lang="de-DE" dirty="0" err="1"/>
+              <a:t>Dependence</a:t>
+            </a:r>
+            <a:endParaRPr lang="de-DE" dirty="0"/>
+          </a:p>
+        </p:txBody>
+      </p:sp>
+      <p:sp>
+        <p:nvSpPr>
+          <p:cNvPr id="3" name="Inhaltsplatzhalter 2">
+            <a:extLst>
+              <a:ext uri="{FF2B5EF4-FFF2-40B4-BE49-F238E27FC236}">
+                <a16:creationId xmlns:a16="http://schemas.microsoft.com/office/drawing/2014/main" id="{766ABB3C-76C5-1CF2-36D6-636F646F501D}"/>
+              </a:ext>
+            </a:extLst>
+          </p:cNvPr>
+          <p:cNvSpPr>
+            <a:spLocks noGrp="1"/>
+          </p:cNvSpPr>
+          <p:nvPr>
+            <p:ph idx="1"/>
+          </p:nvPr>
+        </p:nvSpPr>
+        <p:spPr/>
+        <p:txBody>
+          <a:bodyPr/>
+          <a:lstStyle/>
+          <a:p>
+            <a:endParaRPr lang="de-DE"/>
+          </a:p>
+        </p:txBody>
+      </p:sp>
+      <p:sp>
+        <p:nvSpPr>
+          <p:cNvPr id="4" name="Foliennummernplatzhalter 3">
+            <a:extLst>
+              <a:ext uri="{FF2B5EF4-FFF2-40B4-BE49-F238E27FC236}">
+                <a16:creationId xmlns:a16="http://schemas.microsoft.com/office/drawing/2014/main" id="{D552BEB7-1F4A-7007-52BB-7111A1CAA80F}"/>
+              </a:ext>
+            </a:extLst>
+          </p:cNvPr>
+          <p:cNvSpPr>
+            <a:spLocks noGrp="1"/>
+          </p:cNvSpPr>
+          <p:nvPr>
+            <p:ph type="sldNum" sz="quarter" idx="12"/>
+          </p:nvPr>
+        </p:nvSpPr>
+        <p:spPr/>
+        <p:txBody>
+          <a:bodyPr/>
+          <a:lstStyle/>
+          <a:p>
+            <a:fld id="{3D4C94FE-FF23-4504-88E9-14D481113291}" type="slidenum">
+              <a:rPr lang="en-GB" smtClean="0"/>
+              <a:t>3</a:t>
+            </a:fld>
+            <a:endParaRPr lang="en-GB"/>
+          </a:p>
+        </p:txBody>
+      </p:sp>
+    </p:spTree>
+    <p:extLst>
+      <p:ext uri="{BB962C8B-B14F-4D97-AF65-F5344CB8AC3E}">
+        <p14:creationId xmlns:p14="http://schemas.microsoft.com/office/powerpoint/2010/main" val="4071444506"/>
+      </p:ext>
+    </p:extLst>
+  </p:cSld>
+  <p:clrMapOvr>
+    <a:masterClrMapping/>
+  </p:clrMapOvr>
+</p:sld>
+</file>
+
+<file path=ppt/slides/slide30.xml><?xml version="1.0" encoding="utf-8"?>
+<p:sld xmlns:a="http://schemas.openxmlformats.org/drawingml/2006/main" xmlns:r="http://schemas.openxmlformats.org/officeDocument/2006/relationships" xmlns:p="http://schemas.openxmlformats.org/presentationml/2006/main">
+  <p:cSld>
+    <p:spTree>
+      <p:nvGrpSpPr>
+        <p:cNvPr id="1" name=""/>
+        <p:cNvGrpSpPr/>
+        <p:nvPr/>
+      </p:nvGrpSpPr>
+      <p:grpSpPr>
+        <a:xfrm>
+          <a:off x="0" y="0"/>
+          <a:ext cx="0" cy="0"/>
+          <a:chOff x="0" y="0"/>
+          <a:chExt cx="0" cy="0"/>
+        </a:xfrm>
+      </p:grpSpPr>
+      <p:sp>
+        <p:nvSpPr>
+          <p:cNvPr id="2" name="Titel 1">
+            <a:extLst>
+              <a:ext uri="{FF2B5EF4-FFF2-40B4-BE49-F238E27FC236}">
                 <a16:creationId xmlns:a16="http://schemas.microsoft.com/office/drawing/2014/main" id="{29024AA8-AEE0-107B-6BF6-F1D6E0C05195}"/>
               </a:ext>
             </a:extLst>
@@ -19706,7 +20123,7 @@
 </p:sld>
 </file>
 
-<file path=ppt/slides/slide32.xml><?xml version="1.0" encoding="utf-8"?>
+<file path=ppt/slides/slide31.xml><?xml version="1.0" encoding="utf-8"?>
 <p:sld xmlns:a="http://schemas.openxmlformats.org/drawingml/2006/main" xmlns:r="http://schemas.openxmlformats.org/officeDocument/2006/relationships" xmlns:p="http://schemas.openxmlformats.org/presentationml/2006/main">
   <p:cSld>
     <p:spTree>
@@ -20519,7 +20936,7 @@
 </p:sld>
 </file>
 
-<file path=ppt/slides/slide33.xml><?xml version="1.0" encoding="utf-8"?>
+<file path=ppt/slides/slide32.xml><?xml version="1.0" encoding="utf-8"?>
 <p:sld xmlns:a="http://schemas.openxmlformats.org/drawingml/2006/main" xmlns:r="http://schemas.openxmlformats.org/officeDocument/2006/relationships" xmlns:p="http://schemas.openxmlformats.org/presentationml/2006/main">
   <p:cSld>
     <p:spTree>
@@ -21427,6 +21844,170 @@
 </p:sld>
 </file>
 
+<file path=ppt/slides/slide33.xml><?xml version="1.0" encoding="utf-8"?>
+<p:sld xmlns:a="http://schemas.openxmlformats.org/drawingml/2006/main" xmlns:r="http://schemas.openxmlformats.org/officeDocument/2006/relationships" xmlns:p="http://schemas.openxmlformats.org/presentationml/2006/main">
+  <p:cSld>
+    <p:spTree>
+      <p:nvGrpSpPr>
+        <p:cNvPr id="1" name=""/>
+        <p:cNvGrpSpPr/>
+        <p:nvPr/>
+      </p:nvGrpSpPr>
+      <p:grpSpPr>
+        <a:xfrm>
+          <a:off x="0" y="0"/>
+          <a:ext cx="0" cy="0"/>
+          <a:chOff x="0" y="0"/>
+          <a:chExt cx="0" cy="0"/>
+        </a:xfrm>
+      </p:grpSpPr>
+      <p:sp>
+        <p:nvSpPr>
+          <p:cNvPr id="2" name="Title 1">
+            <a:extLst>
+              <a:ext uri="{FF2B5EF4-FFF2-40B4-BE49-F238E27FC236}">
+                <a16:creationId xmlns:a16="http://schemas.microsoft.com/office/drawing/2014/main" id="{41A230D6-4638-B5C0-7823-886945383274}"/>
+              </a:ext>
+            </a:extLst>
+          </p:cNvPr>
+          <p:cNvSpPr>
+            <a:spLocks noGrp="1"/>
+          </p:cNvSpPr>
+          <p:nvPr>
+            <p:ph type="title"/>
+          </p:nvPr>
+        </p:nvSpPr>
+        <p:spPr/>
+        <p:txBody>
+          <a:bodyPr/>
+          <a:lstStyle/>
+          <a:p>
+            <a:r>
+              <a:rPr lang="en-GB" dirty="0"/>
+              <a:t>Uncertainty increases with forecast horizon</a:t>
+            </a:r>
+          </a:p>
+        </p:txBody>
+      </p:sp>
+      <p:pic>
+        <p:nvPicPr>
+          <p:cNvPr id="5" name="Picture 4" descr="A graph showing a curve&#10;&#10;Description automatically generated with medium confidence">
+            <a:extLst>
+              <a:ext uri="{FF2B5EF4-FFF2-40B4-BE49-F238E27FC236}">
+                <a16:creationId xmlns:a16="http://schemas.microsoft.com/office/drawing/2014/main" id="{EFA118BF-1883-1AE3-A6B5-F320D3C91BE1}"/>
+              </a:ext>
+            </a:extLst>
+          </p:cNvPr>
+          <p:cNvPicPr>
+            <a:picLocks noChangeAspect="1"/>
+          </p:cNvPicPr>
+          <p:nvPr/>
+        </p:nvPicPr>
+        <p:blipFill>
+          <a:blip r:embed="rId2">
+            <a:extLst>
+              <a:ext uri="{28A0092B-C50C-407E-A947-70E740481C1C}">
+                <a14:useLocalDpi xmlns:a14="http://schemas.microsoft.com/office/drawing/2010/main" val="0"/>
+              </a:ext>
+            </a:extLst>
+          </a:blip>
+          <a:stretch>
+            <a:fillRect/>
+          </a:stretch>
+        </p:blipFill>
+        <p:spPr>
+          <a:xfrm>
+            <a:off x="1477431" y="1315717"/>
+            <a:ext cx="9237138" cy="5542283"/>
+          </a:xfrm>
+          <a:prstGeom prst="rect">
+            <a:avLst/>
+          </a:prstGeom>
+        </p:spPr>
+      </p:pic>
+      <p:sp>
+        <p:nvSpPr>
+          <p:cNvPr id="6" name="TextBox 5">
+            <a:extLst>
+              <a:ext uri="{FF2B5EF4-FFF2-40B4-BE49-F238E27FC236}">
+                <a16:creationId xmlns:a16="http://schemas.microsoft.com/office/drawing/2014/main" id="{2F163BD9-FC9D-9577-754A-0DB91910C37C}"/>
+              </a:ext>
+            </a:extLst>
+          </p:cNvPr>
+          <p:cNvSpPr txBox="1"/>
+          <p:nvPr/>
+        </p:nvSpPr>
+        <p:spPr>
+          <a:xfrm>
+            <a:off x="2599268" y="2065628"/>
+            <a:ext cx="2070503" cy="369332"/>
+          </a:xfrm>
+          <a:prstGeom prst="rect">
+            <a:avLst/>
+          </a:prstGeom>
+          <a:noFill/>
+          <a:ln>
+            <a:solidFill>
+              <a:schemeClr val="tx1"/>
+            </a:solidFill>
+          </a:ln>
+        </p:spPr>
+        <p:txBody>
+          <a:bodyPr wrap="none" rtlCol="0">
+            <a:spAutoFit/>
+          </a:bodyPr>
+          <a:lstStyle/>
+          <a:p>
+            <a:pPr marL="0" marR="0" lvl="0" indent="0" algn="l" defTabSz="914400" rtl="0" eaLnBrk="1" fontAlgn="auto" latinLnBrk="0" hangingPunct="1">
+              <a:lnSpc>
+                <a:spcPct val="100000"/>
+              </a:lnSpc>
+              <a:spcBef>
+                <a:spcPts val="0"/>
+              </a:spcBef>
+              <a:spcAft>
+                <a:spcPts val="0"/>
+              </a:spcAft>
+              <a:buClrTx/>
+              <a:buSzTx/>
+              <a:buFontTx/>
+              <a:buNone/>
+              <a:tabLst/>
+              <a:defRPr/>
+            </a:pPr>
+            <a:r>
+              <a:rPr kumimoji="0" lang="en-GB" sz="1800" b="0" i="0" u="none" strike="noStrike" kern="1200" cap="none" spc="0" normalizeH="0" baseline="0" noProof="0" dirty="0">
+                <a:ln>
+                  <a:noFill/>
+                </a:ln>
+                <a:solidFill>
+                  <a:prstClr val="black"/>
+                </a:solidFill>
+                <a:effectLst/>
+                <a:uLnTx/>
+                <a:uFillTx/>
+                <a:latin typeface="Aptos" panose="02110004020202020204"/>
+                <a:ea typeface="+mn-ea"/>
+                <a:cs typeface="+mn-cs"/>
+              </a:rPr>
+              <a:t>Nvidia stock prices</a:t>
+            </a:r>
+          </a:p>
+        </p:txBody>
+      </p:sp>
+    </p:spTree>
+    <p:extLst>
+      <p:ext uri="{BB962C8B-B14F-4D97-AF65-F5344CB8AC3E}">
+        <p14:creationId xmlns:p14="http://schemas.microsoft.com/office/powerpoint/2010/main" val="2794720392"/>
+      </p:ext>
+    </p:extLst>
+  </p:cSld>
+  <p:clrMapOvr>
+    <a:masterClrMapping/>
+  </p:clrMapOvr>
+</p:sld>
+</file>
+
 <file path=ppt/slides/slide34.xml><?xml version="1.0" encoding="utf-8"?>
 <p:sld xmlns:a="http://schemas.openxmlformats.org/drawingml/2006/main" xmlns:r="http://schemas.openxmlformats.org/officeDocument/2006/relationships" xmlns:p="http://schemas.openxmlformats.org/presentationml/2006/main">
   <p:cSld>
@@ -21446,10 +22027,10 @@
       </p:grpSpPr>
       <p:sp>
         <p:nvSpPr>
-          <p:cNvPr id="2" name="Title 1">
-            <a:extLst>
-              <a:ext uri="{FF2B5EF4-FFF2-40B4-BE49-F238E27FC236}">
-                <a16:creationId xmlns:a16="http://schemas.microsoft.com/office/drawing/2014/main" id="{41A230D6-4638-B5C0-7823-886945383274}"/>
+          <p:cNvPr id="2" name="Titel 1">
+            <a:extLst>
+              <a:ext uri="{FF2B5EF4-FFF2-40B4-BE49-F238E27FC236}">
+                <a16:creationId xmlns:a16="http://schemas.microsoft.com/office/drawing/2014/main" id="{AA682B9B-A679-2B7F-5C0D-5FEDCAC34C63}"/>
               </a:ext>
             </a:extLst>
           </p:cNvPr>
@@ -21466,122 +22047,50 @@
           <a:lstStyle/>
           <a:p>
             <a:r>
-              <a:rPr lang="en-GB" dirty="0"/>
-              <a:t>Uncertainty increases with forecast horizon</a:t>
-            </a:r>
-          </a:p>
-        </p:txBody>
-      </p:sp>
-      <p:pic>
-        <p:nvPicPr>
-          <p:cNvPr id="5" name="Picture 4" descr="A graph showing a curve&#10;&#10;Description automatically generated with medium confidence">
-            <a:extLst>
-              <a:ext uri="{FF2B5EF4-FFF2-40B4-BE49-F238E27FC236}">
-                <a16:creationId xmlns:a16="http://schemas.microsoft.com/office/drawing/2014/main" id="{EFA118BF-1883-1AE3-A6B5-F320D3C91BE1}"/>
-              </a:ext>
-            </a:extLst>
-          </p:cNvPr>
-          <p:cNvPicPr>
-            <a:picLocks noChangeAspect="1"/>
-          </p:cNvPicPr>
-          <p:nvPr/>
-        </p:nvPicPr>
-        <p:blipFill>
-          <a:blip r:embed="rId2">
-            <a:extLst>
-              <a:ext uri="{28A0092B-C50C-407E-A947-70E740481C1C}">
-                <a14:useLocalDpi xmlns:a14="http://schemas.microsoft.com/office/drawing/2010/main" val="0"/>
-              </a:ext>
-            </a:extLst>
-          </a:blip>
-          <a:stretch>
-            <a:fillRect/>
-          </a:stretch>
-        </p:blipFill>
-        <p:spPr>
-          <a:xfrm>
-            <a:off x="1477431" y="1315717"/>
-            <a:ext cx="9237138" cy="5542283"/>
-          </a:xfrm>
-          <a:prstGeom prst="rect">
-            <a:avLst/>
-          </a:prstGeom>
-        </p:spPr>
-      </p:pic>
-      <p:sp>
-        <p:nvSpPr>
-          <p:cNvPr id="6" name="TextBox 5">
-            <a:extLst>
-              <a:ext uri="{FF2B5EF4-FFF2-40B4-BE49-F238E27FC236}">
-                <a16:creationId xmlns:a16="http://schemas.microsoft.com/office/drawing/2014/main" id="{2F163BD9-FC9D-9577-754A-0DB91910C37C}"/>
-              </a:ext>
-            </a:extLst>
-          </p:cNvPr>
-          <p:cNvSpPr txBox="1"/>
-          <p:nvPr/>
-        </p:nvSpPr>
-        <p:spPr>
-          <a:xfrm>
-            <a:off x="2599268" y="2065628"/>
-            <a:ext cx="2070503" cy="369332"/>
-          </a:xfrm>
-          <a:prstGeom prst="rect">
-            <a:avLst/>
-          </a:prstGeom>
-          <a:noFill/>
-          <a:ln>
-            <a:solidFill>
-              <a:schemeClr val="tx1"/>
-            </a:solidFill>
-          </a:ln>
-        </p:spPr>
-        <p:txBody>
-          <a:bodyPr wrap="none" rtlCol="0">
-            <a:spAutoFit/>
-          </a:bodyPr>
-          <a:lstStyle/>
-          <a:p>
-            <a:pPr marL="0" marR="0" lvl="0" indent="0" algn="l" defTabSz="914400" rtl="0" eaLnBrk="1" fontAlgn="auto" latinLnBrk="0" hangingPunct="1">
-              <a:lnSpc>
-                <a:spcPct val="100000"/>
-              </a:lnSpc>
-              <a:spcBef>
-                <a:spcPts val="0"/>
-              </a:spcBef>
-              <a:spcAft>
-                <a:spcPts val="0"/>
-              </a:spcAft>
-              <a:buClrTx/>
-              <a:buSzTx/>
-              <a:buFontTx/>
-              <a:buNone/>
-              <a:tabLst/>
-              <a:defRPr/>
-            </a:pPr>
-            <a:r>
-              <a:rPr kumimoji="0" lang="en-GB" sz="1800" b="0" i="0" u="none" strike="noStrike" kern="1200" cap="none" spc="0" normalizeH="0" baseline="0" noProof="0" dirty="0">
-                <a:ln>
-                  <a:noFill/>
-                </a:ln>
-                <a:solidFill>
-                  <a:prstClr val="black"/>
-                </a:solidFill>
-                <a:effectLst/>
-                <a:uLnTx/>
-                <a:uFillTx/>
-                <a:latin typeface="Aptos" panose="02110004020202020204"/>
-                <a:ea typeface="+mn-ea"/>
-                <a:cs typeface="+mn-cs"/>
-              </a:rPr>
-              <a:t>Nvidia stock prices</a:t>
-            </a:r>
+              <a:rPr lang="de-DE" dirty="0" err="1"/>
+              <a:t>Anomaly</a:t>
+            </a:r>
+            <a:r>
+              <a:rPr lang="de-DE" dirty="0"/>
+              <a:t> </a:t>
+            </a:r>
+            <a:r>
+              <a:rPr lang="de-DE" dirty="0" err="1"/>
+              <a:t>Detection</a:t>
+            </a:r>
+            <a:endParaRPr lang="de-DE" dirty="0"/>
+          </a:p>
+        </p:txBody>
+      </p:sp>
+      <p:sp>
+        <p:nvSpPr>
+          <p:cNvPr id="3" name="Inhaltsplatzhalter 2">
+            <a:extLst>
+              <a:ext uri="{FF2B5EF4-FFF2-40B4-BE49-F238E27FC236}">
+                <a16:creationId xmlns:a16="http://schemas.microsoft.com/office/drawing/2014/main" id="{1030909F-144C-585E-19FD-4F654B3619C6}"/>
+              </a:ext>
+            </a:extLst>
+          </p:cNvPr>
+          <p:cNvSpPr>
+            <a:spLocks noGrp="1"/>
+          </p:cNvSpPr>
+          <p:nvPr>
+            <p:ph idx="1"/>
+          </p:nvPr>
+        </p:nvSpPr>
+        <p:spPr/>
+        <p:txBody>
+          <a:bodyPr/>
+          <a:lstStyle/>
+          <a:p>
+            <a:endParaRPr lang="de-DE"/>
           </a:p>
         </p:txBody>
       </p:sp>
     </p:spTree>
     <p:extLst>
       <p:ext uri="{BB962C8B-B14F-4D97-AF65-F5344CB8AC3E}">
-        <p14:creationId xmlns:p14="http://schemas.microsoft.com/office/powerpoint/2010/main" val="2794720392"/>
+        <p14:creationId xmlns:p14="http://schemas.microsoft.com/office/powerpoint/2010/main" val="2684593081"/>
       </p:ext>
     </p:extLst>
   </p:cSld>
@@ -21610,10 +22119,10 @@
       </p:grpSpPr>
       <p:sp>
         <p:nvSpPr>
-          <p:cNvPr id="2" name="Titel 1">
-            <a:extLst>
-              <a:ext uri="{FF2B5EF4-FFF2-40B4-BE49-F238E27FC236}">
-                <a16:creationId xmlns:a16="http://schemas.microsoft.com/office/drawing/2014/main" id="{31256628-076F-C02F-1D05-3BCF9E0950E8}"/>
+          <p:cNvPr id="2" name="Title 1">
+            <a:extLst>
+              <a:ext uri="{FF2B5EF4-FFF2-40B4-BE49-F238E27FC236}">
+                <a16:creationId xmlns:a16="http://schemas.microsoft.com/office/drawing/2014/main" id="{37CC9730-D9B6-129D-F347-DFE2DA458B09}"/>
               </a:ext>
             </a:extLst>
           </p:cNvPr>
@@ -21630,125 +22139,8 @@
           <a:lstStyle/>
           <a:p>
             <a:r>
-              <a:rPr lang="de-DE" dirty="0"/>
-              <a:t>Temporal </a:t>
-            </a:r>
-            <a:r>
-              <a:rPr lang="de-DE" dirty="0" err="1"/>
-              <a:t>Dependence</a:t>
-            </a:r>
-            <a:endParaRPr lang="de-DE" dirty="0"/>
-          </a:p>
-        </p:txBody>
-      </p:sp>
-      <p:sp>
-        <p:nvSpPr>
-          <p:cNvPr id="3" name="Inhaltsplatzhalter 2">
-            <a:extLst>
-              <a:ext uri="{FF2B5EF4-FFF2-40B4-BE49-F238E27FC236}">
-                <a16:creationId xmlns:a16="http://schemas.microsoft.com/office/drawing/2014/main" id="{766ABB3C-76C5-1CF2-36D6-636F646F501D}"/>
-              </a:ext>
-            </a:extLst>
-          </p:cNvPr>
-          <p:cNvSpPr>
-            <a:spLocks noGrp="1"/>
-          </p:cNvSpPr>
-          <p:nvPr>
-            <p:ph idx="1"/>
-          </p:nvPr>
-        </p:nvSpPr>
-        <p:spPr/>
-        <p:txBody>
-          <a:bodyPr/>
-          <a:lstStyle/>
-          <a:p>
-            <a:endParaRPr lang="de-DE"/>
-          </a:p>
-        </p:txBody>
-      </p:sp>
-      <p:sp>
-        <p:nvSpPr>
-          <p:cNvPr id="4" name="Foliennummernplatzhalter 3">
-            <a:extLst>
-              <a:ext uri="{FF2B5EF4-FFF2-40B4-BE49-F238E27FC236}">
-                <a16:creationId xmlns:a16="http://schemas.microsoft.com/office/drawing/2014/main" id="{D552BEB7-1F4A-7007-52BB-7111A1CAA80F}"/>
-              </a:ext>
-            </a:extLst>
-          </p:cNvPr>
-          <p:cNvSpPr>
-            <a:spLocks noGrp="1"/>
-          </p:cNvSpPr>
-          <p:nvPr>
-            <p:ph type="sldNum" sz="quarter" idx="12"/>
-          </p:nvPr>
-        </p:nvSpPr>
-        <p:spPr/>
-        <p:txBody>
-          <a:bodyPr/>
-          <a:lstStyle/>
-          <a:p>
-            <a:fld id="{3D4C94FE-FF23-4504-88E9-14D481113291}" type="slidenum">
-              <a:rPr lang="en-GB" smtClean="0"/>
-              <a:t>4</a:t>
-            </a:fld>
-            <a:endParaRPr lang="en-GB"/>
-          </a:p>
-        </p:txBody>
-      </p:sp>
-    </p:spTree>
-    <p:extLst>
-      <p:ext uri="{BB962C8B-B14F-4D97-AF65-F5344CB8AC3E}">
-        <p14:creationId xmlns:p14="http://schemas.microsoft.com/office/powerpoint/2010/main" val="4071444506"/>
-      </p:ext>
-    </p:extLst>
-  </p:cSld>
-  <p:clrMapOvr>
-    <a:masterClrMapping/>
-  </p:clrMapOvr>
-</p:sld>
-</file>
-
-<file path=ppt/slides/slide5.xml><?xml version="1.0" encoding="utf-8"?>
-<p:sld xmlns:a="http://schemas.openxmlformats.org/drawingml/2006/main" xmlns:r="http://schemas.openxmlformats.org/officeDocument/2006/relationships" xmlns:p="http://schemas.openxmlformats.org/presentationml/2006/main">
-  <p:cSld>
-    <p:spTree>
-      <p:nvGrpSpPr>
-        <p:cNvPr id="1" name=""/>
-        <p:cNvGrpSpPr/>
-        <p:nvPr/>
-      </p:nvGrpSpPr>
-      <p:grpSpPr>
-        <a:xfrm>
-          <a:off x="0" y="0"/>
-          <a:ext cx="0" cy="0"/>
-          <a:chOff x="0" y="0"/>
-          <a:chExt cx="0" cy="0"/>
-        </a:xfrm>
-      </p:grpSpPr>
-      <p:sp>
-        <p:nvSpPr>
-          <p:cNvPr id="2" name="Title 1">
-            <a:extLst>
-              <a:ext uri="{FF2B5EF4-FFF2-40B4-BE49-F238E27FC236}">
-                <a16:creationId xmlns:a16="http://schemas.microsoft.com/office/drawing/2014/main" id="{37CC9730-D9B6-129D-F347-DFE2DA458B09}"/>
-              </a:ext>
-            </a:extLst>
-          </p:cNvPr>
-          <p:cNvSpPr>
-            <a:spLocks noGrp="1"/>
-          </p:cNvSpPr>
-          <p:nvPr>
-            <p:ph type="title"/>
-          </p:nvPr>
-        </p:nvSpPr>
-        <p:spPr/>
-        <p:txBody>
-          <a:bodyPr/>
-          <a:lstStyle/>
-          <a:p>
-            <a:r>
               <a:rPr lang="en-GB" dirty="0"/>
-              <a:t>Forecasting means dealing with time series</a:t>
+              <a:t>Forecasting</a:t>
             </a:r>
           </a:p>
         </p:txBody>
@@ -21796,6 +22188,127 @@
 </p:sld>
 </file>
 
+<file path=ppt/slides/slide5.xml><?xml version="1.0" encoding="utf-8"?>
+<p:sld xmlns:a="http://schemas.openxmlformats.org/drawingml/2006/main" xmlns:r="http://schemas.openxmlformats.org/officeDocument/2006/relationships" xmlns:p="http://schemas.openxmlformats.org/presentationml/2006/main">
+  <p:cSld>
+    <p:spTree>
+      <p:nvGrpSpPr>
+        <p:cNvPr id="1" name=""/>
+        <p:cNvGrpSpPr/>
+        <p:nvPr/>
+      </p:nvGrpSpPr>
+      <p:grpSpPr>
+        <a:xfrm>
+          <a:off x="0" y="0"/>
+          <a:ext cx="0" cy="0"/>
+          <a:chOff x="0" y="0"/>
+          <a:chExt cx="0" cy="0"/>
+        </a:xfrm>
+      </p:grpSpPr>
+      <p:sp>
+        <p:nvSpPr>
+          <p:cNvPr id="2" name="Titel 1">
+            <a:extLst>
+              <a:ext uri="{FF2B5EF4-FFF2-40B4-BE49-F238E27FC236}">
+                <a16:creationId xmlns:a16="http://schemas.microsoft.com/office/drawing/2014/main" id="{4E5306FF-D46A-5F4D-357E-328CBCD66656}"/>
+              </a:ext>
+            </a:extLst>
+          </p:cNvPr>
+          <p:cNvSpPr>
+            <a:spLocks noGrp="1"/>
+          </p:cNvSpPr>
+          <p:nvPr>
+            <p:ph type="title"/>
+          </p:nvPr>
+        </p:nvSpPr>
+        <p:spPr/>
+        <p:txBody>
+          <a:bodyPr/>
+          <a:lstStyle/>
+          <a:p>
+            <a:r>
+              <a:rPr lang="de-DE" dirty="0" err="1"/>
+              <a:t>Autocorrelation</a:t>
+            </a:r>
+            <a:r>
+              <a:rPr lang="de-DE" dirty="0"/>
+              <a:t> and Partial </a:t>
+            </a:r>
+            <a:r>
+              <a:rPr lang="de-DE" dirty="0" err="1"/>
+              <a:t>Autocorrelation</a:t>
+            </a:r>
+            <a:endParaRPr lang="de-DE" dirty="0"/>
+          </a:p>
+        </p:txBody>
+      </p:sp>
+      <p:sp>
+        <p:nvSpPr>
+          <p:cNvPr id="3" name="Inhaltsplatzhalter 2">
+            <a:extLst>
+              <a:ext uri="{FF2B5EF4-FFF2-40B4-BE49-F238E27FC236}">
+                <a16:creationId xmlns:a16="http://schemas.microsoft.com/office/drawing/2014/main" id="{104289A7-5461-531A-7F75-50F6DF204790}"/>
+              </a:ext>
+            </a:extLst>
+          </p:cNvPr>
+          <p:cNvSpPr>
+            <a:spLocks noGrp="1"/>
+          </p:cNvSpPr>
+          <p:nvPr>
+            <p:ph idx="1"/>
+          </p:nvPr>
+        </p:nvSpPr>
+        <p:spPr/>
+        <p:txBody>
+          <a:bodyPr/>
+          <a:lstStyle/>
+          <a:p>
+            <a:endParaRPr lang="de-DE"/>
+          </a:p>
+        </p:txBody>
+      </p:sp>
+      <p:sp>
+        <p:nvSpPr>
+          <p:cNvPr id="4" name="Foliennummernplatzhalter 3">
+            <a:extLst>
+              <a:ext uri="{FF2B5EF4-FFF2-40B4-BE49-F238E27FC236}">
+                <a16:creationId xmlns:a16="http://schemas.microsoft.com/office/drawing/2014/main" id="{2749836D-06DA-146A-99BC-CBA37DFBAB05}"/>
+              </a:ext>
+            </a:extLst>
+          </p:cNvPr>
+          <p:cNvSpPr>
+            <a:spLocks noGrp="1"/>
+          </p:cNvSpPr>
+          <p:nvPr>
+            <p:ph type="sldNum" sz="quarter" idx="12"/>
+          </p:nvPr>
+        </p:nvSpPr>
+        <p:spPr/>
+        <p:txBody>
+          <a:bodyPr/>
+          <a:lstStyle/>
+          <a:p>
+            <a:fld id="{3D4C94FE-FF23-4504-88E9-14D481113291}" type="slidenum">
+              <a:rPr lang="en-GB" smtClean="0"/>
+              <a:t>5</a:t>
+            </a:fld>
+            <a:endParaRPr lang="en-GB"/>
+          </a:p>
+        </p:txBody>
+      </p:sp>
+    </p:spTree>
+    <p:extLst>
+      <p:ext uri="{BB962C8B-B14F-4D97-AF65-F5344CB8AC3E}">
+        <p14:creationId xmlns:p14="http://schemas.microsoft.com/office/powerpoint/2010/main" val="3173181311"/>
+      </p:ext>
+    </p:extLst>
+  </p:cSld>
+  <p:clrMapOvr>
+    <a:masterClrMapping/>
+  </p:clrMapOvr>
+</p:sld>
+</file>
+
 <file path=ppt/slides/slide6.xml><?xml version="1.0" encoding="utf-8"?>
 <p:sld xmlns:a="http://schemas.openxmlformats.org/drawingml/2006/main" xmlns:r="http://schemas.openxmlformats.org/officeDocument/2006/relationships" xmlns:p="http://schemas.openxmlformats.org/presentationml/2006/main">
   <p:cSld>
@@ -21818,7 +22331,7 @@
           <p:cNvPr id="2" name="Titel 1">
             <a:extLst>
               <a:ext uri="{FF2B5EF4-FFF2-40B4-BE49-F238E27FC236}">
-                <a16:creationId xmlns:a16="http://schemas.microsoft.com/office/drawing/2014/main" id="{4E5306FF-D46A-5F4D-357E-328CBCD66656}"/>
+                <a16:creationId xmlns:a16="http://schemas.microsoft.com/office/drawing/2014/main" id="{3DBACD47-92FC-F367-8730-A52B59555AB1}"/>
               </a:ext>
             </a:extLst>
           </p:cNvPr>
@@ -21836,15 +22349,7 @@
           <a:p>
             <a:r>
               <a:rPr lang="de-DE" dirty="0" err="1"/>
-              <a:t>Autocorrelation</a:t>
-            </a:r>
-            <a:r>
-              <a:rPr lang="de-DE" dirty="0"/>
-              <a:t> and Partial </a:t>
-            </a:r>
-            <a:r>
-              <a:rPr lang="de-DE" dirty="0" err="1"/>
-              <a:t>Autocorrelation</a:t>
+              <a:t>Stationarity</a:t>
             </a:r>
             <a:endParaRPr lang="de-DE" dirty="0"/>
           </a:p>
@@ -21855,7 +22360,7 @@
           <p:cNvPr id="3" name="Inhaltsplatzhalter 2">
             <a:extLst>
               <a:ext uri="{FF2B5EF4-FFF2-40B4-BE49-F238E27FC236}">
-                <a16:creationId xmlns:a16="http://schemas.microsoft.com/office/drawing/2014/main" id="{104289A7-5461-531A-7F75-50F6DF204790}"/>
+                <a16:creationId xmlns:a16="http://schemas.microsoft.com/office/drawing/2014/main" id="{238EE37C-F9A6-CA96-1CCE-D61439094A48}"/>
               </a:ext>
             </a:extLst>
           </p:cNvPr>
@@ -21880,7 +22385,7 @@
           <p:cNvPr id="4" name="Foliennummernplatzhalter 3">
             <a:extLst>
               <a:ext uri="{FF2B5EF4-FFF2-40B4-BE49-F238E27FC236}">
-                <a16:creationId xmlns:a16="http://schemas.microsoft.com/office/drawing/2014/main" id="{2749836D-06DA-146A-99BC-CBA37DFBAB05}"/>
+                <a16:creationId xmlns:a16="http://schemas.microsoft.com/office/drawing/2014/main" id="{B284EF11-7B5B-A7D8-239D-941BC50B89FC}"/>
               </a:ext>
             </a:extLst>
           </p:cNvPr>
@@ -21899,119 +22404,6 @@
             <a:fld id="{3D4C94FE-FF23-4504-88E9-14D481113291}" type="slidenum">
               <a:rPr lang="en-GB" smtClean="0"/>
               <a:t>6</a:t>
-            </a:fld>
-            <a:endParaRPr lang="en-GB"/>
-          </a:p>
-        </p:txBody>
-      </p:sp>
-    </p:spTree>
-    <p:extLst>
-      <p:ext uri="{BB962C8B-B14F-4D97-AF65-F5344CB8AC3E}">
-        <p14:creationId xmlns:p14="http://schemas.microsoft.com/office/powerpoint/2010/main" val="3173181311"/>
-      </p:ext>
-    </p:extLst>
-  </p:cSld>
-  <p:clrMapOvr>
-    <a:masterClrMapping/>
-  </p:clrMapOvr>
-</p:sld>
-</file>
-
-<file path=ppt/slides/slide7.xml><?xml version="1.0" encoding="utf-8"?>
-<p:sld xmlns:a="http://schemas.openxmlformats.org/drawingml/2006/main" xmlns:r="http://schemas.openxmlformats.org/officeDocument/2006/relationships" xmlns:p="http://schemas.openxmlformats.org/presentationml/2006/main">
-  <p:cSld>
-    <p:spTree>
-      <p:nvGrpSpPr>
-        <p:cNvPr id="1" name=""/>
-        <p:cNvGrpSpPr/>
-        <p:nvPr/>
-      </p:nvGrpSpPr>
-      <p:grpSpPr>
-        <a:xfrm>
-          <a:off x="0" y="0"/>
-          <a:ext cx="0" cy="0"/>
-          <a:chOff x="0" y="0"/>
-          <a:chExt cx="0" cy="0"/>
-        </a:xfrm>
-      </p:grpSpPr>
-      <p:sp>
-        <p:nvSpPr>
-          <p:cNvPr id="2" name="Titel 1">
-            <a:extLst>
-              <a:ext uri="{FF2B5EF4-FFF2-40B4-BE49-F238E27FC236}">
-                <a16:creationId xmlns:a16="http://schemas.microsoft.com/office/drawing/2014/main" id="{3DBACD47-92FC-F367-8730-A52B59555AB1}"/>
-              </a:ext>
-            </a:extLst>
-          </p:cNvPr>
-          <p:cNvSpPr>
-            <a:spLocks noGrp="1"/>
-          </p:cNvSpPr>
-          <p:nvPr>
-            <p:ph type="title"/>
-          </p:nvPr>
-        </p:nvSpPr>
-        <p:spPr/>
-        <p:txBody>
-          <a:bodyPr/>
-          <a:lstStyle/>
-          <a:p>
-            <a:r>
-              <a:rPr lang="de-DE" dirty="0" err="1"/>
-              <a:t>Stationarity</a:t>
-            </a:r>
-            <a:endParaRPr lang="de-DE" dirty="0"/>
-          </a:p>
-        </p:txBody>
-      </p:sp>
-      <p:sp>
-        <p:nvSpPr>
-          <p:cNvPr id="3" name="Inhaltsplatzhalter 2">
-            <a:extLst>
-              <a:ext uri="{FF2B5EF4-FFF2-40B4-BE49-F238E27FC236}">
-                <a16:creationId xmlns:a16="http://schemas.microsoft.com/office/drawing/2014/main" id="{238EE37C-F9A6-CA96-1CCE-D61439094A48}"/>
-              </a:ext>
-            </a:extLst>
-          </p:cNvPr>
-          <p:cNvSpPr>
-            <a:spLocks noGrp="1"/>
-          </p:cNvSpPr>
-          <p:nvPr>
-            <p:ph idx="1"/>
-          </p:nvPr>
-        </p:nvSpPr>
-        <p:spPr/>
-        <p:txBody>
-          <a:bodyPr/>
-          <a:lstStyle/>
-          <a:p>
-            <a:endParaRPr lang="de-DE"/>
-          </a:p>
-        </p:txBody>
-      </p:sp>
-      <p:sp>
-        <p:nvSpPr>
-          <p:cNvPr id="4" name="Foliennummernplatzhalter 3">
-            <a:extLst>
-              <a:ext uri="{FF2B5EF4-FFF2-40B4-BE49-F238E27FC236}">
-                <a16:creationId xmlns:a16="http://schemas.microsoft.com/office/drawing/2014/main" id="{B284EF11-7B5B-A7D8-239D-941BC50B89FC}"/>
-              </a:ext>
-            </a:extLst>
-          </p:cNvPr>
-          <p:cNvSpPr>
-            <a:spLocks noGrp="1"/>
-          </p:cNvSpPr>
-          <p:nvPr>
-            <p:ph type="sldNum" sz="quarter" idx="12"/>
-          </p:nvPr>
-        </p:nvSpPr>
-        <p:spPr/>
-        <p:txBody>
-          <a:bodyPr/>
-          <a:lstStyle/>
-          <a:p>
-            <a:fld id="{3D4C94FE-FF23-4504-88E9-14D481113291}" type="slidenum">
-              <a:rPr lang="en-GB" smtClean="0"/>
-              <a:t>7</a:t>
             </a:fld>
             <a:endParaRPr lang="en-GB"/>
           </a:p>
@@ -22030,7 +22422,7 @@
 </p:sld>
 </file>
 
-<file path=ppt/slides/slide8.xml><?xml version="1.0" encoding="utf-8"?>
+<file path=ppt/slides/slide7.xml><?xml version="1.0" encoding="utf-8"?>
 <p:sld xmlns:a="http://schemas.openxmlformats.org/drawingml/2006/main" xmlns:r="http://schemas.openxmlformats.org/officeDocument/2006/relationships" xmlns:p="http://schemas.openxmlformats.org/presentationml/2006/main">
   <p:cSld>
     <p:spTree>
@@ -22122,6 +22514,118 @@
 </p:sld>
 </file>
 
+<file path=ppt/slides/slide8.xml><?xml version="1.0" encoding="utf-8"?>
+<p:sld xmlns:a="http://schemas.openxmlformats.org/drawingml/2006/main" xmlns:r="http://schemas.openxmlformats.org/officeDocument/2006/relationships" xmlns:p="http://schemas.openxmlformats.org/presentationml/2006/main">
+  <p:cSld>
+    <p:spTree>
+      <p:nvGrpSpPr>
+        <p:cNvPr id="1" name=""/>
+        <p:cNvGrpSpPr/>
+        <p:nvPr/>
+      </p:nvGrpSpPr>
+      <p:grpSpPr>
+        <a:xfrm>
+          <a:off x="0" y="0"/>
+          <a:ext cx="0" cy="0"/>
+          <a:chOff x="0" y="0"/>
+          <a:chExt cx="0" cy="0"/>
+        </a:xfrm>
+      </p:grpSpPr>
+      <p:sp>
+        <p:nvSpPr>
+          <p:cNvPr id="2" name="Titel 1">
+            <a:extLst>
+              <a:ext uri="{FF2B5EF4-FFF2-40B4-BE49-F238E27FC236}">
+                <a16:creationId xmlns:a16="http://schemas.microsoft.com/office/drawing/2014/main" id="{54637D7C-A7CD-210C-B823-50AFB58C8E5D}"/>
+              </a:ext>
+            </a:extLst>
+          </p:cNvPr>
+          <p:cNvSpPr>
+            <a:spLocks noGrp="1"/>
+          </p:cNvSpPr>
+          <p:nvPr>
+            <p:ph type="title"/>
+          </p:nvPr>
+        </p:nvSpPr>
+        <p:spPr/>
+        <p:txBody>
+          <a:bodyPr/>
+          <a:lstStyle/>
+          <a:p>
+            <a:r>
+              <a:rPr lang="de-DE" dirty="0"/>
+              <a:t>AR, MA, and ARIMA Models</a:t>
+            </a:r>
+          </a:p>
+        </p:txBody>
+      </p:sp>
+      <p:sp>
+        <p:nvSpPr>
+          <p:cNvPr id="3" name="Inhaltsplatzhalter 2">
+            <a:extLst>
+              <a:ext uri="{FF2B5EF4-FFF2-40B4-BE49-F238E27FC236}">
+                <a16:creationId xmlns:a16="http://schemas.microsoft.com/office/drawing/2014/main" id="{BB7018BF-AC50-D80C-B16C-C0F622FFC468}"/>
+              </a:ext>
+            </a:extLst>
+          </p:cNvPr>
+          <p:cNvSpPr>
+            <a:spLocks noGrp="1"/>
+          </p:cNvSpPr>
+          <p:nvPr>
+            <p:ph idx="1"/>
+          </p:nvPr>
+        </p:nvSpPr>
+        <p:spPr/>
+        <p:txBody>
+          <a:bodyPr/>
+          <a:lstStyle/>
+          <a:p>
+            <a:endParaRPr lang="de-DE"/>
+          </a:p>
+        </p:txBody>
+      </p:sp>
+      <p:sp>
+        <p:nvSpPr>
+          <p:cNvPr id="4" name="Foliennummernplatzhalter 3">
+            <a:extLst>
+              <a:ext uri="{FF2B5EF4-FFF2-40B4-BE49-F238E27FC236}">
+                <a16:creationId xmlns:a16="http://schemas.microsoft.com/office/drawing/2014/main" id="{5239F289-8D36-5BB6-F4B9-4132BA3F6478}"/>
+              </a:ext>
+            </a:extLst>
+          </p:cNvPr>
+          <p:cNvSpPr>
+            <a:spLocks noGrp="1"/>
+          </p:cNvSpPr>
+          <p:nvPr>
+            <p:ph type="sldNum" sz="quarter" idx="12"/>
+          </p:nvPr>
+        </p:nvSpPr>
+        <p:spPr/>
+        <p:txBody>
+          <a:bodyPr/>
+          <a:lstStyle/>
+          <a:p>
+            <a:fld id="{3D4C94FE-FF23-4504-88E9-14D481113291}" type="slidenum">
+              <a:rPr lang="en-GB" smtClean="0"/>
+              <a:t>8</a:t>
+            </a:fld>
+            <a:endParaRPr lang="en-GB"/>
+          </a:p>
+        </p:txBody>
+      </p:sp>
+    </p:spTree>
+    <p:extLst>
+      <p:ext uri="{BB962C8B-B14F-4D97-AF65-F5344CB8AC3E}">
+        <p14:creationId xmlns:p14="http://schemas.microsoft.com/office/powerpoint/2010/main" val="3159295460"/>
+      </p:ext>
+    </p:extLst>
+  </p:cSld>
+  <p:clrMapOvr>
+    <a:masterClrMapping/>
+  </p:clrMapOvr>
+</p:sld>
+</file>
+
 <file path=ppt/slides/slide9.xml><?xml version="1.0" encoding="utf-8"?>
 <p:sld xmlns:a="http://schemas.openxmlformats.org/drawingml/2006/main" xmlns:r="http://schemas.openxmlformats.org/officeDocument/2006/relationships" xmlns:p="http://schemas.openxmlformats.org/presentationml/2006/main">
   <p:cSld>
@@ -22141,10 +22645,10 @@
       </p:grpSpPr>
       <p:sp>
         <p:nvSpPr>
-          <p:cNvPr id="2" name="Titel 1">
-            <a:extLst>
-              <a:ext uri="{FF2B5EF4-FFF2-40B4-BE49-F238E27FC236}">
-                <a16:creationId xmlns:a16="http://schemas.microsoft.com/office/drawing/2014/main" id="{54637D7C-A7CD-210C-B823-50AFB58C8E5D}"/>
+          <p:cNvPr id="2" name="Title 1">
+            <a:extLst>
+              <a:ext uri="{FF2B5EF4-FFF2-40B4-BE49-F238E27FC236}">
+                <a16:creationId xmlns:a16="http://schemas.microsoft.com/office/drawing/2014/main" id="{2C126CCB-76F8-9110-D53A-279CD0B823D0}"/>
               </a:ext>
             </a:extLst>
           </p:cNvPr>
@@ -22161,70 +22665,52 @@
           <a:lstStyle/>
           <a:p>
             <a:r>
-              <a:rPr lang="de-DE" dirty="0"/>
-              <a:t>AR, MA, and ARIMA Models</a:t>
-            </a:r>
-          </a:p>
-        </p:txBody>
-      </p:sp>
-      <p:sp>
-        <p:nvSpPr>
-          <p:cNvPr id="3" name="Inhaltsplatzhalter 2">
-            <a:extLst>
-              <a:ext uri="{FF2B5EF4-FFF2-40B4-BE49-F238E27FC236}">
-                <a16:creationId xmlns:a16="http://schemas.microsoft.com/office/drawing/2014/main" id="{BB7018BF-AC50-D80C-B16C-C0F622FFC468}"/>
-              </a:ext>
-            </a:extLst>
-          </p:cNvPr>
-          <p:cNvSpPr>
-            <a:spLocks noGrp="1"/>
-          </p:cNvSpPr>
-          <p:nvPr>
-            <p:ph idx="1"/>
-          </p:nvPr>
-        </p:nvSpPr>
-        <p:spPr/>
-        <p:txBody>
-          <a:bodyPr/>
-          <a:lstStyle/>
-          <a:p>
-            <a:endParaRPr lang="de-DE"/>
-          </a:p>
-        </p:txBody>
-      </p:sp>
-      <p:sp>
-        <p:nvSpPr>
-          <p:cNvPr id="4" name="Foliennummernplatzhalter 3">
-            <a:extLst>
-              <a:ext uri="{FF2B5EF4-FFF2-40B4-BE49-F238E27FC236}">
-                <a16:creationId xmlns:a16="http://schemas.microsoft.com/office/drawing/2014/main" id="{5239F289-8D36-5BB6-F4B9-4132BA3F6478}"/>
-              </a:ext>
-            </a:extLst>
-          </p:cNvPr>
-          <p:cNvSpPr>
-            <a:spLocks noGrp="1"/>
-          </p:cNvSpPr>
-          <p:nvPr>
-            <p:ph type="sldNum" sz="quarter" idx="12"/>
-          </p:nvPr>
-        </p:nvSpPr>
-        <p:spPr/>
-        <p:txBody>
-          <a:bodyPr/>
-          <a:lstStyle/>
-          <a:p>
-            <a:fld id="{3D4C94FE-FF23-4504-88E9-14D481113291}" type="slidenum">
-              <a:rPr lang="en-GB" smtClean="0"/>
-              <a:t>9</a:t>
-            </a:fld>
-            <a:endParaRPr lang="en-GB"/>
-          </a:p>
-        </p:txBody>
-      </p:sp>
+              <a:rPr lang="en-GB" dirty="0"/>
+              <a:t>You need past data to learn from</a:t>
+            </a:r>
+          </a:p>
+        </p:txBody>
+      </p:sp>
+      <p:pic>
+        <p:nvPicPr>
+          <p:cNvPr id="9" name="Picture 8" descr="A graph showing the performance of training&#10;&#10;Description automatically generated">
+            <a:extLst>
+              <a:ext uri="{FF2B5EF4-FFF2-40B4-BE49-F238E27FC236}">
+                <a16:creationId xmlns:a16="http://schemas.microsoft.com/office/drawing/2014/main" id="{5B786528-7601-4E42-BE3F-95A3424E75F0}"/>
+              </a:ext>
+            </a:extLst>
+          </p:cNvPr>
+          <p:cNvPicPr>
+            <a:picLocks noChangeAspect="1"/>
+          </p:cNvPicPr>
+          <p:nvPr/>
+        </p:nvPicPr>
+        <p:blipFill>
+          <a:blip r:embed="rId2">
+            <a:extLst>
+              <a:ext uri="{28A0092B-C50C-407E-A947-70E740481C1C}">
+                <a14:useLocalDpi xmlns:a14="http://schemas.microsoft.com/office/drawing/2010/main" val="0"/>
+              </a:ext>
+            </a:extLst>
+          </a:blip>
+          <a:stretch>
+            <a:fillRect/>
+          </a:stretch>
+        </p:blipFill>
+        <p:spPr>
+          <a:xfrm>
+            <a:off x="1981668" y="1482292"/>
+            <a:ext cx="8228663" cy="5375708"/>
+          </a:xfrm>
+          <a:prstGeom prst="rect">
+            <a:avLst/>
+          </a:prstGeom>
+        </p:spPr>
+      </p:pic>
     </p:spTree>
     <p:extLst>
       <p:ext uri="{BB962C8B-B14F-4D97-AF65-F5344CB8AC3E}">
-        <p14:creationId xmlns:p14="http://schemas.microsoft.com/office/powerpoint/2010/main" val="3159295460"/>
+        <p14:creationId xmlns:p14="http://schemas.microsoft.com/office/powerpoint/2010/main" val="1378669131"/>
       </p:ext>
     </p:extLst>
   </p:cSld>

--- a/slides/9_time_series.pptx
+++ b/slides/9_time_series.pptx
@@ -6,42 +6,43 @@
     <p:sldMasterId id="2147483672" r:id="rId2"/>
   </p:sldMasterIdLst>
   <p:notesMasterIdLst>
-    <p:notesMasterId r:id="rId36"/>
+    <p:notesMasterId r:id="rId37"/>
   </p:notesMasterIdLst>
   <p:sldIdLst>
     <p:sldId id="256" r:id="rId3"/>
     <p:sldId id="2076137264" r:id="rId4"/>
     <p:sldId id="2076137266" r:id="rId5"/>
-    <p:sldId id="265" r:id="rId6"/>
-    <p:sldId id="258" r:id="rId7"/>
-    <p:sldId id="259" r:id="rId8"/>
-    <p:sldId id="2076137267" r:id="rId9"/>
-    <p:sldId id="2076137269" r:id="rId10"/>
-    <p:sldId id="2076137290" r:id="rId11"/>
-    <p:sldId id="2076137298" r:id="rId12"/>
-    <p:sldId id="2076137291" r:id="rId13"/>
-    <p:sldId id="2076137292" r:id="rId14"/>
-    <p:sldId id="2076137274" r:id="rId15"/>
-    <p:sldId id="2076137285" r:id="rId16"/>
-    <p:sldId id="2076137287" r:id="rId17"/>
-    <p:sldId id="2076137282" r:id="rId18"/>
-    <p:sldId id="2076137296" r:id="rId19"/>
-    <p:sldId id="262" r:id="rId20"/>
-    <p:sldId id="2076137295" r:id="rId21"/>
-    <p:sldId id="2076137278" r:id="rId22"/>
-    <p:sldId id="2076137280" r:id="rId23"/>
-    <p:sldId id="2076137299" r:id="rId24"/>
-    <p:sldId id="276" r:id="rId25"/>
-    <p:sldId id="277" r:id="rId26"/>
-    <p:sldId id="267" r:id="rId27"/>
-    <p:sldId id="261" r:id="rId28"/>
-    <p:sldId id="268" r:id="rId29"/>
-    <p:sldId id="2076137243" r:id="rId30"/>
-    <p:sldId id="2076137297" r:id="rId31"/>
-    <p:sldId id="2076137294" r:id="rId32"/>
-    <p:sldId id="2076137300" r:id="rId33"/>
-    <p:sldId id="2076137279" r:id="rId34"/>
-    <p:sldId id="2076137293" r:id="rId35"/>
+    <p:sldId id="2076137301" r:id="rId6"/>
+    <p:sldId id="265" r:id="rId7"/>
+    <p:sldId id="258" r:id="rId8"/>
+    <p:sldId id="259" r:id="rId9"/>
+    <p:sldId id="2076137267" r:id="rId10"/>
+    <p:sldId id="2076137269" r:id="rId11"/>
+    <p:sldId id="2076137290" r:id="rId12"/>
+    <p:sldId id="2076137298" r:id="rId13"/>
+    <p:sldId id="2076137291" r:id="rId14"/>
+    <p:sldId id="2076137292" r:id="rId15"/>
+    <p:sldId id="2076137274" r:id="rId16"/>
+    <p:sldId id="2076137285" r:id="rId17"/>
+    <p:sldId id="2076137287" r:id="rId18"/>
+    <p:sldId id="2076137282" r:id="rId19"/>
+    <p:sldId id="2076137296" r:id="rId20"/>
+    <p:sldId id="262" r:id="rId21"/>
+    <p:sldId id="2076137295" r:id="rId22"/>
+    <p:sldId id="2076137278" r:id="rId23"/>
+    <p:sldId id="2076137280" r:id="rId24"/>
+    <p:sldId id="2076137299" r:id="rId25"/>
+    <p:sldId id="276" r:id="rId26"/>
+    <p:sldId id="277" r:id="rId27"/>
+    <p:sldId id="267" r:id="rId28"/>
+    <p:sldId id="261" r:id="rId29"/>
+    <p:sldId id="268" r:id="rId30"/>
+    <p:sldId id="2076137243" r:id="rId31"/>
+    <p:sldId id="2076137297" r:id="rId32"/>
+    <p:sldId id="2076137294" r:id="rId33"/>
+    <p:sldId id="2076137300" r:id="rId34"/>
+    <p:sldId id="2076137279" r:id="rId35"/>
+    <p:sldId id="2076137293" r:id="rId36"/>
   </p:sldIdLst>
   <p:sldSz cx="12192000" cy="6858000"/>
   <p:notesSz cx="6858000" cy="9144000"/>
@@ -3914,7 +3915,7 @@
           <a:p>
             <a:fld id="{7B97FCB6-4C2D-C04F-941C-940A5CA28665}" type="datetimeFigureOut">
               <a:rPr lang="en-DE" smtClean="0"/>
-              <a:t>5/31/26</a:t>
+              <a:t>6/3/26</a:t>
             </a:fld>
             <a:endParaRPr lang="en-DE"/>
           </a:p>
@@ -4331,7 +4332,7 @@
           <a:p>
             <a:fld id="{A671F730-DF02-D844-B7D2-5C36B868D65E}" type="datetime1">
               <a:rPr lang="de-DE" smtClean="0"/>
-              <a:t>31.05.26</a:t>
+              <a:t>03.06.26</a:t>
             </a:fld>
             <a:endParaRPr lang="en-GB"/>
           </a:p>
@@ -4531,7 +4532,7 @@
           <a:p>
             <a:fld id="{91F8A7FD-8B09-134A-B86A-12CFCABE9BF6}" type="datetime1">
               <a:rPr lang="de-DE" smtClean="0"/>
-              <a:t>31.05.26</a:t>
+              <a:t>03.06.26</a:t>
             </a:fld>
             <a:endParaRPr lang="en-GB"/>
           </a:p>
@@ -4741,7 +4742,7 @@
           <a:p>
             <a:fld id="{151D7804-2221-B043-ADD6-EAC300D190C4}" type="datetime1">
               <a:rPr lang="de-DE" smtClean="0"/>
-              <a:t>31.05.26</a:t>
+              <a:t>03.06.26</a:t>
             </a:fld>
             <a:endParaRPr lang="en-GB"/>
           </a:p>
@@ -4963,7 +4964,7 @@
           <a:p>
             <a:fld id="{D86CD148-6579-6847-9085-C2DFC06D9911}" type="datetime1">
               <a:rPr lang="de-DE" smtClean="0"/>
-              <a:t>31.05.26</a:t>
+              <a:t>03.06.26</a:t>
             </a:fld>
             <a:endParaRPr lang="en-GB"/>
           </a:p>
@@ -5163,7 +5164,7 @@
           <a:p>
             <a:fld id="{944B9896-725F-5F41-968D-B249CDCECD4B}" type="datetime1">
               <a:rPr lang="de-DE" smtClean="0"/>
-              <a:t>31.05.26</a:t>
+              <a:t>03.06.26</a:t>
             </a:fld>
             <a:endParaRPr lang="en-GB"/>
           </a:p>
@@ -5439,7 +5440,7 @@
           <a:p>
             <a:fld id="{DE21EDB0-62ED-0F44-BCCB-315ECDF8986E}" type="datetime1">
               <a:rPr lang="de-DE" smtClean="0"/>
-              <a:t>31.05.26</a:t>
+              <a:t>03.06.26</a:t>
             </a:fld>
             <a:endParaRPr lang="en-GB"/>
           </a:p>
@@ -5707,7 +5708,7 @@
           <a:p>
             <a:fld id="{B47441AC-04C5-4141-B12F-5D4765F5F703}" type="datetime1">
               <a:rPr lang="de-DE" smtClean="0"/>
-              <a:t>31.05.26</a:t>
+              <a:t>03.06.26</a:t>
             </a:fld>
             <a:endParaRPr lang="en-GB"/>
           </a:p>
@@ -6122,7 +6123,7 @@
           <a:p>
             <a:fld id="{A3897A17-B71F-8044-B6E8-B980712F9F1C}" type="datetime1">
               <a:rPr lang="de-DE" smtClean="0"/>
-              <a:t>31.05.26</a:t>
+              <a:t>03.06.26</a:t>
             </a:fld>
             <a:endParaRPr lang="en-GB"/>
           </a:p>
@@ -6264,7 +6265,7 @@
           <a:p>
             <a:fld id="{80822BC6-EE37-5D43-AD2D-81016A05F62F}" type="datetime1">
               <a:rPr lang="de-DE" smtClean="0"/>
-              <a:t>31.05.26</a:t>
+              <a:t>03.06.26</a:t>
             </a:fld>
             <a:endParaRPr lang="en-GB"/>
           </a:p>
@@ -6377,7 +6378,7 @@
           <a:p>
             <a:fld id="{35F790C0-D9BF-2841-99FD-9B184C137CFB}" type="datetime1">
               <a:rPr lang="de-DE" smtClean="0"/>
-              <a:t>31.05.26</a:t>
+              <a:t>03.06.26</a:t>
             </a:fld>
             <a:endParaRPr lang="en-GB"/>
           </a:p>
@@ -6690,7 +6691,7 @@
           <a:p>
             <a:fld id="{EF4F5A5B-3C8E-AF41-84DB-27AF6E3D503A}" type="datetime1">
               <a:rPr lang="de-DE" smtClean="0"/>
-              <a:t>31.05.26</a:t>
+              <a:t>03.06.26</a:t>
             </a:fld>
             <a:endParaRPr lang="en-GB"/>
           </a:p>
@@ -6890,7 +6891,7 @@
           <a:p>
             <a:fld id="{FB763605-BC0F-BE4A-9CA2-7E881E5B6AB9}" type="datetime1">
               <a:rPr lang="de-DE" smtClean="0"/>
-              <a:t>31.05.26</a:t>
+              <a:t>03.06.26</a:t>
             </a:fld>
             <a:endParaRPr lang="en-GB"/>
           </a:p>
@@ -7179,7 +7180,7 @@
           <a:p>
             <a:fld id="{5344FDD7-1045-FF4A-9F7F-32F993B74209}" type="datetime1">
               <a:rPr lang="de-DE" smtClean="0"/>
-              <a:t>31.05.26</a:t>
+              <a:t>03.06.26</a:t>
             </a:fld>
             <a:endParaRPr lang="en-GB"/>
           </a:p>
@@ -7379,7 +7380,7 @@
           <a:p>
             <a:fld id="{64F8A159-0DC8-8A40-8E97-CD9F91E1ECEB}" type="datetime1">
               <a:rPr lang="de-DE" smtClean="0"/>
-              <a:t>31.05.26</a:t>
+              <a:t>03.06.26</a:t>
             </a:fld>
             <a:endParaRPr lang="en-GB"/>
           </a:p>
@@ -7589,7 +7590,7 @@
           <a:p>
             <a:fld id="{DF5A322E-2536-C646-AAFD-805AFEAD9D8B}" type="datetime1">
               <a:rPr lang="de-DE" smtClean="0"/>
-              <a:t>31.05.26</a:t>
+              <a:t>03.06.26</a:t>
             </a:fld>
             <a:endParaRPr lang="en-GB"/>
           </a:p>
@@ -7865,7 +7866,7 @@
           <a:p>
             <a:fld id="{CFB05203-D8E2-D740-B0A8-3133157B285D}" type="datetime1">
               <a:rPr lang="de-DE" smtClean="0"/>
-              <a:t>31.05.26</a:t>
+              <a:t>03.06.26</a:t>
             </a:fld>
             <a:endParaRPr lang="en-GB"/>
           </a:p>
@@ -8133,7 +8134,7 @@
           <a:p>
             <a:fld id="{597B0DE4-1FE5-804F-935C-F13CBE1EC10B}" type="datetime1">
               <a:rPr lang="de-DE" smtClean="0"/>
-              <a:t>31.05.26</a:t>
+              <a:t>03.06.26</a:t>
             </a:fld>
             <a:endParaRPr lang="en-GB"/>
           </a:p>
@@ -8548,7 +8549,7 @@
           <a:p>
             <a:fld id="{4E083229-0BD0-DF46-855A-03CE88F68305}" type="datetime1">
               <a:rPr lang="de-DE" smtClean="0"/>
-              <a:t>31.05.26</a:t>
+              <a:t>03.06.26</a:t>
             </a:fld>
             <a:endParaRPr lang="en-GB"/>
           </a:p>
@@ -8690,7 +8691,7 @@
           <a:p>
             <a:fld id="{C146F073-3CA6-9540-9011-82863424863B}" type="datetime1">
               <a:rPr lang="de-DE" smtClean="0"/>
-              <a:t>31.05.26</a:t>
+              <a:t>03.06.26</a:t>
             </a:fld>
             <a:endParaRPr lang="en-GB"/>
           </a:p>
@@ -8803,7 +8804,7 @@
           <a:p>
             <a:fld id="{E72BA4D0-7638-074B-A193-92E17E24465E}" type="datetime1">
               <a:rPr lang="de-DE" smtClean="0"/>
-              <a:t>31.05.26</a:t>
+              <a:t>03.06.26</a:t>
             </a:fld>
             <a:endParaRPr lang="en-GB"/>
           </a:p>
@@ -9116,7 +9117,7 @@
           <a:p>
             <a:fld id="{6A4C7C80-BF52-294B-AA61-2ADB05EF332B}" type="datetime1">
               <a:rPr lang="de-DE" smtClean="0"/>
-              <a:t>31.05.26</a:t>
+              <a:t>03.06.26</a:t>
             </a:fld>
             <a:endParaRPr lang="en-GB"/>
           </a:p>
@@ -9405,7 +9406,7 @@
           <a:p>
             <a:fld id="{9E0932B8-8631-4B44-841F-847DCABD71B2}" type="datetime1">
               <a:rPr lang="de-DE" smtClean="0"/>
-              <a:t>31.05.26</a:t>
+              <a:t>03.06.26</a:t>
             </a:fld>
             <a:endParaRPr lang="en-GB"/>
           </a:p>
@@ -9648,7 +9649,7 @@
           <a:p>
             <a:fld id="{24B0A847-D306-624C-A590-4C01F2C03BB3}" type="datetime1">
               <a:rPr lang="de-DE" smtClean="0"/>
-              <a:t>31.05.26</a:t>
+              <a:t>03.06.26</a:t>
             </a:fld>
             <a:endParaRPr lang="en-GB"/>
           </a:p>
@@ -10219,7 +10220,7 @@
           <a:p>
             <a:fld id="{189D47B1-5D41-1C4B-A96C-2FC00BD73AAE}" type="datetime1">
               <a:rPr lang="de-DE" smtClean="0"/>
-              <a:t>31.05.26</a:t>
+              <a:t>03.06.26</a:t>
             </a:fld>
             <a:endParaRPr lang="en-GB"/>
           </a:p>
@@ -10730,7 +10731,7 @@
           <p:cNvPr id="2" name="Titel 1">
             <a:extLst>
               <a:ext uri="{FF2B5EF4-FFF2-40B4-BE49-F238E27FC236}">
-                <a16:creationId xmlns:a16="http://schemas.microsoft.com/office/drawing/2014/main" id="{AFE55EB3-06CF-D0B3-AE01-A5FEE6C6AAFC}"/>
+                <a16:creationId xmlns:a16="http://schemas.microsoft.com/office/drawing/2014/main" id="{ECD7B896-89B9-FA17-ACD4-DB9B86E906E0}"/>
               </a:ext>
             </a:extLst>
           </p:cNvPr>
@@ -10747,343 +10748,580 @@
           <a:lstStyle/>
           <a:p>
             <a:r>
-              <a:rPr lang="de-DE" dirty="0" err="1"/>
-              <a:t>Stationarity</a:t>
-            </a:r>
-            <a:endParaRPr lang="de-DE" dirty="0"/>
+              <a:rPr lang="de-DE" dirty="0"/>
+              <a:t>ARIMA</a:t>
+            </a:r>
           </a:p>
         </p:txBody>
       </p:sp>
-      <p:sp>
-        <p:nvSpPr>
-          <p:cNvPr id="3" name="Inhaltsplatzhalter 2">
-            <a:extLst>
-              <a:ext uri="{FF2B5EF4-FFF2-40B4-BE49-F238E27FC236}">
-                <a16:creationId xmlns:a16="http://schemas.microsoft.com/office/drawing/2014/main" id="{38DEC32F-B779-E4F9-72D5-22C31A0DBBE2}"/>
-              </a:ext>
-            </a:extLst>
-          </p:cNvPr>
-          <p:cNvSpPr>
-            <a:spLocks noGrp="1"/>
-          </p:cNvSpPr>
-          <p:nvPr>
-            <p:ph idx="1"/>
-          </p:nvPr>
-        </p:nvSpPr>
-        <p:spPr>
-          <a:xfrm>
-            <a:off x="838200" y="1825625"/>
-            <a:ext cx="11006470" cy="4351338"/>
-          </a:xfrm>
-        </p:spPr>
-        <p:txBody>
-          <a:bodyPr>
-            <a:normAutofit fontScale="92500"/>
-          </a:bodyPr>
-          <a:lstStyle/>
-          <a:p>
-            <a:pPr marL="0" indent="0">
-              <a:buNone/>
-            </a:pPr>
-            <a:r>
-              <a:rPr lang="de-DE" dirty="0" err="1"/>
-              <a:t>mean</a:t>
-            </a:r>
-            <a:r>
-              <a:rPr lang="de-DE" dirty="0"/>
-              <a:t>, </a:t>
-            </a:r>
-            <a:r>
-              <a:rPr lang="de-DE" dirty="0" err="1"/>
-              <a:t>variance</a:t>
-            </a:r>
-            <a:r>
-              <a:rPr lang="de-DE" dirty="0"/>
-              <a:t>, </a:t>
-            </a:r>
-            <a:r>
-              <a:rPr lang="de-DE" dirty="0" err="1"/>
-              <a:t>autocorrelation</a:t>
-            </a:r>
-            <a:r>
-              <a:rPr lang="de-DE" dirty="0"/>
-              <a:t> </a:t>
-            </a:r>
-            <a:r>
-              <a:rPr lang="de-DE" dirty="0" err="1"/>
-              <a:t>structure</a:t>
-            </a:r>
-            <a:r>
-              <a:rPr lang="de-DE" dirty="0"/>
-              <a:t> </a:t>
-            </a:r>
-            <a:r>
-              <a:rPr lang="de-DE" dirty="0" err="1"/>
-              <a:t>remain</a:t>
-            </a:r>
-            <a:r>
-              <a:rPr lang="de-DE" dirty="0"/>
-              <a:t> </a:t>
-            </a:r>
-            <a:r>
-              <a:rPr lang="de-DE" dirty="0" err="1"/>
-              <a:t>stable</a:t>
-            </a:r>
-            <a:r>
-              <a:rPr lang="de-DE" dirty="0"/>
-              <a:t> </a:t>
-            </a:r>
-            <a:r>
-              <a:rPr lang="de-DE" dirty="0" err="1"/>
-              <a:t>over</a:t>
-            </a:r>
-            <a:r>
-              <a:rPr lang="de-DE" dirty="0"/>
-              <a:t> time</a:t>
-            </a:r>
-          </a:p>
-          <a:p>
-            <a:pPr marL="0" indent="0">
-              <a:buNone/>
-            </a:pPr>
-            <a:endParaRPr lang="de-DE" dirty="0"/>
-          </a:p>
-          <a:p>
-            <a:pPr marL="0" indent="0">
-              <a:buNone/>
-            </a:pPr>
-            <a:r>
-              <a:rPr lang="de-DE" dirty="0" err="1"/>
-              <a:t>important</a:t>
-            </a:r>
-            <a:r>
-              <a:rPr lang="de-DE" dirty="0"/>
-              <a:t> </a:t>
-            </a:r>
-            <a:r>
-              <a:rPr lang="de-DE" dirty="0" err="1"/>
-              <a:t>for</a:t>
-            </a:r>
-            <a:r>
-              <a:rPr lang="de-DE" dirty="0"/>
-              <a:t> ARMA </a:t>
-            </a:r>
-            <a:r>
-              <a:rPr lang="de-DE" dirty="0" err="1"/>
-              <a:t>assumptions</a:t>
-            </a:r>
-            <a:r>
-              <a:rPr lang="de-DE" dirty="0"/>
-              <a:t>, </a:t>
-            </a:r>
-            <a:r>
-              <a:rPr lang="de-DE" dirty="0" err="1"/>
-              <a:t>easier</a:t>
-            </a:r>
-            <a:r>
-              <a:rPr lang="de-DE" dirty="0"/>
-              <a:t> </a:t>
-            </a:r>
-            <a:r>
-              <a:rPr lang="de-DE" dirty="0" err="1"/>
-              <a:t>generalization</a:t>
-            </a:r>
-            <a:r>
-              <a:rPr lang="de-DE" dirty="0"/>
-              <a:t>, </a:t>
-            </a:r>
-            <a:r>
-              <a:rPr lang="de-DE" dirty="0" err="1"/>
-              <a:t>stable</a:t>
-            </a:r>
-            <a:r>
-              <a:rPr lang="de-DE" dirty="0"/>
-              <a:t> </a:t>
-            </a:r>
-            <a:r>
-              <a:rPr lang="de-DE" dirty="0" err="1"/>
-              <a:t>relationships</a:t>
-            </a:r>
-            <a:endParaRPr lang="de-DE" dirty="0"/>
-          </a:p>
-          <a:p>
-            <a:pPr marL="0" indent="0">
-              <a:buNone/>
-            </a:pPr>
-            <a:endParaRPr lang="de-DE" dirty="0"/>
-          </a:p>
-          <a:p>
-            <a:pPr marL="0" indent="0">
-              <a:buNone/>
-            </a:pPr>
-            <a:r>
-              <a:rPr lang="de-DE" dirty="0" err="1"/>
-              <a:t>common</a:t>
-            </a:r>
-            <a:r>
-              <a:rPr lang="de-DE" dirty="0"/>
-              <a:t> fixes:</a:t>
-            </a:r>
-          </a:p>
-          <a:p>
-            <a:r>
-              <a:rPr lang="de-DE" dirty="0" err="1"/>
-              <a:t>differencing</a:t>
-            </a:r>
-            <a:endParaRPr lang="de-DE" dirty="0"/>
-          </a:p>
-          <a:p>
-            <a:r>
-              <a:rPr lang="de-DE" dirty="0"/>
-              <a:t>log </a:t>
-            </a:r>
-            <a:r>
-              <a:rPr lang="de-DE" dirty="0" err="1"/>
-              <a:t>transform</a:t>
-            </a:r>
-            <a:r>
-              <a:rPr lang="de-DE" dirty="0"/>
-              <a:t> (</a:t>
-            </a:r>
-            <a:r>
-              <a:rPr lang="de-DE" dirty="0" err="1"/>
-              <a:t>converts</a:t>
-            </a:r>
-            <a:r>
-              <a:rPr lang="de-DE" dirty="0"/>
-              <a:t> </a:t>
-            </a:r>
-            <a:r>
-              <a:rPr lang="de-DE" dirty="0" err="1"/>
-              <a:t>multiplicative</a:t>
-            </a:r>
-            <a:r>
-              <a:rPr lang="de-DE" dirty="0"/>
-              <a:t> </a:t>
-            </a:r>
-            <a:r>
-              <a:rPr lang="de-DE" dirty="0" err="1"/>
-              <a:t>relationships</a:t>
-            </a:r>
-            <a:r>
-              <a:rPr lang="de-DE" dirty="0"/>
-              <a:t> </a:t>
-            </a:r>
-            <a:r>
-              <a:rPr lang="de-DE" dirty="0" err="1"/>
-              <a:t>into</a:t>
-            </a:r>
-            <a:r>
-              <a:rPr lang="de-DE" dirty="0"/>
-              <a:t> additive </a:t>
-            </a:r>
-            <a:r>
-              <a:rPr lang="de-DE" dirty="0" err="1"/>
-              <a:t>ones</a:t>
-            </a:r>
-            <a:r>
-              <a:rPr lang="de-DE" dirty="0"/>
-              <a:t>, </a:t>
-            </a:r>
-            <a:r>
-              <a:rPr lang="de-DE" dirty="0" err="1"/>
-              <a:t>forcing</a:t>
-            </a:r>
-            <a:r>
-              <a:rPr lang="de-DE" dirty="0"/>
-              <a:t> </a:t>
-            </a:r>
-            <a:r>
-              <a:rPr lang="de-DE" dirty="0" err="1"/>
-              <a:t>variations</a:t>
-            </a:r>
-            <a:r>
-              <a:rPr lang="de-DE" dirty="0"/>
-              <a:t> </a:t>
-            </a:r>
-            <a:r>
-              <a:rPr lang="de-DE" dirty="0" err="1"/>
-              <a:t>to</a:t>
-            </a:r>
-            <a:r>
-              <a:rPr lang="de-DE" dirty="0"/>
-              <a:t> </a:t>
-            </a:r>
-            <a:r>
-              <a:rPr lang="de-DE" dirty="0" err="1"/>
-              <a:t>remain</a:t>
-            </a:r>
-            <a:r>
-              <a:rPr lang="de-DE" dirty="0"/>
-              <a:t> </a:t>
-            </a:r>
-            <a:r>
-              <a:rPr lang="de-DE" dirty="0" err="1"/>
-              <a:t>consistent</a:t>
-            </a:r>
-            <a:r>
-              <a:rPr lang="de-DE" dirty="0"/>
-              <a:t> </a:t>
-            </a:r>
-            <a:r>
-              <a:rPr lang="de-DE" dirty="0" err="1"/>
-              <a:t>throughout</a:t>
-            </a:r>
-            <a:r>
-              <a:rPr lang="de-DE" dirty="0"/>
-              <a:t> </a:t>
-            </a:r>
-            <a:r>
-              <a:rPr lang="de-DE" dirty="0" err="1"/>
-              <a:t>the</a:t>
-            </a:r>
-            <a:r>
-              <a:rPr lang="de-DE" dirty="0"/>
-              <a:t> </a:t>
-            </a:r>
-            <a:r>
-              <a:rPr lang="de-DE" dirty="0" err="1"/>
-              <a:t>entire</a:t>
-            </a:r>
-            <a:r>
-              <a:rPr lang="de-DE" dirty="0"/>
-              <a:t> </a:t>
-            </a:r>
-            <a:r>
-              <a:rPr lang="de-DE" dirty="0" err="1"/>
-              <a:t>timeline</a:t>
-            </a:r>
-            <a:r>
-              <a:rPr lang="de-DE" dirty="0"/>
-              <a:t>)</a:t>
-            </a:r>
-          </a:p>
-          <a:p>
-            <a:r>
-              <a:rPr lang="de-DE" dirty="0" err="1"/>
-              <a:t>seasonal</a:t>
-            </a:r>
-            <a:r>
-              <a:rPr lang="de-DE" dirty="0"/>
-              <a:t> </a:t>
-            </a:r>
-            <a:r>
-              <a:rPr lang="de-DE" dirty="0" err="1"/>
-              <a:t>adjustment</a:t>
-            </a:r>
-            <a:endParaRPr lang="de-DE" dirty="0"/>
-          </a:p>
-          <a:p>
-            <a:endParaRPr lang="de-DE" dirty="0"/>
-          </a:p>
-        </p:txBody>
-      </p:sp>
+      <mc:AlternateContent xmlns:mc="http://schemas.openxmlformats.org/markup-compatibility/2006" xmlns:a14="http://schemas.microsoft.com/office/drawing/2010/main">
+        <mc:Choice Requires="a14">
+          <p:sp>
+            <p:nvSpPr>
+              <p:cNvPr id="3" name="Inhaltsplatzhalter 2">
+                <a:extLst>
+                  <a:ext uri="{FF2B5EF4-FFF2-40B4-BE49-F238E27FC236}">
+                    <a16:creationId xmlns:a16="http://schemas.microsoft.com/office/drawing/2014/main" id="{C04A1ED3-77ED-83D5-8D45-7512437366E8}"/>
+                  </a:ext>
+                </a:extLst>
+              </p:cNvPr>
+              <p:cNvSpPr>
+                <a:spLocks noGrp="1"/>
+              </p:cNvSpPr>
+              <p:nvPr>
+                <p:ph idx="1"/>
+              </p:nvPr>
+            </p:nvSpPr>
+            <p:spPr>
+              <a:xfrm>
+                <a:off x="838200" y="1825625"/>
+                <a:ext cx="10515600" cy="4667250"/>
+              </a:xfrm>
+            </p:spPr>
+            <p:txBody>
+              <a:bodyPr>
+                <a:normAutofit fontScale="85000" lnSpcReduction="20000"/>
+              </a:bodyPr>
+              <a:lstStyle/>
+              <a:p>
+                <a:pPr marL="0" indent="0">
+                  <a:buNone/>
+                </a:pPr>
+                <a:r>
+                  <a:rPr lang="de-DE" dirty="0" err="1"/>
+                  <a:t>idea</a:t>
+                </a:r>
+                <a:r>
+                  <a:rPr lang="de-DE" dirty="0"/>
+                  <a:t>: </a:t>
+                </a:r>
+                <a:r>
+                  <a:rPr lang="de-DE" dirty="0" err="1"/>
+                  <a:t>extend</a:t>
+                </a:r>
+                <a:r>
+                  <a:rPr lang="de-DE" dirty="0"/>
+                  <a:t> ARMA </a:t>
+                </a:r>
+                <a:r>
+                  <a:rPr lang="de-DE" dirty="0" err="1"/>
+                  <a:t>to</a:t>
+                </a:r>
+                <a:r>
+                  <a:rPr lang="de-DE" dirty="0"/>
+                  <a:t> handle non-</a:t>
+                </a:r>
+                <a:r>
+                  <a:rPr lang="de-DE" dirty="0" err="1"/>
+                  <a:t>stationary</a:t>
+                </a:r>
+                <a:r>
+                  <a:rPr lang="de-DE" dirty="0"/>
+                  <a:t> time </a:t>
+                </a:r>
+                <a:r>
+                  <a:rPr lang="de-DE" dirty="0" err="1"/>
+                  <a:t>series</a:t>
+                </a:r>
+                <a:r>
+                  <a:rPr lang="de-DE" dirty="0"/>
+                  <a:t> </a:t>
+                </a:r>
+              </a:p>
+              <a:p>
+                <a:pPr marL="0" indent="0">
+                  <a:buNone/>
+                </a:pPr>
+                <a:endParaRPr lang="de-DE" dirty="0"/>
+              </a:p>
+              <a:p>
+                <a:pPr marL="0" indent="0">
+                  <a:buNone/>
+                </a:pPr>
+                <a:r>
+                  <a:rPr lang="de-DE" dirty="0" err="1"/>
+                  <a:t>remove</a:t>
+                </a:r>
+                <a:r>
+                  <a:rPr lang="de-DE" dirty="0"/>
+                  <a:t> </a:t>
+                </a:r>
+                <a:r>
+                  <a:rPr lang="de-DE" dirty="0" err="1"/>
+                  <a:t>trend</a:t>
+                </a:r>
+                <a:r>
+                  <a:rPr lang="de-DE" dirty="0"/>
+                  <a:t> </a:t>
+                </a:r>
+                <a:r>
+                  <a:rPr lang="de-DE" dirty="0" err="1"/>
+                  <a:t>by</a:t>
+                </a:r>
+                <a:r>
+                  <a:rPr lang="de-DE" dirty="0"/>
+                  <a:t> </a:t>
+                </a:r>
+                <a:r>
+                  <a:rPr lang="de-DE" dirty="0" err="1"/>
+                  <a:t>differencing</a:t>
+                </a:r>
+                <a:r>
+                  <a:rPr lang="de-DE" dirty="0"/>
+                  <a:t>: </a:t>
+                </a:r>
+                <a14:m>
+                  <m:oMath xmlns:m="http://schemas.openxmlformats.org/officeDocument/2006/math">
+                    <m:sSubSup>
+                      <m:sSubSupPr>
+                        <m:ctrlPr>
+                          <a:rPr lang="de-DE" i="1" smtClean="0">
+                            <a:latin typeface="Cambria Math" panose="02040503050406030204" pitchFamily="18" charset="0"/>
+                          </a:rPr>
+                        </m:ctrlPr>
+                      </m:sSubSupPr>
+                      <m:e>
+                        <m:r>
+                          <a:rPr lang="de-DE" b="0" i="1" smtClean="0">
+                            <a:latin typeface="Cambria Math" panose="02040503050406030204" pitchFamily="18" charset="0"/>
+                          </a:rPr>
+                          <m:t>𝑦</m:t>
+                        </m:r>
+                      </m:e>
+                      <m:sub>
+                        <m:r>
+                          <a:rPr lang="de-DE" b="0" i="1" smtClean="0">
+                            <a:latin typeface="Cambria Math" panose="02040503050406030204" pitchFamily="18" charset="0"/>
+                          </a:rPr>
+                          <m:t>𝑡</m:t>
+                        </m:r>
+                      </m:sub>
+                      <m:sup>
+                        <m:r>
+                          <a:rPr lang="de-DE" b="0" i="1" smtClean="0">
+                            <a:latin typeface="Cambria Math" panose="02040503050406030204" pitchFamily="18" charset="0"/>
+                          </a:rPr>
+                          <m:t>′</m:t>
+                        </m:r>
+                      </m:sup>
+                    </m:sSubSup>
+                    <m:r>
+                      <a:rPr lang="de-DE" b="0" i="1" smtClean="0">
+                        <a:latin typeface="Cambria Math" panose="02040503050406030204" pitchFamily="18" charset="0"/>
+                      </a:rPr>
+                      <m:t>=</m:t>
+                    </m:r>
+                    <m:sSub>
+                      <m:sSubPr>
+                        <m:ctrlPr>
+                          <a:rPr lang="de-DE" i="1" smtClean="0">
+                            <a:latin typeface="Cambria Math" panose="02040503050406030204" pitchFamily="18" charset="0"/>
+                          </a:rPr>
+                        </m:ctrlPr>
+                      </m:sSubPr>
+                      <m:e>
+                        <m:r>
+                          <a:rPr lang="de-DE" b="0" i="1" smtClean="0">
+                            <a:latin typeface="Cambria Math" panose="02040503050406030204" pitchFamily="18" charset="0"/>
+                          </a:rPr>
+                          <m:t>𝑦</m:t>
+                        </m:r>
+                      </m:e>
+                      <m:sub>
+                        <m:r>
+                          <a:rPr lang="de-DE" b="0" i="1" smtClean="0">
+                            <a:latin typeface="Cambria Math" panose="02040503050406030204" pitchFamily="18" charset="0"/>
+                          </a:rPr>
+                          <m:t>𝑡</m:t>
+                        </m:r>
+                      </m:sub>
+                    </m:sSub>
+                    <m:r>
+                      <a:rPr lang="de-DE" b="0" i="1" smtClean="0">
+                        <a:latin typeface="Cambria Math" panose="02040503050406030204" pitchFamily="18" charset="0"/>
+                      </a:rPr>
+                      <m:t>−</m:t>
+                    </m:r>
+                    <m:sSub>
+                      <m:sSubPr>
+                        <m:ctrlPr>
+                          <a:rPr lang="de-DE" i="1" smtClean="0">
+                            <a:latin typeface="Cambria Math" panose="02040503050406030204" pitchFamily="18" charset="0"/>
+                          </a:rPr>
+                        </m:ctrlPr>
+                      </m:sSubPr>
+                      <m:e>
+                        <m:r>
+                          <a:rPr lang="de-DE" b="0" i="1" smtClean="0">
+                            <a:latin typeface="Cambria Math" panose="02040503050406030204" pitchFamily="18" charset="0"/>
+                          </a:rPr>
+                          <m:t>𝑦</m:t>
+                        </m:r>
+                      </m:e>
+                      <m:sub>
+                        <m:r>
+                          <a:rPr lang="de-DE" b="0" i="1" smtClean="0">
+                            <a:latin typeface="Cambria Math" panose="02040503050406030204" pitchFamily="18" charset="0"/>
+                          </a:rPr>
+                          <m:t>𝑡</m:t>
+                        </m:r>
+                        <m:r>
+                          <a:rPr lang="de-DE" b="0" i="1" smtClean="0">
+                            <a:latin typeface="Cambria Math" panose="02040503050406030204" pitchFamily="18" charset="0"/>
+                          </a:rPr>
+                          <m:t>−1</m:t>
+                        </m:r>
+                      </m:sub>
+                    </m:sSub>
+                  </m:oMath>
+                </a14:m>
+                <a:endParaRPr lang="de-DE" dirty="0"/>
+              </a:p>
+              <a:p>
+                <a:pPr marL="0" indent="0">
+                  <a:buNone/>
+                </a:pPr>
+                <a:r>
+                  <a:rPr lang="de-DE" dirty="0">
+                    <a:sym typeface="Wingdings" pitchFamily="2" charset="2"/>
+                  </a:rPr>
+                  <a:t> </a:t>
+                </a:r>
+                <a:r>
+                  <a:rPr lang="de-DE" dirty="0" err="1"/>
+                  <a:t>include</a:t>
+                </a:r>
+                <a:r>
+                  <a:rPr lang="de-DE" dirty="0"/>
+                  <a:t> </a:t>
+                </a:r>
+                <a:r>
+                  <a:rPr lang="de-DE" dirty="0" err="1"/>
+                  <a:t>integrated</a:t>
+                </a:r>
+                <a:r>
+                  <a:rPr lang="de-DE" dirty="0"/>
+                  <a:t> </a:t>
+                </a:r>
+                <a:r>
+                  <a:rPr lang="de-DE" dirty="0" err="1"/>
+                  <a:t>component</a:t>
+                </a:r>
+                <a:r>
+                  <a:rPr lang="de-DE" i="1" dirty="0"/>
+                  <a:t>: AR(p) + I(d) + MA(</a:t>
+                </a:r>
+                <a:r>
+                  <a:rPr lang="de-DE" i="1" dirty="0" err="1"/>
+                  <a:t>q</a:t>
+                </a:r>
+                <a:r>
+                  <a:rPr lang="de-DE" i="1" dirty="0"/>
+                  <a:t>) → ARIMA(</a:t>
+                </a:r>
+                <a:r>
+                  <a:rPr lang="de-DE" i="1" dirty="0" err="1"/>
+                  <a:t>p,q</a:t>
+                </a:r>
+                <a:r>
+                  <a:rPr lang="de-DE" i="1" dirty="0"/>
+                  <a:t>)</a:t>
+                </a:r>
+                <a:endParaRPr lang="de-DE" dirty="0"/>
+              </a:p>
+              <a:p>
+                <a:pPr marL="0" indent="0">
+                  <a:buNone/>
+                </a:pPr>
+                <a:endParaRPr lang="de-DE" dirty="0"/>
+              </a:p>
+              <a:p>
+                <a:pPr marL="0" indent="0">
+                  <a:buNone/>
+                </a:pPr>
+                <a:r>
+                  <a:rPr lang="de-DE" dirty="0"/>
+                  <a:t>additional </a:t>
+                </a:r>
+                <a:r>
+                  <a:rPr lang="de-DE" dirty="0" err="1"/>
+                  <a:t>extensions</a:t>
+                </a:r>
+                <a:r>
+                  <a:rPr lang="de-DE" dirty="0"/>
+                  <a:t>:</a:t>
+                </a:r>
+              </a:p>
+              <a:p>
+                <a:r>
+                  <a:rPr lang="de-DE" dirty="0"/>
+                  <a:t>SARIMA (</a:t>
+                </a:r>
+                <a:r>
+                  <a:rPr lang="de-DE" dirty="0" err="1"/>
+                  <a:t>Seasonal</a:t>
+                </a:r>
+                <a:r>
+                  <a:rPr lang="de-DE" dirty="0"/>
+                  <a:t> ARIMA): </a:t>
+                </a:r>
+                <a:r>
+                  <a:rPr lang="de-DE" dirty="0" err="1"/>
+                  <a:t>adds</a:t>
+                </a:r>
+                <a:r>
+                  <a:rPr lang="de-DE" dirty="0"/>
+                  <a:t> </a:t>
+                </a:r>
+                <a:r>
+                  <a:rPr lang="de-DE" dirty="0" err="1"/>
+                  <a:t>seasonal</a:t>
+                </a:r>
+                <a:r>
+                  <a:rPr lang="de-DE" dirty="0"/>
+                  <a:t> autoregressive, </a:t>
+                </a:r>
+                <a:r>
+                  <a:rPr lang="de-DE" dirty="0" err="1"/>
+                  <a:t>differencing</a:t>
+                </a:r>
+                <a:r>
+                  <a:rPr lang="de-DE" dirty="0"/>
+                  <a:t>, and </a:t>
+                </a:r>
+                <a:r>
+                  <a:rPr lang="de-DE" dirty="0" err="1"/>
+                  <a:t>moving-average</a:t>
+                </a:r>
+                <a:r>
+                  <a:rPr lang="de-DE" dirty="0"/>
+                  <a:t> </a:t>
+                </a:r>
+                <a:r>
+                  <a:rPr lang="de-DE" dirty="0" err="1"/>
+                  <a:t>terms</a:t>
+                </a:r>
+                <a:endParaRPr lang="de-DE" dirty="0"/>
+              </a:p>
+              <a:p>
+                <a:r>
+                  <a:rPr lang="de-DE" dirty="0"/>
+                  <a:t>SARIMAX (SARIMA + </a:t>
+                </a:r>
+                <a:r>
+                  <a:rPr lang="de-DE" dirty="0" err="1"/>
+                  <a:t>eXogenous</a:t>
+                </a:r>
+                <a:r>
+                  <a:rPr lang="de-DE" dirty="0"/>
+                  <a:t> variables): </a:t>
+                </a:r>
+                <a:r>
+                  <a:rPr lang="de-DE" dirty="0" err="1"/>
+                  <a:t>includes</a:t>
+                </a:r>
+                <a:r>
+                  <a:rPr lang="de-DE" dirty="0"/>
+                  <a:t> external </a:t>
+                </a:r>
+                <a:r>
+                  <a:rPr lang="de-DE" dirty="0" err="1"/>
+                  <a:t>information</a:t>
+                </a:r>
+                <a:r>
+                  <a:rPr lang="de-DE" dirty="0"/>
+                  <a:t> (e.g. </a:t>
+                </a:r>
+                <a:r>
+                  <a:rPr lang="de-DE" dirty="0" err="1"/>
+                  <a:t>weather</a:t>
+                </a:r>
+                <a:r>
+                  <a:rPr lang="de-DE" dirty="0"/>
+                  <a:t>, </a:t>
+                </a:r>
+                <a:r>
+                  <a:rPr lang="de-DE" dirty="0" err="1"/>
+                  <a:t>holidays</a:t>
+                </a:r>
+                <a:r>
+                  <a:rPr lang="de-DE" dirty="0"/>
+                  <a:t>, </a:t>
+                </a:r>
+                <a:r>
+                  <a:rPr lang="de-DE" dirty="0" err="1"/>
+                  <a:t>promotions</a:t>
+                </a:r>
+                <a:r>
+                  <a:rPr lang="de-DE" dirty="0"/>
+                  <a:t>)</a:t>
+                </a:r>
+              </a:p>
+              <a:p>
+                <a:pPr marL="0" indent="0">
+                  <a:buNone/>
+                </a:pPr>
+                <a:endParaRPr lang="de-DE" dirty="0"/>
+              </a:p>
+              <a:p>
+                <a:pPr marL="0" indent="0">
+                  <a:buNone/>
+                </a:pPr>
+                <a:r>
+                  <a:rPr lang="de-DE" dirty="0" err="1"/>
+                  <a:t>key</a:t>
+                </a:r>
+                <a:r>
+                  <a:rPr lang="de-DE" dirty="0"/>
+                  <a:t> </a:t>
+                </a:r>
+                <a:r>
+                  <a:rPr lang="de-DE" dirty="0" err="1"/>
+                  <a:t>assumption</a:t>
+                </a:r>
+                <a:r>
+                  <a:rPr lang="de-DE" dirty="0"/>
+                  <a:t>: after </a:t>
+                </a:r>
+                <a:r>
+                  <a:rPr lang="de-DE" dirty="0" err="1"/>
+                  <a:t>differencing</a:t>
+                </a:r>
+                <a:r>
+                  <a:rPr lang="de-DE" dirty="0"/>
+                  <a:t> (and </a:t>
+                </a:r>
+                <a:r>
+                  <a:rPr lang="de-DE" dirty="0" err="1"/>
+                  <a:t>seasonal</a:t>
+                </a:r>
+                <a:r>
+                  <a:rPr lang="de-DE" dirty="0"/>
+                  <a:t> </a:t>
+                </a:r>
+                <a:r>
+                  <a:rPr lang="de-DE" dirty="0" err="1"/>
+                  <a:t>adjustment</a:t>
+                </a:r>
+                <a:r>
+                  <a:rPr lang="de-DE" dirty="0"/>
+                  <a:t>, </a:t>
+                </a:r>
+                <a:r>
+                  <a:rPr lang="de-DE" dirty="0" err="1"/>
+                  <a:t>if</a:t>
+                </a:r>
+                <a:r>
+                  <a:rPr lang="de-DE" dirty="0"/>
+                  <a:t> </a:t>
+                </a:r>
+                <a:r>
+                  <a:rPr lang="de-DE" dirty="0" err="1"/>
+                  <a:t>needed</a:t>
+                </a:r>
+                <a:r>
+                  <a:rPr lang="de-DE" dirty="0"/>
+                  <a:t>), </a:t>
+                </a:r>
+                <a:r>
+                  <a:rPr lang="de-DE" dirty="0" err="1"/>
+                  <a:t>the</a:t>
+                </a:r>
+                <a:r>
+                  <a:rPr lang="de-DE" dirty="0"/>
+                  <a:t> </a:t>
+                </a:r>
+                <a:r>
+                  <a:rPr lang="de-DE" dirty="0" err="1"/>
+                  <a:t>series</a:t>
+                </a:r>
+                <a:r>
+                  <a:rPr lang="de-DE" dirty="0"/>
+                  <a:t> </a:t>
+                </a:r>
+                <a:r>
+                  <a:rPr lang="de-DE" dirty="0" err="1"/>
+                  <a:t>should</a:t>
+                </a:r>
+                <a:r>
+                  <a:rPr lang="de-DE" dirty="0"/>
+                  <a:t> </a:t>
+                </a:r>
+                <a:r>
+                  <a:rPr lang="de-DE" dirty="0" err="1"/>
+                  <a:t>be</a:t>
+                </a:r>
+                <a:r>
+                  <a:rPr lang="de-DE" dirty="0"/>
+                  <a:t> </a:t>
+                </a:r>
+                <a:r>
+                  <a:rPr lang="de-DE" dirty="0" err="1"/>
+                  <a:t>approximately</a:t>
+                </a:r>
+                <a:r>
+                  <a:rPr lang="de-DE" dirty="0"/>
+                  <a:t> </a:t>
+                </a:r>
+                <a:r>
+                  <a:rPr lang="de-DE" dirty="0" err="1"/>
+                  <a:t>stationary</a:t>
+                </a:r>
+                <a:endParaRPr lang="de-DE" dirty="0"/>
+              </a:p>
+            </p:txBody>
+          </p:sp>
+        </mc:Choice>
+        <mc:Fallback xmlns="">
+          <p:sp>
+            <p:nvSpPr>
+              <p:cNvPr id="3" name="Inhaltsplatzhalter 2">
+                <a:extLst>
+                  <a:ext uri="{FF2B5EF4-FFF2-40B4-BE49-F238E27FC236}">
+                    <a16:creationId xmlns:a16="http://schemas.microsoft.com/office/drawing/2014/main" id="{C04A1ED3-77ED-83D5-8D45-7512437366E8}"/>
+                  </a:ext>
+                </a:extLst>
+              </p:cNvPr>
+              <p:cNvSpPr>
+                <a:spLocks noGrp="1" noRot="1" noChangeAspect="1" noMove="1" noResize="1" noEditPoints="1" noAdjustHandles="1" noChangeArrowheads="1" noChangeShapeType="1" noTextEdit="1"/>
+              </p:cNvSpPr>
+              <p:nvPr>
+                <p:ph idx="1"/>
+              </p:nvPr>
+            </p:nvSpPr>
+            <p:spPr>
+              <a:xfrm>
+                <a:off x="838200" y="1825625"/>
+                <a:ext cx="10515600" cy="4667250"/>
+              </a:xfrm>
+              <a:blipFill>
+                <a:blip r:embed="rId2"/>
+                <a:stretch>
+                  <a:fillRect l="-965" t="-2981" r="-1327" b="-1084"/>
+                </a:stretch>
+              </a:blipFill>
+            </p:spPr>
+            <p:txBody>
+              <a:bodyPr/>
+              <a:lstStyle/>
+              <a:p>
+                <a:r>
+                  <a:rPr lang="de-DE">
+                    <a:noFill/>
+                  </a:rPr>
+                  <a:t> </a:t>
+                </a:r>
+              </a:p>
+            </p:txBody>
+          </p:sp>
+        </mc:Fallback>
+      </mc:AlternateContent>
       <p:sp>
         <p:nvSpPr>
           <p:cNvPr id="4" name="Foliennummernplatzhalter 3">
             <a:extLst>
               <a:ext uri="{FF2B5EF4-FFF2-40B4-BE49-F238E27FC236}">
-                <a16:creationId xmlns:a16="http://schemas.microsoft.com/office/drawing/2014/main" id="{16450BCB-8F61-C4DD-43EB-A987B508E2B5}"/>
+                <a16:creationId xmlns:a16="http://schemas.microsoft.com/office/drawing/2014/main" id="{611C9357-B7E6-EAA9-0E48-DB30D67C720C}"/>
               </a:ext>
             </a:extLst>
           </p:cNvPr>
@@ -11099,7 +11337,7 @@
           <a:bodyPr/>
           <a:lstStyle/>
           <a:p>
-            <a:fld id="{D6D392C1-03C4-44BA-9267-8F9A2DA09A60}" type="slidenum">
+            <a:fld id="{3D4C94FE-FF23-4504-88E9-14D481113291}" type="slidenum">
               <a:rPr lang="en-GB" smtClean="0"/>
               <a:t>10</a:t>
             </a:fld>
@@ -11107,10 +11345,327 @@
           </a:p>
         </p:txBody>
       </p:sp>
+      <mc:AlternateContent xmlns:mc="http://schemas.openxmlformats.org/markup-compatibility/2006" xmlns:a14="http://schemas.microsoft.com/office/drawing/2010/main">
+        <mc:Choice Requires="a14">
+          <p:sp>
+            <p:nvSpPr>
+              <p:cNvPr id="6" name="Textfeld 5">
+                <a:extLst>
+                  <a:ext uri="{FF2B5EF4-FFF2-40B4-BE49-F238E27FC236}">
+                    <a16:creationId xmlns:a16="http://schemas.microsoft.com/office/drawing/2014/main" id="{4612F828-909D-AA74-A1B0-E294B13FA0FF}"/>
+                  </a:ext>
+                </a:extLst>
+              </p:cNvPr>
+              <p:cNvSpPr txBox="1"/>
+              <p:nvPr/>
+            </p:nvSpPr>
+            <p:spPr>
+              <a:xfrm>
+                <a:off x="8124207" y="2117685"/>
+                <a:ext cx="4067793" cy="769441"/>
+              </a:xfrm>
+              <a:prstGeom prst="rect">
+                <a:avLst/>
+              </a:prstGeom>
+              <a:noFill/>
+            </p:spPr>
+            <p:txBody>
+              <a:bodyPr wrap="square">
+                <a:spAutoFit/>
+              </a:bodyPr>
+              <a:lstStyle/>
+              <a:p>
+                <a14:m>
+                  <m:oMath xmlns:m="http://schemas.openxmlformats.org/officeDocument/2006/math">
+                    <m:r>
+                      <a:rPr lang="de-DE" sz="2200" b="0" i="1" smtClean="0">
+                        <a:latin typeface="Cambria Math" panose="02040503050406030204" pitchFamily="18" charset="0"/>
+                      </a:rPr>
+                      <m:t>𝑑</m:t>
+                    </m:r>
+                    <m:r>
+                      <a:rPr lang="de-DE" sz="2200" b="0" i="1" smtClean="0">
+                        <a:latin typeface="Cambria Math" panose="02040503050406030204" pitchFamily="18" charset="0"/>
+                      </a:rPr>
+                      <m:t>=1</m:t>
+                    </m:r>
+                  </m:oMath>
+                </a14:m>
+                <a:r>
+                  <a:rPr lang="de-DE" sz="2200" dirty="0"/>
+                  <a:t> : linear </a:t>
+                </a:r>
+                <a:r>
+                  <a:rPr lang="de-DE" sz="2200" dirty="0" err="1"/>
+                  <a:t>trend</a:t>
+                </a:r>
+                <a:endParaRPr lang="de-DE" sz="2200" i="1" dirty="0">
+                  <a:latin typeface="Cambria Math" panose="02040503050406030204" pitchFamily="18" charset="0"/>
+                </a:endParaRPr>
+              </a:p>
+              <a:p>
+                <a:pPr/>
+                <a14:m>
+                  <m:oMathPara xmlns:m="http://schemas.openxmlformats.org/officeDocument/2006/math">
+                    <m:oMathParaPr>
+                      <m:jc m:val="left"/>
+                    </m:oMathParaPr>
+                    <m:oMath xmlns:m="http://schemas.openxmlformats.org/officeDocument/2006/math">
+                      <m:r>
+                        <a:rPr lang="de-DE" sz="2200" b="0" i="1" smtClean="0">
+                          <a:latin typeface="Cambria Math" panose="02040503050406030204" pitchFamily="18" charset="0"/>
+                        </a:rPr>
+                        <m:t>𝑑</m:t>
+                      </m:r>
+                      <m:r>
+                        <a:rPr lang="de-DE" sz="2200" b="0" i="1" smtClean="0">
+                          <a:latin typeface="Cambria Math" panose="02040503050406030204" pitchFamily="18" charset="0"/>
+                        </a:rPr>
+                        <m:t>=2: </m:t>
+                      </m:r>
+                      <m:sSubSup>
+                        <m:sSubSupPr>
+                          <m:ctrlPr>
+                            <a:rPr lang="de-DE" sz="2200" i="1" smtClean="0">
+                              <a:latin typeface="Cambria Math" panose="02040503050406030204" pitchFamily="18" charset="0"/>
+                            </a:rPr>
+                          </m:ctrlPr>
+                        </m:sSubSupPr>
+                        <m:e>
+                          <m:r>
+                            <a:rPr lang="de-DE" sz="2200" b="0" i="1" smtClean="0">
+                              <a:latin typeface="Cambria Math" panose="02040503050406030204" pitchFamily="18" charset="0"/>
+                            </a:rPr>
+                            <m:t>𝑦</m:t>
+                          </m:r>
+                        </m:e>
+                        <m:sub>
+                          <m:r>
+                            <a:rPr lang="de-DE" sz="2200" b="0" i="1" smtClean="0">
+                              <a:latin typeface="Cambria Math" panose="02040503050406030204" pitchFamily="18" charset="0"/>
+                            </a:rPr>
+                            <m:t>𝑡</m:t>
+                          </m:r>
+                        </m:sub>
+                        <m:sup>
+                          <m:r>
+                            <a:rPr lang="de-DE" sz="2200" b="0" i="1" smtClean="0">
+                              <a:latin typeface="Cambria Math" panose="02040503050406030204" pitchFamily="18" charset="0"/>
+                            </a:rPr>
+                            <m:t>′</m:t>
+                          </m:r>
+                        </m:sup>
+                      </m:sSubSup>
+                      <m:r>
+                        <a:rPr lang="de-DE" sz="2200" b="0" i="1" smtClean="0">
+                          <a:latin typeface="Cambria Math" panose="02040503050406030204" pitchFamily="18" charset="0"/>
+                        </a:rPr>
+                        <m:t>=</m:t>
+                      </m:r>
+                      <m:sSub>
+                        <m:sSubPr>
+                          <m:ctrlPr>
+                            <a:rPr lang="de-DE" sz="2200" b="0" i="1" smtClean="0">
+                              <a:latin typeface="Cambria Math" panose="02040503050406030204" pitchFamily="18" charset="0"/>
+                            </a:rPr>
+                          </m:ctrlPr>
+                        </m:sSubPr>
+                        <m:e>
+                          <m:r>
+                            <a:rPr lang="de-DE" sz="2200" b="0" i="1" smtClean="0">
+                              <a:latin typeface="Cambria Math" panose="02040503050406030204" pitchFamily="18" charset="0"/>
+                            </a:rPr>
+                            <m:t>𝑦</m:t>
+                          </m:r>
+                        </m:e>
+                        <m:sub>
+                          <m:r>
+                            <a:rPr lang="de-DE" sz="2200" b="0" i="1" smtClean="0">
+                              <a:latin typeface="Cambria Math" panose="02040503050406030204" pitchFamily="18" charset="0"/>
+                            </a:rPr>
+                            <m:t>𝑡</m:t>
+                          </m:r>
+                        </m:sub>
+                      </m:sSub>
+                      <m:r>
+                        <a:rPr lang="de-DE" sz="2200" b="0" i="1" smtClean="0">
+                          <a:latin typeface="Cambria Math" panose="02040503050406030204" pitchFamily="18" charset="0"/>
+                        </a:rPr>
+                        <m:t>−2</m:t>
+                      </m:r>
+                      <m:r>
+                        <a:rPr lang="de-DE" sz="2200" b="0" i="1" smtClean="0">
+                          <a:latin typeface="Cambria Math" panose="02040503050406030204" pitchFamily="18" charset="0"/>
+                          <a:ea typeface="Cambria Math" panose="02040503050406030204" pitchFamily="18" charset="0"/>
+                        </a:rPr>
+                        <m:t>∙</m:t>
+                      </m:r>
+                      <m:sSub>
+                        <m:sSubPr>
+                          <m:ctrlPr>
+                            <a:rPr lang="de-DE" sz="2200" b="0" i="1" smtClean="0">
+                              <a:latin typeface="Cambria Math" panose="02040503050406030204" pitchFamily="18" charset="0"/>
+                            </a:rPr>
+                          </m:ctrlPr>
+                        </m:sSubPr>
+                        <m:e>
+                          <m:r>
+                            <a:rPr lang="de-DE" sz="2200" b="0" i="1" smtClean="0">
+                              <a:latin typeface="Cambria Math" panose="02040503050406030204" pitchFamily="18" charset="0"/>
+                            </a:rPr>
+                            <m:t>𝑦</m:t>
+                          </m:r>
+                        </m:e>
+                        <m:sub>
+                          <m:r>
+                            <a:rPr lang="de-DE" sz="2200" b="0" i="1" smtClean="0">
+                              <a:latin typeface="Cambria Math" panose="02040503050406030204" pitchFamily="18" charset="0"/>
+                            </a:rPr>
+                            <m:t>𝑡</m:t>
+                          </m:r>
+                          <m:r>
+                            <a:rPr lang="de-DE" sz="2200" b="0" i="1" smtClean="0">
+                              <a:latin typeface="Cambria Math" panose="02040503050406030204" pitchFamily="18" charset="0"/>
+                            </a:rPr>
+                            <m:t>−1</m:t>
+                          </m:r>
+                        </m:sub>
+                      </m:sSub>
+                      <m:r>
+                        <a:rPr lang="de-DE" sz="2200" b="0" i="1" smtClean="0">
+                          <a:latin typeface="Cambria Math" panose="02040503050406030204" pitchFamily="18" charset="0"/>
+                        </a:rPr>
+                        <m:t>+</m:t>
+                      </m:r>
+                      <m:sSub>
+                        <m:sSubPr>
+                          <m:ctrlPr>
+                            <a:rPr lang="de-DE" sz="2200" i="1">
+                              <a:latin typeface="Cambria Math" panose="02040503050406030204" pitchFamily="18" charset="0"/>
+                            </a:rPr>
+                          </m:ctrlPr>
+                        </m:sSubPr>
+                        <m:e>
+                          <m:r>
+                            <a:rPr lang="de-DE" sz="2200" i="1">
+                              <a:latin typeface="Cambria Math" panose="02040503050406030204" pitchFamily="18" charset="0"/>
+                            </a:rPr>
+                            <m:t>𝑦</m:t>
+                          </m:r>
+                        </m:e>
+                        <m:sub>
+                          <m:r>
+                            <a:rPr lang="de-DE" sz="2200" i="1">
+                              <a:latin typeface="Cambria Math" panose="02040503050406030204" pitchFamily="18" charset="0"/>
+                            </a:rPr>
+                            <m:t>𝑡</m:t>
+                          </m:r>
+                          <m:r>
+                            <a:rPr lang="de-DE" sz="2200" i="1">
+                              <a:latin typeface="Cambria Math" panose="02040503050406030204" pitchFamily="18" charset="0"/>
+                            </a:rPr>
+                            <m:t>−2</m:t>
+                          </m:r>
+                        </m:sub>
+                      </m:sSub>
+                    </m:oMath>
+                  </m:oMathPara>
+                </a14:m>
+                <a:endParaRPr lang="de-DE" sz="2200" dirty="0"/>
+              </a:p>
+            </p:txBody>
+          </p:sp>
+        </mc:Choice>
+        <mc:Fallback xmlns="">
+          <p:sp>
+            <p:nvSpPr>
+              <p:cNvPr id="6" name="Textfeld 5">
+                <a:extLst>
+                  <a:ext uri="{FF2B5EF4-FFF2-40B4-BE49-F238E27FC236}">
+                    <a16:creationId xmlns:a16="http://schemas.microsoft.com/office/drawing/2014/main" id="{4612F828-909D-AA74-A1B0-E294B13FA0FF}"/>
+                  </a:ext>
+                </a:extLst>
+              </p:cNvPr>
+              <p:cNvSpPr txBox="1">
+                <a:spLocks noRot="1" noChangeAspect="1" noMove="1" noResize="1" noEditPoints="1" noAdjustHandles="1" noChangeArrowheads="1" noChangeShapeType="1" noTextEdit="1"/>
+              </p:cNvSpPr>
+              <p:nvPr/>
+            </p:nvSpPr>
+            <p:spPr>
+              <a:xfrm>
+                <a:off x="8124207" y="2117685"/>
+                <a:ext cx="4067793" cy="769441"/>
+              </a:xfrm>
+              <a:prstGeom prst="rect">
+                <a:avLst/>
+              </a:prstGeom>
+              <a:blipFill>
+                <a:blip r:embed="rId3"/>
+                <a:stretch>
+                  <a:fillRect t="-4839" b="-9677"/>
+                </a:stretch>
+              </a:blipFill>
+            </p:spPr>
+            <p:txBody>
+              <a:bodyPr/>
+              <a:lstStyle/>
+              <a:p>
+                <a:r>
+                  <a:rPr lang="de-DE">
+                    <a:noFill/>
+                  </a:rPr>
+                  <a:t> </a:t>
+                </a:r>
+              </a:p>
+            </p:txBody>
+          </p:sp>
+        </mc:Fallback>
+      </mc:AlternateContent>
+      <p:cxnSp>
+        <p:nvCxnSpPr>
+          <p:cNvPr id="8" name="Gerade Verbindung mit Pfeil 7">
+            <a:extLst>
+              <a:ext uri="{FF2B5EF4-FFF2-40B4-BE49-F238E27FC236}">
+                <a16:creationId xmlns:a16="http://schemas.microsoft.com/office/drawing/2014/main" id="{BB3450F9-7C7A-8AF6-4B61-AFFEB65FD6F4}"/>
+              </a:ext>
+            </a:extLst>
+          </p:cNvPr>
+          <p:cNvCxnSpPr>
+            <a:cxnSpLocks/>
+          </p:cNvCxnSpPr>
+          <p:nvPr/>
+        </p:nvCxnSpPr>
+        <p:spPr>
+          <a:xfrm flipH="1">
+            <a:off x="6730409" y="2349795"/>
+            <a:ext cx="1393798" cy="318977"/>
+          </a:xfrm>
+          <a:prstGeom prst="straightConnector1">
+            <a:avLst/>
+          </a:prstGeom>
+          <a:ln>
+            <a:tailEnd type="triangle"/>
+          </a:ln>
+        </p:spPr>
+        <p:style>
+          <a:lnRef idx="2">
+            <a:schemeClr val="accent1"/>
+          </a:lnRef>
+          <a:fillRef idx="0">
+            <a:schemeClr val="accent1"/>
+          </a:fillRef>
+          <a:effectRef idx="1">
+            <a:schemeClr val="accent1"/>
+          </a:effectRef>
+          <a:fontRef idx="minor">
+            <a:schemeClr val="tx1"/>
+          </a:fontRef>
+        </p:style>
+      </p:cxnSp>
     </p:spTree>
     <p:extLst>
       <p:ext uri="{BB962C8B-B14F-4D97-AF65-F5344CB8AC3E}">
-        <p14:creationId xmlns:p14="http://schemas.microsoft.com/office/powerpoint/2010/main" val="1654084469"/>
+        <p14:creationId xmlns:p14="http://schemas.microsoft.com/office/powerpoint/2010/main" val="2539649198"/>
       </p:ext>
     </p:extLst>
   </p:cSld>
@@ -11142,7 +11697,7 @@
           <p:cNvPr id="2" name="Titel 1">
             <a:extLst>
               <a:ext uri="{FF2B5EF4-FFF2-40B4-BE49-F238E27FC236}">
-                <a16:creationId xmlns:a16="http://schemas.microsoft.com/office/drawing/2014/main" id="{57B6113B-21A2-0854-924B-BB63E6FC0D6D}"/>
+                <a16:creationId xmlns:a16="http://schemas.microsoft.com/office/drawing/2014/main" id="{AFE55EB3-06CF-D0B3-AE01-A5FEE6C6AAFC}"/>
               </a:ext>
             </a:extLst>
           </p:cNvPr>
@@ -11159,8 +11714,8 @@
           <a:lstStyle/>
           <a:p>
             <a:r>
-              <a:rPr lang="en-GB" dirty="0"/>
-              <a:t>Types of Time Series Forecasting Information</a:t>
+              <a:rPr lang="de-DE" dirty="0" err="1"/>
+              <a:t>Stationarity</a:t>
             </a:r>
             <a:endParaRPr lang="de-DE" dirty="0"/>
           </a:p>
@@ -11171,7 +11726,7 @@
           <p:cNvPr id="3" name="Inhaltsplatzhalter 2">
             <a:extLst>
               <a:ext uri="{FF2B5EF4-FFF2-40B4-BE49-F238E27FC236}">
-                <a16:creationId xmlns:a16="http://schemas.microsoft.com/office/drawing/2014/main" id="{4F5DD1B4-F8BE-67D9-5C8A-5846104EC367}"/>
+                <a16:creationId xmlns:a16="http://schemas.microsoft.com/office/drawing/2014/main" id="{38DEC32F-B779-E4F9-72D5-22C31A0DBBE2}"/>
               </a:ext>
             </a:extLst>
           </p:cNvPr>
@@ -11182,7 +11737,12 @@
             <p:ph idx="1"/>
           </p:nvPr>
         </p:nvSpPr>
-        <p:spPr/>
+        <p:spPr>
+          <a:xfrm>
+            <a:off x="838200" y="1825625"/>
+            <a:ext cx="11006470" cy="4351338"/>
+          </a:xfrm>
+        </p:spPr>
         <p:txBody>
           <a:bodyPr>
             <a:normAutofit fontScale="92500"/>
@@ -11193,71 +11753,295 @@
               <a:buNone/>
             </a:pPr>
             <a:r>
-              <a:rPr lang="en-GB" dirty="0"/>
-              <a:t>auto-correlation:</a:t>
-            </a:r>
-          </a:p>
-          <a:p>
-            <a:r>
-              <a:rPr lang="en-GB" dirty="0"/>
-              <a:t>using past values of considered time series as function of lag</a:t>
-            </a:r>
-          </a:p>
-          <a:p>
-            <a:r>
-              <a:rPr lang="en-GB" dirty="0">
-                <a:sym typeface="Wingdings" panose="05000000000000000000" pitchFamily="2" charset="2"/>
-              </a:rPr>
-              <a:t>identifying periodicity (seasonality) and trend</a:t>
+              <a:rPr lang="de-DE" dirty="0" err="1"/>
+              <a:t>mean</a:t>
+            </a:r>
+            <a:r>
+              <a:rPr lang="de-DE" dirty="0"/>
+              <a:t>, </a:t>
+            </a:r>
+            <a:r>
+              <a:rPr lang="de-DE" dirty="0" err="1"/>
+              <a:t>variance</a:t>
+            </a:r>
+            <a:r>
+              <a:rPr lang="de-DE" dirty="0"/>
+              <a:t>, </a:t>
+            </a:r>
+            <a:r>
+              <a:rPr lang="de-DE" dirty="0" err="1"/>
+              <a:t>autocorrelation</a:t>
+            </a:r>
+            <a:r>
+              <a:rPr lang="de-DE" dirty="0"/>
+              <a:t> </a:t>
+            </a:r>
+            <a:r>
+              <a:rPr lang="de-DE" dirty="0" err="1"/>
+              <a:t>structure</a:t>
+            </a:r>
+            <a:r>
+              <a:rPr lang="de-DE" dirty="0"/>
+              <a:t> </a:t>
+            </a:r>
+            <a:r>
+              <a:rPr lang="de-DE" dirty="0" err="1"/>
+              <a:t>remain</a:t>
+            </a:r>
+            <a:r>
+              <a:rPr lang="de-DE" dirty="0"/>
+              <a:t> </a:t>
+            </a:r>
+            <a:r>
+              <a:rPr lang="de-DE" dirty="0" err="1"/>
+              <a:t>stable</a:t>
+            </a:r>
+            <a:r>
+              <a:rPr lang="de-DE" dirty="0"/>
+              <a:t> </a:t>
+            </a:r>
+            <a:r>
+              <a:rPr lang="de-DE" dirty="0" err="1"/>
+              <a:t>over</a:t>
+            </a:r>
+            <a:r>
+              <a:rPr lang="de-DE" dirty="0"/>
+              <a:t> time</a:t>
             </a:r>
           </a:p>
           <a:p>
             <a:pPr marL="0" indent="0">
               <a:buNone/>
             </a:pPr>
-            <a:r>
-              <a:rPr lang="en-GB" dirty="0">
-                <a:sym typeface="Wingdings" panose="05000000000000000000" pitchFamily="2" charset="2"/>
-              </a:rPr>
-              <a:t> ARMA</a:t>
-            </a:r>
-            <a:endParaRPr lang="en-GB" dirty="0"/>
+            <a:endParaRPr lang="de-DE" dirty="0"/>
           </a:p>
           <a:p>
             <a:pPr marL="0" indent="0">
               <a:buNone/>
             </a:pPr>
-            <a:endParaRPr lang="en-GB" dirty="0"/>
+            <a:r>
+              <a:rPr lang="de-DE" dirty="0" err="1"/>
+              <a:t>important</a:t>
+            </a:r>
+            <a:r>
+              <a:rPr lang="de-DE" dirty="0"/>
+              <a:t> </a:t>
+            </a:r>
+            <a:r>
+              <a:rPr lang="de-DE" dirty="0" err="1"/>
+              <a:t>for</a:t>
+            </a:r>
+            <a:r>
+              <a:rPr lang="de-DE" dirty="0"/>
+              <a:t> ARMA </a:t>
+            </a:r>
+            <a:r>
+              <a:rPr lang="de-DE" dirty="0" err="1"/>
+              <a:t>assumptions</a:t>
+            </a:r>
+            <a:r>
+              <a:rPr lang="de-DE" dirty="0"/>
+              <a:t>, </a:t>
+            </a:r>
+            <a:r>
+              <a:rPr lang="de-DE" dirty="0" err="1"/>
+              <a:t>easier</a:t>
+            </a:r>
+            <a:r>
+              <a:rPr lang="de-DE" dirty="0"/>
+              <a:t> </a:t>
+            </a:r>
+            <a:r>
+              <a:rPr lang="de-DE" dirty="0" err="1"/>
+              <a:t>generalization</a:t>
+            </a:r>
+            <a:r>
+              <a:rPr lang="de-DE" dirty="0"/>
+              <a:t>, </a:t>
+            </a:r>
+            <a:r>
+              <a:rPr lang="de-DE" dirty="0" err="1"/>
+              <a:t>stable</a:t>
+            </a:r>
+            <a:r>
+              <a:rPr lang="de-DE" dirty="0"/>
+              <a:t> </a:t>
+            </a:r>
+            <a:r>
+              <a:rPr lang="de-DE" dirty="0" err="1"/>
+              <a:t>relationships</a:t>
+            </a:r>
+            <a:endParaRPr lang="de-DE" dirty="0"/>
           </a:p>
           <a:p>
             <a:pPr marL="0" indent="0">
               <a:buNone/>
             </a:pPr>
-            <a:r>
-              <a:rPr lang="en-GB" dirty="0"/>
-              <a:t>exogenous variables:</a:t>
-            </a:r>
-          </a:p>
-          <a:p>
-            <a:r>
-              <a:rPr lang="en-GB" dirty="0"/>
-              <a:t>using correlations of other variables to considered time series</a:t>
-            </a:r>
-          </a:p>
-          <a:p>
-            <a:r>
-              <a:rPr lang="en-GB" dirty="0"/>
-              <a:t>examples in demand forecasting: price, weather</a:t>
-            </a:r>
-          </a:p>
-          <a:p>
-            <a:r>
-              <a:rPr lang="en-GB" dirty="0"/>
-              <a:t>such effects lasting for some time create spurious auto-correlation</a:t>
-            </a:r>
-            <a:endParaRPr lang="en-GB" dirty="0">
-              <a:sym typeface="Wingdings" panose="05000000000000000000" pitchFamily="2" charset="2"/>
-            </a:endParaRPr>
+            <a:endParaRPr lang="de-DE" dirty="0"/>
+          </a:p>
+          <a:p>
+            <a:pPr marL="0" indent="0">
+              <a:buNone/>
+            </a:pPr>
+            <a:r>
+              <a:rPr lang="de-DE" dirty="0" err="1"/>
+              <a:t>common</a:t>
+            </a:r>
+            <a:r>
+              <a:rPr lang="de-DE" dirty="0"/>
+              <a:t> fixes:</a:t>
+            </a:r>
+          </a:p>
+          <a:p>
+            <a:r>
+              <a:rPr lang="de-DE" dirty="0" err="1"/>
+              <a:t>differencing</a:t>
+            </a:r>
+            <a:endParaRPr lang="de-DE" dirty="0"/>
+          </a:p>
+          <a:p>
+            <a:r>
+              <a:rPr lang="de-DE" dirty="0"/>
+              <a:t>log </a:t>
+            </a:r>
+            <a:r>
+              <a:rPr lang="de-DE" dirty="0" err="1"/>
+              <a:t>transform</a:t>
+            </a:r>
+            <a:r>
+              <a:rPr lang="de-DE" dirty="0"/>
+              <a:t> (</a:t>
+            </a:r>
+            <a:r>
+              <a:rPr lang="de-DE" dirty="0" err="1"/>
+              <a:t>converts</a:t>
+            </a:r>
+            <a:r>
+              <a:rPr lang="de-DE" dirty="0"/>
+              <a:t> </a:t>
+            </a:r>
+            <a:r>
+              <a:rPr lang="de-DE" dirty="0" err="1"/>
+              <a:t>multiplicative</a:t>
+            </a:r>
+            <a:r>
+              <a:rPr lang="de-DE" dirty="0"/>
+              <a:t> </a:t>
+            </a:r>
+            <a:r>
+              <a:rPr lang="de-DE" dirty="0" err="1"/>
+              <a:t>relationships</a:t>
+            </a:r>
+            <a:r>
+              <a:rPr lang="de-DE" dirty="0"/>
+              <a:t> </a:t>
+            </a:r>
+            <a:r>
+              <a:rPr lang="de-DE" dirty="0" err="1"/>
+              <a:t>into</a:t>
+            </a:r>
+            <a:r>
+              <a:rPr lang="de-DE" dirty="0"/>
+              <a:t> additive </a:t>
+            </a:r>
+            <a:r>
+              <a:rPr lang="de-DE" dirty="0" err="1"/>
+              <a:t>ones</a:t>
+            </a:r>
+            <a:r>
+              <a:rPr lang="de-DE" dirty="0"/>
+              <a:t>, </a:t>
+            </a:r>
+            <a:r>
+              <a:rPr lang="de-DE" dirty="0" err="1"/>
+              <a:t>forcing</a:t>
+            </a:r>
+            <a:r>
+              <a:rPr lang="de-DE" dirty="0"/>
+              <a:t> </a:t>
+            </a:r>
+            <a:r>
+              <a:rPr lang="de-DE" dirty="0" err="1"/>
+              <a:t>variations</a:t>
+            </a:r>
+            <a:r>
+              <a:rPr lang="de-DE" dirty="0"/>
+              <a:t> </a:t>
+            </a:r>
+            <a:r>
+              <a:rPr lang="de-DE" dirty="0" err="1"/>
+              <a:t>to</a:t>
+            </a:r>
+            <a:r>
+              <a:rPr lang="de-DE" dirty="0"/>
+              <a:t> </a:t>
+            </a:r>
+            <a:r>
+              <a:rPr lang="de-DE" dirty="0" err="1"/>
+              <a:t>remain</a:t>
+            </a:r>
+            <a:r>
+              <a:rPr lang="de-DE" dirty="0"/>
+              <a:t> </a:t>
+            </a:r>
+            <a:r>
+              <a:rPr lang="de-DE" dirty="0" err="1"/>
+              <a:t>consistent</a:t>
+            </a:r>
+            <a:r>
+              <a:rPr lang="de-DE" dirty="0"/>
+              <a:t> </a:t>
+            </a:r>
+            <a:r>
+              <a:rPr lang="de-DE" dirty="0" err="1"/>
+              <a:t>throughout</a:t>
+            </a:r>
+            <a:r>
+              <a:rPr lang="de-DE" dirty="0"/>
+              <a:t> </a:t>
+            </a:r>
+            <a:r>
+              <a:rPr lang="de-DE" dirty="0" err="1"/>
+              <a:t>the</a:t>
+            </a:r>
+            <a:r>
+              <a:rPr lang="de-DE" dirty="0"/>
+              <a:t> </a:t>
+            </a:r>
+            <a:r>
+              <a:rPr lang="de-DE" dirty="0" err="1"/>
+              <a:t>entire</a:t>
+            </a:r>
+            <a:r>
+              <a:rPr lang="de-DE" dirty="0"/>
+              <a:t> </a:t>
+            </a:r>
+            <a:r>
+              <a:rPr lang="de-DE" dirty="0" err="1"/>
+              <a:t>timeline</a:t>
+            </a:r>
+            <a:r>
+              <a:rPr lang="de-DE" dirty="0"/>
+              <a:t>)</a:t>
+            </a:r>
+          </a:p>
+          <a:p>
+            <a:r>
+              <a:rPr lang="de-DE" dirty="0" err="1"/>
+              <a:t>seasonal</a:t>
+            </a:r>
+            <a:r>
+              <a:rPr lang="de-DE" dirty="0"/>
+              <a:t> </a:t>
+            </a:r>
+            <a:r>
+              <a:rPr lang="de-DE" dirty="0" err="1"/>
+              <a:t>adjustment</a:t>
+            </a:r>
+            <a:endParaRPr lang="de-DE" dirty="0"/>
+          </a:p>
+          <a:p>
+            <a:endParaRPr lang="de-DE" dirty="0"/>
           </a:p>
         </p:txBody>
       </p:sp>
@@ -11266,7 +12050,7 @@
           <p:cNvPr id="4" name="Foliennummernplatzhalter 3">
             <a:extLst>
               <a:ext uri="{FF2B5EF4-FFF2-40B4-BE49-F238E27FC236}">
-                <a16:creationId xmlns:a16="http://schemas.microsoft.com/office/drawing/2014/main" id="{A8C6F7B8-C3D0-71E0-24B5-892148818456}"/>
+                <a16:creationId xmlns:a16="http://schemas.microsoft.com/office/drawing/2014/main" id="{16450BCB-8F61-C4DD-43EB-A987B508E2B5}"/>
               </a:ext>
             </a:extLst>
           </p:cNvPr>
@@ -11282,7 +12066,7 @@
           <a:bodyPr/>
           <a:lstStyle/>
           <a:p>
-            <a:fld id="{3D4C94FE-FF23-4504-88E9-14D481113291}" type="slidenum">
+            <a:fld id="{D6D392C1-03C4-44BA-9267-8F9A2DA09A60}" type="slidenum">
               <a:rPr lang="en-GB" smtClean="0"/>
               <a:t>11</a:t>
             </a:fld>
@@ -11293,7 +12077,7 @@
     </p:spTree>
     <p:extLst>
       <p:ext uri="{BB962C8B-B14F-4D97-AF65-F5344CB8AC3E}">
-        <p14:creationId xmlns:p14="http://schemas.microsoft.com/office/powerpoint/2010/main" val="267580255"/>
+        <p14:creationId xmlns:p14="http://schemas.microsoft.com/office/powerpoint/2010/main" val="1654084469"/>
       </p:ext>
     </p:extLst>
   </p:cSld>
@@ -11325,7 +12109,7 @@
           <p:cNvPr id="2" name="Titel 1">
             <a:extLst>
               <a:ext uri="{FF2B5EF4-FFF2-40B4-BE49-F238E27FC236}">
-                <a16:creationId xmlns:a16="http://schemas.microsoft.com/office/drawing/2014/main" id="{4B0F2291-FA99-0076-EAD4-588EE94A43B9}"/>
+                <a16:creationId xmlns:a16="http://schemas.microsoft.com/office/drawing/2014/main" id="{57B6113B-21A2-0854-924B-BB63E6FC0D6D}"/>
               </a:ext>
             </a:extLst>
           </p:cNvPr>
@@ -11342,20 +12126,8 @@
           <a:lstStyle/>
           <a:p>
             <a:r>
-              <a:rPr lang="de-DE" dirty="0"/>
-              <a:t>ML-</a:t>
-            </a:r>
-            <a:r>
-              <a:rPr lang="de-DE" dirty="0" err="1"/>
-              <a:t>based</a:t>
-            </a:r>
-            <a:r>
-              <a:rPr lang="de-DE" dirty="0"/>
-              <a:t> </a:t>
-            </a:r>
-            <a:r>
-              <a:rPr lang="de-DE" dirty="0" err="1"/>
-              <a:t>Forecasting</a:t>
+              <a:rPr lang="en-GB" dirty="0"/>
+              <a:t>Types of Time Series Forecasting Information</a:t>
             </a:r>
             <a:endParaRPr lang="de-DE" dirty="0"/>
           </a:p>
@@ -11366,7 +12138,7 @@
           <p:cNvPr id="3" name="Inhaltsplatzhalter 2">
             <a:extLst>
               <a:ext uri="{FF2B5EF4-FFF2-40B4-BE49-F238E27FC236}">
-                <a16:creationId xmlns:a16="http://schemas.microsoft.com/office/drawing/2014/main" id="{C275FB23-BAEB-BC06-9A76-E4BE2935D422}"/>
+                <a16:creationId xmlns:a16="http://schemas.microsoft.com/office/drawing/2014/main" id="{4F5DD1B4-F8BE-67D9-5C8A-5846104EC367}"/>
               </a:ext>
             </a:extLst>
           </p:cNvPr>
@@ -11380,7 +12152,7 @@
         <p:spPr/>
         <p:txBody>
           <a:bodyPr>
-            <a:normAutofit/>
+            <a:normAutofit fontScale="92500"/>
           </a:bodyPr>
           <a:lstStyle/>
           <a:p>
@@ -11389,7 +12161,21 @@
             </a:pPr>
             <a:r>
               <a:rPr lang="en-GB" dirty="0"/>
-              <a:t>decomposition-based approaches: </a:t>
+              <a:t>auto-correlation:</a:t>
+            </a:r>
+          </a:p>
+          <a:p>
+            <a:r>
+              <a:rPr lang="en-GB" dirty="0"/>
+              <a:t>using past values of considered time series as function of lag</a:t>
+            </a:r>
+          </a:p>
+          <a:p>
+            <a:r>
+              <a:rPr lang="en-GB" dirty="0">
+                <a:sym typeface="Wingdings" panose="05000000000000000000" pitchFamily="2" charset="2"/>
+              </a:rPr>
+              <a:t>identifying periodicity (seasonality) and trend</a:t>
             </a:r>
           </a:p>
           <a:p>
@@ -11397,54 +12183,12 @@
               <a:buNone/>
             </a:pPr>
             <a:r>
-              <a:rPr lang="en-GB" dirty="0"/>
-              <a:t>additive components such as trend, seasonality, holidays</a:t>
-            </a:r>
-          </a:p>
-          <a:p>
-            <a:pPr marL="0" indent="0">
-              <a:buNone/>
-            </a:pPr>
-            <a:r>
-              <a:rPr lang="de-DE" dirty="0">
-                <a:sym typeface="Wingdings" pitchFamily="2" charset="2"/>
+              <a:rPr lang="en-GB" dirty="0">
+                <a:sym typeface="Wingdings" panose="05000000000000000000" pitchFamily="2" charset="2"/>
               </a:rPr>
-              <a:t> </a:t>
-            </a:r>
-            <a:r>
-              <a:rPr lang="de-DE" dirty="0"/>
-              <a:t>additive </a:t>
-            </a:r>
-            <a:r>
-              <a:rPr lang="de-DE" dirty="0" err="1"/>
-              <a:t>regression</a:t>
-            </a:r>
-            <a:r>
-              <a:rPr lang="de-DE" dirty="0"/>
-              <a:t> / </a:t>
-            </a:r>
-            <a:r>
-              <a:rPr lang="de-DE" dirty="0" err="1"/>
-              <a:t>generalized</a:t>
-            </a:r>
-            <a:r>
-              <a:rPr lang="de-DE" dirty="0"/>
-              <a:t> additive </a:t>
-            </a:r>
-            <a:r>
-              <a:rPr lang="de-DE" dirty="0" err="1"/>
-              <a:t>modeling</a:t>
+              <a:t> ARMA</a:t>
             </a:r>
             <a:endParaRPr lang="en-GB" dirty="0"/>
-          </a:p>
-          <a:p>
-            <a:pPr marL="0" indent="0">
-              <a:buNone/>
-            </a:pPr>
-            <a:r>
-              <a:rPr lang="en-GB" dirty="0"/>
-              <a:t>example method: prophet</a:t>
-            </a:r>
           </a:p>
           <a:p>
             <a:pPr marL="0" indent="0">
@@ -11458,8 +12202,29 @@
             </a:pPr>
             <a:r>
               <a:rPr lang="en-GB" dirty="0"/>
-              <a:t>natural way for multivariate model: training one model combining several independent time series, distinguished by additional feature (e.g., product ID)</a:t>
-            </a:r>
+              <a:t>exogenous variables:</a:t>
+            </a:r>
+          </a:p>
+          <a:p>
+            <a:r>
+              <a:rPr lang="en-GB" dirty="0"/>
+              <a:t>using correlations of other variables to considered time series</a:t>
+            </a:r>
+          </a:p>
+          <a:p>
+            <a:r>
+              <a:rPr lang="en-GB" dirty="0"/>
+              <a:t>examples in demand forecasting: price, weather</a:t>
+            </a:r>
+          </a:p>
+          <a:p>
+            <a:r>
+              <a:rPr lang="en-GB" dirty="0"/>
+              <a:t>such effects lasting for some time create spurious auto-correlation</a:t>
+            </a:r>
+            <a:endParaRPr lang="en-GB" dirty="0">
+              <a:sym typeface="Wingdings" panose="05000000000000000000" pitchFamily="2" charset="2"/>
+            </a:endParaRPr>
           </a:p>
         </p:txBody>
       </p:sp>
@@ -11468,7 +12233,7 @@
           <p:cNvPr id="4" name="Foliennummernplatzhalter 3">
             <a:extLst>
               <a:ext uri="{FF2B5EF4-FFF2-40B4-BE49-F238E27FC236}">
-                <a16:creationId xmlns:a16="http://schemas.microsoft.com/office/drawing/2014/main" id="{950EBF2D-0D59-0F92-1A8E-7681D29A42FE}"/>
+                <a16:creationId xmlns:a16="http://schemas.microsoft.com/office/drawing/2014/main" id="{A8C6F7B8-C3D0-71E0-24B5-892148818456}"/>
               </a:ext>
             </a:extLst>
           </p:cNvPr>
@@ -11484,7 +12249,7 @@
           <a:bodyPr/>
           <a:lstStyle/>
           <a:p>
-            <a:fld id="{D6D392C1-03C4-44BA-9267-8F9A2DA09A60}" type="slidenum">
+            <a:fld id="{3D4C94FE-FF23-4504-88E9-14D481113291}" type="slidenum">
               <a:rPr lang="en-GB" smtClean="0"/>
               <a:t>12</a:t>
             </a:fld>
@@ -11495,7 +12260,7 @@
     </p:spTree>
     <p:extLst>
       <p:ext uri="{BB962C8B-B14F-4D97-AF65-F5344CB8AC3E}">
-        <p14:creationId xmlns:p14="http://schemas.microsoft.com/office/powerpoint/2010/main" val="3656772972"/>
+        <p14:creationId xmlns:p14="http://schemas.microsoft.com/office/powerpoint/2010/main" val="267580255"/>
       </p:ext>
     </p:extLst>
   </p:cSld>
@@ -11527,6 +12292,208 @@
           <p:cNvPr id="2" name="Titel 1">
             <a:extLst>
               <a:ext uri="{FF2B5EF4-FFF2-40B4-BE49-F238E27FC236}">
+                <a16:creationId xmlns:a16="http://schemas.microsoft.com/office/drawing/2014/main" id="{4B0F2291-FA99-0076-EAD4-588EE94A43B9}"/>
+              </a:ext>
+            </a:extLst>
+          </p:cNvPr>
+          <p:cNvSpPr>
+            <a:spLocks noGrp="1"/>
+          </p:cNvSpPr>
+          <p:nvPr>
+            <p:ph type="title"/>
+          </p:nvPr>
+        </p:nvSpPr>
+        <p:spPr/>
+        <p:txBody>
+          <a:bodyPr/>
+          <a:lstStyle/>
+          <a:p>
+            <a:r>
+              <a:rPr lang="de-DE" dirty="0"/>
+              <a:t>ML-</a:t>
+            </a:r>
+            <a:r>
+              <a:rPr lang="de-DE" dirty="0" err="1"/>
+              <a:t>based</a:t>
+            </a:r>
+            <a:r>
+              <a:rPr lang="de-DE" dirty="0"/>
+              <a:t> </a:t>
+            </a:r>
+            <a:r>
+              <a:rPr lang="de-DE" dirty="0" err="1"/>
+              <a:t>Forecasting</a:t>
+            </a:r>
+            <a:endParaRPr lang="de-DE" dirty="0"/>
+          </a:p>
+        </p:txBody>
+      </p:sp>
+      <p:sp>
+        <p:nvSpPr>
+          <p:cNvPr id="3" name="Inhaltsplatzhalter 2">
+            <a:extLst>
+              <a:ext uri="{FF2B5EF4-FFF2-40B4-BE49-F238E27FC236}">
+                <a16:creationId xmlns:a16="http://schemas.microsoft.com/office/drawing/2014/main" id="{C275FB23-BAEB-BC06-9A76-E4BE2935D422}"/>
+              </a:ext>
+            </a:extLst>
+          </p:cNvPr>
+          <p:cNvSpPr>
+            <a:spLocks noGrp="1"/>
+          </p:cNvSpPr>
+          <p:nvPr>
+            <p:ph idx="1"/>
+          </p:nvPr>
+        </p:nvSpPr>
+        <p:spPr/>
+        <p:txBody>
+          <a:bodyPr>
+            <a:normAutofit/>
+          </a:bodyPr>
+          <a:lstStyle/>
+          <a:p>
+            <a:pPr marL="0" indent="0">
+              <a:buNone/>
+            </a:pPr>
+            <a:r>
+              <a:rPr lang="en-GB" dirty="0"/>
+              <a:t>decomposition-based approaches: </a:t>
+            </a:r>
+          </a:p>
+          <a:p>
+            <a:pPr marL="0" indent="0">
+              <a:buNone/>
+            </a:pPr>
+            <a:r>
+              <a:rPr lang="en-GB" dirty="0"/>
+              <a:t>additive components such as trend, seasonality, holidays</a:t>
+            </a:r>
+          </a:p>
+          <a:p>
+            <a:pPr marL="0" indent="0">
+              <a:buNone/>
+            </a:pPr>
+            <a:r>
+              <a:rPr lang="de-DE" dirty="0">
+                <a:sym typeface="Wingdings" pitchFamily="2" charset="2"/>
+              </a:rPr>
+              <a:t> </a:t>
+            </a:r>
+            <a:r>
+              <a:rPr lang="de-DE" dirty="0"/>
+              <a:t>additive </a:t>
+            </a:r>
+            <a:r>
+              <a:rPr lang="de-DE" dirty="0" err="1"/>
+              <a:t>regression</a:t>
+            </a:r>
+            <a:r>
+              <a:rPr lang="de-DE" dirty="0"/>
+              <a:t> / </a:t>
+            </a:r>
+            <a:r>
+              <a:rPr lang="de-DE" dirty="0" err="1"/>
+              <a:t>generalized</a:t>
+            </a:r>
+            <a:r>
+              <a:rPr lang="de-DE" dirty="0"/>
+              <a:t> additive </a:t>
+            </a:r>
+            <a:r>
+              <a:rPr lang="de-DE" dirty="0" err="1"/>
+              <a:t>modeling</a:t>
+            </a:r>
+            <a:endParaRPr lang="en-GB" dirty="0"/>
+          </a:p>
+          <a:p>
+            <a:pPr marL="0" indent="0">
+              <a:buNone/>
+            </a:pPr>
+            <a:r>
+              <a:rPr lang="en-GB" dirty="0"/>
+              <a:t>example method: prophet</a:t>
+            </a:r>
+          </a:p>
+          <a:p>
+            <a:pPr marL="0" indent="0">
+              <a:buNone/>
+            </a:pPr>
+            <a:endParaRPr lang="en-GB" dirty="0"/>
+          </a:p>
+          <a:p>
+            <a:pPr marL="0" indent="0">
+              <a:buNone/>
+            </a:pPr>
+            <a:r>
+              <a:rPr lang="en-GB" dirty="0"/>
+              <a:t>natural way for multivariate model: training one model combining several independent time series, distinguished by additional feature (e.g., product ID)</a:t>
+            </a:r>
+          </a:p>
+        </p:txBody>
+      </p:sp>
+      <p:sp>
+        <p:nvSpPr>
+          <p:cNvPr id="4" name="Foliennummernplatzhalter 3">
+            <a:extLst>
+              <a:ext uri="{FF2B5EF4-FFF2-40B4-BE49-F238E27FC236}">
+                <a16:creationId xmlns:a16="http://schemas.microsoft.com/office/drawing/2014/main" id="{950EBF2D-0D59-0F92-1A8E-7681D29A42FE}"/>
+              </a:ext>
+            </a:extLst>
+          </p:cNvPr>
+          <p:cNvSpPr>
+            <a:spLocks noGrp="1"/>
+          </p:cNvSpPr>
+          <p:nvPr>
+            <p:ph type="sldNum" sz="quarter" idx="12"/>
+          </p:nvPr>
+        </p:nvSpPr>
+        <p:spPr/>
+        <p:txBody>
+          <a:bodyPr/>
+          <a:lstStyle/>
+          <a:p>
+            <a:fld id="{D6D392C1-03C4-44BA-9267-8F9A2DA09A60}" type="slidenum">
+              <a:rPr lang="en-GB" smtClean="0"/>
+              <a:t>13</a:t>
+            </a:fld>
+            <a:endParaRPr lang="en-GB"/>
+          </a:p>
+        </p:txBody>
+      </p:sp>
+    </p:spTree>
+    <p:extLst>
+      <p:ext uri="{BB962C8B-B14F-4D97-AF65-F5344CB8AC3E}">
+        <p14:creationId xmlns:p14="http://schemas.microsoft.com/office/powerpoint/2010/main" val="3656772972"/>
+      </p:ext>
+    </p:extLst>
+  </p:cSld>
+  <p:clrMapOvr>
+    <a:masterClrMapping/>
+  </p:clrMapOvr>
+</p:sld>
+</file>
+
+<file path=ppt/slides/slide14.xml><?xml version="1.0" encoding="utf-8"?>
+<p:sld xmlns:a="http://schemas.openxmlformats.org/drawingml/2006/main" xmlns:r="http://schemas.openxmlformats.org/officeDocument/2006/relationships" xmlns:p="http://schemas.openxmlformats.org/presentationml/2006/main">
+  <p:cSld>
+    <p:spTree>
+      <p:nvGrpSpPr>
+        <p:cNvPr id="1" name=""/>
+        <p:cNvGrpSpPr/>
+        <p:nvPr/>
+      </p:nvGrpSpPr>
+      <p:grpSpPr>
+        <a:xfrm>
+          <a:off x="0" y="0"/>
+          <a:ext cx="0" cy="0"/>
+          <a:chOff x="0" y="0"/>
+          <a:chExt cx="0" cy="0"/>
+        </a:xfrm>
+      </p:grpSpPr>
+      <p:sp>
+        <p:nvSpPr>
+          <p:cNvPr id="2" name="Titel 1">
+            <a:extLst>
+              <a:ext uri="{FF2B5EF4-FFF2-40B4-BE49-F238E27FC236}">
                 <a16:creationId xmlns:a16="http://schemas.microsoft.com/office/drawing/2014/main" id="{32230A68-4EF3-682A-ECAC-105D6AE7D06F}"/>
               </a:ext>
             </a:extLst>
@@ -11875,7 +12842,7 @@
           <a:p>
             <a:fld id="{D6D392C1-03C4-44BA-9267-8F9A2DA09A60}" type="slidenum">
               <a:rPr lang="en-GB" smtClean="0"/>
-              <a:t>13</a:t>
+              <a:t>14</a:t>
             </a:fld>
             <a:endParaRPr lang="en-GB"/>
           </a:p>
@@ -11894,7 +12861,7 @@
 </p:sld>
 </file>
 
-<file path=ppt/slides/slide14.xml><?xml version="1.0" encoding="utf-8"?>
+<file path=ppt/slides/slide15.xml><?xml version="1.0" encoding="utf-8"?>
 <p:sld xmlns:a="http://schemas.openxmlformats.org/drawingml/2006/main" xmlns:r="http://schemas.openxmlformats.org/officeDocument/2006/relationships" xmlns:p="http://schemas.openxmlformats.org/presentationml/2006/main">
   <p:cSld>
     <p:spTree>
@@ -12438,7 +13405,7 @@
           <a:p>
             <a:fld id="{D6D392C1-03C4-44BA-9267-8F9A2DA09A60}" type="slidenum">
               <a:rPr lang="en-GB" smtClean="0"/>
-              <a:t>14</a:t>
+              <a:t>15</a:t>
             </a:fld>
             <a:endParaRPr lang="en-GB"/>
           </a:p>
@@ -12457,7 +13424,7 @@
 </p:sld>
 </file>
 
-<file path=ppt/slides/slide15.xml><?xml version="1.0" encoding="utf-8"?>
+<file path=ppt/slides/slide16.xml><?xml version="1.0" encoding="utf-8"?>
 <p:sld xmlns:a="http://schemas.openxmlformats.org/drawingml/2006/main" xmlns:r="http://schemas.openxmlformats.org/officeDocument/2006/relationships" xmlns:p="http://schemas.openxmlformats.org/presentationml/2006/main">
   <p:cSld>
     <p:spTree>
@@ -13012,7 +13979,7 @@
           <a:p>
             <a:fld id="{D6D392C1-03C4-44BA-9267-8F9A2DA09A60}" type="slidenum">
               <a:rPr lang="en-GB" smtClean="0"/>
-              <a:t>15</a:t>
+              <a:t>16</a:t>
             </a:fld>
             <a:endParaRPr lang="en-GB"/>
           </a:p>
@@ -13062,348 +14029,6 @@
     <p:extLst>
       <p:ext uri="{BB962C8B-B14F-4D97-AF65-F5344CB8AC3E}">
         <p14:creationId xmlns:p14="http://schemas.microsoft.com/office/powerpoint/2010/main" val="3568746176"/>
-      </p:ext>
-    </p:extLst>
-  </p:cSld>
-  <p:clrMapOvr>
-    <a:masterClrMapping/>
-  </p:clrMapOvr>
-</p:sld>
-</file>
-
-<file path=ppt/slides/slide16.xml><?xml version="1.0" encoding="utf-8"?>
-<p:sld xmlns:a="http://schemas.openxmlformats.org/drawingml/2006/main" xmlns:r="http://schemas.openxmlformats.org/officeDocument/2006/relationships" xmlns:p="http://schemas.openxmlformats.org/presentationml/2006/main">
-  <p:cSld>
-    <p:spTree>
-      <p:nvGrpSpPr>
-        <p:cNvPr id="1" name=""/>
-        <p:cNvGrpSpPr/>
-        <p:nvPr/>
-      </p:nvGrpSpPr>
-      <p:grpSpPr>
-        <a:xfrm>
-          <a:off x="0" y="0"/>
-          <a:ext cx="0" cy="0"/>
-          <a:chOff x="0" y="0"/>
-          <a:chExt cx="0" cy="0"/>
-        </a:xfrm>
-      </p:grpSpPr>
-      <p:sp>
-        <p:nvSpPr>
-          <p:cNvPr id="2" name="Titel 1">
-            <a:extLst>
-              <a:ext uri="{FF2B5EF4-FFF2-40B4-BE49-F238E27FC236}">
-                <a16:creationId xmlns:a16="http://schemas.microsoft.com/office/drawing/2014/main" id="{AB7E7E7D-498D-3CAB-B8CF-A9EE30AE8C74}"/>
-              </a:ext>
-            </a:extLst>
-          </p:cNvPr>
-          <p:cNvSpPr>
-            <a:spLocks noGrp="1"/>
-          </p:cNvSpPr>
-          <p:nvPr>
-            <p:ph type="title"/>
-          </p:nvPr>
-        </p:nvSpPr>
-        <p:spPr/>
-        <p:txBody>
-          <a:bodyPr/>
-          <a:lstStyle/>
-          <a:p>
-            <a:r>
-              <a:rPr lang="de-DE" dirty="0"/>
-              <a:t>Trend &amp; </a:t>
-            </a:r>
-            <a:r>
-              <a:rPr lang="de-DE" dirty="0" err="1"/>
-              <a:t>Seasonality</a:t>
-            </a:r>
-            <a:endParaRPr lang="de-DE" dirty="0"/>
-          </a:p>
-        </p:txBody>
-      </p:sp>
-      <p:sp>
-        <p:nvSpPr>
-          <p:cNvPr id="3" name="Inhaltsplatzhalter 2">
-            <a:extLst>
-              <a:ext uri="{FF2B5EF4-FFF2-40B4-BE49-F238E27FC236}">
-                <a16:creationId xmlns:a16="http://schemas.microsoft.com/office/drawing/2014/main" id="{D0744B54-851F-F434-BE0A-ABF1763AD9A6}"/>
-              </a:ext>
-            </a:extLst>
-          </p:cNvPr>
-          <p:cNvSpPr>
-            <a:spLocks noGrp="1"/>
-          </p:cNvSpPr>
-          <p:nvPr>
-            <p:ph idx="1"/>
-          </p:nvPr>
-        </p:nvSpPr>
-        <p:spPr/>
-        <p:txBody>
-          <a:bodyPr>
-            <a:normAutofit/>
-          </a:bodyPr>
-          <a:lstStyle/>
-          <a:p>
-            <a:pPr marL="0" indent="0">
-              <a:buNone/>
-            </a:pPr>
-            <a:r>
-              <a:rPr lang="de-DE" dirty="0" err="1"/>
-              <a:t>capture</a:t>
-            </a:r>
-            <a:r>
-              <a:rPr lang="de-DE" dirty="0"/>
-              <a:t> </a:t>
-            </a:r>
-            <a:r>
-              <a:rPr lang="de-DE" dirty="0" err="1"/>
-              <a:t>long</a:t>
-            </a:r>
-            <a:r>
-              <a:rPr lang="de-DE" dirty="0"/>
-              <a:t>-term </a:t>
-            </a:r>
-            <a:r>
-              <a:rPr lang="de-DE" dirty="0" err="1"/>
-              <a:t>movement</a:t>
-            </a:r>
-            <a:r>
-              <a:rPr lang="de-DE" dirty="0"/>
-              <a:t> such </a:t>
-            </a:r>
-            <a:r>
-              <a:rPr lang="de-DE" dirty="0" err="1"/>
-              <a:t>as</a:t>
-            </a:r>
-            <a:r>
-              <a:rPr lang="de-DE" dirty="0"/>
-              <a:t> </a:t>
-            </a:r>
-            <a:r>
-              <a:rPr lang="de-DE" dirty="0" err="1"/>
-              <a:t>increasing</a:t>
-            </a:r>
-            <a:r>
-              <a:rPr lang="de-DE" dirty="0"/>
-              <a:t>/</a:t>
-            </a:r>
-            <a:r>
-              <a:rPr lang="de-DE" dirty="0" err="1"/>
-              <a:t>decreasing</a:t>
-            </a:r>
-            <a:r>
-              <a:rPr lang="de-DE" dirty="0"/>
-              <a:t> </a:t>
-            </a:r>
-            <a:r>
-              <a:rPr lang="de-DE" dirty="0" err="1"/>
-              <a:t>trend</a:t>
-            </a:r>
-            <a:endParaRPr lang="de-DE" dirty="0"/>
-          </a:p>
-          <a:p>
-            <a:pPr marL="0" indent="0">
-              <a:buNone/>
-            </a:pPr>
-            <a:r>
-              <a:rPr lang="de-DE" dirty="0" err="1"/>
-              <a:t>difference</a:t>
-            </a:r>
-            <a:r>
-              <a:rPr lang="de-DE" dirty="0"/>
-              <a:t> </a:t>
-            </a:r>
-            <a:r>
-              <a:rPr lang="de-DE" dirty="0" err="1"/>
-              <a:t>between</a:t>
-            </a:r>
-            <a:r>
-              <a:rPr lang="de-DE" dirty="0"/>
-              <a:t> </a:t>
-            </a:r>
-            <a:r>
-              <a:rPr lang="de-DE" dirty="0" err="1"/>
-              <a:t>current</a:t>
-            </a:r>
-            <a:r>
-              <a:rPr lang="de-DE" dirty="0"/>
-              <a:t> and </a:t>
-            </a:r>
-            <a:r>
-              <a:rPr lang="de-DE" dirty="0" err="1"/>
-              <a:t>past</a:t>
-            </a:r>
-            <a:r>
-              <a:rPr lang="de-DE" dirty="0"/>
-              <a:t> </a:t>
-            </a:r>
-            <a:r>
-              <a:rPr lang="de-DE" dirty="0" err="1"/>
-              <a:t>values</a:t>
-            </a:r>
-            <a:endParaRPr lang="de-DE" dirty="0"/>
-          </a:p>
-          <a:p>
-            <a:pPr marL="0" indent="0">
-              <a:buNone/>
-            </a:pPr>
-            <a:endParaRPr lang="de-DE" dirty="0"/>
-          </a:p>
-          <a:p>
-            <a:pPr marL="0" indent="0">
-              <a:buNone/>
-            </a:pPr>
-            <a:r>
-              <a:rPr lang="de-DE" dirty="0" err="1"/>
-              <a:t>capture</a:t>
-            </a:r>
-            <a:r>
-              <a:rPr lang="de-DE" dirty="0"/>
-              <a:t> </a:t>
-            </a:r>
-            <a:r>
-              <a:rPr lang="de-DE" dirty="0" err="1"/>
-              <a:t>repeating</a:t>
-            </a:r>
-            <a:r>
-              <a:rPr lang="de-DE" dirty="0"/>
-              <a:t> </a:t>
-            </a:r>
-            <a:r>
-              <a:rPr lang="de-DE" dirty="0" err="1"/>
-              <a:t>patterns</a:t>
-            </a:r>
-            <a:r>
-              <a:rPr lang="de-DE" dirty="0"/>
-              <a:t>:</a:t>
-            </a:r>
-          </a:p>
-          <a:p>
-            <a:r>
-              <a:rPr lang="de-DE" dirty="0" err="1"/>
-              <a:t>day</a:t>
-            </a:r>
-            <a:r>
-              <a:rPr lang="de-DE" dirty="0"/>
-              <a:t> </a:t>
-            </a:r>
-            <a:r>
-              <a:rPr lang="de-DE" dirty="0" err="1"/>
-              <a:t>of</a:t>
-            </a:r>
-            <a:r>
-              <a:rPr lang="de-DE" dirty="0"/>
-              <a:t> </a:t>
-            </a:r>
-            <a:r>
-              <a:rPr lang="de-DE" dirty="0" err="1"/>
-              <a:t>week</a:t>
-            </a:r>
-            <a:endParaRPr lang="de-DE" dirty="0"/>
-          </a:p>
-          <a:p>
-            <a:r>
-              <a:rPr lang="de-DE" dirty="0" err="1"/>
-              <a:t>month</a:t>
-            </a:r>
-            <a:endParaRPr lang="de-DE" dirty="0"/>
-          </a:p>
-          <a:p>
-            <a:r>
-              <a:rPr lang="de-DE" dirty="0" err="1"/>
-              <a:t>holiday</a:t>
-            </a:r>
-            <a:r>
-              <a:rPr lang="de-DE" dirty="0"/>
-              <a:t> </a:t>
-            </a:r>
-            <a:r>
-              <a:rPr lang="de-DE" dirty="0" err="1"/>
-              <a:t>indicators</a:t>
-            </a:r>
-            <a:endParaRPr lang="de-DE" dirty="0"/>
-          </a:p>
-          <a:p>
-            <a:pPr marL="0" indent="0">
-              <a:buNone/>
-            </a:pPr>
-            <a:r>
-              <a:rPr lang="de-DE" dirty="0">
-                <a:sym typeface="Wingdings" pitchFamily="2" charset="2"/>
-              </a:rPr>
-              <a:t> </a:t>
-            </a:r>
-            <a:r>
-              <a:rPr lang="de-DE" dirty="0" err="1">
-                <a:sym typeface="Wingdings" pitchFamily="2" charset="2"/>
-              </a:rPr>
-              <a:t>o</a:t>
-            </a:r>
-            <a:r>
-              <a:rPr lang="de-DE" dirty="0" err="1"/>
-              <a:t>ften</a:t>
-            </a:r>
-            <a:r>
-              <a:rPr lang="de-DE" dirty="0"/>
-              <a:t> </a:t>
-            </a:r>
-            <a:r>
-              <a:rPr lang="de-DE" dirty="0" err="1"/>
-              <a:t>critical</a:t>
-            </a:r>
-            <a:r>
-              <a:rPr lang="de-DE" dirty="0"/>
-              <a:t> in time </a:t>
-            </a:r>
-            <a:r>
-              <a:rPr lang="de-DE" dirty="0" err="1"/>
-              <a:t>series</a:t>
-            </a:r>
-            <a:r>
-              <a:rPr lang="de-DE" dirty="0"/>
-              <a:t> </a:t>
-            </a:r>
-            <a:r>
-              <a:rPr lang="de-DE" dirty="0" err="1"/>
-              <a:t>problems</a:t>
-            </a:r>
-            <a:endParaRPr lang="de-DE" dirty="0"/>
-          </a:p>
-        </p:txBody>
-      </p:sp>
-      <p:sp>
-        <p:nvSpPr>
-          <p:cNvPr id="4" name="Foliennummernplatzhalter 3">
-            <a:extLst>
-              <a:ext uri="{FF2B5EF4-FFF2-40B4-BE49-F238E27FC236}">
-                <a16:creationId xmlns:a16="http://schemas.microsoft.com/office/drawing/2014/main" id="{492AEADF-8210-3277-C286-5E5BE1B94A29}"/>
-              </a:ext>
-            </a:extLst>
-          </p:cNvPr>
-          <p:cNvSpPr>
-            <a:spLocks noGrp="1"/>
-          </p:cNvSpPr>
-          <p:nvPr>
-            <p:ph type="sldNum" sz="quarter" idx="12"/>
-          </p:nvPr>
-        </p:nvSpPr>
-        <p:spPr/>
-        <p:txBody>
-          <a:bodyPr/>
-          <a:lstStyle/>
-          <a:p>
-            <a:fld id="{D6D392C1-03C4-44BA-9267-8F9A2DA09A60}" type="slidenum">
-              <a:rPr lang="en-GB" smtClean="0"/>
-              <a:t>16</a:t>
-            </a:fld>
-            <a:endParaRPr lang="en-GB"/>
-          </a:p>
-        </p:txBody>
-      </p:sp>
-    </p:spTree>
-    <p:extLst>
-      <p:ext uri="{BB962C8B-B14F-4D97-AF65-F5344CB8AC3E}">
-        <p14:creationId xmlns:p14="http://schemas.microsoft.com/office/powerpoint/2010/main" val="3982333920"/>
       </p:ext>
     </p:extLst>
   </p:cSld>
@@ -13435,7 +14060,7 @@
           <p:cNvPr id="2" name="Titel 1">
             <a:extLst>
               <a:ext uri="{FF2B5EF4-FFF2-40B4-BE49-F238E27FC236}">
-                <a16:creationId xmlns:a16="http://schemas.microsoft.com/office/drawing/2014/main" id="{773BE832-7085-6A32-B1A5-6BF26BE0857F}"/>
+                <a16:creationId xmlns:a16="http://schemas.microsoft.com/office/drawing/2014/main" id="{AB7E7E7D-498D-3CAB-B8CF-A9EE30AE8C74}"/>
               </a:ext>
             </a:extLst>
           </p:cNvPr>
@@ -13452,8 +14077,262 @@
           <a:lstStyle/>
           <a:p>
             <a:r>
-              <a:rPr lang="en-DE"/>
-              <a:t>Demand Forecasting with ML</a:t>
+              <a:rPr lang="de-DE" dirty="0"/>
+              <a:t>Trend &amp; </a:t>
+            </a:r>
+            <a:r>
+              <a:rPr lang="de-DE" dirty="0" err="1"/>
+              <a:t>Seasonality</a:t>
+            </a:r>
+            <a:endParaRPr lang="de-DE" dirty="0"/>
+          </a:p>
+        </p:txBody>
+      </p:sp>
+      <p:sp>
+        <p:nvSpPr>
+          <p:cNvPr id="3" name="Inhaltsplatzhalter 2">
+            <a:extLst>
+              <a:ext uri="{FF2B5EF4-FFF2-40B4-BE49-F238E27FC236}">
+                <a16:creationId xmlns:a16="http://schemas.microsoft.com/office/drawing/2014/main" id="{D0744B54-851F-F434-BE0A-ABF1763AD9A6}"/>
+              </a:ext>
+            </a:extLst>
+          </p:cNvPr>
+          <p:cNvSpPr>
+            <a:spLocks noGrp="1"/>
+          </p:cNvSpPr>
+          <p:nvPr>
+            <p:ph idx="1"/>
+          </p:nvPr>
+        </p:nvSpPr>
+        <p:spPr/>
+        <p:txBody>
+          <a:bodyPr>
+            <a:normAutofit/>
+          </a:bodyPr>
+          <a:lstStyle/>
+          <a:p>
+            <a:pPr marL="0" indent="0">
+              <a:buNone/>
+            </a:pPr>
+            <a:r>
+              <a:rPr lang="de-DE" dirty="0" err="1"/>
+              <a:t>capture</a:t>
+            </a:r>
+            <a:r>
+              <a:rPr lang="de-DE" dirty="0"/>
+              <a:t> </a:t>
+            </a:r>
+            <a:r>
+              <a:rPr lang="de-DE" dirty="0" err="1"/>
+              <a:t>long</a:t>
+            </a:r>
+            <a:r>
+              <a:rPr lang="de-DE" dirty="0"/>
+              <a:t>-term </a:t>
+            </a:r>
+            <a:r>
+              <a:rPr lang="de-DE" dirty="0" err="1"/>
+              <a:t>movement</a:t>
+            </a:r>
+            <a:r>
+              <a:rPr lang="de-DE" dirty="0"/>
+              <a:t> such </a:t>
+            </a:r>
+            <a:r>
+              <a:rPr lang="de-DE" dirty="0" err="1"/>
+              <a:t>as</a:t>
+            </a:r>
+            <a:r>
+              <a:rPr lang="de-DE" dirty="0"/>
+              <a:t> </a:t>
+            </a:r>
+            <a:r>
+              <a:rPr lang="de-DE" dirty="0" err="1"/>
+              <a:t>increasing</a:t>
+            </a:r>
+            <a:r>
+              <a:rPr lang="de-DE" dirty="0"/>
+              <a:t>/</a:t>
+            </a:r>
+            <a:r>
+              <a:rPr lang="de-DE" dirty="0" err="1"/>
+              <a:t>decreasing</a:t>
+            </a:r>
+            <a:r>
+              <a:rPr lang="de-DE" dirty="0"/>
+              <a:t> </a:t>
+            </a:r>
+            <a:r>
+              <a:rPr lang="de-DE" dirty="0" err="1"/>
+              <a:t>trend</a:t>
+            </a:r>
+            <a:endParaRPr lang="de-DE" dirty="0"/>
+          </a:p>
+          <a:p>
+            <a:pPr marL="0" indent="0">
+              <a:buNone/>
+            </a:pPr>
+            <a:r>
+              <a:rPr lang="de-DE" dirty="0" err="1"/>
+              <a:t>difference</a:t>
+            </a:r>
+            <a:r>
+              <a:rPr lang="de-DE" dirty="0"/>
+              <a:t> </a:t>
+            </a:r>
+            <a:r>
+              <a:rPr lang="de-DE" dirty="0" err="1"/>
+              <a:t>between</a:t>
+            </a:r>
+            <a:r>
+              <a:rPr lang="de-DE" dirty="0"/>
+              <a:t> </a:t>
+            </a:r>
+            <a:r>
+              <a:rPr lang="de-DE" dirty="0" err="1"/>
+              <a:t>current</a:t>
+            </a:r>
+            <a:r>
+              <a:rPr lang="de-DE" dirty="0"/>
+              <a:t> and </a:t>
+            </a:r>
+            <a:r>
+              <a:rPr lang="de-DE" dirty="0" err="1"/>
+              <a:t>past</a:t>
+            </a:r>
+            <a:r>
+              <a:rPr lang="de-DE" dirty="0"/>
+              <a:t> </a:t>
+            </a:r>
+            <a:r>
+              <a:rPr lang="de-DE" dirty="0" err="1"/>
+              <a:t>values</a:t>
+            </a:r>
+            <a:endParaRPr lang="de-DE" dirty="0"/>
+          </a:p>
+          <a:p>
+            <a:pPr marL="0" indent="0">
+              <a:buNone/>
+            </a:pPr>
+            <a:endParaRPr lang="de-DE" dirty="0"/>
+          </a:p>
+          <a:p>
+            <a:pPr marL="0" indent="0">
+              <a:buNone/>
+            </a:pPr>
+            <a:r>
+              <a:rPr lang="de-DE" dirty="0" err="1"/>
+              <a:t>capture</a:t>
+            </a:r>
+            <a:r>
+              <a:rPr lang="de-DE" dirty="0"/>
+              <a:t> </a:t>
+            </a:r>
+            <a:r>
+              <a:rPr lang="de-DE" dirty="0" err="1"/>
+              <a:t>repeating</a:t>
+            </a:r>
+            <a:r>
+              <a:rPr lang="de-DE" dirty="0"/>
+              <a:t> </a:t>
+            </a:r>
+            <a:r>
+              <a:rPr lang="de-DE" dirty="0" err="1"/>
+              <a:t>patterns</a:t>
+            </a:r>
+            <a:r>
+              <a:rPr lang="de-DE" dirty="0"/>
+              <a:t>:</a:t>
+            </a:r>
+          </a:p>
+          <a:p>
+            <a:r>
+              <a:rPr lang="de-DE" dirty="0" err="1"/>
+              <a:t>day</a:t>
+            </a:r>
+            <a:r>
+              <a:rPr lang="de-DE" dirty="0"/>
+              <a:t> </a:t>
+            </a:r>
+            <a:r>
+              <a:rPr lang="de-DE" dirty="0" err="1"/>
+              <a:t>of</a:t>
+            </a:r>
+            <a:r>
+              <a:rPr lang="de-DE" dirty="0"/>
+              <a:t> </a:t>
+            </a:r>
+            <a:r>
+              <a:rPr lang="de-DE" dirty="0" err="1"/>
+              <a:t>week</a:t>
+            </a:r>
+            <a:endParaRPr lang="de-DE" dirty="0"/>
+          </a:p>
+          <a:p>
+            <a:r>
+              <a:rPr lang="de-DE" dirty="0" err="1"/>
+              <a:t>month</a:t>
+            </a:r>
+            <a:endParaRPr lang="de-DE" dirty="0"/>
+          </a:p>
+          <a:p>
+            <a:r>
+              <a:rPr lang="de-DE" dirty="0" err="1"/>
+              <a:t>holiday</a:t>
+            </a:r>
+            <a:r>
+              <a:rPr lang="de-DE" dirty="0"/>
+              <a:t> </a:t>
+            </a:r>
+            <a:r>
+              <a:rPr lang="de-DE" dirty="0" err="1"/>
+              <a:t>indicators</a:t>
+            </a:r>
+            <a:endParaRPr lang="de-DE" dirty="0"/>
+          </a:p>
+          <a:p>
+            <a:pPr marL="0" indent="0">
+              <a:buNone/>
+            </a:pPr>
+            <a:r>
+              <a:rPr lang="de-DE" dirty="0">
+                <a:sym typeface="Wingdings" pitchFamily="2" charset="2"/>
+              </a:rPr>
+              <a:t> </a:t>
+            </a:r>
+            <a:r>
+              <a:rPr lang="de-DE" dirty="0" err="1">
+                <a:sym typeface="Wingdings" pitchFamily="2" charset="2"/>
+              </a:rPr>
+              <a:t>o</a:t>
+            </a:r>
+            <a:r>
+              <a:rPr lang="de-DE" dirty="0" err="1"/>
+              <a:t>ften</a:t>
+            </a:r>
+            <a:r>
+              <a:rPr lang="de-DE" dirty="0"/>
+              <a:t> </a:t>
+            </a:r>
+            <a:r>
+              <a:rPr lang="de-DE" dirty="0" err="1"/>
+              <a:t>critical</a:t>
+            </a:r>
+            <a:r>
+              <a:rPr lang="de-DE" dirty="0"/>
+              <a:t> in time </a:t>
+            </a:r>
+            <a:r>
+              <a:rPr lang="de-DE" dirty="0" err="1"/>
+              <a:t>series</a:t>
+            </a:r>
+            <a:r>
+              <a:rPr lang="de-DE" dirty="0"/>
+              <a:t> </a:t>
+            </a:r>
+            <a:r>
+              <a:rPr lang="de-DE" dirty="0" err="1"/>
+              <a:t>problems</a:t>
             </a:r>
             <a:endParaRPr lang="de-DE" dirty="0"/>
           </a:p>
@@ -13464,7 +14343,7 @@
           <p:cNvPr id="4" name="Foliennummernplatzhalter 3">
             <a:extLst>
               <a:ext uri="{FF2B5EF4-FFF2-40B4-BE49-F238E27FC236}">
-                <a16:creationId xmlns:a16="http://schemas.microsoft.com/office/drawing/2014/main" id="{835EC09D-92D7-2E02-1E1F-D5F19718D773}"/>
+                <a16:creationId xmlns:a16="http://schemas.microsoft.com/office/drawing/2014/main" id="{492AEADF-8210-3277-C286-5E5BE1B94A29}"/>
               </a:ext>
             </a:extLst>
           </p:cNvPr>
@@ -13483,6 +14362,94 @@
             <a:fld id="{D6D392C1-03C4-44BA-9267-8F9A2DA09A60}" type="slidenum">
               <a:rPr lang="en-GB" smtClean="0"/>
               <a:t>17</a:t>
+            </a:fld>
+            <a:endParaRPr lang="en-GB"/>
+          </a:p>
+        </p:txBody>
+      </p:sp>
+    </p:spTree>
+    <p:extLst>
+      <p:ext uri="{BB962C8B-B14F-4D97-AF65-F5344CB8AC3E}">
+        <p14:creationId xmlns:p14="http://schemas.microsoft.com/office/powerpoint/2010/main" val="3982333920"/>
+      </p:ext>
+    </p:extLst>
+  </p:cSld>
+  <p:clrMapOvr>
+    <a:masterClrMapping/>
+  </p:clrMapOvr>
+</p:sld>
+</file>
+
+<file path=ppt/slides/slide18.xml><?xml version="1.0" encoding="utf-8"?>
+<p:sld xmlns:a="http://schemas.openxmlformats.org/drawingml/2006/main" xmlns:r="http://schemas.openxmlformats.org/officeDocument/2006/relationships" xmlns:p="http://schemas.openxmlformats.org/presentationml/2006/main">
+  <p:cSld>
+    <p:spTree>
+      <p:nvGrpSpPr>
+        <p:cNvPr id="1" name=""/>
+        <p:cNvGrpSpPr/>
+        <p:nvPr/>
+      </p:nvGrpSpPr>
+      <p:grpSpPr>
+        <a:xfrm>
+          <a:off x="0" y="0"/>
+          <a:ext cx="0" cy="0"/>
+          <a:chOff x="0" y="0"/>
+          <a:chExt cx="0" cy="0"/>
+        </a:xfrm>
+      </p:grpSpPr>
+      <p:sp>
+        <p:nvSpPr>
+          <p:cNvPr id="2" name="Titel 1">
+            <a:extLst>
+              <a:ext uri="{FF2B5EF4-FFF2-40B4-BE49-F238E27FC236}">
+                <a16:creationId xmlns:a16="http://schemas.microsoft.com/office/drawing/2014/main" id="{773BE832-7085-6A32-B1A5-6BF26BE0857F}"/>
+              </a:ext>
+            </a:extLst>
+          </p:cNvPr>
+          <p:cNvSpPr>
+            <a:spLocks noGrp="1"/>
+          </p:cNvSpPr>
+          <p:nvPr>
+            <p:ph type="title"/>
+          </p:nvPr>
+        </p:nvSpPr>
+        <p:spPr/>
+        <p:txBody>
+          <a:bodyPr/>
+          <a:lstStyle/>
+          <a:p>
+            <a:r>
+              <a:rPr lang="en-DE"/>
+              <a:t>Demand Forecasting with ML</a:t>
+            </a:r>
+            <a:endParaRPr lang="de-DE" dirty="0"/>
+          </a:p>
+        </p:txBody>
+      </p:sp>
+      <p:sp>
+        <p:nvSpPr>
+          <p:cNvPr id="4" name="Foliennummernplatzhalter 3">
+            <a:extLst>
+              <a:ext uri="{FF2B5EF4-FFF2-40B4-BE49-F238E27FC236}">
+                <a16:creationId xmlns:a16="http://schemas.microsoft.com/office/drawing/2014/main" id="{835EC09D-92D7-2E02-1E1F-D5F19718D773}"/>
+              </a:ext>
+            </a:extLst>
+          </p:cNvPr>
+          <p:cNvSpPr>
+            <a:spLocks noGrp="1"/>
+          </p:cNvSpPr>
+          <p:nvPr>
+            <p:ph type="sldNum" sz="quarter" idx="12"/>
+          </p:nvPr>
+        </p:nvSpPr>
+        <p:spPr/>
+        <p:txBody>
+          <a:bodyPr/>
+          <a:lstStyle/>
+          <a:p>
+            <a:fld id="{D6D392C1-03C4-44BA-9267-8F9A2DA09A60}" type="slidenum">
+              <a:rPr lang="en-GB" smtClean="0"/>
+              <a:t>18</a:t>
             </a:fld>
             <a:endParaRPr lang="en-GB"/>
           </a:p>
@@ -14312,7 +15279,7 @@
 </p:sld>
 </file>
 
-<file path=ppt/slides/slide18.xml><?xml version="1.0" encoding="utf-8"?>
+<file path=ppt/slides/slide19.xml><?xml version="1.0" encoding="utf-8"?>
 <p:sld xmlns:a="http://schemas.openxmlformats.org/drawingml/2006/main" xmlns:r="http://schemas.openxmlformats.org/officeDocument/2006/relationships" xmlns:p="http://schemas.openxmlformats.org/presentationml/2006/main">
   <p:cSld>
     <p:spTree>
@@ -14419,7 +15386,7 @@
           <a:p>
             <a:fld id="{D6D392C1-03C4-44BA-9267-8F9A2DA09A60}" type="slidenum">
               <a:rPr lang="en-GB" smtClean="0"/>
-              <a:t>18</a:t>
+              <a:t>19</a:t>
             </a:fld>
             <a:endParaRPr lang="en-GB"/>
           </a:p>
@@ -14429,200 +15396,6 @@
     <p:extLst>
       <p:ext uri="{BB962C8B-B14F-4D97-AF65-F5344CB8AC3E}">
         <p14:creationId xmlns:p14="http://schemas.microsoft.com/office/powerpoint/2010/main" val="3528040178"/>
-      </p:ext>
-    </p:extLst>
-  </p:cSld>
-  <p:clrMapOvr>
-    <a:masterClrMapping/>
-  </p:clrMapOvr>
-</p:sld>
-</file>
-
-<file path=ppt/slides/slide19.xml><?xml version="1.0" encoding="utf-8"?>
-<p:sld xmlns:a="http://schemas.openxmlformats.org/drawingml/2006/main" xmlns:r="http://schemas.openxmlformats.org/officeDocument/2006/relationships" xmlns:p="http://schemas.openxmlformats.org/presentationml/2006/main">
-  <p:cSld>
-    <p:spTree>
-      <p:nvGrpSpPr>
-        <p:cNvPr id="1" name=""/>
-        <p:cNvGrpSpPr/>
-        <p:nvPr/>
-      </p:nvGrpSpPr>
-      <p:grpSpPr>
-        <a:xfrm>
-          <a:off x="0" y="0"/>
-          <a:ext cx="0" cy="0"/>
-          <a:chOff x="0" y="0"/>
-          <a:chExt cx="0" cy="0"/>
-        </a:xfrm>
-      </p:grpSpPr>
-      <p:sp>
-        <p:nvSpPr>
-          <p:cNvPr id="4" name="Foliennummernplatzhalter 3">
-            <a:extLst>
-              <a:ext uri="{FF2B5EF4-FFF2-40B4-BE49-F238E27FC236}">
-                <a16:creationId xmlns:a16="http://schemas.microsoft.com/office/drawing/2014/main" id="{D215AA99-A395-8CFB-EB55-1C7A24F9BDF2}"/>
-              </a:ext>
-            </a:extLst>
-          </p:cNvPr>
-          <p:cNvSpPr>
-            <a:spLocks noGrp="1"/>
-          </p:cNvSpPr>
-          <p:nvPr>
-            <p:ph type="sldNum" sz="quarter" idx="12"/>
-          </p:nvPr>
-        </p:nvSpPr>
-        <p:spPr/>
-        <p:txBody>
-          <a:bodyPr/>
-          <a:lstStyle/>
-          <a:p>
-            <a:fld id="{D6D392C1-03C4-44BA-9267-8F9A2DA09A60}" type="slidenum">
-              <a:rPr lang="en-GB" smtClean="0"/>
-              <a:t>19</a:t>
-            </a:fld>
-            <a:endParaRPr lang="en-GB"/>
-          </a:p>
-        </p:txBody>
-      </p:sp>
-      <p:pic>
-        <p:nvPicPr>
-          <p:cNvPr id="5" name="Picture 39" descr="Chart&#10;&#10;Description automatically generated">
-            <a:extLst>
-              <a:ext uri="{FF2B5EF4-FFF2-40B4-BE49-F238E27FC236}">
-                <a16:creationId xmlns:a16="http://schemas.microsoft.com/office/drawing/2014/main" id="{4896F3BA-7AF3-A7B4-C717-6EA33070DC74}"/>
-              </a:ext>
-            </a:extLst>
-          </p:cNvPr>
-          <p:cNvPicPr>
-            <a:picLocks noChangeAspect="1"/>
-          </p:cNvPicPr>
-          <p:nvPr/>
-        </p:nvPicPr>
-        <p:blipFill>
-          <a:blip r:embed="rId2"/>
-          <a:stretch>
-            <a:fillRect/>
-          </a:stretch>
-        </p:blipFill>
-        <p:spPr>
-          <a:xfrm>
-            <a:off x="0" y="3891466"/>
-            <a:ext cx="10767057" cy="2771981"/>
-          </a:xfrm>
-          <a:prstGeom prst="rect">
-            <a:avLst/>
-          </a:prstGeom>
-        </p:spPr>
-      </p:pic>
-      <p:pic>
-        <p:nvPicPr>
-          <p:cNvPr id="6" name="Picture 41" descr="Chart, histogram&#10;&#10;Description automatically generated">
-            <a:extLst>
-              <a:ext uri="{FF2B5EF4-FFF2-40B4-BE49-F238E27FC236}">
-                <a16:creationId xmlns:a16="http://schemas.microsoft.com/office/drawing/2014/main" id="{859D819D-1D9C-D908-FE3B-CEFACDAC5F91}"/>
-              </a:ext>
-            </a:extLst>
-          </p:cNvPr>
-          <p:cNvPicPr>
-            <a:picLocks noChangeAspect="1"/>
-          </p:cNvPicPr>
-          <p:nvPr/>
-        </p:nvPicPr>
-        <p:blipFill>
-          <a:blip r:embed="rId3"/>
-          <a:stretch>
-            <a:fillRect/>
-          </a:stretch>
-        </p:blipFill>
-        <p:spPr>
-          <a:xfrm>
-            <a:off x="3531512" y="130806"/>
-            <a:ext cx="4941286" cy="3567855"/>
-          </a:xfrm>
-          <a:prstGeom prst="rect">
-            <a:avLst/>
-          </a:prstGeom>
-        </p:spPr>
-      </p:pic>
-      <p:pic>
-        <p:nvPicPr>
-          <p:cNvPr id="7" name="Picture 53" descr="A picture containing graphical user interface&#10;&#10;Description automatically generated">
-            <a:extLst>
-              <a:ext uri="{FF2B5EF4-FFF2-40B4-BE49-F238E27FC236}">
-                <a16:creationId xmlns:a16="http://schemas.microsoft.com/office/drawing/2014/main" id="{71FEAFDE-CC82-CB7E-CEA5-A77023D93F95}"/>
-              </a:ext>
-            </a:extLst>
-          </p:cNvPr>
-          <p:cNvPicPr>
-            <a:picLocks noChangeAspect="1"/>
-          </p:cNvPicPr>
-          <p:nvPr/>
-        </p:nvPicPr>
-        <p:blipFill>
-          <a:blip r:embed="rId4"/>
-          <a:stretch>
-            <a:fillRect/>
-          </a:stretch>
-        </p:blipFill>
-        <p:spPr>
-          <a:xfrm>
-            <a:off x="8610600" y="58701"/>
-            <a:ext cx="2552792" cy="3803586"/>
-          </a:xfrm>
-          <a:prstGeom prst="rect">
-            <a:avLst/>
-          </a:prstGeom>
-        </p:spPr>
-      </p:pic>
-      <p:sp>
-        <p:nvSpPr>
-          <p:cNvPr id="8" name="Textfeld 7">
-            <a:extLst>
-              <a:ext uri="{FF2B5EF4-FFF2-40B4-BE49-F238E27FC236}">
-                <a16:creationId xmlns:a16="http://schemas.microsoft.com/office/drawing/2014/main" id="{CFD9C092-104A-8F98-77FC-5B3F19FC2290}"/>
-              </a:ext>
-            </a:extLst>
-          </p:cNvPr>
-          <p:cNvSpPr txBox="1"/>
-          <p:nvPr/>
-        </p:nvSpPr>
-        <p:spPr>
-          <a:xfrm>
-            <a:off x="638634" y="898665"/>
-            <a:ext cx="2604295" cy="2123658"/>
-          </a:xfrm>
-          <a:prstGeom prst="rect">
-            <a:avLst/>
-          </a:prstGeom>
-          <a:noFill/>
-        </p:spPr>
-        <p:txBody>
-          <a:bodyPr wrap="square" rtlCol="0">
-            <a:spAutoFit/>
-          </a:bodyPr>
-          <a:lstStyle/>
-          <a:p>
-            <a:r>
-              <a:rPr lang="de-DE" sz="4400" dirty="0" err="1"/>
-              <a:t>Example</a:t>
-            </a:r>
-            <a:r>
-              <a:rPr lang="de-DE" sz="4400" dirty="0"/>
-              <a:t>:</a:t>
-            </a:r>
-          </a:p>
-          <a:p>
-            <a:r>
-              <a:rPr lang="de-DE" sz="4400" dirty="0"/>
-              <a:t>Retail Features</a:t>
-            </a:r>
-          </a:p>
-        </p:txBody>
-      </p:sp>
-    </p:spTree>
-    <p:extLst>
-      <p:ext uri="{BB962C8B-B14F-4D97-AF65-F5344CB8AC3E}">
-        <p14:creationId xmlns:p14="http://schemas.microsoft.com/office/powerpoint/2010/main" val="3244583836"/>
       </p:ext>
     </p:extLst>
   </p:cSld>
@@ -14850,10 +15623,10 @@
       </p:grpSpPr>
       <p:sp>
         <p:nvSpPr>
-          <p:cNvPr id="2" name="Titel 1">
-            <a:extLst>
-              <a:ext uri="{FF2B5EF4-FFF2-40B4-BE49-F238E27FC236}">
-                <a16:creationId xmlns:a16="http://schemas.microsoft.com/office/drawing/2014/main" id="{68FA7B5C-0B9D-9D41-A773-244A0E8234C6}"/>
+          <p:cNvPr id="4" name="Foliennummernplatzhalter 3">
+            <a:extLst>
+              <a:ext uri="{FF2B5EF4-FFF2-40B4-BE49-F238E27FC236}">
+                <a16:creationId xmlns:a16="http://schemas.microsoft.com/office/drawing/2014/main" id="{D215AA99-A395-8CFB-EB55-1C7A24F9BDF2}"/>
               </a:ext>
             </a:extLst>
           </p:cNvPr>
@@ -14861,7 +15634,7 @@
             <a:spLocks noGrp="1"/>
           </p:cNvSpPr>
           <p:nvPr>
-            <p:ph type="title"/>
+            <p:ph type="sldNum" sz="quarter" idx="12"/>
           </p:nvPr>
         </p:nvSpPr>
         <p:spPr/>
@@ -14869,137 +15642,20 @@
           <a:bodyPr/>
           <a:lstStyle/>
           <a:p>
-            <a:r>
-              <a:rPr lang="de-DE" dirty="0"/>
-              <a:t>Time-Series Validation</a:t>
-            </a:r>
-          </a:p>
-        </p:txBody>
-      </p:sp>
-      <p:sp>
-        <p:nvSpPr>
-          <p:cNvPr id="3" name="Inhaltsplatzhalter 2">
-            <a:extLst>
-              <a:ext uri="{FF2B5EF4-FFF2-40B4-BE49-F238E27FC236}">
-                <a16:creationId xmlns:a16="http://schemas.microsoft.com/office/drawing/2014/main" id="{B86779A8-933F-8035-2A8F-A48538EAB7B0}"/>
-              </a:ext>
-            </a:extLst>
-          </p:cNvPr>
-          <p:cNvSpPr>
-            <a:spLocks noGrp="1"/>
-          </p:cNvSpPr>
-          <p:nvPr>
-            <p:ph idx="1"/>
-          </p:nvPr>
-        </p:nvSpPr>
-        <p:spPr/>
-        <p:txBody>
-          <a:bodyPr/>
-          <a:lstStyle/>
-          <a:p>
-            <a:pPr marL="0" indent="0">
-              <a:buNone/>
-            </a:pPr>
-            <a:r>
-              <a:rPr lang="de-DE" dirty="0" err="1"/>
-              <a:t>avoid</a:t>
-            </a:r>
-            <a:r>
-              <a:rPr lang="de-DE" dirty="0"/>
-              <a:t> time–</a:t>
-            </a:r>
-            <a:r>
-              <a:rPr lang="de-DE" dirty="0" err="1"/>
-              <a:t>based</a:t>
-            </a:r>
-            <a:r>
-              <a:rPr lang="de-DE" dirty="0"/>
-              <a:t> </a:t>
-            </a:r>
-            <a:r>
-              <a:rPr lang="de-DE" dirty="0" err="1"/>
-              <a:t>leakage</a:t>
-            </a:r>
-            <a:r>
-              <a:rPr lang="de-DE" dirty="0"/>
-              <a:t>: </a:t>
-            </a:r>
-            <a:r>
-              <a:rPr lang="de-DE" dirty="0" err="1"/>
-              <a:t>only</a:t>
-            </a:r>
-            <a:r>
-              <a:rPr lang="de-DE" dirty="0"/>
-              <a:t> </a:t>
-            </a:r>
-            <a:r>
-              <a:rPr lang="de-DE" dirty="0" err="1"/>
-              <a:t>use</a:t>
-            </a:r>
-            <a:r>
-              <a:rPr lang="de-DE" dirty="0"/>
-              <a:t> </a:t>
-            </a:r>
-            <a:r>
-              <a:rPr lang="de-DE" dirty="0" err="1"/>
-              <a:t>past</a:t>
-            </a:r>
-            <a:r>
-              <a:rPr lang="de-DE" dirty="0"/>
-              <a:t> </a:t>
-            </a:r>
-            <a:r>
-              <a:rPr lang="de-DE" dirty="0" err="1"/>
-              <a:t>data</a:t>
-            </a:r>
-            <a:r>
-              <a:rPr lang="de-DE" dirty="0"/>
-              <a:t> at </a:t>
-            </a:r>
-            <a:r>
-              <a:rPr lang="de-DE" dirty="0" err="1"/>
-              <a:t>prediction</a:t>
-            </a:r>
-            <a:r>
-              <a:rPr lang="de-DE" dirty="0"/>
-              <a:t> time</a:t>
-            </a:r>
-          </a:p>
-          <a:p>
-            <a:pPr marL="0" indent="0">
-              <a:buNone/>
-            </a:pPr>
-            <a:endParaRPr lang="de-DE" dirty="0"/>
-          </a:p>
-          <a:p>
-            <a:pPr marL="0" indent="0">
-              <a:buNone/>
-            </a:pPr>
-            <a:r>
-              <a:rPr lang="de-DE" dirty="0" err="1"/>
-              <a:t>train</a:t>
-            </a:r>
-            <a:r>
-              <a:rPr lang="de-DE" dirty="0"/>
-              <a:t>-test </a:t>
-            </a:r>
-            <a:r>
-              <a:rPr lang="de-DE" dirty="0" err="1"/>
-              <a:t>splits</a:t>
-            </a:r>
-            <a:r>
-              <a:rPr lang="de-DE" dirty="0"/>
-              <a:t> in time:</a:t>
-            </a:r>
+            <a:fld id="{D6D392C1-03C4-44BA-9267-8F9A2DA09A60}" type="slidenum">
+              <a:rPr lang="en-GB" smtClean="0"/>
+              <a:t>20</a:t>
+            </a:fld>
+            <a:endParaRPr lang="en-GB"/>
           </a:p>
         </p:txBody>
       </p:sp>
       <p:pic>
         <p:nvPicPr>
-          <p:cNvPr id="4" name="Picture 4">
-            <a:extLst>
-              <a:ext uri="{FF2B5EF4-FFF2-40B4-BE49-F238E27FC236}">
-                <a16:creationId xmlns:a16="http://schemas.microsoft.com/office/drawing/2014/main" id="{068E60E8-3E54-D30A-7FAC-277896269E60}"/>
+          <p:cNvPr id="5" name="Picture 39" descr="Chart&#10;&#10;Description automatically generated">
+            <a:extLst>
+              <a:ext uri="{FF2B5EF4-FFF2-40B4-BE49-F238E27FC236}">
+                <a16:creationId xmlns:a16="http://schemas.microsoft.com/office/drawing/2014/main" id="{4896F3BA-7AF3-A7B4-C717-6EA33070DC74}"/>
               </a:ext>
             </a:extLst>
           </p:cNvPr>
@@ -15009,21 +15665,75 @@
           <p:nvPr/>
         </p:nvPicPr>
         <p:blipFill>
-          <a:blip r:embed="rId2">
-            <a:extLst>
-              <a:ext uri="{28A0092B-C50C-407E-A947-70E740481C1C}">
-                <a14:useLocalDpi xmlns:a14="http://schemas.microsoft.com/office/drawing/2010/main" val="0"/>
-              </a:ext>
-            </a:extLst>
-          </a:blip>
+          <a:blip r:embed="rId2"/>
           <a:stretch>
             <a:fillRect/>
           </a:stretch>
         </p:blipFill>
         <p:spPr>
           <a:xfrm>
-            <a:off x="3553918" y="3431210"/>
-            <a:ext cx="7195226" cy="1749037"/>
+            <a:off x="0" y="3891466"/>
+            <a:ext cx="10767057" cy="2771981"/>
+          </a:xfrm>
+          <a:prstGeom prst="rect">
+            <a:avLst/>
+          </a:prstGeom>
+        </p:spPr>
+      </p:pic>
+      <p:pic>
+        <p:nvPicPr>
+          <p:cNvPr id="6" name="Picture 41" descr="Chart, histogram&#10;&#10;Description automatically generated">
+            <a:extLst>
+              <a:ext uri="{FF2B5EF4-FFF2-40B4-BE49-F238E27FC236}">
+                <a16:creationId xmlns:a16="http://schemas.microsoft.com/office/drawing/2014/main" id="{859D819D-1D9C-D908-FE3B-CEFACDAC5F91}"/>
+              </a:ext>
+            </a:extLst>
+          </p:cNvPr>
+          <p:cNvPicPr>
+            <a:picLocks noChangeAspect="1"/>
+          </p:cNvPicPr>
+          <p:nvPr/>
+        </p:nvPicPr>
+        <p:blipFill>
+          <a:blip r:embed="rId3"/>
+          <a:stretch>
+            <a:fillRect/>
+          </a:stretch>
+        </p:blipFill>
+        <p:spPr>
+          <a:xfrm>
+            <a:off x="3531512" y="130806"/>
+            <a:ext cx="4941286" cy="3567855"/>
+          </a:xfrm>
+          <a:prstGeom prst="rect">
+            <a:avLst/>
+          </a:prstGeom>
+        </p:spPr>
+      </p:pic>
+      <p:pic>
+        <p:nvPicPr>
+          <p:cNvPr id="7" name="Picture 53" descr="A picture containing graphical user interface&#10;&#10;Description automatically generated">
+            <a:extLst>
+              <a:ext uri="{FF2B5EF4-FFF2-40B4-BE49-F238E27FC236}">
+                <a16:creationId xmlns:a16="http://schemas.microsoft.com/office/drawing/2014/main" id="{71FEAFDE-CC82-CB7E-CEA5-A77023D93F95}"/>
+              </a:ext>
+            </a:extLst>
+          </p:cNvPr>
+          <p:cNvPicPr>
+            <a:picLocks noChangeAspect="1"/>
+          </p:cNvPicPr>
+          <p:nvPr/>
+        </p:nvPicPr>
+        <p:blipFill>
+          <a:blip r:embed="rId4"/>
+          <a:stretch>
+            <a:fillRect/>
+          </a:stretch>
+        </p:blipFill>
+        <p:spPr>
+          <a:xfrm>
+            <a:off x="8610600" y="58701"/>
+            <a:ext cx="2552792" cy="3803586"/>
           </a:xfrm>
           <a:prstGeom prst="rect">
             <a:avLst/>
@@ -15032,10 +15742,10 @@
       </p:pic>
       <p:sp>
         <p:nvSpPr>
-          <p:cNvPr id="5" name="TextBox 6">
-            <a:extLst>
-              <a:ext uri="{FF2B5EF4-FFF2-40B4-BE49-F238E27FC236}">
-                <a16:creationId xmlns:a16="http://schemas.microsoft.com/office/drawing/2014/main" id="{D574E0FD-C2D8-C304-4096-F91C5CBB84BC}"/>
+          <p:cNvPr id="8" name="Textfeld 7">
+            <a:extLst>
+              <a:ext uri="{FF2B5EF4-FFF2-40B4-BE49-F238E27FC236}">
+                <a16:creationId xmlns:a16="http://schemas.microsoft.com/office/drawing/2014/main" id="{CFD9C092-104A-8F98-77FC-5B3F19FC2290}"/>
               </a:ext>
             </a:extLst>
           </p:cNvPr>
@@ -15044,8 +15754,8 @@
         </p:nvSpPr>
         <p:spPr>
           <a:xfrm>
-            <a:off x="838200" y="4090284"/>
-            <a:ext cx="2479759" cy="430887"/>
+            <a:off x="638634" y="898665"/>
+            <a:ext cx="2604295" cy="2123658"/>
           </a:xfrm>
           <a:prstGeom prst="rect">
             <a:avLst/>
@@ -15058,84 +15768,27 @@
           </a:bodyPr>
           <a:lstStyle/>
           <a:p>
-            <a:pPr algn="ctr"/>
-            <a:r>
-              <a:rPr lang="en-GB" sz="2200" b="1" dirty="0">
-                <a:solidFill>
-                  <a:schemeClr val="accent1">
-                    <a:lumMod val="50000"/>
-                  </a:schemeClr>
-                </a:solidFill>
-                <a:latin typeface="AccordAlternate" panose="02000000000000000000" pitchFamily="50" charset="0"/>
-              </a:rPr>
-              <a:t>c</a:t>
-            </a:r>
-            <a:r>
-              <a:rPr lang="en-DE" sz="2200" b="1" dirty="0">
-                <a:solidFill>
-                  <a:schemeClr val="accent1">
-                    <a:lumMod val="50000"/>
-                  </a:schemeClr>
-                </a:solidFill>
-                <a:latin typeface="AccordAlternate" panose="02000000000000000000" pitchFamily="50" charset="0"/>
-              </a:rPr>
-              <a:t>ross-validation</a:t>
-            </a:r>
-            <a:r>
-              <a:rPr lang="en-GB" sz="2200" b="1" dirty="0">
-                <a:solidFill>
-                  <a:schemeClr val="accent1">
-                    <a:lumMod val="50000"/>
-                  </a:schemeClr>
-                </a:solidFill>
-                <a:latin typeface="AccordAlternate" panose="02000000000000000000" pitchFamily="50" charset="0"/>
-              </a:rPr>
+            <a:r>
+              <a:rPr lang="de-DE" sz="4400" dirty="0" err="1"/>
+              <a:t>Example</a:t>
+            </a:r>
+            <a:r>
+              <a:rPr lang="de-DE" sz="4400" dirty="0"/>
               <a:t>:</a:t>
             </a:r>
-            <a:endParaRPr lang="en-US" sz="2200" b="1" dirty="0">
-              <a:solidFill>
-                <a:schemeClr val="accent1">
-                  <a:lumMod val="50000"/>
-                </a:schemeClr>
-              </a:solidFill>
-              <a:latin typeface="AccordAlternate" panose="02000000000000000000" pitchFamily="50" charset="0"/>
-            </a:endParaRPr>
-          </a:p>
-        </p:txBody>
-      </p:sp>
-      <p:sp>
-        <p:nvSpPr>
-          <p:cNvPr id="6" name="Foliennummernplatzhalter 5">
-            <a:extLst>
-              <a:ext uri="{FF2B5EF4-FFF2-40B4-BE49-F238E27FC236}">
-                <a16:creationId xmlns:a16="http://schemas.microsoft.com/office/drawing/2014/main" id="{962FA511-F45C-AF86-D966-DAAF71A9AD84}"/>
-              </a:ext>
-            </a:extLst>
-          </p:cNvPr>
-          <p:cNvSpPr>
-            <a:spLocks noGrp="1"/>
-          </p:cNvSpPr>
-          <p:nvPr>
-            <p:ph type="sldNum" sz="quarter" idx="12"/>
-          </p:nvPr>
-        </p:nvSpPr>
-        <p:spPr/>
-        <p:txBody>
-          <a:bodyPr/>
-          <a:lstStyle/>
-          <a:p>
-            <a:fld id="{D6D392C1-03C4-44BA-9267-8F9A2DA09A60}" type="slidenum">
-              <a:rPr lang="en-GB" smtClean="0"/>
-              <a:t>20</a:t>
-            </a:fld>
-            <a:endParaRPr lang="en-GB"/>
+          </a:p>
+          <a:p>
+            <a:r>
+              <a:rPr lang="de-DE" sz="4400" dirty="0"/>
+              <a:t>Retail Features</a:t>
+            </a:r>
           </a:p>
         </p:txBody>
       </p:sp>
     </p:spTree>
     <p:extLst>
       <p:ext uri="{BB962C8B-B14F-4D97-AF65-F5344CB8AC3E}">
-        <p14:creationId xmlns:p14="http://schemas.microsoft.com/office/powerpoint/2010/main" val="556644343"/>
+        <p14:creationId xmlns:p14="http://schemas.microsoft.com/office/powerpoint/2010/main" val="3244583836"/>
       </p:ext>
     </p:extLst>
   </p:cSld>
@@ -15167,7 +15820,7 @@
           <p:cNvPr id="2" name="Titel 1">
             <a:extLst>
               <a:ext uri="{FF2B5EF4-FFF2-40B4-BE49-F238E27FC236}">
-                <a16:creationId xmlns:a16="http://schemas.microsoft.com/office/drawing/2014/main" id="{29024AA8-AEE0-107B-6BF6-F1D6E0C05195}"/>
+                <a16:creationId xmlns:a16="http://schemas.microsoft.com/office/drawing/2014/main" id="{68FA7B5C-0B9D-9D41-A773-244A0E8234C6}"/>
               </a:ext>
             </a:extLst>
           </p:cNvPr>
@@ -15185,15 +15838,7 @@
           <a:p>
             <a:r>
               <a:rPr lang="de-DE" dirty="0"/>
-              <a:t>Evaluation </a:t>
-            </a:r>
-            <a:r>
-              <a:rPr lang="de-DE" dirty="0" err="1"/>
-              <a:t>of</a:t>
-            </a:r>
-            <a:r>
-              <a:rPr lang="de-DE" dirty="0"/>
-              <a:t> Forecasts</a:t>
+              <a:t>Time-Series Validation</a:t>
             </a:r>
           </a:p>
         </p:txBody>
@@ -15203,7 +15848,7 @@
           <p:cNvPr id="3" name="Inhaltsplatzhalter 2">
             <a:extLst>
               <a:ext uri="{FF2B5EF4-FFF2-40B4-BE49-F238E27FC236}">
-                <a16:creationId xmlns:a16="http://schemas.microsoft.com/office/drawing/2014/main" id="{30F54E58-AD8C-B45F-C46A-ED15594E4BBD}"/>
+                <a16:creationId xmlns:a16="http://schemas.microsoft.com/office/drawing/2014/main" id="{B86779A8-933F-8035-2A8F-A48538EAB7B0}"/>
               </a:ext>
             </a:extLst>
           </p:cNvPr>
@@ -15216,9 +15861,7 @@
         </p:nvSpPr>
         <p:spPr/>
         <p:txBody>
-          <a:bodyPr>
-            <a:normAutofit fontScale="92500" lnSpcReduction="10000"/>
-          </a:bodyPr>
+          <a:bodyPr/>
           <a:lstStyle/>
           <a:p>
             <a:pPr marL="0" indent="0">
@@ -15226,7 +15869,23 @@
             </a:pPr>
             <a:r>
               <a:rPr lang="de-DE" dirty="0" err="1"/>
-              <a:t>goal</a:t>
+              <a:t>avoid</a:t>
+            </a:r>
+            <a:r>
+              <a:rPr lang="de-DE" dirty="0"/>
+              <a:t> time–</a:t>
+            </a:r>
+            <a:r>
+              <a:rPr lang="de-DE" dirty="0" err="1"/>
+              <a:t>based</a:t>
+            </a:r>
+            <a:r>
+              <a:rPr lang="de-DE" dirty="0"/>
+              <a:t> </a:t>
+            </a:r>
+            <a:r>
+              <a:rPr lang="de-DE" dirty="0" err="1"/>
+              <a:t>leakage</a:t>
             </a:r>
             <a:r>
               <a:rPr lang="de-DE" dirty="0"/>
@@ -15234,7 +15893,7 @@
             </a:r>
             <a:r>
               <a:rPr lang="de-DE" dirty="0" err="1"/>
-              <a:t>assess</a:t>
+              <a:t>only</a:t>
             </a:r>
             <a:r>
               <a:rPr lang="de-DE" dirty="0"/>
@@ -15242,7 +15901,7 @@
             </a:r>
             <a:r>
               <a:rPr lang="de-DE" dirty="0" err="1"/>
-              <a:t>how</a:t>
+              <a:t>use</a:t>
             </a:r>
             <a:r>
               <a:rPr lang="de-DE" dirty="0"/>
@@ -15250,15 +15909,7 @@
             </a:r>
             <a:r>
               <a:rPr lang="de-DE" dirty="0" err="1"/>
-              <a:t>well</a:t>
-            </a:r>
-            <a:r>
-              <a:rPr lang="de-DE" dirty="0"/>
-              <a:t> a </a:t>
-            </a:r>
-            <a:r>
-              <a:rPr lang="de-DE" dirty="0" err="1"/>
-              <a:t>forecasting</a:t>
+              <a:t>past</a:t>
             </a:r>
             <a:r>
               <a:rPr lang="de-DE" dirty="0"/>
@@ -15266,41 +15917,20 @@
             </a:r>
             <a:r>
               <a:rPr lang="de-DE" dirty="0" err="1"/>
-              <a:t>model</a:t>
-            </a:r>
-            <a:r>
-              <a:rPr lang="de-DE" dirty="0"/>
-              <a:t> </a:t>
-            </a:r>
-            <a:r>
-              <a:rPr lang="de-DE" dirty="0" err="1"/>
-              <a:t>predicts</a:t>
-            </a:r>
-            <a:r>
-              <a:rPr lang="de-DE" dirty="0"/>
-              <a:t> </a:t>
-            </a:r>
-            <a:r>
-              <a:rPr lang="de-DE" dirty="0" err="1"/>
-              <a:t>unseen</a:t>
-            </a:r>
-            <a:r>
-              <a:rPr lang="de-DE" dirty="0"/>
-              <a:t> </a:t>
-            </a:r>
-            <a:r>
-              <a:rPr lang="de-DE" dirty="0" err="1"/>
-              <a:t>future</a:t>
-            </a:r>
-            <a:r>
-              <a:rPr lang="de-DE" dirty="0"/>
-              <a:t> </a:t>
-            </a:r>
-            <a:r>
-              <a:rPr lang="de-DE" dirty="0" err="1"/>
-              <a:t>values</a:t>
-            </a:r>
-            <a:endParaRPr lang="de-DE" dirty="0"/>
+              <a:t>data</a:t>
+            </a:r>
+            <a:r>
+              <a:rPr lang="de-DE" dirty="0"/>
+              <a:t> at </a:t>
+            </a:r>
+            <a:r>
+              <a:rPr lang="de-DE" dirty="0" err="1"/>
+              <a:t>prediction</a:t>
+            </a:r>
+            <a:r>
+              <a:rPr lang="de-DE" dirty="0"/>
+              <a:t> time</a:t>
+            </a:r>
           </a:p>
           <a:p>
             <a:pPr marL="0" indent="0">
@@ -15314,277 +15944,138 @@
             </a:pPr>
             <a:r>
               <a:rPr lang="de-DE" dirty="0" err="1"/>
-              <a:t>choose</a:t>
-            </a:r>
-            <a:r>
-              <a:rPr lang="de-DE" dirty="0"/>
-              <a:t> an </a:t>
-            </a:r>
-            <a:r>
-              <a:rPr lang="de-DE" dirty="0" err="1"/>
-              <a:t>appropriate</a:t>
-            </a:r>
-            <a:r>
-              <a:rPr lang="de-DE" dirty="0"/>
-              <a:t> </a:t>
-            </a:r>
-            <a:r>
-              <a:rPr lang="de-DE" dirty="0" err="1"/>
-              <a:t>error</a:t>
-            </a:r>
-            <a:r>
-              <a:rPr lang="de-DE" dirty="0"/>
-              <a:t> </a:t>
-            </a:r>
-            <a:r>
-              <a:rPr lang="de-DE" dirty="0" err="1"/>
-              <a:t>metric</a:t>
-            </a:r>
-            <a:r>
-              <a:rPr lang="de-DE" dirty="0"/>
-              <a:t>, </a:t>
-            </a:r>
-            <a:r>
-              <a:rPr lang="de-DE" dirty="0" err="1"/>
-              <a:t>aggregated</a:t>
-            </a:r>
-            <a:r>
-              <a:rPr lang="de-DE" dirty="0"/>
-              <a:t> </a:t>
-            </a:r>
-            <a:r>
-              <a:rPr lang="de-DE" dirty="0" err="1"/>
-              <a:t>over</a:t>
-            </a:r>
-            <a:r>
-              <a:rPr lang="de-DE" dirty="0"/>
-              <a:t> an </a:t>
-            </a:r>
-            <a:r>
-              <a:rPr lang="de-DE" dirty="0" err="1"/>
-              <a:t>evaluation</a:t>
-            </a:r>
-            <a:r>
-              <a:rPr lang="de-DE" dirty="0"/>
-              <a:t> </a:t>
-            </a:r>
-            <a:r>
-              <a:rPr lang="de-DE" dirty="0" err="1"/>
-              <a:t>period</a:t>
-            </a:r>
-            <a:r>
-              <a:rPr lang="de-DE" dirty="0"/>
-              <a:t>: MAE, RMSE, MAPE</a:t>
-            </a:r>
-          </a:p>
-          <a:p>
-            <a:pPr marL="0" indent="0">
-              <a:buNone/>
-            </a:pPr>
-            <a:endParaRPr lang="de-DE" dirty="0"/>
-          </a:p>
-          <a:p>
-            <a:pPr marL="0" indent="0">
-              <a:buNone/>
-            </a:pPr>
-            <a:r>
-              <a:rPr lang="de-DE" dirty="0" err="1"/>
-              <a:t>important</a:t>
-            </a:r>
-            <a:r>
-              <a:rPr lang="de-DE" dirty="0"/>
-              <a:t> design </a:t>
-            </a:r>
-            <a:r>
-              <a:rPr lang="de-DE" dirty="0" err="1"/>
-              <a:t>choice</a:t>
-            </a:r>
-            <a:r>
-              <a:rPr lang="de-DE" dirty="0"/>
-              <a:t>:  </a:t>
-            </a:r>
-            <a:r>
-              <a:rPr lang="de-DE" dirty="0" err="1"/>
-              <a:t>what</a:t>
-            </a:r>
-            <a:r>
-              <a:rPr lang="de-DE" dirty="0"/>
-              <a:t> </a:t>
-            </a:r>
-            <a:r>
-              <a:rPr lang="de-DE" dirty="0" err="1"/>
-              <a:t>period</a:t>
-            </a:r>
-            <a:r>
-              <a:rPr lang="de-DE" dirty="0"/>
-              <a:t> </a:t>
-            </a:r>
-            <a:r>
-              <a:rPr lang="de-DE" dirty="0" err="1"/>
-              <a:t>to</a:t>
-            </a:r>
-            <a:r>
-              <a:rPr lang="de-DE" dirty="0"/>
-              <a:t> </a:t>
-            </a:r>
-            <a:r>
-              <a:rPr lang="de-DE" dirty="0" err="1"/>
-              <a:t>evaluate</a:t>
-            </a:r>
-            <a:r>
-              <a:rPr lang="de-DE" dirty="0"/>
-              <a:t> on?</a:t>
-            </a:r>
-          </a:p>
-          <a:p>
-            <a:r>
-              <a:rPr lang="de-DE" dirty="0" err="1"/>
-              <a:t>single</a:t>
-            </a:r>
-            <a:r>
-              <a:rPr lang="de-DE" dirty="0"/>
-              <a:t> </a:t>
-            </a:r>
-            <a:r>
-              <a:rPr lang="de-DE" dirty="0" err="1"/>
-              <a:t>holdout</a:t>
-            </a:r>
-            <a:r>
-              <a:rPr lang="de-DE" dirty="0"/>
-              <a:t> </a:t>
-            </a:r>
-            <a:r>
-              <a:rPr lang="de-DE" dirty="0" err="1"/>
-              <a:t>period</a:t>
-            </a:r>
-            <a:r>
-              <a:rPr lang="de-DE" dirty="0"/>
-              <a:t>: final 20% </a:t>
-            </a:r>
-            <a:r>
-              <a:rPr lang="de-DE" dirty="0" err="1"/>
-              <a:t>of</a:t>
-            </a:r>
-            <a:r>
-              <a:rPr lang="de-DE" dirty="0"/>
-              <a:t> </a:t>
-            </a:r>
-            <a:r>
-              <a:rPr lang="de-DE" dirty="0" err="1"/>
-              <a:t>the</a:t>
-            </a:r>
-            <a:r>
-              <a:rPr lang="de-DE" dirty="0"/>
-              <a:t> </a:t>
-            </a:r>
-            <a:r>
-              <a:rPr lang="de-DE" dirty="0" err="1"/>
-              <a:t>series</a:t>
-            </a:r>
-            <a:endParaRPr lang="de-DE" dirty="0"/>
-          </a:p>
-          <a:p>
-            <a:r>
-              <a:rPr lang="de-DE" dirty="0" err="1"/>
-              <a:t>rolling</a:t>
-            </a:r>
-            <a:r>
-              <a:rPr lang="de-DE" dirty="0"/>
-              <a:t> </a:t>
-            </a:r>
-            <a:r>
-              <a:rPr lang="de-DE" dirty="0" err="1"/>
-              <a:t>evaluation</a:t>
-            </a:r>
-            <a:r>
-              <a:rPr lang="de-DE" dirty="0"/>
-              <a:t>: </a:t>
-            </a:r>
-            <a:r>
-              <a:rPr lang="de-DE" dirty="0" err="1"/>
-              <a:t>repeated</a:t>
-            </a:r>
-            <a:r>
-              <a:rPr lang="de-DE" dirty="0"/>
-              <a:t> </a:t>
-            </a:r>
-            <a:r>
-              <a:rPr lang="de-DE" dirty="0" err="1"/>
-              <a:t>forecasts</a:t>
-            </a:r>
-            <a:r>
-              <a:rPr lang="de-DE" dirty="0"/>
-              <a:t> </a:t>
-            </a:r>
-            <a:r>
-              <a:rPr lang="de-DE" dirty="0" err="1"/>
-              <a:t>across</a:t>
-            </a:r>
-            <a:r>
-              <a:rPr lang="de-DE" dirty="0"/>
-              <a:t> multiple </a:t>
-            </a:r>
-            <a:r>
-              <a:rPr lang="de-DE" dirty="0" err="1"/>
-              <a:t>future</a:t>
-            </a:r>
-            <a:r>
-              <a:rPr lang="de-DE" dirty="0"/>
-              <a:t> </a:t>
-            </a:r>
-            <a:r>
-              <a:rPr lang="de-DE" dirty="0" err="1"/>
-              <a:t>windows</a:t>
-            </a:r>
-            <a:endParaRPr lang="de-DE" dirty="0"/>
-          </a:p>
-          <a:p>
-            <a:r>
-              <a:rPr lang="de-DE" dirty="0" err="1"/>
-              <a:t>forecast</a:t>
-            </a:r>
-            <a:r>
-              <a:rPr lang="de-DE" dirty="0"/>
-              <a:t> </a:t>
-            </a:r>
-            <a:r>
-              <a:rPr lang="de-DE" dirty="0" err="1"/>
-              <a:t>horizon-specific</a:t>
-            </a:r>
-            <a:r>
-              <a:rPr lang="de-DE" dirty="0"/>
-              <a:t> </a:t>
-            </a:r>
-            <a:r>
-              <a:rPr lang="de-DE" dirty="0" err="1"/>
-              <a:t>evaluation</a:t>
-            </a:r>
-            <a:r>
-              <a:rPr lang="de-DE" dirty="0"/>
-              <a:t>: 1-step, 5-step, 12-step </a:t>
-            </a:r>
-            <a:r>
-              <a:rPr lang="de-DE" dirty="0" err="1"/>
-              <a:t>ahead</a:t>
-            </a:r>
-            <a:r>
-              <a:rPr lang="de-DE" dirty="0"/>
-              <a:t> </a:t>
-            </a:r>
-            <a:r>
-              <a:rPr lang="de-DE" dirty="0" err="1"/>
-              <a:t>errors</a:t>
-            </a:r>
-            <a:endParaRPr lang="de-DE" dirty="0"/>
+              <a:t>train</a:t>
+            </a:r>
+            <a:r>
+              <a:rPr lang="de-DE" dirty="0"/>
+              <a:t>-test </a:t>
+            </a:r>
+            <a:r>
+              <a:rPr lang="de-DE" dirty="0" err="1"/>
+              <a:t>splits</a:t>
+            </a:r>
+            <a:r>
+              <a:rPr lang="de-DE" dirty="0"/>
+              <a:t> in time:</a:t>
+            </a:r>
+          </a:p>
+        </p:txBody>
+      </p:sp>
+      <p:pic>
+        <p:nvPicPr>
+          <p:cNvPr id="4" name="Picture 4">
+            <a:extLst>
+              <a:ext uri="{FF2B5EF4-FFF2-40B4-BE49-F238E27FC236}">
+                <a16:creationId xmlns:a16="http://schemas.microsoft.com/office/drawing/2014/main" id="{068E60E8-3E54-D30A-7FAC-277896269E60}"/>
+              </a:ext>
+            </a:extLst>
+          </p:cNvPr>
+          <p:cNvPicPr>
+            <a:picLocks noChangeAspect="1"/>
+          </p:cNvPicPr>
+          <p:nvPr/>
+        </p:nvPicPr>
+        <p:blipFill>
+          <a:blip r:embed="rId2">
+            <a:extLst>
+              <a:ext uri="{28A0092B-C50C-407E-A947-70E740481C1C}">
+                <a14:useLocalDpi xmlns:a14="http://schemas.microsoft.com/office/drawing/2010/main" val="0"/>
+              </a:ext>
+            </a:extLst>
+          </a:blip>
+          <a:stretch>
+            <a:fillRect/>
+          </a:stretch>
+        </p:blipFill>
+        <p:spPr>
+          <a:xfrm>
+            <a:off x="3553918" y="3431210"/>
+            <a:ext cx="7195226" cy="1749037"/>
+          </a:xfrm>
+          <a:prstGeom prst="rect">
+            <a:avLst/>
+          </a:prstGeom>
+        </p:spPr>
+      </p:pic>
+      <p:sp>
+        <p:nvSpPr>
+          <p:cNvPr id="5" name="TextBox 6">
+            <a:extLst>
+              <a:ext uri="{FF2B5EF4-FFF2-40B4-BE49-F238E27FC236}">
+                <a16:creationId xmlns:a16="http://schemas.microsoft.com/office/drawing/2014/main" id="{D574E0FD-C2D8-C304-4096-F91C5CBB84BC}"/>
+              </a:ext>
+            </a:extLst>
+          </p:cNvPr>
+          <p:cNvSpPr txBox="1"/>
+          <p:nvPr/>
+        </p:nvSpPr>
+        <p:spPr>
+          <a:xfrm>
+            <a:off x="838200" y="4090284"/>
+            <a:ext cx="2479759" cy="430887"/>
+          </a:xfrm>
+          <a:prstGeom prst="rect">
+            <a:avLst/>
+          </a:prstGeom>
+          <a:noFill/>
+        </p:spPr>
+        <p:txBody>
+          <a:bodyPr wrap="square" rtlCol="0">
+            <a:spAutoFit/>
+          </a:bodyPr>
+          <a:lstStyle/>
+          <a:p>
+            <a:pPr algn="ctr"/>
+            <a:r>
+              <a:rPr lang="en-GB" sz="2200" b="1" dirty="0">
+                <a:solidFill>
+                  <a:schemeClr val="accent1">
+                    <a:lumMod val="50000"/>
+                  </a:schemeClr>
+                </a:solidFill>
+                <a:latin typeface="AccordAlternate" panose="02000000000000000000" pitchFamily="50" charset="0"/>
+              </a:rPr>
+              <a:t>c</a:t>
+            </a:r>
+            <a:r>
+              <a:rPr lang="en-DE" sz="2200" b="1" dirty="0">
+                <a:solidFill>
+                  <a:schemeClr val="accent1">
+                    <a:lumMod val="50000"/>
+                  </a:schemeClr>
+                </a:solidFill>
+                <a:latin typeface="AccordAlternate" panose="02000000000000000000" pitchFamily="50" charset="0"/>
+              </a:rPr>
+              <a:t>ross-validation</a:t>
+            </a:r>
+            <a:r>
+              <a:rPr lang="en-GB" sz="2200" b="1" dirty="0">
+                <a:solidFill>
+                  <a:schemeClr val="accent1">
+                    <a:lumMod val="50000"/>
+                  </a:schemeClr>
+                </a:solidFill>
+                <a:latin typeface="AccordAlternate" panose="02000000000000000000" pitchFamily="50" charset="0"/>
+              </a:rPr>
+              <a:t>:</a:t>
+            </a:r>
+            <a:endParaRPr lang="en-US" sz="2200" b="1" dirty="0">
+              <a:solidFill>
+                <a:schemeClr val="accent1">
+                  <a:lumMod val="50000"/>
+                </a:schemeClr>
+              </a:solidFill>
+              <a:latin typeface="AccordAlternate" panose="02000000000000000000" pitchFamily="50" charset="0"/>
+            </a:endParaRPr>
           </a:p>
         </p:txBody>
       </p:sp>
       <p:sp>
         <p:nvSpPr>
-          <p:cNvPr id="4" name="Foliennummernplatzhalter 3">
-            <a:extLst>
-              <a:ext uri="{FF2B5EF4-FFF2-40B4-BE49-F238E27FC236}">
-                <a16:creationId xmlns:a16="http://schemas.microsoft.com/office/drawing/2014/main" id="{7A586B19-8501-1891-67F0-454120B99ECC}"/>
+          <p:cNvPr id="6" name="Foliennummernplatzhalter 5">
+            <a:extLst>
+              <a:ext uri="{FF2B5EF4-FFF2-40B4-BE49-F238E27FC236}">
+                <a16:creationId xmlns:a16="http://schemas.microsoft.com/office/drawing/2014/main" id="{962FA511-F45C-AF86-D966-DAAF71A9AD84}"/>
               </a:ext>
             </a:extLst>
           </p:cNvPr>
@@ -15611,7 +16102,7 @@
     </p:spTree>
     <p:extLst>
       <p:ext uri="{BB962C8B-B14F-4D97-AF65-F5344CB8AC3E}">
-        <p14:creationId xmlns:p14="http://schemas.microsoft.com/office/powerpoint/2010/main" val="135326309"/>
+        <p14:creationId xmlns:p14="http://schemas.microsoft.com/office/powerpoint/2010/main" val="556644343"/>
       </p:ext>
     </p:extLst>
   </p:cSld>
@@ -15643,7 +16134,7 @@
           <p:cNvPr id="2" name="Titel 1">
             <a:extLst>
               <a:ext uri="{FF2B5EF4-FFF2-40B4-BE49-F238E27FC236}">
-                <a16:creationId xmlns:a16="http://schemas.microsoft.com/office/drawing/2014/main" id="{C1477756-B47F-6F9E-91C1-E543C6A6C38D}"/>
+                <a16:creationId xmlns:a16="http://schemas.microsoft.com/office/drawing/2014/main" id="{29024AA8-AEE0-107B-6BF6-F1D6E0C05195}"/>
               </a:ext>
             </a:extLst>
           </p:cNvPr>
@@ -15661,6 +16152,482 @@
           <a:p>
             <a:r>
               <a:rPr lang="de-DE" dirty="0"/>
+              <a:t>Evaluation </a:t>
+            </a:r>
+            <a:r>
+              <a:rPr lang="de-DE" dirty="0" err="1"/>
+              <a:t>of</a:t>
+            </a:r>
+            <a:r>
+              <a:rPr lang="de-DE" dirty="0"/>
+              <a:t> Forecasts</a:t>
+            </a:r>
+          </a:p>
+        </p:txBody>
+      </p:sp>
+      <p:sp>
+        <p:nvSpPr>
+          <p:cNvPr id="3" name="Inhaltsplatzhalter 2">
+            <a:extLst>
+              <a:ext uri="{FF2B5EF4-FFF2-40B4-BE49-F238E27FC236}">
+                <a16:creationId xmlns:a16="http://schemas.microsoft.com/office/drawing/2014/main" id="{30F54E58-AD8C-B45F-C46A-ED15594E4BBD}"/>
+              </a:ext>
+            </a:extLst>
+          </p:cNvPr>
+          <p:cNvSpPr>
+            <a:spLocks noGrp="1"/>
+          </p:cNvSpPr>
+          <p:nvPr>
+            <p:ph idx="1"/>
+          </p:nvPr>
+        </p:nvSpPr>
+        <p:spPr/>
+        <p:txBody>
+          <a:bodyPr>
+            <a:normAutofit fontScale="92500" lnSpcReduction="10000"/>
+          </a:bodyPr>
+          <a:lstStyle/>
+          <a:p>
+            <a:pPr marL="0" indent="0">
+              <a:buNone/>
+            </a:pPr>
+            <a:r>
+              <a:rPr lang="de-DE" dirty="0" err="1"/>
+              <a:t>goal</a:t>
+            </a:r>
+            <a:r>
+              <a:rPr lang="de-DE" dirty="0"/>
+              <a:t>: </a:t>
+            </a:r>
+            <a:r>
+              <a:rPr lang="de-DE" dirty="0" err="1"/>
+              <a:t>assess</a:t>
+            </a:r>
+            <a:r>
+              <a:rPr lang="de-DE" dirty="0"/>
+              <a:t> </a:t>
+            </a:r>
+            <a:r>
+              <a:rPr lang="de-DE" dirty="0" err="1"/>
+              <a:t>how</a:t>
+            </a:r>
+            <a:r>
+              <a:rPr lang="de-DE" dirty="0"/>
+              <a:t> </a:t>
+            </a:r>
+            <a:r>
+              <a:rPr lang="de-DE" dirty="0" err="1"/>
+              <a:t>well</a:t>
+            </a:r>
+            <a:r>
+              <a:rPr lang="de-DE" dirty="0"/>
+              <a:t> a </a:t>
+            </a:r>
+            <a:r>
+              <a:rPr lang="de-DE" dirty="0" err="1"/>
+              <a:t>forecasting</a:t>
+            </a:r>
+            <a:r>
+              <a:rPr lang="de-DE" dirty="0"/>
+              <a:t> </a:t>
+            </a:r>
+            <a:r>
+              <a:rPr lang="de-DE" dirty="0" err="1"/>
+              <a:t>model</a:t>
+            </a:r>
+            <a:r>
+              <a:rPr lang="de-DE" dirty="0"/>
+              <a:t> </a:t>
+            </a:r>
+            <a:r>
+              <a:rPr lang="de-DE" dirty="0" err="1"/>
+              <a:t>predicts</a:t>
+            </a:r>
+            <a:r>
+              <a:rPr lang="de-DE" dirty="0"/>
+              <a:t> </a:t>
+            </a:r>
+            <a:r>
+              <a:rPr lang="de-DE" dirty="0" err="1"/>
+              <a:t>unseen</a:t>
+            </a:r>
+            <a:r>
+              <a:rPr lang="de-DE" dirty="0"/>
+              <a:t> </a:t>
+            </a:r>
+            <a:r>
+              <a:rPr lang="de-DE" dirty="0" err="1"/>
+              <a:t>future</a:t>
+            </a:r>
+            <a:r>
+              <a:rPr lang="de-DE" dirty="0"/>
+              <a:t> </a:t>
+            </a:r>
+            <a:r>
+              <a:rPr lang="de-DE" dirty="0" err="1"/>
+              <a:t>values</a:t>
+            </a:r>
+            <a:endParaRPr lang="de-DE" dirty="0"/>
+          </a:p>
+          <a:p>
+            <a:pPr marL="0" indent="0">
+              <a:buNone/>
+            </a:pPr>
+            <a:endParaRPr lang="de-DE" dirty="0"/>
+          </a:p>
+          <a:p>
+            <a:pPr marL="0" indent="0">
+              <a:buNone/>
+            </a:pPr>
+            <a:r>
+              <a:rPr lang="de-DE" dirty="0" err="1"/>
+              <a:t>choose</a:t>
+            </a:r>
+            <a:r>
+              <a:rPr lang="de-DE" dirty="0"/>
+              <a:t> an </a:t>
+            </a:r>
+            <a:r>
+              <a:rPr lang="de-DE" dirty="0" err="1"/>
+              <a:t>appropriate</a:t>
+            </a:r>
+            <a:r>
+              <a:rPr lang="de-DE" dirty="0"/>
+              <a:t> </a:t>
+            </a:r>
+            <a:r>
+              <a:rPr lang="de-DE" dirty="0" err="1"/>
+              <a:t>error</a:t>
+            </a:r>
+            <a:r>
+              <a:rPr lang="de-DE" dirty="0"/>
+              <a:t> </a:t>
+            </a:r>
+            <a:r>
+              <a:rPr lang="de-DE" dirty="0" err="1"/>
+              <a:t>metric</a:t>
+            </a:r>
+            <a:r>
+              <a:rPr lang="de-DE" dirty="0"/>
+              <a:t>, </a:t>
+            </a:r>
+            <a:r>
+              <a:rPr lang="de-DE" dirty="0" err="1"/>
+              <a:t>aggregated</a:t>
+            </a:r>
+            <a:r>
+              <a:rPr lang="de-DE" dirty="0"/>
+              <a:t> </a:t>
+            </a:r>
+            <a:r>
+              <a:rPr lang="de-DE" dirty="0" err="1"/>
+              <a:t>over</a:t>
+            </a:r>
+            <a:r>
+              <a:rPr lang="de-DE" dirty="0"/>
+              <a:t> an </a:t>
+            </a:r>
+            <a:r>
+              <a:rPr lang="de-DE" dirty="0" err="1"/>
+              <a:t>evaluation</a:t>
+            </a:r>
+            <a:r>
+              <a:rPr lang="de-DE" dirty="0"/>
+              <a:t> </a:t>
+            </a:r>
+            <a:r>
+              <a:rPr lang="de-DE" dirty="0" err="1"/>
+              <a:t>period</a:t>
+            </a:r>
+            <a:r>
+              <a:rPr lang="de-DE" dirty="0"/>
+              <a:t>: MAE, RMSE, MAPE</a:t>
+            </a:r>
+          </a:p>
+          <a:p>
+            <a:pPr marL="0" indent="0">
+              <a:buNone/>
+            </a:pPr>
+            <a:endParaRPr lang="de-DE" dirty="0"/>
+          </a:p>
+          <a:p>
+            <a:pPr marL="0" indent="0">
+              <a:buNone/>
+            </a:pPr>
+            <a:r>
+              <a:rPr lang="de-DE" dirty="0" err="1"/>
+              <a:t>important</a:t>
+            </a:r>
+            <a:r>
+              <a:rPr lang="de-DE" dirty="0"/>
+              <a:t> design </a:t>
+            </a:r>
+            <a:r>
+              <a:rPr lang="de-DE" dirty="0" err="1"/>
+              <a:t>choice</a:t>
+            </a:r>
+            <a:r>
+              <a:rPr lang="de-DE" dirty="0"/>
+              <a:t>:  </a:t>
+            </a:r>
+            <a:r>
+              <a:rPr lang="de-DE" dirty="0" err="1"/>
+              <a:t>what</a:t>
+            </a:r>
+            <a:r>
+              <a:rPr lang="de-DE" dirty="0"/>
+              <a:t> </a:t>
+            </a:r>
+            <a:r>
+              <a:rPr lang="de-DE" dirty="0" err="1"/>
+              <a:t>period</a:t>
+            </a:r>
+            <a:r>
+              <a:rPr lang="de-DE" dirty="0"/>
+              <a:t> </a:t>
+            </a:r>
+            <a:r>
+              <a:rPr lang="de-DE" dirty="0" err="1"/>
+              <a:t>to</a:t>
+            </a:r>
+            <a:r>
+              <a:rPr lang="de-DE" dirty="0"/>
+              <a:t> </a:t>
+            </a:r>
+            <a:r>
+              <a:rPr lang="de-DE" dirty="0" err="1"/>
+              <a:t>evaluate</a:t>
+            </a:r>
+            <a:r>
+              <a:rPr lang="de-DE" dirty="0"/>
+              <a:t> on?</a:t>
+            </a:r>
+          </a:p>
+          <a:p>
+            <a:r>
+              <a:rPr lang="de-DE" dirty="0" err="1"/>
+              <a:t>single</a:t>
+            </a:r>
+            <a:r>
+              <a:rPr lang="de-DE" dirty="0"/>
+              <a:t> </a:t>
+            </a:r>
+            <a:r>
+              <a:rPr lang="de-DE" dirty="0" err="1"/>
+              <a:t>holdout</a:t>
+            </a:r>
+            <a:r>
+              <a:rPr lang="de-DE" dirty="0"/>
+              <a:t> </a:t>
+            </a:r>
+            <a:r>
+              <a:rPr lang="de-DE" dirty="0" err="1"/>
+              <a:t>period</a:t>
+            </a:r>
+            <a:r>
+              <a:rPr lang="de-DE" dirty="0"/>
+              <a:t>: final 20% </a:t>
+            </a:r>
+            <a:r>
+              <a:rPr lang="de-DE" dirty="0" err="1"/>
+              <a:t>of</a:t>
+            </a:r>
+            <a:r>
+              <a:rPr lang="de-DE" dirty="0"/>
+              <a:t> </a:t>
+            </a:r>
+            <a:r>
+              <a:rPr lang="de-DE" dirty="0" err="1"/>
+              <a:t>the</a:t>
+            </a:r>
+            <a:r>
+              <a:rPr lang="de-DE" dirty="0"/>
+              <a:t> </a:t>
+            </a:r>
+            <a:r>
+              <a:rPr lang="de-DE" dirty="0" err="1"/>
+              <a:t>series</a:t>
+            </a:r>
+            <a:endParaRPr lang="de-DE" dirty="0"/>
+          </a:p>
+          <a:p>
+            <a:r>
+              <a:rPr lang="de-DE" dirty="0" err="1"/>
+              <a:t>rolling</a:t>
+            </a:r>
+            <a:r>
+              <a:rPr lang="de-DE" dirty="0"/>
+              <a:t> </a:t>
+            </a:r>
+            <a:r>
+              <a:rPr lang="de-DE" dirty="0" err="1"/>
+              <a:t>evaluation</a:t>
+            </a:r>
+            <a:r>
+              <a:rPr lang="de-DE" dirty="0"/>
+              <a:t>: </a:t>
+            </a:r>
+            <a:r>
+              <a:rPr lang="de-DE" dirty="0" err="1"/>
+              <a:t>repeated</a:t>
+            </a:r>
+            <a:r>
+              <a:rPr lang="de-DE" dirty="0"/>
+              <a:t> </a:t>
+            </a:r>
+            <a:r>
+              <a:rPr lang="de-DE" dirty="0" err="1"/>
+              <a:t>forecasts</a:t>
+            </a:r>
+            <a:r>
+              <a:rPr lang="de-DE" dirty="0"/>
+              <a:t> </a:t>
+            </a:r>
+            <a:r>
+              <a:rPr lang="de-DE" dirty="0" err="1"/>
+              <a:t>across</a:t>
+            </a:r>
+            <a:r>
+              <a:rPr lang="de-DE" dirty="0"/>
+              <a:t> multiple </a:t>
+            </a:r>
+            <a:r>
+              <a:rPr lang="de-DE" dirty="0" err="1"/>
+              <a:t>future</a:t>
+            </a:r>
+            <a:r>
+              <a:rPr lang="de-DE" dirty="0"/>
+              <a:t> </a:t>
+            </a:r>
+            <a:r>
+              <a:rPr lang="de-DE" dirty="0" err="1"/>
+              <a:t>windows</a:t>
+            </a:r>
+            <a:endParaRPr lang="de-DE" dirty="0"/>
+          </a:p>
+          <a:p>
+            <a:r>
+              <a:rPr lang="de-DE" dirty="0" err="1"/>
+              <a:t>forecast</a:t>
+            </a:r>
+            <a:r>
+              <a:rPr lang="de-DE" dirty="0"/>
+              <a:t> </a:t>
+            </a:r>
+            <a:r>
+              <a:rPr lang="de-DE" dirty="0" err="1"/>
+              <a:t>horizon-specific</a:t>
+            </a:r>
+            <a:r>
+              <a:rPr lang="de-DE" dirty="0"/>
+              <a:t> </a:t>
+            </a:r>
+            <a:r>
+              <a:rPr lang="de-DE" dirty="0" err="1"/>
+              <a:t>evaluation</a:t>
+            </a:r>
+            <a:r>
+              <a:rPr lang="de-DE" dirty="0"/>
+              <a:t>: 1-step, 5-step, 12-step </a:t>
+            </a:r>
+            <a:r>
+              <a:rPr lang="de-DE" dirty="0" err="1"/>
+              <a:t>ahead</a:t>
+            </a:r>
+            <a:r>
+              <a:rPr lang="de-DE" dirty="0"/>
+              <a:t> </a:t>
+            </a:r>
+            <a:r>
+              <a:rPr lang="de-DE" dirty="0" err="1"/>
+              <a:t>errors</a:t>
+            </a:r>
+            <a:endParaRPr lang="de-DE" dirty="0"/>
+          </a:p>
+        </p:txBody>
+      </p:sp>
+      <p:sp>
+        <p:nvSpPr>
+          <p:cNvPr id="4" name="Foliennummernplatzhalter 3">
+            <a:extLst>
+              <a:ext uri="{FF2B5EF4-FFF2-40B4-BE49-F238E27FC236}">
+                <a16:creationId xmlns:a16="http://schemas.microsoft.com/office/drawing/2014/main" id="{7A586B19-8501-1891-67F0-454120B99ECC}"/>
+              </a:ext>
+            </a:extLst>
+          </p:cNvPr>
+          <p:cNvSpPr>
+            <a:spLocks noGrp="1"/>
+          </p:cNvSpPr>
+          <p:nvPr>
+            <p:ph type="sldNum" sz="quarter" idx="12"/>
+          </p:nvPr>
+        </p:nvSpPr>
+        <p:spPr/>
+        <p:txBody>
+          <a:bodyPr/>
+          <a:lstStyle/>
+          <a:p>
+            <a:fld id="{D6D392C1-03C4-44BA-9267-8F9A2DA09A60}" type="slidenum">
+              <a:rPr lang="en-GB" smtClean="0"/>
+              <a:t>22</a:t>
+            </a:fld>
+            <a:endParaRPr lang="en-GB"/>
+          </a:p>
+        </p:txBody>
+      </p:sp>
+    </p:spTree>
+    <p:extLst>
+      <p:ext uri="{BB962C8B-B14F-4D97-AF65-F5344CB8AC3E}">
+        <p14:creationId xmlns:p14="http://schemas.microsoft.com/office/powerpoint/2010/main" val="135326309"/>
+      </p:ext>
+    </p:extLst>
+  </p:cSld>
+  <p:clrMapOvr>
+    <a:masterClrMapping/>
+  </p:clrMapOvr>
+</p:sld>
+</file>
+
+<file path=ppt/slides/slide23.xml><?xml version="1.0" encoding="utf-8"?>
+<p:sld xmlns:a="http://schemas.openxmlformats.org/drawingml/2006/main" xmlns:r="http://schemas.openxmlformats.org/officeDocument/2006/relationships" xmlns:p="http://schemas.openxmlformats.org/presentationml/2006/main">
+  <p:cSld>
+    <p:spTree>
+      <p:nvGrpSpPr>
+        <p:cNvPr id="1" name=""/>
+        <p:cNvGrpSpPr/>
+        <p:nvPr/>
+      </p:nvGrpSpPr>
+      <p:grpSpPr>
+        <a:xfrm>
+          <a:off x="0" y="0"/>
+          <a:ext cx="0" cy="0"/>
+          <a:chOff x="0" y="0"/>
+          <a:chExt cx="0" cy="0"/>
+        </a:xfrm>
+      </p:grpSpPr>
+      <p:sp>
+        <p:nvSpPr>
+          <p:cNvPr id="2" name="Titel 1">
+            <a:extLst>
+              <a:ext uri="{FF2B5EF4-FFF2-40B4-BE49-F238E27FC236}">
+                <a16:creationId xmlns:a16="http://schemas.microsoft.com/office/drawing/2014/main" id="{C1477756-B47F-6F9E-91C1-E543C6A6C38D}"/>
+              </a:ext>
+            </a:extLst>
+          </p:cNvPr>
+          <p:cNvSpPr>
+            <a:spLocks noGrp="1"/>
+          </p:cNvSpPr>
+          <p:nvPr>
+            <p:ph type="title"/>
+          </p:nvPr>
+        </p:nvSpPr>
+        <p:spPr/>
+        <p:txBody>
+          <a:bodyPr/>
+          <a:lstStyle/>
+          <a:p>
+            <a:r>
+              <a:rPr lang="de-DE" dirty="0"/>
               <a:t>Baseline Forecasts / Naive Models</a:t>
             </a:r>
           </a:p>
@@ -15821,7 +16788,7 @@
           <a:p>
             <a:fld id="{D6D392C1-03C4-44BA-9267-8F9A2DA09A60}" type="slidenum">
               <a:rPr lang="en-GB" smtClean="0"/>
-              <a:t>22</a:t>
+              <a:t>23</a:t>
             </a:fld>
             <a:endParaRPr lang="en-GB"/>
           </a:p>
@@ -15840,7 +16807,7 @@
 </p:sld>
 </file>
 
-<file path=ppt/slides/slide23.xml><?xml version="1.0" encoding="utf-8"?>
+<file path=ppt/slides/slide24.xml><?xml version="1.0" encoding="utf-8"?>
 <p:sld xmlns:a="http://schemas.openxmlformats.org/drawingml/2006/main" xmlns:r="http://schemas.openxmlformats.org/officeDocument/2006/relationships" xmlns:p="http://schemas.openxmlformats.org/presentationml/2006/main">
   <p:cSld>
     <p:spTree>
@@ -16663,7 +17630,7 @@
           <a:p>
             <a:fld id="{D6D392C1-03C4-44BA-9267-8F9A2DA09A60}" type="slidenum">
               <a:rPr lang="en-GB" smtClean="0"/>
-              <a:t>23</a:t>
+              <a:t>24</a:t>
             </a:fld>
             <a:endParaRPr lang="en-GB"/>
           </a:p>
@@ -16682,7 +17649,7 @@
 </p:sld>
 </file>
 
-<file path=ppt/slides/slide24.xml><?xml version="1.0" encoding="utf-8"?>
+<file path=ppt/slides/slide25.xml><?xml version="1.0" encoding="utf-8"?>
 <p:sld xmlns:a="http://schemas.openxmlformats.org/drawingml/2006/main" xmlns:r="http://schemas.openxmlformats.org/officeDocument/2006/relationships" xmlns:p="http://schemas.openxmlformats.org/presentationml/2006/main">
   <p:cSld>
     <p:spTree>
@@ -17535,7 +18502,7 @@
           <a:p>
             <a:fld id="{D6D392C1-03C4-44BA-9267-8F9A2DA09A60}" type="slidenum">
               <a:rPr lang="en-GB" smtClean="0"/>
-              <a:t>24</a:t>
+              <a:t>25</a:t>
             </a:fld>
             <a:endParaRPr lang="en-GB"/>
           </a:p>
@@ -17554,7 +18521,7 @@
 </p:sld>
 </file>
 
-<file path=ppt/slides/slide25.xml><?xml version="1.0" encoding="utf-8"?>
+<file path=ppt/slides/slide26.xml><?xml version="1.0" encoding="utf-8"?>
 <p:sld xmlns:a="http://schemas.openxmlformats.org/drawingml/2006/main" xmlns:r="http://schemas.openxmlformats.org/officeDocument/2006/relationships" xmlns:p="http://schemas.openxmlformats.org/presentationml/2006/main">
   <p:cSld>
     <p:spTree>
@@ -17728,7 +18695,7 @@
           <a:p>
             <a:fld id="{D6D392C1-03C4-44BA-9267-8F9A2DA09A60}" type="slidenum">
               <a:rPr lang="en-GB" smtClean="0"/>
-              <a:t>25</a:t>
+              <a:t>26</a:t>
             </a:fld>
             <a:endParaRPr lang="en-GB"/>
           </a:p>
@@ -17747,7 +18714,7 @@
 </p:sld>
 </file>
 
-<file path=ppt/slides/slide26.xml><?xml version="1.0" encoding="utf-8"?>
+<file path=ppt/slides/slide27.xml><?xml version="1.0" encoding="utf-8"?>
 <p:sld xmlns:a="http://schemas.openxmlformats.org/drawingml/2006/main" xmlns:r="http://schemas.openxmlformats.org/officeDocument/2006/relationships" xmlns:p="http://schemas.openxmlformats.org/presentationml/2006/main">
   <p:cSld>
     <p:spTree>
@@ -18133,7 +19100,7 @@
           <a:p>
             <a:fld id="{D6D392C1-03C4-44BA-9267-8F9A2DA09A60}" type="slidenum">
               <a:rPr lang="en-GB" smtClean="0"/>
-              <a:t>26</a:t>
+              <a:t>27</a:t>
             </a:fld>
             <a:endParaRPr lang="en-GB"/>
           </a:p>
@@ -18152,7 +19119,7 @@
 </p:sld>
 </file>
 
-<file path=ppt/slides/slide27.xml><?xml version="1.0" encoding="utf-8"?>
+<file path=ppt/slides/slide28.xml><?xml version="1.0" encoding="utf-8"?>
 <p:sld xmlns:a="http://schemas.openxmlformats.org/drawingml/2006/main" xmlns:r="http://schemas.openxmlformats.org/officeDocument/2006/relationships" xmlns:p="http://schemas.openxmlformats.org/presentationml/2006/main">
   <p:cSld>
     <p:spTree>
@@ -18282,7 +19249,7 @@
           <a:p>
             <a:fld id="{D6D392C1-03C4-44BA-9267-8F9A2DA09A60}" type="slidenum">
               <a:rPr lang="en-GB" smtClean="0"/>
-              <a:t>27</a:t>
+              <a:t>28</a:t>
             </a:fld>
             <a:endParaRPr lang="en-GB"/>
           </a:p>
@@ -18292,281 +19259,6 @@
     <p:extLst>
       <p:ext uri="{BB962C8B-B14F-4D97-AF65-F5344CB8AC3E}">
         <p14:creationId xmlns:p14="http://schemas.microsoft.com/office/powerpoint/2010/main" val="786395995"/>
-      </p:ext>
-    </p:extLst>
-  </p:cSld>
-  <p:clrMapOvr>
-    <a:masterClrMapping/>
-  </p:clrMapOvr>
-</p:sld>
-</file>
-
-<file path=ppt/slides/slide28.xml><?xml version="1.0" encoding="utf-8"?>
-<p:sld xmlns:a="http://schemas.openxmlformats.org/drawingml/2006/main" xmlns:r="http://schemas.openxmlformats.org/officeDocument/2006/relationships" xmlns:p="http://schemas.openxmlformats.org/presentationml/2006/main">
-  <p:cSld>
-    <p:spTree>
-      <p:nvGrpSpPr>
-        <p:cNvPr id="1" name=""/>
-        <p:cNvGrpSpPr/>
-        <p:nvPr/>
-      </p:nvGrpSpPr>
-      <p:grpSpPr>
-        <a:xfrm>
-          <a:off x="0" y="0"/>
-          <a:ext cx="0" cy="0"/>
-          <a:chOff x="0" y="0"/>
-          <a:chExt cx="0" cy="0"/>
-        </a:xfrm>
-      </p:grpSpPr>
-      <p:sp>
-        <p:nvSpPr>
-          <p:cNvPr id="2" name="Title 1">
-            <a:extLst>
-              <a:ext uri="{FF2B5EF4-FFF2-40B4-BE49-F238E27FC236}">
-                <a16:creationId xmlns:a16="http://schemas.microsoft.com/office/drawing/2014/main" id="{E7782324-CE57-4CE6-FEF9-50E74735010C}"/>
-              </a:ext>
-            </a:extLst>
-          </p:cNvPr>
-          <p:cNvSpPr>
-            <a:spLocks noGrp="1"/>
-          </p:cNvSpPr>
-          <p:nvPr>
-            <p:ph type="title"/>
-          </p:nvPr>
-        </p:nvSpPr>
-        <p:spPr/>
-        <p:txBody>
-          <a:bodyPr>
-            <a:normAutofit/>
-          </a:bodyPr>
-          <a:lstStyle/>
-          <a:p>
-            <a:r>
-              <a:rPr lang="en-DE" dirty="0"/>
-              <a:t>Temporal Confounding</a:t>
-            </a:r>
-          </a:p>
-        </p:txBody>
-      </p:sp>
-      <p:sp>
-        <p:nvSpPr>
-          <p:cNvPr id="3" name="Content Placeholder 2">
-            <a:extLst>
-              <a:ext uri="{FF2B5EF4-FFF2-40B4-BE49-F238E27FC236}">
-                <a16:creationId xmlns:a16="http://schemas.microsoft.com/office/drawing/2014/main" id="{4F155B54-E9AB-8C70-657B-A214D682BCF7}"/>
-              </a:ext>
-            </a:extLst>
-          </p:cNvPr>
-          <p:cNvSpPr>
-            <a:spLocks noGrp="1"/>
-          </p:cNvSpPr>
-          <p:nvPr>
-            <p:ph idx="1"/>
-          </p:nvPr>
-        </p:nvSpPr>
-        <p:spPr>
-          <a:xfrm>
-            <a:off x="838200" y="1825624"/>
-            <a:ext cx="10515600" cy="4530725"/>
-          </a:xfrm>
-        </p:spPr>
-        <p:txBody>
-          <a:bodyPr>
-            <a:noAutofit/>
-          </a:bodyPr>
-          <a:lstStyle/>
-          <a:p>
-            <a:pPr marL="0" indent="0">
-              <a:buNone/>
-            </a:pPr>
-            <a:r>
-              <a:rPr lang="en-GB" sz="2400" dirty="0"/>
-              <a:t>auto-correlation often only spurious: common causes at consecutive times</a:t>
-            </a:r>
-          </a:p>
-          <a:p>
-            <a:pPr marL="0" indent="0">
-              <a:buNone/>
-            </a:pPr>
-            <a:r>
-              <a:rPr lang="en-GB" sz="2400" dirty="0">
-                <a:sym typeface="Wingdings" panose="05000000000000000000" pitchFamily="2" charset="2"/>
-              </a:rPr>
-              <a:t> </a:t>
-            </a:r>
-            <a:r>
-              <a:rPr lang="en-GB" sz="2400" dirty="0"/>
-              <a:t>no direct causal effects</a:t>
-            </a:r>
-          </a:p>
-          <a:p>
-            <a:pPr marL="0" indent="0">
-              <a:buNone/>
-            </a:pPr>
-            <a:endParaRPr lang="en-GB" sz="2400" dirty="0"/>
-          </a:p>
-          <a:p>
-            <a:pPr marL="0" indent="0">
-              <a:buNone/>
-            </a:pPr>
-            <a:endParaRPr lang="en-GB" sz="2400" dirty="0"/>
-          </a:p>
-          <a:p>
-            <a:pPr marL="0" indent="0">
-              <a:buNone/>
-            </a:pPr>
-            <a:endParaRPr lang="en-GB" sz="2400" dirty="0"/>
-          </a:p>
-          <a:p>
-            <a:pPr marL="0" indent="0">
-              <a:buNone/>
-            </a:pPr>
-            <a:r>
-              <a:rPr lang="en-GB" sz="2400" dirty="0"/>
-              <a:t>advantages of </a:t>
-            </a:r>
-            <a:r>
-              <a:rPr lang="en-DE" sz="2400" dirty="0"/>
-              <a:t>learning direct causal effects from exogenous information</a:t>
-            </a:r>
-            <a:r>
-              <a:rPr lang="en-GB" sz="2400" dirty="0"/>
-              <a:t> instead of confounded auto-correlation:</a:t>
-            </a:r>
-          </a:p>
-          <a:p>
-            <a:r>
-              <a:rPr lang="en-GB" sz="2400" dirty="0"/>
-              <a:t>e</a:t>
-            </a:r>
-            <a:r>
-              <a:rPr lang="en-DE" sz="2400" dirty="0"/>
-              <a:t>xplainability</a:t>
-            </a:r>
-            <a:endParaRPr lang="en-GB" sz="2400" dirty="0"/>
-          </a:p>
-          <a:p>
-            <a:r>
-              <a:rPr lang="en-DE" sz="2400" dirty="0"/>
-              <a:t>long-term forecasting</a:t>
-            </a:r>
-            <a:endParaRPr lang="en-GB" sz="2400" dirty="0"/>
-          </a:p>
-          <a:p>
-            <a:r>
-              <a:rPr lang="en-GB" sz="2400" dirty="0"/>
-              <a:t>predictability of r</a:t>
-            </a:r>
-            <a:r>
-              <a:rPr lang="en-DE" sz="2400" dirty="0"/>
-              <a:t>are events</a:t>
-            </a:r>
-          </a:p>
-        </p:txBody>
-      </p:sp>
-      <p:sp>
-        <p:nvSpPr>
-          <p:cNvPr id="4" name="Slide Number Placeholder 3">
-            <a:extLst>
-              <a:ext uri="{FF2B5EF4-FFF2-40B4-BE49-F238E27FC236}">
-                <a16:creationId xmlns:a16="http://schemas.microsoft.com/office/drawing/2014/main" id="{933A2B48-7C85-CD10-8C2B-E64B70045133}"/>
-              </a:ext>
-            </a:extLst>
-          </p:cNvPr>
-          <p:cNvSpPr>
-            <a:spLocks noGrp="1"/>
-          </p:cNvSpPr>
-          <p:nvPr>
-            <p:ph type="sldNum" sz="quarter" idx="12"/>
-          </p:nvPr>
-        </p:nvSpPr>
-        <p:spPr/>
-        <p:txBody>
-          <a:bodyPr/>
-          <a:lstStyle/>
-          <a:p>
-            <a:fld id="{60A26886-2117-0949-B8A5-D47461AC229C}" type="slidenum">
-              <a:rPr lang="en-DE" smtClean="0"/>
-              <a:t>28</a:t>
-            </a:fld>
-            <a:endParaRPr lang="en-DE"/>
-          </a:p>
-        </p:txBody>
-      </p:sp>
-      <p:pic>
-        <p:nvPicPr>
-          <p:cNvPr id="5" name="Picture 4">
-            <a:extLst>
-              <a:ext uri="{FF2B5EF4-FFF2-40B4-BE49-F238E27FC236}">
-                <a16:creationId xmlns:a16="http://schemas.microsoft.com/office/drawing/2014/main" id="{A34AAE7F-6610-0306-5A70-6EDC89A1B7B5}"/>
-              </a:ext>
-            </a:extLst>
-          </p:cNvPr>
-          <p:cNvPicPr>
-            <a:picLocks noChangeAspect="1"/>
-          </p:cNvPicPr>
-          <p:nvPr/>
-        </p:nvPicPr>
-        <p:blipFill>
-          <a:blip r:embed="rId2"/>
-          <a:stretch>
-            <a:fillRect/>
-          </a:stretch>
-        </p:blipFill>
-        <p:spPr>
-          <a:xfrm>
-            <a:off x="3681281" y="2219824"/>
-            <a:ext cx="2259227" cy="1781470"/>
-          </a:xfrm>
-          <a:prstGeom prst="rect">
-            <a:avLst/>
-          </a:prstGeom>
-        </p:spPr>
-      </p:pic>
-      <p:sp>
-        <p:nvSpPr>
-          <p:cNvPr id="6" name="TextBox 5">
-            <a:extLst>
-              <a:ext uri="{FF2B5EF4-FFF2-40B4-BE49-F238E27FC236}">
-                <a16:creationId xmlns:a16="http://schemas.microsoft.com/office/drawing/2014/main" id="{63204A30-3195-923A-0444-BC02357770E1}"/>
-              </a:ext>
-            </a:extLst>
-          </p:cNvPr>
-          <p:cNvSpPr txBox="1"/>
-          <p:nvPr/>
-        </p:nvSpPr>
-        <p:spPr>
-          <a:xfrm>
-            <a:off x="6664410" y="2594923"/>
-            <a:ext cx="4689389" cy="830997"/>
-          </a:xfrm>
-          <a:prstGeom prst="rect">
-            <a:avLst/>
-          </a:prstGeom>
-          <a:noFill/>
-          <a:ln>
-            <a:solidFill>
-              <a:schemeClr val="tx1"/>
-            </a:solidFill>
-          </a:ln>
-        </p:spPr>
-        <p:txBody>
-          <a:bodyPr wrap="square" rtlCol="0">
-            <a:spAutoFit/>
-          </a:bodyPr>
-          <a:lstStyle/>
-          <a:p>
-            <a:r>
-              <a:rPr lang="en-GB" sz="2400" dirty="0"/>
-              <a:t>specific lags such as day of week can be interpreted both ways</a:t>
-            </a:r>
-          </a:p>
-        </p:txBody>
-      </p:sp>
-    </p:spTree>
-    <p:extLst>
-      <p:ext uri="{BB962C8B-B14F-4D97-AF65-F5344CB8AC3E}">
-        <p14:creationId xmlns:p14="http://schemas.microsoft.com/office/powerpoint/2010/main" val="3626000077"/>
       </p:ext>
     </p:extLst>
   </p:cSld>
@@ -18595,10 +19287,10 @@
       </p:grpSpPr>
       <p:sp>
         <p:nvSpPr>
-          <p:cNvPr id="2" name="Titel 1">
-            <a:extLst>
-              <a:ext uri="{FF2B5EF4-FFF2-40B4-BE49-F238E27FC236}">
-                <a16:creationId xmlns:a16="http://schemas.microsoft.com/office/drawing/2014/main" id="{17A3E1BB-0DA0-C62B-983D-34FBE926E369}"/>
+          <p:cNvPr id="2" name="Title 1">
+            <a:extLst>
+              <a:ext uri="{FF2B5EF4-FFF2-40B4-BE49-F238E27FC236}">
+                <a16:creationId xmlns:a16="http://schemas.microsoft.com/office/drawing/2014/main" id="{E7782324-CE57-4CE6-FEF9-50E74735010C}"/>
               </a:ext>
             </a:extLst>
           </p:cNvPr>
@@ -18611,23 +19303,24 @@
         </p:nvSpPr>
         <p:spPr/>
         <p:txBody>
-          <a:bodyPr/>
+          <a:bodyPr>
+            <a:normAutofit/>
+          </a:bodyPr>
           <a:lstStyle/>
           <a:p>
             <a:r>
-              <a:rPr lang="en-GB" dirty="0"/>
-              <a:t>Beware of (Spurious) Auto-Correlation</a:t>
-            </a:r>
-            <a:endParaRPr lang="de-DE" dirty="0"/>
+              <a:rPr lang="en-DE" dirty="0"/>
+              <a:t>Temporal Confounding</a:t>
+            </a:r>
           </a:p>
         </p:txBody>
       </p:sp>
       <p:sp>
         <p:nvSpPr>
-          <p:cNvPr id="3" name="Inhaltsplatzhalter 2">
-            <a:extLst>
-              <a:ext uri="{FF2B5EF4-FFF2-40B4-BE49-F238E27FC236}">
-                <a16:creationId xmlns:a16="http://schemas.microsoft.com/office/drawing/2014/main" id="{0B13D30D-594E-53C3-0DC0-7C70B0D58650}"/>
+          <p:cNvPr id="3" name="Content Placeholder 2">
+            <a:extLst>
+              <a:ext uri="{FF2B5EF4-FFF2-40B4-BE49-F238E27FC236}">
+                <a16:creationId xmlns:a16="http://schemas.microsoft.com/office/drawing/2014/main" id="{4F155B54-E9AB-8C70-657B-A214D682BCF7}"/>
               </a:ext>
             </a:extLst>
           </p:cNvPr>
@@ -18640,13 +19333,13 @@
         </p:nvSpPr>
         <p:spPr>
           <a:xfrm>
-            <a:off x="838200" y="1825625"/>
-            <a:ext cx="5257800" cy="4351338"/>
+            <a:off x="838200" y="1825624"/>
+            <a:ext cx="10515600" cy="4530725"/>
           </a:xfrm>
         </p:spPr>
         <p:txBody>
           <a:bodyPr>
-            <a:normAutofit fontScale="77500" lnSpcReduction="20000"/>
+            <a:noAutofit/>
           </a:bodyPr>
           <a:lstStyle/>
           <a:p>
@@ -18654,395 +19347,96 @@
               <a:buNone/>
             </a:pPr>
             <a:r>
-              <a:rPr lang="en-GB" dirty="0"/>
-              <a:t>Most </a:t>
-            </a:r>
-            <a:r>
-              <a:rPr lang="en-DE"/>
-              <a:t>forecasting methods rely on</a:t>
-            </a:r>
-            <a:r>
-              <a:rPr lang="de-DE" dirty="0"/>
-              <a:t> </a:t>
-            </a:r>
-            <a:r>
-              <a:rPr lang="de-DE" dirty="0" err="1"/>
-              <a:t>lagged</a:t>
-            </a:r>
-            <a:r>
-              <a:rPr lang="de-DE" dirty="0"/>
-              <a:t> </a:t>
-            </a:r>
-            <a:r>
-              <a:rPr lang="de-DE" dirty="0" err="1"/>
-              <a:t>target</a:t>
-            </a:r>
-            <a:r>
-              <a:rPr lang="de-DE" dirty="0"/>
-              <a:t> </a:t>
-            </a:r>
-            <a:r>
-              <a:rPr lang="de-DE" dirty="0" err="1"/>
-              <a:t>information</a:t>
-            </a:r>
-            <a:r>
-              <a:rPr lang="de-DE" dirty="0"/>
-              <a:t>.</a:t>
-            </a:r>
-          </a:p>
-          <a:p>
-            <a:pPr marL="342900" indent="-342900"/>
-            <a:r>
-              <a:rPr lang="de-DE" dirty="0"/>
-              <a:t>univariate time </a:t>
-            </a:r>
-            <a:r>
-              <a:rPr lang="de-DE" dirty="0" err="1"/>
-              <a:t>series</a:t>
-            </a:r>
-            <a:r>
-              <a:rPr lang="de-DE" dirty="0"/>
-              <a:t> </a:t>
-            </a:r>
-            <a:r>
-              <a:rPr lang="de-DE" dirty="0" err="1"/>
-              <a:t>methods</a:t>
-            </a:r>
-            <a:endParaRPr lang="de-DE" dirty="0"/>
-          </a:p>
-          <a:p>
-            <a:pPr marL="342900" indent="-342900"/>
-            <a:r>
-              <a:rPr lang="de-DE" dirty="0" err="1"/>
-              <a:t>exponential</a:t>
-            </a:r>
-            <a:r>
-              <a:rPr lang="de-DE" dirty="0"/>
-              <a:t> </a:t>
-            </a:r>
-            <a:r>
-              <a:rPr lang="de-DE" dirty="0" err="1"/>
-              <a:t>smoothing</a:t>
-            </a:r>
-            <a:r>
-              <a:rPr lang="de-DE" dirty="0"/>
-              <a:t> </a:t>
-            </a:r>
-            <a:r>
-              <a:rPr lang="de-DE" dirty="0" err="1"/>
-              <a:t>features</a:t>
-            </a:r>
-            <a:r>
-              <a:rPr lang="de-DE" dirty="0"/>
-              <a:t> in ML </a:t>
-            </a:r>
-            <a:r>
-              <a:rPr lang="de-DE" dirty="0" err="1"/>
-              <a:t>model</a:t>
-            </a:r>
-            <a:endParaRPr lang="de-DE" dirty="0"/>
-          </a:p>
-          <a:p>
-            <a:pPr marL="342900" indent="-342900"/>
-            <a:r>
-              <a:rPr lang="de-DE" dirty="0" err="1"/>
-              <a:t>sequence</a:t>
-            </a:r>
-            <a:r>
-              <a:rPr lang="de-DE" dirty="0"/>
-              <a:t> </a:t>
-            </a:r>
-            <a:r>
-              <a:rPr lang="de-DE" dirty="0" err="1"/>
-              <a:t>modeling</a:t>
-            </a:r>
-            <a:r>
-              <a:rPr lang="de-DE" dirty="0"/>
-              <a:t> in </a:t>
-            </a:r>
-            <a:r>
-              <a:rPr lang="de-DE" dirty="0" err="1"/>
-              <a:t>deep</a:t>
-            </a:r>
-            <a:r>
-              <a:rPr lang="de-DE" dirty="0"/>
-              <a:t> </a:t>
-            </a:r>
-            <a:r>
-              <a:rPr lang="de-DE" dirty="0" err="1"/>
-              <a:t>learning</a:t>
-            </a:r>
-            <a:r>
-              <a:rPr lang="de-DE" dirty="0"/>
-              <a:t> (e.g., </a:t>
-            </a:r>
-            <a:r>
-              <a:rPr lang="de-DE" dirty="0" err="1"/>
-              <a:t>recurrent</a:t>
-            </a:r>
-            <a:r>
-              <a:rPr lang="de-DE" dirty="0"/>
-              <a:t> </a:t>
-            </a:r>
-            <a:r>
-              <a:rPr lang="de-DE" dirty="0" err="1"/>
-              <a:t>neural</a:t>
-            </a:r>
-            <a:r>
-              <a:rPr lang="de-DE" dirty="0"/>
-              <a:t> </a:t>
-            </a:r>
-            <a:r>
-              <a:rPr lang="de-DE" dirty="0" err="1"/>
-              <a:t>networks</a:t>
-            </a:r>
-            <a:r>
-              <a:rPr lang="de-DE" dirty="0"/>
-              <a:t>)</a:t>
-            </a:r>
-          </a:p>
-          <a:p>
-            <a:endParaRPr lang="de-DE" dirty="0"/>
+              <a:rPr lang="en-GB" sz="2400" dirty="0"/>
+              <a:t>auto-correlation often only spurious: common causes at consecutive times</a:t>
+            </a:r>
           </a:p>
           <a:p>
             <a:pPr marL="0" indent="0">
               <a:buNone/>
             </a:pPr>
             <a:r>
-              <a:rPr lang="de-DE" dirty="0" err="1">
-                <a:sym typeface="Wingdings" pitchFamily="2" charset="2"/>
+              <a:rPr lang="en-GB" sz="2400" dirty="0">
+                <a:sym typeface="Wingdings" panose="05000000000000000000" pitchFamily="2" charset="2"/>
               </a:rPr>
-              <a:t>However</a:t>
-            </a:r>
-            <a:r>
-              <a:rPr lang="de-DE" dirty="0">
-                <a:sym typeface="Wingdings" pitchFamily="2" charset="2"/>
-              </a:rPr>
-              <a:t>, </a:t>
-            </a:r>
-            <a:r>
-              <a:rPr lang="de-DE" dirty="0" err="1">
-                <a:sym typeface="Wingdings" pitchFamily="2" charset="2"/>
-              </a:rPr>
-              <a:t>this</a:t>
-            </a:r>
-            <a:r>
-              <a:rPr lang="de-DE" dirty="0">
-                <a:sym typeface="Wingdings" pitchFamily="2" charset="2"/>
-              </a:rPr>
-              <a:t> </a:t>
-            </a:r>
-            <a:r>
-              <a:rPr lang="de-DE" dirty="0" err="1">
-                <a:sym typeface="Wingdings" pitchFamily="2" charset="2"/>
-              </a:rPr>
-              <a:t>makes</a:t>
-            </a:r>
-            <a:r>
-              <a:rPr lang="de-DE" dirty="0">
-                <a:sym typeface="Wingdings" pitchFamily="2" charset="2"/>
-              </a:rPr>
-              <a:t> </a:t>
-            </a:r>
-            <a:r>
-              <a:rPr lang="de-DE" dirty="0" err="1">
-                <a:sym typeface="Wingdings" pitchFamily="2" charset="2"/>
-              </a:rPr>
-              <a:t>learning</a:t>
-            </a:r>
-            <a:r>
-              <a:rPr lang="de-DE" dirty="0">
-                <a:sym typeface="Wingdings" pitchFamily="2" charset="2"/>
-              </a:rPr>
-              <a:t> </a:t>
-            </a:r>
-            <a:r>
-              <a:rPr lang="de-DE" dirty="0" err="1">
-                <a:sym typeface="Wingdings" pitchFamily="2" charset="2"/>
-              </a:rPr>
-              <a:t>of</a:t>
-            </a:r>
-            <a:r>
-              <a:rPr lang="de-DE" dirty="0">
-                <a:sym typeface="Wingdings" pitchFamily="2" charset="2"/>
-              </a:rPr>
-              <a:t> </a:t>
-            </a:r>
-            <a:r>
-              <a:rPr lang="de-DE" dirty="0" err="1">
-                <a:sym typeface="Wingdings" pitchFamily="2" charset="2"/>
-              </a:rPr>
-              <a:t>exogenous</a:t>
-            </a:r>
-            <a:r>
-              <a:rPr lang="de-DE" dirty="0">
-                <a:sym typeface="Wingdings" pitchFamily="2" charset="2"/>
-              </a:rPr>
-              <a:t> </a:t>
-            </a:r>
-            <a:r>
-              <a:rPr lang="de-DE" dirty="0" err="1">
-                <a:sym typeface="Wingdings" pitchFamily="2" charset="2"/>
-              </a:rPr>
-              <a:t>effects</a:t>
-            </a:r>
-            <a:r>
-              <a:rPr lang="de-DE" dirty="0">
-                <a:sym typeface="Wingdings" pitchFamily="2" charset="2"/>
-              </a:rPr>
-              <a:t> </a:t>
-            </a:r>
-            <a:r>
-              <a:rPr lang="de-DE" dirty="0" err="1">
-                <a:sym typeface="Wingdings" pitchFamily="2" charset="2"/>
-              </a:rPr>
-              <a:t>much</a:t>
-            </a:r>
-            <a:r>
-              <a:rPr lang="de-DE" dirty="0">
-                <a:sym typeface="Wingdings" pitchFamily="2" charset="2"/>
-              </a:rPr>
-              <a:t> </a:t>
-            </a:r>
-            <a:r>
-              <a:rPr lang="de-DE" dirty="0" err="1">
-                <a:sym typeface="Wingdings" pitchFamily="2" charset="2"/>
-              </a:rPr>
-              <a:t>harder</a:t>
-            </a:r>
-            <a:r>
-              <a:rPr lang="de-DE" dirty="0">
-                <a:sym typeface="Wingdings" pitchFamily="2" charset="2"/>
-              </a:rPr>
-              <a:t>.</a:t>
-            </a:r>
-          </a:p>
-          <a:p>
-            <a:pPr marL="342900" indent="-342900"/>
-            <a:r>
-              <a:rPr lang="de-DE" dirty="0" err="1">
-                <a:sym typeface="Wingdings" pitchFamily="2" charset="2"/>
-              </a:rPr>
-              <a:t>already</a:t>
-            </a:r>
-            <a:r>
-              <a:rPr lang="de-DE" dirty="0">
-                <a:sym typeface="Wingdings" pitchFamily="2" charset="2"/>
-              </a:rPr>
-              <a:t> </a:t>
-            </a:r>
-            <a:r>
-              <a:rPr lang="de-DE" dirty="0" err="1">
-                <a:sym typeface="Wingdings" pitchFamily="2" charset="2"/>
-              </a:rPr>
-              <a:t>blended</a:t>
-            </a:r>
-            <a:r>
-              <a:rPr lang="de-DE" dirty="0">
-                <a:sym typeface="Wingdings" pitchFamily="2" charset="2"/>
-              </a:rPr>
-              <a:t> in </a:t>
-            </a:r>
-            <a:r>
-              <a:rPr lang="de-DE" dirty="0" err="1">
-                <a:sym typeface="Wingdings" pitchFamily="2" charset="2"/>
-              </a:rPr>
-              <a:t>target</a:t>
-            </a:r>
-            <a:r>
-              <a:rPr lang="de-DE" dirty="0">
-                <a:sym typeface="Wingdings" pitchFamily="2" charset="2"/>
-              </a:rPr>
-              <a:t> auto-</a:t>
-            </a:r>
-            <a:r>
-              <a:rPr lang="de-DE" dirty="0" err="1">
-                <a:sym typeface="Wingdings" pitchFamily="2" charset="2"/>
-              </a:rPr>
-              <a:t>correlation</a:t>
-            </a:r>
-            <a:endParaRPr lang="de-DE" dirty="0">
-              <a:sym typeface="Wingdings" pitchFamily="2" charset="2"/>
-            </a:endParaRPr>
-          </a:p>
-          <a:p>
-            <a:pPr marL="342900" indent="-342900"/>
-            <a:r>
-              <a:rPr lang="de-DE" dirty="0" err="1">
-                <a:sym typeface="Wingdings" pitchFamily="2" charset="2"/>
-              </a:rPr>
-              <a:t>delayed</a:t>
-            </a:r>
-            <a:r>
-              <a:rPr lang="de-DE" dirty="0">
-                <a:sym typeface="Wingdings" pitchFamily="2" charset="2"/>
-              </a:rPr>
-              <a:t> </a:t>
-            </a:r>
-            <a:r>
-              <a:rPr lang="de-DE" dirty="0" err="1">
-                <a:sym typeface="Wingdings" pitchFamily="2" charset="2"/>
-              </a:rPr>
-              <a:t>effects</a:t>
-            </a:r>
-            <a:r>
-              <a:rPr lang="de-DE" dirty="0">
-                <a:sym typeface="Wingdings" pitchFamily="2" charset="2"/>
-              </a:rPr>
-              <a:t> </a:t>
-            </a:r>
-            <a:r>
-              <a:rPr lang="de-DE" dirty="0" err="1">
-                <a:sym typeface="Wingdings" pitchFamily="2" charset="2"/>
-              </a:rPr>
-              <a:t>of</a:t>
-            </a:r>
-            <a:r>
-              <a:rPr lang="de-DE" dirty="0">
-                <a:sym typeface="Wingdings" pitchFamily="2" charset="2"/>
-              </a:rPr>
-              <a:t> </a:t>
-            </a:r>
-            <a:r>
-              <a:rPr lang="de-DE" dirty="0" err="1">
-                <a:sym typeface="Wingdings" pitchFamily="2" charset="2"/>
-              </a:rPr>
-              <a:t>short-lived</a:t>
-            </a:r>
-            <a:r>
-              <a:rPr lang="de-DE" dirty="0">
-                <a:sym typeface="Wingdings" pitchFamily="2" charset="2"/>
-              </a:rPr>
-              <a:t> </a:t>
-            </a:r>
-            <a:r>
-              <a:rPr lang="de-DE" dirty="0" err="1">
-                <a:sym typeface="Wingdings" pitchFamily="2" charset="2"/>
-              </a:rPr>
-              <a:t>structures</a:t>
-            </a:r>
-            <a:r>
-              <a:rPr lang="de-DE" dirty="0">
-                <a:sym typeface="Wingdings" pitchFamily="2" charset="2"/>
-              </a:rPr>
-              <a:t>/</a:t>
-            </a:r>
-            <a:r>
-              <a:rPr lang="de-DE" dirty="0" err="1">
-                <a:sym typeface="Wingdings" pitchFamily="2" charset="2"/>
-              </a:rPr>
-              <a:t>trends</a:t>
-            </a:r>
-            <a:endParaRPr lang="en-DE"/>
+              <a:t> </a:t>
+            </a:r>
+            <a:r>
+              <a:rPr lang="en-GB" sz="2400" dirty="0"/>
+              <a:t>no direct causal effects</a:t>
+            </a:r>
+          </a:p>
+          <a:p>
+            <a:pPr marL="0" indent="0">
+              <a:buNone/>
+            </a:pPr>
+            <a:endParaRPr lang="en-GB" sz="2400" dirty="0"/>
+          </a:p>
+          <a:p>
+            <a:pPr marL="0" indent="0">
+              <a:buNone/>
+            </a:pPr>
+            <a:endParaRPr lang="en-GB" sz="2400" dirty="0"/>
+          </a:p>
+          <a:p>
+            <a:pPr marL="0" indent="0">
+              <a:buNone/>
+            </a:pPr>
+            <a:endParaRPr lang="en-GB" sz="2400" dirty="0"/>
+          </a:p>
+          <a:p>
+            <a:pPr marL="0" indent="0">
+              <a:buNone/>
+            </a:pPr>
+            <a:r>
+              <a:rPr lang="en-GB" sz="2400" dirty="0"/>
+              <a:t>advantages of </a:t>
+            </a:r>
+            <a:r>
+              <a:rPr lang="en-DE" sz="2400" dirty="0"/>
+              <a:t>learning direct causal effects from exogenous information</a:t>
+            </a:r>
+            <a:r>
+              <a:rPr lang="en-GB" sz="2400" dirty="0"/>
+              <a:t> instead of confounded auto-correlation:</a:t>
+            </a:r>
+          </a:p>
+          <a:p>
+            <a:r>
+              <a:rPr lang="en-GB" sz="2400" dirty="0"/>
+              <a:t>e</a:t>
+            </a:r>
+            <a:r>
+              <a:rPr lang="en-DE" sz="2400" dirty="0"/>
+              <a:t>xplainability</a:t>
+            </a:r>
+            <a:endParaRPr lang="en-GB" sz="2400" dirty="0"/>
+          </a:p>
+          <a:p>
+            <a:r>
+              <a:rPr lang="en-DE" sz="2400" dirty="0"/>
+              <a:t>long-term forecasting</a:t>
+            </a:r>
+            <a:endParaRPr lang="en-GB" sz="2400" dirty="0"/>
+          </a:p>
+          <a:p>
+            <a:r>
+              <a:rPr lang="en-GB" sz="2400" dirty="0"/>
+              <a:t>predictability of r</a:t>
+            </a:r>
+            <a:r>
+              <a:rPr lang="en-DE" sz="2400" dirty="0"/>
+              <a:t>are events</a:t>
+            </a:r>
           </a:p>
         </p:txBody>
       </p:sp>
       <p:sp>
         <p:nvSpPr>
-          <p:cNvPr id="4" name="Foliennummernplatzhalter 3">
-            <a:extLst>
-              <a:ext uri="{FF2B5EF4-FFF2-40B4-BE49-F238E27FC236}">
-                <a16:creationId xmlns:a16="http://schemas.microsoft.com/office/drawing/2014/main" id="{A12EEBA8-E6A2-4771-F25D-E39DBDA3ECDF}"/>
+          <p:cNvPr id="4" name="Slide Number Placeholder 3">
+            <a:extLst>
+              <a:ext uri="{FF2B5EF4-FFF2-40B4-BE49-F238E27FC236}">
+                <a16:creationId xmlns:a16="http://schemas.microsoft.com/office/drawing/2014/main" id="{933A2B48-7C85-CD10-8C2B-E64B70045133}"/>
               </a:ext>
             </a:extLst>
           </p:cNvPr>
@@ -19058,268 +19452,20 @@
           <a:bodyPr/>
           <a:lstStyle/>
           <a:p>
-            <a:fld id="{D6D392C1-03C4-44BA-9267-8F9A2DA09A60}" type="slidenum">
-              <a:rPr lang="en-GB" smtClean="0"/>
+            <a:fld id="{60A26886-2117-0949-B8A5-D47461AC229C}" type="slidenum">
+              <a:rPr lang="en-DE" smtClean="0"/>
               <a:t>29</a:t>
             </a:fld>
-            <a:endParaRPr lang="en-GB"/>
-          </a:p>
-        </p:txBody>
-      </p:sp>
-      <p:grpSp>
-        <p:nvGrpSpPr>
-          <p:cNvPr id="5" name="Group 10">
-            <a:extLst>
-              <a:ext uri="{FF2B5EF4-FFF2-40B4-BE49-F238E27FC236}">
-                <a16:creationId xmlns:a16="http://schemas.microsoft.com/office/drawing/2014/main" id="{CCECCA1B-40BC-69B7-42A7-9513720CF478}"/>
-              </a:ext>
-            </a:extLst>
-          </p:cNvPr>
-          <p:cNvGrpSpPr/>
-          <p:nvPr/>
-        </p:nvGrpSpPr>
-        <p:grpSpPr>
-          <a:xfrm>
-            <a:off x="6933736" y="2919283"/>
-            <a:ext cx="4170731" cy="3703262"/>
-            <a:chOff x="7666735" y="3343269"/>
-            <a:chExt cx="4170731" cy="3703262"/>
-          </a:xfrm>
-        </p:grpSpPr>
-        <p:pic>
-          <p:nvPicPr>
-            <p:cNvPr id="6" name="Picture 6">
-              <a:extLst>
-                <a:ext uri="{FF2B5EF4-FFF2-40B4-BE49-F238E27FC236}">
-                  <a16:creationId xmlns:a16="http://schemas.microsoft.com/office/drawing/2014/main" id="{5EF6CD9E-FEA9-3F35-838F-34B06689ADBF}"/>
-                </a:ext>
-              </a:extLst>
-            </p:cNvPr>
-            <p:cNvPicPr>
-              <a:picLocks noChangeAspect="1"/>
-            </p:cNvPicPr>
-            <p:nvPr/>
-          </p:nvPicPr>
-          <p:blipFill>
-            <a:blip r:embed="rId2"/>
-            <a:stretch>
-              <a:fillRect/>
-            </a:stretch>
-          </p:blipFill>
-          <p:spPr>
-            <a:xfrm>
-              <a:off x="7666735" y="3446531"/>
-              <a:ext cx="4170731" cy="3600000"/>
-            </a:xfrm>
-            <a:prstGeom prst="rect">
-              <a:avLst/>
-            </a:prstGeom>
-          </p:spPr>
-        </p:pic>
-        <p:sp>
-          <p:nvSpPr>
-            <p:cNvPr id="7" name="TextBox 7">
-              <a:extLst>
-                <a:ext uri="{FF2B5EF4-FFF2-40B4-BE49-F238E27FC236}">
-                  <a16:creationId xmlns:a16="http://schemas.microsoft.com/office/drawing/2014/main" id="{9D207522-8971-9B07-57BF-99453920720B}"/>
-                </a:ext>
-              </a:extLst>
-            </p:cNvPr>
-            <p:cNvSpPr txBox="1"/>
-            <p:nvPr/>
-          </p:nvSpPr>
-          <p:spPr>
-            <a:xfrm>
-              <a:off x="8117134" y="3343269"/>
-              <a:ext cx="3020122" cy="276999"/>
-            </a:xfrm>
-            <a:prstGeom prst="rect">
-              <a:avLst/>
-            </a:prstGeom>
-            <a:solidFill>
-              <a:schemeClr val="bg1"/>
-            </a:solidFill>
-          </p:spPr>
-          <p:txBody>
-            <a:bodyPr wrap="none" rtlCol="0">
-              <a:spAutoFit/>
-            </a:bodyPr>
-            <a:lstStyle/>
-            <a:p>
-              <a:r>
-                <a:rPr lang="en-DE" sz="1200" dirty="0"/>
-                <a:t>one product group summed over all locations</a:t>
-              </a:r>
-            </a:p>
-          </p:txBody>
-        </p:sp>
-      </p:grpSp>
-      <p:sp>
-        <p:nvSpPr>
-          <p:cNvPr id="8" name="TextBox 4">
-            <a:extLst>
-              <a:ext uri="{FF2B5EF4-FFF2-40B4-BE49-F238E27FC236}">
-                <a16:creationId xmlns:a16="http://schemas.microsoft.com/office/drawing/2014/main" id="{FAF67EDA-AA37-FA86-0170-DDFE8883A925}"/>
-              </a:ext>
-            </a:extLst>
-          </p:cNvPr>
-          <p:cNvSpPr txBox="1"/>
-          <p:nvPr/>
-        </p:nvSpPr>
-        <p:spPr>
-          <a:xfrm>
-            <a:off x="7953746" y="4399845"/>
-            <a:ext cx="940450" cy="323165"/>
-          </a:xfrm>
-          <a:prstGeom prst="rect">
-            <a:avLst/>
-          </a:prstGeom>
-          <a:noFill/>
-        </p:spPr>
-        <p:txBody>
-          <a:bodyPr wrap="none" rtlCol="0">
-            <a:spAutoFit/>
-          </a:bodyPr>
-          <a:lstStyle/>
-          <a:p>
-            <a:r>
-              <a:rPr lang="en-DE" sz="1500" dirty="0"/>
-              <a:t>COVID-19</a:t>
-            </a:r>
-          </a:p>
-        </p:txBody>
-      </p:sp>
-      <p:grpSp>
-        <p:nvGrpSpPr>
-          <p:cNvPr id="9" name="Group 11">
-            <a:extLst>
-              <a:ext uri="{FF2B5EF4-FFF2-40B4-BE49-F238E27FC236}">
-                <a16:creationId xmlns:a16="http://schemas.microsoft.com/office/drawing/2014/main" id="{CC066883-EBAC-B90B-ADF1-B5C127F123A5}"/>
-              </a:ext>
-            </a:extLst>
-          </p:cNvPr>
-          <p:cNvGrpSpPr/>
-          <p:nvPr/>
-        </p:nvGrpSpPr>
-        <p:grpSpPr>
-          <a:xfrm>
-            <a:off x="4974657" y="5196771"/>
-            <a:ext cx="1935892" cy="1524704"/>
-            <a:chOff x="261793" y="2511519"/>
-            <a:chExt cx="4482836" cy="3517637"/>
-          </a:xfrm>
-        </p:grpSpPr>
-        <p:pic>
-          <p:nvPicPr>
-            <p:cNvPr id="10" name="Picture 12">
-              <a:extLst>
-                <a:ext uri="{FF2B5EF4-FFF2-40B4-BE49-F238E27FC236}">
-                  <a16:creationId xmlns:a16="http://schemas.microsoft.com/office/drawing/2014/main" id="{CADC99C1-A2A0-E8AD-8F25-64DB98C3456A}"/>
-                </a:ext>
-              </a:extLst>
-            </p:cNvPr>
-            <p:cNvPicPr>
-              <a:picLocks noChangeAspect="1"/>
-            </p:cNvPicPr>
-            <p:nvPr/>
-          </p:nvPicPr>
-          <p:blipFill rotWithShape="1">
-            <a:blip r:embed="rId3">
-              <a:extLst>
-                <a:ext uri="{28A0092B-C50C-407E-A947-70E740481C1C}">
-                  <a14:useLocalDpi xmlns:a14="http://schemas.microsoft.com/office/drawing/2010/main" val="0"/>
-                </a:ext>
-              </a:extLst>
-            </a:blip>
-            <a:srcRect l="13596" t="5038" r="2582" b="15865"/>
-            <a:stretch/>
-          </p:blipFill>
-          <p:spPr>
-            <a:xfrm>
-              <a:off x="261793" y="2511519"/>
-              <a:ext cx="4482836" cy="3517637"/>
-            </a:xfrm>
-            <a:prstGeom prst="rect">
-              <a:avLst/>
-            </a:prstGeom>
-          </p:spPr>
-        </p:pic>
-        <p:pic>
-          <p:nvPicPr>
-            <p:cNvPr id="11" name="Picture 14">
-              <a:extLst>
-                <a:ext uri="{FF2B5EF4-FFF2-40B4-BE49-F238E27FC236}">
-                  <a16:creationId xmlns:a16="http://schemas.microsoft.com/office/drawing/2014/main" id="{F7D79D1C-A4D0-066B-23F9-47C8B23567D0}"/>
-                </a:ext>
-              </a:extLst>
-            </p:cNvPr>
-            <p:cNvPicPr>
-              <a:picLocks noChangeAspect="1"/>
-            </p:cNvPicPr>
-            <p:nvPr/>
-          </p:nvPicPr>
-          <p:blipFill>
-            <a:blip r:embed="rId4"/>
-            <a:stretch>
-              <a:fillRect/>
-            </a:stretch>
-          </p:blipFill>
-          <p:spPr>
-            <a:xfrm>
-              <a:off x="2945721" y="2617453"/>
-              <a:ext cx="1658199" cy="374799"/>
-            </a:xfrm>
-            <a:prstGeom prst="rect">
-              <a:avLst/>
-            </a:prstGeom>
-          </p:spPr>
-        </p:pic>
-      </p:grpSp>
-      <p:sp>
-        <p:nvSpPr>
-          <p:cNvPr id="12" name="TextBox 15">
-            <a:extLst>
-              <a:ext uri="{FF2B5EF4-FFF2-40B4-BE49-F238E27FC236}">
-                <a16:creationId xmlns:a16="http://schemas.microsoft.com/office/drawing/2014/main" id="{A313F9F8-73F7-0119-0E2B-AA56E440B0C8}"/>
-              </a:ext>
-            </a:extLst>
-          </p:cNvPr>
-          <p:cNvSpPr txBox="1"/>
-          <p:nvPr/>
-        </p:nvSpPr>
-        <p:spPr>
-          <a:xfrm>
-            <a:off x="5477517" y="5445476"/>
-            <a:ext cx="900568" cy="369332"/>
-          </a:xfrm>
-          <a:prstGeom prst="rect">
-            <a:avLst/>
-          </a:prstGeom>
-          <a:noFill/>
-        </p:spPr>
-        <p:txBody>
-          <a:bodyPr wrap="none" rtlCol="0">
-            <a:spAutoFit/>
-          </a:bodyPr>
-          <a:lstStyle/>
-          <a:p>
-            <a:r>
-              <a:rPr lang="en-GB" dirty="0"/>
-              <a:t>d</a:t>
-            </a:r>
-            <a:r>
-              <a:rPr lang="en-DE" dirty="0"/>
-              <a:t>ifficult</a:t>
-            </a:r>
+            <a:endParaRPr lang="en-DE"/>
           </a:p>
         </p:txBody>
       </p:sp>
       <p:pic>
         <p:nvPicPr>
-          <p:cNvPr id="13" name="Picture 25">
-            <a:extLst>
-              <a:ext uri="{FF2B5EF4-FFF2-40B4-BE49-F238E27FC236}">
-                <a16:creationId xmlns:a16="http://schemas.microsoft.com/office/drawing/2014/main" id="{EB1B90E8-BF6E-9B98-0AAD-6526C69459DF}"/>
+          <p:cNvPr id="5" name="Picture 4">
+            <a:extLst>
+              <a:ext uri="{FF2B5EF4-FFF2-40B4-BE49-F238E27FC236}">
+                <a16:creationId xmlns:a16="http://schemas.microsoft.com/office/drawing/2014/main" id="{A34AAE7F-6610-0306-5A70-6EDC89A1B7B5}"/>
               </a:ext>
             </a:extLst>
           </p:cNvPr>
@@ -19329,118 +19475,65 @@
           <p:nvPr/>
         </p:nvPicPr>
         <p:blipFill>
-          <a:blip r:embed="rId5"/>
+          <a:blip r:embed="rId2"/>
           <a:stretch>
             <a:fillRect/>
           </a:stretch>
         </p:blipFill>
         <p:spPr>
           <a:xfrm>
-            <a:off x="9375242" y="4570429"/>
-            <a:ext cx="2613101" cy="656456"/>
+            <a:off x="3681281" y="2219824"/>
+            <a:ext cx="2259227" cy="1781470"/>
           </a:xfrm>
           <a:prstGeom prst="rect">
             <a:avLst/>
           </a:prstGeom>
+        </p:spPr>
+      </p:pic>
+      <p:sp>
+        <p:nvSpPr>
+          <p:cNvPr id="6" name="TextBox 5">
+            <a:extLst>
+              <a:ext uri="{FF2B5EF4-FFF2-40B4-BE49-F238E27FC236}">
+                <a16:creationId xmlns:a16="http://schemas.microsoft.com/office/drawing/2014/main" id="{63204A30-3195-923A-0444-BC02357770E1}"/>
+              </a:ext>
+            </a:extLst>
+          </p:cNvPr>
+          <p:cNvSpPr txBox="1"/>
+          <p:nvPr/>
+        </p:nvSpPr>
+        <p:spPr>
+          <a:xfrm>
+            <a:off x="6664410" y="2594923"/>
+            <a:ext cx="4689389" cy="830997"/>
+          </a:xfrm>
+          <a:prstGeom prst="rect">
+            <a:avLst/>
+          </a:prstGeom>
+          <a:noFill/>
           <a:ln>
             <a:solidFill>
               <a:schemeClr val="tx1"/>
             </a:solidFill>
           </a:ln>
         </p:spPr>
-      </p:pic>
-      <p:sp>
-        <p:nvSpPr>
-          <p:cNvPr id="15" name="Textfeld 14">
-            <a:extLst>
-              <a:ext uri="{FF2B5EF4-FFF2-40B4-BE49-F238E27FC236}">
-                <a16:creationId xmlns:a16="http://schemas.microsoft.com/office/drawing/2014/main" id="{54609251-367A-5AC4-04F1-77415B368C07}"/>
-              </a:ext>
-            </a:extLst>
-          </p:cNvPr>
-          <p:cNvSpPr txBox="1"/>
-          <p:nvPr/>
-        </p:nvSpPr>
-        <p:spPr>
-          <a:xfrm>
-            <a:off x="6378085" y="1690688"/>
-            <a:ext cx="5725766" cy="1107996"/>
-          </a:xfrm>
-          <a:prstGeom prst="rect">
-            <a:avLst/>
-          </a:prstGeom>
-          <a:noFill/>
-        </p:spPr>
         <p:txBody>
-          <a:bodyPr wrap="square">
+          <a:bodyPr wrap="square" rtlCol="0">
             <a:spAutoFit/>
           </a:bodyPr>
           <a:lstStyle/>
           <a:p>
             <a:r>
-              <a:rPr lang="en-GB" sz="2200" b="0" dirty="0">
-                <a:sym typeface="Wingdings" pitchFamily="2" charset="2"/>
-              </a:rPr>
-              <a:t> s</a:t>
-            </a:r>
-            <a:r>
-              <a:rPr lang="en-DE" sz="2200" b="0">
-                <a:sym typeface="Wingdings" pitchFamily="2" charset="2"/>
-              </a:rPr>
-              <a:t>imple solution: </a:t>
-            </a:r>
-            <a:r>
-              <a:rPr lang="en-DE" sz="2200">
-                <a:sym typeface="Wingdings" pitchFamily="2" charset="2"/>
-              </a:rPr>
-              <a:t>no use of target auto</a:t>
-            </a:r>
-            <a:r>
-              <a:rPr lang="en-GB" sz="2200" dirty="0">
-                <a:sym typeface="Wingdings" pitchFamily="2" charset="2"/>
-              </a:rPr>
-              <a:t>-</a:t>
-            </a:r>
-            <a:r>
-              <a:rPr lang="en-DE" sz="2200">
-                <a:sym typeface="Wingdings" pitchFamily="2" charset="2"/>
-              </a:rPr>
-              <a:t>correlation in ML model</a:t>
-            </a:r>
-            <a:r>
-              <a:rPr lang="de-DE" sz="2200" dirty="0">
-                <a:sym typeface="Wingdings" pitchFamily="2" charset="2"/>
-              </a:rPr>
-              <a:t>, </a:t>
-            </a:r>
-            <a:r>
-              <a:rPr lang="en-DE" sz="2200" b="0">
-                <a:sym typeface="Wingdings" pitchFamily="2" charset="2"/>
-              </a:rPr>
-              <a:t>but subsequent </a:t>
-            </a:r>
-            <a:r>
-              <a:rPr lang="en-DE" sz="2200">
-                <a:sym typeface="Wingdings" pitchFamily="2" charset="2"/>
-              </a:rPr>
-              <a:t>residual correction </a:t>
-            </a:r>
-            <a:r>
-              <a:rPr lang="en-DE" sz="2200" b="0">
-                <a:sym typeface="Wingdings" pitchFamily="2" charset="2"/>
-              </a:rPr>
-              <a:t>to capture missing trends</a:t>
-            </a:r>
-            <a:endParaRPr lang="en-DE" sz="2200" b="0" dirty="0">
-              <a:sym typeface="Wingdings" pitchFamily="2" charset="2"/>
-            </a:endParaRPr>
+              <a:rPr lang="en-GB" sz="2400" dirty="0"/>
+              <a:t>specific lags such as day of week can be interpreted both ways</a:t>
+            </a:r>
           </a:p>
         </p:txBody>
       </p:sp>
     </p:spTree>
     <p:extLst>
       <p:ext uri="{BB962C8B-B14F-4D97-AF65-F5344CB8AC3E}">
-        <p14:creationId xmlns:p14="http://schemas.microsoft.com/office/powerpoint/2010/main" val="2965666708"/>
+        <p14:creationId xmlns:p14="http://schemas.microsoft.com/office/powerpoint/2010/main" val="3626000077"/>
       </p:ext>
     </p:extLst>
   </p:cSld>
@@ -20108,7 +20201,7 @@
           <p:cNvPr id="2" name="Titel 1">
             <a:extLst>
               <a:ext uri="{FF2B5EF4-FFF2-40B4-BE49-F238E27FC236}">
-                <a16:creationId xmlns:a16="http://schemas.microsoft.com/office/drawing/2014/main" id="{FF755214-F4AB-B4A3-D218-7125EC0E795F}"/>
+                <a16:creationId xmlns:a16="http://schemas.microsoft.com/office/drawing/2014/main" id="{17A3E1BB-0DA0-C62B-983D-34FBE926E369}"/>
               </a:ext>
             </a:extLst>
           </p:cNvPr>
@@ -20119,21 +20212,431 @@
             <p:ph type="title"/>
           </p:nvPr>
         </p:nvSpPr>
+        <p:spPr/>
+        <p:txBody>
+          <a:bodyPr/>
+          <a:lstStyle/>
+          <a:p>
+            <a:r>
+              <a:rPr lang="en-GB" dirty="0"/>
+              <a:t>Beware of (Spurious) Auto-Correlation</a:t>
+            </a:r>
+            <a:endParaRPr lang="de-DE" dirty="0"/>
+          </a:p>
+        </p:txBody>
+      </p:sp>
+      <p:sp>
+        <p:nvSpPr>
+          <p:cNvPr id="3" name="Inhaltsplatzhalter 2">
+            <a:extLst>
+              <a:ext uri="{FF2B5EF4-FFF2-40B4-BE49-F238E27FC236}">
+                <a16:creationId xmlns:a16="http://schemas.microsoft.com/office/drawing/2014/main" id="{0B13D30D-594E-53C3-0DC0-7C70B0D58650}"/>
+              </a:ext>
+            </a:extLst>
+          </p:cNvPr>
+          <p:cNvSpPr>
+            <a:spLocks noGrp="1"/>
+          </p:cNvSpPr>
+          <p:nvPr>
+            <p:ph idx="1"/>
+          </p:nvPr>
+        </p:nvSpPr>
         <p:spPr>
           <a:xfrm>
-            <a:off x="838200" y="136526"/>
-            <a:ext cx="10515600" cy="1211466"/>
+            <a:off x="838200" y="1825625"/>
+            <a:ext cx="5257800" cy="4351338"/>
           </a:xfrm>
         </p:spPr>
         <p:txBody>
-          <a:bodyPr/>
+          <a:bodyPr>
+            <a:normAutofit fontScale="77500" lnSpcReduction="20000"/>
+          </a:bodyPr>
           <a:lstStyle/>
           <a:p>
+            <a:pPr marL="0" indent="0">
+              <a:buNone/>
+            </a:pPr>
             <a:r>
               <a:rPr lang="en-GB" dirty="0"/>
-              <a:t>Deep Learning Methods for Sequential Data</a:t>
+              <a:t>Most </a:t>
+            </a:r>
+            <a:r>
+              <a:rPr lang="en-DE"/>
+              <a:t>forecasting methods rely on</a:t>
+            </a:r>
+            <a:r>
+              <a:rPr lang="de-DE" dirty="0"/>
+              <a:t> </a:t>
+            </a:r>
+            <a:r>
+              <a:rPr lang="de-DE" dirty="0" err="1"/>
+              <a:t>lagged</a:t>
+            </a:r>
+            <a:r>
+              <a:rPr lang="de-DE" dirty="0"/>
+              <a:t> </a:t>
+            </a:r>
+            <a:r>
+              <a:rPr lang="de-DE" dirty="0" err="1"/>
+              <a:t>target</a:t>
+            </a:r>
+            <a:r>
+              <a:rPr lang="de-DE" dirty="0"/>
+              <a:t> </a:t>
+            </a:r>
+            <a:r>
+              <a:rPr lang="de-DE" dirty="0" err="1"/>
+              <a:t>information</a:t>
+            </a:r>
+            <a:r>
+              <a:rPr lang="de-DE" dirty="0"/>
+              <a:t>.</a:t>
+            </a:r>
+          </a:p>
+          <a:p>
+            <a:pPr marL="342900" indent="-342900"/>
+            <a:r>
+              <a:rPr lang="de-DE" dirty="0"/>
+              <a:t>univariate time </a:t>
+            </a:r>
+            <a:r>
+              <a:rPr lang="de-DE" dirty="0" err="1"/>
+              <a:t>series</a:t>
+            </a:r>
+            <a:r>
+              <a:rPr lang="de-DE" dirty="0"/>
+              <a:t> </a:t>
+            </a:r>
+            <a:r>
+              <a:rPr lang="de-DE" dirty="0" err="1"/>
+              <a:t>methods</a:t>
             </a:r>
             <a:endParaRPr lang="de-DE" dirty="0"/>
+          </a:p>
+          <a:p>
+            <a:pPr marL="342900" indent="-342900"/>
+            <a:r>
+              <a:rPr lang="de-DE" dirty="0" err="1"/>
+              <a:t>exponential</a:t>
+            </a:r>
+            <a:r>
+              <a:rPr lang="de-DE" dirty="0"/>
+              <a:t> </a:t>
+            </a:r>
+            <a:r>
+              <a:rPr lang="de-DE" dirty="0" err="1"/>
+              <a:t>smoothing</a:t>
+            </a:r>
+            <a:r>
+              <a:rPr lang="de-DE" dirty="0"/>
+              <a:t> </a:t>
+            </a:r>
+            <a:r>
+              <a:rPr lang="de-DE" dirty="0" err="1"/>
+              <a:t>features</a:t>
+            </a:r>
+            <a:r>
+              <a:rPr lang="de-DE" dirty="0"/>
+              <a:t> in ML </a:t>
+            </a:r>
+            <a:r>
+              <a:rPr lang="de-DE" dirty="0" err="1"/>
+              <a:t>model</a:t>
+            </a:r>
+            <a:endParaRPr lang="de-DE" dirty="0"/>
+          </a:p>
+          <a:p>
+            <a:pPr marL="342900" indent="-342900"/>
+            <a:r>
+              <a:rPr lang="de-DE" dirty="0" err="1"/>
+              <a:t>sequence</a:t>
+            </a:r>
+            <a:r>
+              <a:rPr lang="de-DE" dirty="0"/>
+              <a:t> </a:t>
+            </a:r>
+            <a:r>
+              <a:rPr lang="de-DE" dirty="0" err="1"/>
+              <a:t>modeling</a:t>
+            </a:r>
+            <a:r>
+              <a:rPr lang="de-DE" dirty="0"/>
+              <a:t> in </a:t>
+            </a:r>
+            <a:r>
+              <a:rPr lang="de-DE" dirty="0" err="1"/>
+              <a:t>deep</a:t>
+            </a:r>
+            <a:r>
+              <a:rPr lang="de-DE" dirty="0"/>
+              <a:t> </a:t>
+            </a:r>
+            <a:r>
+              <a:rPr lang="de-DE" dirty="0" err="1"/>
+              <a:t>learning</a:t>
+            </a:r>
+            <a:r>
+              <a:rPr lang="de-DE" dirty="0"/>
+              <a:t> (e.g., </a:t>
+            </a:r>
+            <a:r>
+              <a:rPr lang="de-DE" dirty="0" err="1"/>
+              <a:t>recurrent</a:t>
+            </a:r>
+            <a:r>
+              <a:rPr lang="de-DE" dirty="0"/>
+              <a:t> </a:t>
+            </a:r>
+            <a:r>
+              <a:rPr lang="de-DE" dirty="0" err="1"/>
+              <a:t>neural</a:t>
+            </a:r>
+            <a:r>
+              <a:rPr lang="de-DE" dirty="0"/>
+              <a:t> </a:t>
+            </a:r>
+            <a:r>
+              <a:rPr lang="de-DE" dirty="0" err="1"/>
+              <a:t>networks</a:t>
+            </a:r>
+            <a:r>
+              <a:rPr lang="de-DE" dirty="0"/>
+              <a:t>)</a:t>
+            </a:r>
+          </a:p>
+          <a:p>
+            <a:endParaRPr lang="de-DE" dirty="0"/>
+          </a:p>
+          <a:p>
+            <a:pPr marL="0" indent="0">
+              <a:buNone/>
+            </a:pPr>
+            <a:r>
+              <a:rPr lang="de-DE" dirty="0" err="1">
+                <a:sym typeface="Wingdings" pitchFamily="2" charset="2"/>
+              </a:rPr>
+              <a:t>However</a:t>
+            </a:r>
+            <a:r>
+              <a:rPr lang="de-DE" dirty="0">
+                <a:sym typeface="Wingdings" pitchFamily="2" charset="2"/>
+              </a:rPr>
+              <a:t>, </a:t>
+            </a:r>
+            <a:r>
+              <a:rPr lang="de-DE" dirty="0" err="1">
+                <a:sym typeface="Wingdings" pitchFamily="2" charset="2"/>
+              </a:rPr>
+              <a:t>this</a:t>
+            </a:r>
+            <a:r>
+              <a:rPr lang="de-DE" dirty="0">
+                <a:sym typeface="Wingdings" pitchFamily="2" charset="2"/>
+              </a:rPr>
+              <a:t> </a:t>
+            </a:r>
+            <a:r>
+              <a:rPr lang="de-DE" dirty="0" err="1">
+                <a:sym typeface="Wingdings" pitchFamily="2" charset="2"/>
+              </a:rPr>
+              <a:t>makes</a:t>
+            </a:r>
+            <a:r>
+              <a:rPr lang="de-DE" dirty="0">
+                <a:sym typeface="Wingdings" pitchFamily="2" charset="2"/>
+              </a:rPr>
+              <a:t> </a:t>
+            </a:r>
+            <a:r>
+              <a:rPr lang="de-DE" dirty="0" err="1">
+                <a:sym typeface="Wingdings" pitchFamily="2" charset="2"/>
+              </a:rPr>
+              <a:t>learning</a:t>
+            </a:r>
+            <a:r>
+              <a:rPr lang="de-DE" dirty="0">
+                <a:sym typeface="Wingdings" pitchFamily="2" charset="2"/>
+              </a:rPr>
+              <a:t> </a:t>
+            </a:r>
+            <a:r>
+              <a:rPr lang="de-DE" dirty="0" err="1">
+                <a:sym typeface="Wingdings" pitchFamily="2" charset="2"/>
+              </a:rPr>
+              <a:t>of</a:t>
+            </a:r>
+            <a:r>
+              <a:rPr lang="de-DE" dirty="0">
+                <a:sym typeface="Wingdings" pitchFamily="2" charset="2"/>
+              </a:rPr>
+              <a:t> </a:t>
+            </a:r>
+            <a:r>
+              <a:rPr lang="de-DE" dirty="0" err="1">
+                <a:sym typeface="Wingdings" pitchFamily="2" charset="2"/>
+              </a:rPr>
+              <a:t>exogenous</a:t>
+            </a:r>
+            <a:r>
+              <a:rPr lang="de-DE" dirty="0">
+                <a:sym typeface="Wingdings" pitchFamily="2" charset="2"/>
+              </a:rPr>
+              <a:t> </a:t>
+            </a:r>
+            <a:r>
+              <a:rPr lang="de-DE" dirty="0" err="1">
+                <a:sym typeface="Wingdings" pitchFamily="2" charset="2"/>
+              </a:rPr>
+              <a:t>effects</a:t>
+            </a:r>
+            <a:r>
+              <a:rPr lang="de-DE" dirty="0">
+                <a:sym typeface="Wingdings" pitchFamily="2" charset="2"/>
+              </a:rPr>
+              <a:t> </a:t>
+            </a:r>
+            <a:r>
+              <a:rPr lang="de-DE" dirty="0" err="1">
+                <a:sym typeface="Wingdings" pitchFamily="2" charset="2"/>
+              </a:rPr>
+              <a:t>much</a:t>
+            </a:r>
+            <a:r>
+              <a:rPr lang="de-DE" dirty="0">
+                <a:sym typeface="Wingdings" pitchFamily="2" charset="2"/>
+              </a:rPr>
+              <a:t> </a:t>
+            </a:r>
+            <a:r>
+              <a:rPr lang="de-DE" dirty="0" err="1">
+                <a:sym typeface="Wingdings" pitchFamily="2" charset="2"/>
+              </a:rPr>
+              <a:t>harder</a:t>
+            </a:r>
+            <a:r>
+              <a:rPr lang="de-DE" dirty="0">
+                <a:sym typeface="Wingdings" pitchFamily="2" charset="2"/>
+              </a:rPr>
+              <a:t>.</a:t>
+            </a:r>
+          </a:p>
+          <a:p>
+            <a:pPr marL="342900" indent="-342900"/>
+            <a:r>
+              <a:rPr lang="de-DE" dirty="0" err="1">
+                <a:sym typeface="Wingdings" pitchFamily="2" charset="2"/>
+              </a:rPr>
+              <a:t>already</a:t>
+            </a:r>
+            <a:r>
+              <a:rPr lang="de-DE" dirty="0">
+                <a:sym typeface="Wingdings" pitchFamily="2" charset="2"/>
+              </a:rPr>
+              <a:t> </a:t>
+            </a:r>
+            <a:r>
+              <a:rPr lang="de-DE" dirty="0" err="1">
+                <a:sym typeface="Wingdings" pitchFamily="2" charset="2"/>
+              </a:rPr>
+              <a:t>blended</a:t>
+            </a:r>
+            <a:r>
+              <a:rPr lang="de-DE" dirty="0">
+                <a:sym typeface="Wingdings" pitchFamily="2" charset="2"/>
+              </a:rPr>
+              <a:t> in </a:t>
+            </a:r>
+            <a:r>
+              <a:rPr lang="de-DE" dirty="0" err="1">
+                <a:sym typeface="Wingdings" pitchFamily="2" charset="2"/>
+              </a:rPr>
+              <a:t>target</a:t>
+            </a:r>
+            <a:r>
+              <a:rPr lang="de-DE" dirty="0">
+                <a:sym typeface="Wingdings" pitchFamily="2" charset="2"/>
+              </a:rPr>
+              <a:t> auto-</a:t>
+            </a:r>
+            <a:r>
+              <a:rPr lang="de-DE" dirty="0" err="1">
+                <a:sym typeface="Wingdings" pitchFamily="2" charset="2"/>
+              </a:rPr>
+              <a:t>correlation</a:t>
+            </a:r>
+            <a:endParaRPr lang="de-DE" dirty="0">
+              <a:sym typeface="Wingdings" pitchFamily="2" charset="2"/>
+            </a:endParaRPr>
+          </a:p>
+          <a:p>
+            <a:pPr marL="342900" indent="-342900"/>
+            <a:r>
+              <a:rPr lang="de-DE" dirty="0" err="1">
+                <a:sym typeface="Wingdings" pitchFamily="2" charset="2"/>
+              </a:rPr>
+              <a:t>delayed</a:t>
+            </a:r>
+            <a:r>
+              <a:rPr lang="de-DE" dirty="0">
+                <a:sym typeface="Wingdings" pitchFamily="2" charset="2"/>
+              </a:rPr>
+              <a:t> </a:t>
+            </a:r>
+            <a:r>
+              <a:rPr lang="de-DE" dirty="0" err="1">
+                <a:sym typeface="Wingdings" pitchFamily="2" charset="2"/>
+              </a:rPr>
+              <a:t>effects</a:t>
+            </a:r>
+            <a:r>
+              <a:rPr lang="de-DE" dirty="0">
+                <a:sym typeface="Wingdings" pitchFamily="2" charset="2"/>
+              </a:rPr>
+              <a:t> </a:t>
+            </a:r>
+            <a:r>
+              <a:rPr lang="de-DE" dirty="0" err="1">
+                <a:sym typeface="Wingdings" pitchFamily="2" charset="2"/>
+              </a:rPr>
+              <a:t>of</a:t>
+            </a:r>
+            <a:r>
+              <a:rPr lang="de-DE" dirty="0">
+                <a:sym typeface="Wingdings" pitchFamily="2" charset="2"/>
+              </a:rPr>
+              <a:t> </a:t>
+            </a:r>
+            <a:r>
+              <a:rPr lang="de-DE" dirty="0" err="1">
+                <a:sym typeface="Wingdings" pitchFamily="2" charset="2"/>
+              </a:rPr>
+              <a:t>short-lived</a:t>
+            </a:r>
+            <a:r>
+              <a:rPr lang="de-DE" dirty="0">
+                <a:sym typeface="Wingdings" pitchFamily="2" charset="2"/>
+              </a:rPr>
+              <a:t> </a:t>
+            </a:r>
+            <a:r>
+              <a:rPr lang="de-DE" dirty="0" err="1">
+                <a:sym typeface="Wingdings" pitchFamily="2" charset="2"/>
+              </a:rPr>
+              <a:t>structures</a:t>
+            </a:r>
+            <a:r>
+              <a:rPr lang="de-DE" dirty="0">
+                <a:sym typeface="Wingdings" pitchFamily="2" charset="2"/>
+              </a:rPr>
+              <a:t>/</a:t>
+            </a:r>
+            <a:r>
+              <a:rPr lang="de-DE" dirty="0" err="1">
+                <a:sym typeface="Wingdings" pitchFamily="2" charset="2"/>
+              </a:rPr>
+              <a:t>trends</a:t>
+            </a:r>
+            <a:endParaRPr lang="en-DE"/>
           </a:p>
         </p:txBody>
       </p:sp>
@@ -20142,7 +20645,7 @@
           <p:cNvPr id="4" name="Foliennummernplatzhalter 3">
             <a:extLst>
               <a:ext uri="{FF2B5EF4-FFF2-40B4-BE49-F238E27FC236}">
-                <a16:creationId xmlns:a16="http://schemas.microsoft.com/office/drawing/2014/main" id="{8FB633F3-BACE-5C81-B16F-2174DF266FBC}"/>
+                <a16:creationId xmlns:a16="http://schemas.microsoft.com/office/drawing/2014/main" id="{A12EEBA8-E6A2-4771-F25D-E39DBDA3ECDF}"/>
               </a:ext>
             </a:extLst>
           </p:cNvPr>
@@ -20166,12 +20669,100 @@
           </a:p>
         </p:txBody>
       </p:sp>
+      <p:grpSp>
+        <p:nvGrpSpPr>
+          <p:cNvPr id="5" name="Group 10">
+            <a:extLst>
+              <a:ext uri="{FF2B5EF4-FFF2-40B4-BE49-F238E27FC236}">
+                <a16:creationId xmlns:a16="http://schemas.microsoft.com/office/drawing/2014/main" id="{CCECCA1B-40BC-69B7-42A7-9513720CF478}"/>
+              </a:ext>
+            </a:extLst>
+          </p:cNvPr>
+          <p:cNvGrpSpPr/>
+          <p:nvPr/>
+        </p:nvGrpSpPr>
+        <p:grpSpPr>
+          <a:xfrm>
+            <a:off x="6933736" y="2919283"/>
+            <a:ext cx="4170731" cy="3703262"/>
+            <a:chOff x="7666735" y="3343269"/>
+            <a:chExt cx="4170731" cy="3703262"/>
+          </a:xfrm>
+        </p:grpSpPr>
+        <p:pic>
+          <p:nvPicPr>
+            <p:cNvPr id="6" name="Picture 6">
+              <a:extLst>
+                <a:ext uri="{FF2B5EF4-FFF2-40B4-BE49-F238E27FC236}">
+                  <a16:creationId xmlns:a16="http://schemas.microsoft.com/office/drawing/2014/main" id="{5EF6CD9E-FEA9-3F35-838F-34B06689ADBF}"/>
+                </a:ext>
+              </a:extLst>
+            </p:cNvPr>
+            <p:cNvPicPr>
+              <a:picLocks noChangeAspect="1"/>
+            </p:cNvPicPr>
+            <p:nvPr/>
+          </p:nvPicPr>
+          <p:blipFill>
+            <a:blip r:embed="rId2"/>
+            <a:stretch>
+              <a:fillRect/>
+            </a:stretch>
+          </p:blipFill>
+          <p:spPr>
+            <a:xfrm>
+              <a:off x="7666735" y="3446531"/>
+              <a:ext cx="4170731" cy="3600000"/>
+            </a:xfrm>
+            <a:prstGeom prst="rect">
+              <a:avLst/>
+            </a:prstGeom>
+          </p:spPr>
+        </p:pic>
+        <p:sp>
+          <p:nvSpPr>
+            <p:cNvPr id="7" name="TextBox 7">
+              <a:extLst>
+                <a:ext uri="{FF2B5EF4-FFF2-40B4-BE49-F238E27FC236}">
+                  <a16:creationId xmlns:a16="http://schemas.microsoft.com/office/drawing/2014/main" id="{9D207522-8971-9B07-57BF-99453920720B}"/>
+                </a:ext>
+              </a:extLst>
+            </p:cNvPr>
+            <p:cNvSpPr txBox="1"/>
+            <p:nvPr/>
+          </p:nvSpPr>
+          <p:spPr>
+            <a:xfrm>
+              <a:off x="8117134" y="3343269"/>
+              <a:ext cx="3020122" cy="276999"/>
+            </a:xfrm>
+            <a:prstGeom prst="rect">
+              <a:avLst/>
+            </a:prstGeom>
+            <a:solidFill>
+              <a:schemeClr val="bg1"/>
+            </a:solidFill>
+          </p:spPr>
+          <p:txBody>
+            <a:bodyPr wrap="none" rtlCol="0">
+              <a:spAutoFit/>
+            </a:bodyPr>
+            <a:lstStyle/>
+            <a:p>
+              <a:r>
+                <a:rPr lang="en-DE" sz="1200" dirty="0"/>
+                <a:t>one product group summed over all locations</a:t>
+              </a:r>
+            </a:p>
+          </p:txBody>
+        </p:sp>
+      </p:grpSp>
       <p:sp>
         <p:nvSpPr>
-          <p:cNvPr id="5" name="TextBox 8">
-            <a:extLst>
-              <a:ext uri="{FF2B5EF4-FFF2-40B4-BE49-F238E27FC236}">
-                <a16:creationId xmlns:a16="http://schemas.microsoft.com/office/drawing/2014/main" id="{BEF61BC9-E098-C36C-54F9-01353DF1B4B4}"/>
+          <p:cNvPr id="8" name="TextBox 4">
+            <a:extLst>
+              <a:ext uri="{FF2B5EF4-FFF2-40B4-BE49-F238E27FC236}">
+                <a16:creationId xmlns:a16="http://schemas.microsoft.com/office/drawing/2014/main" id="{FAF67EDA-AA37-FA86-0170-DDFE8883A925}"/>
               </a:ext>
             </a:extLst>
           </p:cNvPr>
@@ -20180,334 +20771,8 @@
         </p:nvSpPr>
         <p:spPr>
           <a:xfrm>
-            <a:off x="8358316" y="2167087"/>
-            <a:ext cx="3561835" cy="4247317"/>
-          </a:xfrm>
-          <a:prstGeom prst="rect">
-            <a:avLst/>
-          </a:prstGeom>
-          <a:noFill/>
-          <a:ln>
-            <a:solidFill>
-              <a:schemeClr val="tx1"/>
-            </a:solidFill>
-          </a:ln>
-        </p:spPr>
-        <p:txBody>
-          <a:bodyPr wrap="square" rtlCol="0">
-            <a:spAutoFit/>
-          </a:bodyPr>
-          <a:lstStyle/>
-          <a:p>
-            <a:r>
-              <a:rPr lang="en-GB" b="1" dirty="0"/>
-              <a:t>transformers</a:t>
-            </a:r>
-            <a:endParaRPr lang="en-GB" dirty="0"/>
-          </a:p>
-          <a:p>
-            <a:endParaRPr lang="en-GB" dirty="0"/>
-          </a:p>
-          <a:p>
-            <a:pPr marL="342900" indent="-342900">
-              <a:buFont typeface="Arial" panose="020B0604020202020204" pitchFamily="34" charset="0"/>
-              <a:buChar char="•"/>
-            </a:pPr>
-            <a:r>
-              <a:rPr lang="en-GB" dirty="0"/>
-              <a:t>main application NLP (largely replaced RNNs), but also computer vision</a:t>
-            </a:r>
-          </a:p>
-          <a:p>
-            <a:pPr marL="342900" indent="-342900">
-              <a:buFont typeface="Arial" panose="020B0604020202020204" pitchFamily="34" charset="0"/>
-              <a:buChar char="•"/>
-            </a:pPr>
-            <a:r>
-              <a:rPr lang="en-GB" dirty="0"/>
-              <a:t>time series data as directed graph (attention in edges)</a:t>
-            </a:r>
-          </a:p>
-          <a:p>
-            <a:endParaRPr lang="en-GB" dirty="0"/>
-          </a:p>
-          <a:p>
-            <a:pPr marL="342900" indent="-342900">
-              <a:buFont typeface="Arial" panose="020B0604020202020204" pitchFamily="34" charset="0"/>
-              <a:buChar char="•"/>
-            </a:pPr>
-            <a:r>
-              <a:rPr lang="en-GB" dirty="0"/>
-              <a:t>masked self-attention to focus on relevant past time steps</a:t>
-            </a:r>
-            <a:r>
-              <a:rPr lang="en-GB" dirty="0">
-                <a:sym typeface="Wingdings" panose="05000000000000000000" pitchFamily="2" charset="2"/>
-              </a:rPr>
-              <a:t> and positional encoding to include order of sequence</a:t>
-            </a:r>
-          </a:p>
-          <a:p>
-            <a:endParaRPr lang="en-GB" dirty="0">
-              <a:sym typeface="Wingdings" panose="05000000000000000000" pitchFamily="2" charset="2"/>
-            </a:endParaRPr>
-          </a:p>
-          <a:p>
-            <a:pPr marL="342900" indent="-342900">
-              <a:buFont typeface="Arial" panose="020B0604020202020204" pitchFamily="34" charset="0"/>
-              <a:buChar char="•"/>
-            </a:pPr>
-            <a:r>
-              <a:rPr lang="en-GB" dirty="0">
-                <a:sym typeface="Wingdings" panose="05000000000000000000" pitchFamily="2" charset="2"/>
-              </a:rPr>
-              <a:t>multivariate time series model via input concatenation</a:t>
-            </a:r>
-            <a:endParaRPr lang="en-GB" dirty="0"/>
-          </a:p>
-        </p:txBody>
-      </p:sp>
-      <p:sp>
-        <p:nvSpPr>
-          <p:cNvPr id="6" name="TextBox 9">
-            <a:extLst>
-              <a:ext uri="{FF2B5EF4-FFF2-40B4-BE49-F238E27FC236}">
-                <a16:creationId xmlns:a16="http://schemas.microsoft.com/office/drawing/2014/main" id="{A2E3D8AC-860F-753F-6D07-5A1A7C99D049}"/>
-              </a:ext>
-            </a:extLst>
-          </p:cNvPr>
-          <p:cNvSpPr txBox="1"/>
-          <p:nvPr/>
-        </p:nvSpPr>
-        <p:spPr>
-          <a:xfrm>
-            <a:off x="4514335" y="2166968"/>
-            <a:ext cx="3643184" cy="4247317"/>
-          </a:xfrm>
-          <a:prstGeom prst="rect">
-            <a:avLst/>
-          </a:prstGeom>
-          <a:noFill/>
-          <a:ln>
-            <a:solidFill>
-              <a:schemeClr val="tx1"/>
-            </a:solidFill>
-          </a:ln>
-        </p:spPr>
-        <p:txBody>
-          <a:bodyPr wrap="square" rtlCol="0">
-            <a:spAutoFit/>
-          </a:bodyPr>
-          <a:lstStyle/>
-          <a:p>
-            <a:r>
-              <a:rPr lang="en-GB" b="1" dirty="0"/>
-              <a:t>recurrent neural networks (RNN)</a:t>
-            </a:r>
-            <a:endParaRPr lang="en-GB" dirty="0"/>
-          </a:p>
-          <a:p>
-            <a:endParaRPr lang="en-GB" dirty="0"/>
-          </a:p>
-          <a:p>
-            <a:pPr marL="342900" indent="-342900">
-              <a:buFont typeface="Arial" panose="020B0604020202020204" pitchFamily="34" charset="0"/>
-              <a:buChar char="•"/>
-            </a:pPr>
-            <a:r>
-              <a:rPr lang="en-GB" dirty="0"/>
-              <a:t>main application natural language processing (NLP): sequence of words (tokens)</a:t>
-            </a:r>
-          </a:p>
-          <a:p>
-            <a:pPr marL="342900" indent="-342900">
-              <a:buFont typeface="Arial" panose="020B0604020202020204" pitchFamily="34" charset="0"/>
-              <a:buChar char="•"/>
-            </a:pPr>
-            <a:r>
-              <a:rPr lang="en-GB" dirty="0"/>
-              <a:t>time series data as time-tagged stream</a:t>
-            </a:r>
-          </a:p>
-          <a:p>
-            <a:endParaRPr lang="en-GB" dirty="0"/>
-          </a:p>
-          <a:p>
-            <a:pPr marL="342900" indent="-342900">
-              <a:buFont typeface="Arial" panose="020B0604020202020204" pitchFamily="34" charset="0"/>
-              <a:buChar char="•"/>
-            </a:pPr>
-            <a:r>
-              <a:rPr lang="en-GB" dirty="0"/>
-              <a:t>parameter sharing via recurrent nodes </a:t>
-            </a:r>
-            <a:r>
-              <a:rPr lang="en-GB" dirty="0">
-                <a:sym typeface="Wingdings" panose="05000000000000000000" pitchFamily="2" charset="2"/>
-              </a:rPr>
-              <a:t> context-awareness (input from past activations)</a:t>
-            </a:r>
-          </a:p>
-          <a:p>
-            <a:pPr marL="342900" indent="-342900">
-              <a:buFont typeface="Arial" panose="020B0604020202020204" pitchFamily="34" charset="0"/>
-              <a:buChar char="•"/>
-            </a:pPr>
-            <a:r>
-              <a:rPr lang="en-GB" dirty="0">
-                <a:sym typeface="Wingdings" panose="05000000000000000000" pitchFamily="2" charset="2"/>
-              </a:rPr>
-              <a:t>variable-length time series</a:t>
-            </a:r>
-          </a:p>
-          <a:p>
-            <a:endParaRPr lang="en-GB" dirty="0">
-              <a:sym typeface="Wingdings" panose="05000000000000000000" pitchFamily="2" charset="2"/>
-            </a:endParaRPr>
-          </a:p>
-          <a:p>
-            <a:pPr marL="342900" indent="-342900">
-              <a:buFont typeface="Arial" panose="020B0604020202020204" pitchFamily="34" charset="0"/>
-              <a:buChar char="•"/>
-            </a:pPr>
-            <a:r>
-              <a:rPr lang="en-GB" dirty="0">
-                <a:sym typeface="Wingdings" panose="05000000000000000000" pitchFamily="2" charset="2"/>
-              </a:rPr>
-              <a:t>multivariate time series model via more input nodes</a:t>
-            </a:r>
-            <a:endParaRPr lang="en-GB" dirty="0"/>
-          </a:p>
-        </p:txBody>
-      </p:sp>
-      <p:sp>
-        <p:nvSpPr>
-          <p:cNvPr id="7" name="TextBox 10">
-            <a:extLst>
-              <a:ext uri="{FF2B5EF4-FFF2-40B4-BE49-F238E27FC236}">
-                <a16:creationId xmlns:a16="http://schemas.microsoft.com/office/drawing/2014/main" id="{1703A7CC-7C53-BA6F-5461-43E31C659C45}"/>
-              </a:ext>
-            </a:extLst>
-          </p:cNvPr>
-          <p:cNvSpPr txBox="1"/>
-          <p:nvPr/>
-        </p:nvSpPr>
-        <p:spPr>
-          <a:xfrm>
-            <a:off x="271849" y="2178988"/>
-            <a:ext cx="4041689" cy="4247317"/>
-          </a:xfrm>
-          <a:prstGeom prst="rect">
-            <a:avLst/>
-          </a:prstGeom>
-          <a:noFill/>
-          <a:ln>
-            <a:solidFill>
-              <a:schemeClr val="tx1"/>
-            </a:solidFill>
-          </a:ln>
-        </p:spPr>
-        <p:txBody>
-          <a:bodyPr wrap="square" rtlCol="0">
-            <a:spAutoFit/>
-          </a:bodyPr>
-          <a:lstStyle/>
-          <a:p>
-            <a:r>
-              <a:rPr lang="en-GB" b="1" dirty="0"/>
-              <a:t>convolutional neural networks (CNN)</a:t>
-            </a:r>
-            <a:endParaRPr lang="en-GB" dirty="0"/>
-          </a:p>
-          <a:p>
-            <a:endParaRPr lang="en-GB" dirty="0"/>
-          </a:p>
-          <a:p>
-            <a:pPr marL="342900" indent="-342900">
-              <a:buFont typeface="Arial" panose="020B0604020202020204" pitchFamily="34" charset="0"/>
-              <a:buChar char="•"/>
-            </a:pPr>
-            <a:r>
-              <a:rPr lang="en-GB" dirty="0"/>
-              <a:t>main application computer vision: images correspond to regular 2D grids of data (pixels)</a:t>
-            </a:r>
-          </a:p>
-          <a:p>
-            <a:pPr marL="342900" indent="-342900">
-              <a:buFont typeface="Arial" panose="020B0604020202020204" pitchFamily="34" charset="0"/>
-              <a:buChar char="•"/>
-            </a:pPr>
-            <a:r>
-              <a:rPr lang="en-GB" dirty="0"/>
-              <a:t>time series data as 1D grid at regular time intervals</a:t>
-            </a:r>
-          </a:p>
-          <a:p>
-            <a:endParaRPr lang="en-GB" dirty="0"/>
-          </a:p>
-          <a:p>
-            <a:pPr marL="342900" indent="-342900">
-              <a:buFont typeface="Arial" panose="020B0604020202020204" pitchFamily="34" charset="0"/>
-              <a:buChar char="•"/>
-            </a:pPr>
-            <a:r>
-              <a:rPr lang="en-GB" dirty="0"/>
-              <a:t>parameter sharing via convolutions (and pooling) </a:t>
-            </a:r>
-            <a:r>
-              <a:rPr lang="en-GB" dirty="0">
-                <a:sym typeface="Wingdings" panose="05000000000000000000" pitchFamily="2" charset="2"/>
-              </a:rPr>
-              <a:t> highly regularized feed-forward networks</a:t>
-            </a:r>
-          </a:p>
-          <a:p>
-            <a:pPr marL="342900" indent="-342900">
-              <a:buFont typeface="Arial" panose="020B0604020202020204" pitchFamily="34" charset="0"/>
-              <a:buChar char="•"/>
-            </a:pPr>
-            <a:r>
-              <a:rPr lang="en-GB" dirty="0">
-                <a:sym typeface="Wingdings" panose="05000000000000000000" pitchFamily="2" charset="2"/>
-              </a:rPr>
-              <a:t>fixed time window (kernel)</a:t>
-            </a:r>
-          </a:p>
-          <a:p>
-            <a:endParaRPr lang="en-GB" dirty="0">
-              <a:sym typeface="Wingdings" panose="05000000000000000000" pitchFamily="2" charset="2"/>
-            </a:endParaRPr>
-          </a:p>
-          <a:p>
-            <a:pPr marL="342900" indent="-342900">
-              <a:buFont typeface="Arial" panose="020B0604020202020204" pitchFamily="34" charset="0"/>
-              <a:buChar char="•"/>
-            </a:pPr>
-            <a:r>
-              <a:rPr lang="en-GB" dirty="0">
-                <a:sym typeface="Wingdings" panose="05000000000000000000" pitchFamily="2" charset="2"/>
-              </a:rPr>
-              <a:t>multivariate time series model via different input channels</a:t>
-            </a:r>
-          </a:p>
-        </p:txBody>
-      </p:sp>
-      <p:sp>
-        <p:nvSpPr>
-          <p:cNvPr id="8" name="TextBox 12">
-            <a:extLst>
-              <a:ext uri="{FF2B5EF4-FFF2-40B4-BE49-F238E27FC236}">
-                <a16:creationId xmlns:a16="http://schemas.microsoft.com/office/drawing/2014/main" id="{90177408-7417-E9F5-9CB7-FC51948E81C1}"/>
-              </a:ext>
-            </a:extLst>
-          </p:cNvPr>
-          <p:cNvSpPr txBox="1"/>
-          <p:nvPr/>
-        </p:nvSpPr>
-        <p:spPr>
-          <a:xfrm>
-            <a:off x="271848" y="1177870"/>
-            <a:ext cx="11648303" cy="738664"/>
+            <a:off x="7953746" y="4399845"/>
+            <a:ext cx="940450" cy="323165"/>
           </a:xfrm>
           <a:prstGeom prst="rect">
             <a:avLst/>
@@ -20515,108 +20780,270 @@
           <a:noFill/>
         </p:spPr>
         <p:txBody>
-          <a:bodyPr wrap="square" rtlCol="0">
+          <a:bodyPr wrap="none" rtlCol="0">
             <a:spAutoFit/>
           </a:bodyPr>
           <a:lstStyle/>
           <a:p>
-            <a:pPr algn="ctr"/>
-            <a:r>
-              <a:rPr lang="en-GB" sz="2400" dirty="0">
-                <a:sym typeface="Wingdings" panose="05000000000000000000" pitchFamily="2" charset="2"/>
+            <a:r>
+              <a:rPr lang="en-DE" sz="1500" dirty="0"/>
+              <a:t>COVID-19</a:t>
+            </a:r>
+          </a:p>
+        </p:txBody>
+      </p:sp>
+      <p:grpSp>
+        <p:nvGrpSpPr>
+          <p:cNvPr id="9" name="Group 11">
+            <a:extLst>
+              <a:ext uri="{FF2B5EF4-FFF2-40B4-BE49-F238E27FC236}">
+                <a16:creationId xmlns:a16="http://schemas.microsoft.com/office/drawing/2014/main" id="{CC066883-EBAC-B90B-ADF1-B5C127F123A5}"/>
+              </a:ext>
+            </a:extLst>
+          </p:cNvPr>
+          <p:cNvGrpSpPr/>
+          <p:nvPr/>
+        </p:nvGrpSpPr>
+        <p:grpSpPr>
+          <a:xfrm>
+            <a:off x="4974657" y="5196771"/>
+            <a:ext cx="1935892" cy="1524704"/>
+            <a:chOff x="261793" y="2511519"/>
+            <a:chExt cx="4482836" cy="3517637"/>
+          </a:xfrm>
+        </p:grpSpPr>
+        <p:pic>
+          <p:nvPicPr>
+            <p:cNvPr id="10" name="Picture 12">
+              <a:extLst>
+                <a:ext uri="{FF2B5EF4-FFF2-40B4-BE49-F238E27FC236}">
+                  <a16:creationId xmlns:a16="http://schemas.microsoft.com/office/drawing/2014/main" id="{CADC99C1-A2A0-E8AD-8F25-64DB98C3456A}"/>
+                </a:ext>
+              </a:extLst>
+            </p:cNvPr>
+            <p:cNvPicPr>
+              <a:picLocks noChangeAspect="1"/>
+            </p:cNvPicPr>
+            <p:nvPr/>
+          </p:nvPicPr>
+          <p:blipFill rotWithShape="1">
+            <a:blip r:embed="rId3">
+              <a:extLst>
+                <a:ext uri="{28A0092B-C50C-407E-A947-70E740481C1C}">
+                  <a14:useLocalDpi xmlns:a14="http://schemas.microsoft.com/office/drawing/2010/main" val="0"/>
+                </a:ext>
+              </a:extLst>
+            </a:blip>
+            <a:srcRect l="13596" t="5038" r="2582" b="15865"/>
+            <a:stretch/>
+          </p:blipFill>
+          <p:spPr>
+            <a:xfrm>
+              <a:off x="261793" y="2511519"/>
+              <a:ext cx="4482836" cy="3517637"/>
+            </a:xfrm>
+            <a:prstGeom prst="rect">
+              <a:avLst/>
+            </a:prstGeom>
+          </p:spPr>
+        </p:pic>
+        <p:pic>
+          <p:nvPicPr>
+            <p:cNvPr id="11" name="Picture 14">
+              <a:extLst>
+                <a:ext uri="{FF2B5EF4-FFF2-40B4-BE49-F238E27FC236}">
+                  <a16:creationId xmlns:a16="http://schemas.microsoft.com/office/drawing/2014/main" id="{F7D79D1C-A4D0-066B-23F9-47C8B23567D0}"/>
+                </a:ext>
+              </a:extLst>
+            </p:cNvPr>
+            <p:cNvPicPr>
+              <a:picLocks noChangeAspect="1"/>
+            </p:cNvPicPr>
+            <p:nvPr/>
+          </p:nvPicPr>
+          <p:blipFill>
+            <a:blip r:embed="rId4"/>
+            <a:stretch>
+              <a:fillRect/>
+            </a:stretch>
+          </p:blipFill>
+          <p:spPr>
+            <a:xfrm>
+              <a:off x="2945721" y="2617453"/>
+              <a:ext cx="1658199" cy="374799"/>
+            </a:xfrm>
+            <a:prstGeom prst="rect">
+              <a:avLst/>
+            </a:prstGeom>
+          </p:spPr>
+        </p:pic>
+      </p:grpSp>
+      <p:sp>
+        <p:nvSpPr>
+          <p:cNvPr id="12" name="TextBox 15">
+            <a:extLst>
+              <a:ext uri="{FF2B5EF4-FFF2-40B4-BE49-F238E27FC236}">
+                <a16:creationId xmlns:a16="http://schemas.microsoft.com/office/drawing/2014/main" id="{A313F9F8-73F7-0119-0E2B-AA56E440B0C8}"/>
+              </a:ext>
+            </a:extLst>
+          </p:cNvPr>
+          <p:cNvSpPr txBox="1"/>
+          <p:nvPr/>
+        </p:nvSpPr>
+        <p:spPr>
+          <a:xfrm>
+            <a:off x="5477517" y="5445476"/>
+            <a:ext cx="900568" cy="369332"/>
+          </a:xfrm>
+          <a:prstGeom prst="rect">
+            <a:avLst/>
+          </a:prstGeom>
+          <a:noFill/>
+        </p:spPr>
+        <p:txBody>
+          <a:bodyPr wrap="none" rtlCol="0">
+            <a:spAutoFit/>
+          </a:bodyPr>
+          <a:lstStyle/>
+          <a:p>
+            <a:r>
+              <a:rPr lang="en-GB" dirty="0"/>
+              <a:t>d</a:t>
+            </a:r>
+            <a:r>
+              <a:rPr lang="en-DE" dirty="0"/>
+              <a:t>ifficult</a:t>
+            </a:r>
+          </a:p>
+        </p:txBody>
+      </p:sp>
+      <p:pic>
+        <p:nvPicPr>
+          <p:cNvPr id="13" name="Picture 25">
+            <a:extLst>
+              <a:ext uri="{FF2B5EF4-FFF2-40B4-BE49-F238E27FC236}">
+                <a16:creationId xmlns:a16="http://schemas.microsoft.com/office/drawing/2014/main" id="{EB1B90E8-BF6E-9B98-0AAD-6526C69459DF}"/>
+              </a:ext>
+            </a:extLst>
+          </p:cNvPr>
+          <p:cNvPicPr>
+            <a:picLocks noChangeAspect="1"/>
+          </p:cNvPicPr>
+          <p:nvPr/>
+        </p:nvPicPr>
+        <p:blipFill>
+          <a:blip r:embed="rId5"/>
+          <a:stretch>
+            <a:fillRect/>
+          </a:stretch>
+        </p:blipFill>
+        <p:spPr>
+          <a:xfrm>
+            <a:off x="9375242" y="4570429"/>
+            <a:ext cx="2613101" cy="656456"/>
+          </a:xfrm>
+          <a:prstGeom prst="rect">
+            <a:avLst/>
+          </a:prstGeom>
+          <a:ln>
+            <a:solidFill>
+              <a:schemeClr val="tx1"/>
+            </a:solidFill>
+          </a:ln>
+        </p:spPr>
+      </p:pic>
+      <p:sp>
+        <p:nvSpPr>
+          <p:cNvPr id="15" name="Textfeld 14">
+            <a:extLst>
+              <a:ext uri="{FF2B5EF4-FFF2-40B4-BE49-F238E27FC236}">
+                <a16:creationId xmlns:a16="http://schemas.microsoft.com/office/drawing/2014/main" id="{54609251-367A-5AC4-04F1-77415B368C07}"/>
+              </a:ext>
+            </a:extLst>
+          </p:cNvPr>
+          <p:cNvSpPr txBox="1"/>
+          <p:nvPr/>
+        </p:nvSpPr>
+        <p:spPr>
+          <a:xfrm>
+            <a:off x="6378085" y="1690688"/>
+            <a:ext cx="5725766" cy="1107996"/>
+          </a:xfrm>
+          <a:prstGeom prst="rect">
+            <a:avLst/>
+          </a:prstGeom>
+          <a:noFill/>
+        </p:spPr>
+        <p:txBody>
+          <a:bodyPr wrap="square">
+            <a:spAutoFit/>
+          </a:bodyPr>
+          <a:lstStyle/>
+          <a:p>
+            <a:r>
+              <a:rPr lang="en-GB" sz="2200" b="0" dirty="0">
+                <a:sym typeface="Wingdings" pitchFamily="2" charset="2"/>
               </a:rPr>
-              <a:t></a:t>
-            </a:r>
-            <a:r>
-              <a:rPr lang="en-GB" sz="2400" dirty="0"/>
-              <a:t> direct inclusion of auto-correlation in ML model</a:t>
-            </a:r>
-          </a:p>
-          <a:p>
-            <a:pPr algn="ctr"/>
-            <a:r>
-              <a:rPr lang="en-GB" dirty="0"/>
-              <a:t>(but beware: </a:t>
-            </a:r>
-            <a:r>
-              <a:rPr lang="de-DE" dirty="0" err="1"/>
-              <a:t>autocorrelation</a:t>
-            </a:r>
-            <a:r>
-              <a:rPr lang="de-DE" dirty="0"/>
-              <a:t> </a:t>
-            </a:r>
-            <a:r>
-              <a:rPr lang="de-DE" dirty="0" err="1"/>
-              <a:t>often</a:t>
-            </a:r>
-            <a:r>
-              <a:rPr lang="de-DE" dirty="0"/>
-              <a:t> </a:t>
-            </a:r>
-            <a:r>
-              <a:rPr lang="de-DE" dirty="0" err="1"/>
-              <a:t>reflects</a:t>
-            </a:r>
-            <a:r>
-              <a:rPr lang="de-DE" dirty="0"/>
-              <a:t> latent/</a:t>
-            </a:r>
-            <a:r>
-              <a:rPr lang="de-DE" dirty="0" err="1"/>
-              <a:t>exogenous</a:t>
-            </a:r>
-            <a:r>
-              <a:rPr lang="de-DE" dirty="0"/>
-              <a:t> </a:t>
-            </a:r>
-            <a:r>
-              <a:rPr lang="de-DE" dirty="0" err="1"/>
-              <a:t>drivers</a:t>
-            </a:r>
-            <a:r>
-              <a:rPr lang="de-DE" dirty="0"/>
-              <a:t> </a:t>
-            </a:r>
-            <a:r>
-              <a:rPr lang="de-DE" dirty="0" err="1"/>
-              <a:t>rather</a:t>
-            </a:r>
-            <a:r>
-              <a:rPr lang="de-DE" dirty="0"/>
-              <a:t> </a:t>
-            </a:r>
-            <a:r>
-              <a:rPr lang="de-DE" dirty="0" err="1"/>
-              <a:t>than</a:t>
-            </a:r>
-            <a:r>
-              <a:rPr lang="de-DE" dirty="0"/>
-              <a:t> </a:t>
-            </a:r>
-            <a:r>
-              <a:rPr lang="de-DE" dirty="0" err="1"/>
-              <a:t>direct</a:t>
-            </a:r>
-            <a:r>
-              <a:rPr lang="de-DE" dirty="0"/>
-              <a:t> temporal </a:t>
-            </a:r>
-            <a:r>
-              <a:rPr lang="de-DE" dirty="0" err="1"/>
-              <a:t>causation</a:t>
-            </a:r>
-            <a:r>
-              <a:rPr lang="en-GB" dirty="0"/>
-              <a:t>)</a:t>
-            </a:r>
+              <a:t> s</a:t>
+            </a:r>
+            <a:r>
+              <a:rPr lang="en-DE" sz="2200" b="0">
+                <a:sym typeface="Wingdings" pitchFamily="2" charset="2"/>
+              </a:rPr>
+              <a:t>imple solution: </a:t>
+            </a:r>
+            <a:r>
+              <a:rPr lang="en-DE" sz="2200">
+                <a:sym typeface="Wingdings" pitchFamily="2" charset="2"/>
+              </a:rPr>
+              <a:t>no use of target auto</a:t>
+            </a:r>
+            <a:r>
+              <a:rPr lang="en-GB" sz="2200" dirty="0">
+                <a:sym typeface="Wingdings" pitchFamily="2" charset="2"/>
+              </a:rPr>
+              <a:t>-</a:t>
+            </a:r>
+            <a:r>
+              <a:rPr lang="en-DE" sz="2200">
+                <a:sym typeface="Wingdings" pitchFamily="2" charset="2"/>
+              </a:rPr>
+              <a:t>correlation in ML model</a:t>
+            </a:r>
+            <a:r>
+              <a:rPr lang="de-DE" sz="2200" dirty="0">
+                <a:sym typeface="Wingdings" pitchFamily="2" charset="2"/>
+              </a:rPr>
+              <a:t>, </a:t>
+            </a:r>
+            <a:r>
+              <a:rPr lang="en-DE" sz="2200" b="0">
+                <a:sym typeface="Wingdings" pitchFamily="2" charset="2"/>
+              </a:rPr>
+              <a:t>but subsequent </a:t>
+            </a:r>
+            <a:r>
+              <a:rPr lang="en-DE" sz="2200">
+                <a:sym typeface="Wingdings" pitchFamily="2" charset="2"/>
+              </a:rPr>
+              <a:t>residual correction </a:t>
+            </a:r>
+            <a:r>
+              <a:rPr lang="en-DE" sz="2200" b="0">
+                <a:sym typeface="Wingdings" pitchFamily="2" charset="2"/>
+              </a:rPr>
+              <a:t>to capture missing trends</a:t>
+            </a:r>
+            <a:endParaRPr lang="en-DE" sz="2200" b="0" dirty="0">
+              <a:sym typeface="Wingdings" pitchFamily="2" charset="2"/>
+            </a:endParaRPr>
           </a:p>
         </p:txBody>
       </p:sp>
     </p:spTree>
     <p:extLst>
       <p:ext uri="{BB962C8B-B14F-4D97-AF65-F5344CB8AC3E}">
-        <p14:creationId xmlns:p14="http://schemas.microsoft.com/office/powerpoint/2010/main" val="784807781"/>
+        <p14:creationId xmlns:p14="http://schemas.microsoft.com/office/powerpoint/2010/main" val="2965666708"/>
       </p:ext>
     </p:extLst>
   </p:cSld>
@@ -20645,10 +21072,10 @@
       </p:grpSpPr>
       <p:sp>
         <p:nvSpPr>
-          <p:cNvPr id="4" name="Titel 3">
-            <a:extLst>
-              <a:ext uri="{FF2B5EF4-FFF2-40B4-BE49-F238E27FC236}">
-                <a16:creationId xmlns:a16="http://schemas.microsoft.com/office/drawing/2014/main" id="{739D2D69-9C2A-D12D-0F2F-25D47483B16A}"/>
+          <p:cNvPr id="2" name="Titel 1">
+            <a:extLst>
+              <a:ext uri="{FF2B5EF4-FFF2-40B4-BE49-F238E27FC236}">
+                <a16:creationId xmlns:a16="http://schemas.microsoft.com/office/drawing/2014/main" id="{FF755214-F4AB-B4A3-D218-7125EC0E795F}"/>
               </a:ext>
             </a:extLst>
           </p:cNvPr>
@@ -20659,36 +21086,19 @@
             <p:ph type="title"/>
           </p:nvPr>
         </p:nvSpPr>
-        <p:spPr/>
+        <p:spPr>
+          <a:xfrm>
+            <a:off x="838200" y="136526"/>
+            <a:ext cx="10515600" cy="1211466"/>
+          </a:xfrm>
+        </p:spPr>
         <p:txBody>
-          <a:bodyPr>
-            <a:normAutofit/>
-          </a:bodyPr>
+          <a:bodyPr/>
           <a:lstStyle/>
           <a:p>
             <a:r>
-              <a:rPr lang="de-DE" dirty="0"/>
-              <a:t>Multi-</a:t>
-            </a:r>
-            <a:r>
-              <a:rPr lang="de-DE" dirty="0" err="1"/>
-              <a:t>Step</a:t>
-            </a:r>
-            <a:r>
-              <a:rPr lang="de-DE" dirty="0"/>
-              <a:t> </a:t>
-            </a:r>
-            <a:r>
-              <a:rPr lang="de-DE" dirty="0" err="1"/>
-              <a:t>Forecasting</a:t>
-            </a:r>
-            <a:r>
-              <a:rPr lang="de-DE" dirty="0"/>
-              <a:t> </a:t>
-            </a:r>
-            <a:r>
-              <a:rPr lang="de-DE" dirty="0" err="1"/>
-              <a:t>Strategies</a:t>
+              <a:rPr lang="en-GB" dirty="0"/>
+              <a:t>Deep Learning Methods for Sequential Data</a:t>
             </a:r>
             <a:endParaRPr lang="de-DE" dirty="0"/>
           </a:p>
@@ -20696,137 +21106,10 @@
       </p:sp>
       <p:sp>
         <p:nvSpPr>
-          <p:cNvPr id="5" name="Inhaltsplatzhalter 4">
-            <a:extLst>
-              <a:ext uri="{FF2B5EF4-FFF2-40B4-BE49-F238E27FC236}">
-                <a16:creationId xmlns:a16="http://schemas.microsoft.com/office/drawing/2014/main" id="{E13A18DD-180B-B21A-BF22-C3207B014D69}"/>
-              </a:ext>
-            </a:extLst>
-          </p:cNvPr>
-          <p:cNvSpPr>
-            <a:spLocks noGrp="1"/>
-          </p:cNvSpPr>
-          <p:nvPr>
-            <p:ph idx="1"/>
-          </p:nvPr>
-        </p:nvSpPr>
-        <p:spPr/>
-        <p:txBody>
-          <a:bodyPr/>
-          <a:lstStyle/>
-          <a:p>
-            <a:pPr marL="0" indent="0">
-              <a:buNone/>
-            </a:pPr>
-            <a:endParaRPr lang="de-DE" dirty="0"/>
-          </a:p>
-          <a:p>
-            <a:r>
-              <a:rPr lang="de-DE" dirty="0" err="1"/>
-              <a:t>recursive</a:t>
-            </a:r>
-            <a:r>
-              <a:rPr lang="de-DE" dirty="0"/>
-              <a:t> </a:t>
-            </a:r>
-            <a:r>
-              <a:rPr lang="de-DE" dirty="0" err="1"/>
-              <a:t>forecasting</a:t>
-            </a:r>
-            <a:r>
-              <a:rPr lang="de-DE" dirty="0"/>
-              <a:t> (</a:t>
-            </a:r>
-            <a:r>
-              <a:rPr lang="de-DE" dirty="0" err="1"/>
-              <a:t>feed</a:t>
-            </a:r>
-            <a:r>
-              <a:rPr lang="de-DE" dirty="0"/>
-              <a:t> </a:t>
-            </a:r>
-            <a:r>
-              <a:rPr lang="de-DE" dirty="0" err="1"/>
-              <a:t>predictions</a:t>
-            </a:r>
-            <a:r>
-              <a:rPr lang="de-DE" dirty="0"/>
-              <a:t> back)</a:t>
-            </a:r>
-          </a:p>
-          <a:p>
-            <a:pPr marL="0" indent="0">
-              <a:buNone/>
-            </a:pPr>
-            <a:endParaRPr lang="de-DE" dirty="0"/>
-          </a:p>
-          <a:p>
-            <a:r>
-              <a:rPr lang="de-DE" dirty="0" err="1"/>
-              <a:t>direct</a:t>
-            </a:r>
-            <a:r>
-              <a:rPr lang="de-DE" dirty="0"/>
-              <a:t> </a:t>
-            </a:r>
-            <a:r>
-              <a:rPr lang="de-DE" dirty="0" err="1"/>
-              <a:t>forecasting</a:t>
-            </a:r>
-            <a:r>
-              <a:rPr lang="de-DE" dirty="0"/>
-              <a:t> (</a:t>
-            </a:r>
-            <a:r>
-              <a:rPr lang="de-DE" dirty="0" err="1"/>
-              <a:t>train</a:t>
-            </a:r>
-            <a:r>
-              <a:rPr lang="de-DE" dirty="0"/>
-              <a:t> separate </a:t>
-            </a:r>
-            <a:r>
-              <a:rPr lang="de-DE" dirty="0" err="1"/>
-              <a:t>horizon-ahead</a:t>
-            </a:r>
-            <a:r>
-              <a:rPr lang="de-DE" dirty="0"/>
-              <a:t> </a:t>
-            </a:r>
-            <a:r>
-              <a:rPr lang="de-DE" dirty="0" err="1"/>
-              <a:t>models</a:t>
-            </a:r>
-            <a:r>
-              <a:rPr lang="de-DE" dirty="0"/>
-              <a:t>)</a:t>
-            </a:r>
-          </a:p>
-          <a:p>
-            <a:pPr marL="0" indent="0">
-              <a:buNone/>
-            </a:pPr>
-            <a:endParaRPr lang="de-DE" dirty="0"/>
-          </a:p>
-          <a:p>
-            <a:r>
-              <a:rPr lang="de-DE" dirty="0"/>
-              <a:t>multi-output </a:t>
-            </a:r>
-            <a:r>
-              <a:rPr lang="de-DE" dirty="0" err="1"/>
-              <a:t>forecasting</a:t>
-            </a:r>
-            <a:endParaRPr lang="de-DE" dirty="0"/>
-          </a:p>
-        </p:txBody>
-      </p:sp>
-      <p:sp>
-        <p:nvSpPr>
-          <p:cNvPr id="3" name="Foliennummernplatzhalter 2">
-            <a:extLst>
-              <a:ext uri="{FF2B5EF4-FFF2-40B4-BE49-F238E27FC236}">
-                <a16:creationId xmlns:a16="http://schemas.microsoft.com/office/drawing/2014/main" id="{E55B088C-20E5-29E6-5FF6-82B17FC8F20B}"/>
+          <p:cNvPr id="4" name="Foliennummernplatzhalter 3">
+            <a:extLst>
+              <a:ext uri="{FF2B5EF4-FFF2-40B4-BE49-F238E27FC236}">
+                <a16:creationId xmlns:a16="http://schemas.microsoft.com/office/drawing/2014/main" id="{8FB633F3-BACE-5C81-B16F-2174DF266FBC}"/>
               </a:ext>
             </a:extLst>
           </p:cNvPr>
@@ -20850,10 +21133,457 @@
           </a:p>
         </p:txBody>
       </p:sp>
+      <p:sp>
+        <p:nvSpPr>
+          <p:cNvPr id="5" name="TextBox 8">
+            <a:extLst>
+              <a:ext uri="{FF2B5EF4-FFF2-40B4-BE49-F238E27FC236}">
+                <a16:creationId xmlns:a16="http://schemas.microsoft.com/office/drawing/2014/main" id="{BEF61BC9-E098-C36C-54F9-01353DF1B4B4}"/>
+              </a:ext>
+            </a:extLst>
+          </p:cNvPr>
+          <p:cNvSpPr txBox="1"/>
+          <p:nvPr/>
+        </p:nvSpPr>
+        <p:spPr>
+          <a:xfrm>
+            <a:off x="8358316" y="2167087"/>
+            <a:ext cx="3561835" cy="4247317"/>
+          </a:xfrm>
+          <a:prstGeom prst="rect">
+            <a:avLst/>
+          </a:prstGeom>
+          <a:noFill/>
+          <a:ln>
+            <a:solidFill>
+              <a:schemeClr val="tx1"/>
+            </a:solidFill>
+          </a:ln>
+        </p:spPr>
+        <p:txBody>
+          <a:bodyPr wrap="square" rtlCol="0">
+            <a:spAutoFit/>
+          </a:bodyPr>
+          <a:lstStyle/>
+          <a:p>
+            <a:r>
+              <a:rPr lang="en-GB" b="1" dirty="0"/>
+              <a:t>transformers</a:t>
+            </a:r>
+            <a:endParaRPr lang="en-GB" dirty="0"/>
+          </a:p>
+          <a:p>
+            <a:endParaRPr lang="en-GB" dirty="0"/>
+          </a:p>
+          <a:p>
+            <a:pPr marL="342900" indent="-342900">
+              <a:buFont typeface="Arial" panose="020B0604020202020204" pitchFamily="34" charset="0"/>
+              <a:buChar char="•"/>
+            </a:pPr>
+            <a:r>
+              <a:rPr lang="en-GB" dirty="0"/>
+              <a:t>main application NLP (largely replaced RNNs), but also computer vision</a:t>
+            </a:r>
+          </a:p>
+          <a:p>
+            <a:pPr marL="342900" indent="-342900">
+              <a:buFont typeface="Arial" panose="020B0604020202020204" pitchFamily="34" charset="0"/>
+              <a:buChar char="•"/>
+            </a:pPr>
+            <a:r>
+              <a:rPr lang="en-GB" dirty="0"/>
+              <a:t>time series data as directed graph (attention in edges)</a:t>
+            </a:r>
+          </a:p>
+          <a:p>
+            <a:endParaRPr lang="en-GB" dirty="0"/>
+          </a:p>
+          <a:p>
+            <a:pPr marL="342900" indent="-342900">
+              <a:buFont typeface="Arial" panose="020B0604020202020204" pitchFamily="34" charset="0"/>
+              <a:buChar char="•"/>
+            </a:pPr>
+            <a:r>
+              <a:rPr lang="en-GB" dirty="0"/>
+              <a:t>masked self-attention to focus on relevant past time steps</a:t>
+            </a:r>
+            <a:r>
+              <a:rPr lang="en-GB" dirty="0">
+                <a:sym typeface="Wingdings" panose="05000000000000000000" pitchFamily="2" charset="2"/>
+              </a:rPr>
+              <a:t> and positional encoding to include order of sequence</a:t>
+            </a:r>
+          </a:p>
+          <a:p>
+            <a:endParaRPr lang="en-GB" dirty="0">
+              <a:sym typeface="Wingdings" panose="05000000000000000000" pitchFamily="2" charset="2"/>
+            </a:endParaRPr>
+          </a:p>
+          <a:p>
+            <a:pPr marL="342900" indent="-342900">
+              <a:buFont typeface="Arial" panose="020B0604020202020204" pitchFamily="34" charset="0"/>
+              <a:buChar char="•"/>
+            </a:pPr>
+            <a:r>
+              <a:rPr lang="en-GB" dirty="0">
+                <a:sym typeface="Wingdings" panose="05000000000000000000" pitchFamily="2" charset="2"/>
+              </a:rPr>
+              <a:t>multivariate time series model via input concatenation</a:t>
+            </a:r>
+            <a:endParaRPr lang="en-GB" dirty="0"/>
+          </a:p>
+        </p:txBody>
+      </p:sp>
+      <p:sp>
+        <p:nvSpPr>
+          <p:cNvPr id="6" name="TextBox 9">
+            <a:extLst>
+              <a:ext uri="{FF2B5EF4-FFF2-40B4-BE49-F238E27FC236}">
+                <a16:creationId xmlns:a16="http://schemas.microsoft.com/office/drawing/2014/main" id="{A2E3D8AC-860F-753F-6D07-5A1A7C99D049}"/>
+              </a:ext>
+            </a:extLst>
+          </p:cNvPr>
+          <p:cNvSpPr txBox="1"/>
+          <p:nvPr/>
+        </p:nvSpPr>
+        <p:spPr>
+          <a:xfrm>
+            <a:off x="4514335" y="2166968"/>
+            <a:ext cx="3643184" cy="4247317"/>
+          </a:xfrm>
+          <a:prstGeom prst="rect">
+            <a:avLst/>
+          </a:prstGeom>
+          <a:noFill/>
+          <a:ln>
+            <a:solidFill>
+              <a:schemeClr val="tx1"/>
+            </a:solidFill>
+          </a:ln>
+        </p:spPr>
+        <p:txBody>
+          <a:bodyPr wrap="square" rtlCol="0">
+            <a:spAutoFit/>
+          </a:bodyPr>
+          <a:lstStyle/>
+          <a:p>
+            <a:r>
+              <a:rPr lang="en-GB" b="1" dirty="0"/>
+              <a:t>recurrent neural networks (RNN)</a:t>
+            </a:r>
+            <a:endParaRPr lang="en-GB" dirty="0"/>
+          </a:p>
+          <a:p>
+            <a:endParaRPr lang="en-GB" dirty="0"/>
+          </a:p>
+          <a:p>
+            <a:pPr marL="342900" indent="-342900">
+              <a:buFont typeface="Arial" panose="020B0604020202020204" pitchFamily="34" charset="0"/>
+              <a:buChar char="•"/>
+            </a:pPr>
+            <a:r>
+              <a:rPr lang="en-GB" dirty="0"/>
+              <a:t>main application natural language processing (NLP): sequence of words (tokens)</a:t>
+            </a:r>
+          </a:p>
+          <a:p>
+            <a:pPr marL="342900" indent="-342900">
+              <a:buFont typeface="Arial" panose="020B0604020202020204" pitchFamily="34" charset="0"/>
+              <a:buChar char="•"/>
+            </a:pPr>
+            <a:r>
+              <a:rPr lang="en-GB" dirty="0"/>
+              <a:t>time series data as time-tagged stream</a:t>
+            </a:r>
+          </a:p>
+          <a:p>
+            <a:endParaRPr lang="en-GB" dirty="0"/>
+          </a:p>
+          <a:p>
+            <a:pPr marL="342900" indent="-342900">
+              <a:buFont typeface="Arial" panose="020B0604020202020204" pitchFamily="34" charset="0"/>
+              <a:buChar char="•"/>
+            </a:pPr>
+            <a:r>
+              <a:rPr lang="en-GB" dirty="0"/>
+              <a:t>parameter sharing via recurrent nodes </a:t>
+            </a:r>
+            <a:r>
+              <a:rPr lang="en-GB" dirty="0">
+                <a:sym typeface="Wingdings" panose="05000000000000000000" pitchFamily="2" charset="2"/>
+              </a:rPr>
+              <a:t> context-awareness (input from past activations)</a:t>
+            </a:r>
+          </a:p>
+          <a:p>
+            <a:pPr marL="342900" indent="-342900">
+              <a:buFont typeface="Arial" panose="020B0604020202020204" pitchFamily="34" charset="0"/>
+              <a:buChar char="•"/>
+            </a:pPr>
+            <a:r>
+              <a:rPr lang="en-GB" dirty="0">
+                <a:sym typeface="Wingdings" panose="05000000000000000000" pitchFamily="2" charset="2"/>
+              </a:rPr>
+              <a:t>variable-length time series</a:t>
+            </a:r>
+          </a:p>
+          <a:p>
+            <a:endParaRPr lang="en-GB" dirty="0">
+              <a:sym typeface="Wingdings" panose="05000000000000000000" pitchFamily="2" charset="2"/>
+            </a:endParaRPr>
+          </a:p>
+          <a:p>
+            <a:pPr marL="342900" indent="-342900">
+              <a:buFont typeface="Arial" panose="020B0604020202020204" pitchFamily="34" charset="0"/>
+              <a:buChar char="•"/>
+            </a:pPr>
+            <a:r>
+              <a:rPr lang="en-GB" dirty="0">
+                <a:sym typeface="Wingdings" panose="05000000000000000000" pitchFamily="2" charset="2"/>
+              </a:rPr>
+              <a:t>multivariate time series model via more input nodes</a:t>
+            </a:r>
+            <a:endParaRPr lang="en-GB" dirty="0"/>
+          </a:p>
+        </p:txBody>
+      </p:sp>
+      <p:sp>
+        <p:nvSpPr>
+          <p:cNvPr id="7" name="TextBox 10">
+            <a:extLst>
+              <a:ext uri="{FF2B5EF4-FFF2-40B4-BE49-F238E27FC236}">
+                <a16:creationId xmlns:a16="http://schemas.microsoft.com/office/drawing/2014/main" id="{1703A7CC-7C53-BA6F-5461-43E31C659C45}"/>
+              </a:ext>
+            </a:extLst>
+          </p:cNvPr>
+          <p:cNvSpPr txBox="1"/>
+          <p:nvPr/>
+        </p:nvSpPr>
+        <p:spPr>
+          <a:xfrm>
+            <a:off x="271849" y="2178988"/>
+            <a:ext cx="4041689" cy="4247317"/>
+          </a:xfrm>
+          <a:prstGeom prst="rect">
+            <a:avLst/>
+          </a:prstGeom>
+          <a:noFill/>
+          <a:ln>
+            <a:solidFill>
+              <a:schemeClr val="tx1"/>
+            </a:solidFill>
+          </a:ln>
+        </p:spPr>
+        <p:txBody>
+          <a:bodyPr wrap="square" rtlCol="0">
+            <a:spAutoFit/>
+          </a:bodyPr>
+          <a:lstStyle/>
+          <a:p>
+            <a:r>
+              <a:rPr lang="en-GB" b="1" dirty="0"/>
+              <a:t>convolutional neural networks (CNN)</a:t>
+            </a:r>
+            <a:endParaRPr lang="en-GB" dirty="0"/>
+          </a:p>
+          <a:p>
+            <a:endParaRPr lang="en-GB" dirty="0"/>
+          </a:p>
+          <a:p>
+            <a:pPr marL="342900" indent="-342900">
+              <a:buFont typeface="Arial" panose="020B0604020202020204" pitchFamily="34" charset="0"/>
+              <a:buChar char="•"/>
+            </a:pPr>
+            <a:r>
+              <a:rPr lang="en-GB" dirty="0"/>
+              <a:t>main application computer vision: images correspond to regular 2D grids of data (pixels)</a:t>
+            </a:r>
+          </a:p>
+          <a:p>
+            <a:pPr marL="342900" indent="-342900">
+              <a:buFont typeface="Arial" panose="020B0604020202020204" pitchFamily="34" charset="0"/>
+              <a:buChar char="•"/>
+            </a:pPr>
+            <a:r>
+              <a:rPr lang="en-GB" dirty="0"/>
+              <a:t>time series data as 1D grid at regular time intervals</a:t>
+            </a:r>
+          </a:p>
+          <a:p>
+            <a:endParaRPr lang="en-GB" dirty="0"/>
+          </a:p>
+          <a:p>
+            <a:pPr marL="342900" indent="-342900">
+              <a:buFont typeface="Arial" panose="020B0604020202020204" pitchFamily="34" charset="0"/>
+              <a:buChar char="•"/>
+            </a:pPr>
+            <a:r>
+              <a:rPr lang="en-GB" dirty="0"/>
+              <a:t>parameter sharing via convolutions (and pooling) </a:t>
+            </a:r>
+            <a:r>
+              <a:rPr lang="en-GB" dirty="0">
+                <a:sym typeface="Wingdings" panose="05000000000000000000" pitchFamily="2" charset="2"/>
+              </a:rPr>
+              <a:t> highly regularized feed-forward networks</a:t>
+            </a:r>
+          </a:p>
+          <a:p>
+            <a:pPr marL="342900" indent="-342900">
+              <a:buFont typeface="Arial" panose="020B0604020202020204" pitchFamily="34" charset="0"/>
+              <a:buChar char="•"/>
+            </a:pPr>
+            <a:r>
+              <a:rPr lang="en-GB" dirty="0">
+                <a:sym typeface="Wingdings" panose="05000000000000000000" pitchFamily="2" charset="2"/>
+              </a:rPr>
+              <a:t>fixed time window (kernel)</a:t>
+            </a:r>
+          </a:p>
+          <a:p>
+            <a:endParaRPr lang="en-GB" dirty="0">
+              <a:sym typeface="Wingdings" panose="05000000000000000000" pitchFamily="2" charset="2"/>
+            </a:endParaRPr>
+          </a:p>
+          <a:p>
+            <a:pPr marL="342900" indent="-342900">
+              <a:buFont typeface="Arial" panose="020B0604020202020204" pitchFamily="34" charset="0"/>
+              <a:buChar char="•"/>
+            </a:pPr>
+            <a:r>
+              <a:rPr lang="en-GB" dirty="0">
+                <a:sym typeface="Wingdings" panose="05000000000000000000" pitchFamily="2" charset="2"/>
+              </a:rPr>
+              <a:t>multivariate time series model via different input channels</a:t>
+            </a:r>
+          </a:p>
+        </p:txBody>
+      </p:sp>
+      <p:sp>
+        <p:nvSpPr>
+          <p:cNvPr id="8" name="TextBox 12">
+            <a:extLst>
+              <a:ext uri="{FF2B5EF4-FFF2-40B4-BE49-F238E27FC236}">
+                <a16:creationId xmlns:a16="http://schemas.microsoft.com/office/drawing/2014/main" id="{90177408-7417-E9F5-9CB7-FC51948E81C1}"/>
+              </a:ext>
+            </a:extLst>
+          </p:cNvPr>
+          <p:cNvSpPr txBox="1"/>
+          <p:nvPr/>
+        </p:nvSpPr>
+        <p:spPr>
+          <a:xfrm>
+            <a:off x="271848" y="1177870"/>
+            <a:ext cx="11648303" cy="738664"/>
+          </a:xfrm>
+          <a:prstGeom prst="rect">
+            <a:avLst/>
+          </a:prstGeom>
+          <a:noFill/>
+        </p:spPr>
+        <p:txBody>
+          <a:bodyPr wrap="square" rtlCol="0">
+            <a:spAutoFit/>
+          </a:bodyPr>
+          <a:lstStyle/>
+          <a:p>
+            <a:pPr algn="ctr"/>
+            <a:r>
+              <a:rPr lang="en-GB" sz="2400" dirty="0">
+                <a:sym typeface="Wingdings" panose="05000000000000000000" pitchFamily="2" charset="2"/>
+              </a:rPr>
+              <a:t></a:t>
+            </a:r>
+            <a:r>
+              <a:rPr lang="en-GB" sz="2400" dirty="0"/>
+              <a:t> direct inclusion of auto-correlation in ML model</a:t>
+            </a:r>
+          </a:p>
+          <a:p>
+            <a:pPr algn="ctr"/>
+            <a:r>
+              <a:rPr lang="en-GB" dirty="0"/>
+              <a:t>(but beware: </a:t>
+            </a:r>
+            <a:r>
+              <a:rPr lang="de-DE" dirty="0" err="1"/>
+              <a:t>autocorrelation</a:t>
+            </a:r>
+            <a:r>
+              <a:rPr lang="de-DE" dirty="0"/>
+              <a:t> </a:t>
+            </a:r>
+            <a:r>
+              <a:rPr lang="de-DE" dirty="0" err="1"/>
+              <a:t>often</a:t>
+            </a:r>
+            <a:r>
+              <a:rPr lang="de-DE" dirty="0"/>
+              <a:t> </a:t>
+            </a:r>
+            <a:r>
+              <a:rPr lang="de-DE" dirty="0" err="1"/>
+              <a:t>reflects</a:t>
+            </a:r>
+            <a:r>
+              <a:rPr lang="de-DE" dirty="0"/>
+              <a:t> latent/</a:t>
+            </a:r>
+            <a:r>
+              <a:rPr lang="de-DE" dirty="0" err="1"/>
+              <a:t>exogenous</a:t>
+            </a:r>
+            <a:r>
+              <a:rPr lang="de-DE" dirty="0"/>
+              <a:t> </a:t>
+            </a:r>
+            <a:r>
+              <a:rPr lang="de-DE" dirty="0" err="1"/>
+              <a:t>drivers</a:t>
+            </a:r>
+            <a:r>
+              <a:rPr lang="de-DE" dirty="0"/>
+              <a:t> </a:t>
+            </a:r>
+            <a:r>
+              <a:rPr lang="de-DE" dirty="0" err="1"/>
+              <a:t>rather</a:t>
+            </a:r>
+            <a:r>
+              <a:rPr lang="de-DE" dirty="0"/>
+              <a:t> </a:t>
+            </a:r>
+            <a:r>
+              <a:rPr lang="de-DE" dirty="0" err="1"/>
+              <a:t>than</a:t>
+            </a:r>
+            <a:r>
+              <a:rPr lang="de-DE" dirty="0"/>
+              <a:t> </a:t>
+            </a:r>
+            <a:r>
+              <a:rPr lang="de-DE" dirty="0" err="1"/>
+              <a:t>direct</a:t>
+            </a:r>
+            <a:r>
+              <a:rPr lang="de-DE" dirty="0"/>
+              <a:t> temporal </a:t>
+            </a:r>
+            <a:r>
+              <a:rPr lang="de-DE" dirty="0" err="1"/>
+              <a:t>causation</a:t>
+            </a:r>
+            <a:r>
+              <a:rPr lang="en-GB" dirty="0"/>
+              <a:t>)</a:t>
+            </a:r>
+          </a:p>
+        </p:txBody>
+      </p:sp>
     </p:spTree>
     <p:extLst>
       <p:ext uri="{BB962C8B-B14F-4D97-AF65-F5344CB8AC3E}">
-        <p14:creationId xmlns:p14="http://schemas.microsoft.com/office/powerpoint/2010/main" val="2288188548"/>
+        <p14:creationId xmlns:p14="http://schemas.microsoft.com/office/powerpoint/2010/main" val="784807781"/>
       </p:ext>
     </p:extLst>
   </p:cSld>
@@ -20882,6 +21612,243 @@
       </p:grpSpPr>
       <p:sp>
         <p:nvSpPr>
+          <p:cNvPr id="4" name="Titel 3">
+            <a:extLst>
+              <a:ext uri="{FF2B5EF4-FFF2-40B4-BE49-F238E27FC236}">
+                <a16:creationId xmlns:a16="http://schemas.microsoft.com/office/drawing/2014/main" id="{739D2D69-9C2A-D12D-0F2F-25D47483B16A}"/>
+              </a:ext>
+            </a:extLst>
+          </p:cNvPr>
+          <p:cNvSpPr>
+            <a:spLocks noGrp="1"/>
+          </p:cNvSpPr>
+          <p:nvPr>
+            <p:ph type="title"/>
+          </p:nvPr>
+        </p:nvSpPr>
+        <p:spPr/>
+        <p:txBody>
+          <a:bodyPr>
+            <a:normAutofit/>
+          </a:bodyPr>
+          <a:lstStyle/>
+          <a:p>
+            <a:r>
+              <a:rPr lang="de-DE" dirty="0"/>
+              <a:t>Multi-</a:t>
+            </a:r>
+            <a:r>
+              <a:rPr lang="de-DE" dirty="0" err="1"/>
+              <a:t>Step</a:t>
+            </a:r>
+            <a:r>
+              <a:rPr lang="de-DE" dirty="0"/>
+              <a:t> </a:t>
+            </a:r>
+            <a:r>
+              <a:rPr lang="de-DE" dirty="0" err="1"/>
+              <a:t>Forecasting</a:t>
+            </a:r>
+            <a:r>
+              <a:rPr lang="de-DE" dirty="0"/>
+              <a:t> </a:t>
+            </a:r>
+            <a:r>
+              <a:rPr lang="de-DE" dirty="0" err="1"/>
+              <a:t>Strategies</a:t>
+            </a:r>
+            <a:endParaRPr lang="de-DE" dirty="0"/>
+          </a:p>
+        </p:txBody>
+      </p:sp>
+      <p:sp>
+        <p:nvSpPr>
+          <p:cNvPr id="5" name="Inhaltsplatzhalter 4">
+            <a:extLst>
+              <a:ext uri="{FF2B5EF4-FFF2-40B4-BE49-F238E27FC236}">
+                <a16:creationId xmlns:a16="http://schemas.microsoft.com/office/drawing/2014/main" id="{E13A18DD-180B-B21A-BF22-C3207B014D69}"/>
+              </a:ext>
+            </a:extLst>
+          </p:cNvPr>
+          <p:cNvSpPr>
+            <a:spLocks noGrp="1"/>
+          </p:cNvSpPr>
+          <p:nvPr>
+            <p:ph idx="1"/>
+          </p:nvPr>
+        </p:nvSpPr>
+        <p:spPr/>
+        <p:txBody>
+          <a:bodyPr/>
+          <a:lstStyle/>
+          <a:p>
+            <a:pPr marL="0" indent="0">
+              <a:buNone/>
+            </a:pPr>
+            <a:endParaRPr lang="de-DE" dirty="0"/>
+          </a:p>
+          <a:p>
+            <a:r>
+              <a:rPr lang="de-DE" dirty="0" err="1"/>
+              <a:t>recursive</a:t>
+            </a:r>
+            <a:r>
+              <a:rPr lang="de-DE" dirty="0"/>
+              <a:t> </a:t>
+            </a:r>
+            <a:r>
+              <a:rPr lang="de-DE" dirty="0" err="1"/>
+              <a:t>forecasting</a:t>
+            </a:r>
+            <a:r>
+              <a:rPr lang="de-DE" dirty="0"/>
+              <a:t> (</a:t>
+            </a:r>
+            <a:r>
+              <a:rPr lang="de-DE" dirty="0" err="1"/>
+              <a:t>feed</a:t>
+            </a:r>
+            <a:r>
+              <a:rPr lang="de-DE" dirty="0"/>
+              <a:t> </a:t>
+            </a:r>
+            <a:r>
+              <a:rPr lang="de-DE" dirty="0" err="1"/>
+              <a:t>predictions</a:t>
+            </a:r>
+            <a:r>
+              <a:rPr lang="de-DE" dirty="0"/>
+              <a:t> back)</a:t>
+            </a:r>
+          </a:p>
+          <a:p>
+            <a:pPr marL="0" indent="0">
+              <a:buNone/>
+            </a:pPr>
+            <a:endParaRPr lang="de-DE" dirty="0"/>
+          </a:p>
+          <a:p>
+            <a:r>
+              <a:rPr lang="de-DE" dirty="0" err="1"/>
+              <a:t>direct</a:t>
+            </a:r>
+            <a:r>
+              <a:rPr lang="de-DE" dirty="0"/>
+              <a:t> </a:t>
+            </a:r>
+            <a:r>
+              <a:rPr lang="de-DE" dirty="0" err="1"/>
+              <a:t>forecasting</a:t>
+            </a:r>
+            <a:r>
+              <a:rPr lang="de-DE" dirty="0"/>
+              <a:t> (</a:t>
+            </a:r>
+            <a:r>
+              <a:rPr lang="de-DE" dirty="0" err="1"/>
+              <a:t>train</a:t>
+            </a:r>
+            <a:r>
+              <a:rPr lang="de-DE" dirty="0"/>
+              <a:t> separate </a:t>
+            </a:r>
+            <a:r>
+              <a:rPr lang="de-DE" dirty="0" err="1"/>
+              <a:t>horizon-ahead</a:t>
+            </a:r>
+            <a:r>
+              <a:rPr lang="de-DE" dirty="0"/>
+              <a:t> </a:t>
+            </a:r>
+            <a:r>
+              <a:rPr lang="de-DE" dirty="0" err="1"/>
+              <a:t>models</a:t>
+            </a:r>
+            <a:r>
+              <a:rPr lang="de-DE" dirty="0"/>
+              <a:t>)</a:t>
+            </a:r>
+          </a:p>
+          <a:p>
+            <a:pPr marL="0" indent="0">
+              <a:buNone/>
+            </a:pPr>
+            <a:endParaRPr lang="de-DE" dirty="0"/>
+          </a:p>
+          <a:p>
+            <a:r>
+              <a:rPr lang="de-DE" dirty="0"/>
+              <a:t>multi-output </a:t>
+            </a:r>
+            <a:r>
+              <a:rPr lang="de-DE" dirty="0" err="1"/>
+              <a:t>forecasting</a:t>
+            </a:r>
+            <a:endParaRPr lang="de-DE" dirty="0"/>
+          </a:p>
+        </p:txBody>
+      </p:sp>
+      <p:sp>
+        <p:nvSpPr>
+          <p:cNvPr id="3" name="Foliennummernplatzhalter 2">
+            <a:extLst>
+              <a:ext uri="{FF2B5EF4-FFF2-40B4-BE49-F238E27FC236}">
+                <a16:creationId xmlns:a16="http://schemas.microsoft.com/office/drawing/2014/main" id="{E55B088C-20E5-29E6-5FF6-82B17FC8F20B}"/>
+              </a:ext>
+            </a:extLst>
+          </p:cNvPr>
+          <p:cNvSpPr>
+            <a:spLocks noGrp="1"/>
+          </p:cNvSpPr>
+          <p:nvPr>
+            <p:ph type="sldNum" sz="quarter" idx="12"/>
+          </p:nvPr>
+        </p:nvSpPr>
+        <p:spPr/>
+        <p:txBody>
+          <a:bodyPr/>
+          <a:lstStyle/>
+          <a:p>
+            <a:fld id="{D6D392C1-03C4-44BA-9267-8F9A2DA09A60}" type="slidenum">
+              <a:rPr lang="en-GB" smtClean="0"/>
+              <a:t>32</a:t>
+            </a:fld>
+            <a:endParaRPr lang="en-GB"/>
+          </a:p>
+        </p:txBody>
+      </p:sp>
+    </p:spTree>
+    <p:extLst>
+      <p:ext uri="{BB962C8B-B14F-4D97-AF65-F5344CB8AC3E}">
+        <p14:creationId xmlns:p14="http://schemas.microsoft.com/office/powerpoint/2010/main" val="2288188548"/>
+      </p:ext>
+    </p:extLst>
+  </p:cSld>
+  <p:clrMapOvr>
+    <a:masterClrMapping/>
+  </p:clrMapOvr>
+</p:sld>
+</file>
+
+<file path=ppt/slides/slide33.xml><?xml version="1.0" encoding="utf-8"?>
+<p:sld xmlns:a="http://schemas.openxmlformats.org/drawingml/2006/main" xmlns:r="http://schemas.openxmlformats.org/officeDocument/2006/relationships" xmlns:p="http://schemas.openxmlformats.org/presentationml/2006/main">
+  <p:cSld>
+    <p:spTree>
+      <p:nvGrpSpPr>
+        <p:cNvPr id="1" name=""/>
+        <p:cNvGrpSpPr/>
+        <p:nvPr/>
+      </p:nvGrpSpPr>
+      <p:grpSpPr>
+        <a:xfrm>
+          <a:off x="0" y="0"/>
+          <a:ext cx="0" cy="0"/>
+          <a:chOff x="0" y="0"/>
+          <a:chExt cx="0" cy="0"/>
+        </a:xfrm>
+      </p:grpSpPr>
+      <p:sp>
+        <p:nvSpPr>
           <p:cNvPr id="2" name="Titel 1">
             <a:extLst>
               <a:ext uri="{FF2B5EF4-FFF2-40B4-BE49-F238E27FC236}">
@@ -21445,7 +22412,7 @@
           <a:p>
             <a:fld id="{D6D392C1-03C4-44BA-9267-8F9A2DA09A60}" type="slidenum">
               <a:rPr lang="en-GB" smtClean="0"/>
-              <a:t>32</a:t>
+              <a:t>33</a:t>
             </a:fld>
             <a:endParaRPr lang="en-GB"/>
           </a:p>
@@ -21494,7 +22461,7 @@
 </p:sld>
 </file>
 
-<file path=ppt/slides/slide33.xml><?xml version="1.0" encoding="utf-8"?>
+<file path=ppt/slides/slide34.xml><?xml version="1.0" encoding="utf-8"?>
 <p:sld xmlns:a="http://schemas.openxmlformats.org/drawingml/2006/main" xmlns:r="http://schemas.openxmlformats.org/officeDocument/2006/relationships" xmlns:p="http://schemas.openxmlformats.org/presentationml/2006/main">
   <p:cSld>
     <p:spTree>
@@ -21941,7 +22908,7 @@
           <a:p>
             <a:fld id="{D6D392C1-03C4-44BA-9267-8F9A2DA09A60}" type="slidenum">
               <a:rPr lang="en-GB" smtClean="0"/>
-              <a:t>33</a:t>
+              <a:t>34</a:t>
             </a:fld>
             <a:endParaRPr lang="en-GB"/>
           </a:p>
@@ -21979,10 +22946,10 @@
       </p:grpSpPr>
       <p:sp>
         <p:nvSpPr>
-          <p:cNvPr id="2" name="Title 1">
-            <a:extLst>
-              <a:ext uri="{FF2B5EF4-FFF2-40B4-BE49-F238E27FC236}">
-                <a16:creationId xmlns:a16="http://schemas.microsoft.com/office/drawing/2014/main" id="{37CC9730-D9B6-129D-F347-DFE2DA458B09}"/>
+          <p:cNvPr id="5" name="Titel 4">
+            <a:extLst>
+              <a:ext uri="{FF2B5EF4-FFF2-40B4-BE49-F238E27FC236}">
+                <a16:creationId xmlns:a16="http://schemas.microsoft.com/office/drawing/2014/main" id="{C0D96EA6-ED9D-6600-7B7F-5F320C7EBFF4}"/>
               </a:ext>
             </a:extLst>
           </p:cNvPr>
@@ -21999,18 +22966,52 @@
           <a:lstStyle/>
           <a:p>
             <a:r>
-              <a:rPr lang="en-GB" dirty="0"/>
-              <a:t>Example: Forecasting</a:t>
-            </a:r>
+              <a:rPr lang="de-DE" dirty="0"/>
+              <a:t>Sampling </a:t>
+            </a:r>
+            <a:r>
+              <a:rPr lang="de-DE" dirty="0" err="1"/>
+              <a:t>Frequencies</a:t>
+            </a:r>
+            <a:endParaRPr lang="de-DE" dirty="0"/>
+          </a:p>
+        </p:txBody>
+      </p:sp>
+      <p:sp>
+        <p:nvSpPr>
+          <p:cNvPr id="4" name="Foliennummernplatzhalter 3">
+            <a:extLst>
+              <a:ext uri="{FF2B5EF4-FFF2-40B4-BE49-F238E27FC236}">
+                <a16:creationId xmlns:a16="http://schemas.microsoft.com/office/drawing/2014/main" id="{B2B560E0-C0BD-EFC4-551C-C4C67B65084D}"/>
+              </a:ext>
+            </a:extLst>
+          </p:cNvPr>
+          <p:cNvSpPr>
+            <a:spLocks noGrp="1"/>
+          </p:cNvSpPr>
+          <p:nvPr>
+            <p:ph type="sldNum" sz="quarter" idx="12"/>
+          </p:nvPr>
+        </p:nvSpPr>
+        <p:spPr/>
+        <p:txBody>
+          <a:bodyPr/>
+          <a:lstStyle/>
+          <a:p>
+            <a:fld id="{3D4C94FE-FF23-4504-88E9-14D481113291}" type="slidenum">
+              <a:rPr lang="en-GB" smtClean="0"/>
+              <a:t>4</a:t>
+            </a:fld>
+            <a:endParaRPr lang="en-GB"/>
           </a:p>
         </p:txBody>
       </p:sp>
       <p:pic>
         <p:nvPicPr>
-          <p:cNvPr id="112" name="Picture 111">
-            <a:extLst>
-              <a:ext uri="{FF2B5EF4-FFF2-40B4-BE49-F238E27FC236}">
-                <a16:creationId xmlns:a16="http://schemas.microsoft.com/office/drawing/2014/main" id="{39EC2A88-173D-1D5A-48C4-0FB7344BDFC8}"/>
+          <p:cNvPr id="6" name="Grafik 5">
+            <a:extLst>
+              <a:ext uri="{FF2B5EF4-FFF2-40B4-BE49-F238E27FC236}">
+                <a16:creationId xmlns:a16="http://schemas.microsoft.com/office/drawing/2014/main" id="{9B8A4D35-8472-D158-CD85-02C4CD2FE4B8}"/>
               </a:ext>
             </a:extLst>
           </p:cNvPr>
@@ -22027,47 +23028,138 @@
         </p:blipFill>
         <p:spPr>
           <a:xfrm>
-            <a:off x="2521183" y="1472319"/>
-            <a:ext cx="7149633" cy="5366102"/>
+            <a:off x="7886806" y="3821728"/>
+            <a:ext cx="3218349" cy="2454201"/>
           </a:xfrm>
           <a:prstGeom prst="rect">
             <a:avLst/>
           </a:prstGeom>
         </p:spPr>
       </p:pic>
-      <p:sp>
-        <p:nvSpPr>
-          <p:cNvPr id="3" name="Foliennummernplatzhalter 2">
-            <a:extLst>
-              <a:ext uri="{FF2B5EF4-FFF2-40B4-BE49-F238E27FC236}">
-                <a16:creationId xmlns:a16="http://schemas.microsoft.com/office/drawing/2014/main" id="{2791EA00-BFC7-1699-1D87-ECB10BFB476C}"/>
-              </a:ext>
-            </a:extLst>
-          </p:cNvPr>
-          <p:cNvSpPr>
-            <a:spLocks noGrp="1"/>
-          </p:cNvSpPr>
-          <p:nvPr>
-            <p:ph type="sldNum" sz="quarter" idx="12"/>
-          </p:nvPr>
-        </p:nvSpPr>
-        <p:spPr/>
-        <p:txBody>
-          <a:bodyPr/>
-          <a:lstStyle/>
-          <a:p>
-            <a:fld id="{D6D392C1-03C4-44BA-9267-8F9A2DA09A60}" type="slidenum">
-              <a:rPr lang="en-GB" smtClean="0"/>
-              <a:t>4</a:t>
-            </a:fld>
-            <a:endParaRPr lang="en-GB"/>
-          </a:p>
-        </p:txBody>
-      </p:sp>
+      <p:pic>
+        <p:nvPicPr>
+          <p:cNvPr id="7" name="Grafik 6">
+            <a:extLst>
+              <a:ext uri="{FF2B5EF4-FFF2-40B4-BE49-F238E27FC236}">
+                <a16:creationId xmlns:a16="http://schemas.microsoft.com/office/drawing/2014/main" id="{2EE9A89C-BF60-A3F9-B42B-1DEB78D39EC2}"/>
+              </a:ext>
+            </a:extLst>
+          </p:cNvPr>
+          <p:cNvPicPr>
+            <a:picLocks noChangeAspect="1"/>
+          </p:cNvPicPr>
+          <p:nvPr/>
+        </p:nvPicPr>
+        <p:blipFill>
+          <a:blip r:embed="rId3"/>
+          <a:stretch>
+            <a:fillRect/>
+          </a:stretch>
+        </p:blipFill>
+        <p:spPr>
+          <a:xfrm>
+            <a:off x="69518" y="1702026"/>
+            <a:ext cx="3222644" cy="2592365"/>
+          </a:xfrm>
+          <a:prstGeom prst="rect">
+            <a:avLst/>
+          </a:prstGeom>
+        </p:spPr>
+      </p:pic>
+      <p:pic>
+        <p:nvPicPr>
+          <p:cNvPr id="8" name="Grafik 7">
+            <a:extLst>
+              <a:ext uri="{FF2B5EF4-FFF2-40B4-BE49-F238E27FC236}">
+                <a16:creationId xmlns:a16="http://schemas.microsoft.com/office/drawing/2014/main" id="{B46AA41D-6EB2-106E-A526-4D435F488A91}"/>
+              </a:ext>
+            </a:extLst>
+          </p:cNvPr>
+          <p:cNvPicPr>
+            <a:picLocks noChangeAspect="1"/>
+          </p:cNvPicPr>
+          <p:nvPr/>
+        </p:nvPicPr>
+        <p:blipFill>
+          <a:blip r:embed="rId4"/>
+          <a:stretch>
+            <a:fillRect/>
+          </a:stretch>
+        </p:blipFill>
+        <p:spPr>
+          <a:xfrm>
+            <a:off x="8576765" y="365125"/>
+            <a:ext cx="3212029" cy="2633084"/>
+          </a:xfrm>
+          <a:prstGeom prst="rect">
+            <a:avLst/>
+          </a:prstGeom>
+        </p:spPr>
+      </p:pic>
+      <p:pic>
+        <p:nvPicPr>
+          <p:cNvPr id="9" name="Grafik 8">
+            <a:extLst>
+              <a:ext uri="{FF2B5EF4-FFF2-40B4-BE49-F238E27FC236}">
+                <a16:creationId xmlns:a16="http://schemas.microsoft.com/office/drawing/2014/main" id="{64AD762D-2207-6337-23EA-8B8BE78927B7}"/>
+              </a:ext>
+            </a:extLst>
+          </p:cNvPr>
+          <p:cNvPicPr>
+            <a:picLocks noChangeAspect="1"/>
+          </p:cNvPicPr>
+          <p:nvPr/>
+        </p:nvPicPr>
+        <p:blipFill>
+          <a:blip r:embed="rId5"/>
+          <a:stretch>
+            <a:fillRect/>
+          </a:stretch>
+        </p:blipFill>
+        <p:spPr>
+          <a:xfrm>
+            <a:off x="2865630" y="4327451"/>
+            <a:ext cx="3230370" cy="2530549"/>
+          </a:xfrm>
+          <a:prstGeom prst="rect">
+            <a:avLst/>
+          </a:prstGeom>
+        </p:spPr>
+      </p:pic>
+      <p:pic>
+        <p:nvPicPr>
+          <p:cNvPr id="11" name="Grafik 10">
+            <a:extLst>
+              <a:ext uri="{FF2B5EF4-FFF2-40B4-BE49-F238E27FC236}">
+                <a16:creationId xmlns:a16="http://schemas.microsoft.com/office/drawing/2014/main" id="{9D049750-671B-E406-8C0E-380C31E3E056}"/>
+              </a:ext>
+            </a:extLst>
+          </p:cNvPr>
+          <p:cNvPicPr>
+            <a:picLocks noChangeAspect="1"/>
+          </p:cNvPicPr>
+          <p:nvPr/>
+        </p:nvPicPr>
+        <p:blipFill>
+          <a:blip r:embed="rId6"/>
+          <a:stretch>
+            <a:fillRect/>
+          </a:stretch>
+        </p:blipFill>
+        <p:spPr>
+          <a:xfrm>
+            <a:off x="4326394" y="1490934"/>
+            <a:ext cx="3216139" cy="2530549"/>
+          </a:xfrm>
+          <a:prstGeom prst="rect">
+            <a:avLst/>
+          </a:prstGeom>
+        </p:spPr>
+      </p:pic>
     </p:spTree>
     <p:extLst>
       <p:ext uri="{BB962C8B-B14F-4D97-AF65-F5344CB8AC3E}">
-        <p14:creationId xmlns:p14="http://schemas.microsoft.com/office/powerpoint/2010/main" val="805078914"/>
+        <p14:creationId xmlns:p14="http://schemas.microsoft.com/office/powerpoint/2010/main" val="1523060556"/>
       </p:ext>
     </p:extLst>
   </p:cSld>
@@ -22094,12 +23186,40 @@
           <a:chExt cx="0" cy="0"/>
         </a:xfrm>
       </p:grpSpPr>
+      <p:sp>
+        <p:nvSpPr>
+          <p:cNvPr id="2" name="Title 1">
+            <a:extLst>
+              <a:ext uri="{FF2B5EF4-FFF2-40B4-BE49-F238E27FC236}">
+                <a16:creationId xmlns:a16="http://schemas.microsoft.com/office/drawing/2014/main" id="{37CC9730-D9B6-129D-F347-DFE2DA458B09}"/>
+              </a:ext>
+            </a:extLst>
+          </p:cNvPr>
+          <p:cNvSpPr>
+            <a:spLocks noGrp="1"/>
+          </p:cNvSpPr>
+          <p:nvPr>
+            <p:ph type="title"/>
+          </p:nvPr>
+        </p:nvSpPr>
+        <p:spPr/>
+        <p:txBody>
+          <a:bodyPr/>
+          <a:lstStyle/>
+          <a:p>
+            <a:r>
+              <a:rPr lang="en-GB" dirty="0"/>
+              <a:t>Example: Forecasting</a:t>
+            </a:r>
+          </a:p>
+        </p:txBody>
+      </p:sp>
       <p:pic>
         <p:nvPicPr>
-          <p:cNvPr id="9" name="Picture 8" descr="A graph showing the performance of training&#10;&#10;Description automatically generated">
-            <a:extLst>
-              <a:ext uri="{FF2B5EF4-FFF2-40B4-BE49-F238E27FC236}">
-                <a16:creationId xmlns:a16="http://schemas.microsoft.com/office/drawing/2014/main" id="{5B786528-7601-4E42-BE3F-95A3424E75F0}"/>
+          <p:cNvPr id="112" name="Picture 111">
+            <a:extLst>
+              <a:ext uri="{FF2B5EF4-FFF2-40B4-BE49-F238E27FC236}">
+                <a16:creationId xmlns:a16="http://schemas.microsoft.com/office/drawing/2014/main" id="{39EC2A88-173D-1D5A-48C4-0FB7344BDFC8}"/>
               </a:ext>
             </a:extLst>
           </p:cNvPr>
@@ -22109,21 +23229,15 @@
           <p:nvPr/>
         </p:nvPicPr>
         <p:blipFill>
-          <a:blip r:embed="rId2">
-            <a:extLst>
-              <a:ext uri="{28A0092B-C50C-407E-A947-70E740481C1C}">
-                <a14:useLocalDpi xmlns:a14="http://schemas.microsoft.com/office/drawing/2010/main" val="0"/>
-              </a:ext>
-            </a:extLst>
-          </a:blip>
+          <a:blip r:embed="rId2"/>
           <a:stretch>
             <a:fillRect/>
           </a:stretch>
         </p:blipFill>
         <p:spPr>
           <a:xfrm>
-            <a:off x="847187" y="0"/>
-            <a:ext cx="10497626" cy="6858000"/>
+            <a:off x="2521183" y="1472319"/>
+            <a:ext cx="7149633" cy="5366102"/>
           </a:xfrm>
           <a:prstGeom prst="rect">
             <a:avLst/>
@@ -22135,7 +23249,7 @@
           <p:cNvPr id="3" name="Foliennummernplatzhalter 2">
             <a:extLst>
               <a:ext uri="{FF2B5EF4-FFF2-40B4-BE49-F238E27FC236}">
-                <a16:creationId xmlns:a16="http://schemas.microsoft.com/office/drawing/2014/main" id="{32D47E14-B814-126A-B403-9B1F0F1376ED}"/>
+                <a16:creationId xmlns:a16="http://schemas.microsoft.com/office/drawing/2014/main" id="{2791EA00-BFC7-1699-1D87-ECB10BFB476C}"/>
               </a:ext>
             </a:extLst>
           </p:cNvPr>
@@ -22162,7 +23276,7 @@
     </p:spTree>
     <p:extLst>
       <p:ext uri="{BB962C8B-B14F-4D97-AF65-F5344CB8AC3E}">
-        <p14:creationId xmlns:p14="http://schemas.microsoft.com/office/powerpoint/2010/main" val="1378669131"/>
+        <p14:creationId xmlns:p14="http://schemas.microsoft.com/office/powerpoint/2010/main" val="805078914"/>
       </p:ext>
     </p:extLst>
   </p:cSld>
@@ -22189,6 +23303,101 @@
           <a:chExt cx="0" cy="0"/>
         </a:xfrm>
       </p:grpSpPr>
+      <p:pic>
+        <p:nvPicPr>
+          <p:cNvPr id="9" name="Picture 8" descr="A graph showing the performance of training&#10;&#10;Description automatically generated">
+            <a:extLst>
+              <a:ext uri="{FF2B5EF4-FFF2-40B4-BE49-F238E27FC236}">
+                <a16:creationId xmlns:a16="http://schemas.microsoft.com/office/drawing/2014/main" id="{5B786528-7601-4E42-BE3F-95A3424E75F0}"/>
+              </a:ext>
+            </a:extLst>
+          </p:cNvPr>
+          <p:cNvPicPr>
+            <a:picLocks noChangeAspect="1"/>
+          </p:cNvPicPr>
+          <p:nvPr/>
+        </p:nvPicPr>
+        <p:blipFill>
+          <a:blip r:embed="rId2">
+            <a:extLst>
+              <a:ext uri="{28A0092B-C50C-407E-A947-70E740481C1C}">
+                <a14:useLocalDpi xmlns:a14="http://schemas.microsoft.com/office/drawing/2010/main" val="0"/>
+              </a:ext>
+            </a:extLst>
+          </a:blip>
+          <a:stretch>
+            <a:fillRect/>
+          </a:stretch>
+        </p:blipFill>
+        <p:spPr>
+          <a:xfrm>
+            <a:off x="847187" y="0"/>
+            <a:ext cx="10497626" cy="6858000"/>
+          </a:xfrm>
+          <a:prstGeom prst="rect">
+            <a:avLst/>
+          </a:prstGeom>
+        </p:spPr>
+      </p:pic>
+      <p:sp>
+        <p:nvSpPr>
+          <p:cNvPr id="3" name="Foliennummernplatzhalter 2">
+            <a:extLst>
+              <a:ext uri="{FF2B5EF4-FFF2-40B4-BE49-F238E27FC236}">
+                <a16:creationId xmlns:a16="http://schemas.microsoft.com/office/drawing/2014/main" id="{32D47E14-B814-126A-B403-9B1F0F1376ED}"/>
+              </a:ext>
+            </a:extLst>
+          </p:cNvPr>
+          <p:cNvSpPr>
+            <a:spLocks noGrp="1"/>
+          </p:cNvSpPr>
+          <p:nvPr>
+            <p:ph type="sldNum" sz="quarter" idx="12"/>
+          </p:nvPr>
+        </p:nvSpPr>
+        <p:spPr/>
+        <p:txBody>
+          <a:bodyPr/>
+          <a:lstStyle/>
+          <a:p>
+            <a:fld id="{D6D392C1-03C4-44BA-9267-8F9A2DA09A60}" type="slidenum">
+              <a:rPr lang="en-GB" smtClean="0"/>
+              <a:t>6</a:t>
+            </a:fld>
+            <a:endParaRPr lang="en-GB"/>
+          </a:p>
+        </p:txBody>
+      </p:sp>
+    </p:spTree>
+    <p:extLst>
+      <p:ext uri="{BB962C8B-B14F-4D97-AF65-F5344CB8AC3E}">
+        <p14:creationId xmlns:p14="http://schemas.microsoft.com/office/powerpoint/2010/main" val="1378669131"/>
+      </p:ext>
+    </p:extLst>
+  </p:cSld>
+  <p:clrMapOvr>
+    <a:masterClrMapping/>
+  </p:clrMapOvr>
+</p:sld>
+</file>
+
+<file path=ppt/slides/slide7.xml><?xml version="1.0" encoding="utf-8"?>
+<p:sld xmlns:a="http://schemas.openxmlformats.org/drawingml/2006/main" xmlns:r="http://schemas.openxmlformats.org/officeDocument/2006/relationships" xmlns:p="http://schemas.openxmlformats.org/presentationml/2006/main">
+  <p:cSld>
+    <p:spTree>
+      <p:nvGrpSpPr>
+        <p:cNvPr id="1" name=""/>
+        <p:cNvGrpSpPr/>
+        <p:nvPr/>
+      </p:nvGrpSpPr>
+      <p:grpSpPr>
+        <a:xfrm>
+          <a:off x="0" y="0"/>
+          <a:ext cx="0" cy="0"/>
+          <a:chOff x="0" y="0"/>
+          <a:chExt cx="0" cy="0"/>
+        </a:xfrm>
+      </p:grpSpPr>
       <p:sp>
         <p:nvSpPr>
           <p:cNvPr id="2" name="Title 1">
@@ -22278,7 +23487,7 @@
           <a:p>
             <a:fld id="{D6D392C1-03C4-44BA-9267-8F9A2DA09A60}" type="slidenum">
               <a:rPr lang="en-GB" smtClean="0"/>
-              <a:t>6</a:t>
+              <a:t>7</a:t>
             </a:fld>
             <a:endParaRPr lang="en-GB"/>
           </a:p>
@@ -22297,7 +23506,7 @@
 </p:sld>
 </file>
 
-<file path=ppt/slides/slide7.xml><?xml version="1.0" encoding="utf-8"?>
+<file path=ppt/slides/slide8.xml><?xml version="1.0" encoding="utf-8"?>
 <p:sld xmlns:a="http://schemas.openxmlformats.org/drawingml/2006/main" xmlns:r="http://schemas.openxmlformats.org/officeDocument/2006/relationships" xmlns:p="http://schemas.openxmlformats.org/presentationml/2006/main">
   <p:cSld>
     <p:spTree>
@@ -23080,7 +24289,7 @@
           <a:p>
             <a:fld id="{3D4C94FE-FF23-4504-88E9-14D481113291}" type="slidenum">
               <a:rPr lang="en-GB" smtClean="0"/>
-              <a:t>7</a:t>
+              <a:t>8</a:t>
             </a:fld>
             <a:endParaRPr lang="en-GB"/>
           </a:p>
@@ -23146,7 +24355,7 @@
 </p:sld>
 </file>
 
-<file path=ppt/slides/slide8.xml><?xml version="1.0" encoding="utf-8"?>
+<file path=ppt/slides/slide9.xml><?xml version="1.0" encoding="utf-8"?>
 <p:sld xmlns:a="http://schemas.openxmlformats.org/drawingml/2006/main" xmlns:r="http://schemas.openxmlformats.org/officeDocument/2006/relationships" xmlns:p="http://schemas.openxmlformats.org/presentationml/2006/main">
   <p:cSld>
     <p:spTree>
@@ -23191,8 +24400,8 @@
           </a:p>
         </p:txBody>
       </p:sp>
-      <mc:AlternateContent xmlns:mc="http://schemas.openxmlformats.org/markup-compatibility/2006" xmlns:a14="http://schemas.microsoft.com/office/drawing/2010/main">
-        <mc:Choice Requires="a14">
+      <mc:AlternateContent xmlns:mc="http://schemas.openxmlformats.org/markup-compatibility/2006">
+        <mc:Choice xmlns:a14="http://schemas.microsoft.com/office/drawing/2010/main" Requires="a14">
           <p:sp>
             <p:nvSpPr>
               <p:cNvPr id="3" name="Inhaltsplatzhalter 2">
@@ -23886,7 +25095,7 @@
                   <a:rPr lang="de-DE" dirty="0">
                     <a:sym typeface="Wingdings" pitchFamily="2" charset="2"/>
                   </a:rPr>
-                  <a:t> ACF/PCF</a:t>
+                  <a:t> ACF/PACF</a:t>
                 </a:r>
                 <a:endParaRPr lang="de-DE" dirty="0"/>
               </a:p>
@@ -23899,7 +25108,7 @@
             </p:txBody>
           </p:sp>
         </mc:Choice>
-        <mc:Fallback xmlns="">
+        <mc:Fallback>
           <p:sp>
             <p:nvSpPr>
               <p:cNvPr id="3" name="Inhaltsplatzhalter 2">
@@ -23962,7 +25171,7 @@
           <a:p>
             <a:fld id="{3D4C94FE-FF23-4504-88E9-14D481113291}" type="slidenum">
               <a:rPr lang="en-GB" smtClean="0"/>
-              <a:t>8</a:t>
+              <a:t>9</a:t>
             </a:fld>
             <a:endParaRPr lang="en-GB"/>
           </a:p>
@@ -23972,972 +25181,6 @@
     <p:extLst>
       <p:ext uri="{BB962C8B-B14F-4D97-AF65-F5344CB8AC3E}">
         <p14:creationId xmlns:p14="http://schemas.microsoft.com/office/powerpoint/2010/main" val="3159295460"/>
-      </p:ext>
-    </p:extLst>
-  </p:cSld>
-  <p:clrMapOvr>
-    <a:masterClrMapping/>
-  </p:clrMapOvr>
-</p:sld>
-</file>
-
-<file path=ppt/slides/slide9.xml><?xml version="1.0" encoding="utf-8"?>
-<p:sld xmlns:a="http://schemas.openxmlformats.org/drawingml/2006/main" xmlns:r="http://schemas.openxmlformats.org/officeDocument/2006/relationships" xmlns:p="http://schemas.openxmlformats.org/presentationml/2006/main">
-  <p:cSld>
-    <p:spTree>
-      <p:nvGrpSpPr>
-        <p:cNvPr id="1" name=""/>
-        <p:cNvGrpSpPr/>
-        <p:nvPr/>
-      </p:nvGrpSpPr>
-      <p:grpSpPr>
-        <a:xfrm>
-          <a:off x="0" y="0"/>
-          <a:ext cx="0" cy="0"/>
-          <a:chOff x="0" y="0"/>
-          <a:chExt cx="0" cy="0"/>
-        </a:xfrm>
-      </p:grpSpPr>
-      <p:sp>
-        <p:nvSpPr>
-          <p:cNvPr id="2" name="Titel 1">
-            <a:extLst>
-              <a:ext uri="{FF2B5EF4-FFF2-40B4-BE49-F238E27FC236}">
-                <a16:creationId xmlns:a16="http://schemas.microsoft.com/office/drawing/2014/main" id="{ECD7B896-89B9-FA17-ACD4-DB9B86E906E0}"/>
-              </a:ext>
-            </a:extLst>
-          </p:cNvPr>
-          <p:cNvSpPr>
-            <a:spLocks noGrp="1"/>
-          </p:cNvSpPr>
-          <p:nvPr>
-            <p:ph type="title"/>
-          </p:nvPr>
-        </p:nvSpPr>
-        <p:spPr/>
-        <p:txBody>
-          <a:bodyPr/>
-          <a:lstStyle/>
-          <a:p>
-            <a:r>
-              <a:rPr lang="de-DE" dirty="0"/>
-              <a:t>ARIMA</a:t>
-            </a:r>
-          </a:p>
-        </p:txBody>
-      </p:sp>
-      <mc:AlternateContent xmlns:mc="http://schemas.openxmlformats.org/markup-compatibility/2006">
-        <mc:Choice xmlns:a14="http://schemas.microsoft.com/office/drawing/2010/main" Requires="a14">
-          <p:sp>
-            <p:nvSpPr>
-              <p:cNvPr id="3" name="Inhaltsplatzhalter 2">
-                <a:extLst>
-                  <a:ext uri="{FF2B5EF4-FFF2-40B4-BE49-F238E27FC236}">
-                    <a16:creationId xmlns:a16="http://schemas.microsoft.com/office/drawing/2014/main" id="{C04A1ED3-77ED-83D5-8D45-7512437366E8}"/>
-                  </a:ext>
-                </a:extLst>
-              </p:cNvPr>
-              <p:cNvSpPr>
-                <a:spLocks noGrp="1"/>
-              </p:cNvSpPr>
-              <p:nvPr>
-                <p:ph idx="1"/>
-              </p:nvPr>
-            </p:nvSpPr>
-            <p:spPr>
-              <a:xfrm>
-                <a:off x="838200" y="1825625"/>
-                <a:ext cx="10515600" cy="4667250"/>
-              </a:xfrm>
-            </p:spPr>
-            <p:txBody>
-              <a:bodyPr>
-                <a:normAutofit fontScale="85000" lnSpcReduction="20000"/>
-              </a:bodyPr>
-              <a:lstStyle/>
-              <a:p>
-                <a:pPr marL="0" indent="0">
-                  <a:buNone/>
-                </a:pPr>
-                <a:r>
-                  <a:rPr lang="de-DE" dirty="0" err="1"/>
-                  <a:t>idea</a:t>
-                </a:r>
-                <a:r>
-                  <a:rPr lang="de-DE" dirty="0"/>
-                  <a:t>: </a:t>
-                </a:r>
-                <a:r>
-                  <a:rPr lang="de-DE" dirty="0" err="1"/>
-                  <a:t>extend</a:t>
-                </a:r>
-                <a:r>
-                  <a:rPr lang="de-DE" dirty="0"/>
-                  <a:t> ARMA </a:t>
-                </a:r>
-                <a:r>
-                  <a:rPr lang="de-DE" dirty="0" err="1"/>
-                  <a:t>to</a:t>
-                </a:r>
-                <a:r>
-                  <a:rPr lang="de-DE" dirty="0"/>
-                  <a:t> handle non-</a:t>
-                </a:r>
-                <a:r>
-                  <a:rPr lang="de-DE" dirty="0" err="1"/>
-                  <a:t>stationary</a:t>
-                </a:r>
-                <a:r>
-                  <a:rPr lang="de-DE" dirty="0"/>
-                  <a:t> time </a:t>
-                </a:r>
-                <a:r>
-                  <a:rPr lang="de-DE" dirty="0" err="1"/>
-                  <a:t>series</a:t>
-                </a:r>
-                <a:r>
-                  <a:rPr lang="de-DE" dirty="0"/>
-                  <a:t> </a:t>
-                </a:r>
-              </a:p>
-              <a:p>
-                <a:pPr marL="0" indent="0">
-                  <a:buNone/>
-                </a:pPr>
-                <a:endParaRPr lang="de-DE" dirty="0"/>
-              </a:p>
-              <a:p>
-                <a:pPr marL="0" indent="0">
-                  <a:buNone/>
-                </a:pPr>
-                <a:r>
-                  <a:rPr lang="de-DE" dirty="0" err="1"/>
-                  <a:t>remove</a:t>
-                </a:r>
-                <a:r>
-                  <a:rPr lang="de-DE" dirty="0"/>
-                  <a:t> </a:t>
-                </a:r>
-                <a:r>
-                  <a:rPr lang="de-DE" dirty="0" err="1"/>
-                  <a:t>trend</a:t>
-                </a:r>
-                <a:r>
-                  <a:rPr lang="de-DE" dirty="0"/>
-                  <a:t> </a:t>
-                </a:r>
-                <a:r>
-                  <a:rPr lang="de-DE" dirty="0" err="1"/>
-                  <a:t>by</a:t>
-                </a:r>
-                <a:r>
-                  <a:rPr lang="de-DE" dirty="0"/>
-                  <a:t> </a:t>
-                </a:r>
-                <a:r>
-                  <a:rPr lang="de-DE" dirty="0" err="1"/>
-                  <a:t>differencing</a:t>
-                </a:r>
-                <a:r>
-                  <a:rPr lang="de-DE" dirty="0"/>
-                  <a:t>: </a:t>
-                </a:r>
-                <a14:m>
-                  <m:oMath xmlns:m="http://schemas.openxmlformats.org/officeDocument/2006/math">
-                    <m:sSubSup>
-                      <m:sSubSupPr>
-                        <m:ctrlPr>
-                          <a:rPr lang="de-DE" i="1" smtClean="0">
-                            <a:latin typeface="Cambria Math" panose="02040503050406030204" pitchFamily="18" charset="0"/>
-                          </a:rPr>
-                        </m:ctrlPr>
-                      </m:sSubSupPr>
-                      <m:e>
-                        <m:r>
-                          <a:rPr lang="de-DE" b="0" i="1" smtClean="0">
-                            <a:latin typeface="Cambria Math" panose="02040503050406030204" pitchFamily="18" charset="0"/>
-                          </a:rPr>
-                          <m:t>𝑦</m:t>
-                        </m:r>
-                      </m:e>
-                      <m:sub>
-                        <m:r>
-                          <a:rPr lang="de-DE" b="0" i="1" smtClean="0">
-                            <a:latin typeface="Cambria Math" panose="02040503050406030204" pitchFamily="18" charset="0"/>
-                          </a:rPr>
-                          <m:t>𝑡</m:t>
-                        </m:r>
-                      </m:sub>
-                      <m:sup>
-                        <m:r>
-                          <a:rPr lang="de-DE" b="0" i="1" smtClean="0">
-                            <a:latin typeface="Cambria Math" panose="02040503050406030204" pitchFamily="18" charset="0"/>
-                          </a:rPr>
-                          <m:t>′</m:t>
-                        </m:r>
-                      </m:sup>
-                    </m:sSubSup>
-                    <m:r>
-                      <a:rPr lang="de-DE" b="0" i="1" smtClean="0">
-                        <a:latin typeface="Cambria Math" panose="02040503050406030204" pitchFamily="18" charset="0"/>
-                      </a:rPr>
-                      <m:t>=</m:t>
-                    </m:r>
-                    <m:sSub>
-                      <m:sSubPr>
-                        <m:ctrlPr>
-                          <a:rPr lang="de-DE" i="1" smtClean="0">
-                            <a:latin typeface="Cambria Math" panose="02040503050406030204" pitchFamily="18" charset="0"/>
-                          </a:rPr>
-                        </m:ctrlPr>
-                      </m:sSubPr>
-                      <m:e>
-                        <m:r>
-                          <a:rPr lang="de-DE" b="0" i="1" smtClean="0">
-                            <a:latin typeface="Cambria Math" panose="02040503050406030204" pitchFamily="18" charset="0"/>
-                          </a:rPr>
-                          <m:t>𝑦</m:t>
-                        </m:r>
-                      </m:e>
-                      <m:sub>
-                        <m:r>
-                          <a:rPr lang="de-DE" b="0" i="1" smtClean="0">
-                            <a:latin typeface="Cambria Math" panose="02040503050406030204" pitchFamily="18" charset="0"/>
-                          </a:rPr>
-                          <m:t>𝑡</m:t>
-                        </m:r>
-                      </m:sub>
-                    </m:sSub>
-                    <m:r>
-                      <a:rPr lang="de-DE" b="0" i="1" smtClean="0">
-                        <a:latin typeface="Cambria Math" panose="02040503050406030204" pitchFamily="18" charset="0"/>
-                      </a:rPr>
-                      <m:t>−</m:t>
-                    </m:r>
-                    <m:sSub>
-                      <m:sSubPr>
-                        <m:ctrlPr>
-                          <a:rPr lang="de-DE" i="1" smtClean="0">
-                            <a:latin typeface="Cambria Math" panose="02040503050406030204" pitchFamily="18" charset="0"/>
-                          </a:rPr>
-                        </m:ctrlPr>
-                      </m:sSubPr>
-                      <m:e>
-                        <m:r>
-                          <a:rPr lang="de-DE" b="0" i="1" smtClean="0">
-                            <a:latin typeface="Cambria Math" panose="02040503050406030204" pitchFamily="18" charset="0"/>
-                          </a:rPr>
-                          <m:t>𝑦</m:t>
-                        </m:r>
-                      </m:e>
-                      <m:sub>
-                        <m:r>
-                          <a:rPr lang="de-DE" b="0" i="1" smtClean="0">
-                            <a:latin typeface="Cambria Math" panose="02040503050406030204" pitchFamily="18" charset="0"/>
-                          </a:rPr>
-                          <m:t>𝑡</m:t>
-                        </m:r>
-                        <m:r>
-                          <a:rPr lang="de-DE" b="0" i="1" smtClean="0">
-                            <a:latin typeface="Cambria Math" panose="02040503050406030204" pitchFamily="18" charset="0"/>
-                          </a:rPr>
-                          <m:t>−1</m:t>
-                        </m:r>
-                      </m:sub>
-                    </m:sSub>
-                  </m:oMath>
-                </a14:m>
-                <a:endParaRPr lang="de-DE" dirty="0"/>
-              </a:p>
-              <a:p>
-                <a:pPr marL="0" indent="0">
-                  <a:buNone/>
-                </a:pPr>
-                <a:r>
-                  <a:rPr lang="de-DE" dirty="0">
-                    <a:sym typeface="Wingdings" pitchFamily="2" charset="2"/>
-                  </a:rPr>
-                  <a:t> </a:t>
-                </a:r>
-                <a:r>
-                  <a:rPr lang="de-DE" dirty="0" err="1"/>
-                  <a:t>include</a:t>
-                </a:r>
-                <a:r>
-                  <a:rPr lang="de-DE" dirty="0"/>
-                  <a:t> </a:t>
-                </a:r>
-                <a:r>
-                  <a:rPr lang="de-DE" dirty="0" err="1"/>
-                  <a:t>integrated</a:t>
-                </a:r>
-                <a:r>
-                  <a:rPr lang="de-DE" dirty="0"/>
-                  <a:t> </a:t>
-                </a:r>
-                <a:r>
-                  <a:rPr lang="de-DE" dirty="0" err="1"/>
-                  <a:t>component</a:t>
-                </a:r>
-                <a:r>
-                  <a:rPr lang="de-DE" i="1" dirty="0"/>
-                  <a:t>: AR(p) + I(d) + MA(</a:t>
-                </a:r>
-                <a:r>
-                  <a:rPr lang="de-DE" i="1" dirty="0" err="1"/>
-                  <a:t>q</a:t>
-                </a:r>
-                <a:r>
-                  <a:rPr lang="de-DE" i="1" dirty="0"/>
-                  <a:t>) → ARIMA(</a:t>
-                </a:r>
-                <a:r>
-                  <a:rPr lang="de-DE" i="1" dirty="0" err="1"/>
-                  <a:t>p,q</a:t>
-                </a:r>
-                <a:r>
-                  <a:rPr lang="de-DE" i="1" dirty="0"/>
-                  <a:t>)</a:t>
-                </a:r>
-                <a:endParaRPr lang="de-DE" dirty="0"/>
-              </a:p>
-              <a:p>
-                <a:pPr marL="0" indent="0">
-                  <a:buNone/>
-                </a:pPr>
-                <a:endParaRPr lang="de-DE" dirty="0"/>
-              </a:p>
-              <a:p>
-                <a:pPr marL="0" indent="0">
-                  <a:buNone/>
-                </a:pPr>
-                <a:r>
-                  <a:rPr lang="de-DE" dirty="0"/>
-                  <a:t>additional </a:t>
-                </a:r>
-                <a:r>
-                  <a:rPr lang="de-DE" dirty="0" err="1"/>
-                  <a:t>extensions</a:t>
-                </a:r>
-                <a:r>
-                  <a:rPr lang="de-DE" dirty="0"/>
-                  <a:t>:</a:t>
-                </a:r>
-              </a:p>
-              <a:p>
-                <a:r>
-                  <a:rPr lang="de-DE" dirty="0"/>
-                  <a:t>SARIMA (</a:t>
-                </a:r>
-                <a:r>
-                  <a:rPr lang="de-DE" dirty="0" err="1"/>
-                  <a:t>Seasonal</a:t>
-                </a:r>
-                <a:r>
-                  <a:rPr lang="de-DE" dirty="0"/>
-                  <a:t> ARIMA): </a:t>
-                </a:r>
-                <a:r>
-                  <a:rPr lang="de-DE" dirty="0" err="1"/>
-                  <a:t>adds</a:t>
-                </a:r>
-                <a:r>
-                  <a:rPr lang="de-DE" dirty="0"/>
-                  <a:t> </a:t>
-                </a:r>
-                <a:r>
-                  <a:rPr lang="de-DE" dirty="0" err="1"/>
-                  <a:t>seasonal</a:t>
-                </a:r>
-                <a:r>
-                  <a:rPr lang="de-DE" dirty="0"/>
-                  <a:t> autoregressive, </a:t>
-                </a:r>
-                <a:r>
-                  <a:rPr lang="de-DE" dirty="0" err="1"/>
-                  <a:t>differencing</a:t>
-                </a:r>
-                <a:r>
-                  <a:rPr lang="de-DE" dirty="0"/>
-                  <a:t>, and </a:t>
-                </a:r>
-                <a:r>
-                  <a:rPr lang="de-DE" dirty="0" err="1"/>
-                  <a:t>moving-average</a:t>
-                </a:r>
-                <a:r>
-                  <a:rPr lang="de-DE" dirty="0"/>
-                  <a:t> </a:t>
-                </a:r>
-                <a:r>
-                  <a:rPr lang="de-DE" dirty="0" err="1"/>
-                  <a:t>terms</a:t>
-                </a:r>
-                <a:endParaRPr lang="de-DE" dirty="0"/>
-              </a:p>
-              <a:p>
-                <a:r>
-                  <a:rPr lang="de-DE" dirty="0"/>
-                  <a:t>SARIMAX (SARIMA + </a:t>
-                </a:r>
-                <a:r>
-                  <a:rPr lang="de-DE" dirty="0" err="1"/>
-                  <a:t>eXogenous</a:t>
-                </a:r>
-                <a:r>
-                  <a:rPr lang="de-DE" dirty="0"/>
-                  <a:t> variables): </a:t>
-                </a:r>
-                <a:r>
-                  <a:rPr lang="de-DE" dirty="0" err="1"/>
-                  <a:t>includes</a:t>
-                </a:r>
-                <a:r>
-                  <a:rPr lang="de-DE" dirty="0"/>
-                  <a:t> external </a:t>
-                </a:r>
-                <a:r>
-                  <a:rPr lang="de-DE" dirty="0" err="1"/>
-                  <a:t>information</a:t>
-                </a:r>
-                <a:r>
-                  <a:rPr lang="de-DE" dirty="0"/>
-                  <a:t> (e.g. </a:t>
-                </a:r>
-                <a:r>
-                  <a:rPr lang="de-DE" dirty="0" err="1"/>
-                  <a:t>weather</a:t>
-                </a:r>
-                <a:r>
-                  <a:rPr lang="de-DE" dirty="0"/>
-                  <a:t>, </a:t>
-                </a:r>
-                <a:r>
-                  <a:rPr lang="de-DE" dirty="0" err="1"/>
-                  <a:t>holidays</a:t>
-                </a:r>
-                <a:r>
-                  <a:rPr lang="de-DE" dirty="0"/>
-                  <a:t>, </a:t>
-                </a:r>
-                <a:r>
-                  <a:rPr lang="de-DE" dirty="0" err="1"/>
-                  <a:t>promotions</a:t>
-                </a:r>
-                <a:r>
-                  <a:rPr lang="de-DE" dirty="0"/>
-                  <a:t>)</a:t>
-                </a:r>
-              </a:p>
-              <a:p>
-                <a:pPr marL="0" indent="0">
-                  <a:buNone/>
-                </a:pPr>
-                <a:endParaRPr lang="de-DE" dirty="0"/>
-              </a:p>
-              <a:p>
-                <a:pPr marL="0" indent="0">
-                  <a:buNone/>
-                </a:pPr>
-                <a:r>
-                  <a:rPr lang="de-DE" dirty="0" err="1"/>
-                  <a:t>key</a:t>
-                </a:r>
-                <a:r>
-                  <a:rPr lang="de-DE" dirty="0"/>
-                  <a:t> </a:t>
-                </a:r>
-                <a:r>
-                  <a:rPr lang="de-DE" dirty="0" err="1"/>
-                  <a:t>assumption</a:t>
-                </a:r>
-                <a:r>
-                  <a:rPr lang="de-DE" dirty="0"/>
-                  <a:t>: after </a:t>
-                </a:r>
-                <a:r>
-                  <a:rPr lang="de-DE" dirty="0" err="1"/>
-                  <a:t>differencing</a:t>
-                </a:r>
-                <a:r>
-                  <a:rPr lang="de-DE" dirty="0"/>
-                  <a:t> (and </a:t>
-                </a:r>
-                <a:r>
-                  <a:rPr lang="de-DE" dirty="0" err="1"/>
-                  <a:t>seasonal</a:t>
-                </a:r>
-                <a:r>
-                  <a:rPr lang="de-DE" dirty="0"/>
-                  <a:t> </a:t>
-                </a:r>
-                <a:r>
-                  <a:rPr lang="de-DE" dirty="0" err="1"/>
-                  <a:t>adjustment</a:t>
-                </a:r>
-                <a:r>
-                  <a:rPr lang="de-DE" dirty="0"/>
-                  <a:t>, </a:t>
-                </a:r>
-                <a:r>
-                  <a:rPr lang="de-DE" dirty="0" err="1"/>
-                  <a:t>if</a:t>
-                </a:r>
-                <a:r>
-                  <a:rPr lang="de-DE" dirty="0"/>
-                  <a:t> </a:t>
-                </a:r>
-                <a:r>
-                  <a:rPr lang="de-DE" dirty="0" err="1"/>
-                  <a:t>needed</a:t>
-                </a:r>
-                <a:r>
-                  <a:rPr lang="de-DE" dirty="0"/>
-                  <a:t>), </a:t>
-                </a:r>
-                <a:r>
-                  <a:rPr lang="de-DE" dirty="0" err="1"/>
-                  <a:t>the</a:t>
-                </a:r>
-                <a:r>
-                  <a:rPr lang="de-DE" dirty="0"/>
-                  <a:t> </a:t>
-                </a:r>
-                <a:r>
-                  <a:rPr lang="de-DE" dirty="0" err="1"/>
-                  <a:t>series</a:t>
-                </a:r>
-                <a:r>
-                  <a:rPr lang="de-DE" dirty="0"/>
-                  <a:t> </a:t>
-                </a:r>
-                <a:r>
-                  <a:rPr lang="de-DE" dirty="0" err="1"/>
-                  <a:t>should</a:t>
-                </a:r>
-                <a:r>
-                  <a:rPr lang="de-DE" dirty="0"/>
-                  <a:t> </a:t>
-                </a:r>
-                <a:r>
-                  <a:rPr lang="de-DE" dirty="0" err="1"/>
-                  <a:t>be</a:t>
-                </a:r>
-                <a:r>
-                  <a:rPr lang="de-DE" dirty="0"/>
-                  <a:t> </a:t>
-                </a:r>
-                <a:r>
-                  <a:rPr lang="de-DE" dirty="0" err="1"/>
-                  <a:t>approximately</a:t>
-                </a:r>
-                <a:r>
-                  <a:rPr lang="de-DE" dirty="0"/>
-                  <a:t> </a:t>
-                </a:r>
-                <a:r>
-                  <a:rPr lang="de-DE" dirty="0" err="1"/>
-                  <a:t>stationary</a:t>
-                </a:r>
-                <a:endParaRPr lang="de-DE" dirty="0"/>
-              </a:p>
-            </p:txBody>
-          </p:sp>
-        </mc:Choice>
-        <mc:Fallback>
-          <p:sp>
-            <p:nvSpPr>
-              <p:cNvPr id="3" name="Inhaltsplatzhalter 2">
-                <a:extLst>
-                  <a:ext uri="{FF2B5EF4-FFF2-40B4-BE49-F238E27FC236}">
-                    <a16:creationId xmlns:a16="http://schemas.microsoft.com/office/drawing/2014/main" id="{C04A1ED3-77ED-83D5-8D45-7512437366E8}"/>
-                  </a:ext>
-                </a:extLst>
-              </p:cNvPr>
-              <p:cNvSpPr>
-                <a:spLocks noGrp="1" noRot="1" noChangeAspect="1" noMove="1" noResize="1" noEditPoints="1" noAdjustHandles="1" noChangeArrowheads="1" noChangeShapeType="1" noTextEdit="1"/>
-              </p:cNvSpPr>
-              <p:nvPr>
-                <p:ph idx="1"/>
-              </p:nvPr>
-            </p:nvSpPr>
-            <p:spPr>
-              <a:xfrm>
-                <a:off x="838200" y="1825625"/>
-                <a:ext cx="10515600" cy="4667250"/>
-              </a:xfrm>
-              <a:blipFill>
-                <a:blip r:embed="rId2"/>
-                <a:stretch>
-                  <a:fillRect l="-965" t="-2981" r="-1327" b="-1084"/>
-                </a:stretch>
-              </a:blipFill>
-            </p:spPr>
-            <p:txBody>
-              <a:bodyPr/>
-              <a:lstStyle/>
-              <a:p>
-                <a:r>
-                  <a:rPr lang="de-DE">
-                    <a:noFill/>
-                  </a:rPr>
-                  <a:t> </a:t>
-                </a:r>
-              </a:p>
-            </p:txBody>
-          </p:sp>
-        </mc:Fallback>
-      </mc:AlternateContent>
-      <p:sp>
-        <p:nvSpPr>
-          <p:cNvPr id="4" name="Foliennummernplatzhalter 3">
-            <a:extLst>
-              <a:ext uri="{FF2B5EF4-FFF2-40B4-BE49-F238E27FC236}">
-                <a16:creationId xmlns:a16="http://schemas.microsoft.com/office/drawing/2014/main" id="{611C9357-B7E6-EAA9-0E48-DB30D67C720C}"/>
-              </a:ext>
-            </a:extLst>
-          </p:cNvPr>
-          <p:cNvSpPr>
-            <a:spLocks noGrp="1"/>
-          </p:cNvSpPr>
-          <p:nvPr>
-            <p:ph type="sldNum" sz="quarter" idx="12"/>
-          </p:nvPr>
-        </p:nvSpPr>
-        <p:spPr/>
-        <p:txBody>
-          <a:bodyPr/>
-          <a:lstStyle/>
-          <a:p>
-            <a:fld id="{3D4C94FE-FF23-4504-88E9-14D481113291}" type="slidenum">
-              <a:rPr lang="en-GB" smtClean="0"/>
-              <a:t>9</a:t>
-            </a:fld>
-            <a:endParaRPr lang="en-GB"/>
-          </a:p>
-        </p:txBody>
-      </p:sp>
-      <mc:AlternateContent xmlns:mc="http://schemas.openxmlformats.org/markup-compatibility/2006" xmlns:a14="http://schemas.microsoft.com/office/drawing/2010/main">
-        <mc:Choice Requires="a14">
-          <p:sp>
-            <p:nvSpPr>
-              <p:cNvPr id="6" name="Textfeld 5">
-                <a:extLst>
-                  <a:ext uri="{FF2B5EF4-FFF2-40B4-BE49-F238E27FC236}">
-                    <a16:creationId xmlns:a16="http://schemas.microsoft.com/office/drawing/2014/main" id="{4612F828-909D-AA74-A1B0-E294B13FA0FF}"/>
-                  </a:ext>
-                </a:extLst>
-              </p:cNvPr>
-              <p:cNvSpPr txBox="1"/>
-              <p:nvPr/>
-            </p:nvSpPr>
-            <p:spPr>
-              <a:xfrm>
-                <a:off x="8124207" y="2117685"/>
-                <a:ext cx="4067793" cy="769441"/>
-              </a:xfrm>
-              <a:prstGeom prst="rect">
-                <a:avLst/>
-              </a:prstGeom>
-              <a:noFill/>
-            </p:spPr>
-            <p:txBody>
-              <a:bodyPr wrap="square">
-                <a:spAutoFit/>
-              </a:bodyPr>
-              <a:lstStyle/>
-              <a:p>
-                <a14:m>
-                  <m:oMath xmlns:m="http://schemas.openxmlformats.org/officeDocument/2006/math">
-                    <m:r>
-                      <a:rPr lang="de-DE" sz="2200" b="0" i="1" smtClean="0">
-                        <a:latin typeface="Cambria Math" panose="02040503050406030204" pitchFamily="18" charset="0"/>
-                      </a:rPr>
-                      <m:t>𝑑</m:t>
-                    </m:r>
-                    <m:r>
-                      <a:rPr lang="de-DE" sz="2200" b="0" i="1" smtClean="0">
-                        <a:latin typeface="Cambria Math" panose="02040503050406030204" pitchFamily="18" charset="0"/>
-                      </a:rPr>
-                      <m:t>=1</m:t>
-                    </m:r>
-                  </m:oMath>
-                </a14:m>
-                <a:r>
-                  <a:rPr lang="de-DE" sz="2200" dirty="0"/>
-                  <a:t> : linear </a:t>
-                </a:r>
-                <a:r>
-                  <a:rPr lang="de-DE" sz="2200" dirty="0" err="1"/>
-                  <a:t>trend</a:t>
-                </a:r>
-                <a:endParaRPr lang="de-DE" sz="2200" i="1" dirty="0">
-                  <a:latin typeface="Cambria Math" panose="02040503050406030204" pitchFamily="18" charset="0"/>
-                </a:endParaRPr>
-              </a:p>
-              <a:p>
-                <a:pPr/>
-                <a14:m>
-                  <m:oMathPara xmlns:m="http://schemas.openxmlformats.org/officeDocument/2006/math">
-                    <m:oMathParaPr>
-                      <m:jc m:val="left"/>
-                    </m:oMathParaPr>
-                    <m:oMath xmlns:m="http://schemas.openxmlformats.org/officeDocument/2006/math">
-                      <m:r>
-                        <a:rPr lang="de-DE" sz="2200" b="0" i="1" smtClean="0">
-                          <a:latin typeface="Cambria Math" panose="02040503050406030204" pitchFamily="18" charset="0"/>
-                        </a:rPr>
-                        <m:t>𝑑</m:t>
-                      </m:r>
-                      <m:r>
-                        <a:rPr lang="de-DE" sz="2200" b="0" i="1" smtClean="0">
-                          <a:latin typeface="Cambria Math" panose="02040503050406030204" pitchFamily="18" charset="0"/>
-                        </a:rPr>
-                        <m:t>=2: </m:t>
-                      </m:r>
-                      <m:sSubSup>
-                        <m:sSubSupPr>
-                          <m:ctrlPr>
-                            <a:rPr lang="de-DE" sz="2200" i="1" smtClean="0">
-                              <a:latin typeface="Cambria Math" panose="02040503050406030204" pitchFamily="18" charset="0"/>
-                            </a:rPr>
-                          </m:ctrlPr>
-                        </m:sSubSupPr>
-                        <m:e>
-                          <m:r>
-                            <a:rPr lang="de-DE" sz="2200" b="0" i="1" smtClean="0">
-                              <a:latin typeface="Cambria Math" panose="02040503050406030204" pitchFamily="18" charset="0"/>
-                            </a:rPr>
-                            <m:t>𝑦</m:t>
-                          </m:r>
-                        </m:e>
-                        <m:sub>
-                          <m:r>
-                            <a:rPr lang="de-DE" sz="2200" b="0" i="1" smtClean="0">
-                              <a:latin typeface="Cambria Math" panose="02040503050406030204" pitchFamily="18" charset="0"/>
-                            </a:rPr>
-                            <m:t>𝑡</m:t>
-                          </m:r>
-                        </m:sub>
-                        <m:sup>
-                          <m:r>
-                            <a:rPr lang="de-DE" sz="2200" b="0" i="1" smtClean="0">
-                              <a:latin typeface="Cambria Math" panose="02040503050406030204" pitchFamily="18" charset="0"/>
-                            </a:rPr>
-                            <m:t>′</m:t>
-                          </m:r>
-                        </m:sup>
-                      </m:sSubSup>
-                      <m:r>
-                        <a:rPr lang="de-DE" sz="2200" b="0" i="1" smtClean="0">
-                          <a:latin typeface="Cambria Math" panose="02040503050406030204" pitchFamily="18" charset="0"/>
-                        </a:rPr>
-                        <m:t>=</m:t>
-                      </m:r>
-                      <m:sSub>
-                        <m:sSubPr>
-                          <m:ctrlPr>
-                            <a:rPr lang="de-DE" sz="2200" b="0" i="1" smtClean="0">
-                              <a:latin typeface="Cambria Math" panose="02040503050406030204" pitchFamily="18" charset="0"/>
-                            </a:rPr>
-                          </m:ctrlPr>
-                        </m:sSubPr>
-                        <m:e>
-                          <m:r>
-                            <a:rPr lang="de-DE" sz="2200" b="0" i="1" smtClean="0">
-                              <a:latin typeface="Cambria Math" panose="02040503050406030204" pitchFamily="18" charset="0"/>
-                            </a:rPr>
-                            <m:t>𝑦</m:t>
-                          </m:r>
-                        </m:e>
-                        <m:sub>
-                          <m:r>
-                            <a:rPr lang="de-DE" sz="2200" b="0" i="1" smtClean="0">
-                              <a:latin typeface="Cambria Math" panose="02040503050406030204" pitchFamily="18" charset="0"/>
-                            </a:rPr>
-                            <m:t>𝑡</m:t>
-                          </m:r>
-                        </m:sub>
-                      </m:sSub>
-                      <m:r>
-                        <a:rPr lang="de-DE" sz="2200" b="0" i="1" smtClean="0">
-                          <a:latin typeface="Cambria Math" panose="02040503050406030204" pitchFamily="18" charset="0"/>
-                        </a:rPr>
-                        <m:t>−2</m:t>
-                      </m:r>
-                      <m:r>
-                        <a:rPr lang="de-DE" sz="2200" b="0" i="1" smtClean="0">
-                          <a:latin typeface="Cambria Math" panose="02040503050406030204" pitchFamily="18" charset="0"/>
-                          <a:ea typeface="Cambria Math" panose="02040503050406030204" pitchFamily="18" charset="0"/>
-                        </a:rPr>
-                        <m:t>∙</m:t>
-                      </m:r>
-                      <m:sSub>
-                        <m:sSubPr>
-                          <m:ctrlPr>
-                            <a:rPr lang="de-DE" sz="2200" b="0" i="1" smtClean="0">
-                              <a:latin typeface="Cambria Math" panose="02040503050406030204" pitchFamily="18" charset="0"/>
-                            </a:rPr>
-                          </m:ctrlPr>
-                        </m:sSubPr>
-                        <m:e>
-                          <m:r>
-                            <a:rPr lang="de-DE" sz="2200" b="0" i="1" smtClean="0">
-                              <a:latin typeface="Cambria Math" panose="02040503050406030204" pitchFamily="18" charset="0"/>
-                            </a:rPr>
-                            <m:t>𝑦</m:t>
-                          </m:r>
-                        </m:e>
-                        <m:sub>
-                          <m:r>
-                            <a:rPr lang="de-DE" sz="2200" b="0" i="1" smtClean="0">
-                              <a:latin typeface="Cambria Math" panose="02040503050406030204" pitchFamily="18" charset="0"/>
-                            </a:rPr>
-                            <m:t>𝑡</m:t>
-                          </m:r>
-                          <m:r>
-                            <a:rPr lang="de-DE" sz="2200" b="0" i="1" smtClean="0">
-                              <a:latin typeface="Cambria Math" panose="02040503050406030204" pitchFamily="18" charset="0"/>
-                            </a:rPr>
-                            <m:t>−1</m:t>
-                          </m:r>
-                        </m:sub>
-                      </m:sSub>
-                      <m:r>
-                        <a:rPr lang="de-DE" sz="2200" b="0" i="1" smtClean="0">
-                          <a:latin typeface="Cambria Math" panose="02040503050406030204" pitchFamily="18" charset="0"/>
-                        </a:rPr>
-                        <m:t>+</m:t>
-                      </m:r>
-                      <m:sSub>
-                        <m:sSubPr>
-                          <m:ctrlPr>
-                            <a:rPr lang="de-DE" sz="2200" i="1">
-                              <a:latin typeface="Cambria Math" panose="02040503050406030204" pitchFamily="18" charset="0"/>
-                            </a:rPr>
-                          </m:ctrlPr>
-                        </m:sSubPr>
-                        <m:e>
-                          <m:r>
-                            <a:rPr lang="de-DE" sz="2200" i="1">
-                              <a:latin typeface="Cambria Math" panose="02040503050406030204" pitchFamily="18" charset="0"/>
-                            </a:rPr>
-                            <m:t>𝑦</m:t>
-                          </m:r>
-                        </m:e>
-                        <m:sub>
-                          <m:r>
-                            <a:rPr lang="de-DE" sz="2200" i="1">
-                              <a:latin typeface="Cambria Math" panose="02040503050406030204" pitchFamily="18" charset="0"/>
-                            </a:rPr>
-                            <m:t>𝑡</m:t>
-                          </m:r>
-                          <m:r>
-                            <a:rPr lang="de-DE" sz="2200" i="1">
-                              <a:latin typeface="Cambria Math" panose="02040503050406030204" pitchFamily="18" charset="0"/>
-                            </a:rPr>
-                            <m:t>−2</m:t>
-                          </m:r>
-                        </m:sub>
-                      </m:sSub>
-                    </m:oMath>
-                  </m:oMathPara>
-                </a14:m>
-                <a:endParaRPr lang="de-DE" sz="2200" dirty="0"/>
-              </a:p>
-            </p:txBody>
-          </p:sp>
-        </mc:Choice>
-        <mc:Fallback xmlns="">
-          <p:sp>
-            <p:nvSpPr>
-              <p:cNvPr id="6" name="Textfeld 5">
-                <a:extLst>
-                  <a:ext uri="{FF2B5EF4-FFF2-40B4-BE49-F238E27FC236}">
-                    <a16:creationId xmlns:a16="http://schemas.microsoft.com/office/drawing/2014/main" id="{4612F828-909D-AA74-A1B0-E294B13FA0FF}"/>
-                  </a:ext>
-                </a:extLst>
-              </p:cNvPr>
-              <p:cNvSpPr txBox="1">
-                <a:spLocks noRot="1" noChangeAspect="1" noMove="1" noResize="1" noEditPoints="1" noAdjustHandles="1" noChangeArrowheads="1" noChangeShapeType="1" noTextEdit="1"/>
-              </p:cNvSpPr>
-              <p:nvPr/>
-            </p:nvSpPr>
-            <p:spPr>
-              <a:xfrm>
-                <a:off x="8124207" y="2117685"/>
-                <a:ext cx="4067793" cy="769441"/>
-              </a:xfrm>
-              <a:prstGeom prst="rect">
-                <a:avLst/>
-              </a:prstGeom>
-              <a:blipFill>
-                <a:blip r:embed="rId3"/>
-                <a:stretch>
-                  <a:fillRect t="-4839" b="-9677"/>
-                </a:stretch>
-              </a:blipFill>
-            </p:spPr>
-            <p:txBody>
-              <a:bodyPr/>
-              <a:lstStyle/>
-              <a:p>
-                <a:r>
-                  <a:rPr lang="de-DE">
-                    <a:noFill/>
-                  </a:rPr>
-                  <a:t> </a:t>
-                </a:r>
-              </a:p>
-            </p:txBody>
-          </p:sp>
-        </mc:Fallback>
-      </mc:AlternateContent>
-      <p:cxnSp>
-        <p:nvCxnSpPr>
-          <p:cNvPr id="8" name="Gerade Verbindung mit Pfeil 7">
-            <a:extLst>
-              <a:ext uri="{FF2B5EF4-FFF2-40B4-BE49-F238E27FC236}">
-                <a16:creationId xmlns:a16="http://schemas.microsoft.com/office/drawing/2014/main" id="{BB3450F9-7C7A-8AF6-4B61-AFFEB65FD6F4}"/>
-              </a:ext>
-            </a:extLst>
-          </p:cNvPr>
-          <p:cNvCxnSpPr>
-            <a:cxnSpLocks/>
-          </p:cNvCxnSpPr>
-          <p:nvPr/>
-        </p:nvCxnSpPr>
-        <p:spPr>
-          <a:xfrm flipH="1">
-            <a:off x="6730409" y="2349795"/>
-            <a:ext cx="1393798" cy="318977"/>
-          </a:xfrm>
-          <a:prstGeom prst="straightConnector1">
-            <a:avLst/>
-          </a:prstGeom>
-          <a:ln>
-            <a:tailEnd type="triangle"/>
-          </a:ln>
-        </p:spPr>
-        <p:style>
-          <a:lnRef idx="2">
-            <a:schemeClr val="accent1"/>
-          </a:lnRef>
-          <a:fillRef idx="0">
-            <a:schemeClr val="accent1"/>
-          </a:fillRef>
-          <a:effectRef idx="1">
-            <a:schemeClr val="accent1"/>
-          </a:effectRef>
-          <a:fontRef idx="minor">
-            <a:schemeClr val="tx1"/>
-          </a:fontRef>
-        </p:style>
-      </p:cxnSp>
-    </p:spTree>
-    <p:extLst>
-      <p:ext uri="{BB962C8B-B14F-4D97-AF65-F5344CB8AC3E}">
-        <p14:creationId xmlns:p14="http://schemas.microsoft.com/office/powerpoint/2010/main" val="2539649198"/>
       </p:ext>
     </p:extLst>
   </p:cSld>
